--- a/documentacion_extra/presentacion/cuidaDos.pptx
+++ b/documentacion_extra/presentacion/cuidaDos.pptx
@@ -17,43 +17,37 @@
     <p:sldId id="265" r:id="rId15"/>
     <p:sldId id="266" r:id="rId16"/>
     <p:sldId id="267" r:id="rId17"/>
-    <p:sldId id="268" r:id="rId18"/>
-    <p:sldId id="269" r:id="rId19"/>
   </p:sldIdLst>
   <p:sldSz cx="18288000" cy="10287000"/>
   <p:notesSz cx="6858000" cy="9144000"/>
   <p:embeddedFontLst>
     <p:embeddedFont>
       <p:font typeface="Montserrat Bold" charset="1" panose="00000800000000000000"/>
+      <p:regular r:id="rId18"/>
+    </p:embeddedFont>
+    <p:embeddedFont>
+      <p:font typeface="Montserrat" charset="1" panose="00000500000000000000"/>
+      <p:regular r:id="rId19"/>
+    </p:embeddedFont>
+    <p:embeddedFont>
+      <p:font typeface="Fraunces Bold" charset="1" panose="00000000000000000000"/>
       <p:regular r:id="rId20"/>
     </p:embeddedFont>
     <p:embeddedFont>
-      <p:font typeface="Montserrat" charset="1" panose="00000500000000000000"/>
+      <p:font typeface="Poppins" charset="1" panose="00000500000000000000"/>
       <p:regular r:id="rId21"/>
     </p:embeddedFont>
     <p:embeddedFont>
-      <p:font typeface="Fraunces Bold" charset="1" panose="00000000000000000000"/>
+      <p:font typeface="Open Sans" charset="1" panose="020B0606030504020204"/>
       <p:regular r:id="rId22"/>
     </p:embeddedFont>
     <p:embeddedFont>
-      <p:font typeface="Poppins" charset="1" panose="00000500000000000000"/>
+      <p:font typeface="Poppins Bold" charset="1" panose="00000800000000000000"/>
       <p:regular r:id="rId23"/>
     </p:embeddedFont>
     <p:embeddedFont>
-      <p:font typeface="Open Sans" charset="1" panose="020B0606030504020204"/>
+      <p:font typeface="Fraunces" charset="1" panose="00000000000000000000"/>
       <p:regular r:id="rId24"/>
-    </p:embeddedFont>
-    <p:embeddedFont>
-      <p:font typeface="Poppins Bold" charset="1" panose="00000800000000000000"/>
-      <p:regular r:id="rId25"/>
-    </p:embeddedFont>
-    <p:embeddedFont>
-      <p:font typeface="Fraunces" charset="1" panose="00000000000000000000"/>
-      <p:regular r:id="rId26"/>
-    </p:embeddedFont>
-    <p:embeddedFont>
-      <p:font typeface="Archivo Black" charset="1" panose="020B0A03020202020B04"/>
-      <p:regular r:id="rId27"/>
     </p:embeddedFont>
   </p:embeddedFontLst>
   <p:defaultTextStyle>
@@ -3333,55 +3327,9 @@
           </a:blipFill>
         </p:spPr>
       </p:sp>
-      <p:sp>
-        <p:nvSpPr>
-          <p:cNvPr name="Freeform 8" id="8"/>
-          <p:cNvSpPr/>
-          <p:nvPr/>
-        </p:nvSpPr>
-        <p:spPr>
-          <a:xfrm flipH="false" flipV="false" rot="0">
-            <a:off x="12833394" y="6585475"/>
-            <a:ext cx="2011615" cy="2011615"/>
-          </a:xfrm>
-          <a:custGeom>
-            <a:avLst/>
-            <a:gdLst/>
-            <a:ahLst/>
-            <a:cxnLst/>
-            <a:rect r="r" b="b" t="t" l="l"/>
-            <a:pathLst>
-              <a:path h="2011615" w="2011615">
-                <a:moveTo>
-                  <a:pt x="0" y="0"/>
-                </a:moveTo>
-                <a:lnTo>
-                  <a:pt x="2011614" y="0"/>
-                </a:lnTo>
-                <a:lnTo>
-                  <a:pt x="2011614" y="2011615"/>
-                </a:lnTo>
-                <a:lnTo>
-                  <a:pt x="0" y="2011615"/>
-                </a:lnTo>
-                <a:lnTo>
-                  <a:pt x="0" y="0"/>
-                </a:lnTo>
-                <a:close/>
-              </a:path>
-            </a:pathLst>
-          </a:custGeom>
-          <a:blipFill>
-            <a:blip r:embed="rId5"/>
-            <a:stretch>
-              <a:fillRect l="0" t="0" r="0" b="0"/>
-            </a:stretch>
-          </a:blipFill>
-        </p:spPr>
-      </p:sp>
       <p:grpSp>
         <p:nvGrpSpPr>
-          <p:cNvPr name="Group 9" id="9"/>
+          <p:cNvPr name="Group 8" id="8"/>
           <p:cNvGrpSpPr/>
           <p:nvPr/>
         </p:nvGrpSpPr>
@@ -3395,7 +3343,7 @@
         </p:grpSpPr>
         <p:sp>
           <p:nvSpPr>
-            <p:cNvPr name="Freeform 10" id="10"/>
+            <p:cNvPr name="Freeform 9" id="9"/>
             <p:cNvSpPr/>
             <p:nvPr/>
           </p:nvSpPr>
@@ -3447,7 +3395,7 @@
         </p:sp>
         <p:sp>
           <p:nvSpPr>
-            <p:cNvPr name="TextBox 11" id="11"/>
+            <p:cNvPr name="TextBox 10" id="10"/>
             <p:cNvSpPr txBox="true"/>
             <p:nvPr/>
           </p:nvSpPr>
@@ -3473,6 +3421,52 @@
           </p:txBody>
         </p:sp>
       </p:grpSp>
+      <p:sp>
+        <p:nvSpPr>
+          <p:cNvPr name="Freeform 11" id="11"/>
+          <p:cNvSpPr/>
+          <p:nvPr/>
+        </p:nvSpPr>
+        <p:spPr>
+          <a:xfrm flipH="false" flipV="false" rot="0">
+            <a:off x="13118589" y="6896711"/>
+            <a:ext cx="1699666" cy="1699666"/>
+          </a:xfrm>
+          <a:custGeom>
+            <a:avLst/>
+            <a:gdLst/>
+            <a:ahLst/>
+            <a:cxnLst/>
+            <a:rect r="r" b="b" t="t" l="l"/>
+            <a:pathLst>
+              <a:path h="1699666" w="1699666">
+                <a:moveTo>
+                  <a:pt x="0" y="0"/>
+                </a:moveTo>
+                <a:lnTo>
+                  <a:pt x="1699666" y="0"/>
+                </a:lnTo>
+                <a:lnTo>
+                  <a:pt x="1699666" y="1699666"/>
+                </a:lnTo>
+                <a:lnTo>
+                  <a:pt x="0" y="1699666"/>
+                </a:lnTo>
+                <a:lnTo>
+                  <a:pt x="0" y="0"/>
+                </a:lnTo>
+                <a:close/>
+              </a:path>
+            </a:pathLst>
+          </a:custGeom>
+          <a:blipFill>
+            <a:blip r:embed="rId5"/>
+            <a:stretch>
+              <a:fillRect l="0" t="0" r="0" b="0"/>
+            </a:stretch>
+          </a:blipFill>
+        </p:spPr>
+      </p:sp>
       <p:sp>
         <p:nvSpPr>
           <p:cNvPr name="TextBox 12" id="12"/>
@@ -3700,593 +3694,7 @@
         </p:nvGrpSpPr>
         <p:grpSpPr>
           <a:xfrm rot="0">
-            <a:off x="6137244" y="580867"/>
-            <a:ext cx="3910547" cy="895666"/>
-            <a:chOff x="0" y="0"/>
-            <a:chExt cx="909243" cy="208252"/>
-          </a:xfrm>
-        </p:grpSpPr>
-        <p:sp>
-          <p:nvSpPr>
-            <p:cNvPr name="Freeform 6" id="6"/>
-            <p:cNvSpPr/>
-            <p:nvPr/>
-          </p:nvSpPr>
-          <p:spPr>
-            <a:xfrm flipH="false" flipV="false" rot="0">
-              <a:off x="0" y="0"/>
-              <a:ext cx="909243" cy="208252"/>
-            </a:xfrm>
-            <a:custGeom>
-              <a:avLst/>
-              <a:gdLst/>
-              <a:ahLst/>
-              <a:cxnLst/>
-              <a:rect r="r" b="b" t="t" l="l"/>
-              <a:pathLst>
-                <a:path h="208252" w="909243">
-                  <a:moveTo>
-                    <a:pt x="15838" y="0"/>
-                  </a:moveTo>
-                  <a:lnTo>
-                    <a:pt x="893405" y="0"/>
-                  </a:lnTo>
-                  <a:cubicBezTo>
-                    <a:pt x="897605" y="0"/>
-                    <a:pt x="901634" y="1669"/>
-                    <a:pt x="904604" y="4639"/>
-                  </a:cubicBezTo>
-                  <a:cubicBezTo>
-                    <a:pt x="907574" y="7609"/>
-                    <a:pt x="909243" y="11638"/>
-                    <a:pt x="909243" y="15838"/>
-                  </a:cubicBezTo>
-                  <a:lnTo>
-                    <a:pt x="909243" y="192414"/>
-                  </a:lnTo>
-                  <a:cubicBezTo>
-                    <a:pt x="909243" y="196614"/>
-                    <a:pt x="907574" y="200643"/>
-                    <a:pt x="904604" y="203613"/>
-                  </a:cubicBezTo>
-                  <a:cubicBezTo>
-                    <a:pt x="901634" y="206583"/>
-                    <a:pt x="897605" y="208252"/>
-                    <a:pt x="893405" y="208252"/>
-                  </a:cubicBezTo>
-                  <a:lnTo>
-                    <a:pt x="15838" y="208252"/>
-                  </a:lnTo>
-                  <a:cubicBezTo>
-                    <a:pt x="11638" y="208252"/>
-                    <a:pt x="7609" y="206583"/>
-                    <a:pt x="4639" y="203613"/>
-                  </a:cubicBezTo>
-                  <a:cubicBezTo>
-                    <a:pt x="1669" y="200643"/>
-                    <a:pt x="0" y="196614"/>
-                    <a:pt x="0" y="192414"/>
-                  </a:cubicBezTo>
-                  <a:lnTo>
-                    <a:pt x="0" y="15838"/>
-                  </a:lnTo>
-                  <a:cubicBezTo>
-                    <a:pt x="0" y="11638"/>
-                    <a:pt x="1669" y="7609"/>
-                    <a:pt x="4639" y="4639"/>
-                  </a:cubicBezTo>
-                  <a:cubicBezTo>
-                    <a:pt x="7609" y="1669"/>
-                    <a:pt x="11638" y="0"/>
-                    <a:pt x="15838" y="0"/>
-                  </a:cubicBezTo>
-                  <a:close/>
-                </a:path>
-              </a:pathLst>
-            </a:custGeom>
-            <a:solidFill>
-              <a:srgbClr val="93D14B"/>
-            </a:solidFill>
-          </p:spPr>
-        </p:sp>
-        <p:sp>
-          <p:nvSpPr>
-            <p:cNvPr name="TextBox 7" id="7"/>
-            <p:cNvSpPr txBox="true"/>
-            <p:nvPr/>
-          </p:nvSpPr>
-          <p:spPr>
-            <a:xfrm>
-              <a:off x="0" y="-76200"/>
-              <a:ext cx="909243" cy="284452"/>
-            </a:xfrm>
-            <a:prstGeom prst="rect">
-              <a:avLst/>
-            </a:prstGeom>
-          </p:spPr>
-          <p:txBody>
-            <a:bodyPr anchor="t" rtlCol="false" tIns="50800" lIns="50800" bIns="50800" rIns="50800"/>
-            <a:lstStyle/>
-            <a:p>
-              <a:pPr algn="ctr" marL="0" indent="0" lvl="0">
-                <a:lnSpc>
-                  <a:spcPts val="4114"/>
-                </a:lnSpc>
-                <a:spcBef>
-                  <a:spcPct val="0"/>
-                </a:spcBef>
-              </a:pPr>
-              <a:r>
-                <a:rPr lang="en-US" b="true" sz="2981" spc="29">
-                  <a:solidFill>
-                    <a:srgbClr val="FFFFFF"/>
-                  </a:solidFill>
-                  <a:latin typeface="Poppins Bold"/>
-                  <a:ea typeface="Poppins Bold"/>
-                  <a:cs typeface="Poppins Bold"/>
-                  <a:sym typeface="Poppins Bold"/>
-                </a:rPr>
-                <a:t>ADMIN</a:t>
-              </a:r>
-            </a:p>
-          </p:txBody>
-        </p:sp>
-      </p:grpSp>
-      <p:sp>
-        <p:nvSpPr>
-          <p:cNvPr name="Freeform 8" id="8"/>
-          <p:cNvSpPr/>
-          <p:nvPr/>
-        </p:nvSpPr>
-        <p:spPr>
-          <a:xfrm flipH="false" flipV="false" rot="0">
-            <a:off x="3853242" y="3408876"/>
-            <a:ext cx="8153925" cy="4714137"/>
-          </a:xfrm>
-          <a:custGeom>
-            <a:avLst/>
-            <a:gdLst/>
-            <a:ahLst/>
-            <a:cxnLst/>
-            <a:rect r="r" b="b" t="t" l="l"/>
-            <a:pathLst>
-              <a:path h="4714137" w="8153925">
-                <a:moveTo>
-                  <a:pt x="0" y="0"/>
-                </a:moveTo>
-                <a:lnTo>
-                  <a:pt x="8153924" y="0"/>
-                </a:lnTo>
-                <a:lnTo>
-                  <a:pt x="8153924" y="4714137"/>
-                </a:lnTo>
-                <a:lnTo>
-                  <a:pt x="0" y="4714137"/>
-                </a:lnTo>
-                <a:lnTo>
-                  <a:pt x="0" y="0"/>
-                </a:lnTo>
-                <a:close/>
-              </a:path>
-            </a:pathLst>
-          </a:custGeom>
-          <a:blipFill>
-            <a:blip r:embed="rId2"/>
-            <a:stretch>
-              <a:fillRect l="-1390" t="0" r="-1390" b="0"/>
-            </a:stretch>
-          </a:blipFill>
-        </p:spPr>
-      </p:sp>
-      <p:sp>
-        <p:nvSpPr>
-          <p:cNvPr name="Freeform 9" id="9"/>
-          <p:cNvSpPr/>
-          <p:nvPr/>
-        </p:nvSpPr>
-        <p:spPr>
-          <a:xfrm flipH="false" flipV="false" rot="0">
-            <a:off x="3853242" y="8659398"/>
-            <a:ext cx="8153925" cy="1197803"/>
-          </a:xfrm>
-          <a:custGeom>
-            <a:avLst/>
-            <a:gdLst/>
-            <a:ahLst/>
-            <a:cxnLst/>
-            <a:rect r="r" b="b" t="t" l="l"/>
-            <a:pathLst>
-              <a:path h="1197803" w="8153925">
-                <a:moveTo>
-                  <a:pt x="0" y="0"/>
-                </a:moveTo>
-                <a:lnTo>
-                  <a:pt x="8153924" y="0"/>
-                </a:lnTo>
-                <a:lnTo>
-                  <a:pt x="8153924" y="1197804"/>
-                </a:lnTo>
-                <a:lnTo>
-                  <a:pt x="0" y="1197804"/>
-                </a:lnTo>
-                <a:lnTo>
-                  <a:pt x="0" y="0"/>
-                </a:lnTo>
-                <a:close/>
-              </a:path>
-            </a:pathLst>
-          </a:custGeom>
-          <a:blipFill>
-            <a:blip r:embed="rId3"/>
-            <a:stretch>
-              <a:fillRect l="0" t="0" r="0" b="-14874"/>
-            </a:stretch>
-          </a:blipFill>
-        </p:spPr>
-      </p:sp>
-      <p:sp>
-        <p:nvSpPr>
-          <p:cNvPr name="Freeform 10" id="10"/>
-          <p:cNvSpPr/>
-          <p:nvPr/>
-        </p:nvSpPr>
-        <p:spPr>
-          <a:xfrm flipH="false" flipV="false" rot="0">
-            <a:off x="12387619" y="3408876"/>
-            <a:ext cx="3854721" cy="1734624"/>
-          </a:xfrm>
-          <a:custGeom>
-            <a:avLst/>
-            <a:gdLst/>
-            <a:ahLst/>
-            <a:cxnLst/>
-            <a:rect r="r" b="b" t="t" l="l"/>
-            <a:pathLst>
-              <a:path h="1734624" w="3854721">
-                <a:moveTo>
-                  <a:pt x="0" y="0"/>
-                </a:moveTo>
-                <a:lnTo>
-                  <a:pt x="3854721" y="0"/>
-                </a:lnTo>
-                <a:lnTo>
-                  <a:pt x="3854721" y="1734624"/>
-                </a:lnTo>
-                <a:lnTo>
-                  <a:pt x="0" y="1734624"/>
-                </a:lnTo>
-                <a:lnTo>
-                  <a:pt x="0" y="0"/>
-                </a:lnTo>
-                <a:close/>
-              </a:path>
-            </a:pathLst>
-          </a:custGeom>
-          <a:blipFill>
-            <a:blip r:embed="rId4"/>
-            <a:stretch>
-              <a:fillRect l="0" t="0" r="0" b="0"/>
-            </a:stretch>
-          </a:blipFill>
-        </p:spPr>
-      </p:sp>
-      <p:sp>
-        <p:nvSpPr>
-          <p:cNvPr name="Freeform 11" id="11"/>
-          <p:cNvSpPr/>
-          <p:nvPr/>
-        </p:nvSpPr>
-        <p:spPr>
-          <a:xfrm flipH="false" flipV="false" rot="0">
-            <a:off x="13738790" y="8321483"/>
-            <a:ext cx="1382147" cy="1535718"/>
-          </a:xfrm>
-          <a:custGeom>
-            <a:avLst/>
-            <a:gdLst/>
-            <a:ahLst/>
-            <a:cxnLst/>
-            <a:rect r="r" b="b" t="t" l="l"/>
-            <a:pathLst>
-              <a:path h="1535718" w="1382147">
-                <a:moveTo>
-                  <a:pt x="0" y="0"/>
-                </a:moveTo>
-                <a:lnTo>
-                  <a:pt x="1382146" y="0"/>
-                </a:lnTo>
-                <a:lnTo>
-                  <a:pt x="1382146" y="1535719"/>
-                </a:lnTo>
-                <a:lnTo>
-                  <a:pt x="0" y="1535719"/>
-                </a:lnTo>
-                <a:lnTo>
-                  <a:pt x="0" y="0"/>
-                </a:lnTo>
-                <a:close/>
-              </a:path>
-            </a:pathLst>
-          </a:custGeom>
-          <a:blipFill>
-            <a:blip r:embed="rId5">
-              <a:extLst>
-                <a:ext uri="{96DAC541-7B7A-43D3-8B79-37D633B846F1}">
-                  <asvg:svgBlip xmlns:asvg="http://schemas.microsoft.com/office/drawing/2016/SVG/main" r:embed="rId6"/>
-                </a:ext>
-              </a:extLst>
-            </a:blip>
-            <a:stretch>
-              <a:fillRect l="0" t="0" r="0" b="0"/>
-            </a:stretch>
-          </a:blipFill>
-        </p:spPr>
-      </p:sp>
-      <p:sp>
-        <p:nvSpPr>
-          <p:cNvPr name="Freeform 12" id="12"/>
-          <p:cNvSpPr/>
-          <p:nvPr/>
-        </p:nvSpPr>
-        <p:spPr>
-          <a:xfrm flipH="false" flipV="false" rot="0">
-            <a:off x="12387619" y="5443408"/>
-            <a:ext cx="3914299" cy="2514937"/>
-          </a:xfrm>
-          <a:custGeom>
-            <a:avLst/>
-            <a:gdLst/>
-            <a:ahLst/>
-            <a:cxnLst/>
-            <a:rect r="r" b="b" t="t" l="l"/>
-            <a:pathLst>
-              <a:path h="2514937" w="3914299">
-                <a:moveTo>
-                  <a:pt x="0" y="0"/>
-                </a:moveTo>
-                <a:lnTo>
-                  <a:pt x="3914300" y="0"/>
-                </a:lnTo>
-                <a:lnTo>
-                  <a:pt x="3914300" y="2514937"/>
-                </a:lnTo>
-                <a:lnTo>
-                  <a:pt x="0" y="2514937"/>
-                </a:lnTo>
-                <a:lnTo>
-                  <a:pt x="0" y="0"/>
-                </a:lnTo>
-                <a:close/>
-              </a:path>
-            </a:pathLst>
-          </a:custGeom>
-          <a:blipFill>
-            <a:blip r:embed="rId7"/>
-            <a:stretch>
-              <a:fillRect l="0" t="0" r="0" b="0"/>
-            </a:stretch>
-          </a:blipFill>
-        </p:spPr>
-      </p:sp>
-      <p:sp>
-        <p:nvSpPr>
-          <p:cNvPr name="TextBox 13" id="13"/>
-          <p:cNvSpPr txBox="true"/>
-          <p:nvPr/>
-        </p:nvSpPr>
-        <p:spPr>
-          <a:xfrm rot="0">
-            <a:off x="2498467" y="2204835"/>
-            <a:ext cx="12459057" cy="531495"/>
-          </a:xfrm>
-          <a:prstGeom prst="rect">
-            <a:avLst/>
-          </a:prstGeom>
-        </p:spPr>
-        <p:txBody>
-          <a:bodyPr anchor="t" rtlCol="false" tIns="0" lIns="0" bIns="0" rIns="0">
-            <a:spAutoFit/>
-          </a:bodyPr>
-          <a:lstStyle/>
-          <a:p>
-            <a:pPr algn="l">
-              <a:lnSpc>
-                <a:spcPts val="4139"/>
-              </a:lnSpc>
-            </a:pPr>
-            <a:r>
-              <a:rPr lang="en-US" sz="2999" spc="293">
-                <a:solidFill>
-                  <a:srgbClr val="FFFFFF"/>
-                </a:solidFill>
-                <a:latin typeface="Poppins"/>
-                <a:ea typeface="Poppins"/>
-                <a:cs typeface="Poppins"/>
-                <a:sym typeface="Poppins"/>
-              </a:rPr>
-              <a:t>Consultar dashboard (métrica de uso del aplicativo)</a:t>
-            </a:r>
-          </a:p>
-        </p:txBody>
-      </p:sp>
-      <p:sp>
-        <p:nvSpPr>
-          <p:cNvPr name="TextBox 14" id="14"/>
-          <p:cNvSpPr txBox="true"/>
-          <p:nvPr/>
-        </p:nvSpPr>
-        <p:spPr>
-          <a:xfrm rot="0">
-            <a:off x="16852559" y="9658764"/>
-            <a:ext cx="152400" cy="200025"/>
-          </a:xfrm>
-          <a:prstGeom prst="rect">
-            <a:avLst/>
-          </a:prstGeom>
-        </p:spPr>
-        <p:txBody>
-          <a:bodyPr anchor="t" rtlCol="false" tIns="0" lIns="0" bIns="0" rIns="0" wrap="none">
-            <a:spAutoFit/>
-          </a:bodyPr>
-          <a:lstStyle/>
-          <a:p>
-            <a:pPr algn="ctr">
-              <a:lnSpc>
-                <a:spcPts val="2800"/>
-              </a:lnSpc>
-              <a:spcBef>
-                <a:spcPct val="0"/>
-              </a:spcBef>
-            </a:pPr>
-            <a:r>
-              <a:rPr lang="en-US" sz="2000">
-                <a:solidFill>
-                  <a:srgbClr val="FFFFFF"/>
-                </a:solidFill>
-                <a:latin typeface="Open Sans"/>
-                <a:ea typeface="Open Sans"/>
-                <a:cs typeface="Open Sans"/>
-                <a:sym typeface="Open Sans"/>
-              </a:rPr>
-              <a:t>Página 10</a:t>
-            </a:r>
-          </a:p>
-        </p:txBody>
-      </p:sp>
-    </p:spTree>
-  </p:cSld>
-  <p:clrMapOvr>
-    <a:masterClrMapping/>
-  </p:clrMapOvr>
-</p:sld>
-</file>
-
-<file path=ppt/slides/slide11.xml><?xml version="1.0" encoding="utf-8"?>
-<p:sld xmlns:p="http://schemas.openxmlformats.org/presentationml/2006/main" xmlns:a="http://schemas.openxmlformats.org/drawingml/2006/main" xmlns:r="http://schemas.openxmlformats.org/officeDocument/2006/relationships">
-  <p:cSld>
-    <p:bg>
-      <p:bgPr>
-        <a:solidFill>
-          <a:srgbClr val="344F51"/>
-        </a:solidFill>
-      </p:bgPr>
-    </p:bg>
-    <p:spTree>
-      <p:nvGrpSpPr>
-        <p:cNvPr id="1" name=""/>
-        <p:cNvGrpSpPr/>
-        <p:nvPr/>
-      </p:nvGrpSpPr>
-      <p:grpSpPr>
-        <a:xfrm>
-          <a:off x="0" y="0"/>
-          <a:ext cx="0" cy="0"/>
-          <a:chOff x="0" y="0"/>
-          <a:chExt cx="0" cy="0"/>
-        </a:xfrm>
-      </p:grpSpPr>
-      <p:grpSp>
-        <p:nvGrpSpPr>
-          <p:cNvPr name="Group 2" id="2"/>
-          <p:cNvGrpSpPr/>
-          <p:nvPr/>
-        </p:nvGrpSpPr>
-        <p:grpSpPr>
-          <a:xfrm rot="0">
-            <a:off x="12085550" y="-131220"/>
-            <a:ext cx="9534019" cy="1112295"/>
-            <a:chOff x="0" y="0"/>
-            <a:chExt cx="1876002" cy="218865"/>
-          </a:xfrm>
-        </p:grpSpPr>
-        <p:sp>
-          <p:nvSpPr>
-            <p:cNvPr name="Freeform 3" id="3"/>
-            <p:cNvSpPr/>
-            <p:nvPr/>
-          </p:nvSpPr>
-          <p:spPr>
-            <a:xfrm flipH="false" flipV="false" rot="0">
-              <a:off x="0" y="0"/>
-              <a:ext cx="1876002" cy="218865"/>
-            </a:xfrm>
-            <a:custGeom>
-              <a:avLst/>
-              <a:gdLst/>
-              <a:ahLst/>
-              <a:cxnLst/>
-              <a:rect r="r" b="b" t="t" l="l"/>
-              <a:pathLst>
-                <a:path h="218865" w="1876002">
-                  <a:moveTo>
-                    <a:pt x="1672802" y="0"/>
-                  </a:moveTo>
-                  <a:lnTo>
-                    <a:pt x="0" y="0"/>
-                  </a:lnTo>
-                  <a:lnTo>
-                    <a:pt x="203200" y="218865"/>
-                  </a:lnTo>
-                  <a:lnTo>
-                    <a:pt x="1876002" y="218865"/>
-                  </a:lnTo>
-                  <a:lnTo>
-                    <a:pt x="1672802" y="0"/>
-                  </a:lnTo>
-                  <a:close/>
-                </a:path>
-              </a:pathLst>
-            </a:custGeom>
-            <a:solidFill>
-              <a:srgbClr val="51786E"/>
-            </a:solidFill>
-            <a:ln cap="sq">
-              <a:noFill/>
-              <a:prstDash val="solid"/>
-              <a:miter/>
-            </a:ln>
-          </p:spPr>
-        </p:sp>
-        <p:sp>
-          <p:nvSpPr>
-            <p:cNvPr name="TextBox 4" id="4"/>
-            <p:cNvSpPr txBox="true"/>
-            <p:nvPr/>
-          </p:nvSpPr>
-          <p:spPr>
-            <a:xfrm>
-              <a:off x="101600" y="-19050"/>
-              <a:ext cx="1672802" cy="237915"/>
-            </a:xfrm>
-            <a:prstGeom prst="rect">
-              <a:avLst/>
-            </a:prstGeom>
-          </p:spPr>
-          <p:txBody>
-            <a:bodyPr anchor="ctr" rtlCol="false" tIns="50800" lIns="50800" bIns="50800" rIns="50800"/>
-            <a:lstStyle/>
-            <a:p>
-              <a:pPr algn="ctr" marL="0" indent="0" lvl="0">
-                <a:lnSpc>
-                  <a:spcPts val="2859"/>
-                </a:lnSpc>
-                <a:spcBef>
-                  <a:spcPct val="0"/>
-                </a:spcBef>
-              </a:pPr>
-            </a:p>
-          </p:txBody>
-        </p:sp>
-      </p:grpSp>
-      <p:grpSp>
-        <p:nvGrpSpPr>
-          <p:cNvPr name="Group 5" id="5"/>
-          <p:cNvGrpSpPr/>
-          <p:nvPr/>
-        </p:nvGrpSpPr>
-        <p:grpSpPr>
-          <a:xfrm rot="0">
-            <a:off x="4852707" y="981075"/>
+            <a:off x="5283879" y="1315484"/>
             <a:ext cx="6499611" cy="810936"/>
             <a:chOff x="0" y="0"/>
             <a:chExt cx="1511227" cy="188551"/>
@@ -4421,8 +3829,8 @@
         </p:nvSpPr>
         <p:spPr>
           <a:xfrm flipH="false" flipV="false" rot="0">
-            <a:off x="3268237" y="4361642"/>
-            <a:ext cx="3745142" cy="4896658"/>
+            <a:off x="3951697" y="4491266"/>
+            <a:ext cx="4427498" cy="4893648"/>
           </a:xfrm>
           <a:custGeom>
             <a:avLst/>
@@ -4431,18 +3839,18 @@
             <a:cxnLst/>
             <a:rect r="r" b="b" t="t" l="l"/>
             <a:pathLst>
-              <a:path h="4896658" w="3745142">
+              <a:path h="4893648" w="4427498">
                 <a:moveTo>
                   <a:pt x="0" y="0"/>
                 </a:moveTo>
                 <a:lnTo>
-                  <a:pt x="3745142" y="0"/>
-                </a:lnTo>
-                <a:lnTo>
-                  <a:pt x="3745142" y="4896658"/>
-                </a:lnTo>
-                <a:lnTo>
-                  <a:pt x="0" y="4896658"/>
+                  <a:pt x="4427499" y="0"/>
+                </a:lnTo>
+                <a:lnTo>
+                  <a:pt x="4427499" y="4893648"/>
+                </a:lnTo>
+                <a:lnTo>
+                  <a:pt x="0" y="4893648"/>
                 </a:lnTo>
                 <a:lnTo>
                   <a:pt x="0" y="0"/>
@@ -4454,7 +3862,7 @@
           <a:blipFill>
             <a:blip r:embed="rId2"/>
             <a:stretch>
-              <a:fillRect l="-3663" t="-5342" r="0" b="0"/>
+              <a:fillRect l="-3663" t="-6319" r="0" b="-18292"/>
             </a:stretch>
           </a:blipFill>
         </p:spPr>
@@ -4467,8 +3875,8 @@
         </p:nvSpPr>
         <p:spPr>
           <a:xfrm flipH="false" flipV="false" rot="0">
-            <a:off x="973941" y="5943706"/>
-            <a:ext cx="1732321" cy="1732531"/>
+            <a:off x="1694915" y="5941099"/>
+            <a:ext cx="1779097" cy="1779312"/>
           </a:xfrm>
           <a:custGeom>
             <a:avLst/>
@@ -4477,18 +3885,18 @@
             <a:cxnLst/>
             <a:rect r="r" b="b" t="t" l="l"/>
             <a:pathLst>
-              <a:path h="1732531" w="1732321">
+              <a:path h="1779312" w="1779097">
                 <a:moveTo>
                   <a:pt x="0" y="0"/>
                 </a:moveTo>
                 <a:lnTo>
-                  <a:pt x="1732321" y="0"/>
-                </a:lnTo>
-                <a:lnTo>
-                  <a:pt x="1732321" y="1732530"/>
-                </a:lnTo>
-                <a:lnTo>
-                  <a:pt x="0" y="1732530"/>
+                  <a:pt x="1779096" y="0"/>
+                </a:lnTo>
+                <a:lnTo>
+                  <a:pt x="1779096" y="1779312"/>
+                </a:lnTo>
+                <a:lnTo>
+                  <a:pt x="0" y="1779312"/>
                 </a:lnTo>
                 <a:lnTo>
                   <a:pt x="0" y="0"/>
@@ -4513,8 +3921,8 @@
         </p:nvSpPr>
         <p:spPr>
           <a:xfrm flipH="false" flipV="false" rot="0">
-            <a:off x="12384693" y="4452445"/>
-            <a:ext cx="3089437" cy="4805855"/>
+            <a:off x="11575651" y="4409572"/>
+            <a:ext cx="3942704" cy="5287740"/>
           </a:xfrm>
           <a:custGeom>
             <a:avLst/>
@@ -4523,18 +3931,18 @@
             <a:cxnLst/>
             <a:rect r="r" b="b" t="t" l="l"/>
             <a:pathLst>
-              <a:path h="4805855" w="3089437">
+              <a:path h="5287740" w="3942704">
                 <a:moveTo>
                   <a:pt x="0" y="0"/>
                 </a:moveTo>
                 <a:lnTo>
-                  <a:pt x="3089437" y="0"/>
-                </a:lnTo>
-                <a:lnTo>
-                  <a:pt x="3089437" y="4805855"/>
-                </a:lnTo>
-                <a:lnTo>
-                  <a:pt x="0" y="4805855"/>
+                  <a:pt x="3942704" y="0"/>
+                </a:lnTo>
+                <a:lnTo>
+                  <a:pt x="3942704" y="5287739"/>
+                </a:lnTo>
+                <a:lnTo>
+                  <a:pt x="0" y="5287739"/>
                 </a:lnTo>
                 <a:lnTo>
                   <a:pt x="0" y="0"/>
@@ -4546,7 +3954,7 @@
           <a:blipFill>
             <a:blip r:embed="rId4"/>
             <a:stretch>
-              <a:fillRect l="-2708" t="0" r="-2708" b="0"/>
+              <a:fillRect l="-2708" t="0" r="-2708" b="-15988"/>
             </a:stretch>
           </a:blipFill>
         </p:spPr>
@@ -4559,8 +3967,8 @@
         </p:nvSpPr>
         <p:spPr>
           <a:xfrm flipH="false" flipV="false" rot="0">
-            <a:off x="10308081" y="5943706"/>
-            <a:ext cx="1514637" cy="1732531"/>
+            <a:off x="9444931" y="5941099"/>
+            <a:ext cx="1555535" cy="1779312"/>
           </a:xfrm>
           <a:custGeom>
             <a:avLst/>
@@ -4569,18 +3977,18 @@
             <a:cxnLst/>
             <a:rect r="r" b="b" t="t" l="l"/>
             <a:pathLst>
-              <a:path h="1732531" w="1514637">
+              <a:path h="1779312" w="1555535">
                 <a:moveTo>
                   <a:pt x="0" y="0"/>
                 </a:moveTo>
                 <a:lnTo>
-                  <a:pt x="1514637" y="0"/>
-                </a:lnTo>
-                <a:lnTo>
-                  <a:pt x="1514637" y="1732530"/>
-                </a:lnTo>
-                <a:lnTo>
-                  <a:pt x="0" y="1732530"/>
+                  <a:pt x="1555535" y="0"/>
+                </a:lnTo>
+                <a:lnTo>
+                  <a:pt x="1555535" y="1779312"/>
+                </a:lnTo>
+                <a:lnTo>
+                  <a:pt x="0" y="1779312"/>
                 </a:lnTo>
                 <a:lnTo>
                   <a:pt x="0" y="0"/>
@@ -4605,8 +4013,8 @@
         </p:nvSpPr>
         <p:spPr>
           <a:xfrm rot="0">
-            <a:off x="1169414" y="3084858"/>
-            <a:ext cx="7510957" cy="1055370"/>
+            <a:off x="1694915" y="3157556"/>
+            <a:ext cx="6838770" cy="967740"/>
           </a:xfrm>
           <a:prstGeom prst="rect">
             <a:avLst/>
@@ -4620,11 +4028,11 @@
           <a:p>
             <a:pPr algn="l">
               <a:lnSpc>
-                <a:spcPts val="4139"/>
+                <a:spcPts val="3769"/>
               </a:lnSpc>
             </a:pPr>
             <a:r>
-              <a:rPr lang="en-US" sz="2999" spc="293">
+              <a:rPr lang="en-US" sz="2731" spc="267">
                 <a:solidFill>
                   <a:srgbClr val="FFFFFF"/>
                 </a:solidFill>
@@ -4646,8 +4054,8 @@
         </p:nvSpPr>
         <p:spPr>
           <a:xfrm rot="0">
-            <a:off x="9733108" y="3084858"/>
-            <a:ext cx="8047518" cy="1055370"/>
+            <a:off x="8736787" y="3157556"/>
+            <a:ext cx="7327313" cy="967740"/>
           </a:xfrm>
           <a:prstGeom prst="rect">
             <a:avLst/>
@@ -4661,11 +4069,11 @@
           <a:p>
             <a:pPr algn="l">
               <a:lnSpc>
-                <a:spcPts val="4139"/>
+                <a:spcPts val="3769"/>
               </a:lnSpc>
             </a:pPr>
             <a:r>
-              <a:rPr lang="en-US" sz="2999" spc="293">
+              <a:rPr lang="en-US" sz="2731" spc="267">
                 <a:solidFill>
                   <a:srgbClr val="FFFFFF"/>
                 </a:solidFill>
@@ -4718,7 +4126,7 @@
                 <a:cs typeface="Open Sans"/>
                 <a:sym typeface="Open Sans"/>
               </a:rPr>
-              <a:t>Página 11</a:t>
+              <a:t>Página 10</a:t>
             </a:r>
           </a:p>
         </p:txBody>
@@ -4731,7 +4139,7 @@
 </p:sld>
 </file>
 
-<file path=ppt/slides/slide12.xml><?xml version="1.0" encoding="utf-8"?>
+<file path=ppt/slides/slide11.xml><?xml version="1.0" encoding="utf-8"?>
 <p:sld xmlns:p="http://schemas.openxmlformats.org/presentationml/2006/main" xmlns:a="http://schemas.openxmlformats.org/drawingml/2006/main" xmlns:r="http://schemas.openxmlformats.org/officeDocument/2006/relationships">
   <p:cSld>
     <p:bg>
@@ -6301,7 +5709,7 @@
                 <a:cs typeface="Open Sans"/>
                 <a:sym typeface="Open Sans"/>
               </a:rPr>
-              <a:t>Página 12</a:t>
+              <a:t>Página 11</a:t>
             </a:r>
           </a:p>
         </p:txBody>
@@ -6314,1454 +5722,7 @@
 </p:sld>
 </file>
 
-<file path=ppt/slides/slide13.xml><?xml version="1.0" encoding="utf-8"?>
-<p:sld xmlns:p="http://schemas.openxmlformats.org/presentationml/2006/main" xmlns:a="http://schemas.openxmlformats.org/drawingml/2006/main" xmlns:r="http://schemas.openxmlformats.org/officeDocument/2006/relationships">
-  <p:cSld>
-    <p:bg>
-      <p:bgPr>
-        <a:solidFill>
-          <a:srgbClr val="344F51"/>
-        </a:solidFill>
-      </p:bgPr>
-    </p:bg>
-    <p:spTree>
-      <p:nvGrpSpPr>
-        <p:cNvPr id="1" name=""/>
-        <p:cNvGrpSpPr/>
-        <p:nvPr/>
-      </p:nvGrpSpPr>
-      <p:grpSpPr>
-        <a:xfrm>
-          <a:off x="0" y="0"/>
-          <a:ext cx="0" cy="0"/>
-          <a:chOff x="0" y="0"/>
-          <a:chExt cx="0" cy="0"/>
-        </a:xfrm>
-      </p:grpSpPr>
-      <p:grpSp>
-        <p:nvGrpSpPr>
-          <p:cNvPr name="Group 2" id="2"/>
-          <p:cNvGrpSpPr/>
-          <p:nvPr/>
-        </p:nvGrpSpPr>
-        <p:grpSpPr>
-          <a:xfrm rot="0">
-            <a:off x="642505" y="2544721"/>
-            <a:ext cx="4668130" cy="5341511"/>
-            <a:chOff x="0" y="0"/>
-            <a:chExt cx="1428497" cy="1634559"/>
-          </a:xfrm>
-        </p:grpSpPr>
-        <p:sp>
-          <p:nvSpPr>
-            <p:cNvPr name="Freeform 3" id="3"/>
-            <p:cNvSpPr/>
-            <p:nvPr/>
-          </p:nvSpPr>
-          <p:spPr>
-            <a:xfrm flipH="false" flipV="false" rot="0">
-              <a:off x="0" y="0"/>
-              <a:ext cx="1428497" cy="1634559"/>
-            </a:xfrm>
-            <a:custGeom>
-              <a:avLst/>
-              <a:gdLst/>
-              <a:ahLst/>
-              <a:cxnLst/>
-              <a:rect r="r" b="b" t="t" l="l"/>
-              <a:pathLst>
-                <a:path h="1634559" w="1428497">
-                  <a:moveTo>
-                    <a:pt x="33169" y="0"/>
-                  </a:moveTo>
-                  <a:lnTo>
-                    <a:pt x="1395328" y="0"/>
-                  </a:lnTo>
-                  <a:cubicBezTo>
-                    <a:pt x="1413647" y="0"/>
-                    <a:pt x="1428497" y="14850"/>
-                    <a:pt x="1428497" y="33169"/>
-                  </a:cubicBezTo>
-                  <a:lnTo>
-                    <a:pt x="1428497" y="1601390"/>
-                  </a:lnTo>
-                  <a:cubicBezTo>
-                    <a:pt x="1428497" y="1610187"/>
-                    <a:pt x="1425003" y="1618624"/>
-                    <a:pt x="1418782" y="1624844"/>
-                  </a:cubicBezTo>
-                  <a:cubicBezTo>
-                    <a:pt x="1412562" y="1631065"/>
-                    <a:pt x="1404125" y="1634559"/>
-                    <a:pt x="1395328" y="1634559"/>
-                  </a:cubicBezTo>
-                  <a:lnTo>
-                    <a:pt x="33169" y="1634559"/>
-                  </a:lnTo>
-                  <a:cubicBezTo>
-                    <a:pt x="14850" y="1634559"/>
-                    <a:pt x="0" y="1619709"/>
-                    <a:pt x="0" y="1601390"/>
-                  </a:cubicBezTo>
-                  <a:lnTo>
-                    <a:pt x="0" y="33169"/>
-                  </a:lnTo>
-                  <a:cubicBezTo>
-                    <a:pt x="0" y="14850"/>
-                    <a:pt x="14850" y="0"/>
-                    <a:pt x="33169" y="0"/>
-                  </a:cubicBezTo>
-                  <a:close/>
-                </a:path>
-              </a:pathLst>
-            </a:custGeom>
-            <a:solidFill>
-              <a:srgbClr val="FFFFFF"/>
-            </a:solidFill>
-            <a:ln w="38100" cap="sq">
-              <a:solidFill>
-                <a:srgbClr val="363636"/>
-              </a:solidFill>
-              <a:prstDash val="solid"/>
-              <a:miter/>
-            </a:ln>
-          </p:spPr>
-        </p:sp>
-        <p:sp>
-          <p:nvSpPr>
-            <p:cNvPr name="TextBox 4" id="4"/>
-            <p:cNvSpPr txBox="true"/>
-            <p:nvPr/>
-          </p:nvSpPr>
-          <p:spPr>
-            <a:xfrm>
-              <a:off x="0" y="-19050"/>
-              <a:ext cx="1428497" cy="1653609"/>
-            </a:xfrm>
-            <a:prstGeom prst="rect">
-              <a:avLst/>
-            </a:prstGeom>
-          </p:spPr>
-          <p:txBody>
-            <a:bodyPr anchor="ctr" rtlCol="false" tIns="50800" lIns="50800" bIns="50800" rIns="50800"/>
-            <a:lstStyle/>
-            <a:p>
-              <a:pPr algn="ctr">
-                <a:lnSpc>
-                  <a:spcPts val="2859"/>
-                </a:lnSpc>
-              </a:pPr>
-            </a:p>
-          </p:txBody>
-        </p:sp>
-      </p:grpSp>
-      <p:grpSp>
-        <p:nvGrpSpPr>
-          <p:cNvPr name="Group 5" id="5"/>
-          <p:cNvGrpSpPr/>
-          <p:nvPr/>
-        </p:nvGrpSpPr>
-        <p:grpSpPr>
-          <a:xfrm rot="0">
-            <a:off x="5625431" y="2544721"/>
-            <a:ext cx="4668130" cy="5341511"/>
-            <a:chOff x="0" y="0"/>
-            <a:chExt cx="1428497" cy="1634559"/>
-          </a:xfrm>
-        </p:grpSpPr>
-        <p:sp>
-          <p:nvSpPr>
-            <p:cNvPr name="Freeform 6" id="6"/>
-            <p:cNvSpPr/>
-            <p:nvPr/>
-          </p:nvSpPr>
-          <p:spPr>
-            <a:xfrm flipH="false" flipV="false" rot="0">
-              <a:off x="0" y="0"/>
-              <a:ext cx="1428497" cy="1634559"/>
-            </a:xfrm>
-            <a:custGeom>
-              <a:avLst/>
-              <a:gdLst/>
-              <a:ahLst/>
-              <a:cxnLst/>
-              <a:rect r="r" b="b" t="t" l="l"/>
-              <a:pathLst>
-                <a:path h="1634559" w="1428497">
-                  <a:moveTo>
-                    <a:pt x="33169" y="0"/>
-                  </a:moveTo>
-                  <a:lnTo>
-                    <a:pt x="1395328" y="0"/>
-                  </a:lnTo>
-                  <a:cubicBezTo>
-                    <a:pt x="1413647" y="0"/>
-                    <a:pt x="1428497" y="14850"/>
-                    <a:pt x="1428497" y="33169"/>
-                  </a:cubicBezTo>
-                  <a:lnTo>
-                    <a:pt x="1428497" y="1601390"/>
-                  </a:lnTo>
-                  <a:cubicBezTo>
-                    <a:pt x="1428497" y="1610187"/>
-                    <a:pt x="1425003" y="1618624"/>
-                    <a:pt x="1418782" y="1624844"/>
-                  </a:cubicBezTo>
-                  <a:cubicBezTo>
-                    <a:pt x="1412562" y="1631065"/>
-                    <a:pt x="1404125" y="1634559"/>
-                    <a:pt x="1395328" y="1634559"/>
-                  </a:cubicBezTo>
-                  <a:lnTo>
-                    <a:pt x="33169" y="1634559"/>
-                  </a:lnTo>
-                  <a:cubicBezTo>
-                    <a:pt x="14850" y="1634559"/>
-                    <a:pt x="0" y="1619709"/>
-                    <a:pt x="0" y="1601390"/>
-                  </a:cubicBezTo>
-                  <a:lnTo>
-                    <a:pt x="0" y="33169"/>
-                  </a:lnTo>
-                  <a:cubicBezTo>
-                    <a:pt x="0" y="14850"/>
-                    <a:pt x="14850" y="0"/>
-                    <a:pt x="33169" y="0"/>
-                  </a:cubicBezTo>
-                  <a:close/>
-                </a:path>
-              </a:pathLst>
-            </a:custGeom>
-            <a:solidFill>
-              <a:srgbClr val="FFFFFF"/>
-            </a:solidFill>
-            <a:ln w="38100" cap="sq">
-              <a:solidFill>
-                <a:srgbClr val="363636"/>
-              </a:solidFill>
-              <a:prstDash val="solid"/>
-              <a:miter/>
-            </a:ln>
-          </p:spPr>
-        </p:sp>
-        <p:sp>
-          <p:nvSpPr>
-            <p:cNvPr name="TextBox 7" id="7"/>
-            <p:cNvSpPr txBox="true"/>
-            <p:nvPr/>
-          </p:nvSpPr>
-          <p:spPr>
-            <a:xfrm>
-              <a:off x="0" y="-19050"/>
-              <a:ext cx="1428497" cy="1653609"/>
-            </a:xfrm>
-            <a:prstGeom prst="rect">
-              <a:avLst/>
-            </a:prstGeom>
-          </p:spPr>
-          <p:txBody>
-            <a:bodyPr anchor="ctr" rtlCol="false" tIns="50800" lIns="50800" bIns="50800" rIns="50800"/>
-            <a:lstStyle/>
-            <a:p>
-              <a:pPr algn="ctr">
-                <a:lnSpc>
-                  <a:spcPts val="2859"/>
-                </a:lnSpc>
-              </a:pPr>
-            </a:p>
-          </p:txBody>
-        </p:sp>
-      </p:grpSp>
-      <p:grpSp>
-        <p:nvGrpSpPr>
-          <p:cNvPr name="Group 8" id="8"/>
-          <p:cNvGrpSpPr/>
-          <p:nvPr/>
-        </p:nvGrpSpPr>
-        <p:grpSpPr>
-          <a:xfrm rot="0">
-            <a:off x="10751945" y="2544721"/>
-            <a:ext cx="4668130" cy="5341511"/>
-            <a:chOff x="0" y="0"/>
-            <a:chExt cx="1428497" cy="1634559"/>
-          </a:xfrm>
-        </p:grpSpPr>
-        <p:sp>
-          <p:nvSpPr>
-            <p:cNvPr name="Freeform 9" id="9"/>
-            <p:cNvSpPr/>
-            <p:nvPr/>
-          </p:nvSpPr>
-          <p:spPr>
-            <a:xfrm flipH="false" flipV="false" rot="0">
-              <a:off x="0" y="0"/>
-              <a:ext cx="1428497" cy="1634559"/>
-            </a:xfrm>
-            <a:custGeom>
-              <a:avLst/>
-              <a:gdLst/>
-              <a:ahLst/>
-              <a:cxnLst/>
-              <a:rect r="r" b="b" t="t" l="l"/>
-              <a:pathLst>
-                <a:path h="1634559" w="1428497">
-                  <a:moveTo>
-                    <a:pt x="33169" y="0"/>
-                  </a:moveTo>
-                  <a:lnTo>
-                    <a:pt x="1395328" y="0"/>
-                  </a:lnTo>
-                  <a:cubicBezTo>
-                    <a:pt x="1413647" y="0"/>
-                    <a:pt x="1428497" y="14850"/>
-                    <a:pt x="1428497" y="33169"/>
-                  </a:cubicBezTo>
-                  <a:lnTo>
-                    <a:pt x="1428497" y="1601390"/>
-                  </a:lnTo>
-                  <a:cubicBezTo>
-                    <a:pt x="1428497" y="1610187"/>
-                    <a:pt x="1425003" y="1618624"/>
-                    <a:pt x="1418782" y="1624844"/>
-                  </a:cubicBezTo>
-                  <a:cubicBezTo>
-                    <a:pt x="1412562" y="1631065"/>
-                    <a:pt x="1404125" y="1634559"/>
-                    <a:pt x="1395328" y="1634559"/>
-                  </a:cubicBezTo>
-                  <a:lnTo>
-                    <a:pt x="33169" y="1634559"/>
-                  </a:lnTo>
-                  <a:cubicBezTo>
-                    <a:pt x="14850" y="1634559"/>
-                    <a:pt x="0" y="1619709"/>
-                    <a:pt x="0" y="1601390"/>
-                  </a:cubicBezTo>
-                  <a:lnTo>
-                    <a:pt x="0" y="33169"/>
-                  </a:lnTo>
-                  <a:cubicBezTo>
-                    <a:pt x="0" y="14850"/>
-                    <a:pt x="14850" y="0"/>
-                    <a:pt x="33169" y="0"/>
-                  </a:cubicBezTo>
-                  <a:close/>
-                </a:path>
-              </a:pathLst>
-            </a:custGeom>
-            <a:solidFill>
-              <a:srgbClr val="FFFFFF"/>
-            </a:solidFill>
-            <a:ln w="38100" cap="sq">
-              <a:solidFill>
-                <a:srgbClr val="363636"/>
-              </a:solidFill>
-              <a:prstDash val="solid"/>
-              <a:miter/>
-            </a:ln>
-          </p:spPr>
-        </p:sp>
-        <p:sp>
-          <p:nvSpPr>
-            <p:cNvPr name="TextBox 10" id="10"/>
-            <p:cNvSpPr txBox="true"/>
-            <p:nvPr/>
-          </p:nvSpPr>
-          <p:spPr>
-            <a:xfrm>
-              <a:off x="0" y="-19050"/>
-              <a:ext cx="1428497" cy="1653609"/>
-            </a:xfrm>
-            <a:prstGeom prst="rect">
-              <a:avLst/>
-            </a:prstGeom>
-          </p:spPr>
-          <p:txBody>
-            <a:bodyPr anchor="ctr" rtlCol="false" tIns="50800" lIns="50800" bIns="50800" rIns="50800"/>
-            <a:lstStyle/>
-            <a:p>
-              <a:pPr algn="ctr">
-                <a:lnSpc>
-                  <a:spcPts val="2859"/>
-                </a:lnSpc>
-              </a:pPr>
-            </a:p>
-          </p:txBody>
-        </p:sp>
-      </p:grpSp>
-      <p:sp>
-        <p:nvSpPr>
-          <p:cNvPr name="Freeform 11" id="11"/>
-          <p:cNvSpPr/>
-          <p:nvPr/>
-        </p:nvSpPr>
-        <p:spPr>
-          <a:xfrm flipH="false" flipV="false" rot="0">
-            <a:off x="2610870" y="2795568"/>
-            <a:ext cx="1078897" cy="1596328"/>
-          </a:xfrm>
-          <a:custGeom>
-            <a:avLst/>
-            <a:gdLst/>
-            <a:ahLst/>
-            <a:cxnLst/>
-            <a:rect r="r" b="b" t="t" l="l"/>
-            <a:pathLst>
-              <a:path h="1596328" w="1078897">
-                <a:moveTo>
-                  <a:pt x="0" y="0"/>
-                </a:moveTo>
-                <a:lnTo>
-                  <a:pt x="1078897" y="0"/>
-                </a:lnTo>
-                <a:lnTo>
-                  <a:pt x="1078897" y="1596328"/>
-                </a:lnTo>
-                <a:lnTo>
-                  <a:pt x="0" y="1596328"/>
-                </a:lnTo>
-                <a:lnTo>
-                  <a:pt x="0" y="0"/>
-                </a:lnTo>
-                <a:close/>
-              </a:path>
-            </a:pathLst>
-          </a:custGeom>
-          <a:blipFill>
-            <a:blip r:embed="rId2">
-              <a:extLst>
-                <a:ext uri="{96DAC541-7B7A-43D3-8B79-37D633B846F1}">
-                  <asvg:svgBlip xmlns:asvg="http://schemas.microsoft.com/office/drawing/2016/SVG/main" r:embed="rId3"/>
-                </a:ext>
-              </a:extLst>
-            </a:blip>
-            <a:stretch>
-              <a:fillRect l="0" t="0" r="0" b="0"/>
-            </a:stretch>
-          </a:blipFill>
-        </p:spPr>
-      </p:sp>
-      <p:sp>
-        <p:nvSpPr>
-          <p:cNvPr name="Freeform 12" id="12"/>
-          <p:cNvSpPr/>
-          <p:nvPr/>
-        </p:nvSpPr>
-        <p:spPr>
-          <a:xfrm flipH="false" flipV="false" rot="0">
-            <a:off x="1218173" y="4781415"/>
-            <a:ext cx="1336683" cy="1336683"/>
-          </a:xfrm>
-          <a:custGeom>
-            <a:avLst/>
-            <a:gdLst/>
-            <a:ahLst/>
-            <a:cxnLst/>
-            <a:rect r="r" b="b" t="t" l="l"/>
-            <a:pathLst>
-              <a:path h="1336683" w="1336683">
-                <a:moveTo>
-                  <a:pt x="0" y="0"/>
-                </a:moveTo>
-                <a:lnTo>
-                  <a:pt x="1336682" y="0"/>
-                </a:lnTo>
-                <a:lnTo>
-                  <a:pt x="1336682" y="1336682"/>
-                </a:lnTo>
-                <a:lnTo>
-                  <a:pt x="0" y="1336682"/>
-                </a:lnTo>
-                <a:lnTo>
-                  <a:pt x="0" y="0"/>
-                </a:lnTo>
-                <a:close/>
-              </a:path>
-            </a:pathLst>
-          </a:custGeom>
-          <a:blipFill>
-            <a:blip r:embed="rId4">
-              <a:extLst>
-                <a:ext uri="{96DAC541-7B7A-43D3-8B79-37D633B846F1}">
-                  <asvg:svgBlip xmlns:asvg="http://schemas.microsoft.com/office/drawing/2016/SVG/main" r:embed="rId5"/>
-                </a:ext>
-              </a:extLst>
-            </a:blip>
-            <a:stretch>
-              <a:fillRect l="0" t="0" r="0" b="0"/>
-            </a:stretch>
-          </a:blipFill>
-        </p:spPr>
-      </p:sp>
-      <p:sp>
-        <p:nvSpPr>
-          <p:cNvPr name="Freeform 13" id="13"/>
-          <p:cNvSpPr/>
-          <p:nvPr/>
-        </p:nvSpPr>
-        <p:spPr>
-          <a:xfrm flipH="false" flipV="false" rot="0">
-            <a:off x="1162158" y="6269029"/>
-            <a:ext cx="1448711" cy="1298572"/>
-          </a:xfrm>
-          <a:custGeom>
-            <a:avLst/>
-            <a:gdLst/>
-            <a:ahLst/>
-            <a:cxnLst/>
-            <a:rect r="r" b="b" t="t" l="l"/>
-            <a:pathLst>
-              <a:path h="1298572" w="1448711">
-                <a:moveTo>
-                  <a:pt x="0" y="0"/>
-                </a:moveTo>
-                <a:lnTo>
-                  <a:pt x="1448712" y="0"/>
-                </a:lnTo>
-                <a:lnTo>
-                  <a:pt x="1448712" y="1298572"/>
-                </a:lnTo>
-                <a:lnTo>
-                  <a:pt x="0" y="1298572"/>
-                </a:lnTo>
-                <a:lnTo>
-                  <a:pt x="0" y="0"/>
-                </a:lnTo>
-                <a:close/>
-              </a:path>
-            </a:pathLst>
-          </a:custGeom>
-          <a:blipFill>
-            <a:blip r:embed="rId6"/>
-            <a:stretch>
-              <a:fillRect l="0" t="0" r="0" b="0"/>
-            </a:stretch>
-          </a:blipFill>
-        </p:spPr>
-      </p:sp>
-      <p:sp>
-        <p:nvSpPr>
-          <p:cNvPr name="Freeform 14" id="14"/>
-          <p:cNvSpPr/>
-          <p:nvPr/>
-        </p:nvSpPr>
-        <p:spPr>
-          <a:xfrm flipH="false" flipV="false" rot="0">
-            <a:off x="3831802" y="5449756"/>
-            <a:ext cx="1075134" cy="940254"/>
-          </a:xfrm>
-          <a:custGeom>
-            <a:avLst/>
-            <a:gdLst/>
-            <a:ahLst/>
-            <a:cxnLst/>
-            <a:rect r="r" b="b" t="t" l="l"/>
-            <a:pathLst>
-              <a:path h="940254" w="1075134">
-                <a:moveTo>
-                  <a:pt x="0" y="0"/>
-                </a:moveTo>
-                <a:lnTo>
-                  <a:pt x="1075134" y="0"/>
-                </a:lnTo>
-                <a:lnTo>
-                  <a:pt x="1075134" y="940254"/>
-                </a:lnTo>
-                <a:lnTo>
-                  <a:pt x="0" y="940254"/>
-                </a:lnTo>
-                <a:lnTo>
-                  <a:pt x="0" y="0"/>
-                </a:lnTo>
-                <a:close/>
-              </a:path>
-            </a:pathLst>
-          </a:custGeom>
-          <a:blipFill>
-            <a:blip r:embed="rId7">
-              <a:extLst>
-                <a:ext uri="{96DAC541-7B7A-43D3-8B79-37D633B846F1}">
-                  <asvg:svgBlip xmlns:asvg="http://schemas.microsoft.com/office/drawing/2016/SVG/main" r:embed="rId8"/>
-                </a:ext>
-              </a:extLst>
-            </a:blip>
-            <a:stretch>
-              <a:fillRect l="0" t="0" r="0" b="0"/>
-            </a:stretch>
-          </a:blipFill>
-        </p:spPr>
-      </p:sp>
-      <p:sp>
-        <p:nvSpPr>
-          <p:cNvPr name="Freeform 15" id="15"/>
-          <p:cNvSpPr/>
-          <p:nvPr/>
-        </p:nvSpPr>
-        <p:spPr>
-          <a:xfrm flipH="false" flipV="false" rot="1827227">
-            <a:off x="2937183" y="5252586"/>
-            <a:ext cx="936949" cy="674603"/>
-          </a:xfrm>
-          <a:custGeom>
-            <a:avLst/>
-            <a:gdLst/>
-            <a:ahLst/>
-            <a:cxnLst/>
-            <a:rect r="r" b="b" t="t" l="l"/>
-            <a:pathLst>
-              <a:path h="674603" w="936949">
-                <a:moveTo>
-                  <a:pt x="0" y="0"/>
-                </a:moveTo>
-                <a:lnTo>
-                  <a:pt x="936949" y="0"/>
-                </a:lnTo>
-                <a:lnTo>
-                  <a:pt x="936949" y="674603"/>
-                </a:lnTo>
-                <a:lnTo>
-                  <a:pt x="0" y="674603"/>
-                </a:lnTo>
-                <a:lnTo>
-                  <a:pt x="0" y="0"/>
-                </a:lnTo>
-                <a:close/>
-              </a:path>
-            </a:pathLst>
-          </a:custGeom>
-          <a:blipFill>
-            <a:blip r:embed="rId9">
-              <a:extLst>
-                <a:ext uri="{96DAC541-7B7A-43D3-8B79-37D633B846F1}">
-                  <asvg:svgBlip xmlns:asvg="http://schemas.microsoft.com/office/drawing/2016/SVG/main" r:embed="rId10"/>
-                </a:ext>
-              </a:extLst>
-            </a:blip>
-            <a:stretch>
-              <a:fillRect l="0" t="0" r="0" b="0"/>
-            </a:stretch>
-          </a:blipFill>
-        </p:spPr>
-      </p:sp>
-      <p:sp>
-        <p:nvSpPr>
-          <p:cNvPr name="Freeform 16" id="16"/>
-          <p:cNvSpPr/>
-          <p:nvPr/>
-        </p:nvSpPr>
-        <p:spPr>
-          <a:xfrm flipH="false" flipV="false" rot="-2061641">
-            <a:off x="2934886" y="6474577"/>
-            <a:ext cx="936949" cy="674603"/>
-          </a:xfrm>
-          <a:custGeom>
-            <a:avLst/>
-            <a:gdLst/>
-            <a:ahLst/>
-            <a:cxnLst/>
-            <a:rect r="r" b="b" t="t" l="l"/>
-            <a:pathLst>
-              <a:path h="674603" w="936949">
-                <a:moveTo>
-                  <a:pt x="0" y="0"/>
-                </a:moveTo>
-                <a:lnTo>
-                  <a:pt x="936949" y="0"/>
-                </a:lnTo>
-                <a:lnTo>
-                  <a:pt x="936949" y="674604"/>
-                </a:lnTo>
-                <a:lnTo>
-                  <a:pt x="0" y="674604"/>
-                </a:lnTo>
-                <a:lnTo>
-                  <a:pt x="0" y="0"/>
-                </a:lnTo>
-                <a:close/>
-              </a:path>
-            </a:pathLst>
-          </a:custGeom>
-          <a:blipFill>
-            <a:blip r:embed="rId9">
-              <a:extLst>
-                <a:ext uri="{96DAC541-7B7A-43D3-8B79-37D633B846F1}">
-                  <asvg:svgBlip xmlns:asvg="http://schemas.microsoft.com/office/drawing/2016/SVG/main" r:embed="rId10"/>
-                </a:ext>
-              </a:extLst>
-            </a:blip>
-            <a:stretch>
-              <a:fillRect l="0" t="0" r="0" b="0"/>
-            </a:stretch>
-          </a:blipFill>
-        </p:spPr>
-      </p:sp>
-      <p:sp>
-        <p:nvSpPr>
-          <p:cNvPr name="Freeform 17" id="17"/>
-          <p:cNvSpPr/>
-          <p:nvPr/>
-        </p:nvSpPr>
-        <p:spPr>
-          <a:xfrm flipH="false" flipV="false" rot="0">
-            <a:off x="12686868" y="2795568"/>
-            <a:ext cx="1078897" cy="1596328"/>
-          </a:xfrm>
-          <a:custGeom>
-            <a:avLst/>
-            <a:gdLst/>
-            <a:ahLst/>
-            <a:cxnLst/>
-            <a:rect r="r" b="b" t="t" l="l"/>
-            <a:pathLst>
-              <a:path h="1596328" w="1078897">
-                <a:moveTo>
-                  <a:pt x="0" y="0"/>
-                </a:moveTo>
-                <a:lnTo>
-                  <a:pt x="1078897" y="0"/>
-                </a:lnTo>
-                <a:lnTo>
-                  <a:pt x="1078897" y="1596328"/>
-                </a:lnTo>
-                <a:lnTo>
-                  <a:pt x="0" y="1596328"/>
-                </a:lnTo>
-                <a:lnTo>
-                  <a:pt x="0" y="0"/>
-                </a:lnTo>
-                <a:close/>
-              </a:path>
-            </a:pathLst>
-          </a:custGeom>
-          <a:blipFill>
-            <a:blip r:embed="rId2">
-              <a:extLst>
-                <a:ext uri="{96DAC541-7B7A-43D3-8B79-37D633B846F1}">
-                  <asvg:svgBlip xmlns:asvg="http://schemas.microsoft.com/office/drawing/2016/SVG/main" r:embed="rId3"/>
-                </a:ext>
-              </a:extLst>
-            </a:blip>
-            <a:stretch>
-              <a:fillRect l="0" t="0" r="0" b="0"/>
-            </a:stretch>
-          </a:blipFill>
-        </p:spPr>
-      </p:sp>
-      <p:sp>
-        <p:nvSpPr>
-          <p:cNvPr name="Freeform 18" id="18"/>
-          <p:cNvSpPr/>
-          <p:nvPr/>
-        </p:nvSpPr>
-        <p:spPr>
-          <a:xfrm flipH="false" flipV="false" rot="0">
-            <a:off x="11572432" y="4817480"/>
-            <a:ext cx="1287478" cy="1102403"/>
-          </a:xfrm>
-          <a:custGeom>
-            <a:avLst/>
-            <a:gdLst/>
-            <a:ahLst/>
-            <a:cxnLst/>
-            <a:rect r="r" b="b" t="t" l="l"/>
-            <a:pathLst>
-              <a:path h="1102403" w="1287478">
-                <a:moveTo>
-                  <a:pt x="0" y="0"/>
-                </a:moveTo>
-                <a:lnTo>
-                  <a:pt x="1287479" y="0"/>
-                </a:lnTo>
-                <a:lnTo>
-                  <a:pt x="1287479" y="1102403"/>
-                </a:lnTo>
-                <a:lnTo>
-                  <a:pt x="0" y="1102403"/>
-                </a:lnTo>
-                <a:lnTo>
-                  <a:pt x="0" y="0"/>
-                </a:lnTo>
-                <a:close/>
-              </a:path>
-            </a:pathLst>
-          </a:custGeom>
-          <a:blipFill>
-            <a:blip r:embed="rId11">
-              <a:extLst>
-                <a:ext uri="{96DAC541-7B7A-43D3-8B79-37D633B846F1}">
-                  <asvg:svgBlip xmlns:asvg="http://schemas.microsoft.com/office/drawing/2016/SVG/main" r:embed="rId12"/>
-                </a:ext>
-              </a:extLst>
-            </a:blip>
-            <a:stretch>
-              <a:fillRect l="0" t="0" r="0" b="0"/>
-            </a:stretch>
-          </a:blipFill>
-        </p:spPr>
-      </p:sp>
-      <p:sp>
-        <p:nvSpPr>
-          <p:cNvPr name="Freeform 19" id="19"/>
-          <p:cNvSpPr/>
-          <p:nvPr/>
-        </p:nvSpPr>
-        <p:spPr>
-          <a:xfrm flipH="false" flipV="false" rot="0">
-            <a:off x="13435256" y="4736405"/>
-            <a:ext cx="1183478" cy="1183478"/>
-          </a:xfrm>
-          <a:custGeom>
-            <a:avLst/>
-            <a:gdLst/>
-            <a:ahLst/>
-            <a:cxnLst/>
-            <a:rect r="r" b="b" t="t" l="l"/>
-            <a:pathLst>
-              <a:path h="1183478" w="1183478">
-                <a:moveTo>
-                  <a:pt x="0" y="0"/>
-                </a:moveTo>
-                <a:lnTo>
-                  <a:pt x="1183478" y="0"/>
-                </a:lnTo>
-                <a:lnTo>
-                  <a:pt x="1183478" y="1183478"/>
-                </a:lnTo>
-                <a:lnTo>
-                  <a:pt x="0" y="1183478"/>
-                </a:lnTo>
-                <a:lnTo>
-                  <a:pt x="0" y="0"/>
-                </a:lnTo>
-                <a:close/>
-              </a:path>
-            </a:pathLst>
-          </a:custGeom>
-          <a:blipFill>
-            <a:blip r:embed="rId13">
-              <a:extLst>
-                <a:ext uri="{96DAC541-7B7A-43D3-8B79-37D633B846F1}">
-                  <asvg:svgBlip xmlns:asvg="http://schemas.microsoft.com/office/drawing/2016/SVG/main" r:embed="rId14"/>
-                </a:ext>
-              </a:extLst>
-            </a:blip>
-            <a:stretch>
-              <a:fillRect l="0" t="0" r="0" b="0"/>
-            </a:stretch>
-          </a:blipFill>
-        </p:spPr>
-      </p:sp>
-      <p:sp>
-        <p:nvSpPr>
-          <p:cNvPr name="Freeform 20" id="20"/>
-          <p:cNvSpPr/>
-          <p:nvPr/>
-        </p:nvSpPr>
-        <p:spPr>
-          <a:xfrm flipH="false" flipV="false" rot="0">
-            <a:off x="7390154" y="2795568"/>
-            <a:ext cx="1596328" cy="1596328"/>
-          </a:xfrm>
-          <a:custGeom>
-            <a:avLst/>
-            <a:gdLst/>
-            <a:ahLst/>
-            <a:cxnLst/>
-            <a:rect r="r" b="b" t="t" l="l"/>
-            <a:pathLst>
-              <a:path h="1596328" w="1596328">
-                <a:moveTo>
-                  <a:pt x="0" y="0"/>
-                </a:moveTo>
-                <a:lnTo>
-                  <a:pt x="1596327" y="0"/>
-                </a:lnTo>
-                <a:lnTo>
-                  <a:pt x="1596327" y="1596328"/>
-                </a:lnTo>
-                <a:lnTo>
-                  <a:pt x="0" y="1596328"/>
-                </a:lnTo>
-                <a:lnTo>
-                  <a:pt x="0" y="0"/>
-                </a:lnTo>
-                <a:close/>
-              </a:path>
-            </a:pathLst>
-          </a:custGeom>
-          <a:blipFill>
-            <a:blip r:embed="rId13">
-              <a:extLst>
-                <a:ext uri="{96DAC541-7B7A-43D3-8B79-37D633B846F1}">
-                  <asvg:svgBlip xmlns:asvg="http://schemas.microsoft.com/office/drawing/2016/SVG/main" r:embed="rId14"/>
-                </a:ext>
-              </a:extLst>
-            </a:blip>
-            <a:stretch>
-              <a:fillRect l="0" t="0" r="0" b="0"/>
-            </a:stretch>
-          </a:blipFill>
-        </p:spPr>
-      </p:sp>
-      <p:sp>
-        <p:nvSpPr>
-          <p:cNvPr name="Freeform 21" id="21"/>
-          <p:cNvSpPr/>
-          <p:nvPr/>
-        </p:nvSpPr>
-        <p:spPr>
-          <a:xfrm flipH="false" flipV="false" rot="0">
-            <a:off x="11429268" y="6194608"/>
-            <a:ext cx="1430643" cy="1160121"/>
-          </a:xfrm>
-          <a:custGeom>
-            <a:avLst/>
-            <a:gdLst/>
-            <a:ahLst/>
-            <a:cxnLst/>
-            <a:rect r="r" b="b" t="t" l="l"/>
-            <a:pathLst>
-              <a:path h="1160121" w="1430643">
-                <a:moveTo>
-                  <a:pt x="0" y="0"/>
-                </a:moveTo>
-                <a:lnTo>
-                  <a:pt x="1430643" y="0"/>
-                </a:lnTo>
-                <a:lnTo>
-                  <a:pt x="1430643" y="1160121"/>
-                </a:lnTo>
-                <a:lnTo>
-                  <a:pt x="0" y="1160121"/>
-                </a:lnTo>
-                <a:lnTo>
-                  <a:pt x="0" y="0"/>
-                </a:lnTo>
-                <a:close/>
-              </a:path>
-            </a:pathLst>
-          </a:custGeom>
-          <a:blipFill>
-            <a:blip r:embed="rId15">
-              <a:extLst>
-                <a:ext uri="{96DAC541-7B7A-43D3-8B79-37D633B846F1}">
-                  <asvg:svgBlip xmlns:asvg="http://schemas.microsoft.com/office/drawing/2016/SVG/main" r:embed="rId16"/>
-                </a:ext>
-              </a:extLst>
-            </a:blip>
-            <a:stretch>
-              <a:fillRect l="0" t="0" r="0" b="0"/>
-            </a:stretch>
-          </a:blipFill>
-        </p:spPr>
-      </p:sp>
-      <p:sp>
-        <p:nvSpPr>
-          <p:cNvPr name="Freeform 22" id="22"/>
-          <p:cNvSpPr/>
-          <p:nvPr/>
-        </p:nvSpPr>
-        <p:spPr>
-          <a:xfrm flipH="false" flipV="false" rot="0">
-            <a:off x="13574286" y="6342137"/>
-            <a:ext cx="954598" cy="865063"/>
-          </a:xfrm>
-          <a:custGeom>
-            <a:avLst/>
-            <a:gdLst/>
-            <a:ahLst/>
-            <a:cxnLst/>
-            <a:rect r="r" b="b" t="t" l="l"/>
-            <a:pathLst>
-              <a:path h="865063" w="954598">
-                <a:moveTo>
-                  <a:pt x="0" y="0"/>
-                </a:moveTo>
-                <a:lnTo>
-                  <a:pt x="954597" y="0"/>
-                </a:lnTo>
-                <a:lnTo>
-                  <a:pt x="954597" y="865063"/>
-                </a:lnTo>
-                <a:lnTo>
-                  <a:pt x="0" y="865063"/>
-                </a:lnTo>
-                <a:lnTo>
-                  <a:pt x="0" y="0"/>
-                </a:lnTo>
-                <a:close/>
-              </a:path>
-            </a:pathLst>
-          </a:custGeom>
-          <a:blipFill>
-            <a:blip r:embed="rId17">
-              <a:extLst>
-                <a:ext uri="{96DAC541-7B7A-43D3-8B79-37D633B846F1}">
-                  <asvg:svgBlip xmlns:asvg="http://schemas.microsoft.com/office/drawing/2016/SVG/main" r:embed="rId18"/>
-                </a:ext>
-              </a:extLst>
-            </a:blip>
-            <a:stretch>
-              <a:fillRect l="0" t="0" r="0" b="0"/>
-            </a:stretch>
-          </a:blipFill>
-        </p:spPr>
-      </p:sp>
-      <p:sp>
-        <p:nvSpPr>
-          <p:cNvPr name="Freeform 23" id="23"/>
-          <p:cNvSpPr/>
-          <p:nvPr/>
-        </p:nvSpPr>
-        <p:spPr>
-          <a:xfrm flipH="false" flipV="false" rot="0">
-            <a:off x="6111699" y="6774669"/>
-            <a:ext cx="640097" cy="580061"/>
-          </a:xfrm>
-          <a:custGeom>
-            <a:avLst/>
-            <a:gdLst/>
-            <a:ahLst/>
-            <a:cxnLst/>
-            <a:rect r="r" b="b" t="t" l="l"/>
-            <a:pathLst>
-              <a:path h="580061" w="640097">
-                <a:moveTo>
-                  <a:pt x="0" y="0"/>
-                </a:moveTo>
-                <a:lnTo>
-                  <a:pt x="640097" y="0"/>
-                </a:lnTo>
-                <a:lnTo>
-                  <a:pt x="640097" y="580060"/>
-                </a:lnTo>
-                <a:lnTo>
-                  <a:pt x="0" y="580060"/>
-                </a:lnTo>
-                <a:lnTo>
-                  <a:pt x="0" y="0"/>
-                </a:lnTo>
-                <a:close/>
-              </a:path>
-            </a:pathLst>
-          </a:custGeom>
-          <a:blipFill>
-            <a:blip r:embed="rId17">
-              <a:extLst>
-                <a:ext uri="{96DAC541-7B7A-43D3-8B79-37D633B846F1}">
-                  <asvg:svgBlip xmlns:asvg="http://schemas.microsoft.com/office/drawing/2016/SVG/main" r:embed="rId18"/>
-                </a:ext>
-              </a:extLst>
-            </a:blip>
-            <a:stretch>
-              <a:fillRect l="0" t="0" r="0" b="0"/>
-            </a:stretch>
-          </a:blipFill>
-        </p:spPr>
-      </p:sp>
-      <p:sp>
-        <p:nvSpPr>
-          <p:cNvPr name="Freeform 24" id="24"/>
-          <p:cNvSpPr/>
-          <p:nvPr/>
-        </p:nvSpPr>
-        <p:spPr>
-          <a:xfrm flipH="false" flipV="false" rot="0">
-            <a:off x="16264765" y="2795568"/>
-            <a:ext cx="994535" cy="1093989"/>
-          </a:xfrm>
-          <a:custGeom>
-            <a:avLst/>
-            <a:gdLst/>
-            <a:ahLst/>
-            <a:cxnLst/>
-            <a:rect r="r" b="b" t="t" l="l"/>
-            <a:pathLst>
-              <a:path h="1093989" w="994535">
-                <a:moveTo>
-                  <a:pt x="0" y="0"/>
-                </a:moveTo>
-                <a:lnTo>
-                  <a:pt x="994535" y="0"/>
-                </a:lnTo>
-                <a:lnTo>
-                  <a:pt x="994535" y="1093989"/>
-                </a:lnTo>
-                <a:lnTo>
-                  <a:pt x="0" y="1093989"/>
-                </a:lnTo>
-                <a:lnTo>
-                  <a:pt x="0" y="0"/>
-                </a:lnTo>
-                <a:close/>
-              </a:path>
-            </a:pathLst>
-          </a:custGeom>
-          <a:blipFill>
-            <a:blip r:embed="rId19">
-              <a:extLst>
-                <a:ext uri="{96DAC541-7B7A-43D3-8B79-37D633B846F1}">
-                  <asvg:svgBlip xmlns:asvg="http://schemas.microsoft.com/office/drawing/2016/SVG/main" r:embed="rId20"/>
-                </a:ext>
-              </a:extLst>
-            </a:blip>
-            <a:stretch>
-              <a:fillRect l="0" t="0" r="0" b="0"/>
-            </a:stretch>
-          </a:blipFill>
-        </p:spPr>
-      </p:sp>
-      <p:sp>
-        <p:nvSpPr>
-          <p:cNvPr name="Freeform 25" id="25"/>
-          <p:cNvSpPr/>
-          <p:nvPr/>
-        </p:nvSpPr>
-        <p:spPr>
-          <a:xfrm flipH="false" flipV="false" rot="0">
-            <a:off x="16105487" y="4333610"/>
-            <a:ext cx="1401526" cy="1256277"/>
-          </a:xfrm>
-          <a:custGeom>
-            <a:avLst/>
-            <a:gdLst/>
-            <a:ahLst/>
-            <a:cxnLst/>
-            <a:rect r="r" b="b" t="t" l="l"/>
-            <a:pathLst>
-              <a:path h="1256277" w="1401526">
-                <a:moveTo>
-                  <a:pt x="0" y="0"/>
-                </a:moveTo>
-                <a:lnTo>
-                  <a:pt x="1401526" y="0"/>
-                </a:lnTo>
-                <a:lnTo>
-                  <a:pt x="1401526" y="1256277"/>
-                </a:lnTo>
-                <a:lnTo>
-                  <a:pt x="0" y="1256277"/>
-                </a:lnTo>
-                <a:lnTo>
-                  <a:pt x="0" y="0"/>
-                </a:lnTo>
-                <a:close/>
-              </a:path>
-            </a:pathLst>
-          </a:custGeom>
-          <a:blipFill>
-            <a:blip r:embed="rId21">
-              <a:extLst>
-                <a:ext uri="{96DAC541-7B7A-43D3-8B79-37D633B846F1}">
-                  <asvg:svgBlip xmlns:asvg="http://schemas.microsoft.com/office/drawing/2016/SVG/main" r:embed="rId22"/>
-                </a:ext>
-              </a:extLst>
-            </a:blip>
-            <a:stretch>
-              <a:fillRect l="0" t="0" r="0" b="0"/>
-            </a:stretch>
-          </a:blipFill>
-        </p:spPr>
-      </p:sp>
-      <p:sp>
-        <p:nvSpPr>
-          <p:cNvPr name="Freeform 26" id="26"/>
-          <p:cNvSpPr/>
-          <p:nvPr/>
-        </p:nvSpPr>
-        <p:spPr>
-          <a:xfrm flipH="false" flipV="false" rot="0">
-            <a:off x="16105487" y="5919883"/>
-            <a:ext cx="1401526" cy="1557251"/>
-          </a:xfrm>
-          <a:custGeom>
-            <a:avLst/>
-            <a:gdLst/>
-            <a:ahLst/>
-            <a:cxnLst/>
-            <a:rect r="r" b="b" t="t" l="l"/>
-            <a:pathLst>
-              <a:path h="1557251" w="1401526">
-                <a:moveTo>
-                  <a:pt x="0" y="0"/>
-                </a:moveTo>
-                <a:lnTo>
-                  <a:pt x="1401526" y="0"/>
-                </a:lnTo>
-                <a:lnTo>
-                  <a:pt x="1401526" y="1557251"/>
-                </a:lnTo>
-                <a:lnTo>
-                  <a:pt x="0" y="1557251"/>
-                </a:lnTo>
-                <a:lnTo>
-                  <a:pt x="0" y="0"/>
-                </a:lnTo>
-                <a:close/>
-              </a:path>
-            </a:pathLst>
-          </a:custGeom>
-          <a:blipFill>
-            <a:blip r:embed="rId23">
-              <a:extLst>
-                <a:ext uri="{96DAC541-7B7A-43D3-8B79-37D633B846F1}">
-                  <asvg:svgBlip xmlns:asvg="http://schemas.microsoft.com/office/drawing/2016/SVG/main" r:embed="rId24"/>
-                </a:ext>
-              </a:extLst>
-            </a:blip>
-            <a:stretch>
-              <a:fillRect l="0" t="0" r="0" b="0"/>
-            </a:stretch>
-          </a:blipFill>
-        </p:spPr>
-      </p:sp>
-      <p:sp>
-        <p:nvSpPr>
-          <p:cNvPr name="Freeform 27" id="27"/>
-          <p:cNvSpPr/>
-          <p:nvPr/>
-        </p:nvSpPr>
-        <p:spPr>
-          <a:xfrm flipH="false" flipV="false" rot="0">
-            <a:off x="7056373" y="4614983"/>
-            <a:ext cx="1949835" cy="1669546"/>
-          </a:xfrm>
-          <a:custGeom>
-            <a:avLst/>
-            <a:gdLst/>
-            <a:ahLst/>
-            <a:cxnLst/>
-            <a:rect r="r" b="b" t="t" l="l"/>
-            <a:pathLst>
-              <a:path h="1669546" w="1949835">
-                <a:moveTo>
-                  <a:pt x="0" y="0"/>
-                </a:moveTo>
-                <a:lnTo>
-                  <a:pt x="1949835" y="0"/>
-                </a:lnTo>
-                <a:lnTo>
-                  <a:pt x="1949835" y="1669546"/>
-                </a:lnTo>
-                <a:lnTo>
-                  <a:pt x="0" y="1669546"/>
-                </a:lnTo>
-                <a:lnTo>
-                  <a:pt x="0" y="0"/>
-                </a:lnTo>
-                <a:close/>
-              </a:path>
-            </a:pathLst>
-          </a:custGeom>
-          <a:blipFill>
-            <a:blip r:embed="rId11">
-              <a:extLst>
-                <a:ext uri="{96DAC541-7B7A-43D3-8B79-37D633B846F1}">
-                  <asvg:svgBlip xmlns:asvg="http://schemas.microsoft.com/office/drawing/2016/SVG/main" r:embed="rId12"/>
-                </a:ext>
-              </a:extLst>
-            </a:blip>
-            <a:stretch>
-              <a:fillRect l="0" t="0" r="0" b="0"/>
-            </a:stretch>
-          </a:blipFill>
-        </p:spPr>
-      </p:sp>
-      <p:sp>
-        <p:nvSpPr>
-          <p:cNvPr name="Freeform 28" id="28"/>
-          <p:cNvSpPr/>
-          <p:nvPr/>
-        </p:nvSpPr>
-        <p:spPr>
-          <a:xfrm flipH="false" flipV="false" rot="0">
-            <a:off x="7235140" y="6390010"/>
-            <a:ext cx="1448711" cy="1298572"/>
-          </a:xfrm>
-          <a:custGeom>
-            <a:avLst/>
-            <a:gdLst/>
-            <a:ahLst/>
-            <a:cxnLst/>
-            <a:rect r="r" b="b" t="t" l="l"/>
-            <a:pathLst>
-              <a:path h="1298572" w="1448711">
-                <a:moveTo>
-                  <a:pt x="0" y="0"/>
-                </a:moveTo>
-                <a:lnTo>
-                  <a:pt x="1448711" y="0"/>
-                </a:lnTo>
-                <a:lnTo>
-                  <a:pt x="1448711" y="1298572"/>
-                </a:lnTo>
-                <a:lnTo>
-                  <a:pt x="0" y="1298572"/>
-                </a:lnTo>
-                <a:lnTo>
-                  <a:pt x="0" y="0"/>
-                </a:lnTo>
-                <a:close/>
-              </a:path>
-            </a:pathLst>
-          </a:custGeom>
-          <a:blipFill>
-            <a:blip r:embed="rId6"/>
-            <a:stretch>
-              <a:fillRect l="0" t="0" r="0" b="0"/>
-            </a:stretch>
-          </a:blipFill>
-        </p:spPr>
-      </p:sp>
-      <p:sp>
-        <p:nvSpPr>
-          <p:cNvPr name="Freeform 29" id="29"/>
-          <p:cNvSpPr/>
-          <p:nvPr/>
-        </p:nvSpPr>
-        <p:spPr>
-          <a:xfrm flipH="false" flipV="false" rot="0">
-            <a:off x="9144000" y="6698509"/>
-            <a:ext cx="828115" cy="861498"/>
-          </a:xfrm>
-          <a:custGeom>
-            <a:avLst/>
-            <a:gdLst/>
-            <a:ahLst/>
-            <a:cxnLst/>
-            <a:rect r="r" b="b" t="t" l="l"/>
-            <a:pathLst>
-              <a:path h="861498" w="828115">
-                <a:moveTo>
-                  <a:pt x="0" y="0"/>
-                </a:moveTo>
-                <a:lnTo>
-                  <a:pt x="828115" y="0"/>
-                </a:lnTo>
-                <a:lnTo>
-                  <a:pt x="828115" y="861498"/>
-                </a:lnTo>
-                <a:lnTo>
-                  <a:pt x="0" y="861498"/>
-                </a:lnTo>
-                <a:lnTo>
-                  <a:pt x="0" y="0"/>
-                </a:lnTo>
-                <a:close/>
-              </a:path>
-            </a:pathLst>
-          </a:custGeom>
-          <a:blipFill>
-            <a:blip r:embed="rId25">
-              <a:extLst>
-                <a:ext uri="{96DAC541-7B7A-43D3-8B79-37D633B846F1}">
-                  <asvg:svgBlip xmlns:asvg="http://schemas.microsoft.com/office/drawing/2016/SVG/main" r:embed="rId26"/>
-                </a:ext>
-              </a:extLst>
-            </a:blip>
-            <a:stretch>
-              <a:fillRect l="0" t="0" r="0" b="0"/>
-            </a:stretch>
-          </a:blipFill>
-        </p:spPr>
-      </p:sp>
-      <p:sp>
-        <p:nvSpPr>
-          <p:cNvPr name="TextBox 30" id="30"/>
-          <p:cNvSpPr txBox="true"/>
-          <p:nvPr/>
-        </p:nvSpPr>
-        <p:spPr>
-          <a:xfrm rot="0">
-            <a:off x="4110616" y="789079"/>
-            <a:ext cx="9655149" cy="898392"/>
-          </a:xfrm>
-          <a:prstGeom prst="rect">
-            <a:avLst/>
-          </a:prstGeom>
-        </p:spPr>
-        <p:txBody>
-          <a:bodyPr anchor="t" rtlCol="false" tIns="0" lIns="0" bIns="0" rIns="0">
-            <a:spAutoFit/>
-          </a:bodyPr>
-          <a:lstStyle/>
-          <a:p>
-            <a:pPr algn="ctr" marL="0" indent="0" lvl="0">
-              <a:lnSpc>
-                <a:spcPts val="7291"/>
-              </a:lnSpc>
-              <a:spcBef>
-                <a:spcPct val="0"/>
-              </a:spcBef>
-            </a:pPr>
-            <a:r>
-              <a:rPr lang="en-US" sz="5283" spc="184">
-                <a:solidFill>
-                  <a:srgbClr val="FFFFFF"/>
-                </a:solidFill>
-                <a:latin typeface="Archivo Black"/>
-                <a:ea typeface="Archivo Black"/>
-                <a:cs typeface="Archivo Black"/>
-                <a:sym typeface="Archivo Black"/>
-              </a:rPr>
-              <a:t>RESUMEN APLICATIVO</a:t>
-            </a:r>
-          </a:p>
-        </p:txBody>
-      </p:sp>
-      <p:sp>
-        <p:nvSpPr>
-          <p:cNvPr name="TextBox 31" id="31"/>
-          <p:cNvSpPr txBox="true"/>
-          <p:nvPr/>
-        </p:nvSpPr>
-        <p:spPr>
-          <a:xfrm rot="0">
-            <a:off x="16931495" y="9677125"/>
-            <a:ext cx="152400" cy="200025"/>
-          </a:xfrm>
-          <a:prstGeom prst="rect">
-            <a:avLst/>
-          </a:prstGeom>
-        </p:spPr>
-        <p:txBody>
-          <a:bodyPr anchor="t" rtlCol="false" tIns="0" lIns="0" bIns="0" rIns="0" wrap="none">
-            <a:spAutoFit/>
-          </a:bodyPr>
-          <a:lstStyle/>
-          <a:p>
-            <a:pPr algn="ctr">
-              <a:lnSpc>
-                <a:spcPts val="2800"/>
-              </a:lnSpc>
-              <a:spcBef>
-                <a:spcPct val="0"/>
-              </a:spcBef>
-            </a:pPr>
-            <a:r>
-              <a:rPr lang="en-US" sz="2000">
-                <a:solidFill>
-                  <a:srgbClr val="FFFFFF"/>
-                </a:solidFill>
-                <a:latin typeface="Open Sans"/>
-                <a:ea typeface="Open Sans"/>
-                <a:cs typeface="Open Sans"/>
-                <a:sym typeface="Open Sans"/>
-              </a:rPr>
-              <a:t>Página 13</a:t>
-            </a:r>
-          </a:p>
-        </p:txBody>
-      </p:sp>
-    </p:spTree>
-  </p:cSld>
-  <p:clrMapOvr>
-    <a:masterClrMapping/>
-  </p:clrMapOvr>
-</p:sld>
-</file>
-
-<file path=ppt/slides/slide14.xml><?xml version="1.0" encoding="utf-8"?>
+<file path=ppt/slides/slide12.xml><?xml version="1.0" encoding="utf-8"?>
 <p:sld xmlns:p="http://schemas.openxmlformats.org/presentationml/2006/main" xmlns:a="http://schemas.openxmlformats.org/drawingml/2006/main" xmlns:r="http://schemas.openxmlformats.org/officeDocument/2006/relationships">
   <p:cSld>
     <p:bg>
@@ -8005,55 +5966,9 @@
           </a:blipFill>
         </p:spPr>
       </p:sp>
-      <p:sp>
-        <p:nvSpPr>
-          <p:cNvPr name="Freeform 8" id="8"/>
-          <p:cNvSpPr/>
-          <p:nvPr/>
-        </p:nvSpPr>
-        <p:spPr>
-          <a:xfrm flipH="false" flipV="false" rot="0">
-            <a:off x="12833394" y="6585475"/>
-            <a:ext cx="2011615" cy="2011615"/>
-          </a:xfrm>
-          <a:custGeom>
-            <a:avLst/>
-            <a:gdLst/>
-            <a:ahLst/>
-            <a:cxnLst/>
-            <a:rect r="r" b="b" t="t" l="l"/>
-            <a:pathLst>
-              <a:path h="2011615" w="2011615">
-                <a:moveTo>
-                  <a:pt x="0" y="0"/>
-                </a:moveTo>
-                <a:lnTo>
-                  <a:pt x="2011614" y="0"/>
-                </a:lnTo>
-                <a:lnTo>
-                  <a:pt x="2011614" y="2011615"/>
-                </a:lnTo>
-                <a:lnTo>
-                  <a:pt x="0" y="2011615"/>
-                </a:lnTo>
-                <a:lnTo>
-                  <a:pt x="0" y="0"/>
-                </a:lnTo>
-                <a:close/>
-              </a:path>
-            </a:pathLst>
-          </a:custGeom>
-          <a:blipFill>
-            <a:blip r:embed="rId5"/>
-            <a:stretch>
-              <a:fillRect l="0" t="0" r="0" b="0"/>
-            </a:stretch>
-          </a:blipFill>
-        </p:spPr>
-      </p:sp>
       <p:grpSp>
         <p:nvGrpSpPr>
-          <p:cNvPr name="Group 9" id="9"/>
+          <p:cNvPr name="Group 8" id="8"/>
           <p:cNvGrpSpPr/>
           <p:nvPr/>
         </p:nvGrpSpPr>
@@ -8067,7 +5982,7 @@
         </p:grpSpPr>
         <p:sp>
           <p:nvSpPr>
-            <p:cNvPr name="Freeform 10" id="10"/>
+            <p:cNvPr name="Freeform 9" id="9"/>
             <p:cNvSpPr/>
             <p:nvPr/>
           </p:nvSpPr>
@@ -8119,7 +6034,7 @@
         </p:sp>
         <p:sp>
           <p:nvSpPr>
-            <p:cNvPr name="TextBox 11" id="11"/>
+            <p:cNvPr name="TextBox 10" id="10"/>
             <p:cNvSpPr txBox="true"/>
             <p:nvPr/>
           </p:nvSpPr>
@@ -8145,6 +6060,52 @@
           </p:txBody>
         </p:sp>
       </p:grpSp>
+      <p:sp>
+        <p:nvSpPr>
+          <p:cNvPr name="Freeform 11" id="11"/>
+          <p:cNvSpPr/>
+          <p:nvPr/>
+        </p:nvSpPr>
+        <p:spPr>
+          <a:xfrm flipH="false" flipV="false" rot="0">
+            <a:off x="13118589" y="6896711"/>
+            <a:ext cx="1699666" cy="1699666"/>
+          </a:xfrm>
+          <a:custGeom>
+            <a:avLst/>
+            <a:gdLst/>
+            <a:ahLst/>
+            <a:cxnLst/>
+            <a:rect r="r" b="b" t="t" l="l"/>
+            <a:pathLst>
+              <a:path h="1699666" w="1699666">
+                <a:moveTo>
+                  <a:pt x="0" y="0"/>
+                </a:moveTo>
+                <a:lnTo>
+                  <a:pt x="1699666" y="0"/>
+                </a:lnTo>
+                <a:lnTo>
+                  <a:pt x="1699666" y="1699666"/>
+                </a:lnTo>
+                <a:lnTo>
+                  <a:pt x="0" y="1699666"/>
+                </a:lnTo>
+                <a:lnTo>
+                  <a:pt x="0" y="0"/>
+                </a:lnTo>
+                <a:close/>
+              </a:path>
+            </a:pathLst>
+          </a:custGeom>
+          <a:blipFill>
+            <a:blip r:embed="rId5"/>
+            <a:stretch>
+              <a:fillRect l="0" t="0" r="0" b="0"/>
+            </a:stretch>
+          </a:blipFill>
+        </p:spPr>
+      </p:sp>
       <p:sp>
         <p:nvSpPr>
           <p:cNvPr name="TextBox 12" id="12"/>
@@ -13961,7 +11922,7 @@
         </p:nvGrpSpPr>
         <p:grpSpPr>
           <a:xfrm rot="0">
-            <a:off x="6836071" y="313458"/>
+            <a:off x="6597208" y="317296"/>
             <a:ext cx="3910547" cy="923910"/>
             <a:chOff x="0" y="0"/>
             <a:chExt cx="909243" cy="214819"/>
@@ -14193,8 +12154,8 @@
         </p:nvSpPr>
         <p:spPr>
           <a:xfrm flipH="false" flipV="false" rot="0">
-            <a:off x="10475907" y="3029854"/>
-            <a:ext cx="5826726" cy="2134038"/>
+            <a:off x="10503735" y="1928634"/>
+            <a:ext cx="5388887" cy="1973680"/>
           </a:xfrm>
           <a:custGeom>
             <a:avLst/>
@@ -14203,18 +12164,18 @@
             <a:cxnLst/>
             <a:rect r="r" b="b" t="t" l="l"/>
             <a:pathLst>
-              <a:path h="2134038" w="5826726">
+              <a:path h="1973680" w="5388887">
                 <a:moveTo>
                   <a:pt x="0" y="0"/>
                 </a:moveTo>
                 <a:lnTo>
-                  <a:pt x="5826725" y="0"/>
-                </a:lnTo>
-                <a:lnTo>
-                  <a:pt x="5826725" y="2134038"/>
-                </a:lnTo>
-                <a:lnTo>
-                  <a:pt x="0" y="2134038"/>
+                  <a:pt x="5388887" y="0"/>
+                </a:lnTo>
+                <a:lnTo>
+                  <a:pt x="5388887" y="1973680"/>
+                </a:lnTo>
+                <a:lnTo>
+                  <a:pt x="0" y="1973680"/>
                 </a:lnTo>
                 <a:lnTo>
                   <a:pt x="0" y="0"/>
@@ -14285,7 +12246,7 @@
         </p:nvSpPr>
         <p:spPr>
           <a:xfrm flipH="false" flipV="false" rot="0">
-            <a:off x="9962497" y="6983200"/>
+            <a:off x="9771406" y="4799819"/>
             <a:ext cx="6853546" cy="1816190"/>
           </a:xfrm>
           <a:custGeom>
@@ -14413,7 +12374,7 @@
         </p:nvSpPr>
         <p:spPr>
           <a:xfrm rot="0">
-            <a:off x="11399630" y="2163374"/>
+            <a:off x="11288160" y="1202580"/>
             <a:ext cx="4296694" cy="531495"/>
           </a:xfrm>
           <a:prstGeom prst="rect">
@@ -14539,7 +12500,7 @@
         </p:nvSpPr>
         <p:spPr>
           <a:xfrm rot="0">
-            <a:off x="11399630" y="5938588"/>
+            <a:off x="11049831" y="4020673"/>
             <a:ext cx="4296694" cy="531495"/>
           </a:xfrm>
           <a:prstGeom prst="rect">
@@ -14571,6 +12532,231 @@
             </a:r>
           </a:p>
         </p:txBody>
+      </p:sp>
+      <p:sp>
+        <p:nvSpPr>
+          <p:cNvPr name="TextBox 19" id="19"/>
+          <p:cNvSpPr txBox="true"/>
+          <p:nvPr/>
+        </p:nvSpPr>
+        <p:spPr>
+          <a:xfrm rot="0">
+            <a:off x="9442042" y="6916525"/>
+            <a:ext cx="10136117" cy="438150"/>
+          </a:xfrm>
+          <a:prstGeom prst="rect">
+            <a:avLst/>
+          </a:prstGeom>
+        </p:spPr>
+        <p:txBody>
+          <a:bodyPr anchor="t" rtlCol="false" tIns="0" lIns="0" bIns="0" rIns="0">
+            <a:spAutoFit/>
+          </a:bodyPr>
+          <a:lstStyle/>
+          <a:p>
+            <a:pPr algn="l">
+              <a:lnSpc>
+                <a:spcPts val="3449"/>
+              </a:lnSpc>
+            </a:pPr>
+            <a:r>
+              <a:rPr lang="en-US" sz="2499" spc="244">
+                <a:solidFill>
+                  <a:srgbClr val="FFFFFF"/>
+                </a:solidFill>
+                <a:latin typeface="Poppins"/>
+                <a:ea typeface="Poppins"/>
+                <a:cs typeface="Poppins"/>
+                <a:sym typeface="Poppins"/>
+              </a:rPr>
+              <a:t>Consultar dashboard (métricas del aplicativo)</a:t>
+            </a:r>
+          </a:p>
+        </p:txBody>
+      </p:sp>
+      <p:sp>
+        <p:nvSpPr>
+          <p:cNvPr name="Freeform 20" id="20"/>
+          <p:cNvSpPr/>
+          <p:nvPr/>
+        </p:nvSpPr>
+        <p:spPr>
+          <a:xfrm flipH="false" flipV="false" rot="0">
+            <a:off x="9726904" y="7649950"/>
+            <a:ext cx="3471275" cy="2006894"/>
+          </a:xfrm>
+          <a:custGeom>
+            <a:avLst/>
+            <a:gdLst/>
+            <a:ahLst/>
+            <a:cxnLst/>
+            <a:rect r="r" b="b" t="t" l="l"/>
+            <a:pathLst>
+              <a:path h="2006894" w="3471275">
+                <a:moveTo>
+                  <a:pt x="0" y="0"/>
+                </a:moveTo>
+                <a:lnTo>
+                  <a:pt x="3471275" y="0"/>
+                </a:lnTo>
+                <a:lnTo>
+                  <a:pt x="3471275" y="2006894"/>
+                </a:lnTo>
+                <a:lnTo>
+                  <a:pt x="0" y="2006894"/>
+                </a:lnTo>
+                <a:lnTo>
+                  <a:pt x="0" y="0"/>
+                </a:lnTo>
+                <a:close/>
+              </a:path>
+            </a:pathLst>
+          </a:custGeom>
+          <a:blipFill>
+            <a:blip r:embed="rId7"/>
+            <a:stretch>
+              <a:fillRect l="-1390" t="0" r="-1390" b="0"/>
+            </a:stretch>
+          </a:blipFill>
+        </p:spPr>
+      </p:sp>
+      <p:sp>
+        <p:nvSpPr>
+          <p:cNvPr name="Freeform 21" id="21"/>
+          <p:cNvSpPr/>
+          <p:nvPr/>
+        </p:nvSpPr>
+        <p:spPr>
+          <a:xfrm flipH="false" flipV="false" rot="0">
+            <a:off x="13327498" y="7846406"/>
+            <a:ext cx="2257356" cy="1015810"/>
+          </a:xfrm>
+          <a:custGeom>
+            <a:avLst/>
+            <a:gdLst/>
+            <a:ahLst/>
+            <a:cxnLst/>
+            <a:rect r="r" b="b" t="t" l="l"/>
+            <a:pathLst>
+              <a:path h="1015810" w="2257356">
+                <a:moveTo>
+                  <a:pt x="0" y="0"/>
+                </a:moveTo>
+                <a:lnTo>
+                  <a:pt x="2257356" y="0"/>
+                </a:lnTo>
+                <a:lnTo>
+                  <a:pt x="2257356" y="1015810"/>
+                </a:lnTo>
+                <a:lnTo>
+                  <a:pt x="0" y="1015810"/>
+                </a:lnTo>
+                <a:lnTo>
+                  <a:pt x="0" y="0"/>
+                </a:lnTo>
+                <a:close/>
+              </a:path>
+            </a:pathLst>
+          </a:custGeom>
+          <a:blipFill>
+            <a:blip r:embed="rId8"/>
+            <a:stretch>
+              <a:fillRect l="0" t="0" r="0" b="0"/>
+            </a:stretch>
+          </a:blipFill>
+        </p:spPr>
+      </p:sp>
+      <p:sp>
+        <p:nvSpPr>
+          <p:cNvPr name="Freeform 22" id="22"/>
+          <p:cNvSpPr/>
+          <p:nvPr/>
+        </p:nvSpPr>
+        <p:spPr>
+          <a:xfrm flipH="false" flipV="false" rot="0">
+            <a:off x="15718204" y="7846406"/>
+            <a:ext cx="2371558" cy="1523726"/>
+          </a:xfrm>
+          <a:custGeom>
+            <a:avLst/>
+            <a:gdLst/>
+            <a:ahLst/>
+            <a:cxnLst/>
+            <a:rect r="r" b="b" t="t" l="l"/>
+            <a:pathLst>
+              <a:path h="1523726" w="2371558">
+                <a:moveTo>
+                  <a:pt x="0" y="0"/>
+                </a:moveTo>
+                <a:lnTo>
+                  <a:pt x="2371558" y="0"/>
+                </a:lnTo>
+                <a:lnTo>
+                  <a:pt x="2371558" y="1523726"/>
+                </a:lnTo>
+                <a:lnTo>
+                  <a:pt x="0" y="1523726"/>
+                </a:lnTo>
+                <a:lnTo>
+                  <a:pt x="0" y="0"/>
+                </a:lnTo>
+                <a:close/>
+              </a:path>
+            </a:pathLst>
+          </a:custGeom>
+          <a:blipFill>
+            <a:blip r:embed="rId9"/>
+            <a:stretch>
+              <a:fillRect l="0" t="0" r="0" b="0"/>
+            </a:stretch>
+          </a:blipFill>
+        </p:spPr>
+      </p:sp>
+      <p:sp>
+        <p:nvSpPr>
+          <p:cNvPr name="Freeform 23" id="23"/>
+          <p:cNvSpPr/>
+          <p:nvPr/>
+        </p:nvSpPr>
+        <p:spPr>
+          <a:xfrm flipH="false" flipV="false" rot="0">
+            <a:off x="13327498" y="8940556"/>
+            <a:ext cx="2257356" cy="331603"/>
+          </a:xfrm>
+          <a:custGeom>
+            <a:avLst/>
+            <a:gdLst/>
+            <a:ahLst/>
+            <a:cxnLst/>
+            <a:rect r="r" b="b" t="t" l="l"/>
+            <a:pathLst>
+              <a:path h="331603" w="2257356">
+                <a:moveTo>
+                  <a:pt x="0" y="0"/>
+                </a:moveTo>
+                <a:lnTo>
+                  <a:pt x="2257356" y="0"/>
+                </a:lnTo>
+                <a:lnTo>
+                  <a:pt x="2257356" y="331603"/>
+                </a:lnTo>
+                <a:lnTo>
+                  <a:pt x="0" y="331603"/>
+                </a:lnTo>
+                <a:lnTo>
+                  <a:pt x="0" y="0"/>
+                </a:lnTo>
+                <a:close/>
+              </a:path>
+            </a:pathLst>
+          </a:custGeom>
+          <a:blipFill>
+            <a:blip r:embed="rId10"/>
+            <a:stretch>
+              <a:fillRect l="0" t="0" r="0" b="-14874"/>
+            </a:stretch>
+          </a:blipFill>
+        </p:spPr>
       </p:sp>
     </p:spTree>
   </p:cSld>

--- a/documentacion_extra/presentacion/cuidaDos.pptx
+++ b/documentacion_extra/presentacion/cuidaDos.pptx
@@ -8191,7 +8191,7 @@
         </p:nvSpPr>
         <p:spPr>
           <a:xfrm rot="0">
-            <a:off x="5591677" y="6376255"/>
+            <a:off x="5459664" y="6376255"/>
             <a:ext cx="899357" cy="272198"/>
           </a:xfrm>
           <a:prstGeom prst="rect">
@@ -8773,8 +8773,8 @@
         </p:nvSpPr>
         <p:spPr>
           <a:xfrm rot="0">
-            <a:off x="3390239" y="3264861"/>
-            <a:ext cx="12762620" cy="4944241"/>
+            <a:off x="2976208" y="3153392"/>
+            <a:ext cx="13558833" cy="6001516"/>
           </a:xfrm>
           <a:prstGeom prst="rect">
             <a:avLst/>
@@ -8831,7 +8831,7 @@
                 <a:cs typeface="Poppins Bold"/>
                 <a:sym typeface="Poppins Bold"/>
               </a:rPr>
-              <a:t>Sistema de Valoraciones y Reputación.</a:t>
+              <a:t>Sistema de Valoraciones.</a:t>
             </a:r>
           </a:p>
           <a:p>
@@ -8889,6 +8889,48 @@
               </a:rPr>
               <a:t>Expansión del Módulo de Inteligencia Artificial. Matchmaking Inteligente: el cliente describe el problema en lenguaje natural y la IA filtra la base de datos y le propone los 3 perfiles profesionales más adecuados.</a:t>
             </a:r>
+          </a:p>
+          <a:p>
+            <a:pPr algn="l">
+              <a:lnSpc>
+                <a:spcPts val="2828"/>
+              </a:lnSpc>
+            </a:pPr>
+          </a:p>
+          <a:p>
+            <a:pPr algn="l" marL="442554" indent="-221277" lvl="1">
+              <a:lnSpc>
+                <a:spcPts val="2828"/>
+              </a:lnSpc>
+              <a:buFont typeface="Arial"/>
+              <a:buChar char="•"/>
+            </a:pPr>
+            <a:r>
+              <a:rPr lang="en-US" b="true" sz="2049" spc="200">
+                <a:solidFill>
+                  <a:srgbClr val="344F51"/>
+                </a:solidFill>
+                <a:latin typeface="Poppins Bold"/>
+                <a:ea typeface="Poppins Bold"/>
+                <a:cs typeface="Poppins Bold"/>
+                <a:sym typeface="Poppins Bold"/>
+              </a:rPr>
+              <a:t>Dar de alta a los usuarios de nuevo por los adnimistradores</a:t>
+            </a:r>
+          </a:p>
+          <a:p>
+            <a:pPr algn="l">
+              <a:lnSpc>
+                <a:spcPts val="2828"/>
+              </a:lnSpc>
+            </a:pPr>
+          </a:p>
+          <a:p>
+            <a:pPr algn="l">
+              <a:lnSpc>
+                <a:spcPts val="2828"/>
+              </a:lnSpc>
+            </a:pPr>
           </a:p>
           <a:p>
             <a:pPr algn="l">

--- a/documentacion_extra/presentacion/cuidaDos.pptx
+++ b/documentacion_extra/presentacion/cuidaDos.pptx
@@ -8915,7 +8915,7 @@
                 <a:cs typeface="Poppins Bold"/>
                 <a:sym typeface="Poppins Bold"/>
               </a:rPr>
-              <a:t>Dar de alta a los usuarios de nuevo por los adnimistradores</a:t>
+              <a:t>Dar de alta a los usuarios de nuevo por los adnimistradores.</a:t>
             </a:r>
           </a:p>
           <a:p>

--- a/documentacion_extra/presentacion/cuidaDos.pptx
+++ b/documentacion_extra/presentacion/cuidaDos.pptx
@@ -6371,10 +6371,10 @@
         </p:nvGrpSpPr>
         <p:grpSpPr>
           <a:xfrm rot="0">
-            <a:off x="-2591018" y="2082056"/>
-            <a:ext cx="11567554" cy="1713680"/>
+            <a:off x="-2785357" y="538989"/>
+            <a:ext cx="7162260" cy="1961344"/>
             <a:chOff x="0" y="0"/>
-            <a:chExt cx="1121219" cy="166103"/>
+            <a:chExt cx="1012764" cy="277340"/>
           </a:xfrm>
         </p:grpSpPr>
         <p:sp>
@@ -6386,7 +6386,7 @@
           <p:spPr>
             <a:xfrm flipH="false" flipV="false" rot="0">
               <a:off x="0" y="0"/>
-              <a:ext cx="1121219" cy="166103"/>
+              <a:ext cx="1012764" cy="277340"/>
             </a:xfrm>
             <a:custGeom>
               <a:avLst/>
@@ -6395,21 +6395,21 @@
               <a:cxnLst/>
               <a:rect r="r" b="b" t="t" l="l"/>
               <a:pathLst>
-                <a:path h="166103" w="1121219">
+                <a:path h="277340" w="1012764">
                   <a:moveTo>
-                    <a:pt x="918019" y="0"/>
+                    <a:pt x="809564" y="0"/>
                   </a:moveTo>
                   <a:lnTo>
                     <a:pt x="0" y="0"/>
                   </a:lnTo>
                   <a:lnTo>
-                    <a:pt x="203200" y="166103"/>
-                  </a:lnTo>
-                  <a:lnTo>
-                    <a:pt x="1121219" y="166103"/>
-                  </a:lnTo>
-                  <a:lnTo>
-                    <a:pt x="918019" y="0"/>
+                    <a:pt x="203200" y="277340"/>
+                  </a:lnTo>
+                  <a:lnTo>
+                    <a:pt x="1012764" y="277340"/>
+                  </a:lnTo>
+                  <a:lnTo>
+                    <a:pt x="809564" y="0"/>
                   </a:lnTo>
                   <a:close/>
                 </a:path>
@@ -6434,7 +6434,7 @@
           <p:spPr>
             <a:xfrm>
               <a:off x="101600" y="-19050"/>
-              <a:ext cx="918019" cy="185153"/>
+              <a:ext cx="809564" cy="296390"/>
             </a:xfrm>
             <a:prstGeom prst="rect">
               <a:avLst/>
@@ -6464,8 +6464,8 @@
         </p:nvSpPr>
         <p:spPr>
           <a:xfrm flipH="false" flipV="false" rot="0">
-            <a:off x="2453908" y="4640836"/>
-            <a:ext cx="3873132" cy="4289649"/>
+            <a:off x="878202" y="4555916"/>
+            <a:ext cx="2340497" cy="2592195"/>
           </a:xfrm>
           <a:custGeom>
             <a:avLst/>
@@ -6474,18 +6474,18 @@
             <a:cxnLst/>
             <a:rect r="r" b="b" t="t" l="l"/>
             <a:pathLst>
-              <a:path h="4289649" w="3873132">
+              <a:path h="2592195" w="2340497">
                 <a:moveTo>
                   <a:pt x="0" y="0"/>
                 </a:moveTo>
                 <a:lnTo>
-                  <a:pt x="3873132" y="0"/>
-                </a:lnTo>
-                <a:lnTo>
-                  <a:pt x="3873132" y="4289649"/>
-                </a:lnTo>
-                <a:lnTo>
-                  <a:pt x="0" y="4289649"/>
+                  <a:pt x="2340498" y="0"/>
+                </a:lnTo>
+                <a:lnTo>
+                  <a:pt x="2340498" y="2592195"/>
+                </a:lnTo>
+                <a:lnTo>
+                  <a:pt x="0" y="2592195"/>
                 </a:lnTo>
                 <a:lnTo>
                   <a:pt x="0" y="0"/>
@@ -6516,7 +6516,7 @@
         </p:nvSpPr>
         <p:spPr>
           <a:xfrm flipH="false" flipV="false" rot="0">
-            <a:off x="5143896" y="7700469"/>
+            <a:off x="2048451" y="6513095"/>
             <a:ext cx="1510002" cy="1557831"/>
           </a:xfrm>
           <a:custGeom>
@@ -6562,8 +6562,8 @@
         </p:nvSpPr>
         <p:spPr>
           <a:xfrm flipH="false" flipV="false" rot="0">
-            <a:off x="10604811" y="143786"/>
-            <a:ext cx="5874664" cy="9999428"/>
+            <a:off x="5105746" y="639089"/>
+            <a:ext cx="12153554" cy="9008822"/>
           </a:xfrm>
           <a:custGeom>
             <a:avLst/>
@@ -6572,18 +6572,18 @@
             <a:cxnLst/>
             <a:rect r="r" b="b" t="t" l="l"/>
             <a:pathLst>
-              <a:path h="9999428" w="5874664">
+              <a:path h="9008822" w="12153554">
                 <a:moveTo>
                   <a:pt x="0" y="0"/>
                 </a:moveTo>
                 <a:lnTo>
-                  <a:pt x="5874664" y="0"/>
-                </a:lnTo>
-                <a:lnTo>
-                  <a:pt x="5874664" y="9999428"/>
-                </a:lnTo>
-                <a:lnTo>
-                  <a:pt x="0" y="9999428"/>
+                  <a:pt x="12153554" y="0"/>
+                </a:lnTo>
+                <a:lnTo>
+                  <a:pt x="12153554" y="9008822"/>
+                </a:lnTo>
+                <a:lnTo>
+                  <a:pt x="0" y="9008822"/>
                 </a:lnTo>
                 <a:lnTo>
                   <a:pt x="0" y="0"/>
@@ -6608,50 +6608,6 @@
         </p:nvSpPr>
         <p:spPr>
           <a:xfrm rot="0">
-            <a:off x="885582" y="2502601"/>
-            <a:ext cx="5252286" cy="796391"/>
-          </a:xfrm>
-          <a:prstGeom prst="rect">
-            <a:avLst/>
-          </a:prstGeom>
-        </p:spPr>
-        <p:txBody>
-          <a:bodyPr anchor="t" rtlCol="false" tIns="0" lIns="0" bIns="0" rIns="0">
-            <a:spAutoFit/>
-          </a:bodyPr>
-          <a:lstStyle/>
-          <a:p>
-            <a:pPr algn="ctr" marL="0" indent="0" lvl="0">
-              <a:lnSpc>
-                <a:spcPts val="6548"/>
-              </a:lnSpc>
-              <a:spcBef>
-                <a:spcPct val="0"/>
-              </a:spcBef>
-            </a:pPr>
-            <a:r>
-              <a:rPr lang="en-US" sz="4745" spc="37">
-                <a:solidFill>
-                  <a:srgbClr val="51786E"/>
-                </a:solidFill>
-                <a:latin typeface="Fraunces"/>
-                <a:ea typeface="Fraunces"/>
-                <a:cs typeface="Fraunces"/>
-                <a:sym typeface="Fraunces"/>
-              </a:rPr>
-              <a:t>BASE DE DATOS</a:t>
-            </a:r>
-          </a:p>
-        </p:txBody>
-      </p:sp>
-      <p:sp>
-        <p:nvSpPr>
-          <p:cNvPr name="TextBox 9" id="9"/>
-          <p:cNvSpPr txBox="true"/>
-          <p:nvPr/>
-        </p:nvSpPr>
-        <p:spPr>
-          <a:xfrm rot="0">
             <a:off x="17535126" y="9399905"/>
             <a:ext cx="752874" cy="887095"/>
           </a:xfrm>
@@ -6681,6 +6637,50 @@
                 <a:sym typeface="Open Sans Bold"/>
               </a:rPr>
               <a:t>4.</a:t>
+            </a:r>
+          </a:p>
+        </p:txBody>
+      </p:sp>
+      <p:sp>
+        <p:nvSpPr>
+          <p:cNvPr name="TextBox 9" id="9"/>
+          <p:cNvSpPr txBox="true"/>
+          <p:nvPr/>
+        </p:nvSpPr>
+        <p:spPr>
+          <a:xfrm rot="0">
+            <a:off x="112517" y="918729"/>
+            <a:ext cx="2690935" cy="1144714"/>
+          </a:xfrm>
+          <a:prstGeom prst="rect">
+            <a:avLst/>
+          </a:prstGeom>
+        </p:spPr>
+        <p:txBody>
+          <a:bodyPr anchor="t" rtlCol="false" tIns="0" lIns="0" bIns="0" rIns="0">
+            <a:spAutoFit/>
+          </a:bodyPr>
+          <a:lstStyle/>
+          <a:p>
+            <a:pPr algn="ctr" marL="0" indent="0" lvl="0">
+              <a:lnSpc>
+                <a:spcPts val="4598"/>
+              </a:lnSpc>
+              <a:spcBef>
+                <a:spcPct val="0"/>
+              </a:spcBef>
+            </a:pPr>
+            <a:r>
+              <a:rPr lang="en-US" sz="3332" spc="26">
+                <a:solidFill>
+                  <a:srgbClr val="51786E"/>
+                </a:solidFill>
+                <a:latin typeface="Fraunces"/>
+                <a:ea typeface="Fraunces"/>
+                <a:cs typeface="Fraunces"/>
+                <a:sym typeface="Fraunces"/>
+              </a:rPr>
+              <a:t>BASE DE DATOS</a:t>
             </a:r>
           </a:p>
         </p:txBody>

--- a/documentacion_extra/presentacion/cuidaDos.pptx
+++ b/documentacion_extra/presentacion/cuidaDos.pptx
@@ -5728,7 +5728,7 @@
                   <a:cs typeface="Poppins Bold"/>
                   <a:sym typeface="Poppins Bold"/>
                 </a:rPr>
-                <a:t>USUARIOS</a:t>
+                <a:t>Clientes</a:t>
               </a:r>
             </a:p>
           </p:txBody>

--- a/documentacion_extra/presentacion/cuidaDos.pptx
+++ b/documentacion_extra/presentacion/cuidaDos.pptx
@@ -5728,7 +5728,7 @@
                   <a:cs typeface="Poppins Bold"/>
                   <a:sym typeface="Poppins Bold"/>
                 </a:rPr>
-                <a:t>Clientes</a:t>
+                <a:t>CLIENTE</a:t>
               </a:r>
             </a:p>
           </p:txBody>
@@ -8274,308 +8274,6 @@
 </file>
 
 <file path=ppt/slides/slide8.xml><?xml version="1.0" encoding="utf-8"?>
-<p:sld xmlns:p="http://schemas.openxmlformats.org/presentationml/2006/main" xmlns:a="http://schemas.openxmlformats.org/drawingml/2006/main" xmlns:r="http://schemas.openxmlformats.org/officeDocument/2006/relationships">
-  <p:cSld>
-    <p:bg>
-      <p:bgPr>
-        <a:solidFill>
-          <a:srgbClr val="344F51"/>
-        </a:solidFill>
-      </p:bgPr>
-    </p:bg>
-    <p:spTree>
-      <p:nvGrpSpPr>
-        <p:cNvPr id="1" name=""/>
-        <p:cNvGrpSpPr/>
-        <p:nvPr/>
-      </p:nvGrpSpPr>
-      <p:grpSpPr>
-        <a:xfrm>
-          <a:off x="0" y="0"/>
-          <a:ext cx="0" cy="0"/>
-          <a:chOff x="0" y="0"/>
-          <a:chExt cx="0" cy="0"/>
-        </a:xfrm>
-      </p:grpSpPr>
-      <p:grpSp>
-        <p:nvGrpSpPr>
-          <p:cNvPr name="Group 2" id="2"/>
-          <p:cNvGrpSpPr/>
-          <p:nvPr/>
-        </p:nvGrpSpPr>
-        <p:grpSpPr>
-          <a:xfrm rot="0">
-            <a:off x="3826496" y="2463569"/>
-            <a:ext cx="11196945" cy="6310665"/>
-            <a:chOff x="0" y="0"/>
-            <a:chExt cx="2948990" cy="1662068"/>
-          </a:xfrm>
-        </p:grpSpPr>
-        <p:sp>
-          <p:nvSpPr>
-            <p:cNvPr name="Freeform 3" id="3"/>
-            <p:cNvSpPr/>
-            <p:nvPr/>
-          </p:nvSpPr>
-          <p:spPr>
-            <a:xfrm flipH="false" flipV="false" rot="0">
-              <a:off x="0" y="0"/>
-              <a:ext cx="2948990" cy="1662068"/>
-            </a:xfrm>
-            <a:custGeom>
-              <a:avLst/>
-              <a:gdLst/>
-              <a:ahLst/>
-              <a:cxnLst/>
-              <a:rect r="r" b="b" t="t" l="l"/>
-              <a:pathLst>
-                <a:path h="1662068" w="2948990">
-                  <a:moveTo>
-                    <a:pt x="0" y="0"/>
-                  </a:moveTo>
-                  <a:lnTo>
-                    <a:pt x="2948990" y="0"/>
-                  </a:lnTo>
-                  <a:lnTo>
-                    <a:pt x="2948990" y="1662068"/>
-                  </a:lnTo>
-                  <a:lnTo>
-                    <a:pt x="0" y="1662068"/>
-                  </a:lnTo>
-                  <a:close/>
-                </a:path>
-              </a:pathLst>
-            </a:custGeom>
-            <a:solidFill>
-              <a:srgbClr val="FFFFFF"/>
-            </a:solidFill>
-          </p:spPr>
-        </p:sp>
-        <p:sp>
-          <p:nvSpPr>
-            <p:cNvPr name="TextBox 4" id="4"/>
-            <p:cNvSpPr txBox="true"/>
-            <p:nvPr/>
-          </p:nvSpPr>
-          <p:spPr>
-            <a:xfrm>
-              <a:off x="0" y="-19050"/>
-              <a:ext cx="2948990" cy="1681118"/>
-            </a:xfrm>
-            <a:prstGeom prst="rect">
-              <a:avLst/>
-            </a:prstGeom>
-          </p:spPr>
-          <p:txBody>
-            <a:bodyPr anchor="ctr" rtlCol="false" tIns="50800" lIns="50800" bIns="50800" rIns="50800"/>
-            <a:lstStyle/>
-            <a:p>
-              <a:pPr algn="ctr">
-                <a:lnSpc>
-                  <a:spcPts val="2859"/>
-                </a:lnSpc>
-              </a:pPr>
-            </a:p>
-          </p:txBody>
-        </p:sp>
-      </p:grpSp>
-      <p:sp>
-        <p:nvSpPr>
-          <p:cNvPr name="Freeform 5" id="5"/>
-          <p:cNvSpPr/>
-          <p:nvPr/>
-        </p:nvSpPr>
-        <p:spPr>
-          <a:xfrm flipH="false" flipV="false" rot="0">
-            <a:off x="11869158" y="5427811"/>
-            <a:ext cx="1699666" cy="1699666"/>
-          </a:xfrm>
-          <a:custGeom>
-            <a:avLst/>
-            <a:gdLst/>
-            <a:ahLst/>
-            <a:cxnLst/>
-            <a:rect r="r" b="b" t="t" l="l"/>
-            <a:pathLst>
-              <a:path h="1699666" w="1699666">
-                <a:moveTo>
-                  <a:pt x="0" y="0"/>
-                </a:moveTo>
-                <a:lnTo>
-                  <a:pt x="1699666" y="0"/>
-                </a:lnTo>
-                <a:lnTo>
-                  <a:pt x="1699666" y="1699666"/>
-                </a:lnTo>
-                <a:lnTo>
-                  <a:pt x="0" y="1699666"/>
-                </a:lnTo>
-                <a:lnTo>
-                  <a:pt x="0" y="0"/>
-                </a:lnTo>
-                <a:close/>
-              </a:path>
-            </a:pathLst>
-          </a:custGeom>
-          <a:blipFill>
-            <a:blip r:embed="rId2"/>
-            <a:stretch>
-              <a:fillRect l="0" t="0" r="0" b="0"/>
-            </a:stretch>
-          </a:blipFill>
-        </p:spPr>
-      </p:sp>
-      <p:sp>
-        <p:nvSpPr>
-          <p:cNvPr name="Freeform 6" id="6">
-            <a:hlinkClick r:id="rId4" tooltip="https://www.conectacuidados.eu"/>
-          </p:cNvPr>
-          <p:cNvSpPr/>
-          <p:nvPr/>
-        </p:nvSpPr>
-        <p:spPr>
-          <a:xfrm flipH="false" flipV="false" rot="0">
-            <a:off x="5570665" y="4603389"/>
-            <a:ext cx="5936428" cy="3730691"/>
-          </a:xfrm>
-          <a:custGeom>
-            <a:avLst/>
-            <a:gdLst/>
-            <a:ahLst/>
-            <a:cxnLst/>
-            <a:rect r="r" b="b" t="t" l="l"/>
-            <a:pathLst>
-              <a:path h="3730691" w="5936428">
-                <a:moveTo>
-                  <a:pt x="0" y="0"/>
-                </a:moveTo>
-                <a:lnTo>
-                  <a:pt x="5936427" y="0"/>
-                </a:lnTo>
-                <a:lnTo>
-                  <a:pt x="5936427" y="3730691"/>
-                </a:lnTo>
-                <a:lnTo>
-                  <a:pt x="0" y="3730691"/>
-                </a:lnTo>
-                <a:lnTo>
-                  <a:pt x="0" y="0"/>
-                </a:lnTo>
-                <a:close/>
-              </a:path>
-            </a:pathLst>
-          </a:custGeom>
-          <a:blipFill>
-            <a:blip r:embed="rId3"/>
-            <a:stretch>
-              <a:fillRect l="0" t="0" r="0" b="0"/>
-            </a:stretch>
-          </a:blipFill>
-        </p:spPr>
-      </p:sp>
-      <p:sp>
-        <p:nvSpPr>
-          <p:cNvPr name="TextBox 7" id="7"/>
-          <p:cNvSpPr txBox="true"/>
-          <p:nvPr/>
-        </p:nvSpPr>
-        <p:spPr>
-          <a:xfrm rot="0">
-            <a:off x="6782564" y="3038086"/>
-            <a:ext cx="5936428" cy="1152525"/>
-          </a:xfrm>
-          <a:prstGeom prst="rect">
-            <a:avLst/>
-          </a:prstGeom>
-        </p:spPr>
-        <p:txBody>
-          <a:bodyPr anchor="t" rtlCol="false" tIns="0" lIns="0" bIns="0" rIns="0">
-            <a:spAutoFit/>
-          </a:bodyPr>
-          <a:lstStyle/>
-          <a:p>
-            <a:pPr algn="ctr">
-              <a:lnSpc>
-                <a:spcPts val="9119"/>
-              </a:lnSpc>
-            </a:pPr>
-            <a:r>
-              <a:rPr lang="en-US" b="true" sz="7599" spc="-151">
-                <a:solidFill>
-                  <a:srgbClr val="344F51"/>
-                </a:solidFill>
-                <a:latin typeface="Montserrat Bold"/>
-                <a:ea typeface="Montserrat Bold"/>
-                <a:cs typeface="Montserrat Bold"/>
-                <a:sym typeface="Montserrat Bold"/>
-              </a:rPr>
-              <a:t>CUIDA</a:t>
-            </a:r>
-            <a:r>
-              <a:rPr lang="en-US" b="true" sz="7599" spc="-151">
-                <a:solidFill>
-                  <a:srgbClr val="93D14B"/>
-                </a:solidFill>
-                <a:latin typeface="Montserrat Bold"/>
-                <a:ea typeface="Montserrat Bold"/>
-                <a:cs typeface="Montserrat Bold"/>
-                <a:sym typeface="Montserrat Bold"/>
-              </a:rPr>
-              <a:t>DOS</a:t>
-            </a:r>
-          </a:p>
-        </p:txBody>
-      </p:sp>
-      <p:sp>
-        <p:nvSpPr>
-          <p:cNvPr name="TextBox 8" id="8"/>
-          <p:cNvSpPr txBox="true"/>
-          <p:nvPr/>
-        </p:nvSpPr>
-        <p:spPr>
-          <a:xfrm rot="0">
-            <a:off x="17535126" y="9399905"/>
-            <a:ext cx="752874" cy="887095"/>
-          </a:xfrm>
-          <a:prstGeom prst="rect">
-            <a:avLst/>
-          </a:prstGeom>
-        </p:spPr>
-        <p:txBody>
-          <a:bodyPr anchor="t" rtlCol="false" tIns="0" lIns="0" bIns="0" rIns="0">
-            <a:spAutoFit/>
-          </a:bodyPr>
-          <a:lstStyle/>
-          <a:p>
-            <a:pPr algn="ctr">
-              <a:lnSpc>
-                <a:spcPts val="7279"/>
-              </a:lnSpc>
-            </a:pPr>
-            <a:r>
-              <a:rPr lang="en-US" b="true" sz="5199">
-                <a:solidFill>
-                  <a:srgbClr val="93D14B"/>
-                </a:solidFill>
-                <a:latin typeface="Open Sans Bold"/>
-                <a:ea typeface="Open Sans Bold"/>
-                <a:cs typeface="Open Sans Bold"/>
-                <a:sym typeface="Open Sans Bold"/>
-              </a:rPr>
-              <a:t>6.</a:t>
-            </a:r>
-          </a:p>
-        </p:txBody>
-      </p:sp>
-    </p:spTree>
-  </p:cSld>
-  <p:clrMapOvr>
-    <a:masterClrMapping/>
-  </p:clrMapOvr>
-</p:sld>
-</file>
-
-<file path=ppt/slides/slide9.xml><?xml version="1.0" encoding="utf-8"?>
 <p:sld xmlns:p="http://schemas.openxmlformats.org/presentationml/2006/main" xmlns:a="http://schemas.openxmlformats.org/drawingml/2006/main">
   <p:cSld>
     <p:bg>
@@ -8978,6 +8676,18 @@
               </a:lnSpc>
             </a:pPr>
             <a:r>
+              <a:rPr lang="en-US" sz="5199" b="true">
+                <a:solidFill>
+                  <a:srgbClr val="93D14B"/>
+                </a:solidFill>
+                <a:latin typeface="Open Sans Bold"/>
+                <a:ea typeface="Open Sans Bold"/>
+                <a:cs typeface="Open Sans Bold"/>
+                <a:sym typeface="Open Sans Bold"/>
+              </a:rPr>
+              <a:t>6</a:t>
+            </a:r>
+            <a:r>
               <a:rPr lang="en-US" b="true" sz="5199">
                 <a:solidFill>
                   <a:srgbClr val="93D14B"/>
@@ -8987,7 +8697,321 @@
                 <a:cs typeface="Open Sans Bold"/>
                 <a:sym typeface="Open Sans Bold"/>
               </a:rPr>
-              <a:t>7.</a:t>
+              <a:t>.</a:t>
+            </a:r>
+          </a:p>
+        </p:txBody>
+      </p:sp>
+    </p:spTree>
+  </p:cSld>
+  <p:clrMapOvr>
+    <a:masterClrMapping/>
+  </p:clrMapOvr>
+</p:sld>
+</file>
+
+<file path=ppt/slides/slide9.xml><?xml version="1.0" encoding="utf-8"?>
+<p:sld xmlns:p="http://schemas.openxmlformats.org/presentationml/2006/main" xmlns:a="http://schemas.openxmlformats.org/drawingml/2006/main" xmlns:r="http://schemas.openxmlformats.org/officeDocument/2006/relationships">
+  <p:cSld>
+    <p:bg>
+      <p:bgPr>
+        <a:solidFill>
+          <a:srgbClr val="344F51"/>
+        </a:solidFill>
+      </p:bgPr>
+    </p:bg>
+    <p:spTree>
+      <p:nvGrpSpPr>
+        <p:cNvPr id="1" name=""/>
+        <p:cNvGrpSpPr/>
+        <p:nvPr/>
+      </p:nvGrpSpPr>
+      <p:grpSpPr>
+        <a:xfrm>
+          <a:off x="0" y="0"/>
+          <a:ext cx="0" cy="0"/>
+          <a:chOff x="0" y="0"/>
+          <a:chExt cx="0" cy="0"/>
+        </a:xfrm>
+      </p:grpSpPr>
+      <p:grpSp>
+        <p:nvGrpSpPr>
+          <p:cNvPr name="Group 2" id="2"/>
+          <p:cNvGrpSpPr/>
+          <p:nvPr/>
+        </p:nvGrpSpPr>
+        <p:grpSpPr>
+          <a:xfrm rot="0">
+            <a:off x="3826496" y="2463569"/>
+            <a:ext cx="11196945" cy="6310665"/>
+            <a:chOff x="0" y="0"/>
+            <a:chExt cx="2948990" cy="1662068"/>
+          </a:xfrm>
+        </p:grpSpPr>
+        <p:sp>
+          <p:nvSpPr>
+            <p:cNvPr name="Freeform 3" id="3"/>
+            <p:cNvSpPr/>
+            <p:nvPr/>
+          </p:nvSpPr>
+          <p:spPr>
+            <a:xfrm flipH="false" flipV="false" rot="0">
+              <a:off x="0" y="0"/>
+              <a:ext cx="2948990" cy="1662068"/>
+            </a:xfrm>
+            <a:custGeom>
+              <a:avLst/>
+              <a:gdLst/>
+              <a:ahLst/>
+              <a:cxnLst/>
+              <a:rect r="r" b="b" t="t" l="l"/>
+              <a:pathLst>
+                <a:path h="1662068" w="2948990">
+                  <a:moveTo>
+                    <a:pt x="0" y="0"/>
+                  </a:moveTo>
+                  <a:lnTo>
+                    <a:pt x="2948990" y="0"/>
+                  </a:lnTo>
+                  <a:lnTo>
+                    <a:pt x="2948990" y="1662068"/>
+                  </a:lnTo>
+                  <a:lnTo>
+                    <a:pt x="0" y="1662068"/>
+                  </a:lnTo>
+                  <a:close/>
+                </a:path>
+              </a:pathLst>
+            </a:custGeom>
+            <a:solidFill>
+              <a:srgbClr val="FFFFFF"/>
+            </a:solidFill>
+          </p:spPr>
+        </p:sp>
+        <p:sp>
+          <p:nvSpPr>
+            <p:cNvPr name="TextBox 4" id="4"/>
+            <p:cNvSpPr txBox="true"/>
+            <p:nvPr/>
+          </p:nvSpPr>
+          <p:spPr>
+            <a:xfrm>
+              <a:off x="0" y="-19050"/>
+              <a:ext cx="2948990" cy="1681118"/>
+            </a:xfrm>
+            <a:prstGeom prst="rect">
+              <a:avLst/>
+            </a:prstGeom>
+          </p:spPr>
+          <p:txBody>
+            <a:bodyPr anchor="ctr" rtlCol="false" tIns="50800" lIns="50800" bIns="50800" rIns="50800"/>
+            <a:lstStyle/>
+            <a:p>
+              <a:pPr algn="ctr">
+                <a:lnSpc>
+                  <a:spcPts val="2859"/>
+                </a:lnSpc>
+              </a:pPr>
+            </a:p>
+          </p:txBody>
+        </p:sp>
+      </p:grpSp>
+      <p:sp>
+        <p:nvSpPr>
+          <p:cNvPr name="Freeform 5" id="5"/>
+          <p:cNvSpPr/>
+          <p:nvPr/>
+        </p:nvSpPr>
+        <p:spPr>
+          <a:xfrm flipH="false" flipV="false" rot="0">
+            <a:off x="11869158" y="5427811"/>
+            <a:ext cx="1699666" cy="1699666"/>
+          </a:xfrm>
+          <a:custGeom>
+            <a:avLst/>
+            <a:gdLst/>
+            <a:ahLst/>
+            <a:cxnLst/>
+            <a:rect r="r" b="b" t="t" l="l"/>
+            <a:pathLst>
+              <a:path h="1699666" w="1699666">
+                <a:moveTo>
+                  <a:pt x="0" y="0"/>
+                </a:moveTo>
+                <a:lnTo>
+                  <a:pt x="1699666" y="0"/>
+                </a:lnTo>
+                <a:lnTo>
+                  <a:pt x="1699666" y="1699666"/>
+                </a:lnTo>
+                <a:lnTo>
+                  <a:pt x="0" y="1699666"/>
+                </a:lnTo>
+                <a:lnTo>
+                  <a:pt x="0" y="0"/>
+                </a:lnTo>
+                <a:close/>
+              </a:path>
+            </a:pathLst>
+          </a:custGeom>
+          <a:blipFill>
+            <a:blip r:embed="rId2"/>
+            <a:stretch>
+              <a:fillRect l="0" t="0" r="0" b="0"/>
+            </a:stretch>
+          </a:blipFill>
+        </p:spPr>
+      </p:sp>
+      <p:sp>
+        <p:nvSpPr>
+          <p:cNvPr name="Freeform 6" id="6">
+            <a:hlinkClick r:id="rId4" tooltip="https://www.conectacuidados.eu"/>
+          </p:cNvPr>
+          <p:cNvSpPr/>
+          <p:nvPr/>
+        </p:nvSpPr>
+        <p:spPr>
+          <a:xfrm flipH="false" flipV="false" rot="0">
+            <a:off x="5570665" y="4603389"/>
+            <a:ext cx="5936428" cy="3730691"/>
+          </a:xfrm>
+          <a:custGeom>
+            <a:avLst/>
+            <a:gdLst/>
+            <a:ahLst/>
+            <a:cxnLst/>
+            <a:rect r="r" b="b" t="t" l="l"/>
+            <a:pathLst>
+              <a:path h="3730691" w="5936428">
+                <a:moveTo>
+                  <a:pt x="0" y="0"/>
+                </a:moveTo>
+                <a:lnTo>
+                  <a:pt x="5936427" y="0"/>
+                </a:lnTo>
+                <a:lnTo>
+                  <a:pt x="5936427" y="3730691"/>
+                </a:lnTo>
+                <a:lnTo>
+                  <a:pt x="0" y="3730691"/>
+                </a:lnTo>
+                <a:lnTo>
+                  <a:pt x="0" y="0"/>
+                </a:lnTo>
+                <a:close/>
+              </a:path>
+            </a:pathLst>
+          </a:custGeom>
+          <a:blipFill>
+            <a:blip r:embed="rId3"/>
+            <a:stretch>
+              <a:fillRect l="0" t="0" r="0" b="0"/>
+            </a:stretch>
+          </a:blipFill>
+        </p:spPr>
+      </p:sp>
+      <p:sp>
+        <p:nvSpPr>
+          <p:cNvPr name="TextBox 7" id="7"/>
+          <p:cNvSpPr txBox="true"/>
+          <p:nvPr/>
+        </p:nvSpPr>
+        <p:spPr>
+          <a:xfrm rot="0">
+            <a:off x="6782564" y="3038086"/>
+            <a:ext cx="5936428" cy="1152525"/>
+          </a:xfrm>
+          <a:prstGeom prst="rect">
+            <a:avLst/>
+          </a:prstGeom>
+        </p:spPr>
+        <p:txBody>
+          <a:bodyPr anchor="t" rtlCol="false" tIns="0" lIns="0" bIns="0" rIns="0">
+            <a:spAutoFit/>
+          </a:bodyPr>
+          <a:lstStyle/>
+          <a:p>
+            <a:pPr algn="ctr">
+              <a:lnSpc>
+                <a:spcPts val="9119"/>
+              </a:lnSpc>
+            </a:pPr>
+            <a:r>
+              <a:rPr lang="en-US" b="true" sz="7599" spc="-151">
+                <a:solidFill>
+                  <a:srgbClr val="344F51"/>
+                </a:solidFill>
+                <a:latin typeface="Montserrat Bold"/>
+                <a:ea typeface="Montserrat Bold"/>
+                <a:cs typeface="Montserrat Bold"/>
+                <a:sym typeface="Montserrat Bold"/>
+              </a:rPr>
+              <a:t>CUIDA</a:t>
+            </a:r>
+            <a:r>
+              <a:rPr lang="en-US" b="true" sz="7599" spc="-151">
+                <a:solidFill>
+                  <a:srgbClr val="93D14B"/>
+                </a:solidFill>
+                <a:latin typeface="Montserrat Bold"/>
+                <a:ea typeface="Montserrat Bold"/>
+                <a:cs typeface="Montserrat Bold"/>
+                <a:sym typeface="Montserrat Bold"/>
+              </a:rPr>
+              <a:t>DOS</a:t>
+            </a:r>
+          </a:p>
+        </p:txBody>
+      </p:sp>
+      <p:sp>
+        <p:nvSpPr>
+          <p:cNvPr name="TextBox 8" id="8"/>
+          <p:cNvSpPr txBox="true"/>
+          <p:nvPr/>
+        </p:nvSpPr>
+        <p:spPr>
+          <a:xfrm rot="0">
+            <a:off x="17535126" y="9399905"/>
+            <a:ext cx="752874" cy="887095"/>
+          </a:xfrm>
+          <a:prstGeom prst="rect">
+            <a:avLst/>
+          </a:prstGeom>
+        </p:spPr>
+        <p:txBody>
+          <a:bodyPr anchor="t" rtlCol="false" tIns="0" lIns="0" bIns="0" rIns="0">
+            <a:spAutoFit/>
+          </a:bodyPr>
+          <a:lstStyle/>
+          <a:p>
+            <a:pPr algn="ctr">
+              <a:lnSpc>
+                <a:spcPts val="7279"/>
+              </a:lnSpc>
+            </a:pPr>
+            <a:r>
+              <a:rPr lang="en-US" sz="5199" b="true">
+                <a:solidFill>
+                  <a:srgbClr val="93D14B"/>
+                </a:solidFill>
+                <a:latin typeface="Open Sans Bold"/>
+                <a:ea typeface="Open Sans Bold"/>
+                <a:cs typeface="Open Sans Bold"/>
+                <a:sym typeface="Open Sans Bold"/>
+              </a:rPr>
+              <a:t>7</a:t>
+            </a:r>
+            <a:r>
+              <a:rPr lang="en-US" b="true" sz="5199">
+                <a:solidFill>
+                  <a:srgbClr val="93D14B"/>
+                </a:solidFill>
+                <a:latin typeface="Open Sans Bold"/>
+                <a:ea typeface="Open Sans Bold"/>
+                <a:cs typeface="Open Sans Bold"/>
+                <a:sym typeface="Open Sans Bold"/>
+              </a:rPr>
+              <a:t>.</a:t>
             </a:r>
           </a:p>
         </p:txBody>

--- a/documentacion_extra/presentacion/cuidaDos.pptx
+++ b/documentacion_extra/presentacion/cuidaDos.pptx
@@ -3333,10 +3333,10 @@
         </p:nvGrpSpPr>
         <p:grpSpPr>
           <a:xfrm rot="0">
-            <a:off x="11912991" y="7131081"/>
-            <a:ext cx="920403" cy="920403"/>
+            <a:off x="12024461" y="7288212"/>
+            <a:ext cx="952251" cy="920403"/>
             <a:chOff x="0" y="0"/>
-            <a:chExt cx="812800" cy="812800"/>
+            <a:chExt cx="840925" cy="812800"/>
           </a:xfrm>
         </p:grpSpPr>
         <p:sp>
@@ -3348,7 +3348,7 @@
           <p:spPr>
             <a:xfrm flipH="false" flipV="false" rot="0">
               <a:off x="0" y="0"/>
-              <a:ext cx="812800" cy="812800"/>
+              <a:ext cx="840925" cy="812800"/>
             </a:xfrm>
             <a:custGeom>
               <a:avLst/>
@@ -3357,15 +3357,15 @@
               <a:cxnLst/>
               <a:rect r="r" b="b" t="t" l="l"/>
               <a:pathLst>
-                <a:path h="812800" w="812800">
+                <a:path h="812800" w="840925">
                   <a:moveTo>
-                    <a:pt x="812800" y="406400"/>
+                    <a:pt x="840925" y="406400"/>
                   </a:moveTo>
                   <a:lnTo>
-                    <a:pt x="406400" y="0"/>
-                  </a:lnTo>
-                  <a:lnTo>
-                    <a:pt x="406400" y="203200"/>
+                    <a:pt x="434525" y="0"/>
+                  </a:lnTo>
+                  <a:lnTo>
+                    <a:pt x="434525" y="203200"/>
                   </a:lnTo>
                   <a:lnTo>
                     <a:pt x="0" y="203200"/>
@@ -3374,13 +3374,13 @@
                     <a:pt x="0" y="609600"/>
                   </a:lnTo>
                   <a:lnTo>
-                    <a:pt x="406400" y="609600"/>
-                  </a:lnTo>
-                  <a:lnTo>
-                    <a:pt x="406400" y="812800"/>
-                  </a:lnTo>
-                  <a:lnTo>
-                    <a:pt x="812800" y="406400"/>
+                    <a:pt x="434525" y="609600"/>
+                  </a:lnTo>
+                  <a:lnTo>
+                    <a:pt x="434525" y="812800"/>
+                  </a:lnTo>
+                  <a:lnTo>
+                    <a:pt x="840925" y="406400"/>
                   </a:lnTo>
                   <a:close/>
                 </a:path>
@@ -3400,7 +3400,7 @@
           <p:spPr>
             <a:xfrm>
               <a:off x="0" y="184150"/>
-              <a:ext cx="711200" cy="425450"/>
+              <a:ext cx="739325" cy="425450"/>
             </a:xfrm>
             <a:prstGeom prst="rect">
               <a:avLst/>
@@ -3526,7 +3526,7 @@
         </p:nvSpPr>
         <p:spPr>
           <a:xfrm rot="0">
-            <a:off x="8090223" y="5662612"/>
+            <a:off x="7946905" y="5662612"/>
             <a:ext cx="5241880" cy="514350"/>
           </a:xfrm>
           <a:prstGeom prst="rect">
@@ -3555,6 +3555,85 @@
                 <a:sym typeface="Montserrat Bold"/>
               </a:rPr>
               <a:t>Evelia Gil Paredes</a:t>
+            </a:r>
+          </a:p>
+        </p:txBody>
+      </p:sp>
+      <p:sp>
+        <p:nvSpPr>
+          <p:cNvPr name="TextBox 14" id="14"/>
+          <p:cNvSpPr txBox="true"/>
+          <p:nvPr/>
+        </p:nvSpPr>
+        <p:spPr>
+          <a:xfrm rot="0">
+            <a:off x="8806814" y="6243638"/>
+            <a:ext cx="4381971" cy="1397000"/>
+          </a:xfrm>
+          <a:prstGeom prst="rect">
+            <a:avLst/>
+          </a:prstGeom>
+        </p:spPr>
+        <p:txBody>
+          <a:bodyPr anchor="t" rtlCol="false" tIns="0" lIns="0" bIns="0" rIns="0">
+            <a:spAutoFit/>
+          </a:bodyPr>
+          <a:lstStyle/>
+          <a:p>
+            <a:pPr algn="l">
+              <a:lnSpc>
+                <a:spcPts val="2800"/>
+              </a:lnSpc>
+            </a:pPr>
+            <a:r>
+              <a:rPr lang="en-US" sz="2000" b="true">
+                <a:solidFill>
+                  <a:srgbClr val="51786E"/>
+                </a:solidFill>
+                <a:latin typeface="Montserrat Bold"/>
+                <a:ea typeface="Montserrat Bold"/>
+                <a:cs typeface="Montserrat Bold"/>
+                <a:sym typeface="Montserrat Bold"/>
+              </a:rPr>
+              <a:t>IES Albarregas</a:t>
+            </a:r>
+          </a:p>
+          <a:p>
+            <a:pPr algn="l">
+              <a:lnSpc>
+                <a:spcPts val="2800"/>
+              </a:lnSpc>
+            </a:pPr>
+            <a:r>
+              <a:rPr lang="en-US" sz="2000" b="true">
+                <a:solidFill>
+                  <a:srgbClr val="51786E"/>
+                </a:solidFill>
+                <a:latin typeface="Montserrat Bold"/>
+                <a:ea typeface="Montserrat Bold"/>
+                <a:cs typeface="Montserrat Bold"/>
+                <a:sym typeface="Montserrat Bold"/>
+              </a:rPr>
+              <a:t>Técnico Superior en Desarrollo de Aplicaciones Web</a:t>
+            </a:r>
+          </a:p>
+          <a:p>
+            <a:pPr algn="l">
+              <a:lnSpc>
+                <a:spcPts val="2800"/>
+              </a:lnSpc>
+            </a:pPr>
+            <a:r>
+              <a:rPr lang="en-US" sz="2000" b="true">
+                <a:solidFill>
+                  <a:srgbClr val="51786E"/>
+                </a:solidFill>
+                <a:latin typeface="Montserrat Bold"/>
+                <a:ea typeface="Montserrat Bold"/>
+                <a:cs typeface="Montserrat Bold"/>
+                <a:sym typeface="Montserrat Bold"/>
+              </a:rPr>
+              <a:t>Curso: 25/26</a:t>
             </a:r>
           </a:p>
         </p:txBody>
@@ -3727,7 +3806,7 @@
         </p:nvSpPr>
         <p:spPr>
           <a:xfrm flipH="false" flipV="false" rot="0">
-            <a:off x="3980832" y="2807187"/>
+            <a:off x="3826496" y="3282589"/>
             <a:ext cx="3618799" cy="4672626"/>
           </a:xfrm>
           <a:custGeom>
@@ -3742,13 +3821,13 @@
                   <a:pt x="0" y="0"/>
                 </a:moveTo>
                 <a:lnTo>
-                  <a:pt x="3618799" y="0"/>
-                </a:lnTo>
-                <a:lnTo>
-                  <a:pt x="3618799" y="4672626"/>
-                </a:lnTo>
-                <a:lnTo>
-                  <a:pt x="0" y="4672626"/>
+                  <a:pt x="3618800" y="0"/>
+                </a:lnTo>
+                <a:lnTo>
+                  <a:pt x="3618800" y="4672625"/>
+                </a:lnTo>
+                <a:lnTo>
+                  <a:pt x="0" y="4672625"/>
                 </a:lnTo>
                 <a:lnTo>
                   <a:pt x="0" y="0"/>
@@ -3811,109 +3890,15 @@
           </a:blipFill>
         </p:spPr>
       </p:sp>
-      <p:grpSp>
-        <p:nvGrpSpPr>
-          <p:cNvPr name="Group 8" id="8"/>
-          <p:cNvGrpSpPr/>
-          <p:nvPr/>
-        </p:nvGrpSpPr>
-        <p:grpSpPr>
-          <a:xfrm rot="0">
-            <a:off x="11912991" y="7131081"/>
-            <a:ext cx="920403" cy="920403"/>
-            <a:chOff x="0" y="0"/>
-            <a:chExt cx="812800" cy="812800"/>
-          </a:xfrm>
-        </p:grpSpPr>
-        <p:sp>
-          <p:nvSpPr>
-            <p:cNvPr name="Freeform 9" id="9"/>
-            <p:cNvSpPr/>
-            <p:nvPr/>
-          </p:nvSpPr>
-          <p:spPr>
-            <a:xfrm flipH="false" flipV="false" rot="0">
-              <a:off x="0" y="0"/>
-              <a:ext cx="812800" cy="812800"/>
-            </a:xfrm>
-            <a:custGeom>
-              <a:avLst/>
-              <a:gdLst/>
-              <a:ahLst/>
-              <a:cxnLst/>
-              <a:rect r="r" b="b" t="t" l="l"/>
-              <a:pathLst>
-                <a:path h="812800" w="812800">
-                  <a:moveTo>
-                    <a:pt x="812800" y="406400"/>
-                  </a:moveTo>
-                  <a:lnTo>
-                    <a:pt x="406400" y="0"/>
-                  </a:lnTo>
-                  <a:lnTo>
-                    <a:pt x="406400" y="203200"/>
-                  </a:lnTo>
-                  <a:lnTo>
-                    <a:pt x="0" y="203200"/>
-                  </a:lnTo>
-                  <a:lnTo>
-                    <a:pt x="0" y="609600"/>
-                  </a:lnTo>
-                  <a:lnTo>
-                    <a:pt x="406400" y="609600"/>
-                  </a:lnTo>
-                  <a:lnTo>
-                    <a:pt x="406400" y="812800"/>
-                  </a:lnTo>
-                  <a:lnTo>
-                    <a:pt x="812800" y="406400"/>
-                  </a:lnTo>
-                  <a:close/>
-                </a:path>
-              </a:pathLst>
-            </a:custGeom>
-            <a:solidFill>
-              <a:srgbClr val="51786E"/>
-            </a:solidFill>
-          </p:spPr>
-        </p:sp>
-        <p:sp>
-          <p:nvSpPr>
-            <p:cNvPr name="TextBox 10" id="10"/>
-            <p:cNvSpPr txBox="true"/>
-            <p:nvPr/>
-          </p:nvSpPr>
-          <p:spPr>
-            <a:xfrm>
-              <a:off x="0" y="184150"/>
-              <a:ext cx="711200" cy="425450"/>
-            </a:xfrm>
-            <a:prstGeom prst="rect">
-              <a:avLst/>
-            </a:prstGeom>
-          </p:spPr>
-          <p:txBody>
-            <a:bodyPr anchor="ctr" rtlCol="false" tIns="50800" lIns="50800" bIns="50800" rIns="50800"/>
-            <a:lstStyle/>
-            <a:p>
-              <a:pPr algn="ctr">
-                <a:lnSpc>
-                  <a:spcPts val="2859"/>
-                </a:lnSpc>
-              </a:pPr>
-            </a:p>
-          </p:txBody>
-        </p:sp>
-      </p:grpSp>
-      <p:sp>
-        <p:nvSpPr>
-          <p:cNvPr name="Freeform 11" id="11"/>
+      <p:sp>
+        <p:nvSpPr>
+          <p:cNvPr name="Freeform 8" id="8"/>
           <p:cNvSpPr/>
           <p:nvPr/>
         </p:nvSpPr>
         <p:spPr>
           <a:xfrm flipH="false" flipV="false" rot="0">
-            <a:off x="13118589" y="6896711"/>
+            <a:off x="13323775" y="7074568"/>
             <a:ext cx="1699666" cy="1699666"/>
           </a:xfrm>
           <a:custGeom>
@@ -3953,97 +3938,55 @@
       </p:sp>
       <p:sp>
         <p:nvSpPr>
-          <p:cNvPr name="TextBox 12" id="12"/>
-          <p:cNvSpPr txBox="true"/>
+          <p:cNvPr name="Freeform 9" id="9"/>
+          <p:cNvSpPr/>
           <p:nvPr/>
         </p:nvSpPr>
         <p:spPr>
-          <a:xfrm rot="0">
-            <a:off x="7599631" y="4466377"/>
-            <a:ext cx="5936428" cy="1152525"/>
-          </a:xfrm>
-          <a:prstGeom prst="rect">
+          <a:xfrm flipH="false" flipV="false" rot="0">
+            <a:off x="7330495" y="4405482"/>
+            <a:ext cx="6508706" cy="2828329"/>
+          </a:xfrm>
+          <a:custGeom>
             <a:avLst/>
-          </a:prstGeom>
+            <a:gdLst/>
+            <a:ahLst/>
+            <a:cxnLst/>
+            <a:rect r="r" b="b" t="t" l="l"/>
+            <a:pathLst>
+              <a:path h="2828329" w="6508706">
+                <a:moveTo>
+                  <a:pt x="0" y="0"/>
+                </a:moveTo>
+                <a:lnTo>
+                  <a:pt x="6508706" y="0"/>
+                </a:lnTo>
+                <a:lnTo>
+                  <a:pt x="6508706" y="2828328"/>
+                </a:lnTo>
+                <a:lnTo>
+                  <a:pt x="0" y="2828328"/>
+                </a:lnTo>
+                <a:lnTo>
+                  <a:pt x="0" y="0"/>
+                </a:lnTo>
+                <a:close/>
+              </a:path>
+            </a:pathLst>
+          </a:custGeom>
+          <a:blipFill>
+            <a:blip r:embed="rId6">
+              <a:extLst>
+                <a:ext uri="{96DAC541-7B7A-43D3-8B79-37D633B846F1}">
+                  <asvg:svgBlip xmlns:asvg="http://schemas.microsoft.com/office/drawing/2016/SVG/main" r:embed="rId7"/>
+                </a:ext>
+              </a:extLst>
+            </a:blip>
+            <a:stretch>
+              <a:fillRect l="0" t="0" r="0" b="0"/>
+            </a:stretch>
+          </a:blipFill>
         </p:spPr>
-        <p:txBody>
-          <a:bodyPr anchor="t" rtlCol="false" tIns="0" lIns="0" bIns="0" rIns="0">
-            <a:spAutoFit/>
-          </a:bodyPr>
-          <a:lstStyle/>
-          <a:p>
-            <a:pPr algn="ctr">
-              <a:lnSpc>
-                <a:spcPts val="9119"/>
-              </a:lnSpc>
-            </a:pPr>
-            <a:r>
-              <a:rPr lang="en-US" b="true" sz="7599" spc="-151">
-                <a:solidFill>
-                  <a:srgbClr val="344F51"/>
-                </a:solidFill>
-                <a:latin typeface="Montserrat Bold"/>
-                <a:ea typeface="Montserrat Bold"/>
-                <a:cs typeface="Montserrat Bold"/>
-                <a:sym typeface="Montserrat Bold"/>
-              </a:rPr>
-              <a:t>CUIDA</a:t>
-            </a:r>
-            <a:r>
-              <a:rPr lang="en-US" b="true" sz="7599" spc="-151">
-                <a:solidFill>
-                  <a:srgbClr val="93D14B"/>
-                </a:solidFill>
-                <a:latin typeface="Montserrat Bold"/>
-                <a:ea typeface="Montserrat Bold"/>
-                <a:cs typeface="Montserrat Bold"/>
-                <a:sym typeface="Montserrat Bold"/>
-              </a:rPr>
-              <a:t>DOS</a:t>
-            </a:r>
-          </a:p>
-        </p:txBody>
-      </p:sp>
-      <p:sp>
-        <p:nvSpPr>
-          <p:cNvPr name="TextBox 13" id="13"/>
-          <p:cNvSpPr txBox="true"/>
-          <p:nvPr/>
-        </p:nvSpPr>
-        <p:spPr>
-          <a:xfrm rot="0">
-            <a:off x="8090223" y="5662612"/>
-            <a:ext cx="5241880" cy="514350"/>
-          </a:xfrm>
-          <a:prstGeom prst="rect">
-            <a:avLst/>
-          </a:prstGeom>
-        </p:spPr>
-        <p:txBody>
-          <a:bodyPr anchor="t" rtlCol="false" tIns="0" lIns="0" bIns="0" rIns="0">
-            <a:spAutoFit/>
-          </a:bodyPr>
-          <a:lstStyle/>
-          <a:p>
-            <a:pPr algn="ctr">
-              <a:lnSpc>
-                <a:spcPts val="4200"/>
-              </a:lnSpc>
-            </a:pPr>
-            <a:r>
-              <a:rPr lang="en-US" b="true" sz="3000">
-                <a:solidFill>
-                  <a:srgbClr val="344F51"/>
-                </a:solidFill>
-                <a:latin typeface="Montserrat Bold"/>
-                <a:ea typeface="Montserrat Bold"/>
-                <a:cs typeface="Montserrat Bold"/>
-                <a:sym typeface="Montserrat Bold"/>
-              </a:rPr>
-              <a:t>Evelia Gil Paredes</a:t>
-            </a:r>
-          </a:p>
-        </p:txBody>
       </p:sp>
     </p:spTree>
   </p:cSld>
@@ -4556,7 +4499,7 @@
         </p:nvGrpSpPr>
         <p:grpSpPr>
           <a:xfrm rot="0">
-            <a:off x="2264337" y="3655008"/>
+            <a:off x="2226237" y="3655008"/>
             <a:ext cx="4475594" cy="5100938"/>
             <a:chOff x="0" y="0"/>
             <a:chExt cx="1178757" cy="1343457"/>
@@ -4680,7 +4623,7 @@
         </p:nvGrpSpPr>
         <p:grpSpPr>
           <a:xfrm rot="0">
-            <a:off x="2959084" y="2802626"/>
+            <a:off x="3016234" y="2802626"/>
             <a:ext cx="3086100" cy="516103"/>
             <a:chOff x="0" y="0"/>
             <a:chExt cx="812800" cy="135928"/>
@@ -4774,7 +4717,7 @@
         </p:nvGrpSpPr>
         <p:grpSpPr>
           <a:xfrm rot="0">
-            <a:off x="7600950" y="2803064"/>
+            <a:off x="7943029" y="2802626"/>
             <a:ext cx="3086100" cy="516103"/>
             <a:chOff x="0" y="0"/>
             <a:chExt cx="812800" cy="135928"/>
@@ -4868,7 +4811,7 @@
         </p:nvGrpSpPr>
         <p:grpSpPr>
           <a:xfrm rot="0">
-            <a:off x="12579096" y="2828329"/>
+            <a:off x="12925937" y="2802626"/>
             <a:ext cx="3086100" cy="516103"/>
             <a:chOff x="0" y="0"/>
             <a:chExt cx="812800" cy="135928"/>
@@ -5057,7 +5000,7 @@
         </p:nvSpPr>
         <p:spPr>
           <a:xfrm rot="0">
-            <a:off x="7747710" y="4059812"/>
+            <a:off x="7912044" y="4059812"/>
             <a:ext cx="3281419" cy="3936326"/>
           </a:xfrm>
           <a:prstGeom prst="rect">
@@ -5120,10 +5063,10 @@
         </p:nvGrpSpPr>
         <p:grpSpPr>
           <a:xfrm rot="0">
-            <a:off x="7150622" y="3655008"/>
-            <a:ext cx="4475594" cy="5151030"/>
+            <a:off x="12178667" y="3623212"/>
+            <a:ext cx="4475594" cy="5164530"/>
             <a:chOff x="0" y="0"/>
-            <a:chExt cx="1178757" cy="1356650"/>
+            <a:chExt cx="1178757" cy="1360205"/>
           </a:xfrm>
         </p:grpSpPr>
         <p:sp>
@@ -5135,7 +5078,7 @@
           <p:spPr>
             <a:xfrm flipH="false" flipV="false" rot="0">
               <a:off x="0" y="0"/>
-              <a:ext cx="1178757" cy="1356650"/>
+              <a:ext cx="1178757" cy="1360205"/>
             </a:xfrm>
             <a:custGeom>
               <a:avLst/>
@@ -5144,7 +5087,7 @@
               <a:cxnLst/>
               <a:rect r="r" b="b" t="t" l="l"/>
               <a:pathLst>
-                <a:path h="1356650" w="1178757">
+                <a:path h="1360205" w="1178757">
                   <a:moveTo>
                     <a:pt x="34596" y="0"/>
                   </a:moveTo>
@@ -5162,25 +5105,25 @@
                     <a:pt x="1178757" y="34596"/>
                   </a:cubicBezTo>
                   <a:lnTo>
-                    <a:pt x="1178757" y="1322054"/>
+                    <a:pt x="1178757" y="1325609"/>
                   </a:lnTo>
                   <a:cubicBezTo>
-                    <a:pt x="1178757" y="1341161"/>
-                    <a:pt x="1163268" y="1356650"/>
-                    <a:pt x="1144161" y="1356650"/>
+                    <a:pt x="1178757" y="1344716"/>
+                    <a:pt x="1163268" y="1360205"/>
+                    <a:pt x="1144161" y="1360205"/>
                   </a:cubicBezTo>
                   <a:lnTo>
-                    <a:pt x="34596" y="1356650"/>
+                    <a:pt x="34596" y="1360205"/>
                   </a:lnTo>
                   <a:cubicBezTo>
-                    <a:pt x="25421" y="1356650"/>
-                    <a:pt x="16621" y="1353005"/>
-                    <a:pt x="10133" y="1346517"/>
+                    <a:pt x="25421" y="1360205"/>
+                    <a:pt x="16621" y="1356561"/>
+                    <a:pt x="10133" y="1350072"/>
                   </a:cubicBezTo>
                   <a:cubicBezTo>
-                    <a:pt x="3645" y="1340029"/>
-                    <a:pt x="0" y="1331229"/>
-                    <a:pt x="0" y="1322054"/>
+                    <a:pt x="3645" y="1343584"/>
+                    <a:pt x="0" y="1334785"/>
+                    <a:pt x="0" y="1325609"/>
                   </a:cubicBezTo>
                   <a:lnTo>
                     <a:pt x="0" y="34596"/>
@@ -5216,8 +5159,8 @@
           </p:nvSpPr>
           <p:spPr>
             <a:xfrm>
-              <a:off x="0" y="-47625"/>
-              <a:ext cx="1178757" cy="1404275"/>
+              <a:off x="0" y="-19050"/>
+              <a:ext cx="1178757" cy="1379255"/>
             </a:xfrm>
             <a:prstGeom prst="rect">
               <a:avLst/>
@@ -5229,37 +5172,166 @@
             <a:p>
               <a:pPr algn="ctr">
                 <a:lnSpc>
-                  <a:spcPts val="2600"/>
+                  <a:spcPts val="2859"/>
                 </a:lnSpc>
               </a:pPr>
             </a:p>
           </p:txBody>
         </p:sp>
       </p:grpSp>
+      <p:sp>
+        <p:nvSpPr>
+          <p:cNvPr name="TextBox 22" id="22"/>
+          <p:cNvSpPr txBox="true"/>
+          <p:nvPr/>
+        </p:nvSpPr>
+        <p:spPr>
+          <a:xfrm rot="0">
+            <a:off x="3690980" y="1329960"/>
+            <a:ext cx="10906040" cy="796391"/>
+          </a:xfrm>
+          <a:prstGeom prst="rect">
+            <a:avLst/>
+          </a:prstGeom>
+        </p:spPr>
+        <p:txBody>
+          <a:bodyPr anchor="t" rtlCol="false" tIns="0" lIns="0" bIns="0" rIns="0">
+            <a:spAutoFit/>
+          </a:bodyPr>
+          <a:lstStyle/>
+          <a:p>
+            <a:pPr algn="ctr" marL="0" indent="0" lvl="0">
+              <a:lnSpc>
+                <a:spcPts val="6548"/>
+              </a:lnSpc>
+              <a:spcBef>
+                <a:spcPct val="0"/>
+              </a:spcBef>
+            </a:pPr>
+            <a:r>
+              <a:rPr lang="en-US" b="true" sz="4745" spc="37">
+                <a:solidFill>
+                  <a:srgbClr val="344F51"/>
+                </a:solidFill>
+                <a:latin typeface="Fraunces Bold"/>
+                <a:ea typeface="Fraunces Bold"/>
+                <a:cs typeface="Fraunces Bold"/>
+                <a:sym typeface="Fraunces Bold"/>
+              </a:rPr>
+              <a:t>JUSTIFICACIÓN</a:t>
+            </a:r>
+          </a:p>
+        </p:txBody>
+      </p:sp>
+      <p:sp>
+        <p:nvSpPr>
+          <p:cNvPr name="TextBox 23" id="23"/>
+          <p:cNvSpPr txBox="true"/>
+          <p:nvPr/>
+        </p:nvSpPr>
+        <p:spPr>
+          <a:xfrm rot="0">
+            <a:off x="2508537" y="4059812"/>
+            <a:ext cx="3987194" cy="3683734"/>
+          </a:xfrm>
+          <a:prstGeom prst="rect">
+            <a:avLst/>
+          </a:prstGeom>
+        </p:spPr>
+        <p:txBody>
+          <a:bodyPr anchor="t" rtlCol="false" tIns="0" lIns="0" bIns="0" rIns="0">
+            <a:spAutoFit/>
+          </a:bodyPr>
+          <a:lstStyle/>
+          <a:p>
+            <a:pPr algn="l" marL="0" indent="0" lvl="0">
+              <a:lnSpc>
+                <a:spcPts val="2958"/>
+              </a:lnSpc>
+              <a:spcBef>
+                <a:spcPct val="0"/>
+              </a:spcBef>
+            </a:pPr>
+            <a:r>
+              <a:rPr lang="en-US" sz="2143" spc="210">
+                <a:solidFill>
+                  <a:srgbClr val="231F20"/>
+                </a:solidFill>
+                <a:latin typeface="Poppins"/>
+                <a:ea typeface="Poppins"/>
+                <a:cs typeface="Poppins"/>
+                <a:sym typeface="Poppins"/>
+              </a:rPr>
+              <a:t>Sitio web en el que se pueda realizar la contratación, por parte de los usuarios, de servicios ofrecidos por distintas empresas destinados al cuidado de personas mayores y/o personas que necesitan ayuda.</a:t>
+            </a:r>
+          </a:p>
+        </p:txBody>
+      </p:sp>
+      <p:sp>
+        <p:nvSpPr>
+          <p:cNvPr name="TextBox 24" id="24"/>
+          <p:cNvSpPr txBox="true"/>
+          <p:nvPr/>
+        </p:nvSpPr>
+        <p:spPr>
+          <a:xfrm rot="0">
+            <a:off x="17535126" y="9399905"/>
+            <a:ext cx="752874" cy="887095"/>
+          </a:xfrm>
+          <a:prstGeom prst="rect">
+            <a:avLst/>
+          </a:prstGeom>
+        </p:spPr>
+        <p:txBody>
+          <a:bodyPr anchor="t" rtlCol="false" tIns="0" lIns="0" bIns="0" rIns="0">
+            <a:spAutoFit/>
+          </a:bodyPr>
+          <a:lstStyle/>
+          <a:p>
+            <a:pPr algn="ctr">
+              <a:lnSpc>
+                <a:spcPts val="7279"/>
+              </a:lnSpc>
+            </a:pPr>
+            <a:r>
+              <a:rPr lang="en-US" b="true" sz="5199">
+                <a:solidFill>
+                  <a:srgbClr val="93D14B"/>
+                </a:solidFill>
+                <a:latin typeface="Open Sans Bold"/>
+                <a:ea typeface="Open Sans Bold"/>
+                <a:cs typeface="Open Sans Bold"/>
+                <a:sym typeface="Open Sans Bold"/>
+              </a:rPr>
+              <a:t>1.</a:t>
+            </a:r>
+          </a:p>
+        </p:txBody>
+      </p:sp>
       <p:grpSp>
         <p:nvGrpSpPr>
-          <p:cNvPr name="Group 22" id="22"/>
+          <p:cNvPr name="Group 25" id="25"/>
           <p:cNvGrpSpPr/>
           <p:nvPr/>
         </p:nvGrpSpPr>
         <p:grpSpPr>
           <a:xfrm rot="0">
-            <a:off x="12178667" y="3623212"/>
-            <a:ext cx="4475594" cy="5164530"/>
+            <a:off x="7328002" y="3655008"/>
+            <a:ext cx="4475594" cy="5151030"/>
             <a:chOff x="0" y="0"/>
-            <a:chExt cx="1178757" cy="1360205"/>
+            <a:chExt cx="1178757" cy="1356650"/>
           </a:xfrm>
         </p:grpSpPr>
         <p:sp>
           <p:nvSpPr>
-            <p:cNvPr name="Freeform 23" id="23"/>
+            <p:cNvPr name="Freeform 26" id="26"/>
             <p:cNvSpPr/>
             <p:nvPr/>
           </p:nvSpPr>
           <p:spPr>
             <a:xfrm flipH="false" flipV="false" rot="0">
               <a:off x="0" y="0"/>
-              <a:ext cx="1178757" cy="1360205"/>
+              <a:ext cx="1178757" cy="1356650"/>
             </a:xfrm>
             <a:custGeom>
               <a:avLst/>
@@ -5268,7 +5340,7 @@
               <a:cxnLst/>
               <a:rect r="r" b="b" t="t" l="l"/>
               <a:pathLst>
-                <a:path h="1360205" w="1178757">
+                <a:path h="1356650" w="1178757">
                   <a:moveTo>
                     <a:pt x="34596" y="0"/>
                   </a:moveTo>
@@ -5286,25 +5358,25 @@
                     <a:pt x="1178757" y="34596"/>
                   </a:cubicBezTo>
                   <a:lnTo>
-                    <a:pt x="1178757" y="1325609"/>
+                    <a:pt x="1178757" y="1322054"/>
                   </a:lnTo>
                   <a:cubicBezTo>
-                    <a:pt x="1178757" y="1344716"/>
-                    <a:pt x="1163268" y="1360205"/>
-                    <a:pt x="1144161" y="1360205"/>
+                    <a:pt x="1178757" y="1341161"/>
+                    <a:pt x="1163268" y="1356650"/>
+                    <a:pt x="1144161" y="1356650"/>
                   </a:cubicBezTo>
                   <a:lnTo>
-                    <a:pt x="34596" y="1360205"/>
+                    <a:pt x="34596" y="1356650"/>
                   </a:lnTo>
                   <a:cubicBezTo>
-                    <a:pt x="25421" y="1360205"/>
-                    <a:pt x="16621" y="1356561"/>
-                    <a:pt x="10133" y="1350072"/>
+                    <a:pt x="25421" y="1356650"/>
+                    <a:pt x="16621" y="1353005"/>
+                    <a:pt x="10133" y="1346517"/>
                   </a:cubicBezTo>
                   <a:cubicBezTo>
-                    <a:pt x="3645" y="1343584"/>
-                    <a:pt x="0" y="1334785"/>
-                    <a:pt x="0" y="1325609"/>
+                    <a:pt x="3645" y="1340029"/>
+                    <a:pt x="0" y="1331229"/>
+                    <a:pt x="0" y="1322054"/>
                   </a:cubicBezTo>
                   <a:lnTo>
                     <a:pt x="0" y="34596"/>
@@ -5334,14 +5406,14 @@
         </p:sp>
         <p:sp>
           <p:nvSpPr>
-            <p:cNvPr name="TextBox 24" id="24"/>
+            <p:cNvPr name="TextBox 27" id="27"/>
             <p:cNvSpPr txBox="true"/>
             <p:nvPr/>
           </p:nvSpPr>
           <p:spPr>
             <a:xfrm>
-              <a:off x="0" y="-19050"/>
-              <a:ext cx="1178757" cy="1379255"/>
+              <a:off x="0" y="-47625"/>
+              <a:ext cx="1178757" cy="1404275"/>
             </a:xfrm>
             <a:prstGeom prst="rect">
               <a:avLst/>
@@ -5353,142 +5425,13 @@
             <a:p>
               <a:pPr algn="ctr">
                 <a:lnSpc>
-                  <a:spcPts val="2859"/>
+                  <a:spcPts val="2600"/>
                 </a:lnSpc>
               </a:pPr>
             </a:p>
           </p:txBody>
         </p:sp>
       </p:grpSp>
-      <p:sp>
-        <p:nvSpPr>
-          <p:cNvPr name="TextBox 25" id="25"/>
-          <p:cNvSpPr txBox="true"/>
-          <p:nvPr/>
-        </p:nvSpPr>
-        <p:spPr>
-          <a:xfrm rot="0">
-            <a:off x="3690980" y="1329960"/>
-            <a:ext cx="10906040" cy="796391"/>
-          </a:xfrm>
-          <a:prstGeom prst="rect">
-            <a:avLst/>
-          </a:prstGeom>
-        </p:spPr>
-        <p:txBody>
-          <a:bodyPr anchor="t" rtlCol="false" tIns="0" lIns="0" bIns="0" rIns="0">
-            <a:spAutoFit/>
-          </a:bodyPr>
-          <a:lstStyle/>
-          <a:p>
-            <a:pPr algn="ctr" marL="0" indent="0" lvl="0">
-              <a:lnSpc>
-                <a:spcPts val="6548"/>
-              </a:lnSpc>
-              <a:spcBef>
-                <a:spcPct val="0"/>
-              </a:spcBef>
-            </a:pPr>
-            <a:r>
-              <a:rPr lang="en-US" b="true" sz="4745" spc="37">
-                <a:solidFill>
-                  <a:srgbClr val="344F51"/>
-                </a:solidFill>
-                <a:latin typeface="Fraunces Bold"/>
-                <a:ea typeface="Fraunces Bold"/>
-                <a:cs typeface="Fraunces Bold"/>
-                <a:sym typeface="Fraunces Bold"/>
-              </a:rPr>
-              <a:t>JUSTIFICACIÓN</a:t>
-            </a:r>
-          </a:p>
-        </p:txBody>
-      </p:sp>
-      <p:sp>
-        <p:nvSpPr>
-          <p:cNvPr name="TextBox 26" id="26"/>
-          <p:cNvSpPr txBox="true"/>
-          <p:nvPr/>
-        </p:nvSpPr>
-        <p:spPr>
-          <a:xfrm rot="0">
-            <a:off x="2405030" y="4186108"/>
-            <a:ext cx="4194209" cy="3683734"/>
-          </a:xfrm>
-          <a:prstGeom prst="rect">
-            <a:avLst/>
-          </a:prstGeom>
-        </p:spPr>
-        <p:txBody>
-          <a:bodyPr anchor="t" rtlCol="false" tIns="0" lIns="0" bIns="0" rIns="0">
-            <a:spAutoFit/>
-          </a:bodyPr>
-          <a:lstStyle/>
-          <a:p>
-            <a:pPr algn="l" marL="0" indent="0" lvl="0">
-              <a:lnSpc>
-                <a:spcPts val="2958"/>
-              </a:lnSpc>
-              <a:spcBef>
-                <a:spcPct val="0"/>
-              </a:spcBef>
-            </a:pPr>
-            <a:r>
-              <a:rPr lang="en-US" sz="2143" spc="210">
-                <a:solidFill>
-                  <a:srgbClr val="231F20"/>
-                </a:solidFill>
-                <a:latin typeface="Poppins"/>
-                <a:ea typeface="Poppins"/>
-                <a:cs typeface="Poppins"/>
-                <a:sym typeface="Poppins"/>
-              </a:rPr>
-              <a:t>Sitio web en el que se pueda realizar la contratación, por parte de los usuarios, de servicios ofrecidos por distintas empresas destinados al cuidado de personas mayores y/o personas que necesitan ayuda.</a:t>
-            </a:r>
-          </a:p>
-        </p:txBody>
-      </p:sp>
-      <p:sp>
-        <p:nvSpPr>
-          <p:cNvPr name="TextBox 27" id="27"/>
-          <p:cNvSpPr txBox="true"/>
-          <p:nvPr/>
-        </p:nvSpPr>
-        <p:spPr>
-          <a:xfrm rot="0">
-            <a:off x="17535126" y="9399905"/>
-            <a:ext cx="752874" cy="887095"/>
-          </a:xfrm>
-          <a:prstGeom prst="rect">
-            <a:avLst/>
-          </a:prstGeom>
-        </p:spPr>
-        <p:txBody>
-          <a:bodyPr anchor="t" rtlCol="false" tIns="0" lIns="0" bIns="0" rIns="0">
-            <a:spAutoFit/>
-          </a:bodyPr>
-          <a:lstStyle/>
-          <a:p>
-            <a:pPr algn="ctr">
-              <a:lnSpc>
-                <a:spcPts val="7279"/>
-              </a:lnSpc>
-            </a:pPr>
-            <a:r>
-              <a:rPr lang="en-US" b="true" sz="5199">
-                <a:solidFill>
-                  <a:srgbClr val="93D14B"/>
-                </a:solidFill>
-                <a:latin typeface="Open Sans Bold"/>
-                <a:ea typeface="Open Sans Bold"/>
-                <a:cs typeface="Open Sans Bold"/>
-                <a:sym typeface="Open Sans Bold"/>
-              </a:rPr>
-              <a:t>1.</a:t>
-            </a:r>
-          </a:p>
-        </p:txBody>
-      </p:sp>
     </p:spTree>
   </p:cSld>
   <p:clrMapOvr>
@@ -6562,8 +6505,8 @@
         </p:nvSpPr>
         <p:spPr>
           <a:xfrm flipH="false" flipV="false" rot="0">
-            <a:off x="5105746" y="639089"/>
-            <a:ext cx="12153554" cy="9008822"/>
+            <a:off x="4556940" y="256829"/>
+            <a:ext cx="12978186" cy="9620080"/>
           </a:xfrm>
           <a:custGeom>
             <a:avLst/>
@@ -6572,18 +6515,18 @@
             <a:cxnLst/>
             <a:rect r="r" b="b" t="t" l="l"/>
             <a:pathLst>
-              <a:path h="9008822" w="12153554">
+              <a:path h="9620080" w="12978186">
                 <a:moveTo>
                   <a:pt x="0" y="0"/>
                 </a:moveTo>
                 <a:lnTo>
-                  <a:pt x="12153554" y="0"/>
-                </a:lnTo>
-                <a:lnTo>
-                  <a:pt x="12153554" y="9008822"/>
-                </a:lnTo>
-                <a:lnTo>
-                  <a:pt x="0" y="9008822"/>
+                  <a:pt x="12978186" y="0"/>
+                </a:lnTo>
+                <a:lnTo>
+                  <a:pt x="12978186" y="9620080"/>
+                </a:lnTo>
+                <a:lnTo>
+                  <a:pt x="0" y="9620080"/>
                 </a:lnTo>
                 <a:lnTo>
                   <a:pt x="0" y="0"/>
@@ -6818,7 +6761,7 @@
         </p:nvGrpSpPr>
         <p:grpSpPr>
           <a:xfrm rot="0">
-            <a:off x="290765" y="3591042"/>
+            <a:off x="335116" y="3466122"/>
             <a:ext cx="5008014" cy="859690"/>
             <a:chOff x="0" y="0"/>
             <a:chExt cx="1164415" cy="199887"/>
@@ -6943,7 +6886,7 @@
         </p:nvGrpSpPr>
         <p:grpSpPr>
           <a:xfrm rot="0">
-            <a:off x="6241754" y="3466122"/>
+            <a:off x="6240627" y="3466122"/>
             <a:ext cx="5964636" cy="859690"/>
             <a:chOff x="0" y="0"/>
             <a:chExt cx="1386840" cy="199887"/>
@@ -8274,7 +8217,7 @@
 </file>
 
 <file path=ppt/slides/slide8.xml><?xml version="1.0" encoding="utf-8"?>
-<p:sld xmlns:p="http://schemas.openxmlformats.org/presentationml/2006/main" xmlns:a="http://schemas.openxmlformats.org/drawingml/2006/main">
+<p:sld xmlns:p="http://schemas.openxmlformats.org/presentationml/2006/main" xmlns:a="http://schemas.openxmlformats.org/drawingml/2006/main" xmlns:r="http://schemas.openxmlformats.org/officeDocument/2006/relationships">
   <p:cSld>
     <p:bg>
       <p:bgPr>
@@ -8421,7 +8364,280 @@
       </p:grpSp>
       <p:sp>
         <p:nvSpPr>
-          <p:cNvPr name="TextBox 5" id="5"/>
+          <p:cNvPr name="Freeform 5" id="5"/>
+          <p:cNvSpPr/>
+          <p:nvPr/>
+        </p:nvSpPr>
+        <p:spPr>
+          <a:xfrm flipH="false" flipV="false" rot="0">
+            <a:off x="2314384" y="3331871"/>
+            <a:ext cx="1516533" cy="1254586"/>
+          </a:xfrm>
+          <a:custGeom>
+            <a:avLst/>
+            <a:gdLst/>
+            <a:ahLst/>
+            <a:cxnLst/>
+            <a:rect r="r" b="b" t="t" l="l"/>
+            <a:pathLst>
+              <a:path h="1254586" w="1516533">
+                <a:moveTo>
+                  <a:pt x="0" y="0"/>
+                </a:moveTo>
+                <a:lnTo>
+                  <a:pt x="1516533" y="0"/>
+                </a:lnTo>
+                <a:lnTo>
+                  <a:pt x="1516533" y="1254586"/>
+                </a:lnTo>
+                <a:lnTo>
+                  <a:pt x="0" y="1254586"/>
+                </a:lnTo>
+                <a:lnTo>
+                  <a:pt x="0" y="0"/>
+                </a:lnTo>
+                <a:close/>
+              </a:path>
+            </a:pathLst>
+          </a:custGeom>
+          <a:blipFill>
+            <a:blip r:embed="rId2">
+              <a:extLst>
+                <a:ext uri="{96DAC541-7B7A-43D3-8B79-37D633B846F1}">
+                  <asvg:svgBlip xmlns:asvg="http://schemas.microsoft.com/office/drawing/2016/SVG/main" r:embed="rId3"/>
+                </a:ext>
+              </a:extLst>
+            </a:blip>
+            <a:stretch>
+              <a:fillRect l="0" t="0" r="0" b="0"/>
+            </a:stretch>
+          </a:blipFill>
+        </p:spPr>
+      </p:sp>
+      <p:sp>
+        <p:nvSpPr>
+          <p:cNvPr name="Freeform 6" id="6"/>
+          <p:cNvSpPr/>
+          <p:nvPr/>
+        </p:nvSpPr>
+        <p:spPr>
+          <a:xfrm flipH="false" flipV="false" rot="0">
+            <a:off x="6177532" y="3179204"/>
+            <a:ext cx="1150967" cy="1559919"/>
+          </a:xfrm>
+          <a:custGeom>
+            <a:avLst/>
+            <a:gdLst/>
+            <a:ahLst/>
+            <a:cxnLst/>
+            <a:rect r="r" b="b" t="t" l="l"/>
+            <a:pathLst>
+              <a:path h="1559919" w="1150967">
+                <a:moveTo>
+                  <a:pt x="0" y="0"/>
+                </a:moveTo>
+                <a:lnTo>
+                  <a:pt x="1150967" y="0"/>
+                </a:lnTo>
+                <a:lnTo>
+                  <a:pt x="1150967" y="1559919"/>
+                </a:lnTo>
+                <a:lnTo>
+                  <a:pt x="0" y="1559919"/>
+                </a:lnTo>
+                <a:lnTo>
+                  <a:pt x="0" y="0"/>
+                </a:lnTo>
+                <a:close/>
+              </a:path>
+            </a:pathLst>
+          </a:custGeom>
+          <a:blipFill>
+            <a:blip r:embed="rId4">
+              <a:extLst>
+                <a:ext uri="{96DAC541-7B7A-43D3-8B79-37D633B846F1}">
+                  <asvg:svgBlip xmlns:asvg="http://schemas.microsoft.com/office/drawing/2016/SVG/main" r:embed="rId5"/>
+                </a:ext>
+              </a:extLst>
+            </a:blip>
+            <a:stretch>
+              <a:fillRect l="0" t="0" r="0" b="0"/>
+            </a:stretch>
+          </a:blipFill>
+        </p:spPr>
+      </p:sp>
+      <p:sp>
+        <p:nvSpPr>
+          <p:cNvPr name="Freeform 7" id="7"/>
+          <p:cNvSpPr/>
+          <p:nvPr/>
+        </p:nvSpPr>
+        <p:spPr>
+          <a:xfrm flipH="false" flipV="false" rot="0">
+            <a:off x="9283937" y="3498338"/>
+            <a:ext cx="1635151" cy="1088119"/>
+          </a:xfrm>
+          <a:custGeom>
+            <a:avLst/>
+            <a:gdLst/>
+            <a:ahLst/>
+            <a:cxnLst/>
+            <a:rect r="r" b="b" t="t" l="l"/>
+            <a:pathLst>
+              <a:path h="1088119" w="1635151">
+                <a:moveTo>
+                  <a:pt x="0" y="0"/>
+                </a:moveTo>
+                <a:lnTo>
+                  <a:pt x="1635151" y="0"/>
+                </a:lnTo>
+                <a:lnTo>
+                  <a:pt x="1635151" y="1088119"/>
+                </a:lnTo>
+                <a:lnTo>
+                  <a:pt x="0" y="1088119"/>
+                </a:lnTo>
+                <a:lnTo>
+                  <a:pt x="0" y="0"/>
+                </a:lnTo>
+                <a:close/>
+              </a:path>
+            </a:pathLst>
+          </a:custGeom>
+          <a:blipFill>
+            <a:blip r:embed="rId6">
+              <a:extLst>
+                <a:ext uri="{96DAC541-7B7A-43D3-8B79-37D633B846F1}">
+                  <asvg:svgBlip xmlns:asvg="http://schemas.microsoft.com/office/drawing/2016/SVG/main" r:embed="rId7"/>
+                </a:ext>
+              </a:extLst>
+            </a:blip>
+            <a:stretch>
+              <a:fillRect l="0" t="0" r="0" b="0"/>
+            </a:stretch>
+          </a:blipFill>
+        </p:spPr>
+      </p:sp>
+      <p:sp>
+        <p:nvSpPr>
+          <p:cNvPr name="Freeform 8" id="8"/>
+          <p:cNvSpPr/>
+          <p:nvPr/>
+        </p:nvSpPr>
+        <p:spPr>
+          <a:xfrm flipH="false" flipV="false" rot="0">
+            <a:off x="13781727" y="3498338"/>
+            <a:ext cx="1433886" cy="1420851"/>
+          </a:xfrm>
+          <a:custGeom>
+            <a:avLst/>
+            <a:gdLst/>
+            <a:ahLst/>
+            <a:cxnLst/>
+            <a:rect r="r" b="b" t="t" l="l"/>
+            <a:pathLst>
+              <a:path h="1420851" w="1433886">
+                <a:moveTo>
+                  <a:pt x="0" y="0"/>
+                </a:moveTo>
+                <a:lnTo>
+                  <a:pt x="1433886" y="0"/>
+                </a:lnTo>
+                <a:lnTo>
+                  <a:pt x="1433886" y="1420851"/>
+                </a:lnTo>
+                <a:lnTo>
+                  <a:pt x="0" y="1420851"/>
+                </a:lnTo>
+                <a:lnTo>
+                  <a:pt x="0" y="0"/>
+                </a:lnTo>
+                <a:close/>
+              </a:path>
+            </a:pathLst>
+          </a:custGeom>
+          <a:blipFill>
+            <a:blip r:embed="rId8">
+              <a:extLst>
+                <a:ext uri="{96DAC541-7B7A-43D3-8B79-37D633B846F1}">
+                  <asvg:svgBlip xmlns:asvg="http://schemas.microsoft.com/office/drawing/2016/SVG/main" r:embed="rId9"/>
+                </a:ext>
+              </a:extLst>
+            </a:blip>
+            <a:stretch>
+              <a:fillRect l="0" t="0" r="0" b="0"/>
+            </a:stretch>
+          </a:blipFill>
+        </p:spPr>
+      </p:sp>
+      <p:sp>
+        <p:nvSpPr>
+          <p:cNvPr name="TextBox 9" id="9"/>
+          <p:cNvSpPr txBox="true"/>
+          <p:nvPr/>
+        </p:nvSpPr>
+        <p:spPr>
+          <a:xfrm rot="0">
+            <a:off x="12801467" y="5320148"/>
+            <a:ext cx="3924664" cy="3049524"/>
+          </a:xfrm>
+          <a:prstGeom prst="rect">
+            <a:avLst/>
+          </a:prstGeom>
+        </p:spPr>
+        <p:txBody>
+          <a:bodyPr anchor="t" rtlCol="false" tIns="0" lIns="0" bIns="0" rIns="0">
+            <a:spAutoFit/>
+          </a:bodyPr>
+          <a:lstStyle/>
+          <a:p>
+            <a:pPr algn="l">
+              <a:lnSpc>
+                <a:spcPts val="2207"/>
+              </a:lnSpc>
+            </a:pPr>
+            <a:r>
+              <a:rPr lang="en-US" sz="1599" spc="156" b="true">
+                <a:solidFill>
+                  <a:srgbClr val="344F51"/>
+                </a:solidFill>
+                <a:latin typeface="Poppins Bold"/>
+                <a:ea typeface="Poppins Bold"/>
+                <a:cs typeface="Poppins Bold"/>
+                <a:sym typeface="Poppins Bold"/>
+              </a:rPr>
+              <a:t>Expansión del Módulo de Inteligencia Artificial. Matchmaking Inteligente: el cliente describe el problema en lenguaje natural y la IA filtra la base de datos y le propone los 3 perfiles profesionales más adecuados.</a:t>
+            </a:r>
+          </a:p>
+          <a:p>
+            <a:pPr algn="l">
+              <a:lnSpc>
+                <a:spcPts val="2207"/>
+              </a:lnSpc>
+            </a:pPr>
+          </a:p>
+          <a:p>
+            <a:pPr algn="l">
+              <a:lnSpc>
+                <a:spcPts val="2207"/>
+              </a:lnSpc>
+            </a:pPr>
+          </a:p>
+          <a:p>
+            <a:pPr algn="l" marL="0" indent="0" lvl="0">
+              <a:lnSpc>
+                <a:spcPts val="2207"/>
+              </a:lnSpc>
+              <a:spcBef>
+                <a:spcPct val="0"/>
+              </a:spcBef>
+            </a:pPr>
+          </a:p>
+        </p:txBody>
+      </p:sp>
+      <p:sp>
+        <p:nvSpPr>
+          <p:cNvPr name="TextBox 10" id="10"/>
           <p:cNvSpPr txBox="true"/>
           <p:nvPr/>
         </p:nvSpPr>
@@ -8465,193 +8681,7 @@
       </p:sp>
       <p:sp>
         <p:nvSpPr>
-          <p:cNvPr name="TextBox 6" id="6"/>
-          <p:cNvSpPr txBox="true"/>
-          <p:nvPr/>
-        </p:nvSpPr>
-        <p:spPr>
-          <a:xfrm rot="0">
-            <a:off x="2976208" y="3153392"/>
-            <a:ext cx="13558833" cy="6001516"/>
-          </a:xfrm>
-          <a:prstGeom prst="rect">
-            <a:avLst/>
-          </a:prstGeom>
-        </p:spPr>
-        <p:txBody>
-          <a:bodyPr anchor="t" rtlCol="false" tIns="0" lIns="0" bIns="0" rIns="0">
-            <a:spAutoFit/>
-          </a:bodyPr>
-          <a:lstStyle/>
-          <a:p>
-            <a:pPr algn="l" marL="442554" indent="-221277" lvl="1">
-              <a:lnSpc>
-                <a:spcPts val="2828"/>
-              </a:lnSpc>
-              <a:buFont typeface="Arial"/>
-              <a:buChar char="•"/>
-            </a:pPr>
-            <a:r>
-              <a:rPr lang="en-US" b="true" sz="2049" spc="200">
-                <a:solidFill>
-                  <a:srgbClr val="344F51"/>
-                </a:solidFill>
-                <a:latin typeface="Poppins Bold"/>
-                <a:ea typeface="Poppins Bold"/>
-                <a:cs typeface="Poppins Bold"/>
-                <a:sym typeface="Poppins Bold"/>
-              </a:rPr>
-              <a:t>Integración de Pasarela de Pago y Modelo de Negocio. Como evolución natural, se propone la integración de una pasarela de pagos segura (como Stripe o PayPal).</a:t>
-            </a:r>
-          </a:p>
-          <a:p>
-            <a:pPr algn="l">
-              <a:lnSpc>
-                <a:spcPts val="2828"/>
-              </a:lnSpc>
-            </a:pPr>
-          </a:p>
-          <a:p>
-            <a:pPr algn="l" marL="442554" indent="-221277" lvl="1">
-              <a:lnSpc>
-                <a:spcPts val="2828"/>
-              </a:lnSpc>
-              <a:buFont typeface="Arial"/>
-              <a:buChar char="•"/>
-            </a:pPr>
-            <a:r>
-              <a:rPr lang="en-US" b="true" sz="2049" spc="200">
-                <a:solidFill>
-                  <a:srgbClr val="344F51"/>
-                </a:solidFill>
-                <a:latin typeface="Poppins Bold"/>
-                <a:ea typeface="Poppins Bold"/>
-                <a:cs typeface="Poppins Bold"/>
-                <a:sym typeface="Poppins Bold"/>
-              </a:rPr>
-              <a:t>Sistema de Valoraciones.</a:t>
-            </a:r>
-          </a:p>
-          <a:p>
-            <a:pPr algn="l">
-              <a:lnSpc>
-                <a:spcPts val="2828"/>
-              </a:lnSpc>
-            </a:pPr>
-          </a:p>
-          <a:p>
-            <a:pPr algn="l" marL="442554" indent="-221277" lvl="1">
-              <a:lnSpc>
-                <a:spcPts val="2828"/>
-              </a:lnSpc>
-              <a:buFont typeface="Arial"/>
-              <a:buChar char="•"/>
-            </a:pPr>
-            <a:r>
-              <a:rPr lang="en-US" b="true" sz="2049" spc="200">
-                <a:solidFill>
-                  <a:srgbClr val="344F51"/>
-                </a:solidFill>
-                <a:latin typeface="Poppins Bold"/>
-                <a:ea typeface="Poppins Bold"/>
-                <a:cs typeface="Poppins Bold"/>
-                <a:sym typeface="Poppins Bold"/>
-              </a:rPr>
-              <a:t>Entrevistas por Videollamada (WebRTC). Implementar un módulo de videollamadas integrado directamente en el chat de la aplicación.</a:t>
-            </a:r>
-          </a:p>
-          <a:p>
-            <a:pPr algn="l">
-              <a:lnSpc>
-                <a:spcPts val="2828"/>
-              </a:lnSpc>
-            </a:pPr>
-          </a:p>
-          <a:p>
-            <a:pPr algn="l" marL="442554" indent="-221277" lvl="1">
-              <a:lnSpc>
-                <a:spcPts val="2828"/>
-              </a:lnSpc>
-              <a:buFont typeface="Arial"/>
-              <a:buChar char="•"/>
-            </a:pPr>
-            <a:r>
-              <a:rPr lang="en-US" b="true" sz="2049" spc="200">
-                <a:solidFill>
-                  <a:srgbClr val="344F51"/>
-                </a:solidFill>
-                <a:latin typeface="Poppins Bold"/>
-                <a:ea typeface="Poppins Bold"/>
-                <a:cs typeface="Poppins Bold"/>
-                <a:sym typeface="Poppins Bold"/>
-              </a:rPr>
-              <a:t>Expansión del Módulo de Inteligencia Artificial. Matchmaking Inteligente: el cliente describe el problema en lenguaje natural y la IA filtra la base de datos y le propone los 3 perfiles profesionales más adecuados.</a:t>
-            </a:r>
-          </a:p>
-          <a:p>
-            <a:pPr algn="l">
-              <a:lnSpc>
-                <a:spcPts val="2828"/>
-              </a:lnSpc>
-            </a:pPr>
-          </a:p>
-          <a:p>
-            <a:pPr algn="l" marL="442554" indent="-221277" lvl="1">
-              <a:lnSpc>
-                <a:spcPts val="2828"/>
-              </a:lnSpc>
-              <a:buFont typeface="Arial"/>
-              <a:buChar char="•"/>
-            </a:pPr>
-            <a:r>
-              <a:rPr lang="en-US" b="true" sz="2049" spc="200">
-                <a:solidFill>
-                  <a:srgbClr val="344F51"/>
-                </a:solidFill>
-                <a:latin typeface="Poppins Bold"/>
-                <a:ea typeface="Poppins Bold"/>
-                <a:cs typeface="Poppins Bold"/>
-                <a:sym typeface="Poppins Bold"/>
-              </a:rPr>
-              <a:t>Dar de alta a los usuarios de nuevo por los adnimistradores.</a:t>
-            </a:r>
-          </a:p>
-          <a:p>
-            <a:pPr algn="l">
-              <a:lnSpc>
-                <a:spcPts val="2828"/>
-              </a:lnSpc>
-            </a:pPr>
-          </a:p>
-          <a:p>
-            <a:pPr algn="l">
-              <a:lnSpc>
-                <a:spcPts val="2828"/>
-              </a:lnSpc>
-            </a:pPr>
-          </a:p>
-          <a:p>
-            <a:pPr algn="l">
-              <a:lnSpc>
-                <a:spcPts val="2828"/>
-              </a:lnSpc>
-            </a:pPr>
-          </a:p>
-          <a:p>
-            <a:pPr algn="l" marL="0" indent="0" lvl="0">
-              <a:lnSpc>
-                <a:spcPts val="2828"/>
-              </a:lnSpc>
-              <a:spcBef>
-                <a:spcPct val="0"/>
-              </a:spcBef>
-            </a:pPr>
-          </a:p>
-        </p:txBody>
-      </p:sp>
-      <p:sp>
-        <p:nvSpPr>
-          <p:cNvPr name="TextBox 7" id="7"/>
+          <p:cNvPr name="TextBox 11" id="11"/>
           <p:cNvSpPr txBox="true"/>
           <p:nvPr/>
         </p:nvSpPr>
@@ -8699,6 +8729,236 @@
               </a:rPr>
               <a:t>.</a:t>
             </a:r>
+          </a:p>
+        </p:txBody>
+      </p:sp>
+      <p:sp>
+        <p:nvSpPr>
+          <p:cNvPr name="TextBox 12" id="12"/>
+          <p:cNvSpPr txBox="true"/>
+          <p:nvPr/>
+        </p:nvSpPr>
+        <p:spPr>
+          <a:xfrm rot="0">
+            <a:off x="1778673" y="5320148"/>
+            <a:ext cx="2970137" cy="3601974"/>
+          </a:xfrm>
+          <a:prstGeom prst="rect">
+            <a:avLst/>
+          </a:prstGeom>
+        </p:spPr>
+        <p:txBody>
+          <a:bodyPr anchor="t" rtlCol="false" tIns="0" lIns="0" bIns="0" rIns="0">
+            <a:spAutoFit/>
+          </a:bodyPr>
+          <a:lstStyle/>
+          <a:p>
+            <a:pPr algn="l">
+              <a:lnSpc>
+                <a:spcPts val="2208"/>
+              </a:lnSpc>
+            </a:pPr>
+            <a:r>
+              <a:rPr lang="en-US" sz="1600" spc="156" b="true">
+                <a:solidFill>
+                  <a:srgbClr val="344F51"/>
+                </a:solidFill>
+                <a:latin typeface="Poppins Bold"/>
+                <a:ea typeface="Poppins Bold"/>
+                <a:cs typeface="Poppins Bold"/>
+                <a:sym typeface="Poppins Bold"/>
+              </a:rPr>
+              <a:t>Integración de Pasarela de Pago y Modelo de Negocio. Como evolución natural, se propone la integración de una pasarela de pagos segura (como Stripe o PayPal).</a:t>
+            </a:r>
+          </a:p>
+          <a:p>
+            <a:pPr algn="l">
+              <a:lnSpc>
+                <a:spcPts val="2208"/>
+              </a:lnSpc>
+            </a:pPr>
+          </a:p>
+          <a:p>
+            <a:pPr algn="l">
+              <a:lnSpc>
+                <a:spcPts val="2208"/>
+              </a:lnSpc>
+            </a:pPr>
+          </a:p>
+          <a:p>
+            <a:pPr algn="l">
+              <a:lnSpc>
+                <a:spcPts val="2208"/>
+              </a:lnSpc>
+            </a:pPr>
+          </a:p>
+          <a:p>
+            <a:pPr algn="l">
+              <a:lnSpc>
+                <a:spcPts val="2208"/>
+              </a:lnSpc>
+            </a:pPr>
+          </a:p>
+          <a:p>
+            <a:pPr algn="l" marL="0" indent="0" lvl="0">
+              <a:lnSpc>
+                <a:spcPts val="2208"/>
+              </a:lnSpc>
+              <a:spcBef>
+                <a:spcPct val="0"/>
+              </a:spcBef>
+            </a:pPr>
+          </a:p>
+        </p:txBody>
+      </p:sp>
+      <p:sp>
+        <p:nvSpPr>
+          <p:cNvPr name="TextBox 13" id="13"/>
+          <p:cNvSpPr txBox="true"/>
+          <p:nvPr/>
+        </p:nvSpPr>
+        <p:spPr>
+          <a:xfrm rot="0">
+            <a:off x="5307758" y="5329673"/>
+            <a:ext cx="3209001" cy="3361374"/>
+          </a:xfrm>
+          <a:prstGeom prst="rect">
+            <a:avLst/>
+          </a:prstGeom>
+        </p:spPr>
+        <p:txBody>
+          <a:bodyPr anchor="t" rtlCol="false" tIns="0" lIns="0" bIns="0" rIns="0">
+            <a:spAutoFit/>
+          </a:bodyPr>
+          <a:lstStyle/>
+          <a:p>
+            <a:pPr algn="l">
+              <a:lnSpc>
+                <a:spcPts val="2247"/>
+              </a:lnSpc>
+            </a:pPr>
+            <a:r>
+              <a:rPr lang="en-US" sz="1628" spc="159" b="true">
+                <a:solidFill>
+                  <a:srgbClr val="344F51"/>
+                </a:solidFill>
+                <a:latin typeface="Poppins Bold"/>
+                <a:ea typeface="Poppins Bold"/>
+                <a:cs typeface="Poppins Bold"/>
+                <a:sym typeface="Poppins Bold"/>
+              </a:rPr>
+              <a:t>Sistema de Valoraciones, de forma que los usuarios podrán leer las reseñas de otros clientes, facilitando la toma de decisión de contratación.</a:t>
+            </a:r>
+          </a:p>
+          <a:p>
+            <a:pPr algn="l">
+              <a:lnSpc>
+                <a:spcPts val="2247"/>
+              </a:lnSpc>
+            </a:pPr>
+          </a:p>
+          <a:p>
+            <a:pPr algn="l">
+              <a:lnSpc>
+                <a:spcPts val="2247"/>
+              </a:lnSpc>
+            </a:pPr>
+          </a:p>
+          <a:p>
+            <a:pPr algn="l">
+              <a:lnSpc>
+                <a:spcPts val="2247"/>
+              </a:lnSpc>
+            </a:pPr>
+          </a:p>
+          <a:p>
+            <a:pPr algn="l">
+              <a:lnSpc>
+                <a:spcPts val="2247"/>
+              </a:lnSpc>
+            </a:pPr>
+          </a:p>
+          <a:p>
+            <a:pPr algn="l" marL="0" indent="0" lvl="0">
+              <a:lnSpc>
+                <a:spcPts val="2247"/>
+              </a:lnSpc>
+              <a:spcBef>
+                <a:spcPct val="0"/>
+              </a:spcBef>
+            </a:pPr>
+          </a:p>
+        </p:txBody>
+      </p:sp>
+      <p:sp>
+        <p:nvSpPr>
+          <p:cNvPr name="TextBox 14" id="14"/>
+          <p:cNvSpPr txBox="true"/>
+          <p:nvPr/>
+        </p:nvSpPr>
+        <p:spPr>
+          <a:xfrm rot="0">
+            <a:off x="8948066" y="5320148"/>
+            <a:ext cx="3654880" cy="2773299"/>
+          </a:xfrm>
+          <a:prstGeom prst="rect">
+            <a:avLst/>
+          </a:prstGeom>
+        </p:spPr>
+        <p:txBody>
+          <a:bodyPr anchor="t" rtlCol="false" tIns="0" lIns="0" bIns="0" rIns="0">
+            <a:spAutoFit/>
+          </a:bodyPr>
+          <a:lstStyle/>
+          <a:p>
+            <a:pPr algn="l">
+              <a:lnSpc>
+                <a:spcPts val="2207"/>
+              </a:lnSpc>
+            </a:pPr>
+            <a:r>
+              <a:rPr lang="en-US" sz="1599" spc="156" b="true">
+                <a:solidFill>
+                  <a:srgbClr val="344F51"/>
+                </a:solidFill>
+                <a:latin typeface="Poppins Bold"/>
+                <a:ea typeface="Poppins Bold"/>
+                <a:cs typeface="Poppins Bold"/>
+                <a:sym typeface="Poppins Bold"/>
+              </a:rPr>
+              <a:t>Entrevistas por Videollamada (WebRTC). Implementar un módulo de videollamadas integrado directamente en el chat de la aplicación.</a:t>
+            </a:r>
+          </a:p>
+          <a:p>
+            <a:pPr algn="l">
+              <a:lnSpc>
+                <a:spcPts val="2207"/>
+              </a:lnSpc>
+            </a:pPr>
+          </a:p>
+          <a:p>
+            <a:pPr algn="l">
+              <a:lnSpc>
+                <a:spcPts val="2207"/>
+              </a:lnSpc>
+            </a:pPr>
+          </a:p>
+          <a:p>
+            <a:pPr algn="l">
+              <a:lnSpc>
+                <a:spcPts val="2207"/>
+              </a:lnSpc>
+            </a:pPr>
+          </a:p>
+          <a:p>
+            <a:pPr algn="l" marL="0" indent="0" lvl="0">
+              <a:lnSpc>
+                <a:spcPts val="2207"/>
+              </a:lnSpc>
+              <a:spcBef>
+                <a:spcPct val="0"/>
+              </a:spcBef>
+            </a:pPr>
           </a:p>
         </p:txBody>
       </p:sp>

--- a/documentacion_extra/presentacion/cuidaDos.pptx
+++ b/documentacion_extra/presentacion/cuidaDos.pptx
@@ -15,37 +15,38 @@
     <p:sldId id="263" r:id="rId13"/>
     <p:sldId id="264" r:id="rId14"/>
     <p:sldId id="265" r:id="rId15"/>
+    <p:sldId id="266" r:id="rId16"/>
   </p:sldIdLst>
   <p:sldSz cx="18288000" cy="10287000"/>
   <p:notesSz cx="6858000" cy="9144000"/>
   <p:embeddedFontLst>
     <p:embeddedFont>
       <p:font typeface="Montserrat Bold" charset="1" panose="00000800000000000000"/>
-      <p:regular r:id="rId16"/>
+      <p:regular r:id="rId17"/>
     </p:embeddedFont>
     <p:embeddedFont>
       <p:font typeface="Montserrat" charset="1" panose="00000500000000000000"/>
-      <p:regular r:id="rId17"/>
+      <p:regular r:id="rId18"/>
     </p:embeddedFont>
     <p:embeddedFont>
       <p:font typeface="Poppins" charset="1" panose="00000500000000000000"/>
-      <p:regular r:id="rId18"/>
+      <p:regular r:id="rId19"/>
+    </p:embeddedFont>
+    <p:embeddedFont>
+      <p:font typeface="Poppins Bold" charset="1" panose="00000800000000000000"/>
+      <p:regular r:id="rId20"/>
     </p:embeddedFont>
     <p:embeddedFont>
       <p:font typeface="Fraunces Bold" charset="1" panose="00000000000000000000"/>
-      <p:regular r:id="rId19"/>
+      <p:regular r:id="rId21"/>
     </p:embeddedFont>
     <p:embeddedFont>
       <p:font typeface="Open Sans Bold" charset="1" panose="020B0806030504020204"/>
-      <p:regular r:id="rId20"/>
-    </p:embeddedFont>
-    <p:embeddedFont>
-      <p:font typeface="Poppins Bold" charset="1" panose="00000800000000000000"/>
-      <p:regular r:id="rId21"/>
+      <p:regular r:id="rId22"/>
     </p:embeddedFont>
     <p:embeddedFont>
       <p:font typeface="Fraunces" charset="1" panose="00000000000000000000"/>
-      <p:regular r:id="rId22"/>
+      <p:regular r:id="rId23"/>
     </p:embeddedFont>
   </p:embeddedFontLst>
   <p:defaultTextStyle>
@@ -3113,7 +3114,7 @@
         </p:nvGrpSpPr>
         <p:grpSpPr>
           <a:xfrm rot="0">
-            <a:off x="3826496" y="2463569"/>
+            <a:off x="3545528" y="1988168"/>
             <a:ext cx="11196945" cy="6310665"/>
             <a:chOff x="0" y="0"/>
             <a:chExt cx="2948990" cy="1662068"/>
@@ -3241,8 +3242,8 @@
         </p:nvSpPr>
         <p:spPr>
           <a:xfrm flipH="false" flipV="false" rot="0">
-            <a:off x="3980832" y="2807187"/>
-            <a:ext cx="3618799" cy="4672626"/>
+            <a:off x="3762511" y="2903072"/>
+            <a:ext cx="2258325" cy="4672626"/>
           </a:xfrm>
           <a:custGeom>
             <a:avLst/>
@@ -3251,18 +3252,18 @@
             <a:cxnLst/>
             <a:rect r="r" b="b" t="t" l="l"/>
             <a:pathLst>
-              <a:path h="4672626" w="3618799">
+              <a:path h="4672626" w="2258325">
                 <a:moveTo>
                   <a:pt x="0" y="0"/>
                 </a:moveTo>
                 <a:lnTo>
-                  <a:pt x="3618799" y="0"/>
-                </a:lnTo>
-                <a:lnTo>
-                  <a:pt x="3618799" y="4672626"/>
-                </a:lnTo>
-                <a:lnTo>
-                  <a:pt x="0" y="4672626"/>
+                  <a:pt x="2258325" y="0"/>
+                </a:lnTo>
+                <a:lnTo>
+                  <a:pt x="2258325" y="4672625"/>
+                </a:lnTo>
+                <a:lnTo>
+                  <a:pt x="0" y="4672625"/>
                 </a:lnTo>
                 <a:lnTo>
                   <a:pt x="0" y="0"/>
@@ -3274,7 +3275,7 @@
           <a:blipFill>
             <a:blip r:embed="rId3"/>
             <a:stretch>
-              <a:fillRect l="0" t="0" r="0" b="0"/>
+              <a:fillRect l="-31731" t="0" r="-28511" b="0"/>
             </a:stretch>
           </a:blipFill>
         </p:spPr>
@@ -3287,7 +3288,7 @@
         </p:nvSpPr>
         <p:spPr>
           <a:xfrm flipH="false" flipV="false" rot="0">
-            <a:off x="12654961" y="2463569"/>
+            <a:off x="12373992" y="1988168"/>
             <a:ext cx="2368480" cy="1152179"/>
           </a:xfrm>
           <a:custGeom>
@@ -3305,10 +3306,10 @@
                   <a:pt x="2368480" y="0"/>
                 </a:lnTo>
                 <a:lnTo>
-                  <a:pt x="2368480" y="1152179"/>
-                </a:lnTo>
-                <a:lnTo>
-                  <a:pt x="0" y="1152179"/>
+                  <a:pt x="2368480" y="1152178"/>
+                </a:lnTo>
+                <a:lnTo>
+                  <a:pt x="0" y="1152178"/>
                 </a:lnTo>
                 <a:lnTo>
                   <a:pt x="0" y="0"/>
@@ -3333,7 +3334,7 @@
         </p:nvGrpSpPr>
         <p:grpSpPr>
           <a:xfrm rot="0">
-            <a:off x="12024461" y="7288212"/>
+            <a:off x="11897867" y="7115496"/>
             <a:ext cx="952251" cy="920403"/>
             <a:chOff x="0" y="0"/>
             <a:chExt cx="840925" cy="812800"/>
@@ -3427,7 +3428,7 @@
         </p:nvSpPr>
         <p:spPr>
           <a:xfrm flipH="false" flipV="false" rot="0">
-            <a:off x="13118589" y="6896711"/>
+            <a:off x="13042806" y="6599166"/>
             <a:ext cx="1699666" cy="1699666"/>
           </a:xfrm>
           <a:custGeom>
@@ -3473,8 +3474,8 @@
         </p:nvSpPr>
         <p:spPr>
           <a:xfrm rot="0">
-            <a:off x="7599631" y="4466377"/>
-            <a:ext cx="5936428" cy="1152525"/>
+            <a:off x="5878614" y="3273191"/>
+            <a:ext cx="6971503" cy="1762125"/>
           </a:xfrm>
           <a:prstGeom prst="rect">
             <a:avLst/>
@@ -3516,6 +3517,32 @@
               <a:t>DOS</a:t>
             </a:r>
           </a:p>
+          <a:p>
+            <a:pPr algn="ctr">
+              <a:lnSpc>
+                <a:spcPts val="2400"/>
+              </a:lnSpc>
+            </a:pPr>
+            <a:r>
+              <a:rPr lang="en-US" b="true" sz="2000" spc="-40">
+                <a:solidFill>
+                  <a:srgbClr val="344F51"/>
+                </a:solidFill>
+                <a:latin typeface="Montserrat Bold"/>
+                <a:ea typeface="Montserrat Bold"/>
+                <a:cs typeface="Montserrat Bold"/>
+                <a:sym typeface="Montserrat Bold"/>
+              </a:rPr>
+              <a:t>FULL-STACK ARCHITECTURE</a:t>
+            </a:r>
+          </a:p>
+          <a:p>
+            <a:pPr algn="ctr">
+              <a:lnSpc>
+                <a:spcPts val="2400"/>
+              </a:lnSpc>
+            </a:pPr>
+          </a:p>
         </p:txBody>
       </p:sp>
       <p:sp>
@@ -3526,7 +3553,7 @@
         </p:nvSpPr>
         <p:spPr>
           <a:xfrm rot="0">
-            <a:off x="7946905" y="5662612"/>
+            <a:off x="6630860" y="5349389"/>
             <a:ext cx="5241880" cy="514350"/>
           </a:xfrm>
           <a:prstGeom prst="rect">
@@ -3567,7 +3594,7 @@
         </p:nvSpPr>
         <p:spPr>
           <a:xfrm rot="0">
-            <a:off x="8806814" y="6243638"/>
+            <a:off x="7490770" y="6051999"/>
             <a:ext cx="4381971" cy="1397000"/>
           </a:xfrm>
           <a:prstGeom prst="rect">
@@ -3678,7 +3705,7 @@
         </p:nvGrpSpPr>
         <p:grpSpPr>
           <a:xfrm rot="0">
-            <a:off x="3826496" y="2463569"/>
+            <a:off x="3545528" y="1988168"/>
             <a:ext cx="11196945" cy="6310665"/>
             <a:chOff x="0" y="0"/>
             <a:chExt cx="2948990" cy="1662068"/>
@@ -3760,6 +3787,320 @@
         </p:nvSpPr>
         <p:spPr>
           <a:xfrm flipH="false" flipV="false" rot="0">
+            <a:off x="11588190" y="4952409"/>
+            <a:ext cx="1699666" cy="1699666"/>
+          </a:xfrm>
+          <a:custGeom>
+            <a:avLst/>
+            <a:gdLst/>
+            <a:ahLst/>
+            <a:cxnLst/>
+            <a:rect r="r" b="b" t="t" l="l"/>
+            <a:pathLst>
+              <a:path h="1699666" w="1699666">
+                <a:moveTo>
+                  <a:pt x="0" y="0"/>
+                </a:moveTo>
+                <a:lnTo>
+                  <a:pt x="1699666" y="0"/>
+                </a:lnTo>
+                <a:lnTo>
+                  <a:pt x="1699666" y="1699666"/>
+                </a:lnTo>
+                <a:lnTo>
+                  <a:pt x="0" y="1699666"/>
+                </a:lnTo>
+                <a:lnTo>
+                  <a:pt x="0" y="0"/>
+                </a:lnTo>
+                <a:close/>
+              </a:path>
+            </a:pathLst>
+          </a:custGeom>
+          <a:blipFill>
+            <a:blip r:embed="rId2"/>
+            <a:stretch>
+              <a:fillRect l="0" t="0" r="0" b="0"/>
+            </a:stretch>
+          </a:blipFill>
+        </p:spPr>
+      </p:sp>
+      <p:sp>
+        <p:nvSpPr>
+          <p:cNvPr name="Freeform 6" id="6">
+            <a:hlinkClick r:id="rId4" tooltip="https://www.conectacuidados.eu"/>
+          </p:cNvPr>
+          <p:cNvSpPr/>
+          <p:nvPr/>
+        </p:nvSpPr>
+        <p:spPr>
+          <a:xfrm flipH="false" flipV="false" rot="0">
+            <a:off x="5305621" y="4048366"/>
+            <a:ext cx="5936428" cy="3730691"/>
+          </a:xfrm>
+          <a:custGeom>
+            <a:avLst/>
+            <a:gdLst/>
+            <a:ahLst/>
+            <a:cxnLst/>
+            <a:rect r="r" b="b" t="t" l="l"/>
+            <a:pathLst>
+              <a:path h="3730691" w="5936428">
+                <a:moveTo>
+                  <a:pt x="0" y="0"/>
+                </a:moveTo>
+                <a:lnTo>
+                  <a:pt x="5936427" y="0"/>
+                </a:lnTo>
+                <a:lnTo>
+                  <a:pt x="5936427" y="3730691"/>
+                </a:lnTo>
+                <a:lnTo>
+                  <a:pt x="0" y="3730691"/>
+                </a:lnTo>
+                <a:lnTo>
+                  <a:pt x="0" y="0"/>
+                </a:lnTo>
+                <a:close/>
+              </a:path>
+            </a:pathLst>
+          </a:custGeom>
+          <a:blipFill>
+            <a:blip r:embed="rId3"/>
+            <a:stretch>
+              <a:fillRect l="0" t="0" r="0" b="0"/>
+            </a:stretch>
+          </a:blipFill>
+        </p:spPr>
+      </p:sp>
+      <p:sp>
+        <p:nvSpPr>
+          <p:cNvPr name="TextBox 7" id="7"/>
+          <p:cNvSpPr txBox="true"/>
+          <p:nvPr/>
+        </p:nvSpPr>
+        <p:spPr>
+          <a:xfrm rot="0">
+            <a:off x="6501595" y="2562685"/>
+            <a:ext cx="5936428" cy="1152525"/>
+          </a:xfrm>
+          <a:prstGeom prst="rect">
+            <a:avLst/>
+          </a:prstGeom>
+        </p:spPr>
+        <p:txBody>
+          <a:bodyPr anchor="t" rtlCol="false" tIns="0" lIns="0" bIns="0" rIns="0">
+            <a:spAutoFit/>
+          </a:bodyPr>
+          <a:lstStyle/>
+          <a:p>
+            <a:pPr algn="ctr">
+              <a:lnSpc>
+                <a:spcPts val="9119"/>
+              </a:lnSpc>
+            </a:pPr>
+            <a:r>
+              <a:rPr lang="en-US" b="true" sz="7599" spc="-151">
+                <a:solidFill>
+                  <a:srgbClr val="344F51"/>
+                </a:solidFill>
+                <a:latin typeface="Montserrat Bold"/>
+                <a:ea typeface="Montserrat Bold"/>
+                <a:cs typeface="Montserrat Bold"/>
+                <a:sym typeface="Montserrat Bold"/>
+              </a:rPr>
+              <a:t>CUIDA</a:t>
+            </a:r>
+            <a:r>
+              <a:rPr lang="en-US" b="true" sz="7599" spc="-151">
+                <a:solidFill>
+                  <a:srgbClr val="93D14B"/>
+                </a:solidFill>
+                <a:latin typeface="Montserrat Bold"/>
+                <a:ea typeface="Montserrat Bold"/>
+                <a:cs typeface="Montserrat Bold"/>
+                <a:sym typeface="Montserrat Bold"/>
+              </a:rPr>
+              <a:t>DOS</a:t>
+            </a:r>
+          </a:p>
+        </p:txBody>
+      </p:sp>
+      <p:sp>
+        <p:nvSpPr>
+          <p:cNvPr name="TextBox 8" id="8"/>
+          <p:cNvSpPr txBox="true"/>
+          <p:nvPr/>
+        </p:nvSpPr>
+        <p:spPr>
+          <a:xfrm rot="0">
+            <a:off x="17535126" y="9399905"/>
+            <a:ext cx="752874" cy="887095"/>
+          </a:xfrm>
+          <a:prstGeom prst="rect">
+            <a:avLst/>
+          </a:prstGeom>
+        </p:spPr>
+        <p:txBody>
+          <a:bodyPr anchor="t" rtlCol="false" tIns="0" lIns="0" bIns="0" rIns="0">
+            <a:spAutoFit/>
+          </a:bodyPr>
+          <a:lstStyle/>
+          <a:p>
+            <a:pPr algn="ctr">
+              <a:lnSpc>
+                <a:spcPts val="7279"/>
+              </a:lnSpc>
+            </a:pPr>
+            <a:r>
+              <a:rPr lang="en-US" sz="5199" b="true">
+                <a:solidFill>
+                  <a:srgbClr val="93D14B"/>
+                </a:solidFill>
+                <a:latin typeface="Open Sans Bold"/>
+                <a:ea typeface="Open Sans Bold"/>
+                <a:cs typeface="Open Sans Bold"/>
+                <a:sym typeface="Open Sans Bold"/>
+              </a:rPr>
+              <a:t>8</a:t>
+            </a:r>
+            <a:r>
+              <a:rPr lang="en-US" b="true" sz="5199">
+                <a:solidFill>
+                  <a:srgbClr val="93D14B"/>
+                </a:solidFill>
+                <a:latin typeface="Open Sans Bold"/>
+                <a:ea typeface="Open Sans Bold"/>
+                <a:cs typeface="Open Sans Bold"/>
+                <a:sym typeface="Open Sans Bold"/>
+              </a:rPr>
+              <a:t>.</a:t>
+            </a:r>
+          </a:p>
+        </p:txBody>
+      </p:sp>
+    </p:spTree>
+  </p:cSld>
+  <p:clrMapOvr>
+    <a:masterClrMapping/>
+  </p:clrMapOvr>
+</p:sld>
+</file>
+
+<file path=ppt/slides/slide11.xml><?xml version="1.0" encoding="utf-8"?>
+<p:sld xmlns:p="http://schemas.openxmlformats.org/presentationml/2006/main" xmlns:a="http://schemas.openxmlformats.org/drawingml/2006/main" xmlns:r="http://schemas.openxmlformats.org/officeDocument/2006/relationships">
+  <p:cSld>
+    <p:bg>
+      <p:bgPr>
+        <a:solidFill>
+          <a:srgbClr val="344F51"/>
+        </a:solidFill>
+      </p:bgPr>
+    </p:bg>
+    <p:spTree>
+      <p:nvGrpSpPr>
+        <p:cNvPr id="1" name=""/>
+        <p:cNvGrpSpPr/>
+        <p:nvPr/>
+      </p:nvGrpSpPr>
+      <p:grpSpPr>
+        <a:xfrm>
+          <a:off x="0" y="0"/>
+          <a:ext cx="0" cy="0"/>
+          <a:chOff x="0" y="0"/>
+          <a:chExt cx="0" cy="0"/>
+        </a:xfrm>
+      </p:grpSpPr>
+      <p:grpSp>
+        <p:nvGrpSpPr>
+          <p:cNvPr name="Group 2" id="2"/>
+          <p:cNvGrpSpPr/>
+          <p:nvPr/>
+        </p:nvGrpSpPr>
+        <p:grpSpPr>
+          <a:xfrm rot="0">
+            <a:off x="3545528" y="1988168"/>
+            <a:ext cx="11196945" cy="6310665"/>
+            <a:chOff x="0" y="0"/>
+            <a:chExt cx="2948990" cy="1662068"/>
+          </a:xfrm>
+        </p:grpSpPr>
+        <p:sp>
+          <p:nvSpPr>
+            <p:cNvPr name="Freeform 3" id="3"/>
+            <p:cNvSpPr/>
+            <p:nvPr/>
+          </p:nvSpPr>
+          <p:spPr>
+            <a:xfrm flipH="false" flipV="false" rot="0">
+              <a:off x="0" y="0"/>
+              <a:ext cx="2948990" cy="1662068"/>
+            </a:xfrm>
+            <a:custGeom>
+              <a:avLst/>
+              <a:gdLst/>
+              <a:ahLst/>
+              <a:cxnLst/>
+              <a:rect r="r" b="b" t="t" l="l"/>
+              <a:pathLst>
+                <a:path h="1662068" w="2948990">
+                  <a:moveTo>
+                    <a:pt x="0" y="0"/>
+                  </a:moveTo>
+                  <a:lnTo>
+                    <a:pt x="2948990" y="0"/>
+                  </a:lnTo>
+                  <a:lnTo>
+                    <a:pt x="2948990" y="1662068"/>
+                  </a:lnTo>
+                  <a:lnTo>
+                    <a:pt x="0" y="1662068"/>
+                  </a:lnTo>
+                  <a:close/>
+                </a:path>
+              </a:pathLst>
+            </a:custGeom>
+            <a:solidFill>
+              <a:srgbClr val="FFFFFF"/>
+            </a:solidFill>
+          </p:spPr>
+        </p:sp>
+        <p:sp>
+          <p:nvSpPr>
+            <p:cNvPr name="TextBox 4" id="4"/>
+            <p:cNvSpPr txBox="true"/>
+            <p:nvPr/>
+          </p:nvSpPr>
+          <p:spPr>
+            <a:xfrm>
+              <a:off x="0" y="-19050"/>
+              <a:ext cx="2948990" cy="1681118"/>
+            </a:xfrm>
+            <a:prstGeom prst="rect">
+              <a:avLst/>
+            </a:prstGeom>
+          </p:spPr>
+          <p:txBody>
+            <a:bodyPr anchor="ctr" rtlCol="false" tIns="50800" lIns="50800" bIns="50800" rIns="50800"/>
+            <a:lstStyle/>
+            <a:p>
+              <a:pPr algn="ctr">
+                <a:lnSpc>
+                  <a:spcPts val="2859"/>
+                </a:lnSpc>
+              </a:pPr>
+            </a:p>
+          </p:txBody>
+        </p:sp>
+      </p:grpSp>
+      <p:sp>
+        <p:nvSpPr>
+          <p:cNvPr name="Freeform 5" id="5"/>
+          <p:cNvSpPr/>
+          <p:nvPr/>
+        </p:nvSpPr>
+        <p:spPr>
+          <a:xfrm flipH="false" flipV="false" rot="0">
             <a:off x="14284793" y="8170984"/>
             <a:ext cx="5949014" cy="2390422"/>
           </a:xfrm>
@@ -3806,7 +4147,7 @@
         </p:nvSpPr>
         <p:spPr>
           <a:xfrm flipH="false" flipV="false" rot="0">
-            <a:off x="3826496" y="3282589"/>
+            <a:off x="3545528" y="2807187"/>
             <a:ext cx="3618799" cy="4672626"/>
           </a:xfrm>
           <a:custGeom>
@@ -3821,13 +4162,13 @@
                   <a:pt x="0" y="0"/>
                 </a:moveTo>
                 <a:lnTo>
-                  <a:pt x="3618800" y="0"/>
-                </a:lnTo>
-                <a:lnTo>
-                  <a:pt x="3618800" y="4672625"/>
-                </a:lnTo>
-                <a:lnTo>
-                  <a:pt x="0" y="4672625"/>
+                  <a:pt x="3618799" y="0"/>
+                </a:lnTo>
+                <a:lnTo>
+                  <a:pt x="3618799" y="4672626"/>
+                </a:lnTo>
+                <a:lnTo>
+                  <a:pt x="0" y="4672626"/>
                 </a:lnTo>
                 <a:lnTo>
                   <a:pt x="0" y="0"/>
@@ -3852,7 +4193,7 @@
         </p:nvSpPr>
         <p:spPr>
           <a:xfrm flipH="false" flipV="false" rot="0">
-            <a:off x="12654961" y="2463569"/>
+            <a:off x="12373992" y="1988168"/>
             <a:ext cx="2368480" cy="1152179"/>
           </a:xfrm>
           <a:custGeom>
@@ -3870,10 +4211,10 @@
                   <a:pt x="2368480" y="0"/>
                 </a:lnTo>
                 <a:lnTo>
-                  <a:pt x="2368480" y="1152179"/>
-                </a:lnTo>
-                <a:lnTo>
-                  <a:pt x="0" y="1152179"/>
+                  <a:pt x="2368480" y="1152178"/>
+                </a:lnTo>
+                <a:lnTo>
+                  <a:pt x="0" y="1152178"/>
                 </a:lnTo>
                 <a:lnTo>
                   <a:pt x="0" y="0"/>
@@ -3898,7 +4239,7 @@
         </p:nvSpPr>
         <p:spPr>
           <a:xfrm flipH="false" flipV="false" rot="0">
-            <a:off x="13323775" y="7074568"/>
+            <a:off x="13042806" y="6599166"/>
             <a:ext cx="1699666" cy="1699666"/>
           </a:xfrm>
           <a:custGeom>
@@ -3944,8 +4285,8 @@
         </p:nvSpPr>
         <p:spPr>
           <a:xfrm flipH="false" flipV="false" rot="0">
-            <a:off x="7330495" y="4405482"/>
-            <a:ext cx="6508706" cy="2828329"/>
+            <a:off x="7164327" y="3948095"/>
+            <a:ext cx="5504569" cy="3082558"/>
           </a:xfrm>
           <a:custGeom>
             <a:avLst/>
@@ -3954,18 +4295,18 @@
             <a:cxnLst/>
             <a:rect r="r" b="b" t="t" l="l"/>
             <a:pathLst>
-              <a:path h="2828329" w="6508706">
+              <a:path h="3082558" w="5504569">
                 <a:moveTo>
                   <a:pt x="0" y="0"/>
                 </a:moveTo>
                 <a:lnTo>
-                  <a:pt x="6508706" y="0"/>
-                </a:lnTo>
-                <a:lnTo>
-                  <a:pt x="6508706" y="2828328"/>
-                </a:lnTo>
-                <a:lnTo>
-                  <a:pt x="0" y="2828328"/>
+                  <a:pt x="5504569" y="0"/>
+                </a:lnTo>
+                <a:lnTo>
+                  <a:pt x="5504569" y="3082558"/>
+                </a:lnTo>
+                <a:lnTo>
+                  <a:pt x="0" y="3082558"/>
                 </a:lnTo>
                 <a:lnTo>
                   <a:pt x="0" y="0"/>
@@ -4028,7 +4369,7 @@
         </p:nvGrpSpPr>
         <p:grpSpPr>
           <a:xfrm rot="0">
-            <a:off x="3826496" y="2463569"/>
+            <a:off x="3545528" y="1988168"/>
             <a:ext cx="11196945" cy="6310665"/>
             <a:chOff x="0" y="0"/>
             <a:chExt cx="2948990" cy="1662068"/>
@@ -4110,7 +4451,7 @@
         </p:nvSpPr>
         <p:spPr>
           <a:xfrm flipH="false" flipV="false" rot="0">
-            <a:off x="4238216" y="4665293"/>
+            <a:off x="3702460" y="3779581"/>
             <a:ext cx="2773099" cy="3580649"/>
           </a:xfrm>
           <a:custGeom>
@@ -4125,10 +4466,10 @@
                   <a:pt x="0" y="0"/>
                 </a:moveTo>
                 <a:lnTo>
-                  <a:pt x="2773099" y="0"/>
-                </a:lnTo>
-                <a:lnTo>
-                  <a:pt x="2773099" y="3580649"/>
+                  <a:pt x="2773098" y="0"/>
+                </a:lnTo>
+                <a:lnTo>
+                  <a:pt x="2773098" y="3580649"/>
                 </a:lnTo>
                 <a:lnTo>
                   <a:pt x="0" y="3580649"/>
@@ -4156,8 +4497,8 @@
         </p:nvSpPr>
         <p:spPr>
           <a:xfrm rot="0">
-            <a:off x="7685626" y="2847670"/>
-            <a:ext cx="4272335" cy="1152525"/>
+            <a:off x="7007833" y="2355605"/>
+            <a:ext cx="4272335" cy="914400"/>
           </a:xfrm>
           <a:prstGeom prst="rect">
             <a:avLst/>
@@ -4171,11 +4512,11 @@
           <a:p>
             <a:pPr algn="ctr">
               <a:lnSpc>
-                <a:spcPts val="9119"/>
+                <a:spcPts val="7200"/>
               </a:lnSpc>
             </a:pPr>
             <a:r>
-              <a:rPr lang="en-US" b="true" sz="7599" spc="-151">
+              <a:rPr lang="en-US" b="true" sz="6000" spc="-120">
                 <a:solidFill>
                   <a:srgbClr val="344F51"/>
                 </a:solidFill>
@@ -4197,8 +4538,8 @@
         </p:nvSpPr>
         <p:spPr>
           <a:xfrm rot="0">
-            <a:off x="7272387" y="4210793"/>
-            <a:ext cx="6060501" cy="4164912"/>
+            <a:off x="6602952" y="3751006"/>
+            <a:ext cx="7436270" cy="3787140"/>
           </a:xfrm>
           <a:prstGeom prst="rect">
             <a:avLst/>
@@ -4210,15 +4551,15 @@
           </a:bodyPr>
           <a:lstStyle/>
           <a:p>
-            <a:pPr algn="just" marL="911114" indent="-455557" lvl="1">
+            <a:pPr algn="l" marL="712468" indent="-356234" lvl="1">
               <a:lnSpc>
-                <a:spcPts val="5486"/>
+                <a:spcPts val="4289"/>
               </a:lnSpc>
               <a:buFont typeface="Arial"/>
               <a:buChar char="•"/>
             </a:pPr>
             <a:r>
-              <a:rPr lang="en-US" b="true" sz="4220">
+              <a:rPr lang="en-US" b="true" sz="3299">
                 <a:solidFill>
                   <a:srgbClr val="51786E"/>
                 </a:solidFill>
@@ -4231,15 +4572,15 @@
             </a:r>
           </a:p>
           <a:p>
-            <a:pPr algn="just" marL="911114" indent="-455557" lvl="1">
+            <a:pPr algn="l" marL="712468" indent="-356234" lvl="1">
               <a:lnSpc>
-                <a:spcPts val="5486"/>
+                <a:spcPts val="4289"/>
               </a:lnSpc>
               <a:buFont typeface="Arial"/>
               <a:buChar char="•"/>
             </a:pPr>
             <a:r>
-              <a:rPr lang="en-US" b="true" sz="4220">
+              <a:rPr lang="en-US" b="true" sz="3299">
                 <a:solidFill>
                   <a:srgbClr val="51786E"/>
                 </a:solidFill>
@@ -4248,19 +4589,19 @@
                 <a:cs typeface="Montserrat Bold"/>
                 <a:sym typeface="Montserrat Bold"/>
               </a:rPr>
-              <a:t>Roles y permisos</a:t>
-            </a:r>
-          </a:p>
-          <a:p>
-            <a:pPr algn="just" marL="911114" indent="-455557" lvl="1">
+              <a:t>Roles y funcionalidades</a:t>
+            </a:r>
+          </a:p>
+          <a:p>
+            <a:pPr algn="l" marL="712468" indent="-356234" lvl="1">
               <a:lnSpc>
-                <a:spcPts val="5486"/>
+                <a:spcPts val="4289"/>
               </a:lnSpc>
               <a:buFont typeface="Arial"/>
               <a:buChar char="•"/>
             </a:pPr>
             <a:r>
-              <a:rPr lang="en-US" b="true" sz="4220">
+              <a:rPr lang="en-US" b="true" sz="3299">
                 <a:solidFill>
                   <a:srgbClr val="51786E"/>
                 </a:solidFill>
@@ -4273,15 +4614,15 @@
             </a:r>
           </a:p>
           <a:p>
-            <a:pPr algn="just" marL="911114" indent="-455557" lvl="1">
+            <a:pPr algn="l" marL="712468" indent="-356234" lvl="1">
               <a:lnSpc>
-                <a:spcPts val="5486"/>
+                <a:spcPts val="4289"/>
               </a:lnSpc>
               <a:buFont typeface="Arial"/>
               <a:buChar char="•"/>
             </a:pPr>
             <a:r>
-              <a:rPr lang="en-US" b="true" sz="4220">
+              <a:rPr lang="en-US" b="true" sz="3299">
                 <a:solidFill>
                   <a:srgbClr val="51786E"/>
                 </a:solidFill>
@@ -4294,15 +4635,57 @@
             </a:r>
           </a:p>
           <a:p>
-            <a:pPr algn="just" marL="911114" indent="-455557" lvl="1">
+            <a:pPr algn="l" marL="712468" indent="-356234" lvl="1">
               <a:lnSpc>
-                <a:spcPts val="5486"/>
+                <a:spcPts val="4289"/>
               </a:lnSpc>
               <a:buFont typeface="Arial"/>
               <a:buChar char="•"/>
             </a:pPr>
             <a:r>
-              <a:rPr lang="en-US" b="true" sz="4220">
+              <a:rPr lang="en-US" b="true" sz="3299">
+                <a:solidFill>
+                  <a:srgbClr val="51786E"/>
+                </a:solidFill>
+                <a:latin typeface="Montserrat Bold"/>
+                <a:ea typeface="Montserrat Bold"/>
+                <a:cs typeface="Montserrat Bold"/>
+                <a:sym typeface="Montserrat Bold"/>
+              </a:rPr>
+              <a:t>Integraciones y seguridad </a:t>
+            </a:r>
+          </a:p>
+          <a:p>
+            <a:pPr algn="l" marL="712468" indent="-356234" lvl="1">
+              <a:lnSpc>
+                <a:spcPts val="4289"/>
+              </a:lnSpc>
+              <a:buFont typeface="Arial"/>
+              <a:buChar char="•"/>
+            </a:pPr>
+            <a:r>
+              <a:rPr lang="en-US" b="true" sz="3299">
+                <a:solidFill>
+                  <a:srgbClr val="51786E"/>
+                </a:solidFill>
+                <a:latin typeface="Montserrat Bold"/>
+                <a:ea typeface="Montserrat Bold"/>
+                <a:cs typeface="Montserrat Bold"/>
+                <a:sym typeface="Montserrat Bold"/>
+              </a:rPr>
+              <a:t>Futuras mejoras</a:t>
+            </a:r>
+          </a:p>
+          <a:p>
+            <a:pPr algn="l" marL="712468" indent="-356234" lvl="1">
+              <a:lnSpc>
+                <a:spcPts val="4289"/>
+              </a:lnSpc>
+              <a:buFont typeface="Arial"/>
+              <a:buChar char="•"/>
+            </a:pPr>
+            <a:r>
+              <a:rPr lang="en-US" b="true" sz="3299">
                 <a:solidFill>
                   <a:srgbClr val="51786E"/>
                 </a:solidFill>
@@ -4312,27 +4695,6 @@
                 <a:sym typeface="Montserrat Bold"/>
               </a:rPr>
               <a:t>Demo</a:t>
-            </a:r>
-          </a:p>
-          <a:p>
-            <a:pPr algn="just" marL="911114" indent="-455557" lvl="1">
-              <a:lnSpc>
-                <a:spcPts val="5486"/>
-              </a:lnSpc>
-              <a:buFont typeface="Arial"/>
-              <a:buChar char="•"/>
-            </a:pPr>
-            <a:r>
-              <a:rPr lang="en-US" b="true" sz="4220">
-                <a:solidFill>
-                  <a:srgbClr val="51786E"/>
-                </a:solidFill>
-                <a:latin typeface="Montserrat Bold"/>
-                <a:ea typeface="Montserrat Bold"/>
-                <a:cs typeface="Montserrat Bold"/>
-                <a:sym typeface="Montserrat Bold"/>
-              </a:rPr>
-              <a:t>Futuras mejoras</a:t>
             </a:r>
           </a:p>
         </p:txBody>
@@ -4377,7 +4739,7 @@
         </p:nvGrpSpPr>
         <p:grpSpPr>
           <a:xfrm rot="0">
-            <a:off x="1357312" y="1028700"/>
+            <a:off x="1348121" y="1028700"/>
             <a:ext cx="15591759" cy="8229600"/>
             <a:chOff x="0" y="0"/>
             <a:chExt cx="4106471" cy="2167467"/>
@@ -4403,63 +4765,23 @@
               <a:pathLst>
                 <a:path h="2167467" w="4106471">
                   <a:moveTo>
-                    <a:pt x="12413" y="0"/>
+                    <a:pt x="0" y="0"/>
                   </a:moveTo>
                   <a:lnTo>
-                    <a:pt x="4094058" y="0"/>
-                  </a:lnTo>
-                  <a:cubicBezTo>
-                    <a:pt x="4100914" y="0"/>
-                    <a:pt x="4106471" y="5558"/>
-                    <a:pt x="4106471" y="12413"/>
-                  </a:cubicBezTo>
-                  <a:lnTo>
-                    <a:pt x="4106471" y="2155053"/>
-                  </a:lnTo>
-                  <a:cubicBezTo>
-                    <a:pt x="4106471" y="2158346"/>
-                    <a:pt x="4105164" y="2161503"/>
-                    <a:pt x="4102836" y="2163831"/>
-                  </a:cubicBezTo>
-                  <a:cubicBezTo>
-                    <a:pt x="4100507" y="2166159"/>
-                    <a:pt x="4097350" y="2167467"/>
-                    <a:pt x="4094058" y="2167467"/>
-                  </a:cubicBezTo>
-                  <a:lnTo>
-                    <a:pt x="12413" y="2167467"/>
-                  </a:lnTo>
-                  <a:cubicBezTo>
-                    <a:pt x="9121" y="2167467"/>
-                    <a:pt x="5964" y="2166159"/>
-                    <a:pt x="3636" y="2163831"/>
-                  </a:cubicBezTo>
-                  <a:cubicBezTo>
-                    <a:pt x="1308" y="2161503"/>
-                    <a:pt x="0" y="2158346"/>
-                    <a:pt x="0" y="2155053"/>
-                  </a:cubicBezTo>
-                  <a:lnTo>
-                    <a:pt x="0" y="12413"/>
-                  </a:lnTo>
-                  <a:cubicBezTo>
-                    <a:pt x="0" y="9121"/>
-                    <a:pt x="1308" y="5964"/>
-                    <a:pt x="3636" y="3636"/>
-                  </a:cubicBezTo>
-                  <a:cubicBezTo>
-                    <a:pt x="5964" y="1308"/>
-                    <a:pt x="9121" y="0"/>
-                    <a:pt x="12413" y="0"/>
-                  </a:cubicBezTo>
+                    <a:pt x="4106471" y="0"/>
+                  </a:lnTo>
+                  <a:lnTo>
+                    <a:pt x="4106471" y="2167467"/>
+                  </a:lnTo>
+                  <a:lnTo>
+                    <a:pt x="0" y="2167467"/>
+                  </a:lnTo>
                   <a:close/>
                 </a:path>
               </a:pathLst>
             </a:custGeom>
             <a:solidFill>
-              <a:srgbClr val="FFFFFF">
-                <a:alpha val="86667"/>
-              </a:srgbClr>
+              <a:srgbClr val="FFFFFF"/>
             </a:solidFill>
           </p:spPr>
         </p:sp>
@@ -4499,10 +4821,10 @@
         </p:nvGrpSpPr>
         <p:grpSpPr>
           <a:xfrm rot="0">
-            <a:off x="2226237" y="3655008"/>
-            <a:ext cx="4475594" cy="5100938"/>
+            <a:off x="1932714" y="3975846"/>
+            <a:ext cx="4475594" cy="4161408"/>
             <a:chOff x="0" y="0"/>
-            <a:chExt cx="1178757" cy="1343457"/>
+            <a:chExt cx="1178757" cy="1096009"/>
           </a:xfrm>
         </p:grpSpPr>
         <p:sp>
@@ -4514,7 +4836,7 @@
           <p:spPr>
             <a:xfrm flipH="false" flipV="false" rot="0">
               <a:off x="0" y="0"/>
-              <a:ext cx="1178757" cy="1343457"/>
+              <a:ext cx="1178757" cy="1096009"/>
             </a:xfrm>
             <a:custGeom>
               <a:avLst/>
@@ -4523,57 +4845,19 @@
               <a:cxnLst/>
               <a:rect r="r" b="b" t="t" l="l"/>
               <a:pathLst>
-                <a:path h="1343457" w="1178757">
+                <a:path h="1096009" w="1178757">
                   <a:moveTo>
-                    <a:pt x="34596" y="0"/>
+                    <a:pt x="0" y="0"/>
                   </a:moveTo>
                   <a:lnTo>
-                    <a:pt x="1144161" y="0"/>
-                  </a:lnTo>
-                  <a:cubicBezTo>
-                    <a:pt x="1153337" y="0"/>
-                    <a:pt x="1162136" y="3645"/>
-                    <a:pt x="1168624" y="10133"/>
-                  </a:cubicBezTo>
-                  <a:cubicBezTo>
-                    <a:pt x="1175112" y="16621"/>
-                    <a:pt x="1178757" y="25421"/>
-                    <a:pt x="1178757" y="34596"/>
-                  </a:cubicBezTo>
-                  <a:lnTo>
-                    <a:pt x="1178757" y="1308861"/>
-                  </a:lnTo>
-                  <a:cubicBezTo>
-                    <a:pt x="1178757" y="1327968"/>
-                    <a:pt x="1163268" y="1343457"/>
-                    <a:pt x="1144161" y="1343457"/>
-                  </a:cubicBezTo>
-                  <a:lnTo>
-                    <a:pt x="34596" y="1343457"/>
-                  </a:lnTo>
-                  <a:cubicBezTo>
-                    <a:pt x="25421" y="1343457"/>
-                    <a:pt x="16621" y="1339812"/>
-                    <a:pt x="10133" y="1333324"/>
-                  </a:cubicBezTo>
-                  <a:cubicBezTo>
-                    <a:pt x="3645" y="1326836"/>
-                    <a:pt x="0" y="1318036"/>
-                    <a:pt x="0" y="1308861"/>
-                  </a:cubicBezTo>
-                  <a:lnTo>
-                    <a:pt x="0" y="34596"/>
-                  </a:lnTo>
-                  <a:cubicBezTo>
-                    <a:pt x="0" y="25421"/>
-                    <a:pt x="3645" y="16621"/>
-                    <a:pt x="10133" y="10133"/>
-                  </a:cubicBezTo>
-                  <a:cubicBezTo>
-                    <a:pt x="16621" y="3645"/>
-                    <a:pt x="25421" y="0"/>
-                    <a:pt x="34596" y="0"/>
-                  </a:cubicBezTo>
+                    <a:pt x="1178757" y="0"/>
+                  </a:lnTo>
+                  <a:lnTo>
+                    <a:pt x="1178757" y="1096009"/>
+                  </a:lnTo>
+                  <a:lnTo>
+                    <a:pt x="0" y="1096009"/>
+                  </a:lnTo>
                   <a:close/>
                 </a:path>
               </a:pathLst>
@@ -4596,7 +4880,7 @@
           <p:spPr>
             <a:xfrm>
               <a:off x="0" y="-19050"/>
-              <a:ext cx="1178757" cy="1362507"/>
+              <a:ext cx="1178757" cy="1115059"/>
             </a:xfrm>
             <a:prstGeom prst="rect">
               <a:avLst/>
@@ -4623,10 +4907,10 @@
         </p:nvGrpSpPr>
         <p:grpSpPr>
           <a:xfrm rot="0">
-            <a:off x="3016234" y="2802626"/>
-            <a:ext cx="3086100" cy="516103"/>
+            <a:off x="2324900" y="2683194"/>
+            <a:ext cx="3691221" cy="754966"/>
             <a:chOff x="0" y="0"/>
-            <a:chExt cx="812800" cy="135928"/>
+            <a:chExt cx="972174" cy="198839"/>
           </a:xfrm>
         </p:grpSpPr>
         <p:sp>
@@ -4638,7 +4922,7 @@
           <p:spPr>
             <a:xfrm flipH="false" flipV="false" rot="0">
               <a:off x="0" y="0"/>
-              <a:ext cx="812800" cy="135928"/>
+              <a:ext cx="972174" cy="198839"/>
             </a:xfrm>
             <a:custGeom>
               <a:avLst/>
@@ -4647,18 +4931,18 @@
               <a:cxnLst/>
               <a:rect r="r" b="b" t="t" l="l"/>
               <a:pathLst>
-                <a:path h="135928" w="812800">
+                <a:path h="198839" w="972174">
                   <a:moveTo>
                     <a:pt x="0" y="0"/>
                   </a:moveTo>
                   <a:lnTo>
-                    <a:pt x="812800" y="0"/>
-                  </a:lnTo>
-                  <a:lnTo>
-                    <a:pt x="812800" y="135928"/>
-                  </a:lnTo>
-                  <a:lnTo>
-                    <a:pt x="0" y="135928"/>
+                    <a:pt x="972174" y="0"/>
+                  </a:lnTo>
+                  <a:lnTo>
+                    <a:pt x="972174" y="198839"/>
+                  </a:lnTo>
+                  <a:lnTo>
+                    <a:pt x="0" y="198839"/>
                   </a:lnTo>
                   <a:close/>
                 </a:path>
@@ -4678,7 +4962,7 @@
           <p:spPr>
             <a:xfrm>
               <a:off x="0" y="-19050"/>
-              <a:ext cx="812800" cy="154978"/>
+              <a:ext cx="972174" cy="217889"/>
             </a:xfrm>
             <a:prstGeom prst="rect">
               <a:avLst/>
@@ -4717,10 +5001,10 @@
         </p:nvGrpSpPr>
         <p:grpSpPr>
           <a:xfrm rot="0">
-            <a:off x="7943029" y="2802626"/>
-            <a:ext cx="3086100" cy="516103"/>
+            <a:off x="7530941" y="2683194"/>
+            <a:ext cx="3563827" cy="754966"/>
             <a:chOff x="0" y="0"/>
-            <a:chExt cx="812800" cy="135928"/>
+            <a:chExt cx="938621" cy="198839"/>
           </a:xfrm>
         </p:grpSpPr>
         <p:sp>
@@ -4732,7 +5016,7 @@
           <p:spPr>
             <a:xfrm flipH="false" flipV="false" rot="0">
               <a:off x="0" y="0"/>
-              <a:ext cx="812800" cy="135928"/>
+              <a:ext cx="938621" cy="198839"/>
             </a:xfrm>
             <a:custGeom>
               <a:avLst/>
@@ -4741,18 +5025,18 @@
               <a:cxnLst/>
               <a:rect r="r" b="b" t="t" l="l"/>
               <a:pathLst>
-                <a:path h="135928" w="812800">
+                <a:path h="198839" w="938621">
                   <a:moveTo>
                     <a:pt x="0" y="0"/>
                   </a:moveTo>
                   <a:lnTo>
-                    <a:pt x="812800" y="0"/>
-                  </a:lnTo>
-                  <a:lnTo>
-                    <a:pt x="812800" y="135928"/>
-                  </a:lnTo>
-                  <a:lnTo>
-                    <a:pt x="0" y="135928"/>
+                    <a:pt x="938621" y="0"/>
+                  </a:lnTo>
+                  <a:lnTo>
+                    <a:pt x="938621" y="198839"/>
+                  </a:lnTo>
+                  <a:lnTo>
+                    <a:pt x="0" y="198839"/>
                   </a:lnTo>
                   <a:close/>
                 </a:path>
@@ -4772,7 +5056,7 @@
           <p:spPr>
             <a:xfrm>
               <a:off x="0" y="-19050"/>
-              <a:ext cx="812800" cy="154978"/>
+              <a:ext cx="938621" cy="217889"/>
             </a:xfrm>
             <a:prstGeom prst="rect">
               <a:avLst/>
@@ -4811,10 +5095,10 @@
         </p:nvGrpSpPr>
         <p:grpSpPr>
           <a:xfrm rot="0">
-            <a:off x="12925937" y="2802626"/>
-            <a:ext cx="3086100" cy="516103"/>
+            <a:off x="12746020" y="2683194"/>
+            <a:ext cx="3086100" cy="754966"/>
             <a:chOff x="0" y="0"/>
-            <a:chExt cx="812800" cy="135928"/>
+            <a:chExt cx="812800" cy="198839"/>
           </a:xfrm>
         </p:grpSpPr>
         <p:sp>
@@ -4826,7 +5110,7 @@
           <p:spPr>
             <a:xfrm flipH="false" flipV="false" rot="0">
               <a:off x="0" y="0"/>
-              <a:ext cx="812800" cy="135928"/>
+              <a:ext cx="812800" cy="198839"/>
             </a:xfrm>
             <a:custGeom>
               <a:avLst/>
@@ -4835,7 +5119,7 @@
               <a:cxnLst/>
               <a:rect r="r" b="b" t="t" l="l"/>
               <a:pathLst>
-                <a:path h="135928" w="812800">
+                <a:path h="198839" w="812800">
                   <a:moveTo>
                     <a:pt x="0" y="0"/>
                   </a:moveTo>
@@ -4843,10 +5127,10 @@
                     <a:pt x="812800" y="0"/>
                   </a:lnTo>
                   <a:lnTo>
-                    <a:pt x="812800" y="135928"/>
-                  </a:lnTo>
-                  <a:lnTo>
-                    <a:pt x="0" y="135928"/>
+                    <a:pt x="812800" y="198839"/>
+                  </a:lnTo>
+                  <a:lnTo>
+                    <a:pt x="0" y="198839"/>
                   </a:lnTo>
                   <a:close/>
                 </a:path>
@@ -4866,7 +5150,7 @@
           <p:spPr>
             <a:xfrm>
               <a:off x="0" y="-19050"/>
-              <a:ext cx="812800" cy="154978"/>
+              <a:ext cx="812800" cy="217889"/>
             </a:xfrm>
             <a:prstGeom prst="rect">
               <a:avLst/>
@@ -4897,188 +5181,30 @@
           </p:txBody>
         </p:sp>
       </p:grpSp>
-      <p:sp>
-        <p:nvSpPr>
-          <p:cNvPr name="TextBox 17" id="17"/>
-          <p:cNvSpPr txBox="true"/>
-          <p:nvPr/>
-        </p:nvSpPr>
-        <p:spPr>
-          <a:xfrm rot="0">
-            <a:off x="12635867" y="4059812"/>
-            <a:ext cx="3376170" cy="4579003"/>
-          </a:xfrm>
-          <a:prstGeom prst="rect">
-            <a:avLst/>
-          </a:prstGeom>
-        </p:spPr>
-        <p:txBody>
-          <a:bodyPr anchor="t" rtlCol="false" tIns="0" lIns="0" bIns="0" rIns="0">
-            <a:spAutoFit/>
-          </a:bodyPr>
-          <a:lstStyle/>
-          <a:p>
-            <a:pPr algn="l" marL="442554" indent="-221277" lvl="1">
-              <a:lnSpc>
-                <a:spcPts val="2828"/>
-              </a:lnSpc>
-              <a:buFont typeface="Arial"/>
-              <a:buChar char="•"/>
-            </a:pPr>
-            <a:r>
-              <a:rPr lang="en-US" sz="2049" spc="200">
-                <a:solidFill>
-                  <a:srgbClr val="231F20"/>
-                </a:solidFill>
-                <a:latin typeface="Poppins"/>
-                <a:ea typeface="Poppins"/>
-                <a:cs typeface="Poppins"/>
-                <a:sym typeface="Poppins"/>
-              </a:rPr>
-              <a:t>Facilitar la contratación de servicios a los usuarios que los necesiten. </a:t>
-            </a:r>
-          </a:p>
-          <a:p>
-            <a:pPr algn="l" marL="442554" indent="-221277" lvl="1">
-              <a:lnSpc>
-                <a:spcPts val="2828"/>
-              </a:lnSpc>
-              <a:buFont typeface="Arial"/>
-              <a:buChar char="•"/>
-            </a:pPr>
-            <a:r>
-              <a:rPr lang="en-US" sz="2049" spc="200">
-                <a:solidFill>
-                  <a:srgbClr val="231F20"/>
-                </a:solidFill>
-                <a:latin typeface="Poppins"/>
-                <a:ea typeface="Poppins"/>
-                <a:cs typeface="Poppins"/>
-                <a:sym typeface="Poppins"/>
-              </a:rPr>
-              <a:t>Solucionar los posibles conflictos facilitando la vida de los usuarios.</a:t>
-            </a:r>
-          </a:p>
-          <a:p>
-            <a:pPr algn="l" marL="442554" indent="-221277" lvl="1">
-              <a:lnSpc>
-                <a:spcPts val="2828"/>
-              </a:lnSpc>
-              <a:buFont typeface="Arial"/>
-              <a:buChar char="•"/>
-            </a:pPr>
-            <a:r>
-              <a:rPr lang="en-US" sz="2049" spc="200">
-                <a:solidFill>
-                  <a:srgbClr val="231F20"/>
-                </a:solidFill>
-                <a:latin typeface="Poppins"/>
-                <a:ea typeface="Poppins"/>
-                <a:cs typeface="Poppins"/>
-                <a:sym typeface="Poppins"/>
-              </a:rPr>
-              <a:t>Dar visibilidad a empresas más pequeñas.</a:t>
-            </a:r>
-          </a:p>
-          <a:p>
-            <a:pPr algn="l" marL="0" indent="0" lvl="0">
-              <a:lnSpc>
-                <a:spcPts val="2828"/>
-              </a:lnSpc>
-              <a:spcBef>
-                <a:spcPct val="0"/>
-              </a:spcBef>
-            </a:pPr>
-          </a:p>
-        </p:txBody>
-      </p:sp>
-      <p:sp>
-        <p:nvSpPr>
-          <p:cNvPr name="TextBox 18" id="18"/>
-          <p:cNvSpPr txBox="true"/>
-          <p:nvPr/>
-        </p:nvSpPr>
-        <p:spPr>
-          <a:xfrm rot="0">
-            <a:off x="7912044" y="4059812"/>
-            <a:ext cx="3281419" cy="3936326"/>
-          </a:xfrm>
-          <a:prstGeom prst="rect">
-            <a:avLst/>
-          </a:prstGeom>
-        </p:spPr>
-        <p:txBody>
-          <a:bodyPr anchor="t" rtlCol="false" tIns="0" lIns="0" bIns="0" rIns="0">
-            <a:spAutoFit/>
-          </a:bodyPr>
-          <a:lstStyle/>
-          <a:p>
-            <a:pPr algn="l">
-              <a:lnSpc>
-                <a:spcPts val="2873"/>
-              </a:lnSpc>
-            </a:pPr>
-            <a:r>
-              <a:rPr lang="en-US" sz="2082" spc="204">
-                <a:solidFill>
-                  <a:srgbClr val="231F20"/>
-                </a:solidFill>
-                <a:latin typeface="Poppins"/>
-                <a:ea typeface="Poppins"/>
-                <a:cs typeface="Poppins"/>
-                <a:sym typeface="Poppins"/>
-              </a:rPr>
-              <a:t>Cada vez son más las personas que necesitan contratar distintos servicios. </a:t>
-            </a:r>
-          </a:p>
-          <a:p>
-            <a:pPr algn="l" marL="0" indent="0" lvl="0">
-              <a:lnSpc>
-                <a:spcPts val="2873"/>
-              </a:lnSpc>
-              <a:spcBef>
-                <a:spcPct val="0"/>
-              </a:spcBef>
-            </a:pPr>
-            <a:r>
-              <a:rPr lang="en-US" sz="2082" spc="204">
-                <a:solidFill>
-                  <a:srgbClr val="231F20"/>
-                </a:solidFill>
-                <a:latin typeface="Poppins"/>
-                <a:ea typeface="Poppins"/>
-                <a:cs typeface="Poppins"/>
-                <a:sym typeface="Poppins"/>
-              </a:rPr>
-              <a:t>El objetivo es que los usuarios con un solo click puedan escoger la empresa y el servicio que más se adapte a sus necesidades.</a:t>
-            </a:r>
-          </a:p>
-        </p:txBody>
-      </p:sp>
       <p:grpSp>
         <p:nvGrpSpPr>
-          <p:cNvPr name="Group 19" id="19"/>
+          <p:cNvPr name="Group 17" id="17"/>
           <p:cNvGrpSpPr/>
           <p:nvPr/>
         </p:nvGrpSpPr>
         <p:grpSpPr>
           <a:xfrm rot="0">
-            <a:off x="12178667" y="3623212"/>
-            <a:ext cx="4475594" cy="5164530"/>
+            <a:off x="12051273" y="3975846"/>
+            <a:ext cx="4475594" cy="4146644"/>
             <a:chOff x="0" y="0"/>
-            <a:chExt cx="1178757" cy="1360205"/>
+            <a:chExt cx="1178757" cy="1092120"/>
           </a:xfrm>
         </p:grpSpPr>
         <p:sp>
           <p:nvSpPr>
-            <p:cNvPr name="Freeform 20" id="20"/>
+            <p:cNvPr name="Freeform 18" id="18"/>
             <p:cNvSpPr/>
             <p:nvPr/>
           </p:nvSpPr>
           <p:spPr>
             <a:xfrm flipH="false" flipV="false" rot="0">
               <a:off x="0" y="0"/>
-              <a:ext cx="1178757" cy="1360205"/>
+              <a:ext cx="1178757" cy="1092120"/>
             </a:xfrm>
             <a:custGeom>
               <a:avLst/>
@@ -5087,57 +5213,19 @@
               <a:cxnLst/>
               <a:rect r="r" b="b" t="t" l="l"/>
               <a:pathLst>
-                <a:path h="1360205" w="1178757">
+                <a:path h="1092120" w="1178757">
                   <a:moveTo>
-                    <a:pt x="34596" y="0"/>
+                    <a:pt x="0" y="0"/>
                   </a:moveTo>
                   <a:lnTo>
-                    <a:pt x="1144161" y="0"/>
-                  </a:lnTo>
-                  <a:cubicBezTo>
-                    <a:pt x="1153337" y="0"/>
-                    <a:pt x="1162136" y="3645"/>
-                    <a:pt x="1168624" y="10133"/>
-                  </a:cubicBezTo>
-                  <a:cubicBezTo>
-                    <a:pt x="1175112" y="16621"/>
-                    <a:pt x="1178757" y="25421"/>
-                    <a:pt x="1178757" y="34596"/>
-                  </a:cubicBezTo>
-                  <a:lnTo>
-                    <a:pt x="1178757" y="1325609"/>
-                  </a:lnTo>
-                  <a:cubicBezTo>
-                    <a:pt x="1178757" y="1344716"/>
-                    <a:pt x="1163268" y="1360205"/>
-                    <a:pt x="1144161" y="1360205"/>
-                  </a:cubicBezTo>
-                  <a:lnTo>
-                    <a:pt x="34596" y="1360205"/>
-                  </a:lnTo>
-                  <a:cubicBezTo>
-                    <a:pt x="25421" y="1360205"/>
-                    <a:pt x="16621" y="1356561"/>
-                    <a:pt x="10133" y="1350072"/>
-                  </a:cubicBezTo>
-                  <a:cubicBezTo>
-                    <a:pt x="3645" y="1343584"/>
-                    <a:pt x="0" y="1334785"/>
-                    <a:pt x="0" y="1325609"/>
-                  </a:cubicBezTo>
-                  <a:lnTo>
-                    <a:pt x="0" y="34596"/>
-                  </a:lnTo>
-                  <a:cubicBezTo>
-                    <a:pt x="0" y="25421"/>
-                    <a:pt x="3645" y="16621"/>
-                    <a:pt x="10133" y="10133"/>
-                  </a:cubicBezTo>
-                  <a:cubicBezTo>
-                    <a:pt x="16621" y="3645"/>
-                    <a:pt x="25421" y="0"/>
-                    <a:pt x="34596" y="0"/>
-                  </a:cubicBezTo>
+                    <a:pt x="1178757" y="0"/>
+                  </a:lnTo>
+                  <a:lnTo>
+                    <a:pt x="1178757" y="1092120"/>
+                  </a:lnTo>
+                  <a:lnTo>
+                    <a:pt x="0" y="1092120"/>
+                  </a:lnTo>
                   <a:close/>
                 </a:path>
               </a:pathLst>
@@ -5153,14 +5241,14 @@
         </p:sp>
         <p:sp>
           <p:nvSpPr>
-            <p:cNvPr name="TextBox 21" id="21"/>
+            <p:cNvPr name="TextBox 19" id="19"/>
             <p:cNvSpPr txBox="true"/>
             <p:nvPr/>
           </p:nvSpPr>
           <p:spPr>
             <a:xfrm>
               <a:off x="0" y="-19050"/>
-              <a:ext cx="1178757" cy="1379255"/>
+              <a:ext cx="1178757" cy="1111170"/>
             </a:xfrm>
             <a:prstGeom prst="rect">
               <a:avLst/>
@@ -5181,14 +5269,14 @@
       </p:grpSp>
       <p:sp>
         <p:nvSpPr>
-          <p:cNvPr name="TextBox 22" id="22"/>
+          <p:cNvPr name="TextBox 20" id="20"/>
           <p:cNvSpPr txBox="true"/>
           <p:nvPr/>
         </p:nvSpPr>
         <p:spPr>
           <a:xfrm rot="0">
-            <a:off x="3690980" y="1329960"/>
-            <a:ext cx="10906040" cy="796391"/>
+            <a:off x="12674602" y="4326535"/>
+            <a:ext cx="3363677" cy="3524685"/>
           </a:xfrm>
           <a:prstGeom prst="rect">
             <a:avLst/>
@@ -5200,60 +5288,15 @@
           </a:bodyPr>
           <a:lstStyle/>
           <a:p>
-            <a:pPr algn="ctr" marL="0" indent="0" lvl="0">
+            <a:pPr algn="l" marL="442554" indent="-221277" lvl="1">
               <a:lnSpc>
-                <a:spcPts val="6548"/>
+                <a:spcPts val="2828"/>
               </a:lnSpc>
-              <a:spcBef>
-                <a:spcPct val="0"/>
-              </a:spcBef>
+              <a:buFont typeface="Arial"/>
+              <a:buChar char="•"/>
             </a:pPr>
             <a:r>
-              <a:rPr lang="en-US" b="true" sz="4745" spc="37">
-                <a:solidFill>
-                  <a:srgbClr val="344F51"/>
-                </a:solidFill>
-                <a:latin typeface="Fraunces Bold"/>
-                <a:ea typeface="Fraunces Bold"/>
-                <a:cs typeface="Fraunces Bold"/>
-                <a:sym typeface="Fraunces Bold"/>
-              </a:rPr>
-              <a:t>JUSTIFICACIÓN</a:t>
-            </a:r>
-          </a:p>
-        </p:txBody>
-      </p:sp>
-      <p:sp>
-        <p:nvSpPr>
-          <p:cNvPr name="TextBox 23" id="23"/>
-          <p:cNvSpPr txBox="true"/>
-          <p:nvPr/>
-        </p:nvSpPr>
-        <p:spPr>
-          <a:xfrm rot="0">
-            <a:off x="2508537" y="4059812"/>
-            <a:ext cx="3987194" cy="3683734"/>
-          </a:xfrm>
-          <a:prstGeom prst="rect">
-            <a:avLst/>
-          </a:prstGeom>
-        </p:spPr>
-        <p:txBody>
-          <a:bodyPr anchor="t" rtlCol="false" tIns="0" lIns="0" bIns="0" rIns="0">
-            <a:spAutoFit/>
-          </a:bodyPr>
-          <a:lstStyle/>
-          <a:p>
-            <a:pPr algn="l" marL="0" indent="0" lvl="0">
-              <a:lnSpc>
-                <a:spcPts val="2958"/>
-              </a:lnSpc>
-              <a:spcBef>
-                <a:spcPct val="0"/>
-              </a:spcBef>
-            </a:pPr>
-            <a:r>
-              <a:rPr lang="en-US" sz="2143" spc="210">
+              <a:rPr lang="en-US" sz="2049" spc="200">
                 <a:solidFill>
                   <a:srgbClr val="231F20"/>
                 </a:solidFill>
@@ -5262,76 +5305,87 @@
                 <a:cs typeface="Poppins"/>
                 <a:sym typeface="Poppins"/>
               </a:rPr>
-              <a:t>Sitio web en el que se pueda realizar la contratación, por parte de los usuarios, de servicios ofrecidos por distintas empresas destinados al cuidado de personas mayores y/o personas que necesitan ayuda.</a:t>
-            </a:r>
-          </a:p>
-        </p:txBody>
-      </p:sp>
-      <p:sp>
-        <p:nvSpPr>
-          <p:cNvPr name="TextBox 24" id="24"/>
-          <p:cNvSpPr txBox="true"/>
-          <p:nvPr/>
-        </p:nvSpPr>
-        <p:spPr>
-          <a:xfrm rot="0">
-            <a:off x="17535126" y="9399905"/>
-            <a:ext cx="752874" cy="887095"/>
-          </a:xfrm>
-          <a:prstGeom prst="rect">
-            <a:avLst/>
-          </a:prstGeom>
-        </p:spPr>
-        <p:txBody>
-          <a:bodyPr anchor="t" rtlCol="false" tIns="0" lIns="0" bIns="0" rIns="0">
-            <a:spAutoFit/>
-          </a:bodyPr>
-          <a:lstStyle/>
-          <a:p>
-            <a:pPr algn="ctr">
+              <a:t>Facilitar la contratación de servicios. </a:t>
+            </a:r>
+          </a:p>
+          <a:p>
+            <a:pPr algn="l" marL="442554" indent="-221277" lvl="1">
               <a:lnSpc>
-                <a:spcPts val="7279"/>
+                <a:spcPts val="2828"/>
               </a:lnSpc>
+              <a:buFont typeface="Arial"/>
+              <a:buChar char="•"/>
             </a:pPr>
             <a:r>
-              <a:rPr lang="en-US" b="true" sz="5199">
+              <a:rPr lang="en-US" sz="2049" spc="200">
                 <a:solidFill>
-                  <a:srgbClr val="93D14B"/>
+                  <a:srgbClr val="231F20"/>
                 </a:solidFill>
-                <a:latin typeface="Open Sans Bold"/>
-                <a:ea typeface="Open Sans Bold"/>
-                <a:cs typeface="Open Sans Bold"/>
-                <a:sym typeface="Open Sans Bold"/>
+                <a:latin typeface="Poppins"/>
+                <a:ea typeface="Poppins"/>
+                <a:cs typeface="Poppins"/>
+                <a:sym typeface="Poppins"/>
               </a:rPr>
-              <a:t>1.</a:t>
-            </a:r>
+              <a:t>Solucionar posibles conflictos.</a:t>
+            </a:r>
+          </a:p>
+          <a:p>
+            <a:pPr algn="l" marL="442554" indent="-221277" lvl="1">
+              <a:lnSpc>
+                <a:spcPts val="2828"/>
+              </a:lnSpc>
+              <a:buFont typeface="Arial"/>
+              <a:buChar char="•"/>
+            </a:pPr>
+            <a:r>
+              <a:rPr lang="en-US" sz="2049" spc="200">
+                <a:solidFill>
+                  <a:srgbClr val="231F20"/>
+                </a:solidFill>
+                <a:latin typeface="Poppins"/>
+                <a:ea typeface="Poppins"/>
+                <a:cs typeface="Poppins"/>
+                <a:sym typeface="Poppins"/>
+              </a:rPr>
+              <a:t>Dar visibilidad a empresas más pequeñas.</a:t>
+            </a:r>
+          </a:p>
+          <a:p>
+            <a:pPr algn="l" marL="0" indent="0" lvl="0">
+              <a:lnSpc>
+                <a:spcPts val="2828"/>
+              </a:lnSpc>
+              <a:spcBef>
+                <a:spcPct val="0"/>
+              </a:spcBef>
+            </a:pPr>
           </a:p>
         </p:txBody>
       </p:sp>
       <p:grpSp>
         <p:nvGrpSpPr>
-          <p:cNvPr name="Group 25" id="25"/>
+          <p:cNvPr name="Group 21" id="21"/>
           <p:cNvGrpSpPr/>
           <p:nvPr/>
         </p:nvGrpSpPr>
         <p:grpSpPr>
           <a:xfrm rot="0">
-            <a:off x="7328002" y="3655008"/>
-            <a:ext cx="4475594" cy="5151030"/>
+            <a:off x="7075058" y="4024558"/>
+            <a:ext cx="4475594" cy="4146644"/>
             <a:chOff x="0" y="0"/>
-            <a:chExt cx="1178757" cy="1356650"/>
+            <a:chExt cx="1178757" cy="1092120"/>
           </a:xfrm>
         </p:grpSpPr>
         <p:sp>
           <p:nvSpPr>
-            <p:cNvPr name="Freeform 26" id="26"/>
+            <p:cNvPr name="Freeform 22" id="22"/>
             <p:cNvSpPr/>
             <p:nvPr/>
           </p:nvSpPr>
           <p:spPr>
             <a:xfrm flipH="false" flipV="false" rot="0">
               <a:off x="0" y="0"/>
-              <a:ext cx="1178757" cy="1356650"/>
+              <a:ext cx="1178757" cy="1092120"/>
             </a:xfrm>
             <a:custGeom>
               <a:avLst/>
@@ -5340,57 +5394,19 @@
               <a:cxnLst/>
               <a:rect r="r" b="b" t="t" l="l"/>
               <a:pathLst>
-                <a:path h="1356650" w="1178757">
+                <a:path h="1092120" w="1178757">
                   <a:moveTo>
-                    <a:pt x="34596" y="0"/>
+                    <a:pt x="0" y="0"/>
                   </a:moveTo>
                   <a:lnTo>
-                    <a:pt x="1144161" y="0"/>
-                  </a:lnTo>
-                  <a:cubicBezTo>
-                    <a:pt x="1153337" y="0"/>
-                    <a:pt x="1162136" y="3645"/>
-                    <a:pt x="1168624" y="10133"/>
-                  </a:cubicBezTo>
-                  <a:cubicBezTo>
-                    <a:pt x="1175112" y="16621"/>
-                    <a:pt x="1178757" y="25421"/>
-                    <a:pt x="1178757" y="34596"/>
-                  </a:cubicBezTo>
-                  <a:lnTo>
-                    <a:pt x="1178757" y="1322054"/>
-                  </a:lnTo>
-                  <a:cubicBezTo>
-                    <a:pt x="1178757" y="1341161"/>
-                    <a:pt x="1163268" y="1356650"/>
-                    <a:pt x="1144161" y="1356650"/>
-                  </a:cubicBezTo>
-                  <a:lnTo>
-                    <a:pt x="34596" y="1356650"/>
-                  </a:lnTo>
-                  <a:cubicBezTo>
-                    <a:pt x="25421" y="1356650"/>
-                    <a:pt x="16621" y="1353005"/>
-                    <a:pt x="10133" y="1346517"/>
-                  </a:cubicBezTo>
-                  <a:cubicBezTo>
-                    <a:pt x="3645" y="1340029"/>
-                    <a:pt x="0" y="1331229"/>
-                    <a:pt x="0" y="1322054"/>
-                  </a:cubicBezTo>
-                  <a:lnTo>
-                    <a:pt x="0" y="34596"/>
-                  </a:lnTo>
-                  <a:cubicBezTo>
-                    <a:pt x="0" y="25421"/>
-                    <a:pt x="3645" y="16621"/>
-                    <a:pt x="10133" y="10133"/>
-                  </a:cubicBezTo>
-                  <a:cubicBezTo>
-                    <a:pt x="16621" y="3645"/>
-                    <a:pt x="25421" y="0"/>
-                    <a:pt x="34596" y="0"/>
-                  </a:cubicBezTo>
+                    <a:pt x="1178757" y="0"/>
+                  </a:lnTo>
+                  <a:lnTo>
+                    <a:pt x="1178757" y="1092120"/>
+                  </a:lnTo>
+                  <a:lnTo>
+                    <a:pt x="0" y="1092120"/>
+                  </a:lnTo>
                   <a:close/>
                 </a:path>
               </a:pathLst>
@@ -5406,14 +5422,14 @@
         </p:sp>
         <p:sp>
           <p:nvSpPr>
-            <p:cNvPr name="TextBox 27" id="27"/>
+            <p:cNvPr name="TextBox 23" id="23"/>
             <p:cNvSpPr txBox="true"/>
             <p:nvPr/>
           </p:nvSpPr>
           <p:spPr>
             <a:xfrm>
               <a:off x="0" y="-47625"/>
-              <a:ext cx="1178757" cy="1404275"/>
+              <a:ext cx="1178757" cy="1139745"/>
             </a:xfrm>
             <a:prstGeom prst="rect">
               <a:avLst/>
@@ -5432,6 +5448,217 @@
           </p:txBody>
         </p:sp>
       </p:grpSp>
+      <p:sp>
+        <p:nvSpPr>
+          <p:cNvPr name="TextBox 24" id="24"/>
+          <p:cNvSpPr txBox="true"/>
+          <p:nvPr/>
+        </p:nvSpPr>
+        <p:spPr>
+          <a:xfrm rot="0">
+            <a:off x="7530941" y="4326535"/>
+            <a:ext cx="3563827" cy="3629053"/>
+          </a:xfrm>
+          <a:prstGeom prst="rect">
+            <a:avLst/>
+          </a:prstGeom>
+        </p:spPr>
+        <p:txBody>
+          <a:bodyPr anchor="t" rtlCol="false" tIns="0" lIns="0" bIns="0" rIns="0">
+            <a:spAutoFit/>
+          </a:bodyPr>
+          <a:lstStyle/>
+          <a:p>
+            <a:pPr algn="l">
+              <a:lnSpc>
+                <a:spcPts val="2873"/>
+              </a:lnSpc>
+            </a:pPr>
+            <a:r>
+              <a:rPr lang="en-US" sz="2082" spc="204">
+                <a:solidFill>
+                  <a:srgbClr val="231F20"/>
+                </a:solidFill>
+                <a:latin typeface="Poppins"/>
+                <a:ea typeface="Poppins"/>
+                <a:cs typeface="Poppins"/>
+                <a:sym typeface="Poppins"/>
+              </a:rPr>
+              <a:t>Aumento de la demanda de contratación de servicios de asistencia. </a:t>
+            </a:r>
+          </a:p>
+          <a:p>
+            <a:pPr algn="l">
+              <a:lnSpc>
+                <a:spcPts val="2873"/>
+              </a:lnSpc>
+            </a:pPr>
+          </a:p>
+          <a:p>
+            <a:pPr algn="l" marL="0" indent="0" lvl="0">
+              <a:lnSpc>
+                <a:spcPts val="2873"/>
+              </a:lnSpc>
+              <a:spcBef>
+                <a:spcPct val="0"/>
+              </a:spcBef>
+            </a:pPr>
+            <a:r>
+              <a:rPr lang="en-US" b="true" sz="2082" spc="204">
+                <a:solidFill>
+                  <a:srgbClr val="344F51"/>
+                </a:solidFill>
+                <a:latin typeface="Poppins Bold"/>
+                <a:ea typeface="Poppins Bold"/>
+                <a:cs typeface="Poppins Bold"/>
+                <a:sym typeface="Poppins Bold"/>
+              </a:rPr>
+              <a:t>Objetivo:</a:t>
+            </a:r>
+            <a:r>
+              <a:rPr lang="en-US" sz="2082" spc="204">
+                <a:solidFill>
+                  <a:srgbClr val="231F20"/>
+                </a:solidFill>
+                <a:latin typeface="Poppins"/>
+                <a:ea typeface="Poppins"/>
+                <a:cs typeface="Poppins"/>
+                <a:sym typeface="Poppins"/>
+              </a:rPr>
+              <a:t> con un solo clic contratar servicios adaptados a sus necesidades.</a:t>
+            </a:r>
+          </a:p>
+        </p:txBody>
+      </p:sp>
+      <p:sp>
+        <p:nvSpPr>
+          <p:cNvPr name="TextBox 25" id="25"/>
+          <p:cNvSpPr txBox="true"/>
+          <p:nvPr/>
+        </p:nvSpPr>
+        <p:spPr>
+          <a:xfrm rot="0">
+            <a:off x="3563586" y="1329960"/>
+            <a:ext cx="10906040" cy="796391"/>
+          </a:xfrm>
+          <a:prstGeom prst="rect">
+            <a:avLst/>
+          </a:prstGeom>
+        </p:spPr>
+        <p:txBody>
+          <a:bodyPr anchor="t" rtlCol="false" tIns="0" lIns="0" bIns="0" rIns="0">
+            <a:spAutoFit/>
+          </a:bodyPr>
+          <a:lstStyle/>
+          <a:p>
+            <a:pPr algn="ctr" marL="0" indent="0" lvl="0">
+              <a:lnSpc>
+                <a:spcPts val="6548"/>
+              </a:lnSpc>
+              <a:spcBef>
+                <a:spcPct val="0"/>
+              </a:spcBef>
+            </a:pPr>
+            <a:r>
+              <a:rPr lang="en-US" b="true" sz="4745" spc="37">
+                <a:solidFill>
+                  <a:srgbClr val="344F51"/>
+                </a:solidFill>
+                <a:latin typeface="Fraunces Bold"/>
+                <a:ea typeface="Fraunces Bold"/>
+                <a:cs typeface="Fraunces Bold"/>
+                <a:sym typeface="Fraunces Bold"/>
+              </a:rPr>
+              <a:t>JUSTIFICACIÓN</a:t>
+            </a:r>
+          </a:p>
+        </p:txBody>
+      </p:sp>
+      <p:sp>
+        <p:nvSpPr>
+          <p:cNvPr name="TextBox 26" id="26"/>
+          <p:cNvSpPr txBox="true"/>
+          <p:nvPr/>
+        </p:nvSpPr>
+        <p:spPr>
+          <a:xfrm rot="0">
+            <a:off x="2359182" y="4326535"/>
+            <a:ext cx="3656940" cy="3316175"/>
+          </a:xfrm>
+          <a:prstGeom prst="rect">
+            <a:avLst/>
+          </a:prstGeom>
+        </p:spPr>
+        <p:txBody>
+          <a:bodyPr anchor="t" rtlCol="false" tIns="0" lIns="0" bIns="0" rIns="0">
+            <a:spAutoFit/>
+          </a:bodyPr>
+          <a:lstStyle/>
+          <a:p>
+            <a:pPr algn="l" marL="0" indent="0" lvl="0">
+              <a:lnSpc>
+                <a:spcPts val="2958"/>
+              </a:lnSpc>
+              <a:spcBef>
+                <a:spcPct val="0"/>
+              </a:spcBef>
+            </a:pPr>
+            <a:r>
+              <a:rPr lang="en-US" sz="2143" spc="210">
+                <a:solidFill>
+                  <a:srgbClr val="231F20"/>
+                </a:solidFill>
+                <a:latin typeface="Poppins"/>
+                <a:ea typeface="Poppins"/>
+                <a:cs typeface="Poppins"/>
+                <a:sym typeface="Poppins"/>
+              </a:rPr>
+              <a:t>Sitio web para contratar servicios ofrecidos por distintas empresas destinados al cuidado de personas mayores y/o personas que necesitan ayuda (dependientes).</a:t>
+            </a:r>
+          </a:p>
+        </p:txBody>
+      </p:sp>
+      <p:sp>
+        <p:nvSpPr>
+          <p:cNvPr name="TextBox 27" id="27"/>
+          <p:cNvSpPr txBox="true"/>
+          <p:nvPr/>
+        </p:nvSpPr>
+        <p:spPr>
+          <a:xfrm rot="0">
+            <a:off x="17535126" y="9399905"/>
+            <a:ext cx="752874" cy="887095"/>
+          </a:xfrm>
+          <a:prstGeom prst="rect">
+            <a:avLst/>
+          </a:prstGeom>
+        </p:spPr>
+        <p:txBody>
+          <a:bodyPr anchor="t" rtlCol="false" tIns="0" lIns="0" bIns="0" rIns="0">
+            <a:spAutoFit/>
+          </a:bodyPr>
+          <a:lstStyle/>
+          <a:p>
+            <a:pPr algn="ctr">
+              <a:lnSpc>
+                <a:spcPts val="7279"/>
+              </a:lnSpc>
+            </a:pPr>
+            <a:r>
+              <a:rPr lang="en-US" b="true" sz="5199">
+                <a:solidFill>
+                  <a:srgbClr val="93D14B"/>
+                </a:solidFill>
+                <a:latin typeface="Open Sans Bold"/>
+                <a:ea typeface="Open Sans Bold"/>
+                <a:cs typeface="Open Sans Bold"/>
+                <a:sym typeface="Open Sans Bold"/>
+              </a:rPr>
+              <a:t>1.</a:t>
+            </a:r>
+          </a:p>
+        </p:txBody>
+      </p:sp>
     </p:spTree>
   </p:cSld>
   <p:clrMapOvr>
@@ -5517,7 +5744,7 @@
               </a:pathLst>
             </a:custGeom>
             <a:solidFill>
-              <a:srgbClr val="EEEAE9"/>
+              <a:srgbClr val="FFFFFF"/>
             </a:solidFill>
             <a:ln cap="sq">
               <a:noFill/>
@@ -5565,7 +5792,7 @@
         </p:nvGrpSpPr>
         <p:grpSpPr>
           <a:xfrm rot="0">
-            <a:off x="1028700" y="3407406"/>
+            <a:off x="1886411" y="3407406"/>
             <a:ext cx="2667835" cy="810936"/>
             <a:chOff x="0" y="0"/>
             <a:chExt cx="620299" cy="188551"/>
@@ -5591,40 +5818,17 @@
               <a:pathLst>
                 <a:path h="188551" w="620299">
                   <a:moveTo>
-                    <a:pt x="23216" y="0"/>
+                    <a:pt x="0" y="0"/>
                   </a:moveTo>
                   <a:lnTo>
-                    <a:pt x="597084" y="0"/>
-                  </a:lnTo>
-                  <a:cubicBezTo>
-                    <a:pt x="609905" y="0"/>
-                    <a:pt x="620299" y="10394"/>
-                    <a:pt x="620299" y="23216"/>
-                  </a:cubicBezTo>
-                  <a:lnTo>
-                    <a:pt x="620299" y="165335"/>
-                  </a:lnTo>
-                  <a:cubicBezTo>
-                    <a:pt x="620299" y="178157"/>
-                    <a:pt x="609905" y="188551"/>
-                    <a:pt x="597084" y="188551"/>
-                  </a:cubicBezTo>
-                  <a:lnTo>
-                    <a:pt x="23216" y="188551"/>
-                  </a:lnTo>
-                  <a:cubicBezTo>
-                    <a:pt x="10394" y="188551"/>
-                    <a:pt x="0" y="178157"/>
-                    <a:pt x="0" y="165335"/>
-                  </a:cubicBezTo>
-                  <a:lnTo>
-                    <a:pt x="0" y="23216"/>
-                  </a:lnTo>
-                  <a:cubicBezTo>
-                    <a:pt x="0" y="10394"/>
-                    <a:pt x="10394" y="0"/>
-                    <a:pt x="23216" y="0"/>
-                  </a:cubicBezTo>
+                    <a:pt x="620299" y="0"/>
+                  </a:lnTo>
+                  <a:lnTo>
+                    <a:pt x="620299" y="188551"/>
+                  </a:lnTo>
+                  <a:lnTo>
+                    <a:pt x="0" y="188551"/>
+                  </a:lnTo>
                   <a:close/>
                 </a:path>
               </a:pathLst>
@@ -5685,7 +5889,7 @@
         </p:nvSpPr>
         <p:spPr>
           <a:xfrm flipH="false" flipV="false" rot="0">
-            <a:off x="498128" y="4911527"/>
+            <a:off x="1276448" y="4817276"/>
             <a:ext cx="3887759" cy="3328894"/>
           </a:xfrm>
           <a:custGeom>
@@ -5703,10 +5907,10 @@
                   <a:pt x="3887759" y="0"/>
                 </a:lnTo>
                 <a:lnTo>
-                  <a:pt x="3887759" y="3328893"/>
-                </a:lnTo>
-                <a:lnTo>
-                  <a:pt x="0" y="3328893"/>
+                  <a:pt x="3887759" y="3328894"/>
+                </a:lnTo>
+                <a:lnTo>
+                  <a:pt x="0" y="3328894"/>
                 </a:lnTo>
                 <a:lnTo>
                   <a:pt x="0" y="0"/>
@@ -5781,7 +5985,7 @@
         </p:nvGrpSpPr>
         <p:grpSpPr>
           <a:xfrm rot="0">
-            <a:off x="7358876" y="3407406"/>
+            <a:off x="8216586" y="3407406"/>
             <a:ext cx="2385400" cy="810936"/>
             <a:chOff x="0" y="0"/>
             <a:chExt cx="554630" cy="188551"/>
@@ -5807,45 +6011,17 @@
               <a:pathLst>
                 <a:path h="188551" w="554630">
                   <a:moveTo>
-                    <a:pt x="25964" y="0"/>
+                    <a:pt x="0" y="0"/>
                   </a:moveTo>
                   <a:lnTo>
-                    <a:pt x="528666" y="0"/>
-                  </a:lnTo>
-                  <a:cubicBezTo>
-                    <a:pt x="535552" y="0"/>
-                    <a:pt x="542156" y="2736"/>
-                    <a:pt x="547026" y="7605"/>
-                  </a:cubicBezTo>
-                  <a:cubicBezTo>
-                    <a:pt x="551895" y="12474"/>
-                    <a:pt x="554630" y="19078"/>
-                    <a:pt x="554630" y="25964"/>
-                  </a:cubicBezTo>
-                  <a:lnTo>
-                    <a:pt x="554630" y="162587"/>
-                  </a:lnTo>
-                  <a:cubicBezTo>
-                    <a:pt x="554630" y="176926"/>
-                    <a:pt x="543006" y="188551"/>
-                    <a:pt x="528666" y="188551"/>
-                  </a:cubicBezTo>
-                  <a:lnTo>
-                    <a:pt x="25964" y="188551"/>
-                  </a:lnTo>
-                  <a:cubicBezTo>
-                    <a:pt x="11625" y="188551"/>
-                    <a:pt x="0" y="176926"/>
-                    <a:pt x="0" y="162587"/>
-                  </a:cubicBezTo>
-                  <a:lnTo>
-                    <a:pt x="0" y="25964"/>
-                  </a:lnTo>
-                  <a:cubicBezTo>
-                    <a:pt x="0" y="11625"/>
-                    <a:pt x="11625" y="0"/>
-                    <a:pt x="25964" y="0"/>
-                  </a:cubicBezTo>
+                    <a:pt x="554630" y="0"/>
+                  </a:lnTo>
+                  <a:lnTo>
+                    <a:pt x="554630" y="188551"/>
+                  </a:lnTo>
+                  <a:lnTo>
+                    <a:pt x="0" y="188551"/>
+                  </a:lnTo>
                   <a:close/>
                 </a:path>
               </a:pathLst>
@@ -5906,7 +6082,7 @@
         </p:nvGrpSpPr>
         <p:grpSpPr>
           <a:xfrm rot="0">
-            <a:off x="13406616" y="3407406"/>
+            <a:off x="14264327" y="3407406"/>
             <a:ext cx="2667835" cy="810936"/>
             <a:chOff x="0" y="0"/>
             <a:chExt cx="620299" cy="188551"/>
@@ -5932,40 +6108,17 @@
               <a:pathLst>
                 <a:path h="188551" w="620299">
                   <a:moveTo>
-                    <a:pt x="23216" y="0"/>
+                    <a:pt x="0" y="0"/>
                   </a:moveTo>
                   <a:lnTo>
-                    <a:pt x="597084" y="0"/>
-                  </a:lnTo>
-                  <a:cubicBezTo>
-                    <a:pt x="609905" y="0"/>
-                    <a:pt x="620299" y="10394"/>
-                    <a:pt x="620299" y="23216"/>
-                  </a:cubicBezTo>
-                  <a:lnTo>
-                    <a:pt x="620299" y="165335"/>
-                  </a:lnTo>
-                  <a:cubicBezTo>
-                    <a:pt x="620299" y="178157"/>
-                    <a:pt x="609905" y="188551"/>
-                    <a:pt x="597084" y="188551"/>
-                  </a:cubicBezTo>
-                  <a:lnTo>
-                    <a:pt x="23216" y="188551"/>
-                  </a:lnTo>
-                  <a:cubicBezTo>
-                    <a:pt x="10394" y="188551"/>
-                    <a:pt x="0" y="178157"/>
-                    <a:pt x="0" y="165335"/>
-                  </a:cubicBezTo>
-                  <a:lnTo>
-                    <a:pt x="0" y="23216"/>
-                  </a:lnTo>
-                  <a:cubicBezTo>
-                    <a:pt x="0" y="10394"/>
-                    <a:pt x="10394" y="0"/>
-                    <a:pt x="23216" y="0"/>
-                  </a:cubicBezTo>
+                    <a:pt x="620299" y="0"/>
+                  </a:lnTo>
+                  <a:lnTo>
+                    <a:pt x="620299" y="188551"/>
+                  </a:lnTo>
+                  <a:lnTo>
+                    <a:pt x="0" y="188551"/>
+                  </a:lnTo>
                   <a:close/>
                 </a:path>
               </a:pathLst>
@@ -6026,7 +6179,7 @@
         </p:nvSpPr>
         <p:spPr>
           <a:xfrm flipH="false" flipV="false" rot="0">
-            <a:off x="13811142" y="5146355"/>
+            <a:off x="14668853" y="5106603"/>
             <a:ext cx="1858783" cy="2750241"/>
           </a:xfrm>
           <a:custGeom>
@@ -6078,7 +6231,7 @@
         </p:nvSpPr>
         <p:spPr>
           <a:xfrm flipH="false" flipV="false" rot="0">
-            <a:off x="7086581" y="5066851"/>
+            <a:off x="7994414" y="5066851"/>
             <a:ext cx="2829745" cy="2829745"/>
           </a:xfrm>
           <a:custGeom>
@@ -6359,7 +6512,7 @@
               </a:pathLst>
             </a:custGeom>
             <a:solidFill>
-              <a:srgbClr val="EEEAE9"/>
+              <a:srgbClr val="FFFFFF"/>
             </a:solidFill>
             <a:ln cap="sq">
               <a:noFill/>
@@ -6713,7 +6866,7 @@
               </a:pathLst>
             </a:custGeom>
             <a:solidFill>
-              <a:srgbClr val="EEEAE9"/>
+              <a:srgbClr val="FFFFFF"/>
             </a:solidFill>
             <a:ln cap="sq">
               <a:noFill/>
@@ -6761,7 +6914,7 @@
         </p:nvGrpSpPr>
         <p:grpSpPr>
           <a:xfrm rot="0">
-            <a:off x="335116" y="3466122"/>
+            <a:off x="374853" y="3466122"/>
             <a:ext cx="5008014" cy="859690"/>
             <a:chOff x="0" y="0"/>
             <a:chExt cx="1164415" cy="199887"/>
@@ -6787,45 +6940,17 @@
               <a:pathLst>
                 <a:path h="199887" w="1164415">
                   <a:moveTo>
-                    <a:pt x="12367" y="0"/>
+                    <a:pt x="0" y="0"/>
                   </a:moveTo>
                   <a:lnTo>
-                    <a:pt x="1152048" y="0"/>
-                  </a:lnTo>
-                  <a:cubicBezTo>
-                    <a:pt x="1158878" y="0"/>
-                    <a:pt x="1164415" y="5537"/>
-                    <a:pt x="1164415" y="12367"/>
-                  </a:cubicBezTo>
-                  <a:lnTo>
-                    <a:pt x="1164415" y="187520"/>
-                  </a:lnTo>
-                  <a:cubicBezTo>
-                    <a:pt x="1164415" y="190800"/>
-                    <a:pt x="1163112" y="193945"/>
-                    <a:pt x="1160793" y="196265"/>
-                  </a:cubicBezTo>
-                  <a:cubicBezTo>
-                    <a:pt x="1158474" y="198584"/>
-                    <a:pt x="1155328" y="199887"/>
-                    <a:pt x="1152048" y="199887"/>
-                  </a:cubicBezTo>
-                  <a:lnTo>
-                    <a:pt x="12367" y="199887"/>
-                  </a:lnTo>
-                  <a:cubicBezTo>
-                    <a:pt x="5537" y="199887"/>
-                    <a:pt x="0" y="194350"/>
-                    <a:pt x="0" y="187520"/>
-                  </a:cubicBezTo>
-                  <a:lnTo>
-                    <a:pt x="0" y="12367"/>
-                  </a:lnTo>
-                  <a:cubicBezTo>
-                    <a:pt x="0" y="5537"/>
-                    <a:pt x="5537" y="0"/>
-                    <a:pt x="12367" y="0"/>
-                  </a:cubicBezTo>
+                    <a:pt x="1164415" y="0"/>
+                  </a:lnTo>
+                  <a:lnTo>
+                    <a:pt x="1164415" y="199887"/>
+                  </a:lnTo>
+                  <a:lnTo>
+                    <a:pt x="0" y="199887"/>
+                  </a:lnTo>
                   <a:close/>
                 </a:path>
               </a:pathLst>
@@ -6886,10 +7011,10 @@
         </p:nvGrpSpPr>
         <p:grpSpPr>
           <a:xfrm rot="0">
-            <a:off x="6240627" y="3466122"/>
-            <a:ext cx="5964636" cy="859690"/>
+            <a:off x="6540893" y="3279111"/>
+            <a:ext cx="5686178" cy="1325286"/>
             <a:chOff x="0" y="0"/>
-            <a:chExt cx="1386840" cy="199887"/>
+            <a:chExt cx="1322095" cy="308143"/>
           </a:xfrm>
         </p:grpSpPr>
         <p:sp>
@@ -6901,7 +7026,7 @@
           <p:spPr>
             <a:xfrm flipH="false" flipV="false" rot="0">
               <a:off x="0" y="0"/>
-              <a:ext cx="1386840" cy="199887"/>
+              <a:ext cx="1322095" cy="308143"/>
             </a:xfrm>
             <a:custGeom>
               <a:avLst/>
@@ -6910,62 +7035,19 @@
               <a:cxnLst/>
               <a:rect r="r" b="b" t="t" l="l"/>
               <a:pathLst>
-                <a:path h="199887" w="1386840">
+                <a:path h="308143" w="1322095">
                   <a:moveTo>
-                    <a:pt x="10384" y="0"/>
+                    <a:pt x="0" y="0"/>
                   </a:moveTo>
                   <a:lnTo>
-                    <a:pt x="1376456" y="0"/>
-                  </a:lnTo>
-                  <a:cubicBezTo>
-                    <a:pt x="1379210" y="0"/>
-                    <a:pt x="1381851" y="1094"/>
-                    <a:pt x="1383799" y="3041"/>
-                  </a:cubicBezTo>
-                  <a:cubicBezTo>
-                    <a:pt x="1385746" y="4989"/>
-                    <a:pt x="1386840" y="7630"/>
-                    <a:pt x="1386840" y="10384"/>
-                  </a:cubicBezTo>
-                  <a:lnTo>
-                    <a:pt x="1386840" y="189503"/>
-                  </a:lnTo>
-                  <a:cubicBezTo>
-                    <a:pt x="1386840" y="192257"/>
-                    <a:pt x="1385746" y="194898"/>
-                    <a:pt x="1383799" y="196846"/>
-                  </a:cubicBezTo>
-                  <a:cubicBezTo>
-                    <a:pt x="1381851" y="198793"/>
-                    <a:pt x="1379210" y="199887"/>
-                    <a:pt x="1376456" y="199887"/>
-                  </a:cubicBezTo>
-                  <a:lnTo>
-                    <a:pt x="10384" y="199887"/>
-                  </a:lnTo>
-                  <a:cubicBezTo>
-                    <a:pt x="7630" y="199887"/>
-                    <a:pt x="4989" y="198793"/>
-                    <a:pt x="3041" y="196846"/>
-                  </a:cubicBezTo>
-                  <a:cubicBezTo>
-                    <a:pt x="1094" y="194898"/>
-                    <a:pt x="0" y="192257"/>
-                    <a:pt x="0" y="189503"/>
-                  </a:cubicBezTo>
-                  <a:lnTo>
-                    <a:pt x="0" y="10384"/>
-                  </a:lnTo>
-                  <a:cubicBezTo>
-                    <a:pt x="0" y="7630"/>
-                    <a:pt x="1094" y="4989"/>
-                    <a:pt x="3041" y="3041"/>
-                  </a:cubicBezTo>
-                  <a:cubicBezTo>
-                    <a:pt x="4989" y="1094"/>
-                    <a:pt x="7630" y="0"/>
-                    <a:pt x="10384" y="0"/>
-                  </a:cubicBezTo>
+                    <a:pt x="1322095" y="0"/>
+                  </a:lnTo>
+                  <a:lnTo>
+                    <a:pt x="1322095" y="308143"/>
+                  </a:lnTo>
+                  <a:lnTo>
+                    <a:pt x="0" y="308143"/>
+                  </a:lnTo>
                   <a:close/>
                 </a:path>
               </a:pathLst>
@@ -6984,7 +7066,7 @@
           <p:spPr>
             <a:xfrm>
               <a:off x="0" y="-76200"/>
-              <a:ext cx="1386840" cy="276087"/>
+              <a:ext cx="1322095" cy="384343"/>
             </a:xfrm>
             <a:prstGeom prst="rect">
               <a:avLst/>
@@ -7052,55 +7134,17 @@
               <a:pathLst>
                 <a:path h="199887" w="1111030">
                   <a:moveTo>
-                    <a:pt x="12961" y="0"/>
+                    <a:pt x="0" y="0"/>
                   </a:moveTo>
                   <a:lnTo>
-                    <a:pt x="1098069" y="0"/>
-                  </a:lnTo>
-                  <a:cubicBezTo>
-                    <a:pt x="1105227" y="0"/>
-                    <a:pt x="1111030" y="5803"/>
-                    <a:pt x="1111030" y="12961"/>
-                  </a:cubicBezTo>
-                  <a:lnTo>
-                    <a:pt x="1111030" y="186925"/>
-                  </a:lnTo>
-                  <a:cubicBezTo>
-                    <a:pt x="1111030" y="190363"/>
-                    <a:pt x="1109664" y="193660"/>
-                    <a:pt x="1107234" y="196091"/>
-                  </a:cubicBezTo>
-                  <a:cubicBezTo>
-                    <a:pt x="1104803" y="198521"/>
-                    <a:pt x="1101506" y="199887"/>
-                    <a:pt x="1098069" y="199887"/>
-                  </a:cubicBezTo>
-                  <a:lnTo>
-                    <a:pt x="12961" y="199887"/>
-                  </a:lnTo>
-                  <a:cubicBezTo>
-                    <a:pt x="9524" y="199887"/>
-                    <a:pt x="6227" y="198521"/>
-                    <a:pt x="3796" y="196091"/>
-                  </a:cubicBezTo>
-                  <a:cubicBezTo>
-                    <a:pt x="1366" y="193660"/>
-                    <a:pt x="0" y="190363"/>
-                    <a:pt x="0" y="186925"/>
-                  </a:cubicBezTo>
-                  <a:lnTo>
-                    <a:pt x="0" y="12961"/>
-                  </a:lnTo>
-                  <a:cubicBezTo>
-                    <a:pt x="0" y="9524"/>
-                    <a:pt x="1366" y="6227"/>
-                    <a:pt x="3796" y="3796"/>
-                  </a:cubicBezTo>
-                  <a:cubicBezTo>
-                    <a:pt x="6227" y="1366"/>
-                    <a:pt x="9524" y="0"/>
-                    <a:pt x="12961" y="0"/>
-                  </a:cubicBezTo>
+                    <a:pt x="1111030" y="0"/>
+                  </a:lnTo>
+                  <a:lnTo>
+                    <a:pt x="1111030" y="199887"/>
+                  </a:lnTo>
+                  <a:lnTo>
+                    <a:pt x="0" y="199887"/>
+                  </a:lnTo>
                   <a:close/>
                 </a:path>
               </a:pathLst>
@@ -7161,7 +7205,7 @@
         </p:nvGrpSpPr>
         <p:grpSpPr>
           <a:xfrm rot="0">
-            <a:off x="290765" y="5143500"/>
+            <a:off x="352677" y="5143500"/>
             <a:ext cx="5052366" cy="4114800"/>
             <a:chOff x="0" y="0"/>
             <a:chExt cx="1174727" cy="956734"/>
@@ -7187,61 +7231,23 @@
               <a:pathLst>
                 <a:path h="956734" w="1174728">
                   <a:moveTo>
-                    <a:pt x="12259" y="0"/>
+                    <a:pt x="0" y="0"/>
                   </a:moveTo>
                   <a:lnTo>
-                    <a:pt x="1162469" y="0"/>
-                  </a:lnTo>
-                  <a:cubicBezTo>
-                    <a:pt x="1165720" y="0"/>
-                    <a:pt x="1168838" y="1292"/>
-                    <a:pt x="1171137" y="3590"/>
-                  </a:cubicBezTo>
-                  <a:cubicBezTo>
-                    <a:pt x="1173436" y="5889"/>
-                    <a:pt x="1174728" y="9007"/>
-                    <a:pt x="1174728" y="12259"/>
-                  </a:cubicBezTo>
-                  <a:lnTo>
-                    <a:pt x="1174728" y="944475"/>
-                  </a:lnTo>
-                  <a:cubicBezTo>
-                    <a:pt x="1174728" y="951245"/>
-                    <a:pt x="1169239" y="956734"/>
-                    <a:pt x="1162469" y="956734"/>
-                  </a:cubicBezTo>
-                  <a:lnTo>
-                    <a:pt x="12259" y="956734"/>
-                  </a:lnTo>
-                  <a:cubicBezTo>
-                    <a:pt x="9007" y="956734"/>
-                    <a:pt x="5889" y="955442"/>
-                    <a:pt x="3590" y="953143"/>
-                  </a:cubicBezTo>
-                  <a:cubicBezTo>
-                    <a:pt x="1292" y="950844"/>
-                    <a:pt x="0" y="947726"/>
-                    <a:pt x="0" y="944475"/>
-                  </a:cubicBezTo>
-                  <a:lnTo>
-                    <a:pt x="0" y="12259"/>
-                  </a:lnTo>
-                  <a:cubicBezTo>
-                    <a:pt x="0" y="9007"/>
-                    <a:pt x="1292" y="5889"/>
-                    <a:pt x="3590" y="3590"/>
-                  </a:cubicBezTo>
-                  <a:cubicBezTo>
-                    <a:pt x="5889" y="1292"/>
-                    <a:pt x="9007" y="0"/>
-                    <a:pt x="12259" y="0"/>
-                  </a:cubicBezTo>
+                    <a:pt x="1174728" y="0"/>
+                  </a:lnTo>
+                  <a:lnTo>
+                    <a:pt x="1174728" y="956734"/>
+                  </a:lnTo>
+                  <a:lnTo>
+                    <a:pt x="0" y="956734"/>
+                  </a:lnTo>
                   <a:close/>
                 </a:path>
               </a:pathLst>
             </a:custGeom>
             <a:solidFill>
-              <a:srgbClr val="EEEAE9"/>
+              <a:srgbClr val="FFFFFF"/>
             </a:solidFill>
           </p:spPr>
         </p:sp>
@@ -7330,10 +7336,10 @@
         </p:nvGrpSpPr>
         <p:grpSpPr>
           <a:xfrm rot="0">
-            <a:off x="6464693" y="5143500"/>
-            <a:ext cx="5741697" cy="4114800"/>
+            <a:off x="6540893" y="5143500"/>
+            <a:ext cx="5665497" cy="4114800"/>
             <a:chOff x="0" y="0"/>
-            <a:chExt cx="1335004" cy="956734"/>
+            <a:chExt cx="1317287" cy="956734"/>
           </a:xfrm>
         </p:grpSpPr>
         <p:sp>
@@ -7345,7 +7351,7 @@
           <p:spPr>
             <a:xfrm flipH="false" flipV="false" rot="0">
               <a:off x="0" y="0"/>
-              <a:ext cx="1335004" cy="956734"/>
+              <a:ext cx="1317287" cy="956734"/>
             </a:xfrm>
             <a:custGeom>
               <a:avLst/>
@@ -7354,63 +7360,25 @@
               <a:cxnLst/>
               <a:rect r="r" b="b" t="t" l="l"/>
               <a:pathLst>
-                <a:path h="956734" w="1335004">
+                <a:path h="956734" w="1317287">
                   <a:moveTo>
-                    <a:pt x="10787" y="0"/>
+                    <a:pt x="0" y="0"/>
                   </a:moveTo>
                   <a:lnTo>
-                    <a:pt x="1324217" y="0"/>
-                  </a:lnTo>
-                  <a:cubicBezTo>
-                    <a:pt x="1327078" y="0"/>
-                    <a:pt x="1329822" y="1136"/>
-                    <a:pt x="1331845" y="3159"/>
-                  </a:cubicBezTo>
-                  <a:cubicBezTo>
-                    <a:pt x="1333868" y="5182"/>
-                    <a:pt x="1335004" y="7926"/>
-                    <a:pt x="1335004" y="10787"/>
-                  </a:cubicBezTo>
-                  <a:lnTo>
-                    <a:pt x="1335004" y="945947"/>
-                  </a:lnTo>
-                  <a:cubicBezTo>
-                    <a:pt x="1335004" y="951904"/>
-                    <a:pt x="1330175" y="956734"/>
-                    <a:pt x="1324217" y="956734"/>
-                  </a:cubicBezTo>
-                  <a:lnTo>
-                    <a:pt x="10787" y="956734"/>
-                  </a:lnTo>
-                  <a:cubicBezTo>
-                    <a:pt x="7926" y="956734"/>
-                    <a:pt x="5182" y="955597"/>
-                    <a:pt x="3159" y="953574"/>
-                  </a:cubicBezTo>
-                  <a:cubicBezTo>
-                    <a:pt x="1136" y="951551"/>
-                    <a:pt x="0" y="948808"/>
-                    <a:pt x="0" y="945947"/>
-                  </a:cubicBezTo>
-                  <a:lnTo>
-                    <a:pt x="0" y="10787"/>
-                  </a:lnTo>
-                  <a:cubicBezTo>
-                    <a:pt x="0" y="7926"/>
-                    <a:pt x="1136" y="5182"/>
-                    <a:pt x="3159" y="3159"/>
-                  </a:cubicBezTo>
-                  <a:cubicBezTo>
-                    <a:pt x="5182" y="1136"/>
-                    <a:pt x="7926" y="0"/>
-                    <a:pt x="10787" y="0"/>
-                  </a:cubicBezTo>
+                    <a:pt x="1317287" y="0"/>
+                  </a:lnTo>
+                  <a:lnTo>
+                    <a:pt x="1317287" y="956734"/>
+                  </a:lnTo>
+                  <a:lnTo>
+                    <a:pt x="0" y="956734"/>
+                  </a:lnTo>
                   <a:close/>
                 </a:path>
               </a:pathLst>
             </a:custGeom>
             <a:solidFill>
-              <a:srgbClr val="EEEAE9"/>
+              <a:srgbClr val="FFFFFF"/>
             </a:solidFill>
           </p:spPr>
         </p:sp>
@@ -7423,7 +7391,7 @@
           <p:spPr>
             <a:xfrm>
               <a:off x="0" y="-76200"/>
-              <a:ext cx="1335004" cy="1032934"/>
+              <a:ext cx="1317287" cy="1032934"/>
             </a:xfrm>
             <a:prstGeom prst="rect">
               <a:avLst/>
@@ -7571,61 +7539,23 @@
               <a:pathLst>
                 <a:path h="956734" w="1111030">
                   <a:moveTo>
-                    <a:pt x="12961" y="0"/>
+                    <a:pt x="0" y="0"/>
                   </a:moveTo>
                   <a:lnTo>
-                    <a:pt x="1098069" y="0"/>
-                  </a:lnTo>
-                  <a:cubicBezTo>
-                    <a:pt x="1105227" y="0"/>
-                    <a:pt x="1111030" y="5803"/>
-                    <a:pt x="1111030" y="12961"/>
-                  </a:cubicBezTo>
-                  <a:lnTo>
-                    <a:pt x="1111030" y="943772"/>
-                  </a:lnTo>
-                  <a:cubicBezTo>
-                    <a:pt x="1111030" y="947210"/>
-                    <a:pt x="1109664" y="950507"/>
-                    <a:pt x="1107234" y="952937"/>
-                  </a:cubicBezTo>
-                  <a:cubicBezTo>
-                    <a:pt x="1104803" y="955368"/>
-                    <a:pt x="1101506" y="956734"/>
-                    <a:pt x="1098069" y="956734"/>
-                  </a:cubicBezTo>
-                  <a:lnTo>
-                    <a:pt x="12961" y="956734"/>
-                  </a:lnTo>
-                  <a:cubicBezTo>
-                    <a:pt x="9524" y="956734"/>
-                    <a:pt x="6227" y="955368"/>
-                    <a:pt x="3796" y="952937"/>
-                  </a:cubicBezTo>
-                  <a:cubicBezTo>
-                    <a:pt x="1366" y="950507"/>
-                    <a:pt x="0" y="947210"/>
-                    <a:pt x="0" y="943772"/>
-                  </a:cubicBezTo>
-                  <a:lnTo>
-                    <a:pt x="0" y="12961"/>
-                  </a:lnTo>
-                  <a:cubicBezTo>
-                    <a:pt x="0" y="9524"/>
-                    <a:pt x="1366" y="6227"/>
-                    <a:pt x="3796" y="3796"/>
-                  </a:cubicBezTo>
-                  <a:cubicBezTo>
-                    <a:pt x="6227" y="1366"/>
-                    <a:pt x="9524" y="0"/>
-                    <a:pt x="12961" y="0"/>
-                  </a:cubicBezTo>
+                    <a:pt x="1111030" y="0"/>
+                  </a:lnTo>
+                  <a:lnTo>
+                    <a:pt x="1111030" y="956734"/>
+                  </a:lnTo>
+                  <a:lnTo>
+                    <a:pt x="0" y="956734"/>
+                  </a:lnTo>
                   <a:close/>
                 </a:path>
               </a:pathLst>
             </a:custGeom>
             <a:solidFill>
-              <a:srgbClr val="EEEAE9"/>
+              <a:srgbClr val="FFFFFF"/>
             </a:solidFill>
           </p:spPr>
         </p:sp>
@@ -7852,7 +7782,7 @@
         </p:nvGrpSpPr>
         <p:grpSpPr>
           <a:xfrm rot="0">
-            <a:off x="5469189" y="6661244"/>
+            <a:off x="5500146" y="6661244"/>
             <a:ext cx="869445" cy="539656"/>
             <a:chOff x="0" y="0"/>
             <a:chExt cx="736600" cy="457200"/>
@@ -8050,7 +7980,7 @@
         <p:spPr>
           <a:xfrm rot="0">
             <a:off x="1587589" y="1117644"/>
-            <a:ext cx="9308329" cy="796391"/>
+            <a:ext cx="10250962" cy="796391"/>
           </a:xfrm>
           <a:prstGeom prst="rect">
             <a:avLst/>
@@ -8080,7 +8010,7 @@
                 <a:cs typeface="Fraunces"/>
                 <a:sym typeface="Fraunces"/>
               </a:rPr>
-              <a:t>TECNOLOGÍAS</a:t>
+              <a:t>STACK TECNOLÓGICO</a:t>
             </a:r>
           </a:p>
         </p:txBody>
@@ -8134,7 +8064,7 @@
         </p:nvSpPr>
         <p:spPr>
           <a:xfrm rot="0">
-            <a:off x="5459664" y="6376255"/>
+            <a:off x="5485190" y="6376255"/>
             <a:ext cx="899357" cy="272198"/>
           </a:xfrm>
           <a:prstGeom prst="rect">
@@ -8248,10 +8178,10 @@
         </p:nvGrpSpPr>
         <p:grpSpPr>
           <a:xfrm rot="0">
-            <a:off x="1357312" y="1028700"/>
-            <a:ext cx="15591759" cy="8229600"/>
+            <a:off x="-5113308" y="628226"/>
+            <a:ext cx="19354610" cy="2018746"/>
             <a:chOff x="0" y="0"/>
-            <a:chExt cx="4106471" cy="2167467"/>
+            <a:chExt cx="1876002" cy="195673"/>
           </a:xfrm>
         </p:grpSpPr>
         <p:sp>
@@ -8263,7 +8193,7 @@
           <p:spPr>
             <a:xfrm flipH="false" flipV="false" rot="0">
               <a:off x="0" y="0"/>
-              <a:ext cx="4106471" cy="2167467"/>
+              <a:ext cx="1876002" cy="195673"/>
             </a:xfrm>
             <a:custGeom>
               <a:avLst/>
@@ -8272,66 +8202,34 @@
               <a:cxnLst/>
               <a:rect r="r" b="b" t="t" l="l"/>
               <a:pathLst>
-                <a:path h="2167467" w="4106471">
+                <a:path h="195673" w="1876002">
                   <a:moveTo>
-                    <a:pt x="12413" y="0"/>
+                    <a:pt x="1672802" y="0"/>
                   </a:moveTo>
                   <a:lnTo>
-                    <a:pt x="4094058" y="0"/>
-                  </a:lnTo>
-                  <a:cubicBezTo>
-                    <a:pt x="4100914" y="0"/>
-                    <a:pt x="4106471" y="5558"/>
-                    <a:pt x="4106471" y="12413"/>
-                  </a:cubicBezTo>
-                  <a:lnTo>
-                    <a:pt x="4106471" y="2155053"/>
-                  </a:lnTo>
-                  <a:cubicBezTo>
-                    <a:pt x="4106471" y="2158346"/>
-                    <a:pt x="4105164" y="2161503"/>
-                    <a:pt x="4102836" y="2163831"/>
-                  </a:cubicBezTo>
-                  <a:cubicBezTo>
-                    <a:pt x="4100507" y="2166159"/>
-                    <a:pt x="4097350" y="2167467"/>
-                    <a:pt x="4094058" y="2167467"/>
-                  </a:cubicBezTo>
-                  <a:lnTo>
-                    <a:pt x="12413" y="2167467"/>
-                  </a:lnTo>
-                  <a:cubicBezTo>
-                    <a:pt x="9121" y="2167467"/>
-                    <a:pt x="5964" y="2166159"/>
-                    <a:pt x="3636" y="2163831"/>
-                  </a:cubicBezTo>
-                  <a:cubicBezTo>
-                    <a:pt x="1308" y="2161503"/>
-                    <a:pt x="0" y="2158346"/>
-                    <a:pt x="0" y="2155053"/>
-                  </a:cubicBezTo>
-                  <a:lnTo>
-                    <a:pt x="0" y="12413"/>
-                  </a:lnTo>
-                  <a:cubicBezTo>
-                    <a:pt x="0" y="9121"/>
-                    <a:pt x="1308" y="5964"/>
-                    <a:pt x="3636" y="3636"/>
-                  </a:cubicBezTo>
-                  <a:cubicBezTo>
-                    <a:pt x="5964" y="1308"/>
-                    <a:pt x="9121" y="0"/>
-                    <a:pt x="12413" y="0"/>
-                  </a:cubicBezTo>
+                    <a:pt x="0" y="0"/>
+                  </a:lnTo>
+                  <a:lnTo>
+                    <a:pt x="203200" y="195673"/>
+                  </a:lnTo>
+                  <a:lnTo>
+                    <a:pt x="1876002" y="195673"/>
+                  </a:lnTo>
+                  <a:lnTo>
+                    <a:pt x="1672802" y="0"/>
+                  </a:lnTo>
                   <a:close/>
                 </a:path>
               </a:pathLst>
             </a:custGeom>
             <a:solidFill>
-              <a:srgbClr val="FFFFFF">
-                <a:alpha val="86667"/>
-              </a:srgbClr>
+              <a:srgbClr val="FFFFFF"/>
             </a:solidFill>
+            <a:ln cap="sq">
+              <a:noFill/>
+              <a:prstDash val="solid"/>
+              <a:miter/>
+            </a:ln>
           </p:spPr>
         </p:sp>
         <p:sp>
@@ -8342,8 +8240,8 @@
           </p:nvSpPr>
           <p:spPr>
             <a:xfrm>
-              <a:off x="0" y="-19050"/>
-              <a:ext cx="4106471" cy="2186517"/>
+              <a:off x="101600" y="-19050"/>
+              <a:ext cx="1672802" cy="214723"/>
             </a:xfrm>
             <a:prstGeom prst="rect">
               <a:avLst/>
@@ -8353,25 +8251,683 @@
             <a:bodyPr anchor="ctr" rtlCol="false" tIns="50800" lIns="50800" bIns="50800" rIns="50800"/>
             <a:lstStyle/>
             <a:p>
-              <a:pPr algn="ctr">
+              <a:pPr algn="ctr" marL="0" indent="0" lvl="0">
                 <a:lnSpc>
                   <a:spcPts val="2859"/>
                 </a:lnSpc>
+                <a:spcBef>
+                  <a:spcPct val="0"/>
+                </a:spcBef>
               </a:pPr>
             </a:p>
           </p:txBody>
         </p:sp>
       </p:grpSp>
-      <p:sp>
-        <p:nvSpPr>
-          <p:cNvPr name="Freeform 5" id="5"/>
+      <p:grpSp>
+        <p:nvGrpSpPr>
+          <p:cNvPr name="Group 5" id="5"/>
+          <p:cNvGrpSpPr/>
+          <p:nvPr/>
+        </p:nvGrpSpPr>
+        <p:grpSpPr>
+          <a:xfrm rot="0">
+            <a:off x="548207" y="3230295"/>
+            <a:ext cx="4068484" cy="1325286"/>
+            <a:chOff x="0" y="0"/>
+            <a:chExt cx="945965" cy="308143"/>
+          </a:xfrm>
+        </p:grpSpPr>
+        <p:sp>
+          <p:nvSpPr>
+            <p:cNvPr name="Freeform 6" id="6"/>
+            <p:cNvSpPr/>
+            <p:nvPr/>
+          </p:nvSpPr>
+          <p:spPr>
+            <a:xfrm flipH="false" flipV="false" rot="0">
+              <a:off x="0" y="0"/>
+              <a:ext cx="945965" cy="308143"/>
+            </a:xfrm>
+            <a:custGeom>
+              <a:avLst/>
+              <a:gdLst/>
+              <a:ahLst/>
+              <a:cxnLst/>
+              <a:rect r="r" b="b" t="t" l="l"/>
+              <a:pathLst>
+                <a:path h="308143" w="945965">
+                  <a:moveTo>
+                    <a:pt x="0" y="0"/>
+                  </a:moveTo>
+                  <a:lnTo>
+                    <a:pt x="945965" y="0"/>
+                  </a:lnTo>
+                  <a:lnTo>
+                    <a:pt x="945965" y="308143"/>
+                  </a:lnTo>
+                  <a:lnTo>
+                    <a:pt x="0" y="308143"/>
+                  </a:lnTo>
+                  <a:close/>
+                </a:path>
+              </a:pathLst>
+            </a:custGeom>
+            <a:solidFill>
+              <a:srgbClr val="93D14B"/>
+            </a:solidFill>
+          </p:spPr>
+        </p:sp>
+        <p:sp>
+          <p:nvSpPr>
+            <p:cNvPr name="TextBox 7" id="7"/>
+            <p:cNvSpPr txBox="true"/>
+            <p:nvPr/>
+          </p:nvSpPr>
+          <p:spPr>
+            <a:xfrm>
+              <a:off x="0" y="-76200"/>
+              <a:ext cx="945965" cy="384343"/>
+            </a:xfrm>
+            <a:prstGeom prst="rect">
+              <a:avLst/>
+            </a:prstGeom>
+          </p:spPr>
+          <p:txBody>
+            <a:bodyPr anchor="t" rtlCol="false" tIns="50800" lIns="50800" bIns="50800" rIns="50800"/>
+            <a:lstStyle/>
+            <a:p>
+              <a:pPr algn="ctr" marL="0" indent="0" lvl="0">
+                <a:lnSpc>
+                  <a:spcPts val="4114"/>
+                </a:lnSpc>
+                <a:spcBef>
+                  <a:spcPct val="0"/>
+                </a:spcBef>
+              </a:pPr>
+              <a:r>
+                <a:rPr lang="en-US" b="true" sz="2981" spc="29">
+                  <a:solidFill>
+                    <a:srgbClr val="FFFFFF"/>
+                  </a:solidFill>
+                  <a:latin typeface="Poppins Bold"/>
+                  <a:ea typeface="Poppins Bold"/>
+                  <a:cs typeface="Poppins Bold"/>
+                  <a:sym typeface="Poppins Bold"/>
+                </a:rPr>
+                <a:t>Asistente virtual contextual</a:t>
+              </a:r>
+            </a:p>
+          </p:txBody>
+        </p:sp>
+      </p:grpSp>
+      <p:grpSp>
+        <p:nvGrpSpPr>
+          <p:cNvPr name="Group 8" id="8"/>
+          <p:cNvGrpSpPr/>
+          <p:nvPr/>
+        </p:nvGrpSpPr>
+        <p:grpSpPr>
+          <a:xfrm rot="0">
+            <a:off x="5301385" y="3230295"/>
+            <a:ext cx="4695526" cy="1325286"/>
+            <a:chOff x="0" y="0"/>
+            <a:chExt cx="1091759" cy="308143"/>
+          </a:xfrm>
+        </p:grpSpPr>
+        <p:sp>
+          <p:nvSpPr>
+            <p:cNvPr name="Freeform 9" id="9"/>
+            <p:cNvSpPr/>
+            <p:nvPr/>
+          </p:nvSpPr>
+          <p:spPr>
+            <a:xfrm flipH="false" flipV="false" rot="0">
+              <a:off x="0" y="0"/>
+              <a:ext cx="1091759" cy="308143"/>
+            </a:xfrm>
+            <a:custGeom>
+              <a:avLst/>
+              <a:gdLst/>
+              <a:ahLst/>
+              <a:cxnLst/>
+              <a:rect r="r" b="b" t="t" l="l"/>
+              <a:pathLst>
+                <a:path h="308143" w="1091759">
+                  <a:moveTo>
+                    <a:pt x="0" y="0"/>
+                  </a:moveTo>
+                  <a:lnTo>
+                    <a:pt x="1091759" y="0"/>
+                  </a:lnTo>
+                  <a:lnTo>
+                    <a:pt x="1091759" y="308143"/>
+                  </a:lnTo>
+                  <a:lnTo>
+                    <a:pt x="0" y="308143"/>
+                  </a:lnTo>
+                  <a:close/>
+                </a:path>
+              </a:pathLst>
+            </a:custGeom>
+            <a:solidFill>
+              <a:srgbClr val="93D14B"/>
+            </a:solidFill>
+          </p:spPr>
+        </p:sp>
+        <p:sp>
+          <p:nvSpPr>
+            <p:cNvPr name="TextBox 10" id="10"/>
+            <p:cNvSpPr txBox="true"/>
+            <p:nvPr/>
+          </p:nvSpPr>
+          <p:spPr>
+            <a:xfrm>
+              <a:off x="0" y="-76200"/>
+              <a:ext cx="1091759" cy="384343"/>
+            </a:xfrm>
+            <a:prstGeom prst="rect">
+              <a:avLst/>
+            </a:prstGeom>
+          </p:spPr>
+          <p:txBody>
+            <a:bodyPr anchor="t" rtlCol="false" tIns="50800" lIns="50800" bIns="50800" rIns="50800"/>
+            <a:lstStyle/>
+            <a:p>
+              <a:pPr algn="ctr" marL="0" indent="0" lvl="0">
+                <a:lnSpc>
+                  <a:spcPts val="4114"/>
+                </a:lnSpc>
+                <a:spcBef>
+                  <a:spcPct val="0"/>
+                </a:spcBef>
+              </a:pPr>
+              <a:r>
+                <a:rPr lang="en-US" b="true" sz="2981" spc="29">
+                  <a:solidFill>
+                    <a:srgbClr val="FFFFFF"/>
+                  </a:solidFill>
+                  <a:latin typeface="Poppins Bold"/>
+                  <a:ea typeface="Poppins Bold"/>
+                  <a:cs typeface="Poppins Bold"/>
+                  <a:sym typeface="Poppins Bold"/>
+                </a:rPr>
+                <a:t>Alertas en tiempo real mediante Bot API</a:t>
+              </a:r>
+            </a:p>
+          </p:txBody>
+        </p:sp>
+      </p:grpSp>
+      <p:grpSp>
+        <p:nvGrpSpPr>
+          <p:cNvPr name="Group 11" id="11"/>
+          <p:cNvGrpSpPr/>
+          <p:nvPr/>
+        </p:nvGrpSpPr>
+        <p:grpSpPr>
+          <a:xfrm rot="0">
+            <a:off x="11852097" y="3230295"/>
+            <a:ext cx="4778411" cy="859690"/>
+            <a:chOff x="0" y="0"/>
+            <a:chExt cx="1111030" cy="199887"/>
+          </a:xfrm>
+        </p:grpSpPr>
+        <p:sp>
+          <p:nvSpPr>
+            <p:cNvPr name="Freeform 12" id="12"/>
+            <p:cNvSpPr/>
+            <p:nvPr/>
+          </p:nvSpPr>
+          <p:spPr>
+            <a:xfrm flipH="false" flipV="false" rot="0">
+              <a:off x="0" y="0"/>
+              <a:ext cx="1111030" cy="199887"/>
+            </a:xfrm>
+            <a:custGeom>
+              <a:avLst/>
+              <a:gdLst/>
+              <a:ahLst/>
+              <a:cxnLst/>
+              <a:rect r="r" b="b" t="t" l="l"/>
+              <a:pathLst>
+                <a:path h="199887" w="1111030">
+                  <a:moveTo>
+                    <a:pt x="0" y="0"/>
+                  </a:moveTo>
+                  <a:lnTo>
+                    <a:pt x="1111030" y="0"/>
+                  </a:lnTo>
+                  <a:lnTo>
+                    <a:pt x="1111030" y="199887"/>
+                  </a:lnTo>
+                  <a:lnTo>
+                    <a:pt x="0" y="199887"/>
+                  </a:lnTo>
+                  <a:close/>
+                </a:path>
+              </a:pathLst>
+            </a:custGeom>
+            <a:solidFill>
+              <a:srgbClr val="93D14B"/>
+            </a:solidFill>
+          </p:spPr>
+        </p:sp>
+        <p:sp>
+          <p:nvSpPr>
+            <p:cNvPr name="TextBox 13" id="13"/>
+            <p:cNvSpPr txBox="true"/>
+            <p:nvPr/>
+          </p:nvSpPr>
+          <p:spPr>
+            <a:xfrm>
+              <a:off x="0" y="-76200"/>
+              <a:ext cx="1111030" cy="276087"/>
+            </a:xfrm>
+            <a:prstGeom prst="rect">
+              <a:avLst/>
+            </a:prstGeom>
+          </p:spPr>
+          <p:txBody>
+            <a:bodyPr anchor="t" rtlCol="false" tIns="50800" lIns="50800" bIns="50800" rIns="50800"/>
+            <a:lstStyle/>
+            <a:p>
+              <a:pPr algn="ctr" marL="0" indent="0" lvl="0">
+                <a:lnSpc>
+                  <a:spcPts val="4114"/>
+                </a:lnSpc>
+                <a:spcBef>
+                  <a:spcPct val="0"/>
+                </a:spcBef>
+              </a:pPr>
+              <a:r>
+                <a:rPr lang="en-US" b="true" sz="2981" spc="29">
+                  <a:solidFill>
+                    <a:srgbClr val="FFFFFF"/>
+                  </a:solidFill>
+                  <a:latin typeface="Poppins Bold"/>
+                  <a:ea typeface="Poppins Bold"/>
+                  <a:cs typeface="Poppins Bold"/>
+                  <a:sym typeface="Poppins Bold"/>
+                </a:rPr>
+                <a:t>Seguridad Avanzada</a:t>
+              </a:r>
+            </a:p>
+          </p:txBody>
+        </p:sp>
+      </p:grpSp>
+      <p:grpSp>
+        <p:nvGrpSpPr>
+          <p:cNvPr name="Group 14" id="14"/>
+          <p:cNvGrpSpPr/>
+          <p:nvPr/>
+        </p:nvGrpSpPr>
+        <p:grpSpPr>
+          <a:xfrm rot="0">
+            <a:off x="227068" y="5143500"/>
+            <a:ext cx="4710763" cy="3386070"/>
+            <a:chOff x="0" y="0"/>
+            <a:chExt cx="1095301" cy="787296"/>
+          </a:xfrm>
+        </p:grpSpPr>
+        <p:sp>
+          <p:nvSpPr>
+            <p:cNvPr name="Freeform 15" id="15"/>
+            <p:cNvSpPr/>
+            <p:nvPr/>
+          </p:nvSpPr>
+          <p:spPr>
+            <a:xfrm flipH="false" flipV="false" rot="0">
+              <a:off x="0" y="0"/>
+              <a:ext cx="1095301" cy="787296"/>
+            </a:xfrm>
+            <a:custGeom>
+              <a:avLst/>
+              <a:gdLst/>
+              <a:ahLst/>
+              <a:cxnLst/>
+              <a:rect r="r" b="b" t="t" l="l"/>
+              <a:pathLst>
+                <a:path h="787296" w="1095301">
+                  <a:moveTo>
+                    <a:pt x="0" y="0"/>
+                  </a:moveTo>
+                  <a:lnTo>
+                    <a:pt x="1095301" y="0"/>
+                  </a:lnTo>
+                  <a:lnTo>
+                    <a:pt x="1095301" y="787296"/>
+                  </a:lnTo>
+                  <a:lnTo>
+                    <a:pt x="0" y="787296"/>
+                  </a:lnTo>
+                  <a:close/>
+                </a:path>
+              </a:pathLst>
+            </a:custGeom>
+            <a:solidFill>
+              <a:srgbClr val="FFFFFF"/>
+            </a:solidFill>
+          </p:spPr>
+        </p:sp>
+        <p:sp>
+          <p:nvSpPr>
+            <p:cNvPr name="TextBox 16" id="16"/>
+            <p:cNvSpPr txBox="true"/>
+            <p:nvPr/>
+          </p:nvSpPr>
+          <p:spPr>
+            <a:xfrm>
+              <a:off x="0" y="-76200"/>
+              <a:ext cx="1095301" cy="863496"/>
+            </a:xfrm>
+            <a:prstGeom prst="rect">
+              <a:avLst/>
+            </a:prstGeom>
+          </p:spPr>
+          <p:txBody>
+            <a:bodyPr anchor="t" rtlCol="false" tIns="50800" lIns="50800" bIns="50800" rIns="50800"/>
+            <a:lstStyle/>
+            <a:p>
+              <a:pPr algn="ctr" marL="0" indent="0" lvl="0">
+                <a:lnSpc>
+                  <a:spcPts val="4114"/>
+                </a:lnSpc>
+                <a:spcBef>
+                  <a:spcPct val="0"/>
+                </a:spcBef>
+              </a:pPr>
+            </a:p>
+          </p:txBody>
+        </p:sp>
+      </p:grpSp>
+      <p:grpSp>
+        <p:nvGrpSpPr>
+          <p:cNvPr name="Group 17" id="17"/>
+          <p:cNvGrpSpPr/>
+          <p:nvPr/>
+        </p:nvGrpSpPr>
+        <p:grpSpPr>
+          <a:xfrm rot="0">
+            <a:off x="5257649" y="5138904"/>
+            <a:ext cx="4739262" cy="3390666"/>
+            <a:chOff x="0" y="0"/>
+            <a:chExt cx="1101928" cy="788365"/>
+          </a:xfrm>
+        </p:grpSpPr>
+        <p:sp>
+          <p:nvSpPr>
+            <p:cNvPr name="Freeform 18" id="18"/>
+            <p:cNvSpPr/>
+            <p:nvPr/>
+          </p:nvSpPr>
+          <p:spPr>
+            <a:xfrm flipH="false" flipV="false" rot="0">
+              <a:off x="0" y="0"/>
+              <a:ext cx="1101928" cy="788365"/>
+            </a:xfrm>
+            <a:custGeom>
+              <a:avLst/>
+              <a:gdLst/>
+              <a:ahLst/>
+              <a:cxnLst/>
+              <a:rect r="r" b="b" t="t" l="l"/>
+              <a:pathLst>
+                <a:path h="788365" w="1101928">
+                  <a:moveTo>
+                    <a:pt x="0" y="0"/>
+                  </a:moveTo>
+                  <a:lnTo>
+                    <a:pt x="1101928" y="0"/>
+                  </a:lnTo>
+                  <a:lnTo>
+                    <a:pt x="1101928" y="788365"/>
+                  </a:lnTo>
+                  <a:lnTo>
+                    <a:pt x="0" y="788365"/>
+                  </a:lnTo>
+                  <a:close/>
+                </a:path>
+              </a:pathLst>
+            </a:custGeom>
+            <a:solidFill>
+              <a:srgbClr val="FFFFFF"/>
+            </a:solidFill>
+          </p:spPr>
+        </p:sp>
+        <p:sp>
+          <p:nvSpPr>
+            <p:cNvPr name="TextBox 19" id="19"/>
+            <p:cNvSpPr txBox="true"/>
+            <p:nvPr/>
+          </p:nvSpPr>
+          <p:spPr>
+            <a:xfrm>
+              <a:off x="0" y="-76200"/>
+              <a:ext cx="1101928" cy="864565"/>
+            </a:xfrm>
+            <a:prstGeom prst="rect">
+              <a:avLst/>
+            </a:prstGeom>
+          </p:spPr>
+          <p:txBody>
+            <a:bodyPr anchor="t" rtlCol="false" tIns="50800" lIns="50800" bIns="50800" rIns="50800"/>
+            <a:lstStyle/>
+            <a:p>
+              <a:pPr algn="ctr" marL="0" indent="0" lvl="0">
+                <a:lnSpc>
+                  <a:spcPts val="4114"/>
+                </a:lnSpc>
+                <a:spcBef>
+                  <a:spcPct val="0"/>
+                </a:spcBef>
+              </a:pPr>
+            </a:p>
+          </p:txBody>
+        </p:sp>
+      </p:grpSp>
+      <p:grpSp>
+        <p:nvGrpSpPr>
+          <p:cNvPr name="Group 20" id="20"/>
+          <p:cNvGrpSpPr/>
+          <p:nvPr/>
+        </p:nvGrpSpPr>
+        <p:grpSpPr>
+          <a:xfrm rot="0">
+            <a:off x="10342878" y="4555581"/>
+            <a:ext cx="3600017" cy="909828"/>
+            <a:chOff x="0" y="0"/>
+            <a:chExt cx="837041" cy="211544"/>
+          </a:xfrm>
+        </p:grpSpPr>
+        <p:sp>
+          <p:nvSpPr>
+            <p:cNvPr name="Freeform 21" id="21"/>
+            <p:cNvSpPr/>
+            <p:nvPr/>
+          </p:nvSpPr>
+          <p:spPr>
+            <a:xfrm flipH="false" flipV="false" rot="0">
+              <a:off x="0" y="0"/>
+              <a:ext cx="837041" cy="211545"/>
+            </a:xfrm>
+            <a:custGeom>
+              <a:avLst/>
+              <a:gdLst/>
+              <a:ahLst/>
+              <a:cxnLst/>
+              <a:rect r="r" b="b" t="t" l="l"/>
+              <a:pathLst>
+                <a:path h="211545" w="837041">
+                  <a:moveTo>
+                    <a:pt x="0" y="0"/>
+                  </a:moveTo>
+                  <a:lnTo>
+                    <a:pt x="837041" y="0"/>
+                  </a:lnTo>
+                  <a:lnTo>
+                    <a:pt x="837041" y="211545"/>
+                  </a:lnTo>
+                  <a:lnTo>
+                    <a:pt x="0" y="211545"/>
+                  </a:lnTo>
+                  <a:close/>
+                </a:path>
+              </a:pathLst>
+            </a:custGeom>
+            <a:solidFill>
+              <a:srgbClr val="93D14B"/>
+            </a:solidFill>
+          </p:spPr>
+        </p:sp>
+        <p:sp>
+          <p:nvSpPr>
+            <p:cNvPr name="TextBox 22" id="22"/>
+            <p:cNvSpPr txBox="true"/>
+            <p:nvPr/>
+          </p:nvSpPr>
+          <p:spPr>
+            <a:xfrm>
+              <a:off x="0" y="-57150"/>
+              <a:ext cx="837041" cy="268694"/>
+            </a:xfrm>
+            <a:prstGeom prst="rect">
+              <a:avLst/>
+            </a:prstGeom>
+          </p:spPr>
+          <p:txBody>
+            <a:bodyPr anchor="t" rtlCol="false" tIns="50800" lIns="50800" bIns="50800" rIns="50800"/>
+            <a:lstStyle/>
+            <a:p>
+              <a:pPr algn="ctr" marL="0" indent="0" lvl="0">
+                <a:lnSpc>
+                  <a:spcPts val="2760"/>
+                </a:lnSpc>
+                <a:spcBef>
+                  <a:spcPct val="0"/>
+                </a:spcBef>
+              </a:pPr>
+              <a:r>
+                <a:rPr lang="en-US" b="true" sz="2000" spc="20">
+                  <a:solidFill>
+                    <a:srgbClr val="FFFFFF"/>
+                  </a:solidFill>
+                  <a:latin typeface="Poppins Bold"/>
+                  <a:ea typeface="Poppins Bold"/>
+                  <a:cs typeface="Poppins Bold"/>
+                  <a:sym typeface="Poppins Bold"/>
+                </a:rPr>
+                <a:t>Verificación de Identidad (Proof of Ownership)</a:t>
+              </a:r>
+            </a:p>
+          </p:txBody>
+        </p:sp>
+      </p:grpSp>
+      <p:grpSp>
+        <p:nvGrpSpPr>
+          <p:cNvPr name="Group 23" id="23"/>
+          <p:cNvGrpSpPr/>
+          <p:nvPr/>
+        </p:nvGrpSpPr>
+        <p:grpSpPr>
+          <a:xfrm rot="0">
+            <a:off x="14239792" y="5010495"/>
+            <a:ext cx="3861894" cy="909828"/>
+            <a:chOff x="0" y="0"/>
+            <a:chExt cx="897930" cy="211544"/>
+          </a:xfrm>
+        </p:grpSpPr>
+        <p:sp>
+          <p:nvSpPr>
+            <p:cNvPr name="Freeform 24" id="24"/>
+            <p:cNvSpPr/>
+            <p:nvPr/>
+          </p:nvSpPr>
+          <p:spPr>
+            <a:xfrm flipH="false" flipV="false" rot="0">
+              <a:off x="0" y="0"/>
+              <a:ext cx="897930" cy="211545"/>
+            </a:xfrm>
+            <a:custGeom>
+              <a:avLst/>
+              <a:gdLst/>
+              <a:ahLst/>
+              <a:cxnLst/>
+              <a:rect r="r" b="b" t="t" l="l"/>
+              <a:pathLst>
+                <a:path h="211545" w="897930">
+                  <a:moveTo>
+                    <a:pt x="0" y="0"/>
+                  </a:moveTo>
+                  <a:lnTo>
+                    <a:pt x="897930" y="0"/>
+                  </a:lnTo>
+                  <a:lnTo>
+                    <a:pt x="897930" y="211545"/>
+                  </a:lnTo>
+                  <a:lnTo>
+                    <a:pt x="0" y="211545"/>
+                  </a:lnTo>
+                  <a:close/>
+                </a:path>
+              </a:pathLst>
+            </a:custGeom>
+            <a:solidFill>
+              <a:srgbClr val="93D14B"/>
+            </a:solidFill>
+          </p:spPr>
+        </p:sp>
+        <p:sp>
+          <p:nvSpPr>
+            <p:cNvPr name="TextBox 25" id="25"/>
+            <p:cNvSpPr txBox="true"/>
+            <p:nvPr/>
+          </p:nvSpPr>
+          <p:spPr>
+            <a:xfrm>
+              <a:off x="0" y="-57150"/>
+              <a:ext cx="897930" cy="268694"/>
+            </a:xfrm>
+            <a:prstGeom prst="rect">
+              <a:avLst/>
+            </a:prstGeom>
+          </p:spPr>
+          <p:txBody>
+            <a:bodyPr anchor="t" rtlCol="false" tIns="50800" lIns="50800" bIns="50800" rIns="50800"/>
+            <a:lstStyle/>
+            <a:p>
+              <a:pPr algn="ctr" marL="0" indent="0" lvl="0">
+                <a:lnSpc>
+                  <a:spcPts val="2760"/>
+                </a:lnSpc>
+                <a:spcBef>
+                  <a:spcPct val="0"/>
+                </a:spcBef>
+              </a:pPr>
+              <a:r>
+                <a:rPr lang="en-US" b="true" sz="2000" spc="20">
+                  <a:solidFill>
+                    <a:srgbClr val="FFFFFF"/>
+                  </a:solidFill>
+                  <a:latin typeface="Poppins Bold"/>
+                  <a:ea typeface="Poppins Bold"/>
+                  <a:cs typeface="Poppins Bold"/>
+                  <a:sym typeface="Poppins Bold"/>
+                </a:rPr>
+                <a:t>MFA (Multi-Factor Authentication)</a:t>
+              </a:r>
+            </a:p>
+          </p:txBody>
+        </p:sp>
+      </p:grpSp>
+      <p:sp>
+        <p:nvSpPr>
+          <p:cNvPr name="Freeform 26" id="26"/>
           <p:cNvSpPr/>
           <p:nvPr/>
         </p:nvSpPr>
         <p:spPr>
           <a:xfrm flipH="false" flipV="false" rot="0">
-            <a:off x="2314384" y="3331871"/>
-            <a:ext cx="1516533" cy="1254586"/>
+            <a:off x="1573972" y="5773408"/>
+            <a:ext cx="2016955" cy="2016955"/>
           </a:xfrm>
           <a:custGeom>
             <a:avLst/>
@@ -8380,18 +8936,18 @@
             <a:cxnLst/>
             <a:rect r="r" b="b" t="t" l="l"/>
             <a:pathLst>
-              <a:path h="1254586" w="1516533">
+              <a:path h="2016955" w="2016955">
                 <a:moveTo>
                   <a:pt x="0" y="0"/>
                 </a:moveTo>
                 <a:lnTo>
-                  <a:pt x="1516533" y="0"/>
-                </a:lnTo>
-                <a:lnTo>
-                  <a:pt x="1516533" y="1254586"/>
-                </a:lnTo>
-                <a:lnTo>
-                  <a:pt x="0" y="1254586"/>
+                  <a:pt x="2016955" y="0"/>
+                </a:lnTo>
+                <a:lnTo>
+                  <a:pt x="2016955" y="2016955"/>
+                </a:lnTo>
+                <a:lnTo>
+                  <a:pt x="0" y="2016955"/>
                 </a:lnTo>
                 <a:lnTo>
                   <a:pt x="0" y="0"/>
@@ -8401,13 +8957,7 @@
             </a:pathLst>
           </a:custGeom>
           <a:blipFill>
-            <a:blip r:embed="rId2">
-              <a:extLst>
-                <a:ext uri="{96DAC541-7B7A-43D3-8B79-37D633B846F1}">
-                  <asvg:svgBlip xmlns:asvg="http://schemas.microsoft.com/office/drawing/2016/SVG/main" r:embed="rId3"/>
-                </a:ext>
-              </a:extLst>
-            </a:blip>
+            <a:blip r:embed="rId2"/>
             <a:stretch>
               <a:fillRect l="0" t="0" r="0" b="0"/>
             </a:stretch>
@@ -8416,14 +8966,14 @@
       </p:sp>
       <p:sp>
         <p:nvSpPr>
-          <p:cNvPr name="Freeform 6" id="6"/>
+          <p:cNvPr name="Freeform 27" id="27"/>
           <p:cNvSpPr/>
           <p:nvPr/>
         </p:nvSpPr>
         <p:spPr>
           <a:xfrm flipH="false" flipV="false" rot="0">
-            <a:off x="6177532" y="3179204"/>
-            <a:ext cx="1150967" cy="1559919"/>
+            <a:off x="6835215" y="5863138"/>
+            <a:ext cx="1927226" cy="1927226"/>
           </a:xfrm>
           <a:custGeom>
             <a:avLst/>
@@ -8432,18 +8982,18 @@
             <a:cxnLst/>
             <a:rect r="r" b="b" t="t" l="l"/>
             <a:pathLst>
-              <a:path h="1559919" w="1150967">
+              <a:path h="1927226" w="1927226">
                 <a:moveTo>
                   <a:pt x="0" y="0"/>
                 </a:moveTo>
                 <a:lnTo>
-                  <a:pt x="1150967" y="0"/>
-                </a:lnTo>
-                <a:lnTo>
-                  <a:pt x="1150967" y="1559919"/>
-                </a:lnTo>
-                <a:lnTo>
-                  <a:pt x="0" y="1559919"/>
+                  <a:pt x="1927226" y="0"/>
+                </a:lnTo>
+                <a:lnTo>
+                  <a:pt x="1927226" y="1927225"/>
+                </a:lnTo>
+                <a:lnTo>
+                  <a:pt x="0" y="1927225"/>
                 </a:lnTo>
                 <a:lnTo>
                   <a:pt x="0" y="0"/>
@@ -8453,29 +9003,193 @@
             </a:pathLst>
           </a:custGeom>
           <a:blipFill>
-            <a:blip r:embed="rId4">
-              <a:extLst>
-                <a:ext uri="{96DAC541-7B7A-43D3-8B79-37D633B846F1}">
-                  <asvg:svgBlip xmlns:asvg="http://schemas.microsoft.com/office/drawing/2016/SVG/main" r:embed="rId5"/>
-                </a:ext>
-              </a:extLst>
-            </a:blip>
+            <a:blip r:embed="rId3"/>
             <a:stretch>
               <a:fillRect l="0" t="0" r="0" b="0"/>
             </a:stretch>
           </a:blipFill>
         </p:spPr>
       </p:sp>
-      <p:sp>
-        <p:nvSpPr>
-          <p:cNvPr name="Freeform 7" id="7"/>
+      <p:grpSp>
+        <p:nvGrpSpPr>
+          <p:cNvPr name="Group 28" id="28"/>
+          <p:cNvGrpSpPr/>
+          <p:nvPr/>
+        </p:nvGrpSpPr>
+        <p:grpSpPr>
+          <a:xfrm rot="0">
+            <a:off x="10388880" y="5673158"/>
+            <a:ext cx="3508012" cy="2856412"/>
+            <a:chOff x="0" y="0"/>
+            <a:chExt cx="815649" cy="664145"/>
+          </a:xfrm>
+        </p:grpSpPr>
+        <p:sp>
+          <p:nvSpPr>
+            <p:cNvPr name="Freeform 29" id="29"/>
+            <p:cNvSpPr/>
+            <p:nvPr/>
+          </p:nvSpPr>
+          <p:spPr>
+            <a:xfrm flipH="false" flipV="false" rot="0">
+              <a:off x="0" y="0"/>
+              <a:ext cx="815649" cy="664145"/>
+            </a:xfrm>
+            <a:custGeom>
+              <a:avLst/>
+              <a:gdLst/>
+              <a:ahLst/>
+              <a:cxnLst/>
+              <a:rect r="r" b="b" t="t" l="l"/>
+              <a:pathLst>
+                <a:path h="664145" w="815649">
+                  <a:moveTo>
+                    <a:pt x="0" y="0"/>
+                  </a:moveTo>
+                  <a:lnTo>
+                    <a:pt x="815649" y="0"/>
+                  </a:lnTo>
+                  <a:lnTo>
+                    <a:pt x="815649" y="664145"/>
+                  </a:lnTo>
+                  <a:lnTo>
+                    <a:pt x="0" y="664145"/>
+                  </a:lnTo>
+                  <a:close/>
+                </a:path>
+              </a:pathLst>
+            </a:custGeom>
+            <a:solidFill>
+              <a:srgbClr val="FFFFFF"/>
+            </a:solidFill>
+          </p:spPr>
+        </p:sp>
+        <p:sp>
+          <p:nvSpPr>
+            <p:cNvPr name="TextBox 30" id="30"/>
+            <p:cNvSpPr txBox="true"/>
+            <p:nvPr/>
+          </p:nvSpPr>
+          <p:spPr>
+            <a:xfrm>
+              <a:off x="0" y="-76200"/>
+              <a:ext cx="815649" cy="740345"/>
+            </a:xfrm>
+            <a:prstGeom prst="rect">
+              <a:avLst/>
+            </a:prstGeom>
+          </p:spPr>
+          <p:txBody>
+            <a:bodyPr anchor="t" rtlCol="false" tIns="50800" lIns="50800" bIns="50800" rIns="50800"/>
+            <a:lstStyle/>
+            <a:p>
+              <a:pPr algn="ctr" marL="0" indent="0" lvl="0">
+                <a:lnSpc>
+                  <a:spcPts val="4114"/>
+                </a:lnSpc>
+                <a:spcBef>
+                  <a:spcPct val="0"/>
+                </a:spcBef>
+              </a:pPr>
+            </a:p>
+          </p:txBody>
+        </p:sp>
+      </p:grpSp>
+      <p:grpSp>
+        <p:nvGrpSpPr>
+          <p:cNvPr name="Group 31" id="31"/>
+          <p:cNvGrpSpPr/>
+          <p:nvPr/>
+        </p:nvGrpSpPr>
+        <p:grpSpPr>
+          <a:xfrm rot="0">
+            <a:off x="14287417" y="6128119"/>
+            <a:ext cx="3766644" cy="2401451"/>
+            <a:chOff x="0" y="0"/>
+            <a:chExt cx="875784" cy="558362"/>
+          </a:xfrm>
+        </p:grpSpPr>
+        <p:sp>
+          <p:nvSpPr>
+            <p:cNvPr name="Freeform 32" id="32"/>
+            <p:cNvSpPr/>
+            <p:nvPr/>
+          </p:nvSpPr>
+          <p:spPr>
+            <a:xfrm flipH="false" flipV="false" rot="0">
+              <a:off x="0" y="0"/>
+              <a:ext cx="875784" cy="558362"/>
+            </a:xfrm>
+            <a:custGeom>
+              <a:avLst/>
+              <a:gdLst/>
+              <a:ahLst/>
+              <a:cxnLst/>
+              <a:rect r="r" b="b" t="t" l="l"/>
+              <a:pathLst>
+                <a:path h="558362" w="875784">
+                  <a:moveTo>
+                    <a:pt x="0" y="0"/>
+                  </a:moveTo>
+                  <a:lnTo>
+                    <a:pt x="875784" y="0"/>
+                  </a:lnTo>
+                  <a:lnTo>
+                    <a:pt x="875784" y="558362"/>
+                  </a:lnTo>
+                  <a:lnTo>
+                    <a:pt x="0" y="558362"/>
+                  </a:lnTo>
+                  <a:close/>
+                </a:path>
+              </a:pathLst>
+            </a:custGeom>
+            <a:solidFill>
+              <a:srgbClr val="FFFFFF"/>
+            </a:solidFill>
+          </p:spPr>
+        </p:sp>
+        <p:sp>
+          <p:nvSpPr>
+            <p:cNvPr name="TextBox 33" id="33"/>
+            <p:cNvSpPr txBox="true"/>
+            <p:nvPr/>
+          </p:nvSpPr>
+          <p:spPr>
+            <a:xfrm>
+              <a:off x="0" y="-76200"/>
+              <a:ext cx="875784" cy="634562"/>
+            </a:xfrm>
+            <a:prstGeom prst="rect">
+              <a:avLst/>
+            </a:prstGeom>
+          </p:spPr>
+          <p:txBody>
+            <a:bodyPr anchor="t" rtlCol="false" tIns="50800" lIns="50800" bIns="50800" rIns="50800"/>
+            <a:lstStyle/>
+            <a:p>
+              <a:pPr algn="ctr" marL="0" indent="0" lvl="0">
+                <a:lnSpc>
+                  <a:spcPts val="4114"/>
+                </a:lnSpc>
+                <a:spcBef>
+                  <a:spcPct val="0"/>
+                </a:spcBef>
+              </a:pPr>
+            </a:p>
+          </p:txBody>
+        </p:sp>
+      </p:grpSp>
+      <p:sp>
+        <p:nvSpPr>
+          <p:cNvPr name="Freeform 34" id="34"/>
           <p:cNvSpPr/>
           <p:nvPr/>
         </p:nvSpPr>
         <p:spPr>
           <a:xfrm flipH="false" flipV="false" rot="0">
-            <a:off x="9283937" y="3498338"/>
-            <a:ext cx="1635151" cy="1088119"/>
+            <a:off x="14358666" y="6300917"/>
+            <a:ext cx="3624146" cy="1801066"/>
           </a:xfrm>
           <a:custGeom>
             <a:avLst/>
@@ -8484,18 +9198,18 @@
             <a:cxnLst/>
             <a:rect r="r" b="b" t="t" l="l"/>
             <a:pathLst>
-              <a:path h="1088119" w="1635151">
+              <a:path h="1801066" w="3624146">
                 <a:moveTo>
                   <a:pt x="0" y="0"/>
                 </a:moveTo>
                 <a:lnTo>
-                  <a:pt x="1635151" y="0"/>
-                </a:lnTo>
-                <a:lnTo>
-                  <a:pt x="1635151" y="1088119"/>
-                </a:lnTo>
-                <a:lnTo>
-                  <a:pt x="0" y="1088119"/>
+                  <a:pt x="3624146" y="0"/>
+                </a:lnTo>
+                <a:lnTo>
+                  <a:pt x="3624146" y="1801067"/>
+                </a:lnTo>
+                <a:lnTo>
+                  <a:pt x="0" y="1801067"/>
                 </a:lnTo>
                 <a:lnTo>
                   <a:pt x="0" y="0"/>
@@ -8505,29 +9219,23 @@
             </a:pathLst>
           </a:custGeom>
           <a:blipFill>
-            <a:blip r:embed="rId6">
-              <a:extLst>
-                <a:ext uri="{96DAC541-7B7A-43D3-8B79-37D633B846F1}">
-                  <asvg:svgBlip xmlns:asvg="http://schemas.microsoft.com/office/drawing/2016/SVG/main" r:embed="rId7"/>
-                </a:ext>
-              </a:extLst>
-            </a:blip>
+            <a:blip r:embed="rId4"/>
             <a:stretch>
-              <a:fillRect l="0" t="0" r="0" b="0"/>
+              <a:fillRect l="0" t="0" r="-11816" b="0"/>
             </a:stretch>
           </a:blipFill>
         </p:spPr>
       </p:sp>
       <p:sp>
         <p:nvSpPr>
-          <p:cNvPr name="Freeform 8" id="8"/>
+          <p:cNvPr name="Freeform 35" id="35"/>
           <p:cNvSpPr/>
           <p:nvPr/>
         </p:nvSpPr>
         <p:spPr>
           <a:xfrm flipH="false" flipV="false" rot="0">
-            <a:off x="13781727" y="3498338"/>
-            <a:ext cx="1433886" cy="1420851"/>
+            <a:off x="10783786" y="5940983"/>
+            <a:ext cx="2788006" cy="2161001"/>
           </a:xfrm>
           <a:custGeom>
             <a:avLst/>
@@ -8536,18 +9244,18 @@
             <a:cxnLst/>
             <a:rect r="r" b="b" t="t" l="l"/>
             <a:pathLst>
-              <a:path h="1420851" w="1433886">
+              <a:path h="2161001" w="2788006">
                 <a:moveTo>
                   <a:pt x="0" y="0"/>
                 </a:moveTo>
                 <a:lnTo>
-                  <a:pt x="1433886" y="0"/>
-                </a:lnTo>
-                <a:lnTo>
-                  <a:pt x="1433886" y="1420851"/>
-                </a:lnTo>
-                <a:lnTo>
-                  <a:pt x="0" y="1420851"/>
+                  <a:pt x="2788006" y="0"/>
+                </a:lnTo>
+                <a:lnTo>
+                  <a:pt x="2788006" y="2161001"/>
+                </a:lnTo>
+                <a:lnTo>
+                  <a:pt x="0" y="2161001"/>
                 </a:lnTo>
                 <a:lnTo>
                   <a:pt x="0" y="0"/>
@@ -8557,29 +9265,23 @@
             </a:pathLst>
           </a:custGeom>
           <a:blipFill>
-            <a:blip r:embed="rId8">
-              <a:extLst>
-                <a:ext uri="{96DAC541-7B7A-43D3-8B79-37D633B846F1}">
-                  <asvg:svgBlip xmlns:asvg="http://schemas.microsoft.com/office/drawing/2016/SVG/main" r:embed="rId9"/>
-                </a:ext>
-              </a:extLst>
-            </a:blip>
+            <a:blip r:embed="rId5"/>
             <a:stretch>
-              <a:fillRect l="0" t="0" r="0" b="0"/>
+              <a:fillRect l="-22773" t="0" r="-24783" b="0"/>
             </a:stretch>
           </a:blipFill>
         </p:spPr>
       </p:sp>
       <p:sp>
         <p:nvSpPr>
-          <p:cNvPr name="TextBox 9" id="9"/>
+          <p:cNvPr name="TextBox 36" id="36"/>
           <p:cNvSpPr txBox="true"/>
           <p:nvPr/>
         </p:nvSpPr>
         <p:spPr>
           <a:xfrm rot="0">
-            <a:off x="12801467" y="5320148"/>
-            <a:ext cx="3924664" cy="3049524"/>
+            <a:off x="1274388" y="786966"/>
+            <a:ext cx="9932477" cy="1625066"/>
           </a:xfrm>
           <a:prstGeom prst="rect">
             <a:avLst/>
@@ -8591,71 +9293,6 @@
           </a:bodyPr>
           <a:lstStyle/>
           <a:p>
-            <a:pPr algn="l">
-              <a:lnSpc>
-                <a:spcPts val="2207"/>
-              </a:lnSpc>
-            </a:pPr>
-            <a:r>
-              <a:rPr lang="en-US" sz="1599" spc="156" b="true">
-                <a:solidFill>
-                  <a:srgbClr val="344F51"/>
-                </a:solidFill>
-                <a:latin typeface="Poppins Bold"/>
-                <a:ea typeface="Poppins Bold"/>
-                <a:cs typeface="Poppins Bold"/>
-                <a:sym typeface="Poppins Bold"/>
-              </a:rPr>
-              <a:t>Expansión del Módulo de Inteligencia Artificial. Matchmaking Inteligente: el cliente describe el problema en lenguaje natural y la IA filtra la base de datos y le propone los 3 perfiles profesionales más adecuados.</a:t>
-            </a:r>
-          </a:p>
-          <a:p>
-            <a:pPr algn="l">
-              <a:lnSpc>
-                <a:spcPts val="2207"/>
-              </a:lnSpc>
-            </a:pPr>
-          </a:p>
-          <a:p>
-            <a:pPr algn="l">
-              <a:lnSpc>
-                <a:spcPts val="2207"/>
-              </a:lnSpc>
-            </a:pPr>
-          </a:p>
-          <a:p>
-            <a:pPr algn="l" marL="0" indent="0" lvl="0">
-              <a:lnSpc>
-                <a:spcPts val="2207"/>
-              </a:lnSpc>
-              <a:spcBef>
-                <a:spcPct val="0"/>
-              </a:spcBef>
-            </a:pPr>
-          </a:p>
-        </p:txBody>
-      </p:sp>
-      <p:sp>
-        <p:nvSpPr>
-          <p:cNvPr name="TextBox 10" id="10"/>
-          <p:cNvSpPr txBox="true"/>
-          <p:nvPr/>
-        </p:nvSpPr>
-        <p:spPr>
-          <a:xfrm rot="0">
-            <a:off x="3830917" y="1754882"/>
-            <a:ext cx="10906040" cy="796391"/>
-          </a:xfrm>
-          <a:prstGeom prst="rect">
-            <a:avLst/>
-          </a:prstGeom>
-        </p:spPr>
-        <p:txBody>
-          <a:bodyPr anchor="t" rtlCol="false" tIns="0" lIns="0" bIns="0" rIns="0">
-            <a:spAutoFit/>
-          </a:bodyPr>
-          <a:lstStyle/>
-          <a:p>
             <a:pPr algn="ctr" marL="0" indent="0" lvl="0">
               <a:lnSpc>
                 <a:spcPts val="6548"/>
@@ -8665,23 +9302,23 @@
               </a:spcBef>
             </a:pPr>
             <a:r>
-              <a:rPr lang="en-US" b="true" sz="4745" spc="37">
+              <a:rPr lang="en-US" sz="4745" spc="37">
                 <a:solidFill>
                   <a:srgbClr val="51786E"/>
                 </a:solidFill>
-                <a:latin typeface="Fraunces Bold"/>
-                <a:ea typeface="Fraunces Bold"/>
-                <a:cs typeface="Fraunces Bold"/>
-                <a:sym typeface="Fraunces Bold"/>
+                <a:latin typeface="Fraunces"/>
+                <a:ea typeface="Fraunces"/>
+                <a:cs typeface="Fraunces"/>
+                <a:sym typeface="Fraunces"/>
               </a:rPr>
-              <a:t>FUTURAS MEJORAS</a:t>
+              <a:t>INTEGRACIONES Y SEGURIDAD AVANZADA</a:t>
             </a:r>
           </a:p>
         </p:txBody>
       </p:sp>
       <p:sp>
         <p:nvSpPr>
-          <p:cNvPr name="TextBox 11" id="11"/>
+          <p:cNvPr name="TextBox 37" id="37"/>
           <p:cNvSpPr txBox="true"/>
           <p:nvPr/>
         </p:nvSpPr>
@@ -8729,236 +9366,6 @@
               </a:rPr>
               <a:t>.</a:t>
             </a:r>
-          </a:p>
-        </p:txBody>
-      </p:sp>
-      <p:sp>
-        <p:nvSpPr>
-          <p:cNvPr name="TextBox 12" id="12"/>
-          <p:cNvSpPr txBox="true"/>
-          <p:nvPr/>
-        </p:nvSpPr>
-        <p:spPr>
-          <a:xfrm rot="0">
-            <a:off x="1778673" y="5320148"/>
-            <a:ext cx="2970137" cy="3601974"/>
-          </a:xfrm>
-          <a:prstGeom prst="rect">
-            <a:avLst/>
-          </a:prstGeom>
-        </p:spPr>
-        <p:txBody>
-          <a:bodyPr anchor="t" rtlCol="false" tIns="0" lIns="0" bIns="0" rIns="0">
-            <a:spAutoFit/>
-          </a:bodyPr>
-          <a:lstStyle/>
-          <a:p>
-            <a:pPr algn="l">
-              <a:lnSpc>
-                <a:spcPts val="2208"/>
-              </a:lnSpc>
-            </a:pPr>
-            <a:r>
-              <a:rPr lang="en-US" sz="1600" spc="156" b="true">
-                <a:solidFill>
-                  <a:srgbClr val="344F51"/>
-                </a:solidFill>
-                <a:latin typeface="Poppins Bold"/>
-                <a:ea typeface="Poppins Bold"/>
-                <a:cs typeface="Poppins Bold"/>
-                <a:sym typeface="Poppins Bold"/>
-              </a:rPr>
-              <a:t>Integración de Pasarela de Pago y Modelo de Negocio. Como evolución natural, se propone la integración de una pasarela de pagos segura (como Stripe o PayPal).</a:t>
-            </a:r>
-          </a:p>
-          <a:p>
-            <a:pPr algn="l">
-              <a:lnSpc>
-                <a:spcPts val="2208"/>
-              </a:lnSpc>
-            </a:pPr>
-          </a:p>
-          <a:p>
-            <a:pPr algn="l">
-              <a:lnSpc>
-                <a:spcPts val="2208"/>
-              </a:lnSpc>
-            </a:pPr>
-          </a:p>
-          <a:p>
-            <a:pPr algn="l">
-              <a:lnSpc>
-                <a:spcPts val="2208"/>
-              </a:lnSpc>
-            </a:pPr>
-          </a:p>
-          <a:p>
-            <a:pPr algn="l">
-              <a:lnSpc>
-                <a:spcPts val="2208"/>
-              </a:lnSpc>
-            </a:pPr>
-          </a:p>
-          <a:p>
-            <a:pPr algn="l" marL="0" indent="0" lvl="0">
-              <a:lnSpc>
-                <a:spcPts val="2208"/>
-              </a:lnSpc>
-              <a:spcBef>
-                <a:spcPct val="0"/>
-              </a:spcBef>
-            </a:pPr>
-          </a:p>
-        </p:txBody>
-      </p:sp>
-      <p:sp>
-        <p:nvSpPr>
-          <p:cNvPr name="TextBox 13" id="13"/>
-          <p:cNvSpPr txBox="true"/>
-          <p:nvPr/>
-        </p:nvSpPr>
-        <p:spPr>
-          <a:xfrm rot="0">
-            <a:off x="5307758" y="5329673"/>
-            <a:ext cx="3209001" cy="3361374"/>
-          </a:xfrm>
-          <a:prstGeom prst="rect">
-            <a:avLst/>
-          </a:prstGeom>
-        </p:spPr>
-        <p:txBody>
-          <a:bodyPr anchor="t" rtlCol="false" tIns="0" lIns="0" bIns="0" rIns="0">
-            <a:spAutoFit/>
-          </a:bodyPr>
-          <a:lstStyle/>
-          <a:p>
-            <a:pPr algn="l">
-              <a:lnSpc>
-                <a:spcPts val="2247"/>
-              </a:lnSpc>
-            </a:pPr>
-            <a:r>
-              <a:rPr lang="en-US" sz="1628" spc="159" b="true">
-                <a:solidFill>
-                  <a:srgbClr val="344F51"/>
-                </a:solidFill>
-                <a:latin typeface="Poppins Bold"/>
-                <a:ea typeface="Poppins Bold"/>
-                <a:cs typeface="Poppins Bold"/>
-                <a:sym typeface="Poppins Bold"/>
-              </a:rPr>
-              <a:t>Sistema de Valoraciones, de forma que los usuarios podrán leer las reseñas de otros clientes, facilitando la toma de decisión de contratación.</a:t>
-            </a:r>
-          </a:p>
-          <a:p>
-            <a:pPr algn="l">
-              <a:lnSpc>
-                <a:spcPts val="2247"/>
-              </a:lnSpc>
-            </a:pPr>
-          </a:p>
-          <a:p>
-            <a:pPr algn="l">
-              <a:lnSpc>
-                <a:spcPts val="2247"/>
-              </a:lnSpc>
-            </a:pPr>
-          </a:p>
-          <a:p>
-            <a:pPr algn="l">
-              <a:lnSpc>
-                <a:spcPts val="2247"/>
-              </a:lnSpc>
-            </a:pPr>
-          </a:p>
-          <a:p>
-            <a:pPr algn="l">
-              <a:lnSpc>
-                <a:spcPts val="2247"/>
-              </a:lnSpc>
-            </a:pPr>
-          </a:p>
-          <a:p>
-            <a:pPr algn="l" marL="0" indent="0" lvl="0">
-              <a:lnSpc>
-                <a:spcPts val="2247"/>
-              </a:lnSpc>
-              <a:spcBef>
-                <a:spcPct val="0"/>
-              </a:spcBef>
-            </a:pPr>
-          </a:p>
-        </p:txBody>
-      </p:sp>
-      <p:sp>
-        <p:nvSpPr>
-          <p:cNvPr name="TextBox 14" id="14"/>
-          <p:cNvSpPr txBox="true"/>
-          <p:nvPr/>
-        </p:nvSpPr>
-        <p:spPr>
-          <a:xfrm rot="0">
-            <a:off x="8948066" y="5320148"/>
-            <a:ext cx="3654880" cy="2773299"/>
-          </a:xfrm>
-          <a:prstGeom prst="rect">
-            <a:avLst/>
-          </a:prstGeom>
-        </p:spPr>
-        <p:txBody>
-          <a:bodyPr anchor="t" rtlCol="false" tIns="0" lIns="0" bIns="0" rIns="0">
-            <a:spAutoFit/>
-          </a:bodyPr>
-          <a:lstStyle/>
-          <a:p>
-            <a:pPr algn="l">
-              <a:lnSpc>
-                <a:spcPts val="2207"/>
-              </a:lnSpc>
-            </a:pPr>
-            <a:r>
-              <a:rPr lang="en-US" sz="1599" spc="156" b="true">
-                <a:solidFill>
-                  <a:srgbClr val="344F51"/>
-                </a:solidFill>
-                <a:latin typeface="Poppins Bold"/>
-                <a:ea typeface="Poppins Bold"/>
-                <a:cs typeface="Poppins Bold"/>
-                <a:sym typeface="Poppins Bold"/>
-              </a:rPr>
-              <a:t>Entrevistas por Videollamada (WebRTC). Implementar un módulo de videollamadas integrado directamente en el chat de la aplicación.</a:t>
-            </a:r>
-          </a:p>
-          <a:p>
-            <a:pPr algn="l">
-              <a:lnSpc>
-                <a:spcPts val="2207"/>
-              </a:lnSpc>
-            </a:pPr>
-          </a:p>
-          <a:p>
-            <a:pPr algn="l">
-              <a:lnSpc>
-                <a:spcPts val="2207"/>
-              </a:lnSpc>
-            </a:pPr>
-          </a:p>
-          <a:p>
-            <a:pPr algn="l">
-              <a:lnSpc>
-                <a:spcPts val="2207"/>
-              </a:lnSpc>
-            </a:pPr>
-          </a:p>
-          <a:p>
-            <a:pPr algn="l" marL="0" indent="0" lvl="0">
-              <a:lnSpc>
-                <a:spcPts val="2207"/>
-              </a:lnSpc>
-              <a:spcBef>
-                <a:spcPct val="0"/>
-              </a:spcBef>
-            </a:pPr>
           </a:p>
         </p:txBody>
       </p:sp>
@@ -9002,10 +9409,10 @@
         </p:nvGrpSpPr>
         <p:grpSpPr>
           <a:xfrm rot="0">
-            <a:off x="3826496" y="2463569"/>
-            <a:ext cx="11196945" cy="6310665"/>
+            <a:off x="1357312" y="1028700"/>
+            <a:ext cx="15591759" cy="8229600"/>
             <a:chOff x="0" y="0"/>
-            <a:chExt cx="2948990" cy="1662068"/>
+            <a:chExt cx="4106471" cy="2167467"/>
           </a:xfrm>
         </p:grpSpPr>
         <p:sp>
@@ -9017,7 +9424,7 @@
           <p:spPr>
             <a:xfrm flipH="false" flipV="false" rot="0">
               <a:off x="0" y="0"/>
-              <a:ext cx="2948990" cy="1662068"/>
+              <a:ext cx="4106471" cy="2167467"/>
             </a:xfrm>
             <a:custGeom>
               <a:avLst/>
@@ -9026,18 +9433,18 @@
               <a:cxnLst/>
               <a:rect r="r" b="b" t="t" l="l"/>
               <a:pathLst>
-                <a:path h="1662068" w="2948990">
+                <a:path h="2167467" w="4106471">
                   <a:moveTo>
                     <a:pt x="0" y="0"/>
                   </a:moveTo>
                   <a:lnTo>
-                    <a:pt x="2948990" y="0"/>
-                  </a:lnTo>
-                  <a:lnTo>
-                    <a:pt x="2948990" y="1662068"/>
-                  </a:lnTo>
-                  <a:lnTo>
-                    <a:pt x="0" y="1662068"/>
+                    <a:pt x="4106471" y="0"/>
+                  </a:lnTo>
+                  <a:lnTo>
+                    <a:pt x="4106471" y="2167467"/>
+                  </a:lnTo>
+                  <a:lnTo>
+                    <a:pt x="0" y="2167467"/>
                   </a:lnTo>
                   <a:close/>
                 </a:path>
@@ -9057,7 +9464,7 @@
           <p:spPr>
             <a:xfrm>
               <a:off x="0" y="-19050"/>
-              <a:ext cx="2948990" cy="1681118"/>
+              <a:ext cx="4106471" cy="2186517"/>
             </a:xfrm>
             <a:prstGeom prst="rect">
               <a:avLst/>
@@ -9084,8 +9491,8 @@
         </p:nvSpPr>
         <p:spPr>
           <a:xfrm flipH="false" flipV="false" rot="0">
-            <a:off x="11869158" y="5427811"/>
-            <a:ext cx="1699666" cy="1699666"/>
+            <a:off x="2553248" y="3332230"/>
+            <a:ext cx="1516533" cy="1254586"/>
           </a:xfrm>
           <a:custGeom>
             <a:avLst/>
@@ -9094,18 +9501,18 @@
             <a:cxnLst/>
             <a:rect r="r" b="b" t="t" l="l"/>
             <a:pathLst>
-              <a:path h="1699666" w="1699666">
+              <a:path h="1254586" w="1516533">
                 <a:moveTo>
                   <a:pt x="0" y="0"/>
                 </a:moveTo>
                 <a:lnTo>
-                  <a:pt x="1699666" y="0"/>
-                </a:lnTo>
-                <a:lnTo>
-                  <a:pt x="1699666" y="1699666"/>
-                </a:lnTo>
-                <a:lnTo>
-                  <a:pt x="0" y="1699666"/>
+                  <a:pt x="1516533" y="0"/>
+                </a:lnTo>
+                <a:lnTo>
+                  <a:pt x="1516533" y="1254586"/>
+                </a:lnTo>
+                <a:lnTo>
+                  <a:pt x="0" y="1254586"/>
                 </a:lnTo>
                 <a:lnTo>
                   <a:pt x="0" y="0"/>
@@ -9115,7 +9522,13 @@
             </a:pathLst>
           </a:custGeom>
           <a:blipFill>
-            <a:blip r:embed="rId2"/>
+            <a:blip r:embed="rId2">
+              <a:extLst>
+                <a:ext uri="{96DAC541-7B7A-43D3-8B79-37D633B846F1}">
+                  <asvg:svgBlip xmlns:asvg="http://schemas.microsoft.com/office/drawing/2016/SVG/main" r:embed="rId3"/>
+                </a:ext>
+              </a:extLst>
+            </a:blip>
             <a:stretch>
               <a:fillRect l="0" t="0" r="0" b="0"/>
             </a:stretch>
@@ -9124,16 +9537,14 @@
       </p:sp>
       <p:sp>
         <p:nvSpPr>
-          <p:cNvPr name="Freeform 6" id="6">
-            <a:hlinkClick r:id="rId4" tooltip="https://www.conectacuidados.eu"/>
-          </p:cNvPr>
+          <p:cNvPr name="Freeform 6" id="6"/>
           <p:cNvSpPr/>
           <p:nvPr/>
         </p:nvSpPr>
         <p:spPr>
           <a:xfrm flipH="false" flipV="false" rot="0">
-            <a:off x="5570665" y="4603389"/>
-            <a:ext cx="5936428" cy="3730691"/>
+            <a:off x="6327691" y="3192904"/>
+            <a:ext cx="1150967" cy="1559919"/>
           </a:xfrm>
           <a:custGeom>
             <a:avLst/>
@@ -9142,18 +9553,18 @@
             <a:cxnLst/>
             <a:rect r="r" b="b" t="t" l="l"/>
             <a:pathLst>
-              <a:path h="3730691" w="5936428">
+              <a:path h="1559919" w="1150967">
                 <a:moveTo>
                   <a:pt x="0" y="0"/>
                 </a:moveTo>
                 <a:lnTo>
-                  <a:pt x="5936427" y="0"/>
-                </a:lnTo>
-                <a:lnTo>
-                  <a:pt x="5936427" y="3730691"/>
-                </a:lnTo>
-                <a:lnTo>
-                  <a:pt x="0" y="3730691"/>
+                  <a:pt x="1150967" y="0"/>
+                </a:lnTo>
+                <a:lnTo>
+                  <a:pt x="1150967" y="1559919"/>
+                </a:lnTo>
+                <a:lnTo>
+                  <a:pt x="0" y="1559919"/>
                 </a:lnTo>
                 <a:lnTo>
                   <a:pt x="0" y="0"/>
@@ -9163,7 +9574,13 @@
             </a:pathLst>
           </a:custGeom>
           <a:blipFill>
-            <a:blip r:embed="rId3"/>
+            <a:blip r:embed="rId4">
+              <a:extLst>
+                <a:ext uri="{96DAC541-7B7A-43D3-8B79-37D633B846F1}">
+                  <asvg:svgBlip xmlns:asvg="http://schemas.microsoft.com/office/drawing/2016/SVG/main" r:embed="rId5"/>
+                </a:ext>
+              </a:extLst>
+            </a:blip>
             <a:stretch>
               <a:fillRect l="0" t="0" r="0" b="0"/>
             </a:stretch>
@@ -9172,14 +9589,118 @@
       </p:sp>
       <p:sp>
         <p:nvSpPr>
-          <p:cNvPr name="TextBox 7" id="7"/>
+          <p:cNvPr name="Freeform 7" id="7"/>
+          <p:cNvSpPr/>
+          <p:nvPr/>
+        </p:nvSpPr>
+        <p:spPr>
+          <a:xfrm flipH="false" flipV="false" rot="0">
+            <a:off x="9931760" y="3498338"/>
+            <a:ext cx="1635151" cy="1088119"/>
+          </a:xfrm>
+          <a:custGeom>
+            <a:avLst/>
+            <a:gdLst/>
+            <a:ahLst/>
+            <a:cxnLst/>
+            <a:rect r="r" b="b" t="t" l="l"/>
+            <a:pathLst>
+              <a:path h="1088119" w="1635151">
+                <a:moveTo>
+                  <a:pt x="0" y="0"/>
+                </a:moveTo>
+                <a:lnTo>
+                  <a:pt x="1635151" y="0"/>
+                </a:lnTo>
+                <a:lnTo>
+                  <a:pt x="1635151" y="1088119"/>
+                </a:lnTo>
+                <a:lnTo>
+                  <a:pt x="0" y="1088119"/>
+                </a:lnTo>
+                <a:lnTo>
+                  <a:pt x="0" y="0"/>
+                </a:lnTo>
+                <a:close/>
+              </a:path>
+            </a:pathLst>
+          </a:custGeom>
+          <a:blipFill>
+            <a:blip r:embed="rId6">
+              <a:extLst>
+                <a:ext uri="{96DAC541-7B7A-43D3-8B79-37D633B846F1}">
+                  <asvg:svgBlip xmlns:asvg="http://schemas.microsoft.com/office/drawing/2016/SVG/main" r:embed="rId7"/>
+                </a:ext>
+              </a:extLst>
+            </a:blip>
+            <a:stretch>
+              <a:fillRect l="0" t="0" r="0" b="0"/>
+            </a:stretch>
+          </a:blipFill>
+        </p:spPr>
+      </p:sp>
+      <p:sp>
+        <p:nvSpPr>
+          <p:cNvPr name="Freeform 8" id="8"/>
+          <p:cNvSpPr/>
+          <p:nvPr/>
+        </p:nvSpPr>
+        <p:spPr>
+          <a:xfrm flipH="false" flipV="false" rot="0">
+            <a:off x="14020014" y="3331972"/>
+            <a:ext cx="1433886" cy="1420851"/>
+          </a:xfrm>
+          <a:custGeom>
+            <a:avLst/>
+            <a:gdLst/>
+            <a:ahLst/>
+            <a:cxnLst/>
+            <a:rect r="r" b="b" t="t" l="l"/>
+            <a:pathLst>
+              <a:path h="1420851" w="1433886">
+                <a:moveTo>
+                  <a:pt x="0" y="0"/>
+                </a:moveTo>
+                <a:lnTo>
+                  <a:pt x="1433887" y="0"/>
+                </a:lnTo>
+                <a:lnTo>
+                  <a:pt x="1433887" y="1420851"/>
+                </a:lnTo>
+                <a:lnTo>
+                  <a:pt x="0" y="1420851"/>
+                </a:lnTo>
+                <a:lnTo>
+                  <a:pt x="0" y="0"/>
+                </a:lnTo>
+                <a:close/>
+              </a:path>
+            </a:pathLst>
+          </a:custGeom>
+          <a:blipFill>
+            <a:blip r:embed="rId8">
+              <a:extLst>
+                <a:ext uri="{96DAC541-7B7A-43D3-8B79-37D633B846F1}">
+                  <asvg:svgBlip xmlns:asvg="http://schemas.microsoft.com/office/drawing/2016/SVG/main" r:embed="rId9"/>
+                </a:ext>
+              </a:extLst>
+            </a:blip>
+            <a:stretch>
+              <a:fillRect l="0" t="0" r="0" b="0"/>
+            </a:stretch>
+          </a:blipFill>
+        </p:spPr>
+      </p:sp>
+      <p:sp>
+        <p:nvSpPr>
+          <p:cNvPr name="TextBox 9" id="9"/>
           <p:cNvSpPr txBox="true"/>
           <p:nvPr/>
         </p:nvSpPr>
         <p:spPr>
           <a:xfrm rot="0">
-            <a:off x="6782564" y="3038086"/>
-            <a:ext cx="5936428" cy="1152525"/>
+            <a:off x="13156807" y="5310623"/>
+            <a:ext cx="3351392" cy="2559177"/>
           </a:xfrm>
           <a:prstGeom prst="rect">
             <a:avLst/>
@@ -9191,41 +9712,97 @@
           </a:bodyPr>
           <a:lstStyle/>
           <a:p>
-            <a:pPr algn="ctr">
+            <a:pPr algn="l">
               <a:lnSpc>
-                <a:spcPts val="9119"/>
+                <a:spcPts val="2760"/>
               </a:lnSpc>
             </a:pPr>
             <a:r>
-              <a:rPr lang="en-US" b="true" sz="7599" spc="-151">
+              <a:rPr lang="en-US" sz="2000" spc="196" b="true">
                 <a:solidFill>
                   <a:srgbClr val="344F51"/>
                 </a:solidFill>
-                <a:latin typeface="Montserrat Bold"/>
-                <a:ea typeface="Montserrat Bold"/>
-                <a:cs typeface="Montserrat Bold"/>
-                <a:sym typeface="Montserrat Bold"/>
+                <a:latin typeface="Poppins Bold"/>
+                <a:ea typeface="Poppins Bold"/>
+                <a:cs typeface="Poppins Bold"/>
+                <a:sym typeface="Poppins Bold"/>
               </a:rPr>
-              <a:t>CUIDA</a:t>
-            </a:r>
-            <a:r>
-              <a:rPr lang="en-US" b="true" sz="7599" spc="-151">
+              <a:t>Expansión del Módulo de Inteligencia Artificial. Matchmaking Inteligente.</a:t>
+            </a:r>
+          </a:p>
+          <a:p>
+            <a:pPr algn="l">
+              <a:lnSpc>
+                <a:spcPts val="2207"/>
+              </a:lnSpc>
+            </a:pPr>
+          </a:p>
+          <a:p>
+            <a:pPr algn="l">
+              <a:lnSpc>
+                <a:spcPts val="2207"/>
+              </a:lnSpc>
+            </a:pPr>
+          </a:p>
+          <a:p>
+            <a:pPr algn="l" marL="0" indent="0" lvl="0">
+              <a:lnSpc>
+                <a:spcPts val="2207"/>
+              </a:lnSpc>
+              <a:spcBef>
+                <a:spcPct val="0"/>
+              </a:spcBef>
+            </a:pPr>
+          </a:p>
+        </p:txBody>
+      </p:sp>
+      <p:sp>
+        <p:nvSpPr>
+          <p:cNvPr name="TextBox 10" id="10"/>
+          <p:cNvSpPr txBox="true"/>
+          <p:nvPr/>
+        </p:nvSpPr>
+        <p:spPr>
+          <a:xfrm rot="0">
+            <a:off x="3830917" y="1754882"/>
+            <a:ext cx="10906040" cy="796391"/>
+          </a:xfrm>
+          <a:prstGeom prst="rect">
+            <a:avLst/>
+          </a:prstGeom>
+        </p:spPr>
+        <p:txBody>
+          <a:bodyPr anchor="t" rtlCol="false" tIns="0" lIns="0" bIns="0" rIns="0">
+            <a:spAutoFit/>
+          </a:bodyPr>
+          <a:lstStyle/>
+          <a:p>
+            <a:pPr algn="ctr" marL="0" indent="0" lvl="0">
+              <a:lnSpc>
+                <a:spcPts val="6548"/>
+              </a:lnSpc>
+              <a:spcBef>
+                <a:spcPct val="0"/>
+              </a:spcBef>
+            </a:pPr>
+            <a:r>
+              <a:rPr lang="en-US" b="true" sz="4745" spc="37">
                 <a:solidFill>
-                  <a:srgbClr val="93D14B"/>
+                  <a:srgbClr val="51786E"/>
                 </a:solidFill>
-                <a:latin typeface="Montserrat Bold"/>
-                <a:ea typeface="Montserrat Bold"/>
-                <a:cs typeface="Montserrat Bold"/>
-                <a:sym typeface="Montserrat Bold"/>
+                <a:latin typeface="Fraunces Bold"/>
+                <a:ea typeface="Fraunces Bold"/>
+                <a:cs typeface="Fraunces Bold"/>
+                <a:sym typeface="Fraunces Bold"/>
               </a:rPr>
-              <a:t>DOS</a:t>
+              <a:t>FUTURAS MEJORAS</a:t>
             </a:r>
           </a:p>
         </p:txBody>
       </p:sp>
       <p:sp>
         <p:nvSpPr>
-          <p:cNvPr name="TextBox 8" id="8"/>
+          <p:cNvPr name="TextBox 11" id="11"/>
           <p:cNvSpPr txBox="true"/>
           <p:nvPr/>
         </p:nvSpPr>
@@ -9273,6 +9850,236 @@
               </a:rPr>
               <a:t>.</a:t>
             </a:r>
+          </a:p>
+        </p:txBody>
+      </p:sp>
+      <p:sp>
+        <p:nvSpPr>
+          <p:cNvPr name="TextBox 12" id="12"/>
+          <p:cNvSpPr txBox="true"/>
+          <p:nvPr/>
+        </p:nvSpPr>
+        <p:spPr>
+          <a:xfrm rot="0">
+            <a:off x="1937915" y="5310623"/>
+            <a:ext cx="2970137" cy="3111627"/>
+          </a:xfrm>
+          <a:prstGeom prst="rect">
+            <a:avLst/>
+          </a:prstGeom>
+        </p:spPr>
+        <p:txBody>
+          <a:bodyPr anchor="t" rtlCol="false" tIns="0" lIns="0" bIns="0" rIns="0">
+            <a:spAutoFit/>
+          </a:bodyPr>
+          <a:lstStyle/>
+          <a:p>
+            <a:pPr algn="l">
+              <a:lnSpc>
+                <a:spcPts val="2759"/>
+              </a:lnSpc>
+            </a:pPr>
+            <a:r>
+              <a:rPr lang="en-US" sz="1999" spc="195" b="true">
+                <a:solidFill>
+                  <a:srgbClr val="344F51"/>
+                </a:solidFill>
+                <a:latin typeface="Poppins Bold"/>
+                <a:ea typeface="Poppins Bold"/>
+                <a:cs typeface="Poppins Bold"/>
+                <a:sym typeface="Poppins Bold"/>
+              </a:rPr>
+              <a:t>Integración de Pasarela de Pago y Modelo de Negocio (como Stripe o PayPal).</a:t>
+            </a:r>
+          </a:p>
+          <a:p>
+            <a:pPr algn="l">
+              <a:lnSpc>
+                <a:spcPts val="2208"/>
+              </a:lnSpc>
+            </a:pPr>
+          </a:p>
+          <a:p>
+            <a:pPr algn="l">
+              <a:lnSpc>
+                <a:spcPts val="2208"/>
+              </a:lnSpc>
+            </a:pPr>
+          </a:p>
+          <a:p>
+            <a:pPr algn="l">
+              <a:lnSpc>
+                <a:spcPts val="2208"/>
+              </a:lnSpc>
+            </a:pPr>
+          </a:p>
+          <a:p>
+            <a:pPr algn="l">
+              <a:lnSpc>
+                <a:spcPts val="2208"/>
+              </a:lnSpc>
+            </a:pPr>
+          </a:p>
+          <a:p>
+            <a:pPr algn="l" marL="0" indent="0" lvl="0">
+              <a:lnSpc>
+                <a:spcPts val="2208"/>
+              </a:lnSpc>
+              <a:spcBef>
+                <a:spcPct val="0"/>
+              </a:spcBef>
+            </a:pPr>
+          </a:p>
+        </p:txBody>
+      </p:sp>
+      <p:sp>
+        <p:nvSpPr>
+          <p:cNvPr name="TextBox 13" id="13"/>
+          <p:cNvSpPr txBox="true"/>
+          <p:nvPr/>
+        </p:nvSpPr>
+        <p:spPr>
+          <a:xfrm rot="0">
+            <a:off x="5446905" y="5310623"/>
+            <a:ext cx="3440283" cy="3454198"/>
+          </a:xfrm>
+          <a:prstGeom prst="rect">
+            <a:avLst/>
+          </a:prstGeom>
+        </p:spPr>
+        <p:txBody>
+          <a:bodyPr anchor="t" rtlCol="false" tIns="0" lIns="0" bIns="0" rIns="0">
+            <a:spAutoFit/>
+          </a:bodyPr>
+          <a:lstStyle/>
+          <a:p>
+            <a:pPr algn="l">
+              <a:lnSpc>
+                <a:spcPts val="2760"/>
+              </a:lnSpc>
+            </a:pPr>
+            <a:r>
+              <a:rPr lang="en-US" sz="2000" spc="196" b="true">
+                <a:solidFill>
+                  <a:srgbClr val="344F51"/>
+                </a:solidFill>
+                <a:latin typeface="Poppins Bold"/>
+                <a:ea typeface="Poppins Bold"/>
+                <a:cs typeface="Poppins Bold"/>
+                <a:sym typeface="Poppins Bold"/>
+              </a:rPr>
+              <a:t>Sistema de Valoraciones.  Los usuarios podrán leer las reseñas de otros clientes sobre un servicio y/o empresa.</a:t>
+            </a:r>
+          </a:p>
+          <a:p>
+            <a:pPr algn="l">
+              <a:lnSpc>
+                <a:spcPts val="2247"/>
+              </a:lnSpc>
+            </a:pPr>
+          </a:p>
+          <a:p>
+            <a:pPr algn="l">
+              <a:lnSpc>
+                <a:spcPts val="2247"/>
+              </a:lnSpc>
+            </a:pPr>
+          </a:p>
+          <a:p>
+            <a:pPr algn="l">
+              <a:lnSpc>
+                <a:spcPts val="2247"/>
+              </a:lnSpc>
+            </a:pPr>
+          </a:p>
+          <a:p>
+            <a:pPr algn="l">
+              <a:lnSpc>
+                <a:spcPts val="2247"/>
+              </a:lnSpc>
+            </a:pPr>
+          </a:p>
+          <a:p>
+            <a:pPr algn="l" marL="0" indent="0" lvl="0">
+              <a:lnSpc>
+                <a:spcPts val="2247"/>
+              </a:lnSpc>
+              <a:spcBef>
+                <a:spcPct val="0"/>
+              </a:spcBef>
+            </a:pPr>
+          </a:p>
+        </p:txBody>
+      </p:sp>
+      <p:sp>
+        <p:nvSpPr>
+          <p:cNvPr name="TextBox 14" id="14"/>
+          <p:cNvSpPr txBox="true"/>
+          <p:nvPr/>
+        </p:nvSpPr>
+        <p:spPr>
+          <a:xfrm rot="0">
+            <a:off x="9430113" y="5310623"/>
+            <a:ext cx="3336395" cy="3178302"/>
+          </a:xfrm>
+          <a:prstGeom prst="rect">
+            <a:avLst/>
+          </a:prstGeom>
+        </p:spPr>
+        <p:txBody>
+          <a:bodyPr anchor="t" rtlCol="false" tIns="0" lIns="0" bIns="0" rIns="0">
+            <a:spAutoFit/>
+          </a:bodyPr>
+          <a:lstStyle/>
+          <a:p>
+            <a:pPr algn="l">
+              <a:lnSpc>
+                <a:spcPts val="2760"/>
+              </a:lnSpc>
+            </a:pPr>
+            <a:r>
+              <a:rPr lang="en-US" sz="2000" spc="196" b="true">
+                <a:solidFill>
+                  <a:srgbClr val="344F51"/>
+                </a:solidFill>
+                <a:latin typeface="Poppins Bold"/>
+                <a:ea typeface="Poppins Bold"/>
+                <a:cs typeface="Poppins Bold"/>
+                <a:sym typeface="Poppins Bold"/>
+              </a:rPr>
+              <a:t>Entrevistas por Videollamada (WebRTC) integrado directamente en el chat de la aplicación.</a:t>
+            </a:r>
+          </a:p>
+          <a:p>
+            <a:pPr algn="l">
+              <a:lnSpc>
+                <a:spcPts val="2207"/>
+              </a:lnSpc>
+            </a:pPr>
+          </a:p>
+          <a:p>
+            <a:pPr algn="l">
+              <a:lnSpc>
+                <a:spcPts val="2207"/>
+              </a:lnSpc>
+            </a:pPr>
+          </a:p>
+          <a:p>
+            <a:pPr algn="l">
+              <a:lnSpc>
+                <a:spcPts val="2207"/>
+              </a:lnSpc>
+            </a:pPr>
+          </a:p>
+          <a:p>
+            <a:pPr algn="l" marL="0" indent="0" lvl="0">
+              <a:lnSpc>
+                <a:spcPts val="2207"/>
+              </a:lnSpc>
+              <a:spcBef>
+                <a:spcPct val="0"/>
+              </a:spcBef>
+            </a:pPr>
           </a:p>
         </p:txBody>
       </p:sp>

--- a/documentacion_extra/presentacion/cuidaDos.pptx
+++ b/documentacion_extra/presentacion/cuidaDos.pptx
@@ -6355,7 +6355,7 @@
           <p:nvPr/>
         </p:nvGraphicFramePr>
         <p:xfrm>
-          <a:off x="1028700" y="645282"/>
+          <a:off x="612113" y="286642"/>
           <a:ext cx="11291915" cy="8229600"/>
         </p:xfrm>
         <a:graphic>
@@ -6394,8 +6394,8 @@
         </p:nvSpPr>
         <p:spPr>
           <a:xfrm rot="0">
-            <a:off x="17535126" y="9399905"/>
-            <a:ext cx="752874" cy="887095"/>
+            <a:off x="17675887" y="9399905"/>
+            <a:ext cx="612113" cy="887095"/>
           </a:xfrm>
           <a:prstGeom prst="rect">
             <a:avLst/>

--- a/documentacion_extra/presentacion/cuidaDos.pptx
+++ b/documentacion_extra/presentacion/cuidaDos.pptx
@@ -6468,9 +6468,9 @@
         <p:grpSpPr>
           <a:xfrm rot="0">
             <a:off x="-2785357" y="538989"/>
-            <a:ext cx="7162260" cy="1961344"/>
+            <a:ext cx="7570719" cy="1961344"/>
             <a:chOff x="0" y="0"/>
-            <a:chExt cx="1012764" cy="277340"/>
+            <a:chExt cx="1070521" cy="277340"/>
           </a:xfrm>
         </p:grpSpPr>
         <p:sp>
@@ -6482,7 +6482,7 @@
           <p:spPr>
             <a:xfrm flipH="false" flipV="false" rot="0">
               <a:off x="0" y="0"/>
-              <a:ext cx="1012764" cy="277340"/>
+              <a:ext cx="1070521" cy="277340"/>
             </a:xfrm>
             <a:custGeom>
               <a:avLst/>
@@ -6491,9 +6491,9 @@
               <a:cxnLst/>
               <a:rect r="r" b="b" t="t" l="l"/>
               <a:pathLst>
-                <a:path h="277340" w="1012764">
+                <a:path h="277340" w="1070521">
                   <a:moveTo>
-                    <a:pt x="809564" y="0"/>
+                    <a:pt x="867321" y="0"/>
                   </a:moveTo>
                   <a:lnTo>
                     <a:pt x="0" y="0"/>
@@ -6502,10 +6502,10 @@
                     <a:pt x="203200" y="277340"/>
                   </a:lnTo>
                   <a:lnTo>
-                    <a:pt x="1012764" y="277340"/>
-                  </a:lnTo>
-                  <a:lnTo>
-                    <a:pt x="809564" y="0"/>
+                    <a:pt x="1070521" y="277340"/>
+                  </a:lnTo>
+                  <a:lnTo>
+                    <a:pt x="867321" y="0"/>
                   </a:lnTo>
                   <a:close/>
                 </a:path>
@@ -6530,7 +6530,7 @@
           <p:spPr>
             <a:xfrm>
               <a:off x="101600" y="-19050"/>
-              <a:ext cx="809564" cy="296390"/>
+              <a:ext cx="867321" cy="296390"/>
             </a:xfrm>
             <a:prstGeom prst="rect">
               <a:avLst/>
@@ -6658,8 +6658,8 @@
         </p:nvSpPr>
         <p:spPr>
           <a:xfrm flipH="false" flipV="false" rot="0">
-            <a:off x="4556940" y="256829"/>
-            <a:ext cx="12978186" cy="9620080"/>
+            <a:off x="5098195" y="1519661"/>
+            <a:ext cx="2779871" cy="3501663"/>
           </a:xfrm>
           <a:custGeom>
             <a:avLst/>
@@ -6668,18 +6668,18 @@
             <a:cxnLst/>
             <a:rect r="r" b="b" t="t" l="l"/>
             <a:pathLst>
-              <a:path h="9620080" w="12978186">
+              <a:path h="3501663" w="2779871">
                 <a:moveTo>
                   <a:pt x="0" y="0"/>
                 </a:moveTo>
                 <a:lnTo>
-                  <a:pt x="12978186" y="0"/>
-                </a:lnTo>
-                <a:lnTo>
-                  <a:pt x="12978186" y="9620080"/>
-                </a:lnTo>
-                <a:lnTo>
-                  <a:pt x="0" y="9620080"/>
+                  <a:pt x="2779872" y="0"/>
+                </a:lnTo>
+                <a:lnTo>
+                  <a:pt x="2779872" y="3501662"/>
+                </a:lnTo>
+                <a:lnTo>
+                  <a:pt x="0" y="3501662"/>
                 </a:lnTo>
                 <a:lnTo>
                   <a:pt x="0" y="0"/>
@@ -6698,7 +6698,1643 @@
       </p:sp>
       <p:sp>
         <p:nvSpPr>
-          <p:cNvPr name="TextBox 8" id="8"/>
+          <p:cNvPr name="Freeform 8" id="8"/>
+          <p:cNvSpPr/>
+          <p:nvPr/>
+        </p:nvSpPr>
+        <p:spPr>
+          <a:xfrm flipH="false" flipV="false" rot="0">
+            <a:off x="5646362" y="377550"/>
+            <a:ext cx="1580715" cy="570814"/>
+          </a:xfrm>
+          <a:custGeom>
+            <a:avLst/>
+            <a:gdLst/>
+            <a:ahLst/>
+            <a:cxnLst/>
+            <a:rect r="r" b="b" t="t" l="l"/>
+            <a:pathLst>
+              <a:path h="570814" w="1580715">
+                <a:moveTo>
+                  <a:pt x="0" y="0"/>
+                </a:moveTo>
+                <a:lnTo>
+                  <a:pt x="1580715" y="0"/>
+                </a:lnTo>
+                <a:lnTo>
+                  <a:pt x="1580715" y="570814"/>
+                </a:lnTo>
+                <a:lnTo>
+                  <a:pt x="0" y="570814"/>
+                </a:lnTo>
+                <a:lnTo>
+                  <a:pt x="0" y="0"/>
+                </a:lnTo>
+                <a:close/>
+              </a:path>
+            </a:pathLst>
+          </a:custGeom>
+          <a:blipFill>
+            <a:blip r:embed="rId6"/>
+            <a:stretch>
+              <a:fillRect l="0" t="0" r="0" b="0"/>
+            </a:stretch>
+          </a:blipFill>
+        </p:spPr>
+      </p:sp>
+      <p:sp>
+        <p:nvSpPr>
+          <p:cNvPr name="Freeform 9" id="9"/>
+          <p:cNvSpPr/>
+          <p:nvPr/>
+        </p:nvSpPr>
+        <p:spPr>
+          <a:xfrm flipH="false" flipV="false" rot="0">
+            <a:off x="5098195" y="5852013"/>
+            <a:ext cx="2779871" cy="4214177"/>
+          </a:xfrm>
+          <a:custGeom>
+            <a:avLst/>
+            <a:gdLst/>
+            <a:ahLst/>
+            <a:cxnLst/>
+            <a:rect r="r" b="b" t="t" l="l"/>
+            <a:pathLst>
+              <a:path h="4214177" w="2779871">
+                <a:moveTo>
+                  <a:pt x="0" y="0"/>
+                </a:moveTo>
+                <a:lnTo>
+                  <a:pt x="2779872" y="0"/>
+                </a:lnTo>
+                <a:lnTo>
+                  <a:pt x="2779872" y="4214178"/>
+                </a:lnTo>
+                <a:lnTo>
+                  <a:pt x="0" y="4214178"/>
+                </a:lnTo>
+                <a:lnTo>
+                  <a:pt x="0" y="0"/>
+                </a:lnTo>
+                <a:close/>
+              </a:path>
+            </a:pathLst>
+          </a:custGeom>
+          <a:blipFill>
+            <a:blip r:embed="rId7"/>
+            <a:stretch>
+              <a:fillRect l="0" t="0" r="0" b="-2526"/>
+            </a:stretch>
+          </a:blipFill>
+        </p:spPr>
+      </p:sp>
+      <p:grpSp>
+        <p:nvGrpSpPr>
+          <p:cNvPr name="Group 10" id="10"/>
+          <p:cNvGrpSpPr/>
+          <p:nvPr/>
+        </p:nvGrpSpPr>
+        <p:grpSpPr>
+          <a:xfrm rot="0">
+            <a:off x="6300624" y="1034089"/>
+            <a:ext cx="272191" cy="446412"/>
+            <a:chOff x="0" y="0"/>
+            <a:chExt cx="494051" cy="810280"/>
+          </a:xfrm>
+        </p:grpSpPr>
+        <p:sp>
+          <p:nvSpPr>
+            <p:cNvPr name="Freeform 11" id="11"/>
+            <p:cNvSpPr/>
+            <p:nvPr/>
+          </p:nvSpPr>
+          <p:spPr>
+            <a:xfrm flipH="false" flipV="false" rot="0">
+              <a:off x="0" y="0"/>
+              <a:ext cx="494051" cy="810280"/>
+            </a:xfrm>
+            <a:custGeom>
+              <a:avLst/>
+              <a:gdLst/>
+              <a:ahLst/>
+              <a:cxnLst/>
+              <a:rect r="r" b="b" t="t" l="l"/>
+              <a:pathLst>
+                <a:path h="810280" w="494051">
+                  <a:moveTo>
+                    <a:pt x="247026" y="810280"/>
+                  </a:moveTo>
+                  <a:lnTo>
+                    <a:pt x="0" y="403880"/>
+                  </a:lnTo>
+                  <a:lnTo>
+                    <a:pt x="203200" y="403880"/>
+                  </a:lnTo>
+                  <a:lnTo>
+                    <a:pt x="203200" y="0"/>
+                  </a:lnTo>
+                  <a:lnTo>
+                    <a:pt x="290851" y="0"/>
+                  </a:lnTo>
+                  <a:lnTo>
+                    <a:pt x="290851" y="403880"/>
+                  </a:lnTo>
+                  <a:lnTo>
+                    <a:pt x="494051" y="403880"/>
+                  </a:lnTo>
+                  <a:lnTo>
+                    <a:pt x="247026" y="810280"/>
+                  </a:lnTo>
+                  <a:close/>
+                </a:path>
+              </a:pathLst>
+            </a:custGeom>
+            <a:solidFill>
+              <a:srgbClr val="FFFFFF"/>
+            </a:solidFill>
+          </p:spPr>
+        </p:sp>
+        <p:sp>
+          <p:nvSpPr>
+            <p:cNvPr name="TextBox 12" id="12"/>
+            <p:cNvSpPr txBox="true"/>
+            <p:nvPr/>
+          </p:nvSpPr>
+          <p:spPr>
+            <a:xfrm>
+              <a:off x="203200" y="-19050"/>
+              <a:ext cx="87651" cy="727730"/>
+            </a:xfrm>
+            <a:prstGeom prst="rect">
+              <a:avLst/>
+            </a:prstGeom>
+          </p:spPr>
+          <p:txBody>
+            <a:bodyPr anchor="ctr" rtlCol="false" tIns="50800" lIns="50800" bIns="50800" rIns="50800"/>
+            <a:lstStyle/>
+            <a:p>
+              <a:pPr algn="ctr">
+                <a:lnSpc>
+                  <a:spcPts val="2859"/>
+                </a:lnSpc>
+              </a:pPr>
+            </a:p>
+          </p:txBody>
+        </p:sp>
+      </p:grpSp>
+      <p:grpSp>
+        <p:nvGrpSpPr>
+          <p:cNvPr name="Group 13" id="13"/>
+          <p:cNvGrpSpPr/>
+          <p:nvPr/>
+        </p:nvGrpSpPr>
+        <p:grpSpPr>
+          <a:xfrm rot="0">
+            <a:off x="6234996" y="5105827"/>
+            <a:ext cx="403448" cy="661683"/>
+            <a:chOff x="0" y="0"/>
+            <a:chExt cx="494051" cy="810280"/>
+          </a:xfrm>
+        </p:grpSpPr>
+        <p:sp>
+          <p:nvSpPr>
+            <p:cNvPr name="Freeform 14" id="14"/>
+            <p:cNvSpPr/>
+            <p:nvPr/>
+          </p:nvSpPr>
+          <p:spPr>
+            <a:xfrm flipH="false" flipV="false" rot="0">
+              <a:off x="0" y="0"/>
+              <a:ext cx="494051" cy="810280"/>
+            </a:xfrm>
+            <a:custGeom>
+              <a:avLst/>
+              <a:gdLst/>
+              <a:ahLst/>
+              <a:cxnLst/>
+              <a:rect r="r" b="b" t="t" l="l"/>
+              <a:pathLst>
+                <a:path h="810280" w="494051">
+                  <a:moveTo>
+                    <a:pt x="247026" y="810280"/>
+                  </a:moveTo>
+                  <a:lnTo>
+                    <a:pt x="0" y="403880"/>
+                  </a:lnTo>
+                  <a:lnTo>
+                    <a:pt x="203200" y="403880"/>
+                  </a:lnTo>
+                  <a:lnTo>
+                    <a:pt x="203200" y="0"/>
+                  </a:lnTo>
+                  <a:lnTo>
+                    <a:pt x="290851" y="0"/>
+                  </a:lnTo>
+                  <a:lnTo>
+                    <a:pt x="290851" y="403880"/>
+                  </a:lnTo>
+                  <a:lnTo>
+                    <a:pt x="494051" y="403880"/>
+                  </a:lnTo>
+                  <a:lnTo>
+                    <a:pt x="247026" y="810280"/>
+                  </a:lnTo>
+                  <a:close/>
+                </a:path>
+              </a:pathLst>
+            </a:custGeom>
+            <a:solidFill>
+              <a:srgbClr val="FFFFFF"/>
+            </a:solidFill>
+          </p:spPr>
+        </p:sp>
+        <p:sp>
+          <p:nvSpPr>
+            <p:cNvPr name="TextBox 15" id="15"/>
+            <p:cNvSpPr txBox="true"/>
+            <p:nvPr/>
+          </p:nvSpPr>
+          <p:spPr>
+            <a:xfrm>
+              <a:off x="203200" y="-19050"/>
+              <a:ext cx="87651" cy="727730"/>
+            </a:xfrm>
+            <a:prstGeom prst="rect">
+              <a:avLst/>
+            </a:prstGeom>
+          </p:spPr>
+          <p:txBody>
+            <a:bodyPr anchor="ctr" rtlCol="false" tIns="50800" lIns="50800" bIns="50800" rIns="50800"/>
+            <a:lstStyle/>
+            <a:p>
+              <a:pPr algn="ctr">
+                <a:lnSpc>
+                  <a:spcPts val="2859"/>
+                </a:lnSpc>
+              </a:pPr>
+            </a:p>
+          </p:txBody>
+        </p:sp>
+      </p:grpSp>
+      <p:sp>
+        <p:nvSpPr>
+          <p:cNvPr name="Freeform 16" id="16"/>
+          <p:cNvSpPr/>
+          <p:nvPr/>
+        </p:nvSpPr>
+        <p:spPr>
+          <a:xfrm flipH="false" flipV="false" rot="0">
+            <a:off x="8379096" y="377550"/>
+            <a:ext cx="2809214" cy="827979"/>
+          </a:xfrm>
+          <a:custGeom>
+            <a:avLst/>
+            <a:gdLst/>
+            <a:ahLst/>
+            <a:cxnLst/>
+            <a:rect r="r" b="b" t="t" l="l"/>
+            <a:pathLst>
+              <a:path h="827979" w="2809214">
+                <a:moveTo>
+                  <a:pt x="0" y="0"/>
+                </a:moveTo>
+                <a:lnTo>
+                  <a:pt x="2809215" y="0"/>
+                </a:lnTo>
+                <a:lnTo>
+                  <a:pt x="2809215" y="827979"/>
+                </a:lnTo>
+                <a:lnTo>
+                  <a:pt x="0" y="827979"/>
+                </a:lnTo>
+                <a:lnTo>
+                  <a:pt x="0" y="0"/>
+                </a:lnTo>
+                <a:close/>
+              </a:path>
+            </a:pathLst>
+          </a:custGeom>
+          <a:blipFill>
+            <a:blip r:embed="rId8"/>
+            <a:stretch>
+              <a:fillRect l="0" t="0" r="0" b="0"/>
+            </a:stretch>
+          </a:blipFill>
+        </p:spPr>
+      </p:sp>
+      <p:sp>
+        <p:nvSpPr>
+          <p:cNvPr name="Freeform 17" id="17"/>
+          <p:cNvSpPr/>
+          <p:nvPr/>
+        </p:nvSpPr>
+        <p:spPr>
+          <a:xfrm flipH="false" flipV="false" rot="0">
+            <a:off x="8105451" y="6872354"/>
+            <a:ext cx="2794607" cy="3193836"/>
+          </a:xfrm>
+          <a:custGeom>
+            <a:avLst/>
+            <a:gdLst/>
+            <a:ahLst/>
+            <a:cxnLst/>
+            <a:rect r="r" b="b" t="t" l="l"/>
+            <a:pathLst>
+              <a:path h="3193836" w="2794607">
+                <a:moveTo>
+                  <a:pt x="0" y="0"/>
+                </a:moveTo>
+                <a:lnTo>
+                  <a:pt x="2794606" y="0"/>
+                </a:lnTo>
+                <a:lnTo>
+                  <a:pt x="2794606" y="3193837"/>
+                </a:lnTo>
+                <a:lnTo>
+                  <a:pt x="0" y="3193837"/>
+                </a:lnTo>
+                <a:lnTo>
+                  <a:pt x="0" y="0"/>
+                </a:lnTo>
+                <a:close/>
+              </a:path>
+            </a:pathLst>
+          </a:custGeom>
+          <a:blipFill>
+            <a:blip r:embed="rId9"/>
+            <a:stretch>
+              <a:fillRect l="0" t="0" r="0" b="0"/>
+            </a:stretch>
+          </a:blipFill>
+        </p:spPr>
+      </p:sp>
+      <p:grpSp>
+        <p:nvGrpSpPr>
+          <p:cNvPr name="Group 18" id="18"/>
+          <p:cNvGrpSpPr/>
+          <p:nvPr/>
+        </p:nvGrpSpPr>
+        <p:grpSpPr>
+          <a:xfrm rot="2700000">
+            <a:off x="8110383" y="1176747"/>
+            <a:ext cx="204405" cy="690010"/>
+            <a:chOff x="0" y="0"/>
+            <a:chExt cx="494051" cy="1667767"/>
+          </a:xfrm>
+        </p:grpSpPr>
+        <p:sp>
+          <p:nvSpPr>
+            <p:cNvPr name="Freeform 19" id="19"/>
+            <p:cNvSpPr/>
+            <p:nvPr/>
+          </p:nvSpPr>
+          <p:spPr>
+            <a:xfrm flipH="false" flipV="false" rot="0">
+              <a:off x="0" y="0"/>
+              <a:ext cx="494051" cy="1667767"/>
+            </a:xfrm>
+            <a:custGeom>
+              <a:avLst/>
+              <a:gdLst/>
+              <a:ahLst/>
+              <a:cxnLst/>
+              <a:rect r="r" b="b" t="t" l="l"/>
+              <a:pathLst>
+                <a:path h="1667767" w="494051">
+                  <a:moveTo>
+                    <a:pt x="247026" y="1667767"/>
+                  </a:moveTo>
+                  <a:lnTo>
+                    <a:pt x="0" y="1261367"/>
+                  </a:lnTo>
+                  <a:lnTo>
+                    <a:pt x="203200" y="1261367"/>
+                  </a:lnTo>
+                  <a:lnTo>
+                    <a:pt x="203200" y="0"/>
+                  </a:lnTo>
+                  <a:lnTo>
+                    <a:pt x="290851" y="0"/>
+                  </a:lnTo>
+                  <a:lnTo>
+                    <a:pt x="290851" y="1261367"/>
+                  </a:lnTo>
+                  <a:lnTo>
+                    <a:pt x="494051" y="1261367"/>
+                  </a:lnTo>
+                  <a:lnTo>
+                    <a:pt x="247026" y="1667767"/>
+                  </a:lnTo>
+                  <a:close/>
+                </a:path>
+              </a:pathLst>
+            </a:custGeom>
+            <a:solidFill>
+              <a:srgbClr val="FFFFFF"/>
+            </a:solidFill>
+          </p:spPr>
+        </p:sp>
+        <p:sp>
+          <p:nvSpPr>
+            <p:cNvPr name="TextBox 20" id="20"/>
+            <p:cNvSpPr txBox="true"/>
+            <p:nvPr/>
+          </p:nvSpPr>
+          <p:spPr>
+            <a:xfrm>
+              <a:off x="203200" y="-19050"/>
+              <a:ext cx="87651" cy="1585217"/>
+            </a:xfrm>
+            <a:prstGeom prst="rect">
+              <a:avLst/>
+            </a:prstGeom>
+          </p:spPr>
+          <p:txBody>
+            <a:bodyPr anchor="ctr" rtlCol="false" tIns="50800" lIns="50800" bIns="50800" rIns="50800"/>
+            <a:lstStyle/>
+            <a:p>
+              <a:pPr algn="ctr">
+                <a:lnSpc>
+                  <a:spcPts val="2859"/>
+                </a:lnSpc>
+              </a:pPr>
+            </a:p>
+          </p:txBody>
+        </p:sp>
+      </p:grpSp>
+      <p:grpSp>
+        <p:nvGrpSpPr>
+          <p:cNvPr name="Group 21" id="21"/>
+          <p:cNvGrpSpPr/>
+          <p:nvPr/>
+        </p:nvGrpSpPr>
+        <p:grpSpPr>
+          <a:xfrm rot="5400000">
+            <a:off x="8003248" y="3102872"/>
+            <a:ext cx="204405" cy="335239"/>
+            <a:chOff x="0" y="0"/>
+            <a:chExt cx="494051" cy="810280"/>
+          </a:xfrm>
+        </p:grpSpPr>
+        <p:sp>
+          <p:nvSpPr>
+            <p:cNvPr name="Freeform 22" id="22"/>
+            <p:cNvSpPr/>
+            <p:nvPr/>
+          </p:nvSpPr>
+          <p:spPr>
+            <a:xfrm flipH="false" flipV="false" rot="0">
+              <a:off x="0" y="0"/>
+              <a:ext cx="494051" cy="810280"/>
+            </a:xfrm>
+            <a:custGeom>
+              <a:avLst/>
+              <a:gdLst/>
+              <a:ahLst/>
+              <a:cxnLst/>
+              <a:rect r="r" b="b" t="t" l="l"/>
+              <a:pathLst>
+                <a:path h="810280" w="494051">
+                  <a:moveTo>
+                    <a:pt x="247026" y="810280"/>
+                  </a:moveTo>
+                  <a:lnTo>
+                    <a:pt x="0" y="403880"/>
+                  </a:lnTo>
+                  <a:lnTo>
+                    <a:pt x="203200" y="403880"/>
+                  </a:lnTo>
+                  <a:lnTo>
+                    <a:pt x="203200" y="0"/>
+                  </a:lnTo>
+                  <a:lnTo>
+                    <a:pt x="290851" y="0"/>
+                  </a:lnTo>
+                  <a:lnTo>
+                    <a:pt x="290851" y="403880"/>
+                  </a:lnTo>
+                  <a:lnTo>
+                    <a:pt x="494051" y="403880"/>
+                  </a:lnTo>
+                  <a:lnTo>
+                    <a:pt x="247026" y="810280"/>
+                  </a:lnTo>
+                  <a:close/>
+                </a:path>
+              </a:pathLst>
+            </a:custGeom>
+            <a:solidFill>
+              <a:srgbClr val="FFFFFF"/>
+            </a:solidFill>
+          </p:spPr>
+        </p:sp>
+        <p:sp>
+          <p:nvSpPr>
+            <p:cNvPr name="TextBox 23" id="23"/>
+            <p:cNvSpPr txBox="true"/>
+            <p:nvPr/>
+          </p:nvSpPr>
+          <p:spPr>
+            <a:xfrm>
+              <a:off x="203200" y="-19050"/>
+              <a:ext cx="87651" cy="727730"/>
+            </a:xfrm>
+            <a:prstGeom prst="rect">
+              <a:avLst/>
+            </a:prstGeom>
+          </p:spPr>
+          <p:txBody>
+            <a:bodyPr anchor="ctr" rtlCol="false" tIns="50800" lIns="50800" bIns="50800" rIns="50800"/>
+            <a:lstStyle/>
+            <a:p>
+              <a:pPr algn="ctr">
+                <a:lnSpc>
+                  <a:spcPts val="2859"/>
+                </a:lnSpc>
+              </a:pPr>
+            </a:p>
+          </p:txBody>
+        </p:sp>
+      </p:grpSp>
+      <p:grpSp>
+        <p:nvGrpSpPr>
+          <p:cNvPr name="Group 24" id="24"/>
+          <p:cNvGrpSpPr/>
+          <p:nvPr/>
+        </p:nvGrpSpPr>
+        <p:grpSpPr>
+          <a:xfrm rot="8212146">
+            <a:off x="8080525" y="4791531"/>
+            <a:ext cx="240990" cy="2310617"/>
+            <a:chOff x="0" y="0"/>
+            <a:chExt cx="523047" cy="5014979"/>
+          </a:xfrm>
+        </p:grpSpPr>
+        <p:sp>
+          <p:nvSpPr>
+            <p:cNvPr name="Freeform 25" id="25"/>
+            <p:cNvSpPr/>
+            <p:nvPr/>
+          </p:nvSpPr>
+          <p:spPr>
+            <a:xfrm flipH="false" flipV="false" rot="0">
+              <a:off x="0" y="0"/>
+              <a:ext cx="523047" cy="5014979"/>
+            </a:xfrm>
+            <a:custGeom>
+              <a:avLst/>
+              <a:gdLst/>
+              <a:ahLst/>
+              <a:cxnLst/>
+              <a:rect r="r" b="b" t="t" l="l"/>
+              <a:pathLst>
+                <a:path h="5014979" w="523047">
+                  <a:moveTo>
+                    <a:pt x="261523" y="5014979"/>
+                  </a:moveTo>
+                  <a:lnTo>
+                    <a:pt x="0" y="4608579"/>
+                  </a:lnTo>
+                  <a:lnTo>
+                    <a:pt x="203200" y="4608579"/>
+                  </a:lnTo>
+                  <a:lnTo>
+                    <a:pt x="203200" y="0"/>
+                  </a:lnTo>
+                  <a:lnTo>
+                    <a:pt x="319847" y="0"/>
+                  </a:lnTo>
+                  <a:lnTo>
+                    <a:pt x="319847" y="4608579"/>
+                  </a:lnTo>
+                  <a:lnTo>
+                    <a:pt x="523047" y="4608579"/>
+                  </a:lnTo>
+                  <a:lnTo>
+                    <a:pt x="261523" y="5014979"/>
+                  </a:lnTo>
+                  <a:close/>
+                </a:path>
+              </a:pathLst>
+            </a:custGeom>
+            <a:solidFill>
+              <a:srgbClr val="FFFFFF"/>
+            </a:solidFill>
+          </p:spPr>
+        </p:sp>
+        <p:sp>
+          <p:nvSpPr>
+            <p:cNvPr name="TextBox 26" id="26"/>
+            <p:cNvSpPr txBox="true"/>
+            <p:nvPr/>
+          </p:nvSpPr>
+          <p:spPr>
+            <a:xfrm>
+              <a:off x="203200" y="-19050"/>
+              <a:ext cx="116647" cy="4932429"/>
+            </a:xfrm>
+            <a:prstGeom prst="rect">
+              <a:avLst/>
+            </a:prstGeom>
+          </p:spPr>
+          <p:txBody>
+            <a:bodyPr anchor="ctr" rtlCol="false" tIns="50800" lIns="50800" bIns="50800" rIns="50800"/>
+            <a:lstStyle/>
+            <a:p>
+              <a:pPr algn="ctr">
+                <a:lnSpc>
+                  <a:spcPts val="2859"/>
+                </a:lnSpc>
+              </a:pPr>
+            </a:p>
+          </p:txBody>
+        </p:sp>
+      </p:grpSp>
+      <p:sp>
+        <p:nvSpPr>
+          <p:cNvPr name="Freeform 27" id="27"/>
+          <p:cNvSpPr/>
+          <p:nvPr/>
+        </p:nvSpPr>
+        <p:spPr>
+          <a:xfrm flipH="false" flipV="false" rot="0">
+            <a:off x="14749362" y="162879"/>
+            <a:ext cx="2376011" cy="1731641"/>
+          </a:xfrm>
+          <a:custGeom>
+            <a:avLst/>
+            <a:gdLst/>
+            <a:ahLst/>
+            <a:cxnLst/>
+            <a:rect r="r" b="b" t="t" l="l"/>
+            <a:pathLst>
+              <a:path h="1731641" w="2376011">
+                <a:moveTo>
+                  <a:pt x="0" y="0"/>
+                </a:moveTo>
+                <a:lnTo>
+                  <a:pt x="2376011" y="0"/>
+                </a:lnTo>
+                <a:lnTo>
+                  <a:pt x="2376011" y="1731642"/>
+                </a:lnTo>
+                <a:lnTo>
+                  <a:pt x="0" y="1731642"/>
+                </a:lnTo>
+                <a:lnTo>
+                  <a:pt x="0" y="0"/>
+                </a:lnTo>
+                <a:close/>
+              </a:path>
+            </a:pathLst>
+          </a:custGeom>
+          <a:blipFill>
+            <a:blip r:embed="rId10"/>
+            <a:stretch>
+              <a:fillRect l="0" t="0" r="-2249" b="0"/>
+            </a:stretch>
+          </a:blipFill>
+        </p:spPr>
+      </p:sp>
+      <p:sp>
+        <p:nvSpPr>
+          <p:cNvPr name="Freeform 28" id="28"/>
+          <p:cNvSpPr/>
+          <p:nvPr/>
+        </p:nvSpPr>
+        <p:spPr>
+          <a:xfrm flipH="false" flipV="false" rot="0">
+            <a:off x="13840052" y="1983571"/>
+            <a:ext cx="2136250" cy="2158896"/>
+          </a:xfrm>
+          <a:custGeom>
+            <a:avLst/>
+            <a:gdLst/>
+            <a:ahLst/>
+            <a:cxnLst/>
+            <a:rect r="r" b="b" t="t" l="l"/>
+            <a:pathLst>
+              <a:path h="2158896" w="2136250">
+                <a:moveTo>
+                  <a:pt x="0" y="0"/>
+                </a:moveTo>
+                <a:lnTo>
+                  <a:pt x="2136250" y="0"/>
+                </a:lnTo>
+                <a:lnTo>
+                  <a:pt x="2136250" y="2158897"/>
+                </a:lnTo>
+                <a:lnTo>
+                  <a:pt x="0" y="2158897"/>
+                </a:lnTo>
+                <a:lnTo>
+                  <a:pt x="0" y="0"/>
+                </a:lnTo>
+                <a:close/>
+              </a:path>
+            </a:pathLst>
+          </a:custGeom>
+          <a:blipFill>
+            <a:blip r:embed="rId11"/>
+            <a:stretch>
+              <a:fillRect l="0" t="0" r="0" b="0"/>
+            </a:stretch>
+          </a:blipFill>
+        </p:spPr>
+      </p:sp>
+      <p:grpSp>
+        <p:nvGrpSpPr>
+          <p:cNvPr name="Group 29" id="29"/>
+          <p:cNvGrpSpPr/>
+          <p:nvPr/>
+        </p:nvGrpSpPr>
+        <p:grpSpPr>
+          <a:xfrm rot="-5400000">
+            <a:off x="12866634" y="-1047469"/>
+            <a:ext cx="204405" cy="3377320"/>
+            <a:chOff x="0" y="0"/>
+            <a:chExt cx="494051" cy="8163046"/>
+          </a:xfrm>
+        </p:grpSpPr>
+        <p:sp>
+          <p:nvSpPr>
+            <p:cNvPr name="Freeform 30" id="30"/>
+            <p:cNvSpPr/>
+            <p:nvPr/>
+          </p:nvSpPr>
+          <p:spPr>
+            <a:xfrm flipH="false" flipV="false" rot="0">
+              <a:off x="0" y="0"/>
+              <a:ext cx="494051" cy="8163046"/>
+            </a:xfrm>
+            <a:custGeom>
+              <a:avLst/>
+              <a:gdLst/>
+              <a:ahLst/>
+              <a:cxnLst/>
+              <a:rect r="r" b="b" t="t" l="l"/>
+              <a:pathLst>
+                <a:path h="8163046" w="494051">
+                  <a:moveTo>
+                    <a:pt x="247026" y="8163046"/>
+                  </a:moveTo>
+                  <a:lnTo>
+                    <a:pt x="0" y="7756646"/>
+                  </a:lnTo>
+                  <a:lnTo>
+                    <a:pt x="203200" y="7756646"/>
+                  </a:lnTo>
+                  <a:lnTo>
+                    <a:pt x="203200" y="0"/>
+                  </a:lnTo>
+                  <a:lnTo>
+                    <a:pt x="290851" y="0"/>
+                  </a:lnTo>
+                  <a:lnTo>
+                    <a:pt x="290851" y="7756646"/>
+                  </a:lnTo>
+                  <a:lnTo>
+                    <a:pt x="494051" y="7756646"/>
+                  </a:lnTo>
+                  <a:lnTo>
+                    <a:pt x="247026" y="8163046"/>
+                  </a:lnTo>
+                  <a:close/>
+                </a:path>
+              </a:pathLst>
+            </a:custGeom>
+            <a:solidFill>
+              <a:srgbClr val="FFFFFF"/>
+            </a:solidFill>
+          </p:spPr>
+        </p:sp>
+        <p:sp>
+          <p:nvSpPr>
+            <p:cNvPr name="TextBox 31" id="31"/>
+            <p:cNvSpPr txBox="true"/>
+            <p:nvPr/>
+          </p:nvSpPr>
+          <p:spPr>
+            <a:xfrm>
+              <a:off x="203200" y="-19050"/>
+              <a:ext cx="87651" cy="8080496"/>
+            </a:xfrm>
+            <a:prstGeom prst="rect">
+              <a:avLst/>
+            </a:prstGeom>
+          </p:spPr>
+          <p:txBody>
+            <a:bodyPr anchor="ctr" rtlCol="false" tIns="50800" lIns="50800" bIns="50800" rIns="50800"/>
+            <a:lstStyle/>
+            <a:p>
+              <a:pPr algn="ctr">
+                <a:lnSpc>
+                  <a:spcPts val="2859"/>
+                </a:lnSpc>
+              </a:pPr>
+            </a:p>
+          </p:txBody>
+        </p:sp>
+      </p:grpSp>
+      <p:grpSp>
+        <p:nvGrpSpPr>
+          <p:cNvPr name="Group 32" id="32"/>
+          <p:cNvGrpSpPr/>
+          <p:nvPr/>
+        </p:nvGrpSpPr>
+        <p:grpSpPr>
+          <a:xfrm rot="-3850067">
+            <a:off x="12385196" y="101290"/>
+            <a:ext cx="204405" cy="2592690"/>
+            <a:chOff x="0" y="0"/>
+            <a:chExt cx="494051" cy="6266580"/>
+          </a:xfrm>
+        </p:grpSpPr>
+        <p:sp>
+          <p:nvSpPr>
+            <p:cNvPr name="Freeform 33" id="33"/>
+            <p:cNvSpPr/>
+            <p:nvPr/>
+          </p:nvSpPr>
+          <p:spPr>
+            <a:xfrm flipH="false" flipV="false" rot="0">
+              <a:off x="0" y="0"/>
+              <a:ext cx="494051" cy="6266580"/>
+            </a:xfrm>
+            <a:custGeom>
+              <a:avLst/>
+              <a:gdLst/>
+              <a:ahLst/>
+              <a:cxnLst/>
+              <a:rect r="r" b="b" t="t" l="l"/>
+              <a:pathLst>
+                <a:path h="6266580" w="494051">
+                  <a:moveTo>
+                    <a:pt x="247026" y="6266580"/>
+                  </a:moveTo>
+                  <a:lnTo>
+                    <a:pt x="0" y="5860180"/>
+                  </a:lnTo>
+                  <a:lnTo>
+                    <a:pt x="203200" y="5860180"/>
+                  </a:lnTo>
+                  <a:lnTo>
+                    <a:pt x="203200" y="0"/>
+                  </a:lnTo>
+                  <a:lnTo>
+                    <a:pt x="290851" y="0"/>
+                  </a:lnTo>
+                  <a:lnTo>
+                    <a:pt x="290851" y="5860180"/>
+                  </a:lnTo>
+                  <a:lnTo>
+                    <a:pt x="494051" y="5860180"/>
+                  </a:lnTo>
+                  <a:lnTo>
+                    <a:pt x="247026" y="6266580"/>
+                  </a:lnTo>
+                  <a:close/>
+                </a:path>
+              </a:pathLst>
+            </a:custGeom>
+            <a:solidFill>
+              <a:srgbClr val="FFFFFF"/>
+            </a:solidFill>
+          </p:spPr>
+        </p:sp>
+        <p:sp>
+          <p:nvSpPr>
+            <p:cNvPr name="TextBox 34" id="34"/>
+            <p:cNvSpPr txBox="true"/>
+            <p:nvPr/>
+          </p:nvSpPr>
+          <p:spPr>
+            <a:xfrm>
+              <a:off x="203200" y="-19050"/>
+              <a:ext cx="87651" cy="6184030"/>
+            </a:xfrm>
+            <a:prstGeom prst="rect">
+              <a:avLst/>
+            </a:prstGeom>
+          </p:spPr>
+          <p:txBody>
+            <a:bodyPr anchor="ctr" rtlCol="false" tIns="50800" lIns="50800" bIns="50800" rIns="50800"/>
+            <a:lstStyle/>
+            <a:p>
+              <a:pPr algn="ctr">
+                <a:lnSpc>
+                  <a:spcPts val="2859"/>
+                </a:lnSpc>
+              </a:pPr>
+            </a:p>
+          </p:txBody>
+        </p:sp>
+      </p:grpSp>
+      <p:sp>
+        <p:nvSpPr>
+          <p:cNvPr name="Freeform 35" id="35"/>
+          <p:cNvSpPr/>
+          <p:nvPr/>
+        </p:nvSpPr>
+        <p:spPr>
+          <a:xfrm flipH="false" flipV="false" rot="0">
+            <a:off x="14909591" y="7268680"/>
+            <a:ext cx="2465306" cy="2797511"/>
+          </a:xfrm>
+          <a:custGeom>
+            <a:avLst/>
+            <a:gdLst/>
+            <a:ahLst/>
+            <a:cxnLst/>
+            <a:rect r="r" b="b" t="t" l="l"/>
+            <a:pathLst>
+              <a:path h="2797511" w="2465306">
+                <a:moveTo>
+                  <a:pt x="0" y="0"/>
+                </a:moveTo>
+                <a:lnTo>
+                  <a:pt x="2465306" y="0"/>
+                </a:lnTo>
+                <a:lnTo>
+                  <a:pt x="2465306" y="2797511"/>
+                </a:lnTo>
+                <a:lnTo>
+                  <a:pt x="0" y="2797511"/>
+                </a:lnTo>
+                <a:lnTo>
+                  <a:pt x="0" y="0"/>
+                </a:lnTo>
+                <a:close/>
+              </a:path>
+            </a:pathLst>
+          </a:custGeom>
+          <a:blipFill>
+            <a:blip r:embed="rId12"/>
+            <a:stretch>
+              <a:fillRect l="0" t="0" r="0" b="0"/>
+            </a:stretch>
+          </a:blipFill>
+        </p:spPr>
+      </p:sp>
+      <p:grpSp>
+        <p:nvGrpSpPr>
+          <p:cNvPr name="Group 36" id="36"/>
+          <p:cNvGrpSpPr/>
+          <p:nvPr/>
+        </p:nvGrpSpPr>
+        <p:grpSpPr>
+          <a:xfrm rot="-5400000">
+            <a:off x="12752750" y="7729557"/>
+            <a:ext cx="231014" cy="3762211"/>
+            <a:chOff x="0" y="0"/>
+            <a:chExt cx="558366" cy="9093334"/>
+          </a:xfrm>
+        </p:grpSpPr>
+        <p:sp>
+          <p:nvSpPr>
+            <p:cNvPr name="Freeform 37" id="37"/>
+            <p:cNvSpPr/>
+            <p:nvPr/>
+          </p:nvSpPr>
+          <p:spPr>
+            <a:xfrm flipH="false" flipV="false" rot="0">
+              <a:off x="0" y="0"/>
+              <a:ext cx="558366" cy="9093334"/>
+            </a:xfrm>
+            <a:custGeom>
+              <a:avLst/>
+              <a:gdLst/>
+              <a:ahLst/>
+              <a:cxnLst/>
+              <a:rect r="r" b="b" t="t" l="l"/>
+              <a:pathLst>
+                <a:path h="9093334" w="558366">
+                  <a:moveTo>
+                    <a:pt x="279183" y="9093334"/>
+                  </a:moveTo>
+                  <a:lnTo>
+                    <a:pt x="0" y="8686934"/>
+                  </a:lnTo>
+                  <a:lnTo>
+                    <a:pt x="203200" y="8686934"/>
+                  </a:lnTo>
+                  <a:lnTo>
+                    <a:pt x="203200" y="0"/>
+                  </a:lnTo>
+                  <a:lnTo>
+                    <a:pt x="355166" y="0"/>
+                  </a:lnTo>
+                  <a:lnTo>
+                    <a:pt x="355166" y="8686934"/>
+                  </a:lnTo>
+                  <a:lnTo>
+                    <a:pt x="558366" y="8686934"/>
+                  </a:lnTo>
+                  <a:lnTo>
+                    <a:pt x="279183" y="9093334"/>
+                  </a:lnTo>
+                  <a:close/>
+                </a:path>
+              </a:pathLst>
+            </a:custGeom>
+            <a:solidFill>
+              <a:srgbClr val="FFFFFF"/>
+            </a:solidFill>
+          </p:spPr>
+        </p:sp>
+        <p:sp>
+          <p:nvSpPr>
+            <p:cNvPr name="TextBox 38" id="38"/>
+            <p:cNvSpPr txBox="true"/>
+            <p:nvPr/>
+          </p:nvSpPr>
+          <p:spPr>
+            <a:xfrm>
+              <a:off x="203200" y="-19050"/>
+              <a:ext cx="151966" cy="9010784"/>
+            </a:xfrm>
+            <a:prstGeom prst="rect">
+              <a:avLst/>
+            </a:prstGeom>
+          </p:spPr>
+          <p:txBody>
+            <a:bodyPr anchor="ctr" rtlCol="false" tIns="50800" lIns="50800" bIns="50800" rIns="50800"/>
+            <a:lstStyle/>
+            <a:p>
+              <a:pPr algn="ctr">
+                <a:lnSpc>
+                  <a:spcPts val="2859"/>
+                </a:lnSpc>
+              </a:pPr>
+            </a:p>
+          </p:txBody>
+        </p:sp>
+      </p:grpSp>
+      <p:grpSp>
+        <p:nvGrpSpPr>
+          <p:cNvPr name="Group 39" id="39"/>
+          <p:cNvGrpSpPr/>
+          <p:nvPr/>
+        </p:nvGrpSpPr>
+        <p:grpSpPr>
+          <a:xfrm rot="-61394">
+            <a:off x="15335386" y="4319306"/>
+            <a:ext cx="208347" cy="2683934"/>
+            <a:chOff x="0" y="0"/>
+            <a:chExt cx="503580" cy="6487118"/>
+          </a:xfrm>
+        </p:grpSpPr>
+        <p:sp>
+          <p:nvSpPr>
+            <p:cNvPr name="Freeform 40" id="40"/>
+            <p:cNvSpPr/>
+            <p:nvPr/>
+          </p:nvSpPr>
+          <p:spPr>
+            <a:xfrm flipH="false" flipV="false" rot="0">
+              <a:off x="0" y="0"/>
+              <a:ext cx="503580" cy="6487118"/>
+            </a:xfrm>
+            <a:custGeom>
+              <a:avLst/>
+              <a:gdLst/>
+              <a:ahLst/>
+              <a:cxnLst/>
+              <a:rect r="r" b="b" t="t" l="l"/>
+              <a:pathLst>
+                <a:path h="6487118" w="503580">
+                  <a:moveTo>
+                    <a:pt x="251790" y="6487118"/>
+                  </a:moveTo>
+                  <a:lnTo>
+                    <a:pt x="0" y="6080718"/>
+                  </a:lnTo>
+                  <a:lnTo>
+                    <a:pt x="203200" y="6080718"/>
+                  </a:lnTo>
+                  <a:lnTo>
+                    <a:pt x="203200" y="0"/>
+                  </a:lnTo>
+                  <a:lnTo>
+                    <a:pt x="300380" y="0"/>
+                  </a:lnTo>
+                  <a:lnTo>
+                    <a:pt x="300380" y="6080718"/>
+                  </a:lnTo>
+                  <a:lnTo>
+                    <a:pt x="503580" y="6080718"/>
+                  </a:lnTo>
+                  <a:lnTo>
+                    <a:pt x="251790" y="6487118"/>
+                  </a:lnTo>
+                  <a:close/>
+                </a:path>
+              </a:pathLst>
+            </a:custGeom>
+            <a:solidFill>
+              <a:srgbClr val="FFFFFF"/>
+            </a:solidFill>
+          </p:spPr>
+        </p:sp>
+        <p:sp>
+          <p:nvSpPr>
+            <p:cNvPr name="TextBox 41" id="41"/>
+            <p:cNvSpPr txBox="true"/>
+            <p:nvPr/>
+          </p:nvSpPr>
+          <p:spPr>
+            <a:xfrm>
+              <a:off x="203200" y="-19050"/>
+              <a:ext cx="97180" cy="6404568"/>
+            </a:xfrm>
+            <a:prstGeom prst="rect">
+              <a:avLst/>
+            </a:prstGeom>
+          </p:spPr>
+          <p:txBody>
+            <a:bodyPr anchor="ctr" rtlCol="false" tIns="50800" lIns="50800" bIns="50800" rIns="50800"/>
+            <a:lstStyle/>
+            <a:p>
+              <a:pPr algn="ctr">
+                <a:lnSpc>
+                  <a:spcPts val="2859"/>
+                </a:lnSpc>
+              </a:pPr>
+            </a:p>
+          </p:txBody>
+        </p:sp>
+      </p:grpSp>
+      <p:grpSp>
+        <p:nvGrpSpPr>
+          <p:cNvPr name="Group 42" id="42"/>
+          <p:cNvGrpSpPr/>
+          <p:nvPr/>
+        </p:nvGrpSpPr>
+        <p:grpSpPr>
+          <a:xfrm rot="-61394">
+            <a:off x="16688631" y="2146759"/>
+            <a:ext cx="204405" cy="4685166"/>
+            <a:chOff x="0" y="0"/>
+            <a:chExt cx="494051" cy="11324135"/>
+          </a:xfrm>
+        </p:grpSpPr>
+        <p:sp>
+          <p:nvSpPr>
+            <p:cNvPr name="Freeform 43" id="43"/>
+            <p:cNvSpPr/>
+            <p:nvPr/>
+          </p:nvSpPr>
+          <p:spPr>
+            <a:xfrm flipH="false" flipV="false" rot="0">
+              <a:off x="0" y="0"/>
+              <a:ext cx="494051" cy="11324135"/>
+            </a:xfrm>
+            <a:custGeom>
+              <a:avLst/>
+              <a:gdLst/>
+              <a:ahLst/>
+              <a:cxnLst/>
+              <a:rect r="r" b="b" t="t" l="l"/>
+              <a:pathLst>
+                <a:path h="11324135" w="494051">
+                  <a:moveTo>
+                    <a:pt x="247026" y="11324135"/>
+                  </a:moveTo>
+                  <a:lnTo>
+                    <a:pt x="0" y="10917735"/>
+                  </a:lnTo>
+                  <a:lnTo>
+                    <a:pt x="203200" y="10917735"/>
+                  </a:lnTo>
+                  <a:lnTo>
+                    <a:pt x="203200" y="0"/>
+                  </a:lnTo>
+                  <a:lnTo>
+                    <a:pt x="290851" y="0"/>
+                  </a:lnTo>
+                  <a:lnTo>
+                    <a:pt x="290851" y="10917735"/>
+                  </a:lnTo>
+                  <a:lnTo>
+                    <a:pt x="494051" y="10917735"/>
+                  </a:lnTo>
+                  <a:lnTo>
+                    <a:pt x="247026" y="11324135"/>
+                  </a:lnTo>
+                  <a:close/>
+                </a:path>
+              </a:pathLst>
+            </a:custGeom>
+            <a:solidFill>
+              <a:srgbClr val="FFFFFF"/>
+            </a:solidFill>
+          </p:spPr>
+        </p:sp>
+        <p:sp>
+          <p:nvSpPr>
+            <p:cNvPr name="TextBox 44" id="44"/>
+            <p:cNvSpPr txBox="true"/>
+            <p:nvPr/>
+          </p:nvSpPr>
+          <p:spPr>
+            <a:xfrm>
+              <a:off x="203200" y="-19050"/>
+              <a:ext cx="87651" cy="11241585"/>
+            </a:xfrm>
+            <a:prstGeom prst="rect">
+              <a:avLst/>
+            </a:prstGeom>
+          </p:spPr>
+          <p:txBody>
+            <a:bodyPr anchor="ctr" rtlCol="false" tIns="50800" lIns="50800" bIns="50800" rIns="50800"/>
+            <a:lstStyle/>
+            <a:p>
+              <a:pPr algn="ctr">
+                <a:lnSpc>
+                  <a:spcPts val="2859"/>
+                </a:lnSpc>
+              </a:pPr>
+            </a:p>
+          </p:txBody>
+        </p:sp>
+      </p:grpSp>
+      <p:sp>
+        <p:nvSpPr>
+          <p:cNvPr name="Freeform 45" id="45"/>
+          <p:cNvSpPr/>
+          <p:nvPr/>
+        </p:nvSpPr>
+        <p:spPr>
+          <a:xfrm flipH="false" flipV="false" rot="0">
+            <a:off x="11747278" y="4434332"/>
+            <a:ext cx="2140399" cy="4768958"/>
+          </a:xfrm>
+          <a:custGeom>
+            <a:avLst/>
+            <a:gdLst/>
+            <a:ahLst/>
+            <a:cxnLst/>
+            <a:rect r="r" b="b" t="t" l="l"/>
+            <a:pathLst>
+              <a:path h="4768958" w="2140399">
+                <a:moveTo>
+                  <a:pt x="0" y="0"/>
+                </a:moveTo>
+                <a:lnTo>
+                  <a:pt x="2140399" y="0"/>
+                </a:lnTo>
+                <a:lnTo>
+                  <a:pt x="2140399" y="4768958"/>
+                </a:lnTo>
+                <a:lnTo>
+                  <a:pt x="0" y="4768958"/>
+                </a:lnTo>
+                <a:lnTo>
+                  <a:pt x="0" y="0"/>
+                </a:lnTo>
+                <a:close/>
+              </a:path>
+            </a:pathLst>
+          </a:custGeom>
+          <a:blipFill>
+            <a:blip r:embed="rId13"/>
+            <a:stretch>
+              <a:fillRect l="0" t="0" r="0" b="0"/>
+            </a:stretch>
+          </a:blipFill>
+        </p:spPr>
+      </p:sp>
+      <p:grpSp>
+        <p:nvGrpSpPr>
+          <p:cNvPr name="Group 46" id="46"/>
+          <p:cNvGrpSpPr/>
+          <p:nvPr/>
+        </p:nvGrpSpPr>
+        <p:grpSpPr>
+          <a:xfrm rot="-5400000">
+            <a:off x="11251708" y="4650145"/>
+            <a:ext cx="231014" cy="511343"/>
+            <a:chOff x="0" y="0"/>
+            <a:chExt cx="558366" cy="1235924"/>
+          </a:xfrm>
+        </p:grpSpPr>
+        <p:sp>
+          <p:nvSpPr>
+            <p:cNvPr name="Freeform 47" id="47"/>
+            <p:cNvSpPr/>
+            <p:nvPr/>
+          </p:nvSpPr>
+          <p:spPr>
+            <a:xfrm flipH="false" flipV="false" rot="0">
+              <a:off x="0" y="0"/>
+              <a:ext cx="558366" cy="1235924"/>
+            </a:xfrm>
+            <a:custGeom>
+              <a:avLst/>
+              <a:gdLst/>
+              <a:ahLst/>
+              <a:cxnLst/>
+              <a:rect r="r" b="b" t="t" l="l"/>
+              <a:pathLst>
+                <a:path h="1235924" w="558366">
+                  <a:moveTo>
+                    <a:pt x="279183" y="1235924"/>
+                  </a:moveTo>
+                  <a:lnTo>
+                    <a:pt x="0" y="829524"/>
+                  </a:lnTo>
+                  <a:lnTo>
+                    <a:pt x="203200" y="829524"/>
+                  </a:lnTo>
+                  <a:lnTo>
+                    <a:pt x="203200" y="0"/>
+                  </a:lnTo>
+                  <a:lnTo>
+                    <a:pt x="355166" y="0"/>
+                  </a:lnTo>
+                  <a:lnTo>
+                    <a:pt x="355166" y="829524"/>
+                  </a:lnTo>
+                  <a:lnTo>
+                    <a:pt x="558366" y="829524"/>
+                  </a:lnTo>
+                  <a:lnTo>
+                    <a:pt x="279183" y="1235924"/>
+                  </a:lnTo>
+                  <a:close/>
+                </a:path>
+              </a:pathLst>
+            </a:custGeom>
+            <a:solidFill>
+              <a:srgbClr val="FFFFFF"/>
+            </a:solidFill>
+          </p:spPr>
+        </p:sp>
+        <p:sp>
+          <p:nvSpPr>
+            <p:cNvPr name="TextBox 48" id="48"/>
+            <p:cNvSpPr txBox="true"/>
+            <p:nvPr/>
+          </p:nvSpPr>
+          <p:spPr>
+            <a:xfrm>
+              <a:off x="203200" y="-19050"/>
+              <a:ext cx="151966" cy="1153374"/>
+            </a:xfrm>
+            <a:prstGeom prst="rect">
+              <a:avLst/>
+            </a:prstGeom>
+          </p:spPr>
+          <p:txBody>
+            <a:bodyPr anchor="ctr" rtlCol="false" tIns="50800" lIns="50800" bIns="50800" rIns="50800"/>
+            <a:lstStyle/>
+            <a:p>
+              <a:pPr algn="ctr">
+                <a:lnSpc>
+                  <a:spcPts val="2859"/>
+                </a:lnSpc>
+              </a:pPr>
+            </a:p>
+          </p:txBody>
+        </p:sp>
+      </p:grpSp>
+      <p:grpSp>
+        <p:nvGrpSpPr>
+          <p:cNvPr name="Group 49" id="49"/>
+          <p:cNvGrpSpPr/>
+          <p:nvPr/>
+        </p:nvGrpSpPr>
+        <p:grpSpPr>
+          <a:xfrm rot="-5400000">
+            <a:off x="11173205" y="7274730"/>
+            <a:ext cx="231014" cy="603122"/>
+            <a:chOff x="0" y="0"/>
+            <a:chExt cx="558366" cy="1457757"/>
+          </a:xfrm>
+        </p:grpSpPr>
+        <p:sp>
+          <p:nvSpPr>
+            <p:cNvPr name="Freeform 50" id="50"/>
+            <p:cNvSpPr/>
+            <p:nvPr/>
+          </p:nvSpPr>
+          <p:spPr>
+            <a:xfrm flipH="false" flipV="false" rot="0">
+              <a:off x="0" y="0"/>
+              <a:ext cx="558366" cy="1457757"/>
+            </a:xfrm>
+            <a:custGeom>
+              <a:avLst/>
+              <a:gdLst/>
+              <a:ahLst/>
+              <a:cxnLst/>
+              <a:rect r="r" b="b" t="t" l="l"/>
+              <a:pathLst>
+                <a:path h="1457757" w="558366">
+                  <a:moveTo>
+                    <a:pt x="279183" y="1457757"/>
+                  </a:moveTo>
+                  <a:lnTo>
+                    <a:pt x="0" y="1051357"/>
+                  </a:lnTo>
+                  <a:lnTo>
+                    <a:pt x="203200" y="1051357"/>
+                  </a:lnTo>
+                  <a:lnTo>
+                    <a:pt x="203200" y="0"/>
+                  </a:lnTo>
+                  <a:lnTo>
+                    <a:pt x="355166" y="0"/>
+                  </a:lnTo>
+                  <a:lnTo>
+                    <a:pt x="355166" y="1051357"/>
+                  </a:lnTo>
+                  <a:lnTo>
+                    <a:pt x="558366" y="1051357"/>
+                  </a:lnTo>
+                  <a:lnTo>
+                    <a:pt x="279183" y="1457757"/>
+                  </a:lnTo>
+                  <a:close/>
+                </a:path>
+              </a:pathLst>
+            </a:custGeom>
+            <a:solidFill>
+              <a:srgbClr val="FFFFFF"/>
+            </a:solidFill>
+          </p:spPr>
+        </p:sp>
+        <p:sp>
+          <p:nvSpPr>
+            <p:cNvPr name="TextBox 51" id="51"/>
+            <p:cNvSpPr txBox="true"/>
+            <p:nvPr/>
+          </p:nvSpPr>
+          <p:spPr>
+            <a:xfrm>
+              <a:off x="203200" y="-19050"/>
+              <a:ext cx="151966" cy="1375207"/>
+            </a:xfrm>
+            <a:prstGeom prst="rect">
+              <a:avLst/>
+            </a:prstGeom>
+          </p:spPr>
+          <p:txBody>
+            <a:bodyPr anchor="ctr" rtlCol="false" tIns="50800" lIns="50800" bIns="50800" rIns="50800"/>
+            <a:lstStyle/>
+            <a:p>
+              <a:pPr algn="ctr">
+                <a:lnSpc>
+                  <a:spcPts val="2859"/>
+                </a:lnSpc>
+              </a:pPr>
+            </a:p>
+          </p:txBody>
+        </p:sp>
+      </p:grpSp>
+      <p:grpSp>
+        <p:nvGrpSpPr>
+          <p:cNvPr name="Group 52" id="52"/>
+          <p:cNvGrpSpPr/>
+          <p:nvPr/>
+        </p:nvGrpSpPr>
+        <p:grpSpPr>
+          <a:xfrm rot="5400000">
+            <a:off x="14259314" y="7541735"/>
+            <a:ext cx="231014" cy="834734"/>
+            <a:chOff x="0" y="0"/>
+            <a:chExt cx="558366" cy="2017569"/>
+          </a:xfrm>
+        </p:grpSpPr>
+        <p:sp>
+          <p:nvSpPr>
+            <p:cNvPr name="Freeform 53" id="53"/>
+            <p:cNvSpPr/>
+            <p:nvPr/>
+          </p:nvSpPr>
+          <p:spPr>
+            <a:xfrm flipH="false" flipV="false" rot="0">
+              <a:off x="0" y="0"/>
+              <a:ext cx="558366" cy="2017569"/>
+            </a:xfrm>
+            <a:custGeom>
+              <a:avLst/>
+              <a:gdLst/>
+              <a:ahLst/>
+              <a:cxnLst/>
+              <a:rect r="r" b="b" t="t" l="l"/>
+              <a:pathLst>
+                <a:path h="2017569" w="558366">
+                  <a:moveTo>
+                    <a:pt x="279183" y="2017569"/>
+                  </a:moveTo>
+                  <a:lnTo>
+                    <a:pt x="0" y="1611169"/>
+                  </a:lnTo>
+                  <a:lnTo>
+                    <a:pt x="203200" y="1611169"/>
+                  </a:lnTo>
+                  <a:lnTo>
+                    <a:pt x="203200" y="0"/>
+                  </a:lnTo>
+                  <a:lnTo>
+                    <a:pt x="355166" y="0"/>
+                  </a:lnTo>
+                  <a:lnTo>
+                    <a:pt x="355166" y="1611169"/>
+                  </a:lnTo>
+                  <a:lnTo>
+                    <a:pt x="558366" y="1611169"/>
+                  </a:lnTo>
+                  <a:lnTo>
+                    <a:pt x="279183" y="2017569"/>
+                  </a:lnTo>
+                  <a:close/>
+                </a:path>
+              </a:pathLst>
+            </a:custGeom>
+            <a:solidFill>
+              <a:srgbClr val="FFFFFF"/>
+            </a:solidFill>
+          </p:spPr>
+        </p:sp>
+        <p:sp>
+          <p:nvSpPr>
+            <p:cNvPr name="TextBox 54" id="54"/>
+            <p:cNvSpPr txBox="true"/>
+            <p:nvPr/>
+          </p:nvSpPr>
+          <p:spPr>
+            <a:xfrm>
+              <a:off x="203200" y="-19050"/>
+              <a:ext cx="151966" cy="1935019"/>
+            </a:xfrm>
+            <a:prstGeom prst="rect">
+              <a:avLst/>
+            </a:prstGeom>
+          </p:spPr>
+          <p:txBody>
+            <a:bodyPr anchor="ctr" rtlCol="false" tIns="50800" lIns="50800" bIns="50800" rIns="50800"/>
+            <a:lstStyle/>
+            <a:p>
+              <a:pPr algn="ctr">
+                <a:lnSpc>
+                  <a:spcPts val="2859"/>
+                </a:lnSpc>
+              </a:pPr>
+            </a:p>
+          </p:txBody>
+        </p:sp>
+      </p:grpSp>
+      <p:sp>
+        <p:nvSpPr>
+          <p:cNvPr name="Freeform 55" id="55"/>
+          <p:cNvSpPr/>
+          <p:nvPr/>
+        </p:nvSpPr>
+        <p:spPr>
+          <a:xfrm flipH="false" flipV="false" rot="0">
+            <a:off x="8379096" y="1899536"/>
+            <a:ext cx="2608055" cy="3701756"/>
+          </a:xfrm>
+          <a:custGeom>
+            <a:avLst/>
+            <a:gdLst/>
+            <a:ahLst/>
+            <a:cxnLst/>
+            <a:rect r="r" b="b" t="t" l="l"/>
+            <a:pathLst>
+              <a:path h="3701756" w="2608055">
+                <a:moveTo>
+                  <a:pt x="0" y="0"/>
+                </a:moveTo>
+                <a:lnTo>
+                  <a:pt x="2608056" y="0"/>
+                </a:lnTo>
+                <a:lnTo>
+                  <a:pt x="2608056" y="3701756"/>
+                </a:lnTo>
+                <a:lnTo>
+                  <a:pt x="0" y="3701756"/>
+                </a:lnTo>
+                <a:lnTo>
+                  <a:pt x="0" y="0"/>
+                </a:lnTo>
+                <a:close/>
+              </a:path>
+            </a:pathLst>
+          </a:custGeom>
+          <a:blipFill>
+            <a:blip r:embed="rId14"/>
+            <a:stretch>
+              <a:fillRect l="0" t="0" r="0" b="0"/>
+            </a:stretch>
+          </a:blipFill>
+        </p:spPr>
+      </p:sp>
+      <p:sp>
+        <p:nvSpPr>
+          <p:cNvPr name="TextBox 56" id="56"/>
           <p:cNvSpPr txBox="true"/>
           <p:nvPr/>
         </p:nvSpPr>
@@ -6739,7 +8375,7 @@
       </p:sp>
       <p:sp>
         <p:nvSpPr>
-          <p:cNvPr name="TextBox 9" id="9"/>
+          <p:cNvPr name="TextBox 57" id="57"/>
           <p:cNvSpPr txBox="true"/>
           <p:nvPr/>
         </p:nvSpPr>

--- a/documentacion_extra/presentacion/cuidaDos.pptx
+++ b/documentacion_extra/presentacion/cuidaDos.pptx
@@ -1,52 +1,52 @@
 
 <file path=ppt/presentation.xml><?xml version="1.0" encoding="utf-8"?>
-<p:presentation xmlns:a="http://schemas.openxmlformats.org/drawingml/2006/main" xmlns:r="http://schemas.openxmlformats.org/officeDocument/2006/relationships" xmlns:p="http://schemas.openxmlformats.org/presentationml/2006/main" saveSubsetFonts="1" embedTrueTypeFonts="true">
+<p:presentation xmlns:a="http://schemas.openxmlformats.org/drawingml/2006/main" xmlns:r="http://schemas.openxmlformats.org/officeDocument/2006/relationships" xmlns:p="http://schemas.openxmlformats.org/presentationml/2006/main" embedTrueTypeFonts="1" saveSubsetFonts="1">
   <p:sldMasterIdLst>
     <p:sldMasterId id="2147483648" r:id="rId1"/>
   </p:sldMasterIdLst>
   <p:sldIdLst>
-    <p:sldId id="256" r:id="rId6"/>
-    <p:sldId id="257" r:id="rId7"/>
-    <p:sldId id="258" r:id="rId8"/>
-    <p:sldId id="259" r:id="rId9"/>
-    <p:sldId id="260" r:id="rId10"/>
-    <p:sldId id="261" r:id="rId11"/>
-    <p:sldId id="262" r:id="rId12"/>
-    <p:sldId id="263" r:id="rId13"/>
-    <p:sldId id="264" r:id="rId14"/>
-    <p:sldId id="265" r:id="rId15"/>
-    <p:sldId id="266" r:id="rId16"/>
+    <p:sldId id="256" r:id="rId2"/>
+    <p:sldId id="257" r:id="rId3"/>
+    <p:sldId id="258" r:id="rId4"/>
+    <p:sldId id="259" r:id="rId5"/>
+    <p:sldId id="260" r:id="rId6"/>
+    <p:sldId id="261" r:id="rId7"/>
+    <p:sldId id="262" r:id="rId8"/>
+    <p:sldId id="263" r:id="rId9"/>
+    <p:sldId id="264" r:id="rId10"/>
+    <p:sldId id="265" r:id="rId11"/>
+    <p:sldId id="266" r:id="rId12"/>
   </p:sldIdLst>
   <p:sldSz cx="18288000" cy="10287000"/>
   <p:notesSz cx="6858000" cy="9144000"/>
   <p:embeddedFontLst>
     <p:embeddedFont>
-      <p:font typeface="Montserrat Bold" charset="1" panose="00000800000000000000"/>
+      <p:font typeface="Fraunces" panose="020B0604020202020204" charset="0"/>
+      <p:regular r:id="rId13"/>
+    </p:embeddedFont>
+    <p:embeddedFont>
+      <p:font typeface="Fraunces Bold" panose="020B0604020202020204" charset="0"/>
+      <p:regular r:id="rId14"/>
+    </p:embeddedFont>
+    <p:embeddedFont>
+      <p:font typeface="Montserrat" panose="00000500000000000000" pitchFamily="2" charset="0"/>
+      <p:regular r:id="rId15"/>
+    </p:embeddedFont>
+    <p:embeddedFont>
+      <p:font typeface="Montserrat Bold" panose="020B0604020202020204" charset="0"/>
+      <p:regular r:id="rId16"/>
+    </p:embeddedFont>
+    <p:embeddedFont>
+      <p:font typeface="Open Sans Bold" panose="020B0604020202020204" charset="0"/>
       <p:regular r:id="rId17"/>
     </p:embeddedFont>
     <p:embeddedFont>
-      <p:font typeface="Montserrat" charset="1" panose="00000500000000000000"/>
+      <p:font typeface="Poppins" panose="00000500000000000000" pitchFamily="2" charset="0"/>
       <p:regular r:id="rId18"/>
     </p:embeddedFont>
     <p:embeddedFont>
-      <p:font typeface="Poppins" charset="1" panose="00000500000000000000"/>
+      <p:font typeface="Poppins Bold" panose="020B0604020202020204" charset="0"/>
       <p:regular r:id="rId19"/>
-    </p:embeddedFont>
-    <p:embeddedFont>
-      <p:font typeface="Poppins Bold" charset="1" panose="00000800000000000000"/>
-      <p:regular r:id="rId20"/>
-    </p:embeddedFont>
-    <p:embeddedFont>
-      <p:font typeface="Fraunces Bold" charset="1" panose="00000000000000000000"/>
-      <p:regular r:id="rId21"/>
-    </p:embeddedFont>
-    <p:embeddedFont>
-      <p:font typeface="Open Sans Bold" charset="1" panose="020B0806030504020204"/>
-      <p:regular r:id="rId22"/>
-    </p:embeddedFont>
-    <p:embeddedFont>
-      <p:font typeface="Fraunces" charset="1" panose="00000000000000000000"/>
-      <p:regular r:id="rId23"/>
     </p:embeddedFont>
   </p:embeddedFontLst>
   <p:defaultTextStyle>
@@ -144,6 +144,22 @@
       </a:defRPr>
     </a:lvl9pPr>
   </p:defaultTextStyle>
+  <p:extLst>
+    <p:ext uri="{EFAFB233-063F-42B5-8137-9DF3F51BA10A}">
+      <p15:sldGuideLst xmlns:p15="http://schemas.microsoft.com/office/powerpoint/2012/main">
+        <p15:guide id="1" orient="horz" pos="2160">
+          <p15:clr>
+            <a:srgbClr val="A4A3A4"/>
+          </p15:clr>
+        </p15:guide>
+        <p15:guide id="2" pos="2880">
+          <p15:clr>
+            <a:srgbClr val="A4A3A4"/>
+          </p15:clr>
+        </p15:guide>
+      </p15:sldGuideLst>
+    </p:ext>
+  </p:extLst>
 </p:presentation>
 </file>
 
@@ -185,10 +201,9 @@
           <a:lstStyle/>
           <a:p>
             <a:r>
-              <a:rPr lang="en-US" smtClean="0"/>
+              <a:rPr lang="en-US"/>
               <a:t>Click to edit Master title style</a:t>
             </a:r>
-            <a:endParaRPr lang="en-US"/>
           </a:p>
         </p:txBody>
       </p:sp>
@@ -304,10 +319,9 @@
           </a:lstStyle>
           <a:p>
             <a:r>
-              <a:rPr lang="en-US" smtClean="0"/>
+              <a:rPr lang="en-US"/>
               <a:t>Click to edit Master subtitle style</a:t>
             </a:r>
-            <a:endParaRPr lang="en-US"/>
           </a:p>
         </p:txBody>
       </p:sp>
@@ -329,7 +343,7 @@
             <a:fld id="{1D8BD707-D9CF-40AE-B4C6-C98DA3205C09}" type="datetimeFigureOut">
               <a:rPr lang="en-US" smtClean="0"/>
               <a:pPr/>
-              <a:t>8/1/2011</a:t>
+              <a:t>5/27/2026</a:t>
             </a:fld>
             <a:endParaRPr lang="en-US"/>
           </a:p>
@@ -372,7 +386,7 @@
             <a:fld id="{B6F15528-21DE-4FAA-801E-634DDDAF4B2B}" type="slidenum">
               <a:rPr lang="en-US" smtClean="0"/>
               <a:pPr/>
-              <a:t>‹#›</a:t>
+              <a:t>‹Nº›</a:t>
             </a:fld>
             <a:endParaRPr lang="en-US"/>
           </a:p>
@@ -419,10 +433,9 @@
           <a:lstStyle/>
           <a:p>
             <a:r>
-              <a:rPr lang="en-US" smtClean="0"/>
+              <a:rPr lang="en-US"/>
               <a:t>Click to edit Master title style</a:t>
             </a:r>
-            <a:endParaRPr lang="en-US"/>
           </a:p>
         </p:txBody>
       </p:sp>
@@ -443,38 +456,37 @@
           <a:p>
             <a:pPr lvl="0"/>
             <a:r>
-              <a:rPr lang="en-US" smtClean="0"/>
+              <a:rPr lang="en-US"/>
               <a:t>Click to edit Master text styles</a:t>
             </a:r>
           </a:p>
           <a:p>
             <a:pPr lvl="1"/>
             <a:r>
-              <a:rPr lang="en-US" smtClean="0"/>
+              <a:rPr lang="en-US"/>
               <a:t>Second level</a:t>
             </a:r>
           </a:p>
           <a:p>
             <a:pPr lvl="2"/>
             <a:r>
-              <a:rPr lang="en-US" smtClean="0"/>
+              <a:rPr lang="en-US"/>
               <a:t>Third level</a:t>
             </a:r>
           </a:p>
           <a:p>
             <a:pPr lvl="3"/>
             <a:r>
-              <a:rPr lang="en-US" smtClean="0"/>
+              <a:rPr lang="en-US"/>
               <a:t>Fourth level</a:t>
             </a:r>
           </a:p>
           <a:p>
             <a:pPr lvl="4"/>
             <a:r>
-              <a:rPr lang="en-US" smtClean="0"/>
+              <a:rPr lang="en-US"/>
               <a:t>Fifth level</a:t>
             </a:r>
-            <a:endParaRPr lang="en-US"/>
           </a:p>
         </p:txBody>
       </p:sp>
@@ -496,7 +508,7 @@
             <a:fld id="{1D8BD707-D9CF-40AE-B4C6-C98DA3205C09}" type="datetimeFigureOut">
               <a:rPr lang="en-US" smtClean="0"/>
               <a:pPr/>
-              <a:t>8/1/2011</a:t>
+              <a:t>5/27/2026</a:t>
             </a:fld>
             <a:endParaRPr lang="en-US"/>
           </a:p>
@@ -539,7 +551,7 @@
             <a:fld id="{B6F15528-21DE-4FAA-801E-634DDDAF4B2B}" type="slidenum">
               <a:rPr lang="en-US" smtClean="0"/>
               <a:pPr/>
-              <a:t>‹#›</a:t>
+              <a:t>‹Nº›</a:t>
             </a:fld>
             <a:endParaRPr lang="en-US"/>
           </a:p>
@@ -591,10 +603,9 @@
           <a:lstStyle/>
           <a:p>
             <a:r>
-              <a:rPr lang="en-US" smtClean="0"/>
+              <a:rPr lang="en-US"/>
               <a:t>Click to edit Master title style</a:t>
             </a:r>
-            <a:endParaRPr lang="en-US"/>
           </a:p>
         </p:txBody>
       </p:sp>
@@ -620,38 +631,37 @@
           <a:p>
             <a:pPr lvl="0"/>
             <a:r>
-              <a:rPr lang="en-US" smtClean="0"/>
+              <a:rPr lang="en-US"/>
               <a:t>Click to edit Master text styles</a:t>
             </a:r>
           </a:p>
           <a:p>
             <a:pPr lvl="1"/>
             <a:r>
-              <a:rPr lang="en-US" smtClean="0"/>
+              <a:rPr lang="en-US"/>
               <a:t>Second level</a:t>
             </a:r>
           </a:p>
           <a:p>
             <a:pPr lvl="2"/>
             <a:r>
-              <a:rPr lang="en-US" smtClean="0"/>
+              <a:rPr lang="en-US"/>
               <a:t>Third level</a:t>
             </a:r>
           </a:p>
           <a:p>
             <a:pPr lvl="3"/>
             <a:r>
-              <a:rPr lang="en-US" smtClean="0"/>
+              <a:rPr lang="en-US"/>
               <a:t>Fourth level</a:t>
             </a:r>
           </a:p>
           <a:p>
             <a:pPr lvl="4"/>
             <a:r>
-              <a:rPr lang="en-US" smtClean="0"/>
+              <a:rPr lang="en-US"/>
               <a:t>Fifth level</a:t>
             </a:r>
-            <a:endParaRPr lang="en-US"/>
           </a:p>
         </p:txBody>
       </p:sp>
@@ -673,7 +683,7 @@
             <a:fld id="{1D8BD707-D9CF-40AE-B4C6-C98DA3205C09}" type="datetimeFigureOut">
               <a:rPr lang="en-US" smtClean="0"/>
               <a:pPr/>
-              <a:t>8/1/2011</a:t>
+              <a:t>5/27/2026</a:t>
             </a:fld>
             <a:endParaRPr lang="en-US"/>
           </a:p>
@@ -716,7 +726,7 @@
             <a:fld id="{B6F15528-21DE-4FAA-801E-634DDDAF4B2B}" type="slidenum">
               <a:rPr lang="en-US" smtClean="0"/>
               <a:pPr/>
-              <a:t>‹#›</a:t>
+              <a:t>‹Nº›</a:t>
             </a:fld>
             <a:endParaRPr lang="en-US"/>
           </a:p>
@@ -763,10 +773,9 @@
           <a:lstStyle/>
           <a:p>
             <a:r>
-              <a:rPr lang="en-US" smtClean="0"/>
+              <a:rPr lang="en-US"/>
               <a:t>Click to edit Master title style</a:t>
             </a:r>
-            <a:endParaRPr lang="en-US"/>
           </a:p>
         </p:txBody>
       </p:sp>
@@ -787,38 +796,37 @@
           <a:p>
             <a:pPr lvl="0"/>
             <a:r>
-              <a:rPr lang="en-US" smtClean="0"/>
+              <a:rPr lang="en-US"/>
               <a:t>Click to edit Master text styles</a:t>
             </a:r>
           </a:p>
           <a:p>
             <a:pPr lvl="1"/>
             <a:r>
-              <a:rPr lang="en-US" smtClean="0"/>
+              <a:rPr lang="en-US"/>
               <a:t>Second level</a:t>
             </a:r>
           </a:p>
           <a:p>
             <a:pPr lvl="2"/>
             <a:r>
-              <a:rPr lang="en-US" smtClean="0"/>
+              <a:rPr lang="en-US"/>
               <a:t>Third level</a:t>
             </a:r>
           </a:p>
           <a:p>
             <a:pPr lvl="3"/>
             <a:r>
-              <a:rPr lang="en-US" smtClean="0"/>
+              <a:rPr lang="en-US"/>
               <a:t>Fourth level</a:t>
             </a:r>
           </a:p>
           <a:p>
             <a:pPr lvl="4"/>
             <a:r>
-              <a:rPr lang="en-US" smtClean="0"/>
+              <a:rPr lang="en-US"/>
               <a:t>Fifth level</a:t>
             </a:r>
-            <a:endParaRPr lang="en-US"/>
           </a:p>
         </p:txBody>
       </p:sp>
@@ -840,7 +848,7 @@
             <a:fld id="{1D8BD707-D9CF-40AE-B4C6-C98DA3205C09}" type="datetimeFigureOut">
               <a:rPr lang="en-US" smtClean="0"/>
               <a:pPr/>
-              <a:t>8/1/2011</a:t>
+              <a:t>5/27/2026</a:t>
             </a:fld>
             <a:endParaRPr lang="en-US"/>
           </a:p>
@@ -883,7 +891,7 @@
             <a:fld id="{B6F15528-21DE-4FAA-801E-634DDDAF4B2B}" type="slidenum">
               <a:rPr lang="en-US" smtClean="0"/>
               <a:pPr/>
-              <a:t>‹#›</a:t>
+              <a:t>‹Nº›</a:t>
             </a:fld>
             <a:endParaRPr lang="en-US"/>
           </a:p>
@@ -939,10 +947,9 @@
           </a:lstStyle>
           <a:p>
             <a:r>
-              <a:rPr lang="en-US" smtClean="0"/>
+              <a:rPr lang="en-US"/>
               <a:t>Click to edit Master title style</a:t>
             </a:r>
-            <a:endParaRPr lang="en-US"/>
           </a:p>
         </p:txBody>
       </p:sp>
@@ -1059,7 +1066,7 @@
           <a:p>
             <a:pPr lvl="0"/>
             <a:r>
-              <a:rPr lang="en-US" smtClean="0"/>
+              <a:rPr lang="en-US"/>
               <a:t>Click to edit Master text styles</a:t>
             </a:r>
           </a:p>
@@ -1083,7 +1090,7 @@
             <a:fld id="{1D8BD707-D9CF-40AE-B4C6-C98DA3205C09}" type="datetimeFigureOut">
               <a:rPr lang="en-US" smtClean="0"/>
               <a:pPr/>
-              <a:t>8/1/2011</a:t>
+              <a:t>5/27/2026</a:t>
             </a:fld>
             <a:endParaRPr lang="en-US"/>
           </a:p>
@@ -1126,7 +1133,7 @@
             <a:fld id="{B6F15528-21DE-4FAA-801E-634DDDAF4B2B}" type="slidenum">
               <a:rPr lang="en-US" smtClean="0"/>
               <a:pPr/>
-              <a:t>‹#›</a:t>
+              <a:t>‹Nº›</a:t>
             </a:fld>
             <a:endParaRPr lang="en-US"/>
           </a:p>
@@ -1173,10 +1180,9 @@
           <a:lstStyle/>
           <a:p>
             <a:r>
-              <a:rPr lang="en-US" smtClean="0"/>
+              <a:rPr lang="en-US"/>
               <a:t>Click to edit Master title style</a:t>
             </a:r>
-            <a:endParaRPr lang="en-US"/>
           </a:p>
         </p:txBody>
       </p:sp>
@@ -1230,38 +1236,37 @@
           <a:p>
             <a:pPr lvl="0"/>
             <a:r>
-              <a:rPr lang="en-US" smtClean="0"/>
+              <a:rPr lang="en-US"/>
               <a:t>Click to edit Master text styles</a:t>
             </a:r>
           </a:p>
           <a:p>
             <a:pPr lvl="1"/>
             <a:r>
-              <a:rPr lang="en-US" smtClean="0"/>
+              <a:rPr lang="en-US"/>
               <a:t>Second level</a:t>
             </a:r>
           </a:p>
           <a:p>
             <a:pPr lvl="2"/>
             <a:r>
-              <a:rPr lang="en-US" smtClean="0"/>
+              <a:rPr lang="en-US"/>
               <a:t>Third level</a:t>
             </a:r>
           </a:p>
           <a:p>
             <a:pPr lvl="3"/>
             <a:r>
-              <a:rPr lang="en-US" smtClean="0"/>
+              <a:rPr lang="en-US"/>
               <a:t>Fourth level</a:t>
             </a:r>
           </a:p>
           <a:p>
             <a:pPr lvl="4"/>
             <a:r>
-              <a:rPr lang="en-US" smtClean="0"/>
+              <a:rPr lang="en-US"/>
               <a:t>Fifth level</a:t>
             </a:r>
-            <a:endParaRPr lang="en-US"/>
           </a:p>
         </p:txBody>
       </p:sp>
@@ -1315,38 +1320,37 @@
           <a:p>
             <a:pPr lvl="0"/>
             <a:r>
-              <a:rPr lang="en-US" smtClean="0"/>
+              <a:rPr lang="en-US"/>
               <a:t>Click to edit Master text styles</a:t>
             </a:r>
           </a:p>
           <a:p>
             <a:pPr lvl="1"/>
             <a:r>
-              <a:rPr lang="en-US" smtClean="0"/>
+              <a:rPr lang="en-US"/>
               <a:t>Second level</a:t>
             </a:r>
           </a:p>
           <a:p>
             <a:pPr lvl="2"/>
             <a:r>
-              <a:rPr lang="en-US" smtClean="0"/>
+              <a:rPr lang="en-US"/>
               <a:t>Third level</a:t>
             </a:r>
           </a:p>
           <a:p>
             <a:pPr lvl="3"/>
             <a:r>
-              <a:rPr lang="en-US" smtClean="0"/>
+              <a:rPr lang="en-US"/>
               <a:t>Fourth level</a:t>
             </a:r>
           </a:p>
           <a:p>
             <a:pPr lvl="4"/>
             <a:r>
-              <a:rPr lang="en-US" smtClean="0"/>
+              <a:rPr lang="en-US"/>
               <a:t>Fifth level</a:t>
             </a:r>
-            <a:endParaRPr lang="en-US"/>
           </a:p>
         </p:txBody>
       </p:sp>
@@ -1368,7 +1372,7 @@
             <a:fld id="{1D8BD707-D9CF-40AE-B4C6-C98DA3205C09}" type="datetimeFigureOut">
               <a:rPr lang="en-US" smtClean="0"/>
               <a:pPr/>
-              <a:t>8/1/2011</a:t>
+              <a:t>5/27/2026</a:t>
             </a:fld>
             <a:endParaRPr lang="en-US"/>
           </a:p>
@@ -1411,7 +1415,7 @@
             <a:fld id="{B6F15528-21DE-4FAA-801E-634DDDAF4B2B}" type="slidenum">
               <a:rPr lang="en-US" smtClean="0"/>
               <a:pPr/>
-              <a:t>‹#›</a:t>
+              <a:t>‹Nº›</a:t>
             </a:fld>
             <a:endParaRPr lang="en-US"/>
           </a:p>
@@ -1462,10 +1466,9 @@
           </a:lstStyle>
           <a:p>
             <a:r>
-              <a:rPr lang="en-US" smtClean="0"/>
+              <a:rPr lang="en-US"/>
               <a:t>Click to edit Master title style</a:t>
             </a:r>
-            <a:endParaRPr lang="en-US"/>
           </a:p>
         </p:txBody>
       </p:sp>
@@ -1528,7 +1531,7 @@
           <a:p>
             <a:pPr lvl="0"/>
             <a:r>
-              <a:rPr lang="en-US" smtClean="0"/>
+              <a:rPr lang="en-US"/>
               <a:t>Click to edit Master text styles</a:t>
             </a:r>
           </a:p>
@@ -1584,38 +1587,37 @@
           <a:p>
             <a:pPr lvl="0"/>
             <a:r>
-              <a:rPr lang="en-US" smtClean="0"/>
+              <a:rPr lang="en-US"/>
               <a:t>Click to edit Master text styles</a:t>
             </a:r>
           </a:p>
           <a:p>
             <a:pPr lvl="1"/>
             <a:r>
-              <a:rPr lang="en-US" smtClean="0"/>
+              <a:rPr lang="en-US"/>
               <a:t>Second level</a:t>
             </a:r>
           </a:p>
           <a:p>
             <a:pPr lvl="2"/>
             <a:r>
-              <a:rPr lang="en-US" smtClean="0"/>
+              <a:rPr lang="en-US"/>
               <a:t>Third level</a:t>
             </a:r>
           </a:p>
           <a:p>
             <a:pPr lvl="3"/>
             <a:r>
-              <a:rPr lang="en-US" smtClean="0"/>
+              <a:rPr lang="en-US"/>
               <a:t>Fourth level</a:t>
             </a:r>
           </a:p>
           <a:p>
             <a:pPr lvl="4"/>
             <a:r>
-              <a:rPr lang="en-US" smtClean="0"/>
+              <a:rPr lang="en-US"/>
               <a:t>Fifth level</a:t>
             </a:r>
-            <a:endParaRPr lang="en-US"/>
           </a:p>
         </p:txBody>
       </p:sp>
@@ -1678,7 +1680,7 @@
           <a:p>
             <a:pPr lvl="0"/>
             <a:r>
-              <a:rPr lang="en-US" smtClean="0"/>
+              <a:rPr lang="en-US"/>
               <a:t>Click to edit Master text styles</a:t>
             </a:r>
           </a:p>
@@ -1734,38 +1736,37 @@
           <a:p>
             <a:pPr lvl="0"/>
             <a:r>
-              <a:rPr lang="en-US" smtClean="0"/>
+              <a:rPr lang="en-US"/>
               <a:t>Click to edit Master text styles</a:t>
             </a:r>
           </a:p>
           <a:p>
             <a:pPr lvl="1"/>
             <a:r>
-              <a:rPr lang="en-US" smtClean="0"/>
+              <a:rPr lang="en-US"/>
               <a:t>Second level</a:t>
             </a:r>
           </a:p>
           <a:p>
             <a:pPr lvl="2"/>
             <a:r>
-              <a:rPr lang="en-US" smtClean="0"/>
+              <a:rPr lang="en-US"/>
               <a:t>Third level</a:t>
             </a:r>
           </a:p>
           <a:p>
             <a:pPr lvl="3"/>
             <a:r>
-              <a:rPr lang="en-US" smtClean="0"/>
+              <a:rPr lang="en-US"/>
               <a:t>Fourth level</a:t>
             </a:r>
           </a:p>
           <a:p>
             <a:pPr lvl="4"/>
             <a:r>
-              <a:rPr lang="en-US" smtClean="0"/>
+              <a:rPr lang="en-US"/>
               <a:t>Fifth level</a:t>
             </a:r>
-            <a:endParaRPr lang="en-US"/>
           </a:p>
         </p:txBody>
       </p:sp>
@@ -1787,7 +1788,7 @@
             <a:fld id="{1D8BD707-D9CF-40AE-B4C6-C98DA3205C09}" type="datetimeFigureOut">
               <a:rPr lang="en-US" smtClean="0"/>
               <a:pPr/>
-              <a:t>8/1/2011</a:t>
+              <a:t>5/27/2026</a:t>
             </a:fld>
             <a:endParaRPr lang="en-US"/>
           </a:p>
@@ -1830,7 +1831,7 @@
             <a:fld id="{B6F15528-21DE-4FAA-801E-634DDDAF4B2B}" type="slidenum">
               <a:rPr lang="en-US" smtClean="0"/>
               <a:pPr/>
-              <a:t>‹#›</a:t>
+              <a:t>‹Nº›</a:t>
             </a:fld>
             <a:endParaRPr lang="en-US"/>
           </a:p>
@@ -1877,10 +1878,9 @@
           <a:lstStyle/>
           <a:p>
             <a:r>
-              <a:rPr lang="en-US" smtClean="0"/>
+              <a:rPr lang="en-US"/>
               <a:t>Click to edit Master title style</a:t>
             </a:r>
-            <a:endParaRPr lang="en-US"/>
           </a:p>
         </p:txBody>
       </p:sp>
@@ -1902,7 +1902,7 @@
             <a:fld id="{1D8BD707-D9CF-40AE-B4C6-C98DA3205C09}" type="datetimeFigureOut">
               <a:rPr lang="en-US" smtClean="0"/>
               <a:pPr/>
-              <a:t>8/1/2011</a:t>
+              <a:t>5/27/2026</a:t>
             </a:fld>
             <a:endParaRPr lang="en-US"/>
           </a:p>
@@ -1945,7 +1945,7 @@
             <a:fld id="{B6F15528-21DE-4FAA-801E-634DDDAF4B2B}" type="slidenum">
               <a:rPr lang="en-US" smtClean="0"/>
               <a:pPr/>
-              <a:t>‹#›</a:t>
+              <a:t>‹Nº›</a:t>
             </a:fld>
             <a:endParaRPr lang="en-US"/>
           </a:p>
@@ -1994,7 +1994,7 @@
             <a:fld id="{1D8BD707-D9CF-40AE-B4C6-C98DA3205C09}" type="datetimeFigureOut">
               <a:rPr lang="en-US" smtClean="0"/>
               <a:pPr/>
-              <a:t>8/1/2011</a:t>
+              <a:t>5/27/2026</a:t>
             </a:fld>
             <a:endParaRPr lang="en-US"/>
           </a:p>
@@ -2037,7 +2037,7 @@
             <a:fld id="{B6F15528-21DE-4FAA-801E-634DDDAF4B2B}" type="slidenum">
               <a:rPr lang="en-US" smtClean="0"/>
               <a:pPr/>
-              <a:t>‹#›</a:t>
+              <a:t>‹Nº›</a:t>
             </a:fld>
             <a:endParaRPr lang="en-US"/>
           </a:p>
@@ -2093,10 +2093,9 @@
           </a:lstStyle>
           <a:p>
             <a:r>
-              <a:rPr lang="en-US" smtClean="0"/>
+              <a:rPr lang="en-US"/>
               <a:t>Click to edit Master title style</a:t>
             </a:r>
-            <a:endParaRPr lang="en-US"/>
           </a:p>
         </p:txBody>
       </p:sp>
@@ -2150,38 +2149,37 @@
           <a:p>
             <a:pPr lvl="0"/>
             <a:r>
-              <a:rPr lang="en-US" smtClean="0"/>
+              <a:rPr lang="en-US"/>
               <a:t>Click to edit Master text styles</a:t>
             </a:r>
           </a:p>
           <a:p>
             <a:pPr lvl="1"/>
             <a:r>
-              <a:rPr lang="en-US" smtClean="0"/>
+              <a:rPr lang="en-US"/>
               <a:t>Second level</a:t>
             </a:r>
           </a:p>
           <a:p>
             <a:pPr lvl="2"/>
             <a:r>
-              <a:rPr lang="en-US" smtClean="0"/>
+              <a:rPr lang="en-US"/>
               <a:t>Third level</a:t>
             </a:r>
           </a:p>
           <a:p>
             <a:pPr lvl="3"/>
             <a:r>
-              <a:rPr lang="en-US" smtClean="0"/>
+              <a:rPr lang="en-US"/>
               <a:t>Fourth level</a:t>
             </a:r>
           </a:p>
           <a:p>
             <a:pPr lvl="4"/>
             <a:r>
-              <a:rPr lang="en-US" smtClean="0"/>
+              <a:rPr lang="en-US"/>
               <a:t>Fifth level</a:t>
             </a:r>
-            <a:endParaRPr lang="en-US"/>
           </a:p>
         </p:txBody>
       </p:sp>
@@ -2244,7 +2242,7 @@
           <a:p>
             <a:pPr lvl="0"/>
             <a:r>
-              <a:rPr lang="en-US" smtClean="0"/>
+              <a:rPr lang="en-US"/>
               <a:t>Click to edit Master text styles</a:t>
             </a:r>
           </a:p>
@@ -2268,7 +2266,7 @@
             <a:fld id="{1D8BD707-D9CF-40AE-B4C6-C98DA3205C09}" type="datetimeFigureOut">
               <a:rPr lang="en-US" smtClean="0"/>
               <a:pPr/>
-              <a:t>8/1/2011</a:t>
+              <a:t>5/27/2026</a:t>
             </a:fld>
             <a:endParaRPr lang="en-US"/>
           </a:p>
@@ -2311,7 +2309,7 @@
             <a:fld id="{B6F15528-21DE-4FAA-801E-634DDDAF4B2B}" type="slidenum">
               <a:rPr lang="en-US" smtClean="0"/>
               <a:pPr/>
-              <a:t>‹#›</a:t>
+              <a:t>‹Nº›</a:t>
             </a:fld>
             <a:endParaRPr lang="en-US"/>
           </a:p>
@@ -2367,10 +2365,9 @@
           </a:lstStyle>
           <a:p>
             <a:r>
-              <a:rPr lang="en-US" smtClean="0"/>
+              <a:rPr lang="en-US"/>
               <a:t>Click to edit Master title style</a:t>
             </a:r>
-            <a:endParaRPr lang="en-US"/>
           </a:p>
         </p:txBody>
       </p:sp>
@@ -2494,7 +2491,7 @@
           <a:p>
             <a:pPr lvl="0"/>
             <a:r>
-              <a:rPr lang="en-US" smtClean="0"/>
+              <a:rPr lang="en-US"/>
               <a:t>Click to edit Master text styles</a:t>
             </a:r>
           </a:p>
@@ -2518,7 +2515,7 @@
             <a:fld id="{1D8BD707-D9CF-40AE-B4C6-C98DA3205C09}" type="datetimeFigureOut">
               <a:rPr lang="en-US" smtClean="0"/>
               <a:pPr/>
-              <a:t>8/1/2011</a:t>
+              <a:t>5/27/2026</a:t>
             </a:fld>
             <a:endParaRPr lang="en-US"/>
           </a:p>
@@ -2561,7 +2558,7 @@
             <a:fld id="{B6F15528-21DE-4FAA-801E-634DDDAF4B2B}" type="slidenum">
               <a:rPr lang="en-US" smtClean="0"/>
               <a:pPr/>
-              <a:t>‹#›</a:t>
+              <a:t>‹Nº›</a:t>
             </a:fld>
             <a:endParaRPr lang="en-US"/>
           </a:p>
@@ -2623,10 +2620,9 @@
           <a:lstStyle/>
           <a:p>
             <a:r>
-              <a:rPr lang="en-US" smtClean="0"/>
+              <a:rPr lang="en-US"/>
               <a:t>Click to edit Master title style</a:t>
             </a:r>
-            <a:endParaRPr lang="en-US"/>
           </a:p>
         </p:txBody>
       </p:sp>
@@ -2657,38 +2653,37 @@
           <a:p>
             <a:pPr lvl="0"/>
             <a:r>
-              <a:rPr lang="en-US" smtClean="0"/>
+              <a:rPr lang="en-US"/>
               <a:t>Click to edit Master text styles</a:t>
             </a:r>
           </a:p>
           <a:p>
             <a:pPr lvl="1"/>
             <a:r>
-              <a:rPr lang="en-US" smtClean="0"/>
+              <a:rPr lang="en-US"/>
               <a:t>Second level</a:t>
             </a:r>
           </a:p>
           <a:p>
             <a:pPr lvl="2"/>
             <a:r>
-              <a:rPr lang="en-US" smtClean="0"/>
+              <a:rPr lang="en-US"/>
               <a:t>Third level</a:t>
             </a:r>
           </a:p>
           <a:p>
             <a:pPr lvl="3"/>
             <a:r>
-              <a:rPr lang="en-US" smtClean="0"/>
+              <a:rPr lang="en-US"/>
               <a:t>Fourth level</a:t>
             </a:r>
           </a:p>
           <a:p>
             <a:pPr lvl="4"/>
             <a:r>
-              <a:rPr lang="en-US" smtClean="0"/>
+              <a:rPr lang="en-US"/>
               <a:t>Fifth level</a:t>
             </a:r>
-            <a:endParaRPr lang="en-US"/>
           </a:p>
         </p:txBody>
       </p:sp>
@@ -2728,7 +2723,7 @@
             <a:fld id="{1D8BD707-D9CF-40AE-B4C6-C98DA3205C09}" type="datetimeFigureOut">
               <a:rPr lang="en-US" smtClean="0"/>
               <a:pPr/>
-              <a:t>8/1/2011</a:t>
+              <a:t>5/27/2026</a:t>
             </a:fld>
             <a:endParaRPr lang="en-US"/>
           </a:p>
@@ -2807,7 +2802,7 @@
             <a:fld id="{B6F15528-21DE-4FAA-801E-634DDDAF4B2B}" type="slidenum">
               <a:rPr lang="en-US" smtClean="0"/>
               <a:pPr/>
-              <a:t>‹#›</a:t>
+              <a:t>‹Nº›</a:t>
             </a:fld>
             <a:endParaRPr lang="en-US"/>
           </a:p>
@@ -3083,13 +3078,14 @@
 </file>
 
 <file path=ppt/slides/slide1.xml><?xml version="1.0" encoding="utf-8"?>
-<p:sld xmlns:p="http://schemas.openxmlformats.org/presentationml/2006/main" xmlns:a="http://schemas.openxmlformats.org/drawingml/2006/main" xmlns:r="http://schemas.openxmlformats.org/officeDocument/2006/relationships">
+<p:sld xmlns:a="http://schemas.openxmlformats.org/drawingml/2006/main" xmlns:r="http://schemas.openxmlformats.org/officeDocument/2006/relationships" xmlns:p="http://schemas.openxmlformats.org/presentationml/2006/main">
   <p:cSld>
     <p:bg>
       <p:bgPr>
         <a:solidFill>
           <a:srgbClr val="344F51"/>
         </a:solidFill>
+        <a:effectLst/>
       </p:bgPr>
     </p:bg>
     <p:spTree>
@@ -3108,12 +3104,12 @@
       </p:grpSpPr>
       <p:grpSp>
         <p:nvGrpSpPr>
-          <p:cNvPr name="Group 2" id="2"/>
+          <p:cNvPr id="2" name="Group 2"/>
           <p:cNvGrpSpPr/>
           <p:nvPr/>
         </p:nvGrpSpPr>
         <p:grpSpPr>
-          <a:xfrm rot="0">
+          <a:xfrm>
             <a:off x="3545528" y="1988168"/>
             <a:ext cx="11196945" cy="6310665"/>
             <a:chOff x="0" y="0"/>
@@ -3122,12 +3118,12 @@
         </p:grpSpPr>
         <p:sp>
           <p:nvSpPr>
-            <p:cNvPr name="Freeform 3" id="3"/>
+            <p:cNvPr id="3" name="Freeform 3"/>
             <p:cNvSpPr/>
             <p:nvPr/>
           </p:nvSpPr>
           <p:spPr>
-            <a:xfrm flipH="false" flipV="false" rot="0">
+            <a:xfrm>
               <a:off x="0" y="0"/>
               <a:ext cx="2948990" cy="1662068"/>
             </a:xfrm>
@@ -3136,9 +3132,9 @@
               <a:gdLst/>
               <a:ahLst/>
               <a:cxnLst/>
-              <a:rect r="r" b="b" t="t" l="l"/>
+              <a:rect l="l" t="t" r="r" b="b"/>
               <a:pathLst>
-                <a:path h="1662068" w="2948990">
+                <a:path w="2948990" h="1662068">
                   <a:moveTo>
                     <a:pt x="0" y="0"/>
                   </a:moveTo>
@@ -3159,11 +3155,18 @@
               <a:srgbClr val="FFFFFF"/>
             </a:solidFill>
           </p:spPr>
+          <p:txBody>
+            <a:bodyPr/>
+            <a:lstStyle/>
+            <a:p>
+              <a:endParaRPr lang="es-ES"/>
+            </a:p>
+          </p:txBody>
         </p:sp>
         <p:sp>
           <p:nvSpPr>
-            <p:cNvPr name="TextBox 4" id="4"/>
-            <p:cNvSpPr txBox="true"/>
+            <p:cNvPr id="4" name="TextBox 4"/>
+            <p:cNvSpPr txBox="1"/>
             <p:nvPr/>
           </p:nvSpPr>
           <p:spPr>
@@ -3176,7 +3179,7 @@
             </a:prstGeom>
           </p:spPr>
           <p:txBody>
-            <a:bodyPr anchor="ctr" rtlCol="false" tIns="50800" lIns="50800" bIns="50800" rIns="50800"/>
+            <a:bodyPr lIns="50800" tIns="50800" rIns="50800" bIns="50800" rtlCol="0" anchor="ctr"/>
             <a:lstStyle/>
             <a:p>
               <a:pPr algn="ctr">
@@ -3184,18 +3187,19 @@
                   <a:spcPts val="2859"/>
                 </a:lnSpc>
               </a:pPr>
+              <a:endParaRPr/>
             </a:p>
           </p:txBody>
         </p:sp>
       </p:grpSp>
       <p:sp>
         <p:nvSpPr>
-          <p:cNvPr name="Freeform 5" id="5"/>
+          <p:cNvPr id="5" name="Freeform 5"/>
           <p:cNvSpPr/>
           <p:nvPr/>
         </p:nvSpPr>
         <p:spPr>
-          <a:xfrm flipH="false" flipV="false" rot="0">
+          <a:xfrm>
             <a:off x="14284793" y="8170984"/>
             <a:ext cx="5949014" cy="2390422"/>
           </a:xfrm>
@@ -3204,9 +3208,9 @@
             <a:gdLst/>
             <a:ahLst/>
             <a:cxnLst/>
-            <a:rect r="r" b="b" t="t" l="l"/>
+            <a:rect l="l" t="t" r="r" b="b"/>
             <a:pathLst>
-              <a:path h="2390422" w="5949014">
+              <a:path w="5949014" h="2390422">
                 <a:moveTo>
                   <a:pt x="0" y="0"/>
                 </a:moveTo>
@@ -3229,19 +3233,26 @@
           <a:blipFill>
             <a:blip r:embed="rId2"/>
             <a:stretch>
-              <a:fillRect l="0" t="0" r="0" b="0"/>
+              <a:fillRect/>
             </a:stretch>
           </a:blipFill>
         </p:spPr>
-      </p:sp>
-      <p:sp>
-        <p:nvSpPr>
-          <p:cNvPr name="Freeform 6" id="6"/>
+        <p:txBody>
+          <a:bodyPr/>
+          <a:lstStyle/>
+          <a:p>
+            <a:endParaRPr lang="es-ES"/>
+          </a:p>
+        </p:txBody>
+      </p:sp>
+      <p:sp>
+        <p:nvSpPr>
+          <p:cNvPr id="6" name="Freeform 6"/>
           <p:cNvSpPr/>
           <p:nvPr/>
         </p:nvSpPr>
         <p:spPr>
-          <a:xfrm flipH="false" flipV="false" rot="0">
+          <a:xfrm>
             <a:off x="3762511" y="2903072"/>
             <a:ext cx="2258325" cy="4672626"/>
           </a:xfrm>
@@ -3250,9 +3261,9 @@
             <a:gdLst/>
             <a:ahLst/>
             <a:cxnLst/>
-            <a:rect r="r" b="b" t="t" l="l"/>
+            <a:rect l="l" t="t" r="r" b="b"/>
             <a:pathLst>
-              <a:path h="4672626" w="2258325">
+              <a:path w="2258325" h="4672626">
                 <a:moveTo>
                   <a:pt x="0" y="0"/>
                 </a:moveTo>
@@ -3275,19 +3286,26 @@
           <a:blipFill>
             <a:blip r:embed="rId3"/>
             <a:stretch>
-              <a:fillRect l="-31731" t="0" r="-28511" b="0"/>
+              <a:fillRect l="-31731" r="-28511"/>
             </a:stretch>
           </a:blipFill>
         </p:spPr>
-      </p:sp>
-      <p:sp>
-        <p:nvSpPr>
-          <p:cNvPr name="Freeform 7" id="7"/>
+        <p:txBody>
+          <a:bodyPr/>
+          <a:lstStyle/>
+          <a:p>
+            <a:endParaRPr lang="es-ES"/>
+          </a:p>
+        </p:txBody>
+      </p:sp>
+      <p:sp>
+        <p:nvSpPr>
+          <p:cNvPr id="7" name="Freeform 7"/>
           <p:cNvSpPr/>
           <p:nvPr/>
         </p:nvSpPr>
         <p:spPr>
-          <a:xfrm flipH="false" flipV="false" rot="0">
+          <a:xfrm>
             <a:off x="12373992" y="1988168"/>
             <a:ext cx="2368480" cy="1152179"/>
           </a:xfrm>
@@ -3296,9 +3314,9 @@
             <a:gdLst/>
             <a:ahLst/>
             <a:cxnLst/>
-            <a:rect r="r" b="b" t="t" l="l"/>
+            <a:rect l="l" t="t" r="r" b="b"/>
             <a:pathLst>
-              <a:path h="1152179" w="2368480">
+              <a:path w="2368480" h="1152179">
                 <a:moveTo>
                   <a:pt x="0" y="0"/>
                 </a:moveTo>
@@ -3321,19 +3339,26 @@
           <a:blipFill>
             <a:blip r:embed="rId4"/>
             <a:stretch>
-              <a:fillRect l="0" t="-25884" r="0" b="-26516"/>
+              <a:fillRect t="-25884" b="-26516"/>
             </a:stretch>
           </a:blipFill>
         </p:spPr>
+        <p:txBody>
+          <a:bodyPr/>
+          <a:lstStyle/>
+          <a:p>
+            <a:endParaRPr lang="es-ES"/>
+          </a:p>
+        </p:txBody>
       </p:sp>
       <p:grpSp>
         <p:nvGrpSpPr>
-          <p:cNvPr name="Group 8" id="8"/>
+          <p:cNvPr id="8" name="Group 8"/>
           <p:cNvGrpSpPr/>
           <p:nvPr/>
         </p:nvGrpSpPr>
         <p:grpSpPr>
-          <a:xfrm rot="0">
+          <a:xfrm>
             <a:off x="11897867" y="7115496"/>
             <a:ext cx="952251" cy="920403"/>
             <a:chOff x="0" y="0"/>
@@ -3342,12 +3367,12 @@
         </p:grpSpPr>
         <p:sp>
           <p:nvSpPr>
-            <p:cNvPr name="Freeform 9" id="9"/>
+            <p:cNvPr id="9" name="Freeform 9"/>
             <p:cNvSpPr/>
             <p:nvPr/>
           </p:nvSpPr>
           <p:spPr>
-            <a:xfrm flipH="false" flipV="false" rot="0">
+            <a:xfrm>
               <a:off x="0" y="0"/>
               <a:ext cx="840925" cy="812800"/>
             </a:xfrm>
@@ -3356,9 +3381,9 @@
               <a:gdLst/>
               <a:ahLst/>
               <a:cxnLst/>
-              <a:rect r="r" b="b" t="t" l="l"/>
+              <a:rect l="l" t="t" r="r" b="b"/>
               <a:pathLst>
-                <a:path h="812800" w="840925">
+                <a:path w="840925" h="812800">
                   <a:moveTo>
                     <a:pt x="840925" y="406400"/>
                   </a:moveTo>
@@ -3391,11 +3416,18 @@
               <a:srgbClr val="51786E"/>
             </a:solidFill>
           </p:spPr>
+          <p:txBody>
+            <a:bodyPr/>
+            <a:lstStyle/>
+            <a:p>
+              <a:endParaRPr lang="es-ES"/>
+            </a:p>
+          </p:txBody>
         </p:sp>
         <p:sp>
           <p:nvSpPr>
-            <p:cNvPr name="TextBox 10" id="10"/>
-            <p:cNvSpPr txBox="true"/>
+            <p:cNvPr id="10" name="TextBox 10"/>
+            <p:cNvSpPr txBox="1"/>
             <p:nvPr/>
           </p:nvSpPr>
           <p:spPr>
@@ -3408,7 +3440,7 @@
             </a:prstGeom>
           </p:spPr>
           <p:txBody>
-            <a:bodyPr anchor="ctr" rtlCol="false" tIns="50800" lIns="50800" bIns="50800" rIns="50800"/>
+            <a:bodyPr lIns="50800" tIns="50800" rIns="50800" bIns="50800" rtlCol="0" anchor="ctr"/>
             <a:lstStyle/>
             <a:p>
               <a:pPr algn="ctr">
@@ -3416,18 +3448,19 @@
                   <a:spcPts val="2859"/>
                 </a:lnSpc>
               </a:pPr>
+              <a:endParaRPr/>
             </a:p>
           </p:txBody>
         </p:sp>
       </p:grpSp>
       <p:sp>
         <p:nvSpPr>
-          <p:cNvPr name="Freeform 11" id="11"/>
+          <p:cNvPr id="11" name="Freeform 11"/>
           <p:cNvSpPr/>
           <p:nvPr/>
         </p:nvSpPr>
         <p:spPr>
-          <a:xfrm flipH="false" flipV="false" rot="0">
+          <a:xfrm>
             <a:off x="13042806" y="6599166"/>
             <a:ext cx="1699666" cy="1699666"/>
           </a:xfrm>
@@ -3436,9 +3469,9 @@
             <a:gdLst/>
             <a:ahLst/>
             <a:cxnLst/>
-            <a:rect r="r" b="b" t="t" l="l"/>
+            <a:rect l="l" t="t" r="r" b="b"/>
             <a:pathLst>
-              <a:path h="1699666" w="1699666">
+              <a:path w="1699666" h="1699666">
                 <a:moveTo>
                   <a:pt x="0" y="0"/>
                 </a:moveTo>
@@ -3461,19 +3494,26 @@
           <a:blipFill>
             <a:blip r:embed="rId5"/>
             <a:stretch>
-              <a:fillRect l="0" t="0" r="0" b="0"/>
+              <a:fillRect/>
             </a:stretch>
           </a:blipFill>
         </p:spPr>
-      </p:sp>
-      <p:sp>
-        <p:nvSpPr>
-          <p:cNvPr name="TextBox 12" id="12"/>
-          <p:cNvSpPr txBox="true"/>
+        <p:txBody>
+          <a:bodyPr/>
+          <a:lstStyle/>
+          <a:p>
+            <a:endParaRPr lang="es-ES"/>
+          </a:p>
+        </p:txBody>
+      </p:sp>
+      <p:sp>
+        <p:nvSpPr>
+          <p:cNvPr id="12" name="TextBox 12"/>
+          <p:cNvSpPr txBox="1"/>
           <p:nvPr/>
         </p:nvSpPr>
         <p:spPr>
-          <a:xfrm rot="0">
+          <a:xfrm>
             <a:off x="5878614" y="3273191"/>
             <a:ext cx="6971503" cy="1762125"/>
           </a:xfrm>
@@ -3482,7 +3522,7 @@
           </a:prstGeom>
         </p:spPr>
         <p:txBody>
-          <a:bodyPr anchor="t" rtlCol="false" tIns="0" lIns="0" bIns="0" rIns="0">
+          <a:bodyPr lIns="0" tIns="0" rIns="0" bIns="0" rtlCol="0" anchor="t">
             <a:spAutoFit/>
           </a:bodyPr>
           <a:lstStyle/>
@@ -3493,7 +3533,7 @@
               </a:lnSpc>
             </a:pPr>
             <a:r>
-              <a:rPr lang="en-US" b="true" sz="7599" spc="-151">
+              <a:rPr lang="en-US" sz="7599" b="1" spc="-151">
                 <a:solidFill>
                   <a:srgbClr val="344F51"/>
                 </a:solidFill>
@@ -3505,7 +3545,7 @@
               <a:t>CUIDA</a:t>
             </a:r>
             <a:r>
-              <a:rPr lang="en-US" b="true" sz="7599" spc="-151">
+              <a:rPr lang="en-US" sz="7599" b="1" spc="-151">
                 <a:solidFill>
                   <a:srgbClr val="93D14B"/>
                 </a:solidFill>
@@ -3524,7 +3564,7 @@
               </a:lnSpc>
             </a:pPr>
             <a:r>
-              <a:rPr lang="en-US" b="true" sz="2000" spc="-40">
+              <a:rPr lang="en-US" sz="2000" b="1" spc="-40">
                 <a:solidFill>
                   <a:srgbClr val="344F51"/>
                 </a:solidFill>
@@ -3542,17 +3582,26 @@
                 <a:spcPts val="2400"/>
               </a:lnSpc>
             </a:pPr>
-          </a:p>
-        </p:txBody>
-      </p:sp>
-      <p:sp>
-        <p:nvSpPr>
-          <p:cNvPr name="TextBox 13" id="13"/>
-          <p:cNvSpPr txBox="true"/>
+            <a:endParaRPr lang="en-US" sz="2000" b="1" spc="-40">
+              <a:solidFill>
+                <a:srgbClr val="344F51"/>
+              </a:solidFill>
+              <a:latin typeface="Montserrat Bold"/>
+              <a:ea typeface="Montserrat Bold"/>
+              <a:cs typeface="Montserrat Bold"/>
+              <a:sym typeface="Montserrat Bold"/>
+            </a:endParaRPr>
+          </a:p>
+        </p:txBody>
+      </p:sp>
+      <p:sp>
+        <p:nvSpPr>
+          <p:cNvPr id="13" name="TextBox 13"/>
+          <p:cNvSpPr txBox="1"/>
           <p:nvPr/>
         </p:nvSpPr>
         <p:spPr>
-          <a:xfrm rot="0">
+          <a:xfrm>
             <a:off x="6630860" y="5349389"/>
             <a:ext cx="5241880" cy="514350"/>
           </a:xfrm>
@@ -3561,7 +3610,7 @@
           </a:prstGeom>
         </p:spPr>
         <p:txBody>
-          <a:bodyPr anchor="t" rtlCol="false" tIns="0" lIns="0" bIns="0" rIns="0">
+          <a:bodyPr lIns="0" tIns="0" rIns="0" bIns="0" rtlCol="0" anchor="t">
             <a:spAutoFit/>
           </a:bodyPr>
           <a:lstStyle/>
@@ -3572,7 +3621,7 @@
               </a:lnSpc>
             </a:pPr>
             <a:r>
-              <a:rPr lang="en-US" b="true" sz="3000">
+              <a:rPr lang="en-US" sz="3000" b="1">
                 <a:solidFill>
                   <a:srgbClr val="344F51"/>
                 </a:solidFill>
@@ -3588,12 +3637,12 @@
       </p:sp>
       <p:sp>
         <p:nvSpPr>
-          <p:cNvPr name="TextBox 14" id="14"/>
-          <p:cNvSpPr txBox="true"/>
+          <p:cNvPr id="14" name="TextBox 14"/>
+          <p:cNvSpPr txBox="1"/>
           <p:nvPr/>
         </p:nvSpPr>
         <p:spPr>
-          <a:xfrm rot="0">
+          <a:xfrm>
             <a:off x="7490770" y="6051999"/>
             <a:ext cx="4381971" cy="1397000"/>
           </a:xfrm>
@@ -3602,7 +3651,7 @@
           </a:prstGeom>
         </p:spPr>
         <p:txBody>
-          <a:bodyPr anchor="t" rtlCol="false" tIns="0" lIns="0" bIns="0" rIns="0">
+          <a:bodyPr lIns="0" tIns="0" rIns="0" bIns="0" rtlCol="0" anchor="t">
             <a:spAutoFit/>
           </a:bodyPr>
           <a:lstStyle/>
@@ -3613,7 +3662,7 @@
               </a:lnSpc>
             </a:pPr>
             <a:r>
-              <a:rPr lang="en-US" sz="2000" b="true">
+              <a:rPr lang="en-US" sz="2000" b="1">
                 <a:solidFill>
                   <a:srgbClr val="51786E"/>
                 </a:solidFill>
@@ -3632,7 +3681,7 @@
               </a:lnSpc>
             </a:pPr>
             <a:r>
-              <a:rPr lang="en-US" sz="2000" b="true">
+              <a:rPr lang="en-US" sz="2000" b="1">
                 <a:solidFill>
                   <a:srgbClr val="51786E"/>
                 </a:solidFill>
@@ -3651,7 +3700,7 @@
               </a:lnSpc>
             </a:pPr>
             <a:r>
-              <a:rPr lang="en-US" sz="2000" b="true">
+              <a:rPr lang="en-US" sz="2000" b="1">
                 <a:solidFill>
                   <a:srgbClr val="51786E"/>
                 </a:solidFill>
@@ -3674,13 +3723,14 @@
 </file>
 
 <file path=ppt/slides/slide10.xml><?xml version="1.0" encoding="utf-8"?>
-<p:sld xmlns:p="http://schemas.openxmlformats.org/presentationml/2006/main" xmlns:a="http://schemas.openxmlformats.org/drawingml/2006/main" xmlns:r="http://schemas.openxmlformats.org/officeDocument/2006/relationships">
+<p:sld xmlns:a="http://schemas.openxmlformats.org/drawingml/2006/main" xmlns:r="http://schemas.openxmlformats.org/officeDocument/2006/relationships" xmlns:p="http://schemas.openxmlformats.org/presentationml/2006/main">
   <p:cSld>
     <p:bg>
       <p:bgPr>
         <a:solidFill>
           <a:srgbClr val="344F51"/>
         </a:solidFill>
+        <a:effectLst/>
       </p:bgPr>
     </p:bg>
     <p:spTree>
@@ -3699,12 +3749,12 @@
       </p:grpSpPr>
       <p:grpSp>
         <p:nvGrpSpPr>
-          <p:cNvPr name="Group 2" id="2"/>
+          <p:cNvPr id="2" name="Group 2"/>
           <p:cNvGrpSpPr/>
           <p:nvPr/>
         </p:nvGrpSpPr>
         <p:grpSpPr>
-          <a:xfrm rot="0">
+          <a:xfrm>
             <a:off x="3545528" y="1988168"/>
             <a:ext cx="11196945" cy="6310665"/>
             <a:chOff x="0" y="0"/>
@@ -3713,12 +3763,12 @@
         </p:grpSpPr>
         <p:sp>
           <p:nvSpPr>
-            <p:cNvPr name="Freeform 3" id="3"/>
+            <p:cNvPr id="3" name="Freeform 3"/>
             <p:cNvSpPr/>
             <p:nvPr/>
           </p:nvSpPr>
           <p:spPr>
-            <a:xfrm flipH="false" flipV="false" rot="0">
+            <a:xfrm>
               <a:off x="0" y="0"/>
               <a:ext cx="2948990" cy="1662068"/>
             </a:xfrm>
@@ -3727,9 +3777,9 @@
               <a:gdLst/>
               <a:ahLst/>
               <a:cxnLst/>
-              <a:rect r="r" b="b" t="t" l="l"/>
+              <a:rect l="l" t="t" r="r" b="b"/>
               <a:pathLst>
-                <a:path h="1662068" w="2948990">
+                <a:path w="2948990" h="1662068">
                   <a:moveTo>
                     <a:pt x="0" y="0"/>
                   </a:moveTo>
@@ -3750,11 +3800,18 @@
               <a:srgbClr val="FFFFFF"/>
             </a:solidFill>
           </p:spPr>
+          <p:txBody>
+            <a:bodyPr/>
+            <a:lstStyle/>
+            <a:p>
+              <a:endParaRPr lang="es-ES"/>
+            </a:p>
+          </p:txBody>
         </p:sp>
         <p:sp>
           <p:nvSpPr>
-            <p:cNvPr name="TextBox 4" id="4"/>
-            <p:cNvSpPr txBox="true"/>
+            <p:cNvPr id="4" name="TextBox 4"/>
+            <p:cNvSpPr txBox="1"/>
             <p:nvPr/>
           </p:nvSpPr>
           <p:spPr>
@@ -3767,7 +3824,7 @@
             </a:prstGeom>
           </p:spPr>
           <p:txBody>
-            <a:bodyPr anchor="ctr" rtlCol="false" tIns="50800" lIns="50800" bIns="50800" rIns="50800"/>
+            <a:bodyPr lIns="50800" tIns="50800" rIns="50800" bIns="50800" rtlCol="0" anchor="ctr"/>
             <a:lstStyle/>
             <a:p>
               <a:pPr algn="ctr">
@@ -3775,18 +3832,19 @@
                   <a:spcPts val="2859"/>
                 </a:lnSpc>
               </a:pPr>
+              <a:endParaRPr/>
             </a:p>
           </p:txBody>
         </p:sp>
       </p:grpSp>
       <p:sp>
         <p:nvSpPr>
-          <p:cNvPr name="Freeform 5" id="5"/>
+          <p:cNvPr id="5" name="Freeform 5"/>
           <p:cNvSpPr/>
           <p:nvPr/>
         </p:nvSpPr>
         <p:spPr>
-          <a:xfrm flipH="false" flipV="false" rot="0">
+          <a:xfrm>
             <a:off x="11588190" y="4952409"/>
             <a:ext cx="1699666" cy="1699666"/>
           </a:xfrm>
@@ -3795,9 +3853,9 @@
             <a:gdLst/>
             <a:ahLst/>
             <a:cxnLst/>
-            <a:rect r="r" b="b" t="t" l="l"/>
+            <a:rect l="l" t="t" r="r" b="b"/>
             <a:pathLst>
-              <a:path h="1699666" w="1699666">
+              <a:path w="1699666" h="1699666">
                 <a:moveTo>
                   <a:pt x="0" y="0"/>
                 </a:moveTo>
@@ -3820,21 +3878,28 @@
           <a:blipFill>
             <a:blip r:embed="rId2"/>
             <a:stretch>
-              <a:fillRect l="0" t="0" r="0" b="0"/>
+              <a:fillRect/>
             </a:stretch>
           </a:blipFill>
         </p:spPr>
-      </p:sp>
-      <p:sp>
-        <p:nvSpPr>
-          <p:cNvPr name="Freeform 6" id="6">
-            <a:hlinkClick r:id="rId4" tooltip="https://www.conectacuidados.eu"/>
+        <p:txBody>
+          <a:bodyPr/>
+          <a:lstStyle/>
+          <a:p>
+            <a:endParaRPr lang="es-ES"/>
+          </a:p>
+        </p:txBody>
+      </p:sp>
+      <p:sp>
+        <p:nvSpPr>
+          <p:cNvPr id="6" name="Freeform 6">
+            <a:hlinkClick r:id="rId3" tooltip="https://www.conectacuidados.eu"/>
           </p:cNvPr>
           <p:cNvSpPr/>
           <p:nvPr/>
         </p:nvSpPr>
         <p:spPr>
-          <a:xfrm flipH="false" flipV="false" rot="0">
+          <a:xfrm>
             <a:off x="5305621" y="4048366"/>
             <a:ext cx="5936428" cy="3730691"/>
           </a:xfrm>
@@ -3843,9 +3908,9 @@
             <a:gdLst/>
             <a:ahLst/>
             <a:cxnLst/>
-            <a:rect r="r" b="b" t="t" l="l"/>
+            <a:rect l="l" t="t" r="r" b="b"/>
             <a:pathLst>
-              <a:path h="3730691" w="5936428">
+              <a:path w="5936428" h="3730691">
                 <a:moveTo>
                   <a:pt x="0" y="0"/>
                 </a:moveTo>
@@ -3866,21 +3931,28 @@
             </a:pathLst>
           </a:custGeom>
           <a:blipFill>
-            <a:blip r:embed="rId3"/>
+            <a:blip r:embed="rId4"/>
             <a:stretch>
-              <a:fillRect l="0" t="0" r="0" b="0"/>
+              <a:fillRect/>
             </a:stretch>
           </a:blipFill>
         </p:spPr>
-      </p:sp>
-      <p:sp>
-        <p:nvSpPr>
-          <p:cNvPr name="TextBox 7" id="7"/>
-          <p:cNvSpPr txBox="true"/>
+        <p:txBody>
+          <a:bodyPr/>
+          <a:lstStyle/>
+          <a:p>
+            <a:endParaRPr lang="es-ES"/>
+          </a:p>
+        </p:txBody>
+      </p:sp>
+      <p:sp>
+        <p:nvSpPr>
+          <p:cNvPr id="7" name="TextBox 7"/>
+          <p:cNvSpPr txBox="1"/>
           <p:nvPr/>
         </p:nvSpPr>
         <p:spPr>
-          <a:xfrm rot="0">
+          <a:xfrm>
             <a:off x="6501595" y="2562685"/>
             <a:ext cx="5936428" cy="1152525"/>
           </a:xfrm>
@@ -3889,7 +3961,7 @@
           </a:prstGeom>
         </p:spPr>
         <p:txBody>
-          <a:bodyPr anchor="t" rtlCol="false" tIns="0" lIns="0" bIns="0" rIns="0">
+          <a:bodyPr lIns="0" tIns="0" rIns="0" bIns="0" rtlCol="0" anchor="t">
             <a:spAutoFit/>
           </a:bodyPr>
           <a:lstStyle/>
@@ -3900,7 +3972,7 @@
               </a:lnSpc>
             </a:pPr>
             <a:r>
-              <a:rPr lang="en-US" b="true" sz="7599" spc="-151">
+              <a:rPr lang="en-US" sz="7599" b="1" spc="-151">
                 <a:solidFill>
                   <a:srgbClr val="344F51"/>
                 </a:solidFill>
@@ -3912,7 +3984,7 @@
               <a:t>CUIDA</a:t>
             </a:r>
             <a:r>
-              <a:rPr lang="en-US" b="true" sz="7599" spc="-151">
+              <a:rPr lang="en-US" sz="7599" b="1" spc="-151">
                 <a:solidFill>
                   <a:srgbClr val="93D14B"/>
                 </a:solidFill>
@@ -3928,12 +4000,12 @@
       </p:sp>
       <p:sp>
         <p:nvSpPr>
-          <p:cNvPr name="TextBox 8" id="8"/>
-          <p:cNvSpPr txBox="true"/>
+          <p:cNvPr id="8" name="TextBox 8"/>
+          <p:cNvSpPr txBox="1"/>
           <p:nvPr/>
         </p:nvSpPr>
         <p:spPr>
-          <a:xfrm rot="0">
+          <a:xfrm>
             <a:off x="17535126" y="9399905"/>
             <a:ext cx="752874" cy="887095"/>
           </a:xfrm>
@@ -3942,7 +4014,7 @@
           </a:prstGeom>
         </p:spPr>
         <p:txBody>
-          <a:bodyPr anchor="t" rtlCol="false" tIns="0" lIns="0" bIns="0" rIns="0">
+          <a:bodyPr lIns="0" tIns="0" rIns="0" bIns="0" rtlCol="0" anchor="t">
             <a:spAutoFit/>
           </a:bodyPr>
           <a:lstStyle/>
@@ -3953,7 +4025,7 @@
               </a:lnSpc>
             </a:pPr>
             <a:r>
-              <a:rPr lang="en-US" sz="5199" b="true">
+              <a:rPr lang="en-US" sz="5199" b="1">
                 <a:solidFill>
                   <a:srgbClr val="93D14B"/>
                 </a:solidFill>
@@ -3962,19 +4034,7 @@
                 <a:cs typeface="Open Sans Bold"/>
                 <a:sym typeface="Open Sans Bold"/>
               </a:rPr>
-              <a:t>8</a:t>
-            </a:r>
-            <a:r>
-              <a:rPr lang="en-US" b="true" sz="5199">
-                <a:solidFill>
-                  <a:srgbClr val="93D14B"/>
-                </a:solidFill>
-                <a:latin typeface="Open Sans Bold"/>
-                <a:ea typeface="Open Sans Bold"/>
-                <a:cs typeface="Open Sans Bold"/>
-                <a:sym typeface="Open Sans Bold"/>
-              </a:rPr>
-              <a:t>.</a:t>
+              <a:t>8.</a:t>
             </a:r>
           </a:p>
         </p:txBody>
@@ -3988,13 +4048,14 @@
 </file>
 
 <file path=ppt/slides/slide11.xml><?xml version="1.0" encoding="utf-8"?>
-<p:sld xmlns:p="http://schemas.openxmlformats.org/presentationml/2006/main" xmlns:a="http://schemas.openxmlformats.org/drawingml/2006/main" xmlns:r="http://schemas.openxmlformats.org/officeDocument/2006/relationships">
+<p:sld xmlns:a="http://schemas.openxmlformats.org/drawingml/2006/main" xmlns:r="http://schemas.openxmlformats.org/officeDocument/2006/relationships" xmlns:p="http://schemas.openxmlformats.org/presentationml/2006/main">
   <p:cSld>
     <p:bg>
       <p:bgPr>
         <a:solidFill>
           <a:srgbClr val="344F51"/>
         </a:solidFill>
+        <a:effectLst/>
       </p:bgPr>
     </p:bg>
     <p:spTree>
@@ -4013,12 +4074,12 @@
       </p:grpSpPr>
       <p:grpSp>
         <p:nvGrpSpPr>
-          <p:cNvPr name="Group 2" id="2"/>
+          <p:cNvPr id="2" name="Group 2"/>
           <p:cNvGrpSpPr/>
           <p:nvPr/>
         </p:nvGrpSpPr>
         <p:grpSpPr>
-          <a:xfrm rot="0">
+          <a:xfrm>
             <a:off x="3545528" y="1988168"/>
             <a:ext cx="11196945" cy="6310665"/>
             <a:chOff x="0" y="0"/>
@@ -4027,12 +4088,12 @@
         </p:grpSpPr>
         <p:sp>
           <p:nvSpPr>
-            <p:cNvPr name="Freeform 3" id="3"/>
+            <p:cNvPr id="3" name="Freeform 3"/>
             <p:cNvSpPr/>
             <p:nvPr/>
           </p:nvSpPr>
           <p:spPr>
-            <a:xfrm flipH="false" flipV="false" rot="0">
+            <a:xfrm>
               <a:off x="0" y="0"/>
               <a:ext cx="2948990" cy="1662068"/>
             </a:xfrm>
@@ -4041,9 +4102,9 @@
               <a:gdLst/>
               <a:ahLst/>
               <a:cxnLst/>
-              <a:rect r="r" b="b" t="t" l="l"/>
+              <a:rect l="l" t="t" r="r" b="b"/>
               <a:pathLst>
-                <a:path h="1662068" w="2948990">
+                <a:path w="2948990" h="1662068">
                   <a:moveTo>
                     <a:pt x="0" y="0"/>
                   </a:moveTo>
@@ -4064,11 +4125,18 @@
               <a:srgbClr val="FFFFFF"/>
             </a:solidFill>
           </p:spPr>
+          <p:txBody>
+            <a:bodyPr/>
+            <a:lstStyle/>
+            <a:p>
+              <a:endParaRPr lang="es-ES"/>
+            </a:p>
+          </p:txBody>
         </p:sp>
         <p:sp>
           <p:nvSpPr>
-            <p:cNvPr name="TextBox 4" id="4"/>
-            <p:cNvSpPr txBox="true"/>
+            <p:cNvPr id="4" name="TextBox 4"/>
+            <p:cNvSpPr txBox="1"/>
             <p:nvPr/>
           </p:nvSpPr>
           <p:spPr>
@@ -4081,7 +4149,7 @@
             </a:prstGeom>
           </p:spPr>
           <p:txBody>
-            <a:bodyPr anchor="ctr" rtlCol="false" tIns="50800" lIns="50800" bIns="50800" rIns="50800"/>
+            <a:bodyPr lIns="50800" tIns="50800" rIns="50800" bIns="50800" rtlCol="0" anchor="ctr"/>
             <a:lstStyle/>
             <a:p>
               <a:pPr algn="ctr">
@@ -4089,18 +4157,19 @@
                   <a:spcPts val="2859"/>
                 </a:lnSpc>
               </a:pPr>
+              <a:endParaRPr/>
             </a:p>
           </p:txBody>
         </p:sp>
       </p:grpSp>
       <p:sp>
         <p:nvSpPr>
-          <p:cNvPr name="Freeform 5" id="5"/>
+          <p:cNvPr id="5" name="Freeform 5"/>
           <p:cNvSpPr/>
           <p:nvPr/>
         </p:nvSpPr>
         <p:spPr>
-          <a:xfrm flipH="false" flipV="false" rot="0">
+          <a:xfrm>
             <a:off x="14284793" y="8170984"/>
             <a:ext cx="5949014" cy="2390422"/>
           </a:xfrm>
@@ -4109,9 +4178,9 @@
             <a:gdLst/>
             <a:ahLst/>
             <a:cxnLst/>
-            <a:rect r="r" b="b" t="t" l="l"/>
+            <a:rect l="l" t="t" r="r" b="b"/>
             <a:pathLst>
-              <a:path h="2390422" w="5949014">
+              <a:path w="5949014" h="2390422">
                 <a:moveTo>
                   <a:pt x="0" y="0"/>
                 </a:moveTo>
@@ -4134,19 +4203,26 @@
           <a:blipFill>
             <a:blip r:embed="rId2"/>
             <a:stretch>
-              <a:fillRect l="0" t="0" r="0" b="0"/>
+              <a:fillRect/>
             </a:stretch>
           </a:blipFill>
         </p:spPr>
-      </p:sp>
-      <p:sp>
-        <p:nvSpPr>
-          <p:cNvPr name="Freeform 6" id="6"/>
+        <p:txBody>
+          <a:bodyPr/>
+          <a:lstStyle/>
+          <a:p>
+            <a:endParaRPr lang="es-ES"/>
+          </a:p>
+        </p:txBody>
+      </p:sp>
+      <p:sp>
+        <p:nvSpPr>
+          <p:cNvPr id="6" name="Freeform 6"/>
           <p:cNvSpPr/>
           <p:nvPr/>
         </p:nvSpPr>
         <p:spPr>
-          <a:xfrm flipH="false" flipV="false" rot="0">
+          <a:xfrm>
             <a:off x="3545528" y="2807187"/>
             <a:ext cx="3618799" cy="4672626"/>
           </a:xfrm>
@@ -4155,9 +4231,9 @@
             <a:gdLst/>
             <a:ahLst/>
             <a:cxnLst/>
-            <a:rect r="r" b="b" t="t" l="l"/>
+            <a:rect l="l" t="t" r="r" b="b"/>
             <a:pathLst>
-              <a:path h="4672626" w="3618799">
+              <a:path w="3618799" h="4672626">
                 <a:moveTo>
                   <a:pt x="0" y="0"/>
                 </a:moveTo>
@@ -4180,19 +4256,26 @@
           <a:blipFill>
             <a:blip r:embed="rId3"/>
             <a:stretch>
-              <a:fillRect l="0" t="0" r="0" b="0"/>
+              <a:fillRect/>
             </a:stretch>
           </a:blipFill>
         </p:spPr>
-      </p:sp>
-      <p:sp>
-        <p:nvSpPr>
-          <p:cNvPr name="Freeform 7" id="7"/>
+        <p:txBody>
+          <a:bodyPr/>
+          <a:lstStyle/>
+          <a:p>
+            <a:endParaRPr lang="es-ES"/>
+          </a:p>
+        </p:txBody>
+      </p:sp>
+      <p:sp>
+        <p:nvSpPr>
+          <p:cNvPr id="7" name="Freeform 7"/>
           <p:cNvSpPr/>
           <p:nvPr/>
         </p:nvSpPr>
         <p:spPr>
-          <a:xfrm flipH="false" flipV="false" rot="0">
+          <a:xfrm>
             <a:off x="12373992" y="1988168"/>
             <a:ext cx="2368480" cy="1152179"/>
           </a:xfrm>
@@ -4201,9 +4284,9 @@
             <a:gdLst/>
             <a:ahLst/>
             <a:cxnLst/>
-            <a:rect r="r" b="b" t="t" l="l"/>
+            <a:rect l="l" t="t" r="r" b="b"/>
             <a:pathLst>
-              <a:path h="1152179" w="2368480">
+              <a:path w="2368480" h="1152179">
                 <a:moveTo>
                   <a:pt x="0" y="0"/>
                 </a:moveTo>
@@ -4226,19 +4309,26 @@
           <a:blipFill>
             <a:blip r:embed="rId4"/>
             <a:stretch>
-              <a:fillRect l="0" t="-25884" r="0" b="-26516"/>
+              <a:fillRect t="-25884" b="-26516"/>
             </a:stretch>
           </a:blipFill>
         </p:spPr>
-      </p:sp>
-      <p:sp>
-        <p:nvSpPr>
-          <p:cNvPr name="Freeform 8" id="8"/>
+        <p:txBody>
+          <a:bodyPr/>
+          <a:lstStyle/>
+          <a:p>
+            <a:endParaRPr lang="es-ES"/>
+          </a:p>
+        </p:txBody>
+      </p:sp>
+      <p:sp>
+        <p:nvSpPr>
+          <p:cNvPr id="8" name="Freeform 8"/>
           <p:cNvSpPr/>
           <p:nvPr/>
         </p:nvSpPr>
         <p:spPr>
-          <a:xfrm flipH="false" flipV="false" rot="0">
+          <a:xfrm>
             <a:off x="13042806" y="6599166"/>
             <a:ext cx="1699666" cy="1699666"/>
           </a:xfrm>
@@ -4247,9 +4337,9 @@
             <a:gdLst/>
             <a:ahLst/>
             <a:cxnLst/>
-            <a:rect r="r" b="b" t="t" l="l"/>
+            <a:rect l="l" t="t" r="r" b="b"/>
             <a:pathLst>
-              <a:path h="1699666" w="1699666">
+              <a:path w="1699666" h="1699666">
                 <a:moveTo>
                   <a:pt x="0" y="0"/>
                 </a:moveTo>
@@ -4272,19 +4362,26 @@
           <a:blipFill>
             <a:blip r:embed="rId5"/>
             <a:stretch>
-              <a:fillRect l="0" t="0" r="0" b="0"/>
+              <a:fillRect/>
             </a:stretch>
           </a:blipFill>
         </p:spPr>
-      </p:sp>
-      <p:sp>
-        <p:nvSpPr>
-          <p:cNvPr name="Freeform 9" id="9"/>
+        <p:txBody>
+          <a:bodyPr/>
+          <a:lstStyle/>
+          <a:p>
+            <a:endParaRPr lang="es-ES"/>
+          </a:p>
+        </p:txBody>
+      </p:sp>
+      <p:sp>
+        <p:nvSpPr>
+          <p:cNvPr id="9" name="Freeform 9"/>
           <p:cNvSpPr/>
           <p:nvPr/>
         </p:nvSpPr>
         <p:spPr>
-          <a:xfrm flipH="false" flipV="false" rot="0">
+          <a:xfrm>
             <a:off x="7164327" y="3948095"/>
             <a:ext cx="5504569" cy="3082558"/>
           </a:xfrm>
@@ -4293,9 +4390,9 @@
             <a:gdLst/>
             <a:ahLst/>
             <a:cxnLst/>
-            <a:rect r="r" b="b" t="t" l="l"/>
+            <a:rect l="l" t="t" r="r" b="b"/>
             <a:pathLst>
-              <a:path h="3082558" w="5504569">
+              <a:path w="5504569" h="3082558">
                 <a:moveTo>
                   <a:pt x="0" y="0"/>
                 </a:moveTo>
@@ -4316,18 +4413,25 @@
             </a:pathLst>
           </a:custGeom>
           <a:blipFill>
-            <a:blip r:embed="rId6">
+            <a:blip>
               <a:extLst>
                 <a:ext uri="{96DAC541-7B7A-43D3-8B79-37D633B846F1}">
-                  <asvg:svgBlip xmlns:asvg="http://schemas.microsoft.com/office/drawing/2016/SVG/main" r:embed="rId7"/>
+                  <asvg:svgBlip xmlns:asvg="http://schemas.microsoft.com/office/drawing/2016/SVG/main" r:embed="rId6"/>
                 </a:ext>
               </a:extLst>
             </a:blip>
             <a:stretch>
-              <a:fillRect l="0" t="0" r="0" b="0"/>
+              <a:fillRect/>
             </a:stretch>
           </a:blipFill>
         </p:spPr>
+        <p:txBody>
+          <a:bodyPr/>
+          <a:lstStyle/>
+          <a:p>
+            <a:endParaRPr lang="es-ES"/>
+          </a:p>
+        </p:txBody>
       </p:sp>
     </p:spTree>
   </p:cSld>
@@ -4338,13 +4442,14 @@
 </file>
 
 <file path=ppt/slides/slide2.xml><?xml version="1.0" encoding="utf-8"?>
-<p:sld xmlns:p="http://schemas.openxmlformats.org/presentationml/2006/main" xmlns:a="http://schemas.openxmlformats.org/drawingml/2006/main" xmlns:r="http://schemas.openxmlformats.org/officeDocument/2006/relationships">
+<p:sld xmlns:a="http://schemas.openxmlformats.org/drawingml/2006/main" xmlns:r="http://schemas.openxmlformats.org/officeDocument/2006/relationships" xmlns:p="http://schemas.openxmlformats.org/presentationml/2006/main">
   <p:cSld>
     <p:bg>
       <p:bgPr>
         <a:solidFill>
           <a:srgbClr val="344F51"/>
         </a:solidFill>
+        <a:effectLst/>
       </p:bgPr>
     </p:bg>
     <p:spTree>
@@ -4363,12 +4468,12 @@
       </p:grpSpPr>
       <p:grpSp>
         <p:nvGrpSpPr>
-          <p:cNvPr name="Group 2" id="2"/>
+          <p:cNvPr id="2" name="Group 2"/>
           <p:cNvGrpSpPr/>
           <p:nvPr/>
         </p:nvGrpSpPr>
         <p:grpSpPr>
-          <a:xfrm rot="0">
+          <a:xfrm>
             <a:off x="3545528" y="1988168"/>
             <a:ext cx="11196945" cy="6310665"/>
             <a:chOff x="0" y="0"/>
@@ -4377,12 +4482,12 @@
         </p:grpSpPr>
         <p:sp>
           <p:nvSpPr>
-            <p:cNvPr name="Freeform 3" id="3"/>
+            <p:cNvPr id="3" name="Freeform 3"/>
             <p:cNvSpPr/>
             <p:nvPr/>
           </p:nvSpPr>
           <p:spPr>
-            <a:xfrm flipH="false" flipV="false" rot="0">
+            <a:xfrm>
               <a:off x="0" y="0"/>
               <a:ext cx="2948990" cy="1662068"/>
             </a:xfrm>
@@ -4391,9 +4496,9 @@
               <a:gdLst/>
               <a:ahLst/>
               <a:cxnLst/>
-              <a:rect r="r" b="b" t="t" l="l"/>
+              <a:rect l="l" t="t" r="r" b="b"/>
               <a:pathLst>
-                <a:path h="1662068" w="2948990">
+                <a:path w="2948990" h="1662068">
                   <a:moveTo>
                     <a:pt x="0" y="0"/>
                   </a:moveTo>
@@ -4414,11 +4519,18 @@
               <a:srgbClr val="FFFFFF"/>
             </a:solidFill>
           </p:spPr>
+          <p:txBody>
+            <a:bodyPr/>
+            <a:lstStyle/>
+            <a:p>
+              <a:endParaRPr lang="es-ES"/>
+            </a:p>
+          </p:txBody>
         </p:sp>
         <p:sp>
           <p:nvSpPr>
-            <p:cNvPr name="TextBox 4" id="4"/>
-            <p:cNvSpPr txBox="true"/>
+            <p:cNvPr id="4" name="TextBox 4"/>
+            <p:cNvSpPr txBox="1"/>
             <p:nvPr/>
           </p:nvSpPr>
           <p:spPr>
@@ -4431,7 +4543,7 @@
             </a:prstGeom>
           </p:spPr>
           <p:txBody>
-            <a:bodyPr anchor="ctr" rtlCol="false" tIns="50800" lIns="50800" bIns="50800" rIns="50800"/>
+            <a:bodyPr lIns="50800" tIns="50800" rIns="50800" bIns="50800" rtlCol="0" anchor="ctr"/>
             <a:lstStyle/>
             <a:p>
               <a:pPr algn="ctr">
@@ -4439,18 +4551,19 @@
                   <a:spcPts val="2859"/>
                 </a:lnSpc>
               </a:pPr>
+              <a:endParaRPr/>
             </a:p>
           </p:txBody>
         </p:sp>
       </p:grpSp>
       <p:sp>
         <p:nvSpPr>
-          <p:cNvPr name="Freeform 5" id="5"/>
+          <p:cNvPr id="5" name="Freeform 5"/>
           <p:cNvSpPr/>
           <p:nvPr/>
         </p:nvSpPr>
         <p:spPr>
-          <a:xfrm flipH="false" flipV="false" rot="0">
+          <a:xfrm>
             <a:off x="3702460" y="3779581"/>
             <a:ext cx="2773099" cy="3580649"/>
           </a:xfrm>
@@ -4459,9 +4572,9 @@
             <a:gdLst/>
             <a:ahLst/>
             <a:cxnLst/>
-            <a:rect r="r" b="b" t="t" l="l"/>
+            <a:rect l="l" t="t" r="r" b="b"/>
             <a:pathLst>
-              <a:path h="3580649" w="2773099">
+              <a:path w="2773099" h="3580649">
                 <a:moveTo>
                   <a:pt x="0" y="0"/>
                 </a:moveTo>
@@ -4484,19 +4597,26 @@
           <a:blipFill>
             <a:blip r:embed="rId2"/>
             <a:stretch>
-              <a:fillRect l="0" t="0" r="0" b="0"/>
+              <a:fillRect/>
             </a:stretch>
           </a:blipFill>
         </p:spPr>
-      </p:sp>
-      <p:sp>
-        <p:nvSpPr>
-          <p:cNvPr name="TextBox 6" id="6"/>
-          <p:cNvSpPr txBox="true"/>
+        <p:txBody>
+          <a:bodyPr/>
+          <a:lstStyle/>
+          <a:p>
+            <a:endParaRPr lang="es-ES"/>
+          </a:p>
+        </p:txBody>
+      </p:sp>
+      <p:sp>
+        <p:nvSpPr>
+          <p:cNvPr id="6" name="TextBox 6"/>
+          <p:cNvSpPr txBox="1"/>
           <p:nvPr/>
         </p:nvSpPr>
         <p:spPr>
-          <a:xfrm rot="0">
+          <a:xfrm>
             <a:off x="7007833" y="2355605"/>
             <a:ext cx="4272335" cy="914400"/>
           </a:xfrm>
@@ -4505,7 +4625,7 @@
           </a:prstGeom>
         </p:spPr>
         <p:txBody>
-          <a:bodyPr anchor="t" rtlCol="false" tIns="0" lIns="0" bIns="0" rIns="0">
+          <a:bodyPr lIns="0" tIns="0" rIns="0" bIns="0" rtlCol="0" anchor="t">
             <a:spAutoFit/>
           </a:bodyPr>
           <a:lstStyle/>
@@ -4516,7 +4636,7 @@
               </a:lnSpc>
             </a:pPr>
             <a:r>
-              <a:rPr lang="en-US" b="true" sz="6000" spc="-120">
+              <a:rPr lang="en-US" sz="6000" b="1" spc="-120">
                 <a:solidFill>
                   <a:srgbClr val="344F51"/>
                 </a:solidFill>
@@ -4532,12 +4652,12 @@
       </p:sp>
       <p:sp>
         <p:nvSpPr>
-          <p:cNvPr name="TextBox 7" id="7"/>
-          <p:cNvSpPr txBox="true"/>
+          <p:cNvPr id="7" name="TextBox 7"/>
+          <p:cNvSpPr txBox="1"/>
           <p:nvPr/>
         </p:nvSpPr>
         <p:spPr>
-          <a:xfrm rot="0">
+          <a:xfrm>
             <a:off x="6602952" y="3751006"/>
             <a:ext cx="7436270" cy="3787140"/>
           </a:xfrm>
@@ -4546,12 +4666,12 @@
           </a:prstGeom>
         </p:spPr>
         <p:txBody>
-          <a:bodyPr anchor="t" rtlCol="false" tIns="0" lIns="0" bIns="0" rIns="0">
+          <a:bodyPr lIns="0" tIns="0" rIns="0" bIns="0" rtlCol="0" anchor="t">
             <a:spAutoFit/>
           </a:bodyPr>
           <a:lstStyle/>
           <a:p>
-            <a:pPr algn="l" marL="712468" indent="-356234" lvl="1">
+            <a:pPr marL="712468" lvl="1" indent="-356234" algn="l">
               <a:lnSpc>
                 <a:spcPts val="4289"/>
               </a:lnSpc>
@@ -4559,7 +4679,7 @@
               <a:buChar char="•"/>
             </a:pPr>
             <a:r>
-              <a:rPr lang="en-US" b="true" sz="3299">
+              <a:rPr lang="en-US" sz="3299" b="1">
                 <a:solidFill>
                   <a:srgbClr val="51786E"/>
                 </a:solidFill>
@@ -4572,7 +4692,7 @@
             </a:r>
           </a:p>
           <a:p>
-            <a:pPr algn="l" marL="712468" indent="-356234" lvl="1">
+            <a:pPr marL="712468" lvl="1" indent="-356234" algn="l">
               <a:lnSpc>
                 <a:spcPts val="4289"/>
               </a:lnSpc>
@@ -4580,7 +4700,7 @@
               <a:buChar char="•"/>
             </a:pPr>
             <a:r>
-              <a:rPr lang="en-US" b="true" sz="3299">
+              <a:rPr lang="en-US" sz="3299" b="1">
                 <a:solidFill>
                   <a:srgbClr val="51786E"/>
                 </a:solidFill>
@@ -4593,7 +4713,7 @@
             </a:r>
           </a:p>
           <a:p>
-            <a:pPr algn="l" marL="712468" indent="-356234" lvl="1">
+            <a:pPr marL="712468" lvl="1" indent="-356234" algn="l">
               <a:lnSpc>
                 <a:spcPts val="4289"/>
               </a:lnSpc>
@@ -4601,7 +4721,7 @@
               <a:buChar char="•"/>
             </a:pPr>
             <a:r>
-              <a:rPr lang="en-US" b="true" sz="3299">
+              <a:rPr lang="en-US" sz="3299" b="1">
                 <a:solidFill>
                   <a:srgbClr val="51786E"/>
                 </a:solidFill>
@@ -4614,7 +4734,7 @@
             </a:r>
           </a:p>
           <a:p>
-            <a:pPr algn="l" marL="712468" indent="-356234" lvl="1">
+            <a:pPr marL="712468" lvl="1" indent="-356234" algn="l">
               <a:lnSpc>
                 <a:spcPts val="4289"/>
               </a:lnSpc>
@@ -4622,7 +4742,7 @@
               <a:buChar char="•"/>
             </a:pPr>
             <a:r>
-              <a:rPr lang="en-US" b="true" sz="3299">
+              <a:rPr lang="en-US" sz="3299" b="1">
                 <a:solidFill>
                   <a:srgbClr val="51786E"/>
                 </a:solidFill>
@@ -4635,7 +4755,7 @@
             </a:r>
           </a:p>
           <a:p>
-            <a:pPr algn="l" marL="712468" indent="-356234" lvl="1">
+            <a:pPr marL="712468" lvl="1" indent="-356234" algn="l">
               <a:lnSpc>
                 <a:spcPts val="4289"/>
               </a:lnSpc>
@@ -4643,7 +4763,7 @@
               <a:buChar char="•"/>
             </a:pPr>
             <a:r>
-              <a:rPr lang="en-US" b="true" sz="3299">
+              <a:rPr lang="en-US" sz="3299" b="1">
                 <a:solidFill>
                   <a:srgbClr val="51786E"/>
                 </a:solidFill>
@@ -4656,7 +4776,7 @@
             </a:r>
           </a:p>
           <a:p>
-            <a:pPr algn="l" marL="712468" indent="-356234" lvl="1">
+            <a:pPr marL="712468" lvl="1" indent="-356234" algn="l">
               <a:lnSpc>
                 <a:spcPts val="4289"/>
               </a:lnSpc>
@@ -4664,7 +4784,7 @@
               <a:buChar char="•"/>
             </a:pPr>
             <a:r>
-              <a:rPr lang="en-US" b="true" sz="3299">
+              <a:rPr lang="en-US" sz="3299" b="1">
                 <a:solidFill>
                   <a:srgbClr val="51786E"/>
                 </a:solidFill>
@@ -4677,7 +4797,7 @@
             </a:r>
           </a:p>
           <a:p>
-            <a:pPr algn="l" marL="712468" indent="-356234" lvl="1">
+            <a:pPr marL="712468" lvl="1" indent="-356234" algn="l">
               <a:lnSpc>
                 <a:spcPts val="4289"/>
               </a:lnSpc>
@@ -4685,7 +4805,7 @@
               <a:buChar char="•"/>
             </a:pPr>
             <a:r>
-              <a:rPr lang="en-US" b="true" sz="3299">
+              <a:rPr lang="en-US" sz="3299" b="1">
                 <a:solidFill>
                   <a:srgbClr val="51786E"/>
                 </a:solidFill>
@@ -4708,13 +4828,14 @@
 </file>
 
 <file path=ppt/slides/slide3.xml><?xml version="1.0" encoding="utf-8"?>
-<p:sld xmlns:p="http://schemas.openxmlformats.org/presentationml/2006/main" xmlns:a="http://schemas.openxmlformats.org/drawingml/2006/main">
+<p:sld xmlns:a="http://schemas.openxmlformats.org/drawingml/2006/main" xmlns:r="http://schemas.openxmlformats.org/officeDocument/2006/relationships" xmlns:p="http://schemas.openxmlformats.org/presentationml/2006/main">
   <p:cSld>
     <p:bg>
       <p:bgPr>
         <a:solidFill>
           <a:srgbClr val="344F51"/>
         </a:solidFill>
+        <a:effectLst/>
       </p:bgPr>
     </p:bg>
     <p:spTree>
@@ -4733,12 +4854,12 @@
       </p:grpSpPr>
       <p:grpSp>
         <p:nvGrpSpPr>
-          <p:cNvPr name="Group 2" id="2"/>
+          <p:cNvPr id="2" name="Group 2"/>
           <p:cNvGrpSpPr/>
           <p:nvPr/>
         </p:nvGrpSpPr>
         <p:grpSpPr>
-          <a:xfrm rot="0">
+          <a:xfrm>
             <a:off x="1348121" y="1028700"/>
             <a:ext cx="15591759" cy="8229600"/>
             <a:chOff x="0" y="0"/>
@@ -4747,12 +4868,12 @@
         </p:grpSpPr>
         <p:sp>
           <p:nvSpPr>
-            <p:cNvPr name="Freeform 3" id="3"/>
+            <p:cNvPr id="3" name="Freeform 3"/>
             <p:cNvSpPr/>
             <p:nvPr/>
           </p:nvSpPr>
           <p:spPr>
-            <a:xfrm flipH="false" flipV="false" rot="0">
+            <a:xfrm>
               <a:off x="0" y="0"/>
               <a:ext cx="4106471" cy="2167467"/>
             </a:xfrm>
@@ -4761,9 +4882,9 @@
               <a:gdLst/>
               <a:ahLst/>
               <a:cxnLst/>
-              <a:rect r="r" b="b" t="t" l="l"/>
+              <a:rect l="l" t="t" r="r" b="b"/>
               <a:pathLst>
-                <a:path h="2167467" w="4106471">
+                <a:path w="4106471" h="2167467">
                   <a:moveTo>
                     <a:pt x="0" y="0"/>
                   </a:moveTo>
@@ -4784,11 +4905,18 @@
               <a:srgbClr val="FFFFFF"/>
             </a:solidFill>
           </p:spPr>
+          <p:txBody>
+            <a:bodyPr/>
+            <a:lstStyle/>
+            <a:p>
+              <a:endParaRPr lang="es-ES"/>
+            </a:p>
+          </p:txBody>
         </p:sp>
         <p:sp>
           <p:nvSpPr>
-            <p:cNvPr name="TextBox 4" id="4"/>
-            <p:cNvSpPr txBox="true"/>
+            <p:cNvPr id="4" name="TextBox 4"/>
+            <p:cNvSpPr txBox="1"/>
             <p:nvPr/>
           </p:nvSpPr>
           <p:spPr>
@@ -4801,7 +4929,7 @@
             </a:prstGeom>
           </p:spPr>
           <p:txBody>
-            <a:bodyPr anchor="ctr" rtlCol="false" tIns="50800" lIns="50800" bIns="50800" rIns="50800"/>
+            <a:bodyPr lIns="50800" tIns="50800" rIns="50800" bIns="50800" rtlCol="0" anchor="ctr"/>
             <a:lstStyle/>
             <a:p>
               <a:pPr algn="ctr">
@@ -4809,18 +4937,19 @@
                   <a:spcPts val="2859"/>
                 </a:lnSpc>
               </a:pPr>
+              <a:endParaRPr/>
             </a:p>
           </p:txBody>
         </p:sp>
       </p:grpSp>
       <p:grpSp>
         <p:nvGrpSpPr>
-          <p:cNvPr name="Group 5" id="5"/>
+          <p:cNvPr id="5" name="Group 5"/>
           <p:cNvGrpSpPr/>
           <p:nvPr/>
         </p:nvGrpSpPr>
         <p:grpSpPr>
-          <a:xfrm rot="0">
+          <a:xfrm>
             <a:off x="1932714" y="3975846"/>
             <a:ext cx="4475594" cy="4161408"/>
             <a:chOff x="0" y="0"/>
@@ -4829,12 +4958,12 @@
         </p:grpSpPr>
         <p:sp>
           <p:nvSpPr>
-            <p:cNvPr name="Freeform 6" id="6"/>
+            <p:cNvPr id="6" name="Freeform 6"/>
             <p:cNvSpPr/>
             <p:nvPr/>
           </p:nvSpPr>
           <p:spPr>
-            <a:xfrm flipH="false" flipV="false" rot="0">
+            <a:xfrm>
               <a:off x="0" y="0"/>
               <a:ext cx="1178757" cy="1096009"/>
             </a:xfrm>
@@ -4843,9 +4972,9 @@
               <a:gdLst/>
               <a:ahLst/>
               <a:cxnLst/>
-              <a:rect r="r" b="b" t="t" l="l"/>
+              <a:rect l="l" t="t" r="r" b="b"/>
               <a:pathLst>
-                <a:path h="1096009" w="1178757">
+                <a:path w="1178757" h="1096009">
                   <a:moveTo>
                     <a:pt x="0" y="0"/>
                   </a:moveTo>
@@ -4870,11 +4999,18 @@
               <a:miter/>
             </a:ln>
           </p:spPr>
+          <p:txBody>
+            <a:bodyPr/>
+            <a:lstStyle/>
+            <a:p>
+              <a:endParaRPr lang="es-ES"/>
+            </a:p>
+          </p:txBody>
         </p:sp>
         <p:sp>
           <p:nvSpPr>
-            <p:cNvPr name="TextBox 7" id="7"/>
-            <p:cNvSpPr txBox="true"/>
+            <p:cNvPr id="7" name="TextBox 7"/>
+            <p:cNvSpPr txBox="1"/>
             <p:nvPr/>
           </p:nvSpPr>
           <p:spPr>
@@ -4887,7 +5023,7 @@
             </a:prstGeom>
           </p:spPr>
           <p:txBody>
-            <a:bodyPr anchor="ctr" rtlCol="false" tIns="50800" lIns="50800" bIns="50800" rIns="50800"/>
+            <a:bodyPr lIns="50800" tIns="50800" rIns="50800" bIns="50800" rtlCol="0" anchor="ctr"/>
             <a:lstStyle/>
             <a:p>
               <a:pPr algn="ctr">
@@ -4895,18 +5031,19 @@
                   <a:spcPts val="2859"/>
                 </a:lnSpc>
               </a:pPr>
+              <a:endParaRPr/>
             </a:p>
           </p:txBody>
         </p:sp>
       </p:grpSp>
       <p:grpSp>
         <p:nvGrpSpPr>
-          <p:cNvPr name="Group 8" id="8"/>
+          <p:cNvPr id="8" name="Group 8"/>
           <p:cNvGrpSpPr/>
           <p:nvPr/>
         </p:nvGrpSpPr>
         <p:grpSpPr>
-          <a:xfrm rot="0">
+          <a:xfrm>
             <a:off x="2324900" y="2683194"/>
             <a:ext cx="3691221" cy="754966"/>
             <a:chOff x="0" y="0"/>
@@ -4915,12 +5052,12 @@
         </p:grpSpPr>
         <p:sp>
           <p:nvSpPr>
-            <p:cNvPr name="Freeform 9" id="9"/>
+            <p:cNvPr id="9" name="Freeform 9"/>
             <p:cNvSpPr/>
             <p:nvPr/>
           </p:nvSpPr>
           <p:spPr>
-            <a:xfrm flipH="false" flipV="false" rot="0">
+            <a:xfrm>
               <a:off x="0" y="0"/>
               <a:ext cx="972174" cy="198839"/>
             </a:xfrm>
@@ -4929,9 +5066,9 @@
               <a:gdLst/>
               <a:ahLst/>
               <a:cxnLst/>
-              <a:rect r="r" b="b" t="t" l="l"/>
+              <a:rect l="l" t="t" r="r" b="b"/>
               <a:pathLst>
-                <a:path h="198839" w="972174">
+                <a:path w="972174" h="198839">
                   <a:moveTo>
                     <a:pt x="0" y="0"/>
                   </a:moveTo>
@@ -4952,11 +5089,18 @@
               <a:srgbClr val="344F51"/>
             </a:solidFill>
           </p:spPr>
+          <p:txBody>
+            <a:bodyPr/>
+            <a:lstStyle/>
+            <a:p>
+              <a:endParaRPr lang="es-ES"/>
+            </a:p>
+          </p:txBody>
         </p:sp>
         <p:sp>
           <p:nvSpPr>
-            <p:cNvPr name="TextBox 10" id="10"/>
-            <p:cNvSpPr txBox="true"/>
+            <p:cNvPr id="10" name="TextBox 10"/>
+            <p:cNvSpPr txBox="1"/>
             <p:nvPr/>
           </p:nvSpPr>
           <p:spPr>
@@ -4969,7 +5113,7 @@
             </a:prstGeom>
           </p:spPr>
           <p:txBody>
-            <a:bodyPr anchor="ctr" rtlCol="false" tIns="50800" lIns="50800" bIns="50800" rIns="50800"/>
+            <a:bodyPr lIns="50800" tIns="50800" rIns="50800" bIns="50800" rtlCol="0" anchor="ctr"/>
             <a:lstStyle/>
             <a:p>
               <a:pPr algn="ctr">
@@ -4995,12 +5139,12 @@
       </p:grpSp>
       <p:grpSp>
         <p:nvGrpSpPr>
-          <p:cNvPr name="Group 11" id="11"/>
+          <p:cNvPr id="11" name="Group 11"/>
           <p:cNvGrpSpPr/>
           <p:nvPr/>
         </p:nvGrpSpPr>
         <p:grpSpPr>
-          <a:xfrm rot="0">
+          <a:xfrm>
             <a:off x="7530941" y="2683194"/>
             <a:ext cx="3563827" cy="754966"/>
             <a:chOff x="0" y="0"/>
@@ -5009,12 +5153,12 @@
         </p:grpSpPr>
         <p:sp>
           <p:nvSpPr>
-            <p:cNvPr name="Freeform 12" id="12"/>
+            <p:cNvPr id="12" name="Freeform 12"/>
             <p:cNvSpPr/>
             <p:nvPr/>
           </p:nvSpPr>
           <p:spPr>
-            <a:xfrm flipH="false" flipV="false" rot="0">
+            <a:xfrm>
               <a:off x="0" y="0"/>
               <a:ext cx="938621" cy="198839"/>
             </a:xfrm>
@@ -5023,9 +5167,9 @@
               <a:gdLst/>
               <a:ahLst/>
               <a:cxnLst/>
-              <a:rect r="r" b="b" t="t" l="l"/>
+              <a:rect l="l" t="t" r="r" b="b"/>
               <a:pathLst>
-                <a:path h="198839" w="938621">
+                <a:path w="938621" h="198839">
                   <a:moveTo>
                     <a:pt x="0" y="0"/>
                   </a:moveTo>
@@ -5046,11 +5190,18 @@
               <a:srgbClr val="344F51"/>
             </a:solidFill>
           </p:spPr>
+          <p:txBody>
+            <a:bodyPr/>
+            <a:lstStyle/>
+            <a:p>
+              <a:endParaRPr lang="es-ES"/>
+            </a:p>
+          </p:txBody>
         </p:sp>
         <p:sp>
           <p:nvSpPr>
-            <p:cNvPr name="TextBox 13" id="13"/>
-            <p:cNvSpPr txBox="true"/>
+            <p:cNvPr id="13" name="TextBox 13"/>
+            <p:cNvSpPr txBox="1"/>
             <p:nvPr/>
           </p:nvSpPr>
           <p:spPr>
@@ -5063,7 +5214,7 @@
             </a:prstGeom>
           </p:spPr>
           <p:txBody>
-            <a:bodyPr anchor="ctr" rtlCol="false" tIns="50800" lIns="50800" bIns="50800" rIns="50800"/>
+            <a:bodyPr lIns="50800" tIns="50800" rIns="50800" bIns="50800" rtlCol="0" anchor="ctr"/>
             <a:lstStyle/>
             <a:p>
               <a:pPr algn="ctr">
@@ -5089,12 +5240,12 @@
       </p:grpSp>
       <p:grpSp>
         <p:nvGrpSpPr>
-          <p:cNvPr name="Group 14" id="14"/>
+          <p:cNvPr id="14" name="Group 14"/>
           <p:cNvGrpSpPr/>
           <p:nvPr/>
         </p:nvGrpSpPr>
         <p:grpSpPr>
-          <a:xfrm rot="0">
+          <a:xfrm>
             <a:off x="12746020" y="2683194"/>
             <a:ext cx="3086100" cy="754966"/>
             <a:chOff x="0" y="0"/>
@@ -5103,12 +5254,12 @@
         </p:grpSpPr>
         <p:sp>
           <p:nvSpPr>
-            <p:cNvPr name="Freeform 15" id="15"/>
+            <p:cNvPr id="15" name="Freeform 15"/>
             <p:cNvSpPr/>
             <p:nvPr/>
           </p:nvSpPr>
           <p:spPr>
-            <a:xfrm flipH="false" flipV="false" rot="0">
+            <a:xfrm>
               <a:off x="0" y="0"/>
               <a:ext cx="812800" cy="198839"/>
             </a:xfrm>
@@ -5117,9 +5268,9 @@
               <a:gdLst/>
               <a:ahLst/>
               <a:cxnLst/>
-              <a:rect r="r" b="b" t="t" l="l"/>
+              <a:rect l="l" t="t" r="r" b="b"/>
               <a:pathLst>
-                <a:path h="198839" w="812800">
+                <a:path w="812800" h="198839">
                   <a:moveTo>
                     <a:pt x="0" y="0"/>
                   </a:moveTo>
@@ -5140,11 +5291,18 @@
               <a:srgbClr val="344F51"/>
             </a:solidFill>
           </p:spPr>
+          <p:txBody>
+            <a:bodyPr/>
+            <a:lstStyle/>
+            <a:p>
+              <a:endParaRPr lang="es-ES"/>
+            </a:p>
+          </p:txBody>
         </p:sp>
         <p:sp>
           <p:nvSpPr>
-            <p:cNvPr name="TextBox 16" id="16"/>
-            <p:cNvSpPr txBox="true"/>
+            <p:cNvPr id="16" name="TextBox 16"/>
+            <p:cNvSpPr txBox="1"/>
             <p:nvPr/>
           </p:nvSpPr>
           <p:spPr>
@@ -5157,7 +5315,7 @@
             </a:prstGeom>
           </p:spPr>
           <p:txBody>
-            <a:bodyPr anchor="ctr" rtlCol="false" tIns="50800" lIns="50800" bIns="50800" rIns="50800"/>
+            <a:bodyPr lIns="50800" tIns="50800" rIns="50800" bIns="50800" rtlCol="0" anchor="ctr"/>
             <a:lstStyle/>
             <a:p>
               <a:pPr algn="ctr">
@@ -5183,12 +5341,12 @@
       </p:grpSp>
       <p:grpSp>
         <p:nvGrpSpPr>
-          <p:cNvPr name="Group 17" id="17"/>
+          <p:cNvPr id="17" name="Group 17"/>
           <p:cNvGrpSpPr/>
           <p:nvPr/>
         </p:nvGrpSpPr>
         <p:grpSpPr>
-          <a:xfrm rot="0">
+          <a:xfrm>
             <a:off x="12051273" y="3975846"/>
             <a:ext cx="4475594" cy="4146644"/>
             <a:chOff x="0" y="0"/>
@@ -5197,12 +5355,12 @@
         </p:grpSpPr>
         <p:sp>
           <p:nvSpPr>
-            <p:cNvPr name="Freeform 18" id="18"/>
+            <p:cNvPr id="18" name="Freeform 18"/>
             <p:cNvSpPr/>
             <p:nvPr/>
           </p:nvSpPr>
           <p:spPr>
-            <a:xfrm flipH="false" flipV="false" rot="0">
+            <a:xfrm>
               <a:off x="0" y="0"/>
               <a:ext cx="1178757" cy="1092120"/>
             </a:xfrm>
@@ -5211,9 +5369,9 @@
               <a:gdLst/>
               <a:ahLst/>
               <a:cxnLst/>
-              <a:rect r="r" b="b" t="t" l="l"/>
+              <a:rect l="l" t="t" r="r" b="b"/>
               <a:pathLst>
-                <a:path h="1092120" w="1178757">
+                <a:path w="1178757" h="1092120">
                   <a:moveTo>
                     <a:pt x="0" y="0"/>
                   </a:moveTo>
@@ -5238,11 +5396,18 @@
               <a:miter/>
             </a:ln>
           </p:spPr>
+          <p:txBody>
+            <a:bodyPr/>
+            <a:lstStyle/>
+            <a:p>
+              <a:endParaRPr lang="es-ES"/>
+            </a:p>
+          </p:txBody>
         </p:sp>
         <p:sp>
           <p:nvSpPr>
-            <p:cNvPr name="TextBox 19" id="19"/>
-            <p:cNvSpPr txBox="true"/>
+            <p:cNvPr id="19" name="TextBox 19"/>
+            <p:cNvSpPr txBox="1"/>
             <p:nvPr/>
           </p:nvSpPr>
           <p:spPr>
@@ -5255,7 +5420,7 @@
             </a:prstGeom>
           </p:spPr>
           <p:txBody>
-            <a:bodyPr anchor="ctr" rtlCol="false" tIns="50800" lIns="50800" bIns="50800" rIns="50800"/>
+            <a:bodyPr lIns="50800" tIns="50800" rIns="50800" bIns="50800" rtlCol="0" anchor="ctr"/>
             <a:lstStyle/>
             <a:p>
               <a:pPr algn="ctr">
@@ -5263,18 +5428,19 @@
                   <a:spcPts val="2859"/>
                 </a:lnSpc>
               </a:pPr>
+              <a:endParaRPr/>
             </a:p>
           </p:txBody>
         </p:sp>
       </p:grpSp>
       <p:sp>
         <p:nvSpPr>
-          <p:cNvPr name="TextBox 20" id="20"/>
-          <p:cNvSpPr txBox="true"/>
+          <p:cNvPr id="20" name="TextBox 20"/>
+          <p:cNvSpPr txBox="1"/>
           <p:nvPr/>
         </p:nvSpPr>
         <p:spPr>
-          <a:xfrm rot="0">
+          <a:xfrm>
             <a:off x="12674602" y="4326535"/>
             <a:ext cx="3363677" cy="3524685"/>
           </a:xfrm>
@@ -5283,12 +5449,12 @@
           </a:prstGeom>
         </p:spPr>
         <p:txBody>
-          <a:bodyPr anchor="t" rtlCol="false" tIns="0" lIns="0" bIns="0" rIns="0">
+          <a:bodyPr lIns="0" tIns="0" rIns="0" bIns="0" rtlCol="0" anchor="t">
             <a:spAutoFit/>
           </a:bodyPr>
           <a:lstStyle/>
           <a:p>
-            <a:pPr algn="l" marL="442554" indent="-221277" lvl="1">
+            <a:pPr marL="442554" lvl="1" indent="-221277" algn="l">
               <a:lnSpc>
                 <a:spcPts val="2828"/>
               </a:lnSpc>
@@ -5309,7 +5475,7 @@
             </a:r>
           </a:p>
           <a:p>
-            <a:pPr algn="l" marL="442554" indent="-221277" lvl="1">
+            <a:pPr marL="442554" lvl="1" indent="-221277" algn="l">
               <a:lnSpc>
                 <a:spcPts val="2828"/>
               </a:lnSpc>
@@ -5330,7 +5496,7 @@
             </a:r>
           </a:p>
           <a:p>
-            <a:pPr algn="l" marL="442554" indent="-221277" lvl="1">
+            <a:pPr marL="442554" lvl="1" indent="-221277" algn="l">
               <a:lnSpc>
                 <a:spcPts val="2828"/>
               </a:lnSpc>
@@ -5351,7 +5517,7 @@
             </a:r>
           </a:p>
           <a:p>
-            <a:pPr algn="l" marL="0" indent="0" lvl="0">
+            <a:pPr marL="0" lvl="0" indent="0" algn="l">
               <a:lnSpc>
                 <a:spcPts val="2828"/>
               </a:lnSpc>
@@ -5359,17 +5525,26 @@
                 <a:spcPct val="0"/>
               </a:spcBef>
             </a:pPr>
+            <a:endParaRPr lang="en-US" sz="2049" spc="200">
+              <a:solidFill>
+                <a:srgbClr val="231F20"/>
+              </a:solidFill>
+              <a:latin typeface="Poppins"/>
+              <a:ea typeface="Poppins"/>
+              <a:cs typeface="Poppins"/>
+              <a:sym typeface="Poppins"/>
+            </a:endParaRPr>
           </a:p>
         </p:txBody>
       </p:sp>
       <p:grpSp>
         <p:nvGrpSpPr>
-          <p:cNvPr name="Group 21" id="21"/>
+          <p:cNvPr id="21" name="Group 21"/>
           <p:cNvGrpSpPr/>
           <p:nvPr/>
         </p:nvGrpSpPr>
         <p:grpSpPr>
-          <a:xfrm rot="0">
+          <a:xfrm>
             <a:off x="7075058" y="4024558"/>
             <a:ext cx="4475594" cy="4146644"/>
             <a:chOff x="0" y="0"/>
@@ -5378,12 +5553,12 @@
         </p:grpSpPr>
         <p:sp>
           <p:nvSpPr>
-            <p:cNvPr name="Freeform 22" id="22"/>
+            <p:cNvPr id="22" name="Freeform 22"/>
             <p:cNvSpPr/>
             <p:nvPr/>
           </p:nvSpPr>
           <p:spPr>
-            <a:xfrm flipH="false" flipV="false" rot="0">
+            <a:xfrm>
               <a:off x="0" y="0"/>
               <a:ext cx="1178757" cy="1092120"/>
             </a:xfrm>
@@ -5392,9 +5567,9 @@
               <a:gdLst/>
               <a:ahLst/>
               <a:cxnLst/>
-              <a:rect r="r" b="b" t="t" l="l"/>
+              <a:rect l="l" t="t" r="r" b="b"/>
               <a:pathLst>
-                <a:path h="1092120" w="1178757">
+                <a:path w="1178757" h="1092120">
                   <a:moveTo>
                     <a:pt x="0" y="0"/>
                   </a:moveTo>
@@ -5419,11 +5594,18 @@
               <a:miter/>
             </a:ln>
           </p:spPr>
+          <p:txBody>
+            <a:bodyPr/>
+            <a:lstStyle/>
+            <a:p>
+              <a:endParaRPr lang="es-ES"/>
+            </a:p>
+          </p:txBody>
         </p:sp>
         <p:sp>
           <p:nvSpPr>
-            <p:cNvPr name="TextBox 23" id="23"/>
-            <p:cNvSpPr txBox="true"/>
+            <p:cNvPr id="23" name="TextBox 23"/>
+            <p:cNvSpPr txBox="1"/>
             <p:nvPr/>
           </p:nvSpPr>
           <p:spPr>
@@ -5436,7 +5618,7 @@
             </a:prstGeom>
           </p:spPr>
           <p:txBody>
-            <a:bodyPr anchor="ctr" rtlCol="false" tIns="50800" lIns="50800" bIns="50800" rIns="50800"/>
+            <a:bodyPr lIns="50800" tIns="50800" rIns="50800" bIns="50800" rtlCol="0" anchor="ctr"/>
             <a:lstStyle/>
             <a:p>
               <a:pPr algn="ctr">
@@ -5444,18 +5626,19 @@
                   <a:spcPts val="2600"/>
                 </a:lnSpc>
               </a:pPr>
+              <a:endParaRPr/>
             </a:p>
           </p:txBody>
         </p:sp>
       </p:grpSp>
       <p:sp>
         <p:nvSpPr>
-          <p:cNvPr name="TextBox 24" id="24"/>
-          <p:cNvSpPr txBox="true"/>
+          <p:cNvPr id="24" name="TextBox 24"/>
+          <p:cNvSpPr txBox="1"/>
           <p:nvPr/>
         </p:nvSpPr>
         <p:spPr>
-          <a:xfrm rot="0">
+          <a:xfrm>
             <a:off x="7530941" y="4326535"/>
             <a:ext cx="3563827" cy="3629053"/>
           </a:xfrm>
@@ -5464,7 +5647,7 @@
           </a:prstGeom>
         </p:spPr>
         <p:txBody>
-          <a:bodyPr anchor="t" rtlCol="false" tIns="0" lIns="0" bIns="0" rIns="0">
+          <a:bodyPr lIns="0" tIns="0" rIns="0" bIns="0" rtlCol="0" anchor="t">
             <a:spAutoFit/>
           </a:bodyPr>
           <a:lstStyle/>
@@ -5493,9 +5676,18 @@
                 <a:spcPts val="2873"/>
               </a:lnSpc>
             </a:pPr>
-          </a:p>
-          <a:p>
-            <a:pPr algn="l" marL="0" indent="0" lvl="0">
+            <a:endParaRPr lang="en-US" sz="2082" spc="204">
+              <a:solidFill>
+                <a:srgbClr val="231F20"/>
+              </a:solidFill>
+              <a:latin typeface="Poppins"/>
+              <a:ea typeface="Poppins"/>
+              <a:cs typeface="Poppins"/>
+              <a:sym typeface="Poppins"/>
+            </a:endParaRPr>
+          </a:p>
+          <a:p>
+            <a:pPr marL="0" lvl="0" indent="0" algn="l">
               <a:lnSpc>
                 <a:spcPts val="2873"/>
               </a:lnSpc>
@@ -5504,7 +5696,7 @@
               </a:spcBef>
             </a:pPr>
             <a:r>
-              <a:rPr lang="en-US" b="true" sz="2082" spc="204">
+              <a:rPr lang="en-US" sz="2082" b="1" spc="204">
                 <a:solidFill>
                   <a:srgbClr val="344F51"/>
                 </a:solidFill>
@@ -5532,12 +5724,12 @@
       </p:sp>
       <p:sp>
         <p:nvSpPr>
-          <p:cNvPr name="TextBox 25" id="25"/>
-          <p:cNvSpPr txBox="true"/>
+          <p:cNvPr id="25" name="TextBox 25"/>
+          <p:cNvSpPr txBox="1"/>
           <p:nvPr/>
         </p:nvSpPr>
         <p:spPr>
-          <a:xfrm rot="0">
+          <a:xfrm>
             <a:off x="3563586" y="1329960"/>
             <a:ext cx="10906040" cy="796391"/>
           </a:xfrm>
@@ -5546,12 +5738,12 @@
           </a:prstGeom>
         </p:spPr>
         <p:txBody>
-          <a:bodyPr anchor="t" rtlCol="false" tIns="0" lIns="0" bIns="0" rIns="0">
+          <a:bodyPr lIns="0" tIns="0" rIns="0" bIns="0" rtlCol="0" anchor="t">
             <a:spAutoFit/>
           </a:bodyPr>
           <a:lstStyle/>
           <a:p>
-            <a:pPr algn="ctr" marL="0" indent="0" lvl="0">
+            <a:pPr marL="0" lvl="0" indent="0" algn="ctr">
               <a:lnSpc>
                 <a:spcPts val="6548"/>
               </a:lnSpc>
@@ -5560,7 +5752,7 @@
               </a:spcBef>
             </a:pPr>
             <a:r>
-              <a:rPr lang="en-US" b="true" sz="4745" spc="37">
+              <a:rPr lang="en-US" sz="4745" b="1" spc="37">
                 <a:solidFill>
                   <a:srgbClr val="344F51"/>
                 </a:solidFill>
@@ -5576,12 +5768,12 @@
       </p:sp>
       <p:sp>
         <p:nvSpPr>
-          <p:cNvPr name="TextBox 26" id="26"/>
-          <p:cNvSpPr txBox="true"/>
+          <p:cNvPr id="26" name="TextBox 26"/>
+          <p:cNvSpPr txBox="1"/>
           <p:nvPr/>
         </p:nvSpPr>
         <p:spPr>
-          <a:xfrm rot="0">
+          <a:xfrm>
             <a:off x="2359182" y="4326535"/>
             <a:ext cx="3656940" cy="3316175"/>
           </a:xfrm>
@@ -5590,12 +5782,12 @@
           </a:prstGeom>
         </p:spPr>
         <p:txBody>
-          <a:bodyPr anchor="t" rtlCol="false" tIns="0" lIns="0" bIns="0" rIns="0">
+          <a:bodyPr lIns="0" tIns="0" rIns="0" bIns="0" rtlCol="0" anchor="t">
             <a:spAutoFit/>
           </a:bodyPr>
           <a:lstStyle/>
           <a:p>
-            <a:pPr algn="l" marL="0" indent="0" lvl="0">
+            <a:pPr marL="0" lvl="0" indent="0" algn="l">
               <a:lnSpc>
                 <a:spcPts val="2958"/>
               </a:lnSpc>
@@ -5620,12 +5812,12 @@
       </p:sp>
       <p:sp>
         <p:nvSpPr>
-          <p:cNvPr name="TextBox 27" id="27"/>
-          <p:cNvSpPr txBox="true"/>
+          <p:cNvPr id="27" name="TextBox 27"/>
+          <p:cNvSpPr txBox="1"/>
           <p:nvPr/>
         </p:nvSpPr>
         <p:spPr>
-          <a:xfrm rot="0">
+          <a:xfrm>
             <a:off x="17535126" y="9399905"/>
             <a:ext cx="752874" cy="887095"/>
           </a:xfrm>
@@ -5634,7 +5826,7 @@
           </a:prstGeom>
         </p:spPr>
         <p:txBody>
-          <a:bodyPr anchor="t" rtlCol="false" tIns="0" lIns="0" bIns="0" rIns="0">
+          <a:bodyPr lIns="0" tIns="0" rIns="0" bIns="0" rtlCol="0" anchor="t">
             <a:spAutoFit/>
           </a:bodyPr>
           <a:lstStyle/>
@@ -5645,7 +5837,7 @@
               </a:lnSpc>
             </a:pPr>
             <a:r>
-              <a:rPr lang="en-US" b="true" sz="5199">
+              <a:rPr lang="en-US" sz="5199" b="1">
                 <a:solidFill>
                   <a:srgbClr val="93D14B"/>
                 </a:solidFill>
@@ -5668,13 +5860,14 @@
 </file>
 
 <file path=ppt/slides/slide4.xml><?xml version="1.0" encoding="utf-8"?>
-<p:sld xmlns:p="http://schemas.openxmlformats.org/presentationml/2006/main" xmlns:a="http://schemas.openxmlformats.org/drawingml/2006/main" xmlns:r="http://schemas.openxmlformats.org/officeDocument/2006/relationships">
+<p:sld xmlns:a="http://schemas.openxmlformats.org/drawingml/2006/main" xmlns:r="http://schemas.openxmlformats.org/officeDocument/2006/relationships" xmlns:p="http://schemas.openxmlformats.org/presentationml/2006/main">
   <p:cSld>
     <p:bg>
       <p:bgPr>
         <a:solidFill>
           <a:srgbClr val="344F51"/>
         </a:solidFill>
+        <a:effectLst/>
       </p:bgPr>
     </p:bg>
     <p:spTree>
@@ -5693,12 +5886,12 @@
       </p:grpSpPr>
       <p:grpSp>
         <p:nvGrpSpPr>
-          <p:cNvPr name="Group 2" id="2"/>
+          <p:cNvPr id="2" name="Group 2"/>
           <p:cNvGrpSpPr/>
           <p:nvPr/>
         </p:nvGrpSpPr>
         <p:grpSpPr>
-          <a:xfrm rot="0">
+          <a:xfrm>
             <a:off x="-5208853" y="424928"/>
             <a:ext cx="19354610" cy="1639695"/>
             <a:chOff x="0" y="0"/>
@@ -5707,12 +5900,12 @@
         </p:grpSpPr>
         <p:sp>
           <p:nvSpPr>
-            <p:cNvPr name="Freeform 3" id="3"/>
+            <p:cNvPr id="3" name="Freeform 3"/>
             <p:cNvSpPr/>
             <p:nvPr/>
           </p:nvSpPr>
           <p:spPr>
-            <a:xfrm flipH="false" flipV="false" rot="0">
+            <a:xfrm>
               <a:off x="0" y="0"/>
               <a:ext cx="1876002" cy="158932"/>
             </a:xfrm>
@@ -5721,9 +5914,9 @@
               <a:gdLst/>
               <a:ahLst/>
               <a:cxnLst/>
-              <a:rect r="r" b="b" t="t" l="l"/>
+              <a:rect l="l" t="t" r="r" b="b"/>
               <a:pathLst>
-                <a:path h="158932" w="1876002">
+                <a:path w="1876002" h="158932">
                   <a:moveTo>
                     <a:pt x="1672802" y="0"/>
                   </a:moveTo>
@@ -5752,11 +5945,18 @@
               <a:miter/>
             </a:ln>
           </p:spPr>
+          <p:txBody>
+            <a:bodyPr/>
+            <a:lstStyle/>
+            <a:p>
+              <a:endParaRPr lang="es-ES"/>
+            </a:p>
+          </p:txBody>
         </p:sp>
         <p:sp>
           <p:nvSpPr>
-            <p:cNvPr name="TextBox 4" id="4"/>
-            <p:cNvSpPr txBox="true"/>
+            <p:cNvPr id="4" name="TextBox 4"/>
+            <p:cNvSpPr txBox="1"/>
             <p:nvPr/>
           </p:nvSpPr>
           <p:spPr>
@@ -5769,10 +5969,10 @@
             </a:prstGeom>
           </p:spPr>
           <p:txBody>
-            <a:bodyPr anchor="ctr" rtlCol="false" tIns="50800" lIns="50800" bIns="50800" rIns="50800"/>
+            <a:bodyPr lIns="50800" tIns="50800" rIns="50800" bIns="50800" rtlCol="0" anchor="ctr"/>
             <a:lstStyle/>
             <a:p>
-              <a:pPr algn="ctr" marL="0" indent="0" lvl="0">
+              <a:pPr marL="0" lvl="0" indent="0" algn="ctr">
                 <a:lnSpc>
                   <a:spcPts val="2859"/>
                 </a:lnSpc>
@@ -5780,18 +5980,19 @@
                   <a:spcPct val="0"/>
                 </a:spcBef>
               </a:pPr>
+              <a:endParaRPr/>
             </a:p>
           </p:txBody>
         </p:sp>
       </p:grpSp>
       <p:grpSp>
         <p:nvGrpSpPr>
-          <p:cNvPr name="Group 5" id="5"/>
+          <p:cNvPr id="5" name="Group 5"/>
           <p:cNvGrpSpPr/>
           <p:nvPr/>
         </p:nvGrpSpPr>
         <p:grpSpPr>
-          <a:xfrm rot="0">
+          <a:xfrm>
             <a:off x="1886411" y="3407406"/>
             <a:ext cx="2667835" cy="810936"/>
             <a:chOff x="0" y="0"/>
@@ -5800,12 +6001,12 @@
         </p:grpSpPr>
         <p:sp>
           <p:nvSpPr>
-            <p:cNvPr name="Freeform 6" id="6"/>
+            <p:cNvPr id="6" name="Freeform 6"/>
             <p:cNvSpPr/>
             <p:nvPr/>
           </p:nvSpPr>
           <p:spPr>
-            <a:xfrm flipH="false" flipV="false" rot="0">
+            <a:xfrm>
               <a:off x="0" y="0"/>
               <a:ext cx="620299" cy="188551"/>
             </a:xfrm>
@@ -5814,9 +6015,9 @@
               <a:gdLst/>
               <a:ahLst/>
               <a:cxnLst/>
-              <a:rect r="r" b="b" t="t" l="l"/>
+              <a:rect l="l" t="t" r="r" b="b"/>
               <a:pathLst>
-                <a:path h="188551" w="620299">
+                <a:path w="620299" h="188551">
                   <a:moveTo>
                     <a:pt x="0" y="0"/>
                   </a:moveTo>
@@ -5837,27 +6038,34 @@
               <a:srgbClr val="93D14B"/>
             </a:solidFill>
           </p:spPr>
+          <p:txBody>
+            <a:bodyPr/>
+            <a:lstStyle/>
+            <a:p>
+              <a:endParaRPr lang="es-ES"/>
+            </a:p>
+          </p:txBody>
         </p:sp>
         <p:sp>
           <p:nvSpPr>
-            <p:cNvPr name="TextBox 7" id="7"/>
-            <p:cNvSpPr txBox="true"/>
+            <p:cNvPr id="7" name="TextBox 7"/>
+            <p:cNvSpPr txBox="1"/>
             <p:nvPr/>
           </p:nvSpPr>
           <p:spPr>
             <a:xfrm>
-              <a:off x="0" y="-76200"/>
-              <a:ext cx="620299" cy="264751"/>
+              <a:off x="0" y="0"/>
+              <a:ext cx="620299" cy="188551"/>
             </a:xfrm>
             <a:prstGeom prst="rect">
               <a:avLst/>
             </a:prstGeom>
           </p:spPr>
           <p:txBody>
-            <a:bodyPr anchor="t" rtlCol="false" tIns="50800" lIns="50800" bIns="50800" rIns="50800"/>
+            <a:bodyPr lIns="50800" tIns="50800" rIns="50800" bIns="50800" rtlCol="0" anchor="t"/>
             <a:lstStyle/>
             <a:p>
-              <a:pPr algn="ctr" marL="0" indent="0" lvl="0">
+              <a:pPr marL="0" lvl="0" indent="0" algn="ctr">
                 <a:lnSpc>
                   <a:spcPts val="4114"/>
                 </a:lnSpc>
@@ -5866,7 +6074,7 @@
                 </a:spcBef>
               </a:pPr>
               <a:r>
-                <a:rPr lang="en-US" b="true" sz="2981" spc="29">
+                <a:rPr lang="en-US" sz="2981" b="1" spc="29" dirty="0" err="1">
                   <a:solidFill>
                     <a:srgbClr val="FFFFFF"/>
                   </a:solidFill>
@@ -5877,18 +6085,27 @@
                 </a:rPr>
                 <a:t>CLIENTE</a:t>
               </a:r>
+              <a:endParaRPr lang="en-US" sz="2981" b="1" spc="29" dirty="0">
+                <a:solidFill>
+                  <a:srgbClr val="FFFFFF"/>
+                </a:solidFill>
+                <a:latin typeface="Poppins Bold"/>
+                <a:ea typeface="Poppins Bold"/>
+                <a:cs typeface="Poppins Bold"/>
+                <a:sym typeface="Poppins Bold"/>
+              </a:endParaRPr>
             </a:p>
           </p:txBody>
         </p:sp>
       </p:grpSp>
       <p:sp>
         <p:nvSpPr>
-          <p:cNvPr name="Freeform 8" id="8"/>
+          <p:cNvPr id="8" name="Freeform 8"/>
           <p:cNvSpPr/>
           <p:nvPr/>
         </p:nvSpPr>
         <p:spPr>
-          <a:xfrm flipH="false" flipV="false" rot="0">
+          <a:xfrm>
             <a:off x="1276448" y="4817276"/>
             <a:ext cx="3887759" cy="3328894"/>
           </a:xfrm>
@@ -5897,9 +6114,9 @@
             <a:gdLst/>
             <a:ahLst/>
             <a:cxnLst/>
-            <a:rect r="r" b="b" t="t" l="l"/>
+            <a:rect l="l" t="t" r="r" b="b"/>
             <a:pathLst>
-              <a:path h="3328894" w="3887759">
+              <a:path w="3887759" h="3328894">
                 <a:moveTo>
                   <a:pt x="0" y="0"/>
                 </a:moveTo>
@@ -5920,27 +6137,34 @@
             </a:pathLst>
           </a:custGeom>
           <a:blipFill>
-            <a:blip r:embed="rId2">
+            <a:blip>
               <a:extLst>
                 <a:ext uri="{96DAC541-7B7A-43D3-8B79-37D633B846F1}">
-                  <asvg:svgBlip xmlns:asvg="http://schemas.microsoft.com/office/drawing/2016/SVG/main" r:embed="rId3"/>
+                  <asvg:svgBlip xmlns:asvg="http://schemas.microsoft.com/office/drawing/2016/SVG/main" r:embed="rId2"/>
                 </a:ext>
               </a:extLst>
             </a:blip>
             <a:stretch>
-              <a:fillRect l="0" t="0" r="0" b="0"/>
+              <a:fillRect/>
             </a:stretch>
           </a:blipFill>
         </p:spPr>
-      </p:sp>
-      <p:sp>
-        <p:nvSpPr>
-          <p:cNvPr name="TextBox 9" id="9"/>
-          <p:cNvSpPr txBox="true"/>
+        <p:txBody>
+          <a:bodyPr/>
+          <a:lstStyle/>
+          <a:p>
+            <a:endParaRPr lang="es-ES"/>
+          </a:p>
+        </p:txBody>
+      </p:sp>
+      <p:sp>
+        <p:nvSpPr>
+          <p:cNvPr id="9" name="TextBox 9"/>
+          <p:cNvSpPr txBox="1"/>
           <p:nvPr/>
         </p:nvSpPr>
         <p:spPr>
-          <a:xfrm rot="0">
+          <a:xfrm>
             <a:off x="1658038" y="808479"/>
             <a:ext cx="9308329" cy="796391"/>
           </a:xfrm>
@@ -5949,12 +6173,12 @@
           </a:prstGeom>
         </p:spPr>
         <p:txBody>
-          <a:bodyPr anchor="t" rtlCol="false" tIns="0" lIns="0" bIns="0" rIns="0">
+          <a:bodyPr lIns="0" tIns="0" rIns="0" bIns="0" rtlCol="0" anchor="t">
             <a:spAutoFit/>
           </a:bodyPr>
           <a:lstStyle/>
           <a:p>
-            <a:pPr algn="ctr" marL="0" indent="0" lvl="0">
+            <a:pPr marL="0" lvl="0" indent="0" algn="ctr">
               <a:lnSpc>
                 <a:spcPts val="6548"/>
               </a:lnSpc>
@@ -5979,12 +6203,12 @@
       </p:sp>
       <p:grpSp>
         <p:nvGrpSpPr>
-          <p:cNvPr name="Group 10" id="10"/>
+          <p:cNvPr id="10" name="Group 10"/>
           <p:cNvGrpSpPr/>
           <p:nvPr/>
         </p:nvGrpSpPr>
         <p:grpSpPr>
-          <a:xfrm rot="0">
+          <a:xfrm>
             <a:off x="8216586" y="3407406"/>
             <a:ext cx="2385400" cy="810936"/>
             <a:chOff x="0" y="0"/>
@@ -5993,12 +6217,12 @@
         </p:grpSpPr>
         <p:sp>
           <p:nvSpPr>
-            <p:cNvPr name="Freeform 11" id="11"/>
+            <p:cNvPr id="11" name="Freeform 11"/>
             <p:cNvSpPr/>
             <p:nvPr/>
           </p:nvSpPr>
           <p:spPr>
-            <a:xfrm flipH="false" flipV="false" rot="0">
+            <a:xfrm>
               <a:off x="0" y="0"/>
               <a:ext cx="554630" cy="188551"/>
             </a:xfrm>
@@ -6007,9 +6231,9 @@
               <a:gdLst/>
               <a:ahLst/>
               <a:cxnLst/>
-              <a:rect r="r" b="b" t="t" l="l"/>
+              <a:rect l="l" t="t" r="r" b="b"/>
               <a:pathLst>
-                <a:path h="188551" w="554630">
+                <a:path w="554630" h="188551">
                   <a:moveTo>
                     <a:pt x="0" y="0"/>
                   </a:moveTo>
@@ -6030,27 +6254,34 @@
               <a:srgbClr val="93D14B"/>
             </a:solidFill>
           </p:spPr>
+          <p:txBody>
+            <a:bodyPr/>
+            <a:lstStyle/>
+            <a:p>
+              <a:endParaRPr lang="es-ES"/>
+            </a:p>
+          </p:txBody>
         </p:sp>
         <p:sp>
           <p:nvSpPr>
-            <p:cNvPr name="TextBox 12" id="12"/>
-            <p:cNvSpPr txBox="true"/>
+            <p:cNvPr id="12" name="TextBox 12"/>
+            <p:cNvSpPr txBox="1"/>
             <p:nvPr/>
           </p:nvSpPr>
           <p:spPr>
             <a:xfrm>
-              <a:off x="0" y="-76200"/>
-              <a:ext cx="554630" cy="264751"/>
+              <a:off x="0" y="0"/>
+              <a:ext cx="554630" cy="188551"/>
             </a:xfrm>
             <a:prstGeom prst="rect">
               <a:avLst/>
             </a:prstGeom>
           </p:spPr>
           <p:txBody>
-            <a:bodyPr anchor="t" rtlCol="false" tIns="50800" lIns="50800" bIns="50800" rIns="50800"/>
+            <a:bodyPr lIns="50800" tIns="50800" rIns="50800" bIns="50800" rtlCol="0" anchor="t"/>
             <a:lstStyle/>
             <a:p>
-              <a:pPr algn="ctr" marL="0" indent="0" lvl="0">
+              <a:pPr marL="0" lvl="0" indent="0" algn="ctr">
                 <a:lnSpc>
                   <a:spcPts val="4114"/>
                 </a:lnSpc>
@@ -6059,7 +6290,7 @@
                 </a:spcBef>
               </a:pPr>
               <a:r>
-                <a:rPr lang="en-US" b="true" sz="2981" spc="29">
+                <a:rPr lang="en-US" sz="2981" b="1" spc="29" dirty="0">
                   <a:solidFill>
                     <a:srgbClr val="FFFFFF"/>
                   </a:solidFill>
@@ -6076,12 +6307,12 @@
       </p:grpSp>
       <p:grpSp>
         <p:nvGrpSpPr>
-          <p:cNvPr name="Group 13" id="13"/>
+          <p:cNvPr id="13" name="Group 13"/>
           <p:cNvGrpSpPr/>
           <p:nvPr/>
         </p:nvGrpSpPr>
         <p:grpSpPr>
-          <a:xfrm rot="0">
+          <a:xfrm>
             <a:off x="14264327" y="3407406"/>
             <a:ext cx="2667835" cy="810936"/>
             <a:chOff x="0" y="0"/>
@@ -6090,12 +6321,12 @@
         </p:grpSpPr>
         <p:sp>
           <p:nvSpPr>
-            <p:cNvPr name="Freeform 14" id="14"/>
+            <p:cNvPr id="14" name="Freeform 14"/>
             <p:cNvSpPr/>
             <p:nvPr/>
           </p:nvSpPr>
           <p:spPr>
-            <a:xfrm flipH="false" flipV="false" rot="0">
+            <a:xfrm>
               <a:off x="0" y="0"/>
               <a:ext cx="620299" cy="188551"/>
             </a:xfrm>
@@ -6104,9 +6335,9 @@
               <a:gdLst/>
               <a:ahLst/>
               <a:cxnLst/>
-              <a:rect r="r" b="b" t="t" l="l"/>
+              <a:rect l="l" t="t" r="r" b="b"/>
               <a:pathLst>
-                <a:path h="188551" w="620299">
+                <a:path w="620299" h="188551">
                   <a:moveTo>
                     <a:pt x="0" y="0"/>
                   </a:moveTo>
@@ -6127,27 +6358,34 @@
               <a:srgbClr val="93D14B"/>
             </a:solidFill>
           </p:spPr>
+          <p:txBody>
+            <a:bodyPr/>
+            <a:lstStyle/>
+            <a:p>
+              <a:endParaRPr lang="es-ES"/>
+            </a:p>
+          </p:txBody>
         </p:sp>
         <p:sp>
           <p:nvSpPr>
-            <p:cNvPr name="TextBox 15" id="15"/>
-            <p:cNvSpPr txBox="true"/>
+            <p:cNvPr id="15" name="TextBox 15"/>
+            <p:cNvSpPr txBox="1"/>
             <p:nvPr/>
           </p:nvSpPr>
           <p:spPr>
             <a:xfrm>
-              <a:off x="0" y="-76200"/>
-              <a:ext cx="620299" cy="264751"/>
+              <a:off x="0" y="0"/>
+              <a:ext cx="620299" cy="188551"/>
             </a:xfrm>
             <a:prstGeom prst="rect">
               <a:avLst/>
             </a:prstGeom>
           </p:spPr>
           <p:txBody>
-            <a:bodyPr anchor="t" rtlCol="false" tIns="50800" lIns="50800" bIns="50800" rIns="50800"/>
+            <a:bodyPr lIns="50800" tIns="50800" rIns="50800" bIns="50800" rtlCol="0" anchor="t"/>
             <a:lstStyle/>
             <a:p>
-              <a:pPr algn="ctr" marL="0" indent="0" lvl="0">
+              <a:pPr marL="0" lvl="0" indent="0" algn="ctr">
                 <a:lnSpc>
                   <a:spcPts val="4114"/>
                 </a:lnSpc>
@@ -6156,7 +6394,7 @@
                 </a:spcBef>
               </a:pPr>
               <a:r>
-                <a:rPr lang="en-US" b="true" sz="2981" spc="29">
+                <a:rPr lang="en-US" sz="2981" b="1" spc="29" dirty="0">
                   <a:solidFill>
                     <a:srgbClr val="FFFFFF"/>
                   </a:solidFill>
@@ -6173,12 +6411,12 @@
       </p:grpSp>
       <p:sp>
         <p:nvSpPr>
-          <p:cNvPr name="Freeform 16" id="16"/>
+          <p:cNvPr id="16" name="Freeform 16"/>
           <p:cNvSpPr/>
           <p:nvPr/>
         </p:nvSpPr>
         <p:spPr>
-          <a:xfrm flipH="false" flipV="false" rot="0">
+          <a:xfrm>
             <a:off x="14668853" y="5106603"/>
             <a:ext cx="1858783" cy="2750241"/>
           </a:xfrm>
@@ -6187,9 +6425,9 @@
             <a:gdLst/>
             <a:ahLst/>
             <a:cxnLst/>
-            <a:rect r="r" b="b" t="t" l="l"/>
+            <a:rect l="l" t="t" r="r" b="b"/>
             <a:pathLst>
-              <a:path h="2750241" w="1858783">
+              <a:path w="1858783" h="2750241">
                 <a:moveTo>
                   <a:pt x="0" y="0"/>
                 </a:moveTo>
@@ -6210,27 +6448,34 @@
             </a:pathLst>
           </a:custGeom>
           <a:blipFill>
-            <a:blip r:embed="rId4">
+            <a:blip>
               <a:extLst>
                 <a:ext uri="{96DAC541-7B7A-43D3-8B79-37D633B846F1}">
-                  <asvg:svgBlip xmlns:asvg="http://schemas.microsoft.com/office/drawing/2016/SVG/main" r:embed="rId5"/>
+                  <asvg:svgBlip xmlns:asvg="http://schemas.microsoft.com/office/drawing/2016/SVG/main" r:embed="rId3"/>
                 </a:ext>
               </a:extLst>
             </a:blip>
             <a:stretch>
-              <a:fillRect l="0" t="0" r="0" b="0"/>
+              <a:fillRect/>
             </a:stretch>
           </a:blipFill>
         </p:spPr>
-      </p:sp>
-      <p:sp>
-        <p:nvSpPr>
-          <p:cNvPr name="Freeform 17" id="17"/>
+        <p:txBody>
+          <a:bodyPr/>
+          <a:lstStyle/>
+          <a:p>
+            <a:endParaRPr lang="es-ES"/>
+          </a:p>
+        </p:txBody>
+      </p:sp>
+      <p:sp>
+        <p:nvSpPr>
+          <p:cNvPr id="17" name="Freeform 17"/>
           <p:cNvSpPr/>
           <p:nvPr/>
         </p:nvSpPr>
         <p:spPr>
-          <a:xfrm flipH="false" flipV="false" rot="0">
+          <a:xfrm>
             <a:off x="7994414" y="5066851"/>
             <a:ext cx="2829745" cy="2829745"/>
           </a:xfrm>
@@ -6239,9 +6484,9 @@
             <a:gdLst/>
             <a:ahLst/>
             <a:cxnLst/>
-            <a:rect r="r" b="b" t="t" l="l"/>
+            <a:rect l="l" t="t" r="r" b="b"/>
             <a:pathLst>
-              <a:path h="2829745" w="2829745">
+              <a:path w="2829745" h="2829745">
                 <a:moveTo>
                   <a:pt x="0" y="0"/>
                 </a:moveTo>
@@ -6262,27 +6507,34 @@
             </a:pathLst>
           </a:custGeom>
           <a:blipFill>
-            <a:blip r:embed="rId6">
+            <a:blip>
               <a:extLst>
                 <a:ext uri="{96DAC541-7B7A-43D3-8B79-37D633B846F1}">
-                  <asvg:svgBlip xmlns:asvg="http://schemas.microsoft.com/office/drawing/2016/SVG/main" r:embed="rId7"/>
+                  <asvg:svgBlip xmlns:asvg="http://schemas.microsoft.com/office/drawing/2016/SVG/main" r:embed="rId4"/>
                 </a:ext>
               </a:extLst>
             </a:blip>
             <a:stretch>
-              <a:fillRect l="0" t="0" r="0" b="0"/>
+              <a:fillRect/>
             </a:stretch>
           </a:blipFill>
         </p:spPr>
-      </p:sp>
-      <p:sp>
-        <p:nvSpPr>
-          <p:cNvPr name="TextBox 18" id="18"/>
-          <p:cNvSpPr txBox="true"/>
+        <p:txBody>
+          <a:bodyPr/>
+          <a:lstStyle/>
+          <a:p>
+            <a:endParaRPr lang="es-ES"/>
+          </a:p>
+        </p:txBody>
+      </p:sp>
+      <p:sp>
+        <p:nvSpPr>
+          <p:cNvPr id="18" name="TextBox 18"/>
+          <p:cNvSpPr txBox="1"/>
           <p:nvPr/>
         </p:nvSpPr>
         <p:spPr>
-          <a:xfrm rot="0">
+          <a:xfrm>
             <a:off x="17535126" y="9399905"/>
             <a:ext cx="752874" cy="887095"/>
           </a:xfrm>
@@ -6291,7 +6543,7 @@
           </a:prstGeom>
         </p:spPr>
         <p:txBody>
-          <a:bodyPr anchor="t" rtlCol="false" tIns="0" lIns="0" bIns="0" rIns="0">
+          <a:bodyPr lIns="0" tIns="0" rIns="0" bIns="0" rtlCol="0" anchor="t">
             <a:spAutoFit/>
           </a:bodyPr>
           <a:lstStyle/>
@@ -6302,7 +6554,7 @@
               </a:lnSpc>
             </a:pPr>
             <a:r>
-              <a:rPr lang="en-US" sz="5199" b="true">
+              <a:rPr lang="en-US" sz="5199" b="1">
                 <a:solidFill>
                   <a:srgbClr val="93D14B"/>
                 </a:solidFill>
@@ -6325,13 +6577,14 @@
 </file>
 
 <file path=ppt/slides/slide5.xml><?xml version="1.0" encoding="utf-8"?>
-<p:sld xmlns:p="http://schemas.openxmlformats.org/presentationml/2006/main" xmlns:a="http://schemas.openxmlformats.org/drawingml/2006/main" xmlns:r="http://schemas.openxmlformats.org/officeDocument/2006/relationships">
+<p:sld xmlns:a="http://schemas.openxmlformats.org/drawingml/2006/main" xmlns:r="http://schemas.openxmlformats.org/officeDocument/2006/relationships" xmlns:p="http://schemas.openxmlformats.org/presentationml/2006/main">
   <p:cSld>
     <p:bg>
       <p:bgPr>
         <a:solidFill>
           <a:srgbClr val="344F51"/>
         </a:solidFill>
+        <a:effectLst/>
       </p:bgPr>
     </p:bg>
     <p:spTree>
@@ -6350,50 +6603,67 @@
       </p:grpSpPr>
       <p:graphicFrame>
         <p:nvGraphicFramePr>
-          <p:cNvPr name="Object 2" id="2"/>
+          <p:cNvPr id="2" name="Object 2"/>
           <p:cNvGraphicFramePr/>
-          <p:nvPr/>
+          <p:nvPr>
+            <p:extLst>
+              <p:ext uri="{D42A27DB-BD31-4B8C-83A1-F6EECF244321}">
+                <p14:modId xmlns:p14="http://schemas.microsoft.com/office/powerpoint/2010/main" val="1776724199"/>
+              </p:ext>
+            </p:extLst>
+          </p:nvPr>
         </p:nvGraphicFramePr>
         <p:xfrm>
-          <a:off x="612113" y="286642"/>
-          <a:ext cx="11291915" cy="8229600"/>
+          <a:off x="990600" y="26727"/>
+          <a:ext cx="15011400" cy="9399905"/>
         </p:xfrm>
         <a:graphic>
           <a:graphicData uri="http://schemas.openxmlformats.org/presentationml/2006/ole">
-            <p:oleObj imgW="13550900" imgH="10477500" r:id="rId3" progId="Excel.Sheet.12" name="Worksheet">
-              <p:embed/>
-              <p:pic>
-                <p:nvPicPr>
-                  <p:cNvPr name="" id="0"/>
-                  <p:cNvPicPr/>
-                  <p:nvPr/>
-                </p:nvPicPr>
-                <p:blipFill>
-                  <a:blip r:embed="rId2"/>
-                  <a:stretch>
-                    <a:fillRect/>
-                  </a:stretch>
-                </p:blipFill>
-                <p:spPr>
-                  <a:xfrm>
-                    <a:off x="1270000" y="1270000"/>
-                    <a:ext cx="1270000" cy="1270000"/>
-                  </a:xfrm>
-                  <a:prstGeom prst="rect"/>
-                </p:spPr>
-              </p:pic>
-            </p:oleObj>
+            <mc:AlternateContent xmlns:mc="http://schemas.openxmlformats.org/markup-compatibility/2006">
+              <mc:Choice xmlns:v="urn:schemas-microsoft-com:vml" Requires="v">
+                <p:oleObj name="Worksheet" r:id="rId2" imgW="13550900" imgH="10477500" progId="Excel.Sheet.12">
+                  <p:embed/>
+                </p:oleObj>
+              </mc:Choice>
+              <mc:Fallback>
+                <p:oleObj name="Worksheet" r:id="rId2" imgW="13550900" imgH="10477500" progId="Excel.Sheet.12">
+                  <p:embed/>
+                  <p:pic>
+                    <p:nvPicPr>
+                      <p:cNvPr id="0" name=""/>
+                      <p:cNvPicPr/>
+                      <p:nvPr/>
+                    </p:nvPicPr>
+                    <p:blipFill>
+                      <a:blip r:embed="rId3"/>
+                      <a:stretch>
+                        <a:fillRect/>
+                      </a:stretch>
+                    </p:blipFill>
+                    <p:spPr>
+                      <a:xfrm>
+                        <a:off x="990600" y="26727"/>
+                        <a:ext cx="15011400" cy="9399905"/>
+                      </a:xfrm>
+                      <a:prstGeom prst="rect">
+                        <a:avLst/>
+                      </a:prstGeom>
+                    </p:spPr>
+                  </p:pic>
+                </p:oleObj>
+              </mc:Fallback>
+            </mc:AlternateContent>
           </a:graphicData>
         </a:graphic>
       </p:graphicFrame>
       <p:sp>
         <p:nvSpPr>
-          <p:cNvPr name="TextBox 3" id="3"/>
-          <p:cNvSpPr txBox="true"/>
+          <p:cNvPr id="3" name="TextBox 3"/>
+          <p:cNvSpPr txBox="1"/>
           <p:nvPr/>
         </p:nvSpPr>
         <p:spPr>
-          <a:xfrm rot="0">
+          <a:xfrm>
             <a:off x="17675887" y="9399905"/>
             <a:ext cx="612113" cy="887095"/>
           </a:xfrm>
@@ -6402,7 +6672,7 @@
           </a:prstGeom>
         </p:spPr>
         <p:txBody>
-          <a:bodyPr anchor="t" rtlCol="false" tIns="0" lIns="0" bIns="0" rIns="0">
+          <a:bodyPr lIns="0" tIns="0" rIns="0" bIns="0" rtlCol="0" anchor="t">
             <a:spAutoFit/>
           </a:bodyPr>
           <a:lstStyle/>
@@ -6413,7 +6683,7 @@
               </a:lnSpc>
             </a:pPr>
             <a:r>
-              <a:rPr lang="en-US" b="true" sz="5199">
+              <a:rPr lang="en-US" sz="5199" b="1">
                 <a:solidFill>
                   <a:srgbClr val="93D14B"/>
                 </a:solidFill>
@@ -6436,13 +6706,14 @@
 </file>
 
 <file path=ppt/slides/slide6.xml><?xml version="1.0" encoding="utf-8"?>
-<p:sld xmlns:p="http://schemas.openxmlformats.org/presentationml/2006/main" xmlns:a="http://schemas.openxmlformats.org/drawingml/2006/main" xmlns:r="http://schemas.openxmlformats.org/officeDocument/2006/relationships">
+<p:sld xmlns:a="http://schemas.openxmlformats.org/drawingml/2006/main" xmlns:r="http://schemas.openxmlformats.org/officeDocument/2006/relationships" xmlns:p="http://schemas.openxmlformats.org/presentationml/2006/main">
   <p:cSld>
     <p:bg>
       <p:bgPr>
         <a:solidFill>
           <a:srgbClr val="344F51"/>
         </a:solidFill>
+        <a:effectLst/>
       </p:bgPr>
     </p:bg>
     <p:spTree>
@@ -6461,12 +6732,12 @@
       </p:grpSpPr>
       <p:grpSp>
         <p:nvGrpSpPr>
-          <p:cNvPr name="Group 2" id="2"/>
+          <p:cNvPr id="2" name="Group 2"/>
           <p:cNvGrpSpPr/>
           <p:nvPr/>
         </p:nvGrpSpPr>
         <p:grpSpPr>
-          <a:xfrm rot="0">
+          <a:xfrm>
             <a:off x="-2785357" y="538989"/>
             <a:ext cx="7570719" cy="1961344"/>
             <a:chOff x="0" y="0"/>
@@ -6475,12 +6746,12 @@
         </p:grpSpPr>
         <p:sp>
           <p:nvSpPr>
-            <p:cNvPr name="Freeform 3" id="3"/>
+            <p:cNvPr id="3" name="Freeform 3"/>
             <p:cNvSpPr/>
             <p:nvPr/>
           </p:nvSpPr>
           <p:spPr>
-            <a:xfrm flipH="false" flipV="false" rot="0">
+            <a:xfrm>
               <a:off x="0" y="0"/>
               <a:ext cx="1070521" cy="277340"/>
             </a:xfrm>
@@ -6489,9 +6760,9 @@
               <a:gdLst/>
               <a:ahLst/>
               <a:cxnLst/>
-              <a:rect r="r" b="b" t="t" l="l"/>
+              <a:rect l="l" t="t" r="r" b="b"/>
               <a:pathLst>
-                <a:path h="277340" w="1070521">
+                <a:path w="1070521" h="277340">
                   <a:moveTo>
                     <a:pt x="867321" y="0"/>
                   </a:moveTo>
@@ -6520,11 +6791,18 @@
               <a:miter/>
             </a:ln>
           </p:spPr>
+          <p:txBody>
+            <a:bodyPr/>
+            <a:lstStyle/>
+            <a:p>
+              <a:endParaRPr lang="es-ES"/>
+            </a:p>
+          </p:txBody>
         </p:sp>
         <p:sp>
           <p:nvSpPr>
-            <p:cNvPr name="TextBox 4" id="4"/>
-            <p:cNvSpPr txBox="true"/>
+            <p:cNvPr id="4" name="TextBox 4"/>
+            <p:cNvSpPr txBox="1"/>
             <p:nvPr/>
           </p:nvSpPr>
           <p:spPr>
@@ -6537,10 +6815,10 @@
             </a:prstGeom>
           </p:spPr>
           <p:txBody>
-            <a:bodyPr anchor="ctr" rtlCol="false" tIns="50800" lIns="50800" bIns="50800" rIns="50800"/>
+            <a:bodyPr lIns="50800" tIns="50800" rIns="50800" bIns="50800" rtlCol="0" anchor="ctr"/>
             <a:lstStyle/>
             <a:p>
-              <a:pPr algn="ctr" marL="0" indent="0" lvl="0">
+              <a:pPr marL="0" lvl="0" indent="0" algn="ctr">
                 <a:lnSpc>
                   <a:spcPts val="2859"/>
                 </a:lnSpc>
@@ -6548,18 +6826,19 @@
                   <a:spcPct val="0"/>
                 </a:spcBef>
               </a:pPr>
+              <a:endParaRPr/>
             </a:p>
           </p:txBody>
         </p:sp>
       </p:grpSp>
       <p:sp>
         <p:nvSpPr>
-          <p:cNvPr name="Freeform 5" id="5"/>
+          <p:cNvPr id="5" name="Freeform 5"/>
           <p:cNvSpPr/>
           <p:nvPr/>
         </p:nvSpPr>
         <p:spPr>
-          <a:xfrm flipH="false" flipV="false" rot="0">
+          <a:xfrm>
             <a:off x="878202" y="4555916"/>
             <a:ext cx="2340497" cy="2592195"/>
           </a:xfrm>
@@ -6568,9 +6847,9 @@
             <a:gdLst/>
             <a:ahLst/>
             <a:cxnLst/>
-            <a:rect r="r" b="b" t="t" l="l"/>
+            <a:rect l="l" t="t" r="r" b="b"/>
             <a:pathLst>
-              <a:path h="2592195" w="2340497">
+              <a:path w="2340497" h="2592195">
                 <a:moveTo>
                   <a:pt x="0" y="0"/>
                 </a:moveTo>
@@ -6591,27 +6870,34 @@
             </a:pathLst>
           </a:custGeom>
           <a:blipFill>
-            <a:blip r:embed="rId2">
+            <a:blip>
               <a:extLst>
                 <a:ext uri="{96DAC541-7B7A-43D3-8B79-37D633B846F1}">
-                  <asvg:svgBlip xmlns:asvg="http://schemas.microsoft.com/office/drawing/2016/SVG/main" r:embed="rId3"/>
+                  <asvg:svgBlip xmlns:asvg="http://schemas.microsoft.com/office/drawing/2016/SVG/main" r:embed="rId2"/>
                 </a:ext>
               </a:extLst>
             </a:blip>
             <a:stretch>
-              <a:fillRect l="0" t="0" r="0" b="0"/>
+              <a:fillRect/>
             </a:stretch>
           </a:blipFill>
         </p:spPr>
-      </p:sp>
-      <p:sp>
-        <p:nvSpPr>
-          <p:cNvPr name="Freeform 6" id="6"/>
+        <p:txBody>
+          <a:bodyPr/>
+          <a:lstStyle/>
+          <a:p>
+            <a:endParaRPr lang="es-ES"/>
+          </a:p>
+        </p:txBody>
+      </p:sp>
+      <p:sp>
+        <p:nvSpPr>
+          <p:cNvPr id="6" name="Freeform 6"/>
           <p:cNvSpPr/>
           <p:nvPr/>
         </p:nvSpPr>
         <p:spPr>
-          <a:xfrm flipH="false" flipV="false" rot="0">
+          <a:xfrm>
             <a:off x="2048451" y="6513095"/>
             <a:ext cx="1510002" cy="1557831"/>
           </a:xfrm>
@@ -6620,9 +6906,9 @@
             <a:gdLst/>
             <a:ahLst/>
             <a:cxnLst/>
-            <a:rect r="r" b="b" t="t" l="l"/>
+            <a:rect l="l" t="t" r="r" b="b"/>
             <a:pathLst>
-              <a:path h="1557831" w="1510002">
+              <a:path w="1510002" h="1557831">
                 <a:moveTo>
                   <a:pt x="0" y="0"/>
                 </a:moveTo>
@@ -6634,6 +6920,59 @@
                 </a:lnTo>
                 <a:lnTo>
                   <a:pt x="0" y="1557831"/>
+                </a:lnTo>
+                <a:lnTo>
+                  <a:pt x="0" y="0"/>
+                </a:lnTo>
+                <a:close/>
+              </a:path>
+            </a:pathLst>
+          </a:custGeom>
+          <a:blipFill>
+            <a:blip r:embed="rId3"/>
+            <a:stretch>
+              <a:fillRect/>
+            </a:stretch>
+          </a:blipFill>
+        </p:spPr>
+        <p:txBody>
+          <a:bodyPr/>
+          <a:lstStyle/>
+          <a:p>
+            <a:endParaRPr lang="es-ES"/>
+          </a:p>
+        </p:txBody>
+      </p:sp>
+      <p:sp>
+        <p:nvSpPr>
+          <p:cNvPr id="7" name="Freeform 7"/>
+          <p:cNvSpPr/>
+          <p:nvPr/>
+        </p:nvSpPr>
+        <p:spPr>
+          <a:xfrm>
+            <a:off x="5098195" y="1519661"/>
+            <a:ext cx="2779871" cy="3501663"/>
+          </a:xfrm>
+          <a:custGeom>
+            <a:avLst/>
+            <a:gdLst/>
+            <a:ahLst/>
+            <a:cxnLst/>
+            <a:rect l="l" t="t" r="r" b="b"/>
+            <a:pathLst>
+              <a:path w="2779871" h="3501663">
+                <a:moveTo>
+                  <a:pt x="0" y="0"/>
+                </a:moveTo>
+                <a:lnTo>
+                  <a:pt x="2779872" y="0"/>
+                </a:lnTo>
+                <a:lnTo>
+                  <a:pt x="2779872" y="3501662"/>
+                </a:lnTo>
+                <a:lnTo>
+                  <a:pt x="0" y="3501662"/>
                 </a:lnTo>
                 <a:lnTo>
                   <a:pt x="0" y="0"/>
@@ -6645,41 +6984,48 @@
           <a:blipFill>
             <a:blip r:embed="rId4"/>
             <a:stretch>
-              <a:fillRect l="0" t="0" r="0" b="0"/>
+              <a:fillRect/>
             </a:stretch>
           </a:blipFill>
         </p:spPr>
-      </p:sp>
-      <p:sp>
-        <p:nvSpPr>
-          <p:cNvPr name="Freeform 7" id="7"/>
+        <p:txBody>
+          <a:bodyPr/>
+          <a:lstStyle/>
+          <a:p>
+            <a:endParaRPr lang="es-ES"/>
+          </a:p>
+        </p:txBody>
+      </p:sp>
+      <p:sp>
+        <p:nvSpPr>
+          <p:cNvPr id="8" name="Freeform 8"/>
           <p:cNvSpPr/>
           <p:nvPr/>
         </p:nvSpPr>
         <p:spPr>
-          <a:xfrm flipH="false" flipV="false" rot="0">
-            <a:off x="5098195" y="1519661"/>
-            <a:ext cx="2779871" cy="3501663"/>
+          <a:xfrm>
+            <a:off x="5646362" y="377550"/>
+            <a:ext cx="1580715" cy="570814"/>
           </a:xfrm>
           <a:custGeom>
             <a:avLst/>
             <a:gdLst/>
             <a:ahLst/>
             <a:cxnLst/>
-            <a:rect r="r" b="b" t="t" l="l"/>
+            <a:rect l="l" t="t" r="r" b="b"/>
             <a:pathLst>
-              <a:path h="3501663" w="2779871">
+              <a:path w="1580715" h="570814">
                 <a:moveTo>
                   <a:pt x="0" y="0"/>
                 </a:moveTo>
                 <a:lnTo>
-                  <a:pt x="2779872" y="0"/>
-                </a:lnTo>
-                <a:lnTo>
-                  <a:pt x="2779872" y="3501662"/>
-                </a:lnTo>
-                <a:lnTo>
-                  <a:pt x="0" y="3501662"/>
+                  <a:pt x="1580715" y="0"/>
+                </a:lnTo>
+                <a:lnTo>
+                  <a:pt x="1580715" y="570814"/>
+                </a:lnTo>
+                <a:lnTo>
+                  <a:pt x="0" y="570814"/>
                 </a:lnTo>
                 <a:lnTo>
                   <a:pt x="0" y="0"/>
@@ -6691,41 +7037,48 @@
           <a:blipFill>
             <a:blip r:embed="rId5"/>
             <a:stretch>
-              <a:fillRect l="0" t="0" r="0" b="0"/>
+              <a:fillRect/>
             </a:stretch>
           </a:blipFill>
         </p:spPr>
-      </p:sp>
-      <p:sp>
-        <p:nvSpPr>
-          <p:cNvPr name="Freeform 8" id="8"/>
+        <p:txBody>
+          <a:bodyPr/>
+          <a:lstStyle/>
+          <a:p>
+            <a:endParaRPr lang="es-ES"/>
+          </a:p>
+        </p:txBody>
+      </p:sp>
+      <p:sp>
+        <p:nvSpPr>
+          <p:cNvPr id="9" name="Freeform 9"/>
           <p:cNvSpPr/>
           <p:nvPr/>
         </p:nvSpPr>
         <p:spPr>
-          <a:xfrm flipH="false" flipV="false" rot="0">
-            <a:off x="5646362" y="377550"/>
-            <a:ext cx="1580715" cy="570814"/>
+          <a:xfrm>
+            <a:off x="5098195" y="5852013"/>
+            <a:ext cx="2779871" cy="4214177"/>
           </a:xfrm>
           <a:custGeom>
             <a:avLst/>
             <a:gdLst/>
             <a:ahLst/>
             <a:cxnLst/>
-            <a:rect r="r" b="b" t="t" l="l"/>
+            <a:rect l="l" t="t" r="r" b="b"/>
             <a:pathLst>
-              <a:path h="570814" w="1580715">
+              <a:path w="2779871" h="4214177">
                 <a:moveTo>
                   <a:pt x="0" y="0"/>
                 </a:moveTo>
                 <a:lnTo>
-                  <a:pt x="1580715" y="0"/>
-                </a:lnTo>
-                <a:lnTo>
-                  <a:pt x="1580715" y="570814"/>
-                </a:lnTo>
-                <a:lnTo>
-                  <a:pt x="0" y="570814"/>
+                  <a:pt x="2779872" y="0"/>
+                </a:lnTo>
+                <a:lnTo>
+                  <a:pt x="2779872" y="4214178"/>
+                </a:lnTo>
+                <a:lnTo>
+                  <a:pt x="0" y="4214178"/>
                 </a:lnTo>
                 <a:lnTo>
                   <a:pt x="0" y="0"/>
@@ -6737,65 +7090,26 @@
           <a:blipFill>
             <a:blip r:embed="rId6"/>
             <a:stretch>
-              <a:fillRect l="0" t="0" r="0" b="0"/>
+              <a:fillRect b="-2526"/>
             </a:stretch>
           </a:blipFill>
         </p:spPr>
-      </p:sp>
-      <p:sp>
-        <p:nvSpPr>
-          <p:cNvPr name="Freeform 9" id="9"/>
-          <p:cNvSpPr/>
-          <p:nvPr/>
-        </p:nvSpPr>
-        <p:spPr>
-          <a:xfrm flipH="false" flipV="false" rot="0">
-            <a:off x="5098195" y="5852013"/>
-            <a:ext cx="2779871" cy="4214177"/>
-          </a:xfrm>
-          <a:custGeom>
-            <a:avLst/>
-            <a:gdLst/>
-            <a:ahLst/>
-            <a:cxnLst/>
-            <a:rect r="r" b="b" t="t" l="l"/>
-            <a:pathLst>
-              <a:path h="4214177" w="2779871">
-                <a:moveTo>
-                  <a:pt x="0" y="0"/>
-                </a:moveTo>
-                <a:lnTo>
-                  <a:pt x="2779872" y="0"/>
-                </a:lnTo>
-                <a:lnTo>
-                  <a:pt x="2779872" y="4214178"/>
-                </a:lnTo>
-                <a:lnTo>
-                  <a:pt x="0" y="4214178"/>
-                </a:lnTo>
-                <a:lnTo>
-                  <a:pt x="0" y="0"/>
-                </a:lnTo>
-                <a:close/>
-              </a:path>
-            </a:pathLst>
-          </a:custGeom>
-          <a:blipFill>
-            <a:blip r:embed="rId7"/>
-            <a:stretch>
-              <a:fillRect l="0" t="0" r="0" b="-2526"/>
-            </a:stretch>
-          </a:blipFill>
-        </p:spPr>
+        <p:txBody>
+          <a:bodyPr/>
+          <a:lstStyle/>
+          <a:p>
+            <a:endParaRPr lang="es-ES"/>
+          </a:p>
+        </p:txBody>
       </p:sp>
       <p:grpSp>
         <p:nvGrpSpPr>
-          <p:cNvPr name="Group 10" id="10"/>
+          <p:cNvPr id="10" name="Group 10"/>
           <p:cNvGrpSpPr/>
           <p:nvPr/>
         </p:nvGrpSpPr>
         <p:grpSpPr>
-          <a:xfrm rot="0">
+          <a:xfrm>
             <a:off x="6300624" y="1034089"/>
             <a:ext cx="272191" cy="446412"/>
             <a:chOff x="0" y="0"/>
@@ -6804,12 +7118,12 @@
         </p:grpSpPr>
         <p:sp>
           <p:nvSpPr>
-            <p:cNvPr name="Freeform 11" id="11"/>
+            <p:cNvPr id="11" name="Freeform 11"/>
             <p:cNvSpPr/>
             <p:nvPr/>
           </p:nvSpPr>
           <p:spPr>
-            <a:xfrm flipH="false" flipV="false" rot="0">
+            <a:xfrm>
               <a:off x="0" y="0"/>
               <a:ext cx="494051" cy="810280"/>
             </a:xfrm>
@@ -6818,9 +7132,9 @@
               <a:gdLst/>
               <a:ahLst/>
               <a:cxnLst/>
-              <a:rect r="r" b="b" t="t" l="l"/>
+              <a:rect l="l" t="t" r="r" b="b"/>
               <a:pathLst>
-                <a:path h="810280" w="494051">
+                <a:path w="494051" h="810280">
                   <a:moveTo>
                     <a:pt x="247026" y="810280"/>
                   </a:moveTo>
@@ -6853,11 +7167,18 @@
               <a:srgbClr val="FFFFFF"/>
             </a:solidFill>
           </p:spPr>
+          <p:txBody>
+            <a:bodyPr/>
+            <a:lstStyle/>
+            <a:p>
+              <a:endParaRPr lang="es-ES"/>
+            </a:p>
+          </p:txBody>
         </p:sp>
         <p:sp>
           <p:nvSpPr>
-            <p:cNvPr name="TextBox 12" id="12"/>
-            <p:cNvSpPr txBox="true"/>
+            <p:cNvPr id="12" name="TextBox 12"/>
+            <p:cNvSpPr txBox="1"/>
             <p:nvPr/>
           </p:nvSpPr>
           <p:spPr>
@@ -6870,7 +7191,7 @@
             </a:prstGeom>
           </p:spPr>
           <p:txBody>
-            <a:bodyPr anchor="ctr" rtlCol="false" tIns="50800" lIns="50800" bIns="50800" rIns="50800"/>
+            <a:bodyPr lIns="50800" tIns="50800" rIns="50800" bIns="50800" rtlCol="0" anchor="ctr"/>
             <a:lstStyle/>
             <a:p>
               <a:pPr algn="ctr">
@@ -6878,18 +7199,19 @@
                   <a:spcPts val="2859"/>
                 </a:lnSpc>
               </a:pPr>
+              <a:endParaRPr/>
             </a:p>
           </p:txBody>
         </p:sp>
       </p:grpSp>
       <p:grpSp>
         <p:nvGrpSpPr>
-          <p:cNvPr name="Group 13" id="13"/>
+          <p:cNvPr id="13" name="Group 13"/>
           <p:cNvGrpSpPr/>
           <p:nvPr/>
         </p:nvGrpSpPr>
         <p:grpSpPr>
-          <a:xfrm rot="0">
+          <a:xfrm>
             <a:off x="6234996" y="5105827"/>
             <a:ext cx="403448" cy="661683"/>
             <a:chOff x="0" y="0"/>
@@ -6898,12 +7220,12 @@
         </p:grpSpPr>
         <p:sp>
           <p:nvSpPr>
-            <p:cNvPr name="Freeform 14" id="14"/>
+            <p:cNvPr id="14" name="Freeform 14"/>
             <p:cNvSpPr/>
             <p:nvPr/>
           </p:nvSpPr>
           <p:spPr>
-            <a:xfrm flipH="false" flipV="false" rot="0">
+            <a:xfrm>
               <a:off x="0" y="0"/>
               <a:ext cx="494051" cy="810280"/>
             </a:xfrm>
@@ -6912,9 +7234,9 @@
               <a:gdLst/>
               <a:ahLst/>
               <a:cxnLst/>
-              <a:rect r="r" b="b" t="t" l="l"/>
+              <a:rect l="l" t="t" r="r" b="b"/>
               <a:pathLst>
-                <a:path h="810280" w="494051">
+                <a:path w="494051" h="810280">
                   <a:moveTo>
                     <a:pt x="247026" y="810280"/>
                   </a:moveTo>
@@ -6947,11 +7269,18 @@
               <a:srgbClr val="FFFFFF"/>
             </a:solidFill>
           </p:spPr>
+          <p:txBody>
+            <a:bodyPr/>
+            <a:lstStyle/>
+            <a:p>
+              <a:endParaRPr lang="es-ES"/>
+            </a:p>
+          </p:txBody>
         </p:sp>
         <p:sp>
           <p:nvSpPr>
-            <p:cNvPr name="TextBox 15" id="15"/>
-            <p:cNvSpPr txBox="true"/>
+            <p:cNvPr id="15" name="TextBox 15"/>
+            <p:cNvSpPr txBox="1"/>
             <p:nvPr/>
           </p:nvSpPr>
           <p:spPr>
@@ -6964,7 +7293,7 @@
             </a:prstGeom>
           </p:spPr>
           <p:txBody>
-            <a:bodyPr anchor="ctr" rtlCol="false" tIns="50800" lIns="50800" bIns="50800" rIns="50800"/>
+            <a:bodyPr lIns="50800" tIns="50800" rIns="50800" bIns="50800" rtlCol="0" anchor="ctr"/>
             <a:lstStyle/>
             <a:p>
               <a:pPr algn="ctr">
@@ -6972,18 +7301,19 @@
                   <a:spcPts val="2859"/>
                 </a:lnSpc>
               </a:pPr>
+              <a:endParaRPr/>
             </a:p>
           </p:txBody>
         </p:sp>
       </p:grpSp>
       <p:sp>
         <p:nvSpPr>
-          <p:cNvPr name="Freeform 16" id="16"/>
+          <p:cNvPr id="16" name="Freeform 16"/>
           <p:cNvSpPr/>
           <p:nvPr/>
         </p:nvSpPr>
         <p:spPr>
-          <a:xfrm flipH="false" flipV="false" rot="0">
+          <a:xfrm>
             <a:off x="8379096" y="377550"/>
             <a:ext cx="2809214" cy="827979"/>
           </a:xfrm>
@@ -6992,9 +7322,9 @@
             <a:gdLst/>
             <a:ahLst/>
             <a:cxnLst/>
-            <a:rect r="r" b="b" t="t" l="l"/>
+            <a:rect l="l" t="t" r="r" b="b"/>
             <a:pathLst>
-              <a:path h="827979" w="2809214">
+              <a:path w="2809214" h="827979">
                 <a:moveTo>
                   <a:pt x="0" y="0"/>
                 </a:moveTo>
@@ -7006,6 +7336,59 @@
                 </a:lnTo>
                 <a:lnTo>
                   <a:pt x="0" y="827979"/>
+                </a:lnTo>
+                <a:lnTo>
+                  <a:pt x="0" y="0"/>
+                </a:lnTo>
+                <a:close/>
+              </a:path>
+            </a:pathLst>
+          </a:custGeom>
+          <a:blipFill>
+            <a:blip r:embed="rId7"/>
+            <a:stretch>
+              <a:fillRect/>
+            </a:stretch>
+          </a:blipFill>
+        </p:spPr>
+        <p:txBody>
+          <a:bodyPr/>
+          <a:lstStyle/>
+          <a:p>
+            <a:endParaRPr lang="es-ES"/>
+          </a:p>
+        </p:txBody>
+      </p:sp>
+      <p:sp>
+        <p:nvSpPr>
+          <p:cNvPr id="17" name="Freeform 17"/>
+          <p:cNvSpPr/>
+          <p:nvPr/>
+        </p:nvSpPr>
+        <p:spPr>
+          <a:xfrm>
+            <a:off x="8105451" y="6872354"/>
+            <a:ext cx="2794607" cy="3193836"/>
+          </a:xfrm>
+          <a:custGeom>
+            <a:avLst/>
+            <a:gdLst/>
+            <a:ahLst/>
+            <a:cxnLst/>
+            <a:rect l="l" t="t" r="r" b="b"/>
+            <a:pathLst>
+              <a:path w="2794607" h="3193836">
+                <a:moveTo>
+                  <a:pt x="0" y="0"/>
+                </a:moveTo>
+                <a:lnTo>
+                  <a:pt x="2794606" y="0"/>
+                </a:lnTo>
+                <a:lnTo>
+                  <a:pt x="2794606" y="3193837"/>
+                </a:lnTo>
+                <a:lnTo>
+                  <a:pt x="0" y="3193837"/>
                 </a:lnTo>
                 <a:lnTo>
                   <a:pt x="0" y="0"/>
@@ -7017,60 +7400,21 @@
           <a:blipFill>
             <a:blip r:embed="rId8"/>
             <a:stretch>
-              <a:fillRect l="0" t="0" r="0" b="0"/>
+              <a:fillRect/>
             </a:stretch>
           </a:blipFill>
         </p:spPr>
-      </p:sp>
-      <p:sp>
-        <p:nvSpPr>
-          <p:cNvPr name="Freeform 17" id="17"/>
-          <p:cNvSpPr/>
-          <p:nvPr/>
-        </p:nvSpPr>
-        <p:spPr>
-          <a:xfrm flipH="false" flipV="false" rot="0">
-            <a:off x="8105451" y="6872354"/>
-            <a:ext cx="2794607" cy="3193836"/>
-          </a:xfrm>
-          <a:custGeom>
-            <a:avLst/>
-            <a:gdLst/>
-            <a:ahLst/>
-            <a:cxnLst/>
-            <a:rect r="r" b="b" t="t" l="l"/>
-            <a:pathLst>
-              <a:path h="3193836" w="2794607">
-                <a:moveTo>
-                  <a:pt x="0" y="0"/>
-                </a:moveTo>
-                <a:lnTo>
-                  <a:pt x="2794606" y="0"/>
-                </a:lnTo>
-                <a:lnTo>
-                  <a:pt x="2794606" y="3193837"/>
-                </a:lnTo>
-                <a:lnTo>
-                  <a:pt x="0" y="3193837"/>
-                </a:lnTo>
-                <a:lnTo>
-                  <a:pt x="0" y="0"/>
-                </a:lnTo>
-                <a:close/>
-              </a:path>
-            </a:pathLst>
-          </a:custGeom>
-          <a:blipFill>
-            <a:blip r:embed="rId9"/>
-            <a:stretch>
-              <a:fillRect l="0" t="0" r="0" b="0"/>
-            </a:stretch>
-          </a:blipFill>
-        </p:spPr>
+        <p:txBody>
+          <a:bodyPr/>
+          <a:lstStyle/>
+          <a:p>
+            <a:endParaRPr lang="es-ES"/>
+          </a:p>
+        </p:txBody>
       </p:sp>
       <p:grpSp>
         <p:nvGrpSpPr>
-          <p:cNvPr name="Group 18" id="18"/>
+          <p:cNvPr id="18" name="Group 18"/>
           <p:cNvGrpSpPr/>
           <p:nvPr/>
         </p:nvGrpSpPr>
@@ -7084,12 +7428,12 @@
         </p:grpSpPr>
         <p:sp>
           <p:nvSpPr>
-            <p:cNvPr name="Freeform 19" id="19"/>
+            <p:cNvPr id="19" name="Freeform 19"/>
             <p:cNvSpPr/>
             <p:nvPr/>
           </p:nvSpPr>
           <p:spPr>
-            <a:xfrm flipH="false" flipV="false" rot="0">
+            <a:xfrm>
               <a:off x="0" y="0"/>
               <a:ext cx="494051" cy="1667767"/>
             </a:xfrm>
@@ -7098,9 +7442,9 @@
               <a:gdLst/>
               <a:ahLst/>
               <a:cxnLst/>
-              <a:rect r="r" b="b" t="t" l="l"/>
+              <a:rect l="l" t="t" r="r" b="b"/>
               <a:pathLst>
-                <a:path h="1667767" w="494051">
+                <a:path w="494051" h="1667767">
                   <a:moveTo>
                     <a:pt x="247026" y="1667767"/>
                   </a:moveTo>
@@ -7133,11 +7477,18 @@
               <a:srgbClr val="FFFFFF"/>
             </a:solidFill>
           </p:spPr>
+          <p:txBody>
+            <a:bodyPr/>
+            <a:lstStyle/>
+            <a:p>
+              <a:endParaRPr lang="es-ES"/>
+            </a:p>
+          </p:txBody>
         </p:sp>
         <p:sp>
           <p:nvSpPr>
-            <p:cNvPr name="TextBox 20" id="20"/>
-            <p:cNvSpPr txBox="true"/>
+            <p:cNvPr id="20" name="TextBox 20"/>
+            <p:cNvSpPr txBox="1"/>
             <p:nvPr/>
           </p:nvSpPr>
           <p:spPr>
@@ -7150,7 +7501,7 @@
             </a:prstGeom>
           </p:spPr>
           <p:txBody>
-            <a:bodyPr anchor="ctr" rtlCol="false" tIns="50800" lIns="50800" bIns="50800" rIns="50800"/>
+            <a:bodyPr lIns="50800" tIns="50800" rIns="50800" bIns="50800" rtlCol="0" anchor="ctr"/>
             <a:lstStyle/>
             <a:p>
               <a:pPr algn="ctr">
@@ -7158,13 +7509,14 @@
                   <a:spcPts val="2859"/>
                 </a:lnSpc>
               </a:pPr>
+              <a:endParaRPr/>
             </a:p>
           </p:txBody>
         </p:sp>
       </p:grpSp>
       <p:grpSp>
         <p:nvGrpSpPr>
-          <p:cNvPr name="Group 21" id="21"/>
+          <p:cNvPr id="21" name="Group 21"/>
           <p:cNvGrpSpPr/>
           <p:nvPr/>
         </p:nvGrpSpPr>
@@ -7178,12 +7530,12 @@
         </p:grpSpPr>
         <p:sp>
           <p:nvSpPr>
-            <p:cNvPr name="Freeform 22" id="22"/>
+            <p:cNvPr id="22" name="Freeform 22"/>
             <p:cNvSpPr/>
             <p:nvPr/>
           </p:nvSpPr>
           <p:spPr>
-            <a:xfrm flipH="false" flipV="false" rot="0">
+            <a:xfrm>
               <a:off x="0" y="0"/>
               <a:ext cx="494051" cy="810280"/>
             </a:xfrm>
@@ -7192,9 +7544,9 @@
               <a:gdLst/>
               <a:ahLst/>
               <a:cxnLst/>
-              <a:rect r="r" b="b" t="t" l="l"/>
+              <a:rect l="l" t="t" r="r" b="b"/>
               <a:pathLst>
-                <a:path h="810280" w="494051">
+                <a:path w="494051" h="810280">
                   <a:moveTo>
                     <a:pt x="247026" y="810280"/>
                   </a:moveTo>
@@ -7227,11 +7579,18 @@
               <a:srgbClr val="FFFFFF"/>
             </a:solidFill>
           </p:spPr>
+          <p:txBody>
+            <a:bodyPr/>
+            <a:lstStyle/>
+            <a:p>
+              <a:endParaRPr lang="es-ES"/>
+            </a:p>
+          </p:txBody>
         </p:sp>
         <p:sp>
           <p:nvSpPr>
-            <p:cNvPr name="TextBox 23" id="23"/>
-            <p:cNvSpPr txBox="true"/>
+            <p:cNvPr id="23" name="TextBox 23"/>
+            <p:cNvSpPr txBox="1"/>
             <p:nvPr/>
           </p:nvSpPr>
           <p:spPr>
@@ -7244,7 +7603,7 @@
             </a:prstGeom>
           </p:spPr>
           <p:txBody>
-            <a:bodyPr anchor="ctr" rtlCol="false" tIns="50800" lIns="50800" bIns="50800" rIns="50800"/>
+            <a:bodyPr lIns="50800" tIns="50800" rIns="50800" bIns="50800" rtlCol="0" anchor="ctr"/>
             <a:lstStyle/>
             <a:p>
               <a:pPr algn="ctr">
@@ -7252,13 +7611,14 @@
                   <a:spcPts val="2859"/>
                 </a:lnSpc>
               </a:pPr>
+              <a:endParaRPr/>
             </a:p>
           </p:txBody>
         </p:sp>
       </p:grpSp>
       <p:grpSp>
         <p:nvGrpSpPr>
-          <p:cNvPr name="Group 24" id="24"/>
+          <p:cNvPr id="24" name="Group 24"/>
           <p:cNvGrpSpPr/>
           <p:nvPr/>
         </p:nvGrpSpPr>
@@ -7272,12 +7632,12 @@
         </p:grpSpPr>
         <p:sp>
           <p:nvSpPr>
-            <p:cNvPr name="Freeform 25" id="25"/>
+            <p:cNvPr id="25" name="Freeform 25"/>
             <p:cNvSpPr/>
             <p:nvPr/>
           </p:nvSpPr>
           <p:spPr>
-            <a:xfrm flipH="false" flipV="false" rot="0">
+            <a:xfrm>
               <a:off x="0" y="0"/>
               <a:ext cx="523047" cy="5014979"/>
             </a:xfrm>
@@ -7286,9 +7646,9 @@
               <a:gdLst/>
               <a:ahLst/>
               <a:cxnLst/>
-              <a:rect r="r" b="b" t="t" l="l"/>
+              <a:rect l="l" t="t" r="r" b="b"/>
               <a:pathLst>
-                <a:path h="5014979" w="523047">
+                <a:path w="523047" h="5014979">
                   <a:moveTo>
                     <a:pt x="261523" y="5014979"/>
                   </a:moveTo>
@@ -7321,11 +7681,18 @@
               <a:srgbClr val="FFFFFF"/>
             </a:solidFill>
           </p:spPr>
+          <p:txBody>
+            <a:bodyPr/>
+            <a:lstStyle/>
+            <a:p>
+              <a:endParaRPr lang="es-ES"/>
+            </a:p>
+          </p:txBody>
         </p:sp>
         <p:sp>
           <p:nvSpPr>
-            <p:cNvPr name="TextBox 26" id="26"/>
-            <p:cNvSpPr txBox="true"/>
+            <p:cNvPr id="26" name="TextBox 26"/>
+            <p:cNvSpPr txBox="1"/>
             <p:nvPr/>
           </p:nvSpPr>
           <p:spPr>
@@ -7338,7 +7705,7 @@
             </a:prstGeom>
           </p:spPr>
           <p:txBody>
-            <a:bodyPr anchor="ctr" rtlCol="false" tIns="50800" lIns="50800" bIns="50800" rIns="50800"/>
+            <a:bodyPr lIns="50800" tIns="50800" rIns="50800" bIns="50800" rtlCol="0" anchor="ctr"/>
             <a:lstStyle/>
             <a:p>
               <a:pPr algn="ctr">
@@ -7346,18 +7713,19 @@
                   <a:spcPts val="2859"/>
                 </a:lnSpc>
               </a:pPr>
+              <a:endParaRPr/>
             </a:p>
           </p:txBody>
         </p:sp>
       </p:grpSp>
       <p:sp>
         <p:nvSpPr>
-          <p:cNvPr name="Freeform 27" id="27"/>
+          <p:cNvPr id="27" name="Freeform 27"/>
           <p:cNvSpPr/>
           <p:nvPr/>
         </p:nvSpPr>
         <p:spPr>
-          <a:xfrm flipH="false" flipV="false" rot="0">
+          <a:xfrm>
             <a:off x="14749362" y="162879"/>
             <a:ext cx="2376011" cy="1731641"/>
           </a:xfrm>
@@ -7366,9 +7734,9 @@
             <a:gdLst/>
             <a:ahLst/>
             <a:cxnLst/>
-            <a:rect r="r" b="b" t="t" l="l"/>
+            <a:rect l="l" t="t" r="r" b="b"/>
             <a:pathLst>
-              <a:path h="1731641" w="2376011">
+              <a:path w="2376011" h="1731641">
                 <a:moveTo>
                   <a:pt x="0" y="0"/>
                 </a:moveTo>
@@ -7380,6 +7748,59 @@
                 </a:lnTo>
                 <a:lnTo>
                   <a:pt x="0" y="1731642"/>
+                </a:lnTo>
+                <a:lnTo>
+                  <a:pt x="0" y="0"/>
+                </a:lnTo>
+                <a:close/>
+              </a:path>
+            </a:pathLst>
+          </a:custGeom>
+          <a:blipFill>
+            <a:blip r:embed="rId9"/>
+            <a:stretch>
+              <a:fillRect r="-2249"/>
+            </a:stretch>
+          </a:blipFill>
+        </p:spPr>
+        <p:txBody>
+          <a:bodyPr/>
+          <a:lstStyle/>
+          <a:p>
+            <a:endParaRPr lang="es-ES"/>
+          </a:p>
+        </p:txBody>
+      </p:sp>
+      <p:sp>
+        <p:nvSpPr>
+          <p:cNvPr id="28" name="Freeform 28"/>
+          <p:cNvSpPr/>
+          <p:nvPr/>
+        </p:nvSpPr>
+        <p:spPr>
+          <a:xfrm>
+            <a:off x="13840052" y="1983571"/>
+            <a:ext cx="2136250" cy="2158896"/>
+          </a:xfrm>
+          <a:custGeom>
+            <a:avLst/>
+            <a:gdLst/>
+            <a:ahLst/>
+            <a:cxnLst/>
+            <a:rect l="l" t="t" r="r" b="b"/>
+            <a:pathLst>
+              <a:path w="2136250" h="2158896">
+                <a:moveTo>
+                  <a:pt x="0" y="0"/>
+                </a:moveTo>
+                <a:lnTo>
+                  <a:pt x="2136250" y="0"/>
+                </a:lnTo>
+                <a:lnTo>
+                  <a:pt x="2136250" y="2158897"/>
+                </a:lnTo>
+                <a:lnTo>
+                  <a:pt x="0" y="2158897"/>
                 </a:lnTo>
                 <a:lnTo>
                   <a:pt x="0" y="0"/>
@@ -7391,60 +7812,21 @@
           <a:blipFill>
             <a:blip r:embed="rId10"/>
             <a:stretch>
-              <a:fillRect l="0" t="0" r="-2249" b="0"/>
+              <a:fillRect/>
             </a:stretch>
           </a:blipFill>
         </p:spPr>
-      </p:sp>
-      <p:sp>
-        <p:nvSpPr>
-          <p:cNvPr name="Freeform 28" id="28"/>
-          <p:cNvSpPr/>
-          <p:nvPr/>
-        </p:nvSpPr>
-        <p:spPr>
-          <a:xfrm flipH="false" flipV="false" rot="0">
-            <a:off x="13840052" y="1983571"/>
-            <a:ext cx="2136250" cy="2158896"/>
-          </a:xfrm>
-          <a:custGeom>
-            <a:avLst/>
-            <a:gdLst/>
-            <a:ahLst/>
-            <a:cxnLst/>
-            <a:rect r="r" b="b" t="t" l="l"/>
-            <a:pathLst>
-              <a:path h="2158896" w="2136250">
-                <a:moveTo>
-                  <a:pt x="0" y="0"/>
-                </a:moveTo>
-                <a:lnTo>
-                  <a:pt x="2136250" y="0"/>
-                </a:lnTo>
-                <a:lnTo>
-                  <a:pt x="2136250" y="2158897"/>
-                </a:lnTo>
-                <a:lnTo>
-                  <a:pt x="0" y="2158897"/>
-                </a:lnTo>
-                <a:lnTo>
-                  <a:pt x="0" y="0"/>
-                </a:lnTo>
-                <a:close/>
-              </a:path>
-            </a:pathLst>
-          </a:custGeom>
-          <a:blipFill>
-            <a:blip r:embed="rId11"/>
-            <a:stretch>
-              <a:fillRect l="0" t="0" r="0" b="0"/>
-            </a:stretch>
-          </a:blipFill>
-        </p:spPr>
+        <p:txBody>
+          <a:bodyPr/>
+          <a:lstStyle/>
+          <a:p>
+            <a:endParaRPr lang="es-ES"/>
+          </a:p>
+        </p:txBody>
       </p:sp>
       <p:grpSp>
         <p:nvGrpSpPr>
-          <p:cNvPr name="Group 29" id="29"/>
+          <p:cNvPr id="29" name="Group 29"/>
           <p:cNvGrpSpPr/>
           <p:nvPr/>
         </p:nvGrpSpPr>
@@ -7458,12 +7840,12 @@
         </p:grpSpPr>
         <p:sp>
           <p:nvSpPr>
-            <p:cNvPr name="Freeform 30" id="30"/>
+            <p:cNvPr id="30" name="Freeform 30"/>
             <p:cNvSpPr/>
             <p:nvPr/>
           </p:nvSpPr>
           <p:spPr>
-            <a:xfrm flipH="false" flipV="false" rot="0">
+            <a:xfrm>
               <a:off x="0" y="0"/>
               <a:ext cx="494051" cy="8163046"/>
             </a:xfrm>
@@ -7472,9 +7854,9 @@
               <a:gdLst/>
               <a:ahLst/>
               <a:cxnLst/>
-              <a:rect r="r" b="b" t="t" l="l"/>
+              <a:rect l="l" t="t" r="r" b="b"/>
               <a:pathLst>
-                <a:path h="8163046" w="494051">
+                <a:path w="494051" h="8163046">
                   <a:moveTo>
                     <a:pt x="247026" y="8163046"/>
                   </a:moveTo>
@@ -7507,11 +7889,18 @@
               <a:srgbClr val="FFFFFF"/>
             </a:solidFill>
           </p:spPr>
+          <p:txBody>
+            <a:bodyPr/>
+            <a:lstStyle/>
+            <a:p>
+              <a:endParaRPr lang="es-ES"/>
+            </a:p>
+          </p:txBody>
         </p:sp>
         <p:sp>
           <p:nvSpPr>
-            <p:cNvPr name="TextBox 31" id="31"/>
-            <p:cNvSpPr txBox="true"/>
+            <p:cNvPr id="31" name="TextBox 31"/>
+            <p:cNvSpPr txBox="1"/>
             <p:nvPr/>
           </p:nvSpPr>
           <p:spPr>
@@ -7524,7 +7913,7 @@
             </a:prstGeom>
           </p:spPr>
           <p:txBody>
-            <a:bodyPr anchor="ctr" rtlCol="false" tIns="50800" lIns="50800" bIns="50800" rIns="50800"/>
+            <a:bodyPr lIns="50800" tIns="50800" rIns="50800" bIns="50800" rtlCol="0" anchor="ctr"/>
             <a:lstStyle/>
             <a:p>
               <a:pPr algn="ctr">
@@ -7532,13 +7921,14 @@
                   <a:spcPts val="2859"/>
                 </a:lnSpc>
               </a:pPr>
+              <a:endParaRPr/>
             </a:p>
           </p:txBody>
         </p:sp>
       </p:grpSp>
       <p:grpSp>
         <p:nvGrpSpPr>
-          <p:cNvPr name="Group 32" id="32"/>
+          <p:cNvPr id="32" name="Group 32"/>
           <p:cNvGrpSpPr/>
           <p:nvPr/>
         </p:nvGrpSpPr>
@@ -7552,12 +7942,12 @@
         </p:grpSpPr>
         <p:sp>
           <p:nvSpPr>
-            <p:cNvPr name="Freeform 33" id="33"/>
+            <p:cNvPr id="33" name="Freeform 33"/>
             <p:cNvSpPr/>
             <p:nvPr/>
           </p:nvSpPr>
           <p:spPr>
-            <a:xfrm flipH="false" flipV="false" rot="0">
+            <a:xfrm>
               <a:off x="0" y="0"/>
               <a:ext cx="494051" cy="6266580"/>
             </a:xfrm>
@@ -7566,9 +7956,9 @@
               <a:gdLst/>
               <a:ahLst/>
               <a:cxnLst/>
-              <a:rect r="r" b="b" t="t" l="l"/>
+              <a:rect l="l" t="t" r="r" b="b"/>
               <a:pathLst>
-                <a:path h="6266580" w="494051">
+                <a:path w="494051" h="6266580">
                   <a:moveTo>
                     <a:pt x="247026" y="6266580"/>
                   </a:moveTo>
@@ -7601,11 +7991,18 @@
               <a:srgbClr val="FFFFFF"/>
             </a:solidFill>
           </p:spPr>
+          <p:txBody>
+            <a:bodyPr/>
+            <a:lstStyle/>
+            <a:p>
+              <a:endParaRPr lang="es-ES"/>
+            </a:p>
+          </p:txBody>
         </p:sp>
         <p:sp>
           <p:nvSpPr>
-            <p:cNvPr name="TextBox 34" id="34"/>
-            <p:cNvSpPr txBox="true"/>
+            <p:cNvPr id="34" name="TextBox 34"/>
+            <p:cNvSpPr txBox="1"/>
             <p:nvPr/>
           </p:nvSpPr>
           <p:spPr>
@@ -7618,7 +8015,7 @@
             </a:prstGeom>
           </p:spPr>
           <p:txBody>
-            <a:bodyPr anchor="ctr" rtlCol="false" tIns="50800" lIns="50800" bIns="50800" rIns="50800"/>
+            <a:bodyPr lIns="50800" tIns="50800" rIns="50800" bIns="50800" rtlCol="0" anchor="ctr"/>
             <a:lstStyle/>
             <a:p>
               <a:pPr algn="ctr">
@@ -7626,18 +8023,19 @@
                   <a:spcPts val="2859"/>
                 </a:lnSpc>
               </a:pPr>
+              <a:endParaRPr/>
             </a:p>
           </p:txBody>
         </p:sp>
       </p:grpSp>
       <p:sp>
         <p:nvSpPr>
-          <p:cNvPr name="Freeform 35" id="35"/>
+          <p:cNvPr id="35" name="Freeform 35"/>
           <p:cNvSpPr/>
           <p:nvPr/>
         </p:nvSpPr>
         <p:spPr>
-          <a:xfrm flipH="false" flipV="false" rot="0">
+          <a:xfrm>
             <a:off x="14909591" y="7268680"/>
             <a:ext cx="2465306" cy="2797511"/>
           </a:xfrm>
@@ -7646,9 +8044,9 @@
             <a:gdLst/>
             <a:ahLst/>
             <a:cxnLst/>
-            <a:rect r="r" b="b" t="t" l="l"/>
+            <a:rect l="l" t="t" r="r" b="b"/>
             <a:pathLst>
-              <a:path h="2797511" w="2465306">
+              <a:path w="2465306" h="2797511">
                 <a:moveTo>
                   <a:pt x="0" y="0"/>
                 </a:moveTo>
@@ -7669,16 +8067,23 @@
             </a:pathLst>
           </a:custGeom>
           <a:blipFill>
-            <a:blip r:embed="rId12"/>
+            <a:blip r:embed="rId11"/>
             <a:stretch>
-              <a:fillRect l="0" t="0" r="0" b="0"/>
+              <a:fillRect/>
             </a:stretch>
           </a:blipFill>
         </p:spPr>
+        <p:txBody>
+          <a:bodyPr/>
+          <a:lstStyle/>
+          <a:p>
+            <a:endParaRPr lang="es-ES"/>
+          </a:p>
+        </p:txBody>
       </p:sp>
       <p:grpSp>
         <p:nvGrpSpPr>
-          <p:cNvPr name="Group 36" id="36"/>
+          <p:cNvPr id="36" name="Group 36"/>
           <p:cNvGrpSpPr/>
           <p:nvPr/>
         </p:nvGrpSpPr>
@@ -7692,12 +8097,12 @@
         </p:grpSpPr>
         <p:sp>
           <p:nvSpPr>
-            <p:cNvPr name="Freeform 37" id="37"/>
+            <p:cNvPr id="37" name="Freeform 37"/>
             <p:cNvSpPr/>
             <p:nvPr/>
           </p:nvSpPr>
           <p:spPr>
-            <a:xfrm flipH="false" flipV="false" rot="0">
+            <a:xfrm>
               <a:off x="0" y="0"/>
               <a:ext cx="558366" cy="9093334"/>
             </a:xfrm>
@@ -7706,9 +8111,9 @@
               <a:gdLst/>
               <a:ahLst/>
               <a:cxnLst/>
-              <a:rect r="r" b="b" t="t" l="l"/>
+              <a:rect l="l" t="t" r="r" b="b"/>
               <a:pathLst>
-                <a:path h="9093334" w="558366">
+                <a:path w="558366" h="9093334">
                   <a:moveTo>
                     <a:pt x="279183" y="9093334"/>
                   </a:moveTo>
@@ -7741,11 +8146,18 @@
               <a:srgbClr val="FFFFFF"/>
             </a:solidFill>
           </p:spPr>
+          <p:txBody>
+            <a:bodyPr/>
+            <a:lstStyle/>
+            <a:p>
+              <a:endParaRPr lang="es-ES"/>
+            </a:p>
+          </p:txBody>
         </p:sp>
         <p:sp>
           <p:nvSpPr>
-            <p:cNvPr name="TextBox 38" id="38"/>
-            <p:cNvSpPr txBox="true"/>
+            <p:cNvPr id="38" name="TextBox 38"/>
+            <p:cNvSpPr txBox="1"/>
             <p:nvPr/>
           </p:nvSpPr>
           <p:spPr>
@@ -7758,7 +8170,7 @@
             </a:prstGeom>
           </p:spPr>
           <p:txBody>
-            <a:bodyPr anchor="ctr" rtlCol="false" tIns="50800" lIns="50800" bIns="50800" rIns="50800"/>
+            <a:bodyPr lIns="50800" tIns="50800" rIns="50800" bIns="50800" rtlCol="0" anchor="ctr"/>
             <a:lstStyle/>
             <a:p>
               <a:pPr algn="ctr">
@@ -7766,13 +8178,14 @@
                   <a:spcPts val="2859"/>
                 </a:lnSpc>
               </a:pPr>
+              <a:endParaRPr/>
             </a:p>
           </p:txBody>
         </p:sp>
       </p:grpSp>
       <p:grpSp>
         <p:nvGrpSpPr>
-          <p:cNvPr name="Group 39" id="39"/>
+          <p:cNvPr id="39" name="Group 39"/>
           <p:cNvGrpSpPr/>
           <p:nvPr/>
         </p:nvGrpSpPr>
@@ -7786,12 +8199,12 @@
         </p:grpSpPr>
         <p:sp>
           <p:nvSpPr>
-            <p:cNvPr name="Freeform 40" id="40"/>
+            <p:cNvPr id="40" name="Freeform 40"/>
             <p:cNvSpPr/>
             <p:nvPr/>
           </p:nvSpPr>
           <p:spPr>
-            <a:xfrm flipH="false" flipV="false" rot="0">
+            <a:xfrm>
               <a:off x="0" y="0"/>
               <a:ext cx="503580" cy="6487118"/>
             </a:xfrm>
@@ -7800,9 +8213,9 @@
               <a:gdLst/>
               <a:ahLst/>
               <a:cxnLst/>
-              <a:rect r="r" b="b" t="t" l="l"/>
+              <a:rect l="l" t="t" r="r" b="b"/>
               <a:pathLst>
-                <a:path h="6487118" w="503580">
+                <a:path w="503580" h="6487118">
                   <a:moveTo>
                     <a:pt x="251790" y="6487118"/>
                   </a:moveTo>
@@ -7835,11 +8248,18 @@
               <a:srgbClr val="FFFFFF"/>
             </a:solidFill>
           </p:spPr>
+          <p:txBody>
+            <a:bodyPr/>
+            <a:lstStyle/>
+            <a:p>
+              <a:endParaRPr lang="es-ES"/>
+            </a:p>
+          </p:txBody>
         </p:sp>
         <p:sp>
           <p:nvSpPr>
-            <p:cNvPr name="TextBox 41" id="41"/>
-            <p:cNvSpPr txBox="true"/>
+            <p:cNvPr id="41" name="TextBox 41"/>
+            <p:cNvSpPr txBox="1"/>
             <p:nvPr/>
           </p:nvSpPr>
           <p:spPr>
@@ -7852,7 +8272,7 @@
             </a:prstGeom>
           </p:spPr>
           <p:txBody>
-            <a:bodyPr anchor="ctr" rtlCol="false" tIns="50800" lIns="50800" bIns="50800" rIns="50800"/>
+            <a:bodyPr lIns="50800" tIns="50800" rIns="50800" bIns="50800" rtlCol="0" anchor="ctr"/>
             <a:lstStyle/>
             <a:p>
               <a:pPr algn="ctr">
@@ -7860,13 +8280,14 @@
                   <a:spcPts val="2859"/>
                 </a:lnSpc>
               </a:pPr>
+              <a:endParaRPr/>
             </a:p>
           </p:txBody>
         </p:sp>
       </p:grpSp>
       <p:grpSp>
         <p:nvGrpSpPr>
-          <p:cNvPr name="Group 42" id="42"/>
+          <p:cNvPr id="42" name="Group 42"/>
           <p:cNvGrpSpPr/>
           <p:nvPr/>
         </p:nvGrpSpPr>
@@ -7880,12 +8301,12 @@
         </p:grpSpPr>
         <p:sp>
           <p:nvSpPr>
-            <p:cNvPr name="Freeform 43" id="43"/>
+            <p:cNvPr id="43" name="Freeform 43"/>
             <p:cNvSpPr/>
             <p:nvPr/>
           </p:nvSpPr>
           <p:spPr>
-            <a:xfrm flipH="false" flipV="false" rot="0">
+            <a:xfrm>
               <a:off x="0" y="0"/>
               <a:ext cx="494051" cy="11324135"/>
             </a:xfrm>
@@ -7894,9 +8315,9 @@
               <a:gdLst/>
               <a:ahLst/>
               <a:cxnLst/>
-              <a:rect r="r" b="b" t="t" l="l"/>
+              <a:rect l="l" t="t" r="r" b="b"/>
               <a:pathLst>
-                <a:path h="11324135" w="494051">
+                <a:path w="494051" h="11324135">
                   <a:moveTo>
                     <a:pt x="247026" y="11324135"/>
                   </a:moveTo>
@@ -7929,11 +8350,18 @@
               <a:srgbClr val="FFFFFF"/>
             </a:solidFill>
           </p:spPr>
+          <p:txBody>
+            <a:bodyPr/>
+            <a:lstStyle/>
+            <a:p>
+              <a:endParaRPr lang="es-ES"/>
+            </a:p>
+          </p:txBody>
         </p:sp>
         <p:sp>
           <p:nvSpPr>
-            <p:cNvPr name="TextBox 44" id="44"/>
-            <p:cNvSpPr txBox="true"/>
+            <p:cNvPr id="44" name="TextBox 44"/>
+            <p:cNvSpPr txBox="1"/>
             <p:nvPr/>
           </p:nvSpPr>
           <p:spPr>
@@ -7946,7 +8374,7 @@
             </a:prstGeom>
           </p:spPr>
           <p:txBody>
-            <a:bodyPr anchor="ctr" rtlCol="false" tIns="50800" lIns="50800" bIns="50800" rIns="50800"/>
+            <a:bodyPr lIns="50800" tIns="50800" rIns="50800" bIns="50800" rtlCol="0" anchor="ctr"/>
             <a:lstStyle/>
             <a:p>
               <a:pPr algn="ctr">
@@ -7954,18 +8382,19 @@
                   <a:spcPts val="2859"/>
                 </a:lnSpc>
               </a:pPr>
+              <a:endParaRPr/>
             </a:p>
           </p:txBody>
         </p:sp>
       </p:grpSp>
       <p:sp>
         <p:nvSpPr>
-          <p:cNvPr name="Freeform 45" id="45"/>
+          <p:cNvPr id="45" name="Freeform 45"/>
           <p:cNvSpPr/>
           <p:nvPr/>
         </p:nvSpPr>
         <p:spPr>
-          <a:xfrm flipH="false" flipV="false" rot="0">
+          <a:xfrm>
             <a:off x="11747278" y="4434332"/>
             <a:ext cx="2140399" cy="4768958"/>
           </a:xfrm>
@@ -7974,9 +8403,9 @@
             <a:gdLst/>
             <a:ahLst/>
             <a:cxnLst/>
-            <a:rect r="r" b="b" t="t" l="l"/>
+            <a:rect l="l" t="t" r="r" b="b"/>
             <a:pathLst>
-              <a:path h="4768958" w="2140399">
+              <a:path w="2140399" h="4768958">
                 <a:moveTo>
                   <a:pt x="0" y="0"/>
                 </a:moveTo>
@@ -7997,16 +8426,23 @@
             </a:pathLst>
           </a:custGeom>
           <a:blipFill>
-            <a:blip r:embed="rId13"/>
+            <a:blip r:embed="rId12"/>
             <a:stretch>
-              <a:fillRect l="0" t="0" r="0" b="0"/>
+              <a:fillRect/>
             </a:stretch>
           </a:blipFill>
         </p:spPr>
+        <p:txBody>
+          <a:bodyPr/>
+          <a:lstStyle/>
+          <a:p>
+            <a:endParaRPr lang="es-ES"/>
+          </a:p>
+        </p:txBody>
       </p:sp>
       <p:grpSp>
         <p:nvGrpSpPr>
-          <p:cNvPr name="Group 46" id="46"/>
+          <p:cNvPr id="46" name="Group 46"/>
           <p:cNvGrpSpPr/>
           <p:nvPr/>
         </p:nvGrpSpPr>
@@ -8020,12 +8456,12 @@
         </p:grpSpPr>
         <p:sp>
           <p:nvSpPr>
-            <p:cNvPr name="Freeform 47" id="47"/>
+            <p:cNvPr id="47" name="Freeform 47"/>
             <p:cNvSpPr/>
             <p:nvPr/>
           </p:nvSpPr>
           <p:spPr>
-            <a:xfrm flipH="false" flipV="false" rot="0">
+            <a:xfrm>
               <a:off x="0" y="0"/>
               <a:ext cx="558366" cy="1235924"/>
             </a:xfrm>
@@ -8034,9 +8470,9 @@
               <a:gdLst/>
               <a:ahLst/>
               <a:cxnLst/>
-              <a:rect r="r" b="b" t="t" l="l"/>
+              <a:rect l="l" t="t" r="r" b="b"/>
               <a:pathLst>
-                <a:path h="1235924" w="558366">
+                <a:path w="558366" h="1235924">
                   <a:moveTo>
                     <a:pt x="279183" y="1235924"/>
                   </a:moveTo>
@@ -8069,11 +8505,18 @@
               <a:srgbClr val="FFFFFF"/>
             </a:solidFill>
           </p:spPr>
+          <p:txBody>
+            <a:bodyPr/>
+            <a:lstStyle/>
+            <a:p>
+              <a:endParaRPr lang="es-ES"/>
+            </a:p>
+          </p:txBody>
         </p:sp>
         <p:sp>
           <p:nvSpPr>
-            <p:cNvPr name="TextBox 48" id="48"/>
-            <p:cNvSpPr txBox="true"/>
+            <p:cNvPr id="48" name="TextBox 48"/>
+            <p:cNvSpPr txBox="1"/>
             <p:nvPr/>
           </p:nvSpPr>
           <p:spPr>
@@ -8086,7 +8529,7 @@
             </a:prstGeom>
           </p:spPr>
           <p:txBody>
-            <a:bodyPr anchor="ctr" rtlCol="false" tIns="50800" lIns="50800" bIns="50800" rIns="50800"/>
+            <a:bodyPr lIns="50800" tIns="50800" rIns="50800" bIns="50800" rtlCol="0" anchor="ctr"/>
             <a:lstStyle/>
             <a:p>
               <a:pPr algn="ctr">
@@ -8094,13 +8537,14 @@
                   <a:spcPts val="2859"/>
                 </a:lnSpc>
               </a:pPr>
+              <a:endParaRPr/>
             </a:p>
           </p:txBody>
         </p:sp>
       </p:grpSp>
       <p:grpSp>
         <p:nvGrpSpPr>
-          <p:cNvPr name="Group 49" id="49"/>
+          <p:cNvPr id="49" name="Group 49"/>
           <p:cNvGrpSpPr/>
           <p:nvPr/>
         </p:nvGrpSpPr>
@@ -8114,12 +8558,12 @@
         </p:grpSpPr>
         <p:sp>
           <p:nvSpPr>
-            <p:cNvPr name="Freeform 50" id="50"/>
+            <p:cNvPr id="50" name="Freeform 50"/>
             <p:cNvSpPr/>
             <p:nvPr/>
           </p:nvSpPr>
           <p:spPr>
-            <a:xfrm flipH="false" flipV="false" rot="0">
+            <a:xfrm>
               <a:off x="0" y="0"/>
               <a:ext cx="558366" cy="1457757"/>
             </a:xfrm>
@@ -8128,9 +8572,9 @@
               <a:gdLst/>
               <a:ahLst/>
               <a:cxnLst/>
-              <a:rect r="r" b="b" t="t" l="l"/>
+              <a:rect l="l" t="t" r="r" b="b"/>
               <a:pathLst>
-                <a:path h="1457757" w="558366">
+                <a:path w="558366" h="1457757">
                   <a:moveTo>
                     <a:pt x="279183" y="1457757"/>
                   </a:moveTo>
@@ -8163,11 +8607,18 @@
               <a:srgbClr val="FFFFFF"/>
             </a:solidFill>
           </p:spPr>
+          <p:txBody>
+            <a:bodyPr/>
+            <a:lstStyle/>
+            <a:p>
+              <a:endParaRPr lang="es-ES"/>
+            </a:p>
+          </p:txBody>
         </p:sp>
         <p:sp>
           <p:nvSpPr>
-            <p:cNvPr name="TextBox 51" id="51"/>
-            <p:cNvSpPr txBox="true"/>
+            <p:cNvPr id="51" name="TextBox 51"/>
+            <p:cNvSpPr txBox="1"/>
             <p:nvPr/>
           </p:nvSpPr>
           <p:spPr>
@@ -8180,7 +8631,7 @@
             </a:prstGeom>
           </p:spPr>
           <p:txBody>
-            <a:bodyPr anchor="ctr" rtlCol="false" tIns="50800" lIns="50800" bIns="50800" rIns="50800"/>
+            <a:bodyPr lIns="50800" tIns="50800" rIns="50800" bIns="50800" rtlCol="0" anchor="ctr"/>
             <a:lstStyle/>
             <a:p>
               <a:pPr algn="ctr">
@@ -8188,13 +8639,14 @@
                   <a:spcPts val="2859"/>
                 </a:lnSpc>
               </a:pPr>
+              <a:endParaRPr/>
             </a:p>
           </p:txBody>
         </p:sp>
       </p:grpSp>
       <p:grpSp>
         <p:nvGrpSpPr>
-          <p:cNvPr name="Group 52" id="52"/>
+          <p:cNvPr id="52" name="Group 52"/>
           <p:cNvGrpSpPr/>
           <p:nvPr/>
         </p:nvGrpSpPr>
@@ -8208,12 +8660,12 @@
         </p:grpSpPr>
         <p:sp>
           <p:nvSpPr>
-            <p:cNvPr name="Freeform 53" id="53"/>
+            <p:cNvPr id="53" name="Freeform 53"/>
             <p:cNvSpPr/>
             <p:nvPr/>
           </p:nvSpPr>
           <p:spPr>
-            <a:xfrm flipH="false" flipV="false" rot="0">
+            <a:xfrm>
               <a:off x="0" y="0"/>
               <a:ext cx="558366" cy="2017569"/>
             </a:xfrm>
@@ -8222,9 +8674,9 @@
               <a:gdLst/>
               <a:ahLst/>
               <a:cxnLst/>
-              <a:rect r="r" b="b" t="t" l="l"/>
+              <a:rect l="l" t="t" r="r" b="b"/>
               <a:pathLst>
-                <a:path h="2017569" w="558366">
+                <a:path w="558366" h="2017569">
                   <a:moveTo>
                     <a:pt x="279183" y="2017569"/>
                   </a:moveTo>
@@ -8257,11 +8709,18 @@
               <a:srgbClr val="FFFFFF"/>
             </a:solidFill>
           </p:spPr>
+          <p:txBody>
+            <a:bodyPr/>
+            <a:lstStyle/>
+            <a:p>
+              <a:endParaRPr lang="es-ES"/>
+            </a:p>
+          </p:txBody>
         </p:sp>
         <p:sp>
           <p:nvSpPr>
-            <p:cNvPr name="TextBox 54" id="54"/>
-            <p:cNvSpPr txBox="true"/>
+            <p:cNvPr id="54" name="TextBox 54"/>
+            <p:cNvSpPr txBox="1"/>
             <p:nvPr/>
           </p:nvSpPr>
           <p:spPr>
@@ -8274,7 +8733,7 @@
             </a:prstGeom>
           </p:spPr>
           <p:txBody>
-            <a:bodyPr anchor="ctr" rtlCol="false" tIns="50800" lIns="50800" bIns="50800" rIns="50800"/>
+            <a:bodyPr lIns="50800" tIns="50800" rIns="50800" bIns="50800" rtlCol="0" anchor="ctr"/>
             <a:lstStyle/>
             <a:p>
               <a:pPr algn="ctr">
@@ -8282,18 +8741,19 @@
                   <a:spcPts val="2859"/>
                 </a:lnSpc>
               </a:pPr>
+              <a:endParaRPr/>
             </a:p>
           </p:txBody>
         </p:sp>
       </p:grpSp>
       <p:sp>
         <p:nvSpPr>
-          <p:cNvPr name="Freeform 55" id="55"/>
+          <p:cNvPr id="55" name="Freeform 55"/>
           <p:cNvSpPr/>
           <p:nvPr/>
         </p:nvSpPr>
         <p:spPr>
-          <a:xfrm flipH="false" flipV="false" rot="0">
+          <a:xfrm>
             <a:off x="8379096" y="1899536"/>
             <a:ext cx="2608055" cy="3701756"/>
           </a:xfrm>
@@ -8302,9 +8762,9 @@
             <a:gdLst/>
             <a:ahLst/>
             <a:cxnLst/>
-            <a:rect r="r" b="b" t="t" l="l"/>
+            <a:rect l="l" t="t" r="r" b="b"/>
             <a:pathLst>
-              <a:path h="3701756" w="2608055">
+              <a:path w="2608055" h="3701756">
                 <a:moveTo>
                   <a:pt x="0" y="0"/>
                 </a:moveTo>
@@ -8325,21 +8785,28 @@
             </a:pathLst>
           </a:custGeom>
           <a:blipFill>
-            <a:blip r:embed="rId14"/>
+            <a:blip r:embed="rId13"/>
             <a:stretch>
-              <a:fillRect l="0" t="0" r="0" b="0"/>
+              <a:fillRect/>
             </a:stretch>
           </a:blipFill>
         </p:spPr>
-      </p:sp>
-      <p:sp>
-        <p:nvSpPr>
-          <p:cNvPr name="TextBox 56" id="56"/>
-          <p:cNvSpPr txBox="true"/>
+        <p:txBody>
+          <a:bodyPr/>
+          <a:lstStyle/>
+          <a:p>
+            <a:endParaRPr lang="es-ES"/>
+          </a:p>
+        </p:txBody>
+      </p:sp>
+      <p:sp>
+        <p:nvSpPr>
+          <p:cNvPr id="56" name="TextBox 56"/>
+          <p:cNvSpPr txBox="1"/>
           <p:nvPr/>
         </p:nvSpPr>
         <p:spPr>
-          <a:xfrm rot="0">
+          <a:xfrm>
             <a:off x="17535126" y="9399905"/>
             <a:ext cx="752874" cy="887095"/>
           </a:xfrm>
@@ -8348,7 +8815,7 @@
           </a:prstGeom>
         </p:spPr>
         <p:txBody>
-          <a:bodyPr anchor="t" rtlCol="false" tIns="0" lIns="0" bIns="0" rIns="0">
+          <a:bodyPr lIns="0" tIns="0" rIns="0" bIns="0" rtlCol="0" anchor="t">
             <a:spAutoFit/>
           </a:bodyPr>
           <a:lstStyle/>
@@ -8359,7 +8826,7 @@
               </a:lnSpc>
             </a:pPr>
             <a:r>
-              <a:rPr lang="en-US" b="true" sz="5199">
+              <a:rPr lang="en-US" sz="5199" b="1">
                 <a:solidFill>
                   <a:srgbClr val="93D14B"/>
                 </a:solidFill>
@@ -8375,12 +8842,12 @@
       </p:sp>
       <p:sp>
         <p:nvSpPr>
-          <p:cNvPr name="TextBox 57" id="57"/>
-          <p:cNvSpPr txBox="true"/>
+          <p:cNvPr id="57" name="TextBox 57"/>
+          <p:cNvSpPr txBox="1"/>
           <p:nvPr/>
         </p:nvSpPr>
         <p:spPr>
-          <a:xfrm rot="0">
+          <a:xfrm>
             <a:off x="112517" y="918729"/>
             <a:ext cx="2690935" cy="1144714"/>
           </a:xfrm>
@@ -8389,12 +8856,12 @@
           </a:prstGeom>
         </p:spPr>
         <p:txBody>
-          <a:bodyPr anchor="t" rtlCol="false" tIns="0" lIns="0" bIns="0" rIns="0">
+          <a:bodyPr lIns="0" tIns="0" rIns="0" bIns="0" rtlCol="0" anchor="t">
             <a:spAutoFit/>
           </a:bodyPr>
           <a:lstStyle/>
           <a:p>
-            <a:pPr algn="ctr" marL="0" indent="0" lvl="0">
+            <a:pPr marL="0" lvl="0" indent="0" algn="ctr">
               <a:lnSpc>
                 <a:spcPts val="4598"/>
               </a:lnSpc>
@@ -8426,13 +8893,14 @@
 </file>
 
 <file path=ppt/slides/slide7.xml><?xml version="1.0" encoding="utf-8"?>
-<p:sld xmlns:p="http://schemas.openxmlformats.org/presentationml/2006/main" xmlns:a="http://schemas.openxmlformats.org/drawingml/2006/main" xmlns:r="http://schemas.openxmlformats.org/officeDocument/2006/relationships">
+<p:sld xmlns:a="http://schemas.openxmlformats.org/drawingml/2006/main" xmlns:r="http://schemas.openxmlformats.org/officeDocument/2006/relationships" xmlns:p="http://schemas.openxmlformats.org/presentationml/2006/main">
   <p:cSld>
     <p:bg>
       <p:bgPr>
         <a:solidFill>
           <a:srgbClr val="344F51"/>
         </a:solidFill>
+        <a:effectLst/>
       </p:bgPr>
     </p:bg>
     <p:spTree>
@@ -8451,12 +8919,12 @@
       </p:grpSpPr>
       <p:grpSp>
         <p:nvGrpSpPr>
-          <p:cNvPr name="Group 2" id="2"/>
+          <p:cNvPr id="2" name="Group 2"/>
           <p:cNvGrpSpPr/>
           <p:nvPr/>
         </p:nvGrpSpPr>
         <p:grpSpPr>
-          <a:xfrm rot="0">
+          <a:xfrm>
             <a:off x="-5113308" y="823034"/>
             <a:ext cx="19354610" cy="1461811"/>
             <a:chOff x="0" y="0"/>
@@ -8465,12 +8933,12 @@
         </p:grpSpPr>
         <p:sp>
           <p:nvSpPr>
-            <p:cNvPr name="Freeform 3" id="3"/>
+            <p:cNvPr id="3" name="Freeform 3"/>
             <p:cNvSpPr/>
             <p:nvPr/>
           </p:nvSpPr>
           <p:spPr>
-            <a:xfrm flipH="false" flipV="false" rot="0">
+            <a:xfrm>
               <a:off x="0" y="0"/>
               <a:ext cx="1876002" cy="141690"/>
             </a:xfrm>
@@ -8479,9 +8947,9 @@
               <a:gdLst/>
               <a:ahLst/>
               <a:cxnLst/>
-              <a:rect r="r" b="b" t="t" l="l"/>
+              <a:rect l="l" t="t" r="r" b="b"/>
               <a:pathLst>
-                <a:path h="141690" w="1876002">
+                <a:path w="1876002" h="141690">
                   <a:moveTo>
                     <a:pt x="1672802" y="0"/>
                   </a:moveTo>
@@ -8510,11 +8978,18 @@
               <a:miter/>
             </a:ln>
           </p:spPr>
+          <p:txBody>
+            <a:bodyPr/>
+            <a:lstStyle/>
+            <a:p>
+              <a:endParaRPr lang="es-ES"/>
+            </a:p>
+          </p:txBody>
         </p:sp>
         <p:sp>
           <p:nvSpPr>
-            <p:cNvPr name="TextBox 4" id="4"/>
-            <p:cNvSpPr txBox="true"/>
+            <p:cNvPr id="4" name="TextBox 4"/>
+            <p:cNvSpPr txBox="1"/>
             <p:nvPr/>
           </p:nvSpPr>
           <p:spPr>
@@ -8527,10 +9002,10 @@
             </a:prstGeom>
           </p:spPr>
           <p:txBody>
-            <a:bodyPr anchor="ctr" rtlCol="false" tIns="50800" lIns="50800" bIns="50800" rIns="50800"/>
+            <a:bodyPr lIns="50800" tIns="50800" rIns="50800" bIns="50800" rtlCol="0" anchor="ctr"/>
             <a:lstStyle/>
             <a:p>
-              <a:pPr algn="ctr" marL="0" indent="0" lvl="0">
+              <a:pPr marL="0" lvl="0" indent="0" algn="ctr">
                 <a:lnSpc>
                   <a:spcPts val="2859"/>
                 </a:lnSpc>
@@ -8538,32 +9013,33 @@
                   <a:spcPct val="0"/>
                 </a:spcBef>
               </a:pPr>
+              <a:endParaRPr/>
             </a:p>
           </p:txBody>
         </p:sp>
       </p:grpSp>
       <p:grpSp>
         <p:nvGrpSpPr>
-          <p:cNvPr name="Group 5" id="5"/>
+          <p:cNvPr id="5" name="Group 5"/>
           <p:cNvGrpSpPr/>
           <p:nvPr/>
         </p:nvGrpSpPr>
         <p:grpSpPr>
-          <a:xfrm rot="0">
-            <a:off x="374853" y="3466122"/>
-            <a:ext cx="5008014" cy="859690"/>
-            <a:chOff x="0" y="0"/>
-            <a:chExt cx="1164415" cy="199887"/>
+          <a:xfrm>
+            <a:off x="374853" y="3463438"/>
+            <a:ext cx="5008014" cy="862374"/>
+            <a:chOff x="0" y="-624"/>
+            <a:chExt cx="1164415" cy="200511"/>
           </a:xfrm>
         </p:grpSpPr>
         <p:sp>
           <p:nvSpPr>
-            <p:cNvPr name="Freeform 6" id="6"/>
+            <p:cNvPr id="6" name="Freeform 6"/>
             <p:cNvSpPr/>
             <p:nvPr/>
           </p:nvSpPr>
           <p:spPr>
-            <a:xfrm flipH="false" flipV="false" rot="0">
+            <a:xfrm>
               <a:off x="0" y="0"/>
               <a:ext cx="1164415" cy="199887"/>
             </a:xfrm>
@@ -8572,9 +9048,9 @@
               <a:gdLst/>
               <a:ahLst/>
               <a:cxnLst/>
-              <a:rect r="r" b="b" t="t" l="l"/>
+              <a:rect l="l" t="t" r="r" b="b"/>
               <a:pathLst>
-                <a:path h="199887" w="1164415">
+                <a:path w="1164415" h="199887">
                   <a:moveTo>
                     <a:pt x="0" y="0"/>
                   </a:moveTo>
@@ -8595,27 +9071,34 @@
               <a:srgbClr val="93D14B"/>
             </a:solidFill>
           </p:spPr>
+          <p:txBody>
+            <a:bodyPr/>
+            <a:lstStyle/>
+            <a:p>
+              <a:endParaRPr lang="es-ES"/>
+            </a:p>
+          </p:txBody>
         </p:sp>
         <p:sp>
           <p:nvSpPr>
-            <p:cNvPr name="TextBox 7" id="7"/>
-            <p:cNvSpPr txBox="true"/>
+            <p:cNvPr id="7" name="TextBox 7"/>
+            <p:cNvSpPr txBox="1"/>
             <p:nvPr/>
           </p:nvSpPr>
           <p:spPr>
             <a:xfrm>
-              <a:off x="0" y="-76200"/>
-              <a:ext cx="1164415" cy="276087"/>
+              <a:off x="0" y="-624"/>
+              <a:ext cx="1164415" cy="200511"/>
             </a:xfrm>
             <a:prstGeom prst="rect">
               <a:avLst/>
             </a:prstGeom>
           </p:spPr>
           <p:txBody>
-            <a:bodyPr anchor="t" rtlCol="false" tIns="50800" lIns="50800" bIns="50800" rIns="50800"/>
+            <a:bodyPr lIns="50800" tIns="50800" rIns="50800" bIns="50800" rtlCol="0" anchor="t"/>
             <a:lstStyle/>
             <a:p>
-              <a:pPr algn="ctr" marL="0" indent="0" lvl="0">
+              <a:pPr marL="0" lvl="0" indent="0" algn="ctr">
                 <a:lnSpc>
                   <a:spcPts val="4114"/>
                 </a:lnSpc>
@@ -8624,7 +9107,7 @@
                 </a:spcBef>
               </a:pPr>
               <a:r>
-                <a:rPr lang="en-US" b="true" sz="2981" spc="29">
+                <a:rPr lang="en-US" sz="2981" b="1" spc="29" dirty="0">
                   <a:solidFill>
                     <a:srgbClr val="FFFFFF"/>
                   </a:solidFill>
@@ -8633,20 +9116,65 @@
                   <a:cs typeface="Poppins Bold"/>
                   <a:sym typeface="Poppins Bold"/>
                 </a:rPr>
-                <a:t> APLICACIÓN CLIENTE</a:t>
+                <a:t> </a:t>
               </a:r>
+              <a:r>
+                <a:rPr lang="en-US" sz="2981" b="1" spc="29" dirty="0" err="1">
+                  <a:solidFill>
+                    <a:srgbClr val="FFFFFF"/>
+                  </a:solidFill>
+                  <a:latin typeface="Poppins Bold"/>
+                  <a:ea typeface="Poppins Bold"/>
+                  <a:cs typeface="Poppins Bold"/>
+                  <a:sym typeface="Poppins Bold"/>
+                </a:rPr>
+                <a:t>APLICACIÓN</a:t>
+              </a:r>
+              <a:r>
+                <a:rPr lang="en-US" sz="2981" b="1" spc="29" dirty="0">
+                  <a:solidFill>
+                    <a:srgbClr val="FFFFFF"/>
+                  </a:solidFill>
+                  <a:latin typeface="Poppins Bold"/>
+                  <a:ea typeface="Poppins Bold"/>
+                  <a:cs typeface="Poppins Bold"/>
+                  <a:sym typeface="Poppins Bold"/>
+                </a:rPr>
+                <a:t> </a:t>
+              </a:r>
+              <a:r>
+                <a:rPr lang="en-US" sz="2981" b="1" spc="29" dirty="0" err="1">
+                  <a:solidFill>
+                    <a:srgbClr val="FFFFFF"/>
+                  </a:solidFill>
+                  <a:latin typeface="Poppins Bold"/>
+                  <a:ea typeface="Poppins Bold"/>
+                  <a:cs typeface="Poppins Bold"/>
+                  <a:sym typeface="Poppins Bold"/>
+                </a:rPr>
+                <a:t>CLIENTE</a:t>
+              </a:r>
+              <a:endParaRPr lang="en-US" sz="2981" b="1" spc="29" dirty="0">
+                <a:solidFill>
+                  <a:srgbClr val="FFFFFF"/>
+                </a:solidFill>
+                <a:latin typeface="Poppins Bold"/>
+                <a:ea typeface="Poppins Bold"/>
+                <a:cs typeface="Poppins Bold"/>
+                <a:sym typeface="Poppins Bold"/>
+              </a:endParaRPr>
             </a:p>
           </p:txBody>
         </p:sp>
       </p:grpSp>
       <p:grpSp>
         <p:nvGrpSpPr>
-          <p:cNvPr name="Group 8" id="8"/>
+          <p:cNvPr id="8" name="Group 8"/>
           <p:cNvGrpSpPr/>
           <p:nvPr/>
         </p:nvGrpSpPr>
         <p:grpSpPr>
-          <a:xfrm rot="0">
+          <a:xfrm>
             <a:off x="6540893" y="3279111"/>
             <a:ext cx="5686178" cy="1325286"/>
             <a:chOff x="0" y="0"/>
@@ -8655,12 +9183,12 @@
         </p:grpSpPr>
         <p:sp>
           <p:nvSpPr>
-            <p:cNvPr name="Freeform 9" id="9"/>
+            <p:cNvPr id="9" name="Freeform 9"/>
             <p:cNvSpPr/>
             <p:nvPr/>
           </p:nvSpPr>
           <p:spPr>
-            <a:xfrm flipH="false" flipV="false" rot="0">
+            <a:xfrm>
               <a:off x="0" y="0"/>
               <a:ext cx="1322095" cy="308143"/>
             </a:xfrm>
@@ -8669,9 +9197,9 @@
               <a:gdLst/>
               <a:ahLst/>
               <a:cxnLst/>
-              <a:rect r="r" b="b" t="t" l="l"/>
+              <a:rect l="l" t="t" r="r" b="b"/>
               <a:pathLst>
-                <a:path h="308143" w="1322095">
+                <a:path w="1322095" h="308143">
                   <a:moveTo>
                     <a:pt x="0" y="0"/>
                   </a:moveTo>
@@ -8692,27 +9220,34 @@
               <a:srgbClr val="93D14B"/>
             </a:solidFill>
           </p:spPr>
+          <p:txBody>
+            <a:bodyPr/>
+            <a:lstStyle/>
+            <a:p>
+              <a:endParaRPr lang="es-ES"/>
+            </a:p>
+          </p:txBody>
         </p:sp>
         <p:sp>
           <p:nvSpPr>
-            <p:cNvPr name="TextBox 10" id="10"/>
-            <p:cNvSpPr txBox="true"/>
+            <p:cNvPr id="10" name="TextBox 10"/>
+            <p:cNvSpPr txBox="1"/>
             <p:nvPr/>
           </p:nvSpPr>
           <p:spPr>
             <a:xfrm>
-              <a:off x="0" y="-76200"/>
-              <a:ext cx="1322095" cy="384343"/>
+              <a:off x="0" y="42858"/>
+              <a:ext cx="1322095" cy="265285"/>
             </a:xfrm>
             <a:prstGeom prst="rect">
               <a:avLst/>
             </a:prstGeom>
           </p:spPr>
           <p:txBody>
-            <a:bodyPr anchor="t" rtlCol="false" tIns="50800" lIns="50800" bIns="50800" rIns="50800"/>
+            <a:bodyPr lIns="50800" tIns="50800" rIns="50800" bIns="50800" rtlCol="0" anchor="t"/>
             <a:lstStyle/>
             <a:p>
-              <a:pPr algn="ctr" marL="0" indent="0" lvl="0">
+              <a:pPr marL="0" lvl="0" indent="0" algn="ctr">
                 <a:lnSpc>
                   <a:spcPts val="4114"/>
                 </a:lnSpc>
@@ -8721,7 +9256,7 @@
                 </a:spcBef>
               </a:pPr>
               <a:r>
-                <a:rPr lang="en-US" b="true" sz="2981" spc="29">
+                <a:rPr lang="en-US" sz="2981" b="1" spc="29" dirty="0" err="1">
                   <a:solidFill>
                     <a:srgbClr val="FFFFFF"/>
                   </a:solidFill>
@@ -8730,7 +9265,19 @@
                   <a:cs typeface="Poppins Bold"/>
                   <a:sym typeface="Poppins Bold"/>
                 </a:rPr>
-                <a:t>SERVICIOS EN LA NUBE (BaaS)</a:t>
+                <a:t>SERVICIOS</a:t>
+              </a:r>
+              <a:r>
+                <a:rPr lang="en-US" sz="2981" b="1" spc="29" dirty="0">
+                  <a:solidFill>
+                    <a:srgbClr val="FFFFFF"/>
+                  </a:solidFill>
+                  <a:latin typeface="Poppins Bold"/>
+                  <a:ea typeface="Poppins Bold"/>
+                  <a:cs typeface="Poppins Bold"/>
+                  <a:sym typeface="Poppins Bold"/>
+                </a:rPr>
+                <a:t> EN LA NUBE (BaaS)</a:t>
               </a:r>
             </a:p>
           </p:txBody>
@@ -8738,26 +9285,26 @@
       </p:grpSp>
       <p:grpSp>
         <p:nvGrpSpPr>
-          <p:cNvPr name="Group 11" id="11"/>
+          <p:cNvPr id="11" name="Group 11"/>
           <p:cNvGrpSpPr/>
           <p:nvPr/>
         </p:nvGrpSpPr>
         <p:grpSpPr>
-          <a:xfrm rot="0">
-            <a:off x="13147110" y="3466122"/>
-            <a:ext cx="4778411" cy="859690"/>
-            <a:chOff x="0" y="0"/>
-            <a:chExt cx="1111030" cy="199887"/>
+          <a:xfrm>
+            <a:off x="13113954" y="3463438"/>
+            <a:ext cx="4811567" cy="862374"/>
+            <a:chOff x="-7709" y="-624"/>
+            <a:chExt cx="1118739" cy="200511"/>
           </a:xfrm>
         </p:grpSpPr>
         <p:sp>
           <p:nvSpPr>
-            <p:cNvPr name="Freeform 12" id="12"/>
+            <p:cNvPr id="12" name="Freeform 12"/>
             <p:cNvSpPr/>
             <p:nvPr/>
           </p:nvSpPr>
           <p:spPr>
-            <a:xfrm flipH="false" flipV="false" rot="0">
+            <a:xfrm>
               <a:off x="0" y="0"/>
               <a:ext cx="1111030" cy="199887"/>
             </a:xfrm>
@@ -8766,9 +9313,9 @@
               <a:gdLst/>
               <a:ahLst/>
               <a:cxnLst/>
-              <a:rect r="r" b="b" t="t" l="l"/>
+              <a:rect l="l" t="t" r="r" b="b"/>
               <a:pathLst>
-                <a:path h="199887" w="1111030">
+                <a:path w="1111030" h="199887">
                   <a:moveTo>
                     <a:pt x="0" y="0"/>
                   </a:moveTo>
@@ -8789,27 +9336,34 @@
               <a:srgbClr val="93D14B"/>
             </a:solidFill>
           </p:spPr>
+          <p:txBody>
+            <a:bodyPr/>
+            <a:lstStyle/>
+            <a:p>
+              <a:endParaRPr lang="es-ES"/>
+            </a:p>
+          </p:txBody>
         </p:sp>
         <p:sp>
           <p:nvSpPr>
-            <p:cNvPr name="TextBox 13" id="13"/>
-            <p:cNvSpPr txBox="true"/>
+            <p:cNvPr id="13" name="TextBox 13"/>
+            <p:cNvSpPr txBox="1"/>
             <p:nvPr/>
           </p:nvSpPr>
           <p:spPr>
             <a:xfrm>
-              <a:off x="0" y="-76200"/>
-              <a:ext cx="1111030" cy="276087"/>
+              <a:off x="-7709" y="-624"/>
+              <a:ext cx="1111030" cy="199887"/>
             </a:xfrm>
             <a:prstGeom prst="rect">
               <a:avLst/>
             </a:prstGeom>
           </p:spPr>
           <p:txBody>
-            <a:bodyPr anchor="t" rtlCol="false" tIns="50800" lIns="50800" bIns="50800" rIns="50800"/>
+            <a:bodyPr lIns="50800" tIns="50800" rIns="50800" bIns="50800" rtlCol="0" anchor="t"/>
             <a:lstStyle/>
             <a:p>
-              <a:pPr algn="ctr" marL="0" indent="0" lvl="0">
+              <a:pPr marL="0" lvl="0" indent="0" algn="ctr">
                 <a:lnSpc>
                   <a:spcPts val="4114"/>
                 </a:lnSpc>
@@ -8818,7 +9372,7 @@
                 </a:spcBef>
               </a:pPr>
               <a:r>
-                <a:rPr lang="en-US" b="true" sz="2981" spc="29">
+                <a:rPr lang="en-US" sz="2981" b="1" spc="29" dirty="0">
                   <a:solidFill>
                     <a:srgbClr val="FFFFFF"/>
                   </a:solidFill>
@@ -8835,12 +9389,12 @@
       </p:grpSp>
       <p:grpSp>
         <p:nvGrpSpPr>
-          <p:cNvPr name="Group 14" id="14"/>
+          <p:cNvPr id="14" name="Group 14"/>
           <p:cNvGrpSpPr/>
           <p:nvPr/>
         </p:nvGrpSpPr>
         <p:grpSpPr>
-          <a:xfrm rot="0">
+          <a:xfrm>
             <a:off x="352677" y="5143500"/>
             <a:ext cx="5052366" cy="4114800"/>
             <a:chOff x="0" y="0"/>
@@ -8849,12 +9403,12 @@
         </p:grpSpPr>
         <p:sp>
           <p:nvSpPr>
-            <p:cNvPr name="Freeform 15" id="15"/>
+            <p:cNvPr id="15" name="Freeform 15"/>
             <p:cNvSpPr/>
             <p:nvPr/>
           </p:nvSpPr>
           <p:spPr>
-            <a:xfrm flipH="false" flipV="false" rot="0">
+            <a:xfrm>
               <a:off x="0" y="0"/>
               <a:ext cx="1174728" cy="956734"/>
             </a:xfrm>
@@ -8863,9 +9417,9 @@
               <a:gdLst/>
               <a:ahLst/>
               <a:cxnLst/>
-              <a:rect r="r" b="b" t="t" l="l"/>
+              <a:rect l="l" t="t" r="r" b="b"/>
               <a:pathLst>
-                <a:path h="956734" w="1174728">
+                <a:path w="1174728" h="956734">
                   <a:moveTo>
                     <a:pt x="0" y="0"/>
                   </a:moveTo>
@@ -8886,11 +9440,18 @@
               <a:srgbClr val="FFFFFF"/>
             </a:solidFill>
           </p:spPr>
+          <p:txBody>
+            <a:bodyPr/>
+            <a:lstStyle/>
+            <a:p>
+              <a:endParaRPr lang="es-ES"/>
+            </a:p>
+          </p:txBody>
         </p:sp>
         <p:sp>
           <p:nvSpPr>
-            <p:cNvPr name="TextBox 16" id="16"/>
-            <p:cNvSpPr txBox="true"/>
+            <p:cNvPr id="16" name="TextBox 16"/>
+            <p:cNvSpPr txBox="1"/>
             <p:nvPr/>
           </p:nvSpPr>
           <p:spPr>
@@ -8903,10 +9464,10 @@
             </a:prstGeom>
           </p:spPr>
           <p:txBody>
-            <a:bodyPr anchor="t" rtlCol="false" tIns="50800" lIns="50800" bIns="50800" rIns="50800"/>
+            <a:bodyPr lIns="50800" tIns="50800" rIns="50800" bIns="50800" rtlCol="0" anchor="t"/>
             <a:lstStyle/>
             <a:p>
-              <a:pPr algn="ctr" marL="0" indent="0" lvl="0">
+              <a:pPr marL="0" lvl="0" indent="0" algn="ctr">
                 <a:lnSpc>
                   <a:spcPts val="4114"/>
                 </a:lnSpc>
@@ -8914,18 +9475,19 @@
                   <a:spcPct val="0"/>
                 </a:spcBef>
               </a:pPr>
+              <a:endParaRPr/>
             </a:p>
           </p:txBody>
         </p:sp>
       </p:grpSp>
       <p:sp>
         <p:nvSpPr>
-          <p:cNvPr name="Freeform 17" id="17"/>
+          <p:cNvPr id="17" name="Freeform 17"/>
           <p:cNvSpPr/>
           <p:nvPr/>
         </p:nvSpPr>
         <p:spPr>
-          <a:xfrm flipH="false" flipV="false" rot="0">
+          <a:xfrm>
             <a:off x="460334" y="5303959"/>
             <a:ext cx="1896941" cy="1896941"/>
           </a:xfrm>
@@ -8934,9 +9496,9 @@
             <a:gdLst/>
             <a:ahLst/>
             <a:cxnLst/>
-            <a:rect r="r" b="b" t="t" l="l"/>
+            <a:rect l="l" t="t" r="r" b="b"/>
             <a:pathLst>
-              <a:path h="1896941" w="1896941">
+              <a:path w="1896941" h="1896941">
                 <a:moveTo>
                   <a:pt x="0" y="0"/>
                 </a:moveTo>
@@ -8959,19 +9521,26 @@
           <a:blipFill>
             <a:blip r:embed="rId2"/>
             <a:stretch>
-              <a:fillRect l="0" t="0" r="0" b="0"/>
+              <a:fillRect/>
             </a:stretch>
           </a:blipFill>
         </p:spPr>
+        <p:txBody>
+          <a:bodyPr/>
+          <a:lstStyle/>
+          <a:p>
+            <a:endParaRPr lang="es-ES"/>
+          </a:p>
+        </p:txBody>
       </p:sp>
       <p:grpSp>
         <p:nvGrpSpPr>
-          <p:cNvPr name="Group 18" id="18"/>
+          <p:cNvPr id="18" name="Group 18"/>
           <p:cNvGrpSpPr/>
           <p:nvPr/>
         </p:nvGrpSpPr>
         <p:grpSpPr>
-          <a:xfrm rot="0">
+          <a:xfrm>
             <a:off x="6540893" y="5143500"/>
             <a:ext cx="5665497" cy="4114800"/>
             <a:chOff x="0" y="0"/>
@@ -8980,12 +9549,12 @@
         </p:grpSpPr>
         <p:sp>
           <p:nvSpPr>
-            <p:cNvPr name="Freeform 19" id="19"/>
+            <p:cNvPr id="19" name="Freeform 19"/>
             <p:cNvSpPr/>
             <p:nvPr/>
           </p:nvSpPr>
           <p:spPr>
-            <a:xfrm flipH="false" flipV="false" rot="0">
+            <a:xfrm>
               <a:off x="0" y="0"/>
               <a:ext cx="1317287" cy="956734"/>
             </a:xfrm>
@@ -8994,9 +9563,9 @@
               <a:gdLst/>
               <a:ahLst/>
               <a:cxnLst/>
-              <a:rect r="r" b="b" t="t" l="l"/>
+              <a:rect l="l" t="t" r="r" b="b"/>
               <a:pathLst>
-                <a:path h="956734" w="1317287">
+                <a:path w="1317287" h="956734">
                   <a:moveTo>
                     <a:pt x="0" y="0"/>
                   </a:moveTo>
@@ -9017,11 +9586,18 @@
               <a:srgbClr val="FFFFFF"/>
             </a:solidFill>
           </p:spPr>
+          <p:txBody>
+            <a:bodyPr/>
+            <a:lstStyle/>
+            <a:p>
+              <a:endParaRPr lang="es-ES"/>
+            </a:p>
+          </p:txBody>
         </p:sp>
         <p:sp>
           <p:nvSpPr>
-            <p:cNvPr name="TextBox 20" id="20"/>
-            <p:cNvSpPr txBox="true"/>
+            <p:cNvPr id="20" name="TextBox 20"/>
+            <p:cNvSpPr txBox="1"/>
             <p:nvPr/>
           </p:nvSpPr>
           <p:spPr>
@@ -9034,10 +9610,10 @@
             </a:prstGeom>
           </p:spPr>
           <p:txBody>
-            <a:bodyPr anchor="t" rtlCol="false" tIns="50800" lIns="50800" bIns="50800" rIns="50800"/>
+            <a:bodyPr lIns="50800" tIns="50800" rIns="50800" bIns="50800" rtlCol="0" anchor="t"/>
             <a:lstStyle/>
             <a:p>
-              <a:pPr algn="ctr" marL="0" indent="0" lvl="0">
+              <a:pPr marL="0" lvl="0" indent="0" algn="ctr">
                 <a:lnSpc>
                   <a:spcPts val="4114"/>
                 </a:lnSpc>
@@ -9045,18 +9621,19 @@
                   <a:spcPct val="0"/>
                 </a:spcBef>
               </a:pPr>
+              <a:endParaRPr/>
             </a:p>
           </p:txBody>
         </p:sp>
       </p:grpSp>
       <p:sp>
         <p:nvSpPr>
-          <p:cNvPr name="Freeform 21" id="21"/>
+          <p:cNvPr id="21" name="Freeform 21"/>
           <p:cNvSpPr/>
           <p:nvPr/>
         </p:nvSpPr>
         <p:spPr>
-          <a:xfrm flipH="false" flipV="false" rot="0">
+          <a:xfrm>
             <a:off x="7152242" y="6132173"/>
             <a:ext cx="2071830" cy="2137454"/>
           </a:xfrm>
@@ -9065,9 +9642,9 @@
             <a:gdLst/>
             <a:ahLst/>
             <a:cxnLst/>
-            <a:rect r="r" b="b" t="t" l="l"/>
+            <a:rect l="l" t="t" r="r" b="b"/>
             <a:pathLst>
-              <a:path h="2137454" w="2071830">
+              <a:path w="2071830" h="2137454">
                 <a:moveTo>
                   <a:pt x="0" y="0"/>
                 </a:moveTo>
@@ -9090,19 +9667,26 @@
           <a:blipFill>
             <a:blip r:embed="rId3"/>
             <a:stretch>
-              <a:fillRect l="0" t="0" r="0" b="0"/>
+              <a:fillRect/>
             </a:stretch>
           </a:blipFill>
         </p:spPr>
-      </p:sp>
-      <p:sp>
-        <p:nvSpPr>
-          <p:cNvPr name="Freeform 22" id="22"/>
+        <p:txBody>
+          <a:bodyPr/>
+          <a:lstStyle/>
+          <a:p>
+            <a:endParaRPr lang="es-ES"/>
+          </a:p>
+        </p:txBody>
+      </p:sp>
+      <p:sp>
+        <p:nvSpPr>
+          <p:cNvPr id="22" name="Freeform 22"/>
           <p:cNvSpPr/>
           <p:nvPr/>
         </p:nvSpPr>
         <p:spPr>
-          <a:xfrm flipH="false" flipV="false" rot="0">
+          <a:xfrm>
             <a:off x="9538397" y="5969473"/>
             <a:ext cx="2300154" cy="2300154"/>
           </a:xfrm>
@@ -9111,9 +9695,9 @@
             <a:gdLst/>
             <a:ahLst/>
             <a:cxnLst/>
-            <a:rect r="r" b="b" t="t" l="l"/>
+            <a:rect l="l" t="t" r="r" b="b"/>
             <a:pathLst>
-              <a:path h="2300154" w="2300154">
+              <a:path w="2300154" h="2300154">
                 <a:moveTo>
                   <a:pt x="0" y="0"/>
                 </a:moveTo>
@@ -9136,19 +9720,26 @@
           <a:blipFill>
             <a:blip r:embed="rId4"/>
             <a:stretch>
-              <a:fillRect l="0" t="0" r="0" b="0"/>
+              <a:fillRect/>
             </a:stretch>
           </a:blipFill>
         </p:spPr>
+        <p:txBody>
+          <a:bodyPr/>
+          <a:lstStyle/>
+          <a:p>
+            <a:endParaRPr lang="es-ES"/>
+          </a:p>
+        </p:txBody>
       </p:sp>
       <p:grpSp>
         <p:nvGrpSpPr>
-          <p:cNvPr name="Group 23" id="23"/>
+          <p:cNvPr id="23" name="Group 23"/>
           <p:cNvGrpSpPr/>
           <p:nvPr/>
         </p:nvGrpSpPr>
         <p:grpSpPr>
-          <a:xfrm rot="0">
+          <a:xfrm>
             <a:off x="13147110" y="5062150"/>
             <a:ext cx="4778411" cy="4114800"/>
             <a:chOff x="0" y="0"/>
@@ -9157,12 +9748,12 @@
         </p:grpSpPr>
         <p:sp>
           <p:nvSpPr>
-            <p:cNvPr name="Freeform 24" id="24"/>
+            <p:cNvPr id="24" name="Freeform 24"/>
             <p:cNvSpPr/>
             <p:nvPr/>
           </p:nvSpPr>
           <p:spPr>
-            <a:xfrm flipH="false" flipV="false" rot="0">
+            <a:xfrm>
               <a:off x="0" y="0"/>
               <a:ext cx="1111030" cy="956734"/>
             </a:xfrm>
@@ -9171,9 +9762,9 @@
               <a:gdLst/>
               <a:ahLst/>
               <a:cxnLst/>
-              <a:rect r="r" b="b" t="t" l="l"/>
+              <a:rect l="l" t="t" r="r" b="b"/>
               <a:pathLst>
-                <a:path h="956734" w="1111030">
+                <a:path w="1111030" h="956734">
                   <a:moveTo>
                     <a:pt x="0" y="0"/>
                   </a:moveTo>
@@ -9194,11 +9785,18 @@
               <a:srgbClr val="FFFFFF"/>
             </a:solidFill>
           </p:spPr>
+          <p:txBody>
+            <a:bodyPr/>
+            <a:lstStyle/>
+            <a:p>
+              <a:endParaRPr lang="es-ES"/>
+            </a:p>
+          </p:txBody>
         </p:sp>
         <p:sp>
           <p:nvSpPr>
-            <p:cNvPr name="TextBox 25" id="25"/>
-            <p:cNvSpPr txBox="true"/>
+            <p:cNvPr id="25" name="TextBox 25"/>
+            <p:cNvSpPr txBox="1"/>
             <p:nvPr/>
           </p:nvSpPr>
           <p:spPr>
@@ -9211,10 +9809,10 @@
             </a:prstGeom>
           </p:spPr>
           <p:txBody>
-            <a:bodyPr anchor="t" rtlCol="false" tIns="50800" lIns="50800" bIns="50800" rIns="50800"/>
+            <a:bodyPr lIns="50800" tIns="50800" rIns="50800" bIns="50800" rtlCol="0" anchor="t"/>
             <a:lstStyle/>
             <a:p>
-              <a:pPr algn="ctr" marL="0" indent="0" lvl="0">
+              <a:pPr marL="0" lvl="0" indent="0" algn="ctr">
                 <a:lnSpc>
                   <a:spcPts val="4114"/>
                 </a:lnSpc>
@@ -9222,18 +9820,19 @@
                   <a:spcPct val="0"/>
                 </a:spcBef>
               </a:pPr>
+              <a:endParaRPr/>
             </a:p>
           </p:txBody>
         </p:sp>
       </p:grpSp>
       <p:sp>
         <p:nvSpPr>
-          <p:cNvPr name="Freeform 26" id="26"/>
+          <p:cNvPr id="26" name="Freeform 26"/>
           <p:cNvSpPr/>
           <p:nvPr/>
         </p:nvSpPr>
         <p:spPr>
-          <a:xfrm flipH="false" flipV="false" rot="0">
+          <a:xfrm>
             <a:off x="13292160" y="5317149"/>
             <a:ext cx="4388901" cy="1623893"/>
           </a:xfrm>
@@ -9242,9 +9841,9 @@
             <a:gdLst/>
             <a:ahLst/>
             <a:cxnLst/>
-            <a:rect r="r" b="b" t="t" l="l"/>
+            <a:rect l="l" t="t" r="r" b="b"/>
             <a:pathLst>
-              <a:path h="1623893" w="4388901">
+              <a:path w="4388901" h="1623893">
                 <a:moveTo>
                   <a:pt x="0" y="0"/>
                 </a:moveTo>
@@ -9267,19 +9866,26 @@
           <a:blipFill>
             <a:blip r:embed="rId5"/>
             <a:stretch>
-              <a:fillRect l="0" t="0" r="0" b="0"/>
+              <a:fillRect/>
             </a:stretch>
           </a:blipFill>
         </p:spPr>
-      </p:sp>
-      <p:sp>
-        <p:nvSpPr>
-          <p:cNvPr name="Freeform 27" id="27"/>
+        <p:txBody>
+          <a:bodyPr/>
+          <a:lstStyle/>
+          <a:p>
+            <a:endParaRPr lang="es-ES"/>
+          </a:p>
+        </p:txBody>
+      </p:sp>
+      <p:sp>
+        <p:nvSpPr>
+          <p:cNvPr id="27" name="Freeform 27"/>
           <p:cNvSpPr/>
           <p:nvPr/>
         </p:nvSpPr>
         <p:spPr>
-          <a:xfrm flipH="false" flipV="false" rot="0">
+          <a:xfrm>
             <a:off x="13568872" y="7220355"/>
             <a:ext cx="4112190" cy="1956595"/>
           </a:xfrm>
@@ -9288,9 +9894,9 @@
             <a:gdLst/>
             <a:ahLst/>
             <a:cxnLst/>
-            <a:rect r="r" b="b" t="t" l="l"/>
+            <a:rect l="l" t="t" r="r" b="b"/>
             <a:pathLst>
-              <a:path h="1956595" w="4112190">
+              <a:path w="4112190" h="1956595">
                 <a:moveTo>
                   <a:pt x="0" y="0"/>
                 </a:moveTo>
@@ -9313,19 +9919,26 @@
           <a:blipFill>
             <a:blip r:embed="rId6"/>
             <a:stretch>
-              <a:fillRect l="0" t="-18339" r="0" b="0"/>
+              <a:fillRect t="-18339"/>
             </a:stretch>
           </a:blipFill>
         </p:spPr>
-      </p:sp>
-      <p:sp>
-        <p:nvSpPr>
-          <p:cNvPr name="Freeform 28" id="28"/>
+        <p:txBody>
+          <a:bodyPr/>
+          <a:lstStyle/>
+          <a:p>
+            <a:endParaRPr lang="es-ES"/>
+          </a:p>
+        </p:txBody>
+      </p:sp>
+      <p:sp>
+        <p:nvSpPr>
+          <p:cNvPr id="28" name="Freeform 28"/>
           <p:cNvSpPr/>
           <p:nvPr/>
         </p:nvSpPr>
         <p:spPr>
-          <a:xfrm flipH="false" flipV="false" rot="0">
+          <a:xfrm>
             <a:off x="721964" y="7609486"/>
             <a:ext cx="2156896" cy="1320282"/>
           </a:xfrm>
@@ -9334,9 +9947,9 @@
             <a:gdLst/>
             <a:ahLst/>
             <a:cxnLst/>
-            <a:rect r="r" b="b" t="t" l="l"/>
+            <a:rect l="l" t="t" r="r" b="b"/>
             <a:pathLst>
-              <a:path h="1320282" w="2156896">
+              <a:path w="2156896" h="1320282">
                 <a:moveTo>
                   <a:pt x="0" y="0"/>
                 </a:moveTo>
@@ -9359,19 +9972,26 @@
           <a:blipFill>
             <a:blip r:embed="rId7"/>
             <a:stretch>
-              <a:fillRect l="0" t="0" r="0" b="0"/>
+              <a:fillRect/>
             </a:stretch>
           </a:blipFill>
         </p:spPr>
-      </p:sp>
-      <p:sp>
-        <p:nvSpPr>
-          <p:cNvPr name="Freeform 29" id="29"/>
+        <p:txBody>
+          <a:bodyPr/>
+          <a:lstStyle/>
+          <a:p>
+            <a:endParaRPr lang="es-ES"/>
+          </a:p>
+        </p:txBody>
+      </p:sp>
+      <p:sp>
+        <p:nvSpPr>
+          <p:cNvPr id="29" name="Freeform 29"/>
           <p:cNvSpPr/>
           <p:nvPr/>
         </p:nvSpPr>
         <p:spPr>
-          <a:xfrm flipH="false" flipV="false" rot="0">
+          <a:xfrm>
             <a:off x="3196508" y="5756930"/>
             <a:ext cx="1660848" cy="1660848"/>
           </a:xfrm>
@@ -9380,9 +10000,9 @@
             <a:gdLst/>
             <a:ahLst/>
             <a:cxnLst/>
-            <a:rect r="r" b="b" t="t" l="l"/>
+            <a:rect l="l" t="t" r="r" b="b"/>
             <a:pathLst>
-              <a:path h="1660848" w="1660848">
+              <a:path w="1660848" h="1660848">
                 <a:moveTo>
                   <a:pt x="0" y="0"/>
                 </a:moveTo>
@@ -9405,19 +10025,26 @@
           <a:blipFill>
             <a:blip r:embed="rId8"/>
             <a:stretch>
-              <a:fillRect l="0" t="0" r="0" b="0"/>
+              <a:fillRect/>
             </a:stretch>
           </a:blipFill>
         </p:spPr>
+        <p:txBody>
+          <a:bodyPr/>
+          <a:lstStyle/>
+          <a:p>
+            <a:endParaRPr lang="es-ES"/>
+          </a:p>
+        </p:txBody>
       </p:sp>
       <p:grpSp>
         <p:nvGrpSpPr>
-          <p:cNvPr name="Group 30" id="30"/>
+          <p:cNvPr id="30" name="Group 30"/>
           <p:cNvGrpSpPr/>
           <p:nvPr/>
         </p:nvGrpSpPr>
         <p:grpSpPr>
-          <a:xfrm rot="0">
+          <a:xfrm>
             <a:off x="5500146" y="6661244"/>
             <a:ext cx="869445" cy="539656"/>
             <a:chOff x="0" y="0"/>
@@ -9426,12 +10053,12 @@
         </p:grpSpPr>
         <p:sp>
           <p:nvSpPr>
-            <p:cNvPr name="Freeform 31" id="31"/>
+            <p:cNvPr id="31" name="Freeform 31"/>
             <p:cNvSpPr/>
             <p:nvPr/>
           </p:nvSpPr>
           <p:spPr>
-            <a:xfrm flipH="false" flipV="false" rot="0">
+            <a:xfrm>
               <a:off x="0" y="0"/>
               <a:ext cx="736600" cy="457200"/>
             </a:xfrm>
@@ -9440,9 +10067,9 @@
               <a:gdLst/>
               <a:ahLst/>
               <a:cxnLst/>
-              <a:rect r="r" b="b" t="t" l="l"/>
+              <a:rect l="l" t="t" r="r" b="b"/>
               <a:pathLst>
-                <a:path h="457200" w="736600">
+                <a:path w="736600" h="457200">
                   <a:moveTo>
                     <a:pt x="736600" y="228606"/>
                   </a:moveTo>
@@ -9484,11 +10111,18 @@
               <a:srgbClr val="93D14B"/>
             </a:solidFill>
           </p:spPr>
+          <p:txBody>
+            <a:bodyPr/>
+            <a:lstStyle/>
+            <a:p>
+              <a:endParaRPr lang="es-ES"/>
+            </a:p>
+          </p:txBody>
         </p:sp>
         <p:sp>
           <p:nvSpPr>
-            <p:cNvPr name="TextBox 32" id="32"/>
-            <p:cNvSpPr txBox="true"/>
+            <p:cNvPr id="32" name="TextBox 32"/>
+            <p:cNvSpPr txBox="1"/>
             <p:nvPr/>
           </p:nvSpPr>
           <p:spPr>
@@ -9501,7 +10135,7 @@
             </a:prstGeom>
           </p:spPr>
           <p:txBody>
-            <a:bodyPr anchor="ctr" rtlCol="false" tIns="50800" lIns="50800" bIns="50800" rIns="50800"/>
+            <a:bodyPr lIns="50800" tIns="50800" rIns="50800" bIns="50800" rtlCol="0" anchor="ctr"/>
             <a:lstStyle/>
             <a:p>
               <a:pPr algn="ctr">
@@ -9509,13 +10143,14 @@
                   <a:spcPts val="2859"/>
                 </a:lnSpc>
               </a:pPr>
+              <a:endParaRPr/>
             </a:p>
           </p:txBody>
         </p:sp>
       </p:grpSp>
       <p:grpSp>
         <p:nvGrpSpPr>
-          <p:cNvPr name="Group 33" id="33"/>
+          <p:cNvPr id="33" name="Group 33"/>
           <p:cNvGrpSpPr/>
           <p:nvPr/>
         </p:nvGrpSpPr>
@@ -9529,12 +10164,12 @@
         </p:grpSpPr>
         <p:sp>
           <p:nvSpPr>
-            <p:cNvPr name="Freeform 34" id="34"/>
+            <p:cNvPr id="34" name="Freeform 34"/>
             <p:cNvSpPr/>
             <p:nvPr/>
           </p:nvSpPr>
           <p:spPr>
-            <a:xfrm flipH="false" flipV="false" rot="0">
+            <a:xfrm>
               <a:off x="0" y="0"/>
               <a:ext cx="647700" cy="533400"/>
             </a:xfrm>
@@ -9543,9 +10178,9 @@
               <a:gdLst/>
               <a:ahLst/>
               <a:cxnLst/>
-              <a:rect r="r" b="b" t="t" l="l"/>
+              <a:rect l="l" t="t" r="r" b="b"/>
               <a:pathLst>
-                <a:path h="533400" w="647700">
+                <a:path w="647700" h="533400">
                   <a:moveTo>
                     <a:pt x="239386" y="166418"/>
                   </a:moveTo>
@@ -9578,11 +10213,18 @@
               <a:srgbClr val="93D14B"/>
             </a:solidFill>
           </p:spPr>
+          <p:txBody>
+            <a:bodyPr/>
+            <a:lstStyle/>
+            <a:p>
+              <a:endParaRPr lang="es-ES"/>
+            </a:p>
+          </p:txBody>
         </p:sp>
         <p:sp>
           <p:nvSpPr>
-            <p:cNvPr name="TextBox 35" id="35"/>
-            <p:cNvSpPr txBox="true"/>
+            <p:cNvPr id="35" name="TextBox 35"/>
+            <p:cNvSpPr txBox="1"/>
             <p:nvPr/>
           </p:nvSpPr>
           <p:spPr>
@@ -9595,7 +10237,7 @@
             </a:prstGeom>
           </p:spPr>
           <p:txBody>
-            <a:bodyPr anchor="ctr" rtlCol="false" tIns="50800" lIns="50800" bIns="50800" rIns="50800"/>
+            <a:bodyPr lIns="50800" tIns="50800" rIns="50800" bIns="50800" rtlCol="0" anchor="ctr"/>
             <a:lstStyle/>
             <a:p>
               <a:pPr algn="ctr">
@@ -9603,18 +10245,19 @@
                   <a:spcPts val="2859"/>
                 </a:lnSpc>
               </a:pPr>
+              <a:endParaRPr/>
             </a:p>
           </p:txBody>
         </p:sp>
       </p:grpSp>
       <p:sp>
         <p:nvSpPr>
-          <p:cNvPr name="TextBox 36" id="36"/>
-          <p:cNvSpPr txBox="true"/>
+          <p:cNvPr id="36" name="TextBox 36"/>
+          <p:cNvSpPr txBox="1"/>
           <p:nvPr/>
         </p:nvSpPr>
         <p:spPr>
-          <a:xfrm rot="0">
+          <a:xfrm>
             <a:off x="1587589" y="1117644"/>
             <a:ext cx="10250962" cy="796391"/>
           </a:xfrm>
@@ -9623,12 +10266,12 @@
           </a:prstGeom>
         </p:spPr>
         <p:txBody>
-          <a:bodyPr anchor="t" rtlCol="false" tIns="0" lIns="0" bIns="0" rIns="0">
+          <a:bodyPr lIns="0" tIns="0" rIns="0" bIns="0" rtlCol="0" anchor="t">
             <a:spAutoFit/>
           </a:bodyPr>
           <a:lstStyle/>
           <a:p>
-            <a:pPr algn="ctr" marL="0" indent="0" lvl="0">
+            <a:pPr marL="0" lvl="0" indent="0" algn="ctr">
               <a:lnSpc>
                 <a:spcPts val="6548"/>
               </a:lnSpc>
@@ -9653,12 +10296,12 @@
       </p:sp>
       <p:sp>
         <p:nvSpPr>
-          <p:cNvPr name="TextBox 37" id="37"/>
-          <p:cNvSpPr txBox="true"/>
+          <p:cNvPr id="37" name="TextBox 37"/>
+          <p:cNvSpPr txBox="1"/>
           <p:nvPr/>
         </p:nvSpPr>
         <p:spPr>
-          <a:xfrm rot="0">
+          <a:xfrm>
             <a:off x="12227072" y="6376255"/>
             <a:ext cx="899357" cy="272198"/>
           </a:xfrm>
@@ -9667,7 +10310,7 @@
           </a:prstGeom>
         </p:spPr>
         <p:txBody>
-          <a:bodyPr anchor="t" rtlCol="false" tIns="0" lIns="0" bIns="0" rIns="0">
+          <a:bodyPr lIns="0" tIns="0" rIns="0" bIns="0" rtlCol="0" anchor="t">
             <a:spAutoFit/>
           </a:bodyPr>
           <a:lstStyle/>
@@ -9678,7 +10321,7 @@
               </a:lnSpc>
             </a:pPr>
             <a:r>
-              <a:rPr lang="en-US" b="true" sz="738">
+              <a:rPr lang="en-US" sz="738" b="1">
                 <a:solidFill>
                   <a:srgbClr val="93D14B"/>
                 </a:solidFill>
@@ -9694,12 +10337,12 @@
       </p:sp>
       <p:sp>
         <p:nvSpPr>
-          <p:cNvPr name="TextBox 38" id="38"/>
-          <p:cNvSpPr txBox="true"/>
+          <p:cNvPr id="38" name="TextBox 38"/>
+          <p:cNvSpPr txBox="1"/>
           <p:nvPr/>
         </p:nvSpPr>
         <p:spPr>
-          <a:xfrm rot="0">
+          <a:xfrm>
             <a:off x="5485190" y="6376255"/>
             <a:ext cx="899357" cy="272198"/>
           </a:xfrm>
@@ -9708,7 +10351,7 @@
           </a:prstGeom>
         </p:spPr>
         <p:txBody>
-          <a:bodyPr anchor="t" rtlCol="false" tIns="0" lIns="0" bIns="0" rIns="0">
+          <a:bodyPr lIns="0" tIns="0" rIns="0" bIns="0" rtlCol="0" anchor="t">
             <a:spAutoFit/>
           </a:bodyPr>
           <a:lstStyle/>
@@ -9719,7 +10362,7 @@
               </a:lnSpc>
             </a:pPr>
             <a:r>
-              <a:rPr lang="en-US" b="true" sz="738">
+              <a:rPr lang="en-US" sz="738" b="1">
                 <a:solidFill>
                   <a:srgbClr val="93D14B"/>
                 </a:solidFill>
@@ -9735,12 +10378,12 @@
       </p:sp>
       <p:sp>
         <p:nvSpPr>
-          <p:cNvPr name="TextBox 39" id="39"/>
-          <p:cNvSpPr txBox="true"/>
+          <p:cNvPr id="39" name="TextBox 39"/>
+          <p:cNvSpPr txBox="1"/>
           <p:nvPr/>
         </p:nvSpPr>
         <p:spPr>
-          <a:xfrm rot="0">
+          <a:xfrm>
             <a:off x="17535126" y="9399905"/>
             <a:ext cx="752874" cy="887095"/>
           </a:xfrm>
@@ -9749,7 +10392,7 @@
           </a:prstGeom>
         </p:spPr>
         <p:txBody>
-          <a:bodyPr anchor="t" rtlCol="false" tIns="0" lIns="0" bIns="0" rIns="0">
+          <a:bodyPr lIns="0" tIns="0" rIns="0" bIns="0" rtlCol="0" anchor="t">
             <a:spAutoFit/>
           </a:bodyPr>
           <a:lstStyle/>
@@ -9760,7 +10403,7 @@
               </a:lnSpc>
             </a:pPr>
             <a:r>
-              <a:rPr lang="en-US" b="true" sz="5199">
+              <a:rPr lang="en-US" sz="5199" b="1">
                 <a:solidFill>
                   <a:srgbClr val="93D14B"/>
                 </a:solidFill>
@@ -9783,13 +10426,14 @@
 </file>
 
 <file path=ppt/slides/slide8.xml><?xml version="1.0" encoding="utf-8"?>
-<p:sld xmlns:p="http://schemas.openxmlformats.org/presentationml/2006/main" xmlns:a="http://schemas.openxmlformats.org/drawingml/2006/main" xmlns:r="http://schemas.openxmlformats.org/officeDocument/2006/relationships">
+<p:sld xmlns:a="http://schemas.openxmlformats.org/drawingml/2006/main" xmlns:r="http://schemas.openxmlformats.org/officeDocument/2006/relationships" xmlns:p="http://schemas.openxmlformats.org/presentationml/2006/main">
   <p:cSld>
     <p:bg>
       <p:bgPr>
         <a:solidFill>
           <a:srgbClr val="344F51"/>
         </a:solidFill>
+        <a:effectLst/>
       </p:bgPr>
     </p:bg>
     <p:spTree>
@@ -9808,12 +10452,12 @@
       </p:grpSpPr>
       <p:grpSp>
         <p:nvGrpSpPr>
-          <p:cNvPr name="Group 2" id="2"/>
+          <p:cNvPr id="2" name="Group 2"/>
           <p:cNvGrpSpPr/>
           <p:nvPr/>
         </p:nvGrpSpPr>
         <p:grpSpPr>
-          <a:xfrm rot="0">
+          <a:xfrm>
             <a:off x="-5113308" y="628226"/>
             <a:ext cx="19354610" cy="2018746"/>
             <a:chOff x="0" y="0"/>
@@ -9822,12 +10466,12 @@
         </p:grpSpPr>
         <p:sp>
           <p:nvSpPr>
-            <p:cNvPr name="Freeform 3" id="3"/>
+            <p:cNvPr id="3" name="Freeform 3"/>
             <p:cNvSpPr/>
             <p:nvPr/>
           </p:nvSpPr>
           <p:spPr>
-            <a:xfrm flipH="false" flipV="false" rot="0">
+            <a:xfrm>
               <a:off x="0" y="0"/>
               <a:ext cx="1876002" cy="195673"/>
             </a:xfrm>
@@ -9836,9 +10480,9 @@
               <a:gdLst/>
               <a:ahLst/>
               <a:cxnLst/>
-              <a:rect r="r" b="b" t="t" l="l"/>
+              <a:rect l="l" t="t" r="r" b="b"/>
               <a:pathLst>
-                <a:path h="195673" w="1876002">
+                <a:path w="1876002" h="195673">
                   <a:moveTo>
                     <a:pt x="1672802" y="0"/>
                   </a:moveTo>
@@ -9867,11 +10511,18 @@
               <a:miter/>
             </a:ln>
           </p:spPr>
+          <p:txBody>
+            <a:bodyPr/>
+            <a:lstStyle/>
+            <a:p>
+              <a:endParaRPr lang="es-ES"/>
+            </a:p>
+          </p:txBody>
         </p:sp>
         <p:sp>
           <p:nvSpPr>
-            <p:cNvPr name="TextBox 4" id="4"/>
-            <p:cNvSpPr txBox="true"/>
+            <p:cNvPr id="4" name="TextBox 4"/>
+            <p:cNvSpPr txBox="1"/>
             <p:nvPr/>
           </p:nvSpPr>
           <p:spPr>
@@ -9884,10 +10535,10 @@
             </a:prstGeom>
           </p:spPr>
           <p:txBody>
-            <a:bodyPr anchor="ctr" rtlCol="false" tIns="50800" lIns="50800" bIns="50800" rIns="50800"/>
+            <a:bodyPr lIns="50800" tIns="50800" rIns="50800" bIns="50800" rtlCol="0" anchor="ctr"/>
             <a:lstStyle/>
             <a:p>
-              <a:pPr algn="ctr" marL="0" indent="0" lvl="0">
+              <a:pPr marL="0" lvl="0" indent="0" algn="ctr">
                 <a:lnSpc>
                   <a:spcPts val="2859"/>
                 </a:lnSpc>
@@ -9895,18 +10546,19 @@
                   <a:spcPct val="0"/>
                 </a:spcBef>
               </a:pPr>
+              <a:endParaRPr/>
             </a:p>
           </p:txBody>
         </p:sp>
       </p:grpSp>
       <p:grpSp>
         <p:nvGrpSpPr>
-          <p:cNvPr name="Group 5" id="5"/>
+          <p:cNvPr id="5" name="Group 5"/>
           <p:cNvGrpSpPr/>
           <p:nvPr/>
         </p:nvGrpSpPr>
         <p:grpSpPr>
-          <a:xfrm rot="0">
+          <a:xfrm>
             <a:off x="548207" y="3230295"/>
             <a:ext cx="4068484" cy="1325286"/>
             <a:chOff x="0" y="0"/>
@@ -9915,12 +10567,12 @@
         </p:grpSpPr>
         <p:sp>
           <p:nvSpPr>
-            <p:cNvPr name="Freeform 6" id="6"/>
+            <p:cNvPr id="6" name="Freeform 6"/>
             <p:cNvSpPr/>
             <p:nvPr/>
           </p:nvSpPr>
           <p:spPr>
-            <a:xfrm flipH="false" flipV="false" rot="0">
+            <a:xfrm>
               <a:off x="0" y="0"/>
               <a:ext cx="945965" cy="308143"/>
             </a:xfrm>
@@ -9929,9 +10581,9 @@
               <a:gdLst/>
               <a:ahLst/>
               <a:cxnLst/>
-              <a:rect r="r" b="b" t="t" l="l"/>
+              <a:rect l="l" t="t" r="r" b="b"/>
               <a:pathLst>
-                <a:path h="308143" w="945965">
+                <a:path w="945965" h="308143">
                   <a:moveTo>
                     <a:pt x="0" y="0"/>
                   </a:moveTo>
@@ -9952,27 +10604,34 @@
               <a:srgbClr val="93D14B"/>
             </a:solidFill>
           </p:spPr>
+          <p:txBody>
+            <a:bodyPr/>
+            <a:lstStyle/>
+            <a:p>
+              <a:endParaRPr lang="es-ES"/>
+            </a:p>
+          </p:txBody>
         </p:sp>
         <p:sp>
           <p:nvSpPr>
-            <p:cNvPr name="TextBox 7" id="7"/>
-            <p:cNvSpPr txBox="true"/>
+            <p:cNvPr id="7" name="TextBox 7"/>
+            <p:cNvSpPr txBox="1"/>
             <p:nvPr/>
           </p:nvSpPr>
           <p:spPr>
             <a:xfrm>
-              <a:off x="0" y="-76200"/>
-              <a:ext cx="945965" cy="384343"/>
+              <a:off x="0" y="0"/>
+              <a:ext cx="945965" cy="308143"/>
             </a:xfrm>
             <a:prstGeom prst="rect">
               <a:avLst/>
             </a:prstGeom>
           </p:spPr>
           <p:txBody>
-            <a:bodyPr anchor="t" rtlCol="false" tIns="50800" lIns="50800" bIns="50800" rIns="50800"/>
+            <a:bodyPr lIns="50800" tIns="50800" rIns="50800" bIns="50800" rtlCol="0" anchor="t"/>
             <a:lstStyle/>
             <a:p>
-              <a:pPr algn="ctr" marL="0" indent="0" lvl="0">
+              <a:pPr marL="0" lvl="0" indent="0" algn="ctr">
                 <a:lnSpc>
                   <a:spcPts val="4114"/>
                 </a:lnSpc>
@@ -9981,7 +10640,7 @@
                 </a:spcBef>
               </a:pPr>
               <a:r>
-                <a:rPr lang="en-US" b="true" sz="2981" spc="29">
+                <a:rPr lang="en-US" sz="2981" b="1" spc="29" dirty="0" err="1">
                   <a:solidFill>
                     <a:srgbClr val="FFFFFF"/>
                   </a:solidFill>
@@ -9990,7 +10649,19 @@
                   <a:cs typeface="Poppins Bold"/>
                   <a:sym typeface="Poppins Bold"/>
                 </a:rPr>
-                <a:t>Asistente virtual contextual</a:t>
+                <a:t>Asistente</a:t>
+              </a:r>
+              <a:r>
+                <a:rPr lang="en-US" sz="2981" b="1" spc="29" dirty="0">
+                  <a:solidFill>
+                    <a:srgbClr val="FFFFFF"/>
+                  </a:solidFill>
+                  <a:latin typeface="Poppins Bold"/>
+                  <a:ea typeface="Poppins Bold"/>
+                  <a:cs typeface="Poppins Bold"/>
+                  <a:sym typeface="Poppins Bold"/>
+                </a:rPr>
+                <a:t> virtual contextual</a:t>
               </a:r>
             </a:p>
           </p:txBody>
@@ -9998,12 +10669,12 @@
       </p:grpSp>
       <p:grpSp>
         <p:nvGrpSpPr>
-          <p:cNvPr name="Group 8" id="8"/>
+          <p:cNvPr id="8" name="Group 8"/>
           <p:cNvGrpSpPr/>
           <p:nvPr/>
         </p:nvGrpSpPr>
         <p:grpSpPr>
-          <a:xfrm rot="0">
+          <a:xfrm>
             <a:off x="5301385" y="3230295"/>
             <a:ext cx="4695526" cy="1325286"/>
             <a:chOff x="0" y="0"/>
@@ -10012,12 +10683,12 @@
         </p:grpSpPr>
         <p:sp>
           <p:nvSpPr>
-            <p:cNvPr name="Freeform 9" id="9"/>
+            <p:cNvPr id="9" name="Freeform 9"/>
             <p:cNvSpPr/>
             <p:nvPr/>
           </p:nvSpPr>
           <p:spPr>
-            <a:xfrm flipH="false" flipV="false" rot="0">
+            <a:xfrm>
               <a:off x="0" y="0"/>
               <a:ext cx="1091759" cy="308143"/>
             </a:xfrm>
@@ -10026,9 +10697,9 @@
               <a:gdLst/>
               <a:ahLst/>
               <a:cxnLst/>
-              <a:rect r="r" b="b" t="t" l="l"/>
+              <a:rect l="l" t="t" r="r" b="b"/>
               <a:pathLst>
-                <a:path h="308143" w="1091759">
+                <a:path w="1091759" h="308143">
                   <a:moveTo>
                     <a:pt x="0" y="0"/>
                   </a:moveTo>
@@ -10049,27 +10720,34 @@
               <a:srgbClr val="93D14B"/>
             </a:solidFill>
           </p:spPr>
+          <p:txBody>
+            <a:bodyPr/>
+            <a:lstStyle/>
+            <a:p>
+              <a:endParaRPr lang="es-ES"/>
+            </a:p>
+          </p:txBody>
         </p:sp>
         <p:sp>
           <p:nvSpPr>
-            <p:cNvPr name="TextBox 10" id="10"/>
-            <p:cNvSpPr txBox="true"/>
+            <p:cNvPr id="10" name="TextBox 10"/>
+            <p:cNvSpPr txBox="1"/>
             <p:nvPr/>
           </p:nvSpPr>
           <p:spPr>
             <a:xfrm>
-              <a:off x="0" y="-76200"/>
-              <a:ext cx="1091759" cy="384343"/>
+              <a:off x="0" y="0"/>
+              <a:ext cx="1091759" cy="308143"/>
             </a:xfrm>
             <a:prstGeom prst="rect">
               <a:avLst/>
             </a:prstGeom>
           </p:spPr>
           <p:txBody>
-            <a:bodyPr anchor="t" rtlCol="false" tIns="50800" lIns="50800" bIns="50800" rIns="50800"/>
+            <a:bodyPr lIns="50800" tIns="50800" rIns="50800" bIns="50800" rtlCol="0" anchor="t"/>
             <a:lstStyle/>
             <a:p>
-              <a:pPr algn="ctr" marL="0" indent="0" lvl="0">
+              <a:pPr marL="0" lvl="0" indent="0" algn="ctr">
                 <a:lnSpc>
                   <a:spcPts val="4114"/>
                 </a:lnSpc>
@@ -10078,7 +10756,7 @@
                 </a:spcBef>
               </a:pPr>
               <a:r>
-                <a:rPr lang="en-US" b="true" sz="2981" spc="29">
+                <a:rPr lang="en-US" sz="2981" b="1" spc="29" dirty="0" err="1">
                   <a:solidFill>
                     <a:srgbClr val="FFFFFF"/>
                   </a:solidFill>
@@ -10087,7 +10765,67 @@
                   <a:cs typeface="Poppins Bold"/>
                   <a:sym typeface="Poppins Bold"/>
                 </a:rPr>
-                <a:t>Alertas en tiempo real mediante Bot API</a:t>
+                <a:t>Alertas</a:t>
+              </a:r>
+              <a:r>
+                <a:rPr lang="en-US" sz="2981" b="1" spc="29" dirty="0">
+                  <a:solidFill>
+                    <a:srgbClr val="FFFFFF"/>
+                  </a:solidFill>
+                  <a:latin typeface="Poppins Bold"/>
+                  <a:ea typeface="Poppins Bold"/>
+                  <a:cs typeface="Poppins Bold"/>
+                  <a:sym typeface="Poppins Bold"/>
+                </a:rPr>
+                <a:t> en </a:t>
+              </a:r>
+              <a:r>
+                <a:rPr lang="en-US" sz="2981" b="1" spc="29" dirty="0" err="1">
+                  <a:solidFill>
+                    <a:srgbClr val="FFFFFF"/>
+                  </a:solidFill>
+                  <a:latin typeface="Poppins Bold"/>
+                  <a:ea typeface="Poppins Bold"/>
+                  <a:cs typeface="Poppins Bold"/>
+                  <a:sym typeface="Poppins Bold"/>
+                </a:rPr>
+                <a:t>tiempo</a:t>
+              </a:r>
+              <a:r>
+                <a:rPr lang="en-US" sz="2981" b="1" spc="29" dirty="0">
+                  <a:solidFill>
+                    <a:srgbClr val="FFFFFF"/>
+                  </a:solidFill>
+                  <a:latin typeface="Poppins Bold"/>
+                  <a:ea typeface="Poppins Bold"/>
+                  <a:cs typeface="Poppins Bold"/>
+                  <a:sym typeface="Poppins Bold"/>
+                </a:rPr>
+                <a:t> real </a:t>
+              </a:r>
+              <a:r>
+                <a:rPr lang="en-US" sz="2981" b="1" spc="29" dirty="0" err="1">
+                  <a:solidFill>
+                    <a:srgbClr val="FFFFFF"/>
+                  </a:solidFill>
+                  <a:latin typeface="Poppins Bold"/>
+                  <a:ea typeface="Poppins Bold"/>
+                  <a:cs typeface="Poppins Bold"/>
+                  <a:sym typeface="Poppins Bold"/>
+                </a:rPr>
+                <a:t>mediante</a:t>
+              </a:r>
+              <a:r>
+                <a:rPr lang="en-US" sz="2981" b="1" spc="29" dirty="0">
+                  <a:solidFill>
+                    <a:srgbClr val="FFFFFF"/>
+                  </a:solidFill>
+                  <a:latin typeface="Poppins Bold"/>
+                  <a:ea typeface="Poppins Bold"/>
+                  <a:cs typeface="Poppins Bold"/>
+                  <a:sym typeface="Poppins Bold"/>
+                </a:rPr>
+                <a:t> Bot API</a:t>
               </a:r>
             </a:p>
           </p:txBody>
@@ -10095,26 +10833,26 @@
       </p:grpSp>
       <p:grpSp>
         <p:nvGrpSpPr>
-          <p:cNvPr name="Group 11" id="11"/>
+          <p:cNvPr id="11" name="Group 11"/>
           <p:cNvGrpSpPr/>
           <p:nvPr/>
         </p:nvGrpSpPr>
         <p:grpSpPr>
-          <a:xfrm rot="0">
-            <a:off x="11852097" y="3230295"/>
-            <a:ext cx="4778411" cy="859690"/>
-            <a:chOff x="0" y="0"/>
-            <a:chExt cx="1111030" cy="199887"/>
+          <a:xfrm>
+            <a:off x="11852097" y="3230291"/>
+            <a:ext cx="4778411" cy="859694"/>
+            <a:chOff x="0" y="-1"/>
+            <a:chExt cx="1111030" cy="199888"/>
           </a:xfrm>
         </p:grpSpPr>
         <p:sp>
           <p:nvSpPr>
-            <p:cNvPr name="Freeform 12" id="12"/>
+            <p:cNvPr id="12" name="Freeform 12"/>
             <p:cNvSpPr/>
             <p:nvPr/>
           </p:nvSpPr>
           <p:spPr>
-            <a:xfrm flipH="false" flipV="false" rot="0">
+            <a:xfrm>
               <a:off x="0" y="0"/>
               <a:ext cx="1111030" cy="199887"/>
             </a:xfrm>
@@ -10123,9 +10861,9 @@
               <a:gdLst/>
               <a:ahLst/>
               <a:cxnLst/>
-              <a:rect r="r" b="b" t="t" l="l"/>
+              <a:rect l="l" t="t" r="r" b="b"/>
               <a:pathLst>
-                <a:path h="199887" w="1111030">
+                <a:path w="1111030" h="199887">
                   <a:moveTo>
                     <a:pt x="0" y="0"/>
                   </a:moveTo>
@@ -10146,27 +10884,34 @@
               <a:srgbClr val="93D14B"/>
             </a:solidFill>
           </p:spPr>
+          <p:txBody>
+            <a:bodyPr/>
+            <a:lstStyle/>
+            <a:p>
+              <a:endParaRPr lang="es-ES"/>
+            </a:p>
+          </p:txBody>
         </p:sp>
         <p:sp>
           <p:nvSpPr>
-            <p:cNvPr name="TextBox 13" id="13"/>
-            <p:cNvSpPr txBox="true"/>
+            <p:cNvPr id="13" name="TextBox 13"/>
+            <p:cNvSpPr txBox="1"/>
             <p:nvPr/>
           </p:nvSpPr>
           <p:spPr>
             <a:xfrm>
-              <a:off x="0" y="-76200"/>
-              <a:ext cx="1111030" cy="276087"/>
+              <a:off x="0" y="-1"/>
+              <a:ext cx="1111030" cy="199888"/>
             </a:xfrm>
             <a:prstGeom prst="rect">
               <a:avLst/>
             </a:prstGeom>
           </p:spPr>
           <p:txBody>
-            <a:bodyPr anchor="t" rtlCol="false" tIns="50800" lIns="50800" bIns="50800" rIns="50800"/>
+            <a:bodyPr lIns="50800" tIns="50800" rIns="50800" bIns="50800" rtlCol="0" anchor="t"/>
             <a:lstStyle/>
             <a:p>
-              <a:pPr algn="ctr" marL="0" indent="0" lvl="0">
+              <a:pPr marL="0" lvl="0" indent="0" algn="ctr">
                 <a:lnSpc>
                   <a:spcPts val="4114"/>
                 </a:lnSpc>
@@ -10175,7 +10920,7 @@
                 </a:spcBef>
               </a:pPr>
               <a:r>
-                <a:rPr lang="en-US" b="true" sz="2981" spc="29">
+                <a:rPr lang="en-US" sz="2981" b="1" spc="29" dirty="0">
                   <a:solidFill>
                     <a:srgbClr val="FFFFFF"/>
                   </a:solidFill>
@@ -10184,20 +10929,41 @@
                   <a:cs typeface="Poppins Bold"/>
                   <a:sym typeface="Poppins Bold"/>
                 </a:rPr>
-                <a:t>Seguridad Avanzada</a:t>
+                <a:t>Seguridad </a:t>
               </a:r>
+              <a:r>
+                <a:rPr lang="en-US" sz="2981" b="1" spc="29" dirty="0" err="1">
+                  <a:solidFill>
+                    <a:srgbClr val="FFFFFF"/>
+                  </a:solidFill>
+                  <a:latin typeface="Poppins Bold"/>
+                  <a:ea typeface="Poppins Bold"/>
+                  <a:cs typeface="Poppins Bold"/>
+                  <a:sym typeface="Poppins Bold"/>
+                </a:rPr>
+                <a:t>Avanzada</a:t>
+              </a:r>
+              <a:endParaRPr lang="en-US" sz="2981" b="1" spc="29" dirty="0">
+                <a:solidFill>
+                  <a:srgbClr val="FFFFFF"/>
+                </a:solidFill>
+                <a:latin typeface="Poppins Bold"/>
+                <a:ea typeface="Poppins Bold"/>
+                <a:cs typeface="Poppins Bold"/>
+                <a:sym typeface="Poppins Bold"/>
+              </a:endParaRPr>
             </a:p>
           </p:txBody>
         </p:sp>
       </p:grpSp>
       <p:grpSp>
         <p:nvGrpSpPr>
-          <p:cNvPr name="Group 14" id="14"/>
+          <p:cNvPr id="14" name="Group 14"/>
           <p:cNvGrpSpPr/>
           <p:nvPr/>
         </p:nvGrpSpPr>
         <p:grpSpPr>
-          <a:xfrm rot="0">
+          <a:xfrm>
             <a:off x="227068" y="5143500"/>
             <a:ext cx="4710763" cy="3386070"/>
             <a:chOff x="0" y="0"/>
@@ -10206,12 +10972,12 @@
         </p:grpSpPr>
         <p:sp>
           <p:nvSpPr>
-            <p:cNvPr name="Freeform 15" id="15"/>
+            <p:cNvPr id="15" name="Freeform 15"/>
             <p:cNvSpPr/>
             <p:nvPr/>
           </p:nvSpPr>
           <p:spPr>
-            <a:xfrm flipH="false" flipV="false" rot="0">
+            <a:xfrm>
               <a:off x="0" y="0"/>
               <a:ext cx="1095301" cy="787296"/>
             </a:xfrm>
@@ -10220,9 +10986,9 @@
               <a:gdLst/>
               <a:ahLst/>
               <a:cxnLst/>
-              <a:rect r="r" b="b" t="t" l="l"/>
+              <a:rect l="l" t="t" r="r" b="b"/>
               <a:pathLst>
-                <a:path h="787296" w="1095301">
+                <a:path w="1095301" h="787296">
                   <a:moveTo>
                     <a:pt x="0" y="0"/>
                   </a:moveTo>
@@ -10243,11 +11009,18 @@
               <a:srgbClr val="FFFFFF"/>
             </a:solidFill>
           </p:spPr>
+          <p:txBody>
+            <a:bodyPr/>
+            <a:lstStyle/>
+            <a:p>
+              <a:endParaRPr lang="es-ES"/>
+            </a:p>
+          </p:txBody>
         </p:sp>
         <p:sp>
           <p:nvSpPr>
-            <p:cNvPr name="TextBox 16" id="16"/>
-            <p:cNvSpPr txBox="true"/>
+            <p:cNvPr id="16" name="TextBox 16"/>
+            <p:cNvSpPr txBox="1"/>
             <p:nvPr/>
           </p:nvSpPr>
           <p:spPr>
@@ -10260,10 +11033,10 @@
             </a:prstGeom>
           </p:spPr>
           <p:txBody>
-            <a:bodyPr anchor="t" rtlCol="false" tIns="50800" lIns="50800" bIns="50800" rIns="50800"/>
+            <a:bodyPr lIns="50800" tIns="50800" rIns="50800" bIns="50800" rtlCol="0" anchor="t"/>
             <a:lstStyle/>
             <a:p>
-              <a:pPr algn="ctr" marL="0" indent="0" lvl="0">
+              <a:pPr marL="0" lvl="0" indent="0" algn="ctr">
                 <a:lnSpc>
                   <a:spcPts val="4114"/>
                 </a:lnSpc>
@@ -10271,18 +11044,19 @@
                   <a:spcPct val="0"/>
                 </a:spcBef>
               </a:pPr>
+              <a:endParaRPr/>
             </a:p>
           </p:txBody>
         </p:sp>
       </p:grpSp>
       <p:grpSp>
         <p:nvGrpSpPr>
-          <p:cNvPr name="Group 17" id="17"/>
+          <p:cNvPr id="17" name="Group 17"/>
           <p:cNvGrpSpPr/>
           <p:nvPr/>
         </p:nvGrpSpPr>
         <p:grpSpPr>
-          <a:xfrm rot="0">
+          <a:xfrm>
             <a:off x="5257649" y="5138904"/>
             <a:ext cx="4739262" cy="3390666"/>
             <a:chOff x="0" y="0"/>
@@ -10291,12 +11065,12 @@
         </p:grpSpPr>
         <p:sp>
           <p:nvSpPr>
-            <p:cNvPr name="Freeform 18" id="18"/>
+            <p:cNvPr id="18" name="Freeform 18"/>
             <p:cNvSpPr/>
             <p:nvPr/>
           </p:nvSpPr>
           <p:spPr>
-            <a:xfrm flipH="false" flipV="false" rot="0">
+            <a:xfrm>
               <a:off x="0" y="0"/>
               <a:ext cx="1101928" cy="788365"/>
             </a:xfrm>
@@ -10305,9 +11079,9 @@
               <a:gdLst/>
               <a:ahLst/>
               <a:cxnLst/>
-              <a:rect r="r" b="b" t="t" l="l"/>
+              <a:rect l="l" t="t" r="r" b="b"/>
               <a:pathLst>
-                <a:path h="788365" w="1101928">
+                <a:path w="1101928" h="788365">
                   <a:moveTo>
                     <a:pt x="0" y="0"/>
                   </a:moveTo>
@@ -10328,11 +11102,18 @@
               <a:srgbClr val="FFFFFF"/>
             </a:solidFill>
           </p:spPr>
+          <p:txBody>
+            <a:bodyPr/>
+            <a:lstStyle/>
+            <a:p>
+              <a:endParaRPr lang="es-ES"/>
+            </a:p>
+          </p:txBody>
         </p:sp>
         <p:sp>
           <p:nvSpPr>
-            <p:cNvPr name="TextBox 19" id="19"/>
-            <p:cNvSpPr txBox="true"/>
+            <p:cNvPr id="19" name="TextBox 19"/>
+            <p:cNvSpPr txBox="1"/>
             <p:nvPr/>
           </p:nvSpPr>
           <p:spPr>
@@ -10345,10 +11126,10 @@
             </a:prstGeom>
           </p:spPr>
           <p:txBody>
-            <a:bodyPr anchor="t" rtlCol="false" tIns="50800" lIns="50800" bIns="50800" rIns="50800"/>
+            <a:bodyPr lIns="50800" tIns="50800" rIns="50800" bIns="50800" rtlCol="0" anchor="t"/>
             <a:lstStyle/>
             <a:p>
-              <a:pPr algn="ctr" marL="0" indent="0" lvl="0">
+              <a:pPr marL="0" lvl="0" indent="0" algn="ctr">
                 <a:lnSpc>
                   <a:spcPts val="4114"/>
                 </a:lnSpc>
@@ -10356,32 +11137,33 @@
                   <a:spcPct val="0"/>
                 </a:spcBef>
               </a:pPr>
+              <a:endParaRPr/>
             </a:p>
           </p:txBody>
         </p:sp>
       </p:grpSp>
       <p:grpSp>
         <p:nvGrpSpPr>
-          <p:cNvPr name="Group 20" id="20"/>
+          <p:cNvPr id="20" name="Group 20"/>
           <p:cNvGrpSpPr/>
           <p:nvPr/>
         </p:nvGrpSpPr>
         <p:grpSpPr>
-          <a:xfrm rot="0">
-            <a:off x="10342878" y="4555581"/>
-            <a:ext cx="3600017" cy="909828"/>
-            <a:chOff x="0" y="0"/>
-            <a:chExt cx="837041" cy="211544"/>
+          <a:xfrm>
+            <a:off x="10342878" y="4555577"/>
+            <a:ext cx="3600017" cy="909837"/>
+            <a:chOff x="0" y="-1"/>
+            <a:chExt cx="837041" cy="211546"/>
           </a:xfrm>
         </p:grpSpPr>
         <p:sp>
           <p:nvSpPr>
-            <p:cNvPr name="Freeform 21" id="21"/>
+            <p:cNvPr id="21" name="Freeform 21"/>
             <p:cNvSpPr/>
             <p:nvPr/>
           </p:nvSpPr>
           <p:spPr>
-            <a:xfrm flipH="false" flipV="false" rot="0">
+            <a:xfrm>
               <a:off x="0" y="0"/>
               <a:ext cx="837041" cy="211545"/>
             </a:xfrm>
@@ -10390,9 +11172,9 @@
               <a:gdLst/>
               <a:ahLst/>
               <a:cxnLst/>
-              <a:rect r="r" b="b" t="t" l="l"/>
+              <a:rect l="l" t="t" r="r" b="b"/>
               <a:pathLst>
-                <a:path h="211545" w="837041">
+                <a:path w="837041" h="211545">
                   <a:moveTo>
                     <a:pt x="0" y="0"/>
                   </a:moveTo>
@@ -10413,27 +11195,34 @@
               <a:srgbClr val="93D14B"/>
             </a:solidFill>
           </p:spPr>
+          <p:txBody>
+            <a:bodyPr/>
+            <a:lstStyle/>
+            <a:p>
+              <a:endParaRPr lang="es-ES"/>
+            </a:p>
+          </p:txBody>
         </p:sp>
         <p:sp>
           <p:nvSpPr>
-            <p:cNvPr name="TextBox 22" id="22"/>
-            <p:cNvSpPr txBox="true"/>
+            <p:cNvPr id="22" name="TextBox 22"/>
+            <p:cNvSpPr txBox="1"/>
             <p:nvPr/>
           </p:nvSpPr>
           <p:spPr>
             <a:xfrm>
-              <a:off x="0" y="-57150"/>
-              <a:ext cx="837041" cy="268694"/>
+              <a:off x="0" y="-1"/>
+              <a:ext cx="837041" cy="211545"/>
             </a:xfrm>
             <a:prstGeom prst="rect">
               <a:avLst/>
             </a:prstGeom>
           </p:spPr>
           <p:txBody>
-            <a:bodyPr anchor="t" rtlCol="false" tIns="50800" lIns="50800" bIns="50800" rIns="50800"/>
+            <a:bodyPr lIns="50800" tIns="50800" rIns="50800" bIns="50800" rtlCol="0" anchor="t"/>
             <a:lstStyle/>
             <a:p>
-              <a:pPr algn="ctr" marL="0" indent="0" lvl="0">
+              <a:pPr marL="0" lvl="0" indent="0" algn="ctr">
                 <a:lnSpc>
                   <a:spcPts val="2760"/>
                 </a:lnSpc>
@@ -10442,7 +11231,7 @@
                 </a:spcBef>
               </a:pPr>
               <a:r>
-                <a:rPr lang="en-US" b="true" sz="2000" spc="20">
+                <a:rPr lang="en-US" sz="2000" b="1" spc="20" dirty="0" err="1">
                   <a:solidFill>
                     <a:srgbClr val="FFFFFF"/>
                   </a:solidFill>
@@ -10451,7 +11240,19 @@
                   <a:cs typeface="Poppins Bold"/>
                   <a:sym typeface="Poppins Bold"/>
                 </a:rPr>
-                <a:t>Verificación de Identidad (Proof of Ownership)</a:t>
+                <a:t>Verificación</a:t>
+              </a:r>
+              <a:r>
+                <a:rPr lang="en-US" sz="2000" b="1" spc="20" dirty="0">
+                  <a:solidFill>
+                    <a:srgbClr val="FFFFFF"/>
+                  </a:solidFill>
+                  <a:latin typeface="Poppins Bold"/>
+                  <a:ea typeface="Poppins Bold"/>
+                  <a:cs typeface="Poppins Bold"/>
+                  <a:sym typeface="Poppins Bold"/>
+                </a:rPr>
+                <a:t> de Identidad (Proof of Ownership)</a:t>
               </a:r>
             </a:p>
           </p:txBody>
@@ -10459,26 +11260,26 @@
       </p:grpSp>
       <p:grpSp>
         <p:nvGrpSpPr>
-          <p:cNvPr name="Group 23" id="23"/>
+          <p:cNvPr id="23" name="Group 23"/>
           <p:cNvGrpSpPr/>
           <p:nvPr/>
         </p:nvGrpSpPr>
         <p:grpSpPr>
-          <a:xfrm rot="0">
-            <a:off x="14239792" y="5010495"/>
-            <a:ext cx="3861894" cy="909828"/>
-            <a:chOff x="0" y="0"/>
-            <a:chExt cx="897930" cy="211544"/>
+          <a:xfrm>
+            <a:off x="14239792" y="5010491"/>
+            <a:ext cx="3861894" cy="909837"/>
+            <a:chOff x="0" y="-1"/>
+            <a:chExt cx="897930" cy="211546"/>
           </a:xfrm>
         </p:grpSpPr>
         <p:sp>
           <p:nvSpPr>
-            <p:cNvPr name="Freeform 24" id="24"/>
+            <p:cNvPr id="24" name="Freeform 24"/>
             <p:cNvSpPr/>
             <p:nvPr/>
           </p:nvSpPr>
           <p:spPr>
-            <a:xfrm flipH="false" flipV="false" rot="0">
+            <a:xfrm>
               <a:off x="0" y="0"/>
               <a:ext cx="897930" cy="211545"/>
             </a:xfrm>
@@ -10487,9 +11288,9 @@
               <a:gdLst/>
               <a:ahLst/>
               <a:cxnLst/>
-              <a:rect r="r" b="b" t="t" l="l"/>
+              <a:rect l="l" t="t" r="r" b="b"/>
               <a:pathLst>
-                <a:path h="211545" w="897930">
+                <a:path w="897930" h="211545">
                   <a:moveTo>
                     <a:pt x="0" y="0"/>
                   </a:moveTo>
@@ -10510,27 +11311,34 @@
               <a:srgbClr val="93D14B"/>
             </a:solidFill>
           </p:spPr>
+          <p:txBody>
+            <a:bodyPr/>
+            <a:lstStyle/>
+            <a:p>
+              <a:endParaRPr lang="es-ES"/>
+            </a:p>
+          </p:txBody>
         </p:sp>
         <p:sp>
           <p:nvSpPr>
-            <p:cNvPr name="TextBox 25" id="25"/>
-            <p:cNvSpPr txBox="true"/>
+            <p:cNvPr id="25" name="TextBox 25"/>
+            <p:cNvSpPr txBox="1"/>
             <p:nvPr/>
           </p:nvSpPr>
           <p:spPr>
             <a:xfrm>
-              <a:off x="0" y="-57150"/>
-              <a:ext cx="897930" cy="268694"/>
+              <a:off x="0" y="-1"/>
+              <a:ext cx="897930" cy="211545"/>
             </a:xfrm>
             <a:prstGeom prst="rect">
               <a:avLst/>
             </a:prstGeom>
           </p:spPr>
           <p:txBody>
-            <a:bodyPr anchor="t" rtlCol="false" tIns="50800" lIns="50800" bIns="50800" rIns="50800"/>
+            <a:bodyPr lIns="50800" tIns="50800" rIns="50800" bIns="50800" rtlCol="0" anchor="t"/>
             <a:lstStyle/>
             <a:p>
-              <a:pPr algn="ctr" marL="0" indent="0" lvl="0">
+              <a:pPr marL="0" lvl="0" indent="0" algn="ctr">
                 <a:lnSpc>
                   <a:spcPts val="2760"/>
                 </a:lnSpc>
@@ -10539,7 +11347,7 @@
                 </a:spcBef>
               </a:pPr>
               <a:r>
-                <a:rPr lang="en-US" b="true" sz="2000" spc="20">
+                <a:rPr lang="en-US" sz="2000" b="1" spc="20" dirty="0">
                   <a:solidFill>
                     <a:srgbClr val="FFFFFF"/>
                   </a:solidFill>
@@ -10556,12 +11364,12 @@
       </p:grpSp>
       <p:sp>
         <p:nvSpPr>
-          <p:cNvPr name="Freeform 26" id="26"/>
+          <p:cNvPr id="26" name="Freeform 26"/>
           <p:cNvSpPr/>
           <p:nvPr/>
         </p:nvSpPr>
         <p:spPr>
-          <a:xfrm flipH="false" flipV="false" rot="0">
+          <a:xfrm>
             <a:off x="1573972" y="5773408"/>
             <a:ext cx="2016955" cy="2016955"/>
           </a:xfrm>
@@ -10570,9 +11378,9 @@
             <a:gdLst/>
             <a:ahLst/>
             <a:cxnLst/>
-            <a:rect r="r" b="b" t="t" l="l"/>
+            <a:rect l="l" t="t" r="r" b="b"/>
             <a:pathLst>
-              <a:path h="2016955" w="2016955">
+              <a:path w="2016955" h="2016955">
                 <a:moveTo>
                   <a:pt x="0" y="0"/>
                 </a:moveTo>
@@ -10595,19 +11403,26 @@
           <a:blipFill>
             <a:blip r:embed="rId2"/>
             <a:stretch>
-              <a:fillRect l="0" t="0" r="0" b="0"/>
+              <a:fillRect/>
             </a:stretch>
           </a:blipFill>
         </p:spPr>
-      </p:sp>
-      <p:sp>
-        <p:nvSpPr>
-          <p:cNvPr name="Freeform 27" id="27"/>
+        <p:txBody>
+          <a:bodyPr/>
+          <a:lstStyle/>
+          <a:p>
+            <a:endParaRPr lang="es-ES"/>
+          </a:p>
+        </p:txBody>
+      </p:sp>
+      <p:sp>
+        <p:nvSpPr>
+          <p:cNvPr id="27" name="Freeform 27"/>
           <p:cNvSpPr/>
           <p:nvPr/>
         </p:nvSpPr>
         <p:spPr>
-          <a:xfrm flipH="false" flipV="false" rot="0">
+          <a:xfrm>
             <a:off x="6835215" y="5863138"/>
             <a:ext cx="1927226" cy="1927226"/>
           </a:xfrm>
@@ -10616,9 +11431,9 @@
             <a:gdLst/>
             <a:ahLst/>
             <a:cxnLst/>
-            <a:rect r="r" b="b" t="t" l="l"/>
+            <a:rect l="l" t="t" r="r" b="b"/>
             <a:pathLst>
-              <a:path h="1927226" w="1927226">
+              <a:path w="1927226" h="1927226">
                 <a:moveTo>
                   <a:pt x="0" y="0"/>
                 </a:moveTo>
@@ -10641,19 +11456,26 @@
           <a:blipFill>
             <a:blip r:embed="rId3"/>
             <a:stretch>
-              <a:fillRect l="0" t="0" r="0" b="0"/>
+              <a:fillRect/>
             </a:stretch>
           </a:blipFill>
         </p:spPr>
+        <p:txBody>
+          <a:bodyPr/>
+          <a:lstStyle/>
+          <a:p>
+            <a:endParaRPr lang="es-ES"/>
+          </a:p>
+        </p:txBody>
       </p:sp>
       <p:grpSp>
         <p:nvGrpSpPr>
-          <p:cNvPr name="Group 28" id="28"/>
+          <p:cNvPr id="28" name="Group 28"/>
           <p:cNvGrpSpPr/>
           <p:nvPr/>
         </p:nvGrpSpPr>
         <p:grpSpPr>
-          <a:xfrm rot="0">
+          <a:xfrm>
             <a:off x="10388880" y="5673158"/>
             <a:ext cx="3508012" cy="2856412"/>
             <a:chOff x="0" y="0"/>
@@ -10662,12 +11484,12 @@
         </p:grpSpPr>
         <p:sp>
           <p:nvSpPr>
-            <p:cNvPr name="Freeform 29" id="29"/>
+            <p:cNvPr id="29" name="Freeform 29"/>
             <p:cNvSpPr/>
             <p:nvPr/>
           </p:nvSpPr>
           <p:spPr>
-            <a:xfrm flipH="false" flipV="false" rot="0">
+            <a:xfrm>
               <a:off x="0" y="0"/>
               <a:ext cx="815649" cy="664145"/>
             </a:xfrm>
@@ -10676,9 +11498,9 @@
               <a:gdLst/>
               <a:ahLst/>
               <a:cxnLst/>
-              <a:rect r="r" b="b" t="t" l="l"/>
+              <a:rect l="l" t="t" r="r" b="b"/>
               <a:pathLst>
-                <a:path h="664145" w="815649">
+                <a:path w="815649" h="664145">
                   <a:moveTo>
                     <a:pt x="0" y="0"/>
                   </a:moveTo>
@@ -10699,11 +11521,18 @@
               <a:srgbClr val="FFFFFF"/>
             </a:solidFill>
           </p:spPr>
+          <p:txBody>
+            <a:bodyPr/>
+            <a:lstStyle/>
+            <a:p>
+              <a:endParaRPr lang="es-ES"/>
+            </a:p>
+          </p:txBody>
         </p:sp>
         <p:sp>
           <p:nvSpPr>
-            <p:cNvPr name="TextBox 30" id="30"/>
-            <p:cNvSpPr txBox="true"/>
+            <p:cNvPr id="30" name="TextBox 30"/>
+            <p:cNvSpPr txBox="1"/>
             <p:nvPr/>
           </p:nvSpPr>
           <p:spPr>
@@ -10716,10 +11545,10 @@
             </a:prstGeom>
           </p:spPr>
           <p:txBody>
-            <a:bodyPr anchor="t" rtlCol="false" tIns="50800" lIns="50800" bIns="50800" rIns="50800"/>
+            <a:bodyPr lIns="50800" tIns="50800" rIns="50800" bIns="50800" rtlCol="0" anchor="t"/>
             <a:lstStyle/>
             <a:p>
-              <a:pPr algn="ctr" marL="0" indent="0" lvl="0">
+              <a:pPr marL="0" lvl="0" indent="0" algn="ctr">
                 <a:lnSpc>
                   <a:spcPts val="4114"/>
                 </a:lnSpc>
@@ -10727,18 +11556,19 @@
                   <a:spcPct val="0"/>
                 </a:spcBef>
               </a:pPr>
+              <a:endParaRPr/>
             </a:p>
           </p:txBody>
         </p:sp>
       </p:grpSp>
       <p:grpSp>
         <p:nvGrpSpPr>
-          <p:cNvPr name="Group 31" id="31"/>
+          <p:cNvPr id="31" name="Group 31"/>
           <p:cNvGrpSpPr/>
           <p:nvPr/>
         </p:nvGrpSpPr>
         <p:grpSpPr>
-          <a:xfrm rot="0">
+          <a:xfrm>
             <a:off x="14287417" y="6128119"/>
             <a:ext cx="3766644" cy="2401451"/>
             <a:chOff x="0" y="0"/>
@@ -10747,12 +11577,12 @@
         </p:grpSpPr>
         <p:sp>
           <p:nvSpPr>
-            <p:cNvPr name="Freeform 32" id="32"/>
+            <p:cNvPr id="32" name="Freeform 32"/>
             <p:cNvSpPr/>
             <p:nvPr/>
           </p:nvSpPr>
           <p:spPr>
-            <a:xfrm flipH="false" flipV="false" rot="0">
+            <a:xfrm>
               <a:off x="0" y="0"/>
               <a:ext cx="875784" cy="558362"/>
             </a:xfrm>
@@ -10761,9 +11591,9 @@
               <a:gdLst/>
               <a:ahLst/>
               <a:cxnLst/>
-              <a:rect r="r" b="b" t="t" l="l"/>
+              <a:rect l="l" t="t" r="r" b="b"/>
               <a:pathLst>
-                <a:path h="558362" w="875784">
+                <a:path w="875784" h="558362">
                   <a:moveTo>
                     <a:pt x="0" y="0"/>
                   </a:moveTo>
@@ -10784,11 +11614,18 @@
               <a:srgbClr val="FFFFFF"/>
             </a:solidFill>
           </p:spPr>
+          <p:txBody>
+            <a:bodyPr/>
+            <a:lstStyle/>
+            <a:p>
+              <a:endParaRPr lang="es-ES"/>
+            </a:p>
+          </p:txBody>
         </p:sp>
         <p:sp>
           <p:nvSpPr>
-            <p:cNvPr name="TextBox 33" id="33"/>
-            <p:cNvSpPr txBox="true"/>
+            <p:cNvPr id="33" name="TextBox 33"/>
+            <p:cNvSpPr txBox="1"/>
             <p:nvPr/>
           </p:nvSpPr>
           <p:spPr>
@@ -10801,10 +11638,10 @@
             </a:prstGeom>
           </p:spPr>
           <p:txBody>
-            <a:bodyPr anchor="t" rtlCol="false" tIns="50800" lIns="50800" bIns="50800" rIns="50800"/>
+            <a:bodyPr lIns="50800" tIns="50800" rIns="50800" bIns="50800" rtlCol="0" anchor="t"/>
             <a:lstStyle/>
             <a:p>
-              <a:pPr algn="ctr" marL="0" indent="0" lvl="0">
+              <a:pPr marL="0" lvl="0" indent="0" algn="ctr">
                 <a:lnSpc>
                   <a:spcPts val="4114"/>
                 </a:lnSpc>
@@ -10812,18 +11649,19 @@
                   <a:spcPct val="0"/>
                 </a:spcBef>
               </a:pPr>
+              <a:endParaRPr/>
             </a:p>
           </p:txBody>
         </p:sp>
       </p:grpSp>
       <p:sp>
         <p:nvSpPr>
-          <p:cNvPr name="Freeform 34" id="34"/>
+          <p:cNvPr id="34" name="Freeform 34"/>
           <p:cNvSpPr/>
           <p:nvPr/>
         </p:nvSpPr>
         <p:spPr>
-          <a:xfrm flipH="false" flipV="false" rot="0">
+          <a:xfrm>
             <a:off x="14358666" y="6300917"/>
             <a:ext cx="3624146" cy="1801066"/>
           </a:xfrm>
@@ -10832,9 +11670,9 @@
             <a:gdLst/>
             <a:ahLst/>
             <a:cxnLst/>
-            <a:rect r="r" b="b" t="t" l="l"/>
+            <a:rect l="l" t="t" r="r" b="b"/>
             <a:pathLst>
-              <a:path h="1801066" w="3624146">
+              <a:path w="3624146" h="1801066">
                 <a:moveTo>
                   <a:pt x="0" y="0"/>
                 </a:moveTo>
@@ -10857,19 +11695,26 @@
           <a:blipFill>
             <a:blip r:embed="rId4"/>
             <a:stretch>
-              <a:fillRect l="0" t="0" r="-11816" b="0"/>
+              <a:fillRect r="-11816"/>
             </a:stretch>
           </a:blipFill>
         </p:spPr>
-      </p:sp>
-      <p:sp>
-        <p:nvSpPr>
-          <p:cNvPr name="Freeform 35" id="35"/>
+        <p:txBody>
+          <a:bodyPr/>
+          <a:lstStyle/>
+          <a:p>
+            <a:endParaRPr lang="es-ES"/>
+          </a:p>
+        </p:txBody>
+      </p:sp>
+      <p:sp>
+        <p:nvSpPr>
+          <p:cNvPr id="35" name="Freeform 35"/>
           <p:cNvSpPr/>
           <p:nvPr/>
         </p:nvSpPr>
         <p:spPr>
-          <a:xfrm flipH="false" flipV="false" rot="0">
+          <a:xfrm>
             <a:off x="10783786" y="5940983"/>
             <a:ext cx="2788006" cy="2161001"/>
           </a:xfrm>
@@ -10878,9 +11723,9 @@
             <a:gdLst/>
             <a:ahLst/>
             <a:cxnLst/>
-            <a:rect r="r" b="b" t="t" l="l"/>
+            <a:rect l="l" t="t" r="r" b="b"/>
             <a:pathLst>
-              <a:path h="2161001" w="2788006">
+              <a:path w="2788006" h="2161001">
                 <a:moveTo>
                   <a:pt x="0" y="0"/>
                 </a:moveTo>
@@ -10903,19 +11748,26 @@
           <a:blipFill>
             <a:blip r:embed="rId5"/>
             <a:stretch>
-              <a:fillRect l="-22773" t="0" r="-24783" b="0"/>
+              <a:fillRect l="-22773" r="-24783"/>
             </a:stretch>
           </a:blipFill>
         </p:spPr>
-      </p:sp>
-      <p:sp>
-        <p:nvSpPr>
-          <p:cNvPr name="TextBox 36" id="36"/>
-          <p:cNvSpPr txBox="true"/>
+        <p:txBody>
+          <a:bodyPr/>
+          <a:lstStyle/>
+          <a:p>
+            <a:endParaRPr lang="es-ES"/>
+          </a:p>
+        </p:txBody>
+      </p:sp>
+      <p:sp>
+        <p:nvSpPr>
+          <p:cNvPr id="36" name="TextBox 36"/>
+          <p:cNvSpPr txBox="1"/>
           <p:nvPr/>
         </p:nvSpPr>
         <p:spPr>
-          <a:xfrm rot="0">
+          <a:xfrm>
             <a:off x="1274388" y="786966"/>
             <a:ext cx="9932477" cy="1625066"/>
           </a:xfrm>
@@ -10924,12 +11776,12 @@
           </a:prstGeom>
         </p:spPr>
         <p:txBody>
-          <a:bodyPr anchor="t" rtlCol="false" tIns="0" lIns="0" bIns="0" rIns="0">
+          <a:bodyPr lIns="0" tIns="0" rIns="0" bIns="0" rtlCol="0" anchor="t">
             <a:spAutoFit/>
           </a:bodyPr>
           <a:lstStyle/>
           <a:p>
-            <a:pPr algn="ctr" marL="0" indent="0" lvl="0">
+            <a:pPr marL="0" lvl="0" indent="0" algn="ctr">
               <a:lnSpc>
                 <a:spcPts val="6548"/>
               </a:lnSpc>
@@ -10954,12 +11806,12 @@
       </p:sp>
       <p:sp>
         <p:nvSpPr>
-          <p:cNvPr name="TextBox 37" id="37"/>
-          <p:cNvSpPr txBox="true"/>
+          <p:cNvPr id="37" name="TextBox 37"/>
+          <p:cNvSpPr txBox="1"/>
           <p:nvPr/>
         </p:nvSpPr>
         <p:spPr>
-          <a:xfrm rot="0">
+          <a:xfrm>
             <a:off x="17535126" y="9399905"/>
             <a:ext cx="752874" cy="887095"/>
           </a:xfrm>
@@ -10968,7 +11820,7 @@
           </a:prstGeom>
         </p:spPr>
         <p:txBody>
-          <a:bodyPr anchor="t" rtlCol="false" tIns="0" lIns="0" bIns="0" rIns="0">
+          <a:bodyPr lIns="0" tIns="0" rIns="0" bIns="0" rtlCol="0" anchor="t">
             <a:spAutoFit/>
           </a:bodyPr>
           <a:lstStyle/>
@@ -10979,7 +11831,7 @@
               </a:lnSpc>
             </a:pPr>
             <a:r>
-              <a:rPr lang="en-US" sz="5199" b="true">
+              <a:rPr lang="en-US" sz="5199" b="1">
                 <a:solidFill>
                   <a:srgbClr val="93D14B"/>
                 </a:solidFill>
@@ -10988,19 +11840,7 @@
                 <a:cs typeface="Open Sans Bold"/>
                 <a:sym typeface="Open Sans Bold"/>
               </a:rPr>
-              <a:t>6</a:t>
-            </a:r>
-            <a:r>
-              <a:rPr lang="en-US" b="true" sz="5199">
-                <a:solidFill>
-                  <a:srgbClr val="93D14B"/>
-                </a:solidFill>
-                <a:latin typeface="Open Sans Bold"/>
-                <a:ea typeface="Open Sans Bold"/>
-                <a:cs typeface="Open Sans Bold"/>
-                <a:sym typeface="Open Sans Bold"/>
-              </a:rPr>
-              <a:t>.</a:t>
+              <a:t>6.</a:t>
             </a:r>
           </a:p>
         </p:txBody>
@@ -11014,13 +11854,14 @@
 </file>
 
 <file path=ppt/slides/slide9.xml><?xml version="1.0" encoding="utf-8"?>
-<p:sld xmlns:p="http://schemas.openxmlformats.org/presentationml/2006/main" xmlns:a="http://schemas.openxmlformats.org/drawingml/2006/main" xmlns:r="http://schemas.openxmlformats.org/officeDocument/2006/relationships">
+<p:sld xmlns:a="http://schemas.openxmlformats.org/drawingml/2006/main" xmlns:r="http://schemas.openxmlformats.org/officeDocument/2006/relationships" xmlns:p="http://schemas.openxmlformats.org/presentationml/2006/main">
   <p:cSld>
     <p:bg>
       <p:bgPr>
         <a:solidFill>
           <a:srgbClr val="344F51"/>
         </a:solidFill>
+        <a:effectLst/>
       </p:bgPr>
     </p:bg>
     <p:spTree>
@@ -11039,12 +11880,12 @@
       </p:grpSpPr>
       <p:grpSp>
         <p:nvGrpSpPr>
-          <p:cNvPr name="Group 2" id="2"/>
+          <p:cNvPr id="2" name="Group 2"/>
           <p:cNvGrpSpPr/>
           <p:nvPr/>
         </p:nvGrpSpPr>
         <p:grpSpPr>
-          <a:xfrm rot="0">
+          <a:xfrm>
             <a:off x="1357312" y="1028700"/>
             <a:ext cx="15591759" cy="8229600"/>
             <a:chOff x="0" y="0"/>
@@ -11053,12 +11894,12 @@
         </p:grpSpPr>
         <p:sp>
           <p:nvSpPr>
-            <p:cNvPr name="Freeform 3" id="3"/>
+            <p:cNvPr id="3" name="Freeform 3"/>
             <p:cNvSpPr/>
             <p:nvPr/>
           </p:nvSpPr>
           <p:spPr>
-            <a:xfrm flipH="false" flipV="false" rot="0">
+            <a:xfrm>
               <a:off x="0" y="0"/>
               <a:ext cx="4106471" cy="2167467"/>
             </a:xfrm>
@@ -11067,9 +11908,9 @@
               <a:gdLst/>
               <a:ahLst/>
               <a:cxnLst/>
-              <a:rect r="r" b="b" t="t" l="l"/>
+              <a:rect l="l" t="t" r="r" b="b"/>
               <a:pathLst>
-                <a:path h="2167467" w="4106471">
+                <a:path w="4106471" h="2167467">
                   <a:moveTo>
                     <a:pt x="0" y="0"/>
                   </a:moveTo>
@@ -11090,11 +11931,18 @@
               <a:srgbClr val="FFFFFF"/>
             </a:solidFill>
           </p:spPr>
+          <p:txBody>
+            <a:bodyPr/>
+            <a:lstStyle/>
+            <a:p>
+              <a:endParaRPr lang="es-ES"/>
+            </a:p>
+          </p:txBody>
         </p:sp>
         <p:sp>
           <p:nvSpPr>
-            <p:cNvPr name="TextBox 4" id="4"/>
-            <p:cNvSpPr txBox="true"/>
+            <p:cNvPr id="4" name="TextBox 4"/>
+            <p:cNvSpPr txBox="1"/>
             <p:nvPr/>
           </p:nvSpPr>
           <p:spPr>
@@ -11107,7 +11955,7 @@
             </a:prstGeom>
           </p:spPr>
           <p:txBody>
-            <a:bodyPr anchor="ctr" rtlCol="false" tIns="50800" lIns="50800" bIns="50800" rIns="50800"/>
+            <a:bodyPr lIns="50800" tIns="50800" rIns="50800" bIns="50800" rtlCol="0" anchor="ctr"/>
             <a:lstStyle/>
             <a:p>
               <a:pPr algn="ctr">
@@ -11115,18 +11963,19 @@
                   <a:spcPts val="2859"/>
                 </a:lnSpc>
               </a:pPr>
+              <a:endParaRPr/>
             </a:p>
           </p:txBody>
         </p:sp>
       </p:grpSp>
       <p:sp>
         <p:nvSpPr>
-          <p:cNvPr name="Freeform 5" id="5"/>
+          <p:cNvPr id="5" name="Freeform 5"/>
           <p:cNvSpPr/>
           <p:nvPr/>
         </p:nvSpPr>
         <p:spPr>
-          <a:xfrm flipH="false" flipV="false" rot="0">
+          <a:xfrm>
             <a:off x="2553248" y="3332230"/>
             <a:ext cx="1516533" cy="1254586"/>
           </a:xfrm>
@@ -11135,9 +11984,9 @@
             <a:gdLst/>
             <a:ahLst/>
             <a:cxnLst/>
-            <a:rect r="r" b="b" t="t" l="l"/>
+            <a:rect l="l" t="t" r="r" b="b"/>
             <a:pathLst>
-              <a:path h="1254586" w="1516533">
+              <a:path w="1516533" h="1254586">
                 <a:moveTo>
                   <a:pt x="0" y="0"/>
                 </a:moveTo>
@@ -11158,7 +12007,66 @@
             </a:pathLst>
           </a:custGeom>
           <a:blipFill>
-            <a:blip r:embed="rId2">
+            <a:blip>
+              <a:extLst>
+                <a:ext uri="{96DAC541-7B7A-43D3-8B79-37D633B846F1}">
+                  <asvg:svgBlip xmlns:asvg="http://schemas.microsoft.com/office/drawing/2016/SVG/main" r:embed="rId2"/>
+                </a:ext>
+              </a:extLst>
+            </a:blip>
+            <a:stretch>
+              <a:fillRect/>
+            </a:stretch>
+          </a:blipFill>
+        </p:spPr>
+        <p:txBody>
+          <a:bodyPr/>
+          <a:lstStyle/>
+          <a:p>
+            <a:endParaRPr lang="es-ES"/>
+          </a:p>
+        </p:txBody>
+      </p:sp>
+      <p:sp>
+        <p:nvSpPr>
+          <p:cNvPr id="6" name="Freeform 6"/>
+          <p:cNvSpPr/>
+          <p:nvPr/>
+        </p:nvSpPr>
+        <p:spPr>
+          <a:xfrm>
+            <a:off x="6327691" y="3192904"/>
+            <a:ext cx="1150967" cy="1559919"/>
+          </a:xfrm>
+          <a:custGeom>
+            <a:avLst/>
+            <a:gdLst/>
+            <a:ahLst/>
+            <a:cxnLst/>
+            <a:rect l="l" t="t" r="r" b="b"/>
+            <a:pathLst>
+              <a:path w="1150967" h="1559919">
+                <a:moveTo>
+                  <a:pt x="0" y="0"/>
+                </a:moveTo>
+                <a:lnTo>
+                  <a:pt x="1150967" y="0"/>
+                </a:lnTo>
+                <a:lnTo>
+                  <a:pt x="1150967" y="1559919"/>
+                </a:lnTo>
+                <a:lnTo>
+                  <a:pt x="0" y="1559919"/>
+                </a:lnTo>
+                <a:lnTo>
+                  <a:pt x="0" y="0"/>
+                </a:lnTo>
+                <a:close/>
+              </a:path>
+            </a:pathLst>
+          </a:custGeom>
+          <a:blipFill>
+            <a:blip>
               <a:extLst>
                 <a:ext uri="{96DAC541-7B7A-43D3-8B79-37D633B846F1}">
                   <asvg:svgBlip xmlns:asvg="http://schemas.microsoft.com/office/drawing/2016/SVG/main" r:embed="rId3"/>
@@ -11166,41 +12074,48 @@
               </a:extLst>
             </a:blip>
             <a:stretch>
-              <a:fillRect l="0" t="0" r="0" b="0"/>
+              <a:fillRect/>
             </a:stretch>
           </a:blipFill>
         </p:spPr>
-      </p:sp>
-      <p:sp>
-        <p:nvSpPr>
-          <p:cNvPr name="Freeform 6" id="6"/>
+        <p:txBody>
+          <a:bodyPr/>
+          <a:lstStyle/>
+          <a:p>
+            <a:endParaRPr lang="es-ES"/>
+          </a:p>
+        </p:txBody>
+      </p:sp>
+      <p:sp>
+        <p:nvSpPr>
+          <p:cNvPr id="7" name="Freeform 7"/>
           <p:cNvSpPr/>
           <p:nvPr/>
         </p:nvSpPr>
         <p:spPr>
-          <a:xfrm flipH="false" flipV="false" rot="0">
-            <a:off x="6327691" y="3192904"/>
-            <a:ext cx="1150967" cy="1559919"/>
+          <a:xfrm>
+            <a:off x="9931760" y="3498338"/>
+            <a:ext cx="1635151" cy="1088119"/>
           </a:xfrm>
           <a:custGeom>
             <a:avLst/>
             <a:gdLst/>
             <a:ahLst/>
             <a:cxnLst/>
-            <a:rect r="r" b="b" t="t" l="l"/>
+            <a:rect l="l" t="t" r="r" b="b"/>
             <a:pathLst>
-              <a:path h="1559919" w="1150967">
+              <a:path w="1635151" h="1088119">
                 <a:moveTo>
                   <a:pt x="0" y="0"/>
                 </a:moveTo>
                 <a:lnTo>
-                  <a:pt x="1150967" y="0"/>
-                </a:lnTo>
-                <a:lnTo>
-                  <a:pt x="1150967" y="1559919"/>
-                </a:lnTo>
-                <a:lnTo>
-                  <a:pt x="0" y="1559919"/>
+                  <a:pt x="1635151" y="0"/>
+                </a:lnTo>
+                <a:lnTo>
+                  <a:pt x="1635151" y="1088119"/>
+                </a:lnTo>
+                <a:lnTo>
+                  <a:pt x="0" y="1088119"/>
                 </a:lnTo>
                 <a:lnTo>
                   <a:pt x="0" y="0"/>
@@ -11210,7 +12125,66 @@
             </a:pathLst>
           </a:custGeom>
           <a:blipFill>
-            <a:blip r:embed="rId4">
+            <a:blip>
+              <a:extLst>
+                <a:ext uri="{96DAC541-7B7A-43D3-8B79-37D633B846F1}">
+                  <asvg:svgBlip xmlns:asvg="http://schemas.microsoft.com/office/drawing/2016/SVG/main" r:embed="rId4"/>
+                </a:ext>
+              </a:extLst>
+            </a:blip>
+            <a:stretch>
+              <a:fillRect/>
+            </a:stretch>
+          </a:blipFill>
+        </p:spPr>
+        <p:txBody>
+          <a:bodyPr/>
+          <a:lstStyle/>
+          <a:p>
+            <a:endParaRPr lang="es-ES"/>
+          </a:p>
+        </p:txBody>
+      </p:sp>
+      <p:sp>
+        <p:nvSpPr>
+          <p:cNvPr id="8" name="Freeform 8"/>
+          <p:cNvSpPr/>
+          <p:nvPr/>
+        </p:nvSpPr>
+        <p:spPr>
+          <a:xfrm>
+            <a:off x="14020014" y="3331972"/>
+            <a:ext cx="1433886" cy="1420851"/>
+          </a:xfrm>
+          <a:custGeom>
+            <a:avLst/>
+            <a:gdLst/>
+            <a:ahLst/>
+            <a:cxnLst/>
+            <a:rect l="l" t="t" r="r" b="b"/>
+            <a:pathLst>
+              <a:path w="1433886" h="1420851">
+                <a:moveTo>
+                  <a:pt x="0" y="0"/>
+                </a:moveTo>
+                <a:lnTo>
+                  <a:pt x="1433887" y="0"/>
+                </a:lnTo>
+                <a:lnTo>
+                  <a:pt x="1433887" y="1420851"/>
+                </a:lnTo>
+                <a:lnTo>
+                  <a:pt x="0" y="1420851"/>
+                </a:lnTo>
+                <a:lnTo>
+                  <a:pt x="0" y="0"/>
+                </a:lnTo>
+                <a:close/>
+              </a:path>
+            </a:pathLst>
+          </a:custGeom>
+          <a:blipFill>
+            <a:blip>
               <a:extLst>
                 <a:ext uri="{96DAC541-7B7A-43D3-8B79-37D633B846F1}">
                   <asvg:svgBlip xmlns:asvg="http://schemas.microsoft.com/office/drawing/2016/SVG/main" r:embed="rId5"/>
@@ -11218,123 +12192,26 @@
               </a:extLst>
             </a:blip>
             <a:stretch>
-              <a:fillRect l="0" t="0" r="0" b="0"/>
+              <a:fillRect/>
             </a:stretch>
           </a:blipFill>
         </p:spPr>
-      </p:sp>
-      <p:sp>
-        <p:nvSpPr>
-          <p:cNvPr name="Freeform 7" id="7"/>
-          <p:cNvSpPr/>
+        <p:txBody>
+          <a:bodyPr/>
+          <a:lstStyle/>
+          <a:p>
+            <a:endParaRPr lang="es-ES"/>
+          </a:p>
+        </p:txBody>
+      </p:sp>
+      <p:sp>
+        <p:nvSpPr>
+          <p:cNvPr id="9" name="TextBox 9"/>
+          <p:cNvSpPr txBox="1"/>
           <p:nvPr/>
         </p:nvSpPr>
         <p:spPr>
-          <a:xfrm flipH="false" flipV="false" rot="0">
-            <a:off x="9931760" y="3498338"/>
-            <a:ext cx="1635151" cy="1088119"/>
-          </a:xfrm>
-          <a:custGeom>
-            <a:avLst/>
-            <a:gdLst/>
-            <a:ahLst/>
-            <a:cxnLst/>
-            <a:rect r="r" b="b" t="t" l="l"/>
-            <a:pathLst>
-              <a:path h="1088119" w="1635151">
-                <a:moveTo>
-                  <a:pt x="0" y="0"/>
-                </a:moveTo>
-                <a:lnTo>
-                  <a:pt x="1635151" y="0"/>
-                </a:lnTo>
-                <a:lnTo>
-                  <a:pt x="1635151" y="1088119"/>
-                </a:lnTo>
-                <a:lnTo>
-                  <a:pt x="0" y="1088119"/>
-                </a:lnTo>
-                <a:lnTo>
-                  <a:pt x="0" y="0"/>
-                </a:lnTo>
-                <a:close/>
-              </a:path>
-            </a:pathLst>
-          </a:custGeom>
-          <a:blipFill>
-            <a:blip r:embed="rId6">
-              <a:extLst>
-                <a:ext uri="{96DAC541-7B7A-43D3-8B79-37D633B846F1}">
-                  <asvg:svgBlip xmlns:asvg="http://schemas.microsoft.com/office/drawing/2016/SVG/main" r:embed="rId7"/>
-                </a:ext>
-              </a:extLst>
-            </a:blip>
-            <a:stretch>
-              <a:fillRect l="0" t="0" r="0" b="0"/>
-            </a:stretch>
-          </a:blipFill>
-        </p:spPr>
-      </p:sp>
-      <p:sp>
-        <p:nvSpPr>
-          <p:cNvPr name="Freeform 8" id="8"/>
-          <p:cNvSpPr/>
-          <p:nvPr/>
-        </p:nvSpPr>
-        <p:spPr>
-          <a:xfrm flipH="false" flipV="false" rot="0">
-            <a:off x="14020014" y="3331972"/>
-            <a:ext cx="1433886" cy="1420851"/>
-          </a:xfrm>
-          <a:custGeom>
-            <a:avLst/>
-            <a:gdLst/>
-            <a:ahLst/>
-            <a:cxnLst/>
-            <a:rect r="r" b="b" t="t" l="l"/>
-            <a:pathLst>
-              <a:path h="1420851" w="1433886">
-                <a:moveTo>
-                  <a:pt x="0" y="0"/>
-                </a:moveTo>
-                <a:lnTo>
-                  <a:pt x="1433887" y="0"/>
-                </a:lnTo>
-                <a:lnTo>
-                  <a:pt x="1433887" y="1420851"/>
-                </a:lnTo>
-                <a:lnTo>
-                  <a:pt x="0" y="1420851"/>
-                </a:lnTo>
-                <a:lnTo>
-                  <a:pt x="0" y="0"/>
-                </a:lnTo>
-                <a:close/>
-              </a:path>
-            </a:pathLst>
-          </a:custGeom>
-          <a:blipFill>
-            <a:blip r:embed="rId8">
-              <a:extLst>
-                <a:ext uri="{96DAC541-7B7A-43D3-8B79-37D633B846F1}">
-                  <asvg:svgBlip xmlns:asvg="http://schemas.microsoft.com/office/drawing/2016/SVG/main" r:embed="rId9"/>
-                </a:ext>
-              </a:extLst>
-            </a:blip>
-            <a:stretch>
-              <a:fillRect l="0" t="0" r="0" b="0"/>
-            </a:stretch>
-          </a:blipFill>
-        </p:spPr>
-      </p:sp>
-      <p:sp>
-        <p:nvSpPr>
-          <p:cNvPr name="TextBox 9" id="9"/>
-          <p:cNvSpPr txBox="true"/>
-          <p:nvPr/>
-        </p:nvSpPr>
-        <p:spPr>
-          <a:xfrm rot="0">
+          <a:xfrm>
             <a:off x="13156807" y="5310623"/>
             <a:ext cx="3351392" cy="2559177"/>
           </a:xfrm>
@@ -11343,7 +12220,7 @@
           </a:prstGeom>
         </p:spPr>
         <p:txBody>
-          <a:bodyPr anchor="t" rtlCol="false" tIns="0" lIns="0" bIns="0" rIns="0">
+          <a:bodyPr lIns="0" tIns="0" rIns="0" bIns="0" rtlCol="0" anchor="t">
             <a:spAutoFit/>
           </a:bodyPr>
           <a:lstStyle/>
@@ -11354,7 +12231,7 @@
               </a:lnSpc>
             </a:pPr>
             <a:r>
-              <a:rPr lang="en-US" sz="2000" spc="196" b="true">
+              <a:rPr lang="en-US" sz="2000" b="1" spc="196">
                 <a:solidFill>
                   <a:srgbClr val="344F51"/>
                 </a:solidFill>
@@ -11372,6 +12249,15 @@
                 <a:spcPts val="2207"/>
               </a:lnSpc>
             </a:pPr>
+            <a:endParaRPr lang="en-US" sz="2000" b="1" spc="196">
+              <a:solidFill>
+                <a:srgbClr val="344F51"/>
+              </a:solidFill>
+              <a:latin typeface="Poppins Bold"/>
+              <a:ea typeface="Poppins Bold"/>
+              <a:cs typeface="Poppins Bold"/>
+              <a:sym typeface="Poppins Bold"/>
+            </a:endParaRPr>
           </a:p>
           <a:p>
             <a:pPr algn="l">
@@ -11379,9 +12265,18 @@
                 <a:spcPts val="2207"/>
               </a:lnSpc>
             </a:pPr>
-          </a:p>
-          <a:p>
-            <a:pPr algn="l" marL="0" indent="0" lvl="0">
+            <a:endParaRPr lang="en-US" sz="2000" b="1" spc="196">
+              <a:solidFill>
+                <a:srgbClr val="344F51"/>
+              </a:solidFill>
+              <a:latin typeface="Poppins Bold"/>
+              <a:ea typeface="Poppins Bold"/>
+              <a:cs typeface="Poppins Bold"/>
+              <a:sym typeface="Poppins Bold"/>
+            </a:endParaRPr>
+          </a:p>
+          <a:p>
+            <a:pPr marL="0" lvl="0" indent="0" algn="l">
               <a:lnSpc>
                 <a:spcPts val="2207"/>
               </a:lnSpc>
@@ -11389,17 +12284,26 @@
                 <a:spcPct val="0"/>
               </a:spcBef>
             </a:pPr>
-          </a:p>
-        </p:txBody>
-      </p:sp>
-      <p:sp>
-        <p:nvSpPr>
-          <p:cNvPr name="TextBox 10" id="10"/>
-          <p:cNvSpPr txBox="true"/>
+            <a:endParaRPr lang="en-US" sz="2000" b="1" spc="196">
+              <a:solidFill>
+                <a:srgbClr val="344F51"/>
+              </a:solidFill>
+              <a:latin typeface="Poppins Bold"/>
+              <a:ea typeface="Poppins Bold"/>
+              <a:cs typeface="Poppins Bold"/>
+              <a:sym typeface="Poppins Bold"/>
+            </a:endParaRPr>
+          </a:p>
+        </p:txBody>
+      </p:sp>
+      <p:sp>
+        <p:nvSpPr>
+          <p:cNvPr id="10" name="TextBox 10"/>
+          <p:cNvSpPr txBox="1"/>
           <p:nvPr/>
         </p:nvSpPr>
         <p:spPr>
-          <a:xfrm rot="0">
+          <a:xfrm>
             <a:off x="3830917" y="1754882"/>
             <a:ext cx="10906040" cy="796391"/>
           </a:xfrm>
@@ -11408,12 +12312,12 @@
           </a:prstGeom>
         </p:spPr>
         <p:txBody>
-          <a:bodyPr anchor="t" rtlCol="false" tIns="0" lIns="0" bIns="0" rIns="0">
+          <a:bodyPr lIns="0" tIns="0" rIns="0" bIns="0" rtlCol="0" anchor="t">
             <a:spAutoFit/>
           </a:bodyPr>
           <a:lstStyle/>
           <a:p>
-            <a:pPr algn="ctr" marL="0" indent="0" lvl="0">
+            <a:pPr marL="0" lvl="0" indent="0" algn="ctr">
               <a:lnSpc>
                 <a:spcPts val="6548"/>
               </a:lnSpc>
@@ -11422,7 +12326,7 @@
               </a:spcBef>
             </a:pPr>
             <a:r>
-              <a:rPr lang="en-US" b="true" sz="4745" spc="37">
+              <a:rPr lang="en-US" sz="4745" b="1" spc="37">
                 <a:solidFill>
                   <a:srgbClr val="51786E"/>
                 </a:solidFill>
@@ -11438,12 +12342,12 @@
       </p:sp>
       <p:sp>
         <p:nvSpPr>
-          <p:cNvPr name="TextBox 11" id="11"/>
-          <p:cNvSpPr txBox="true"/>
+          <p:cNvPr id="11" name="TextBox 11"/>
+          <p:cNvSpPr txBox="1"/>
           <p:nvPr/>
         </p:nvSpPr>
         <p:spPr>
-          <a:xfrm rot="0">
+          <a:xfrm>
             <a:off x="17535126" y="9399905"/>
             <a:ext cx="752874" cy="887095"/>
           </a:xfrm>
@@ -11452,7 +12356,7 @@
           </a:prstGeom>
         </p:spPr>
         <p:txBody>
-          <a:bodyPr anchor="t" rtlCol="false" tIns="0" lIns="0" bIns="0" rIns="0">
+          <a:bodyPr lIns="0" tIns="0" rIns="0" bIns="0" rtlCol="0" anchor="t">
             <a:spAutoFit/>
           </a:bodyPr>
           <a:lstStyle/>
@@ -11463,7 +12367,7 @@
               </a:lnSpc>
             </a:pPr>
             <a:r>
-              <a:rPr lang="en-US" sz="5199" b="true">
+              <a:rPr lang="en-US" sz="5199" b="1">
                 <a:solidFill>
                   <a:srgbClr val="93D14B"/>
                 </a:solidFill>
@@ -11472,31 +12376,19 @@
                 <a:cs typeface="Open Sans Bold"/>
                 <a:sym typeface="Open Sans Bold"/>
               </a:rPr>
-              <a:t>7</a:t>
+              <a:t>7.</a:t>
             </a:r>
-            <a:r>
-              <a:rPr lang="en-US" b="true" sz="5199">
-                <a:solidFill>
-                  <a:srgbClr val="93D14B"/>
-                </a:solidFill>
-                <a:latin typeface="Open Sans Bold"/>
-                <a:ea typeface="Open Sans Bold"/>
-                <a:cs typeface="Open Sans Bold"/>
-                <a:sym typeface="Open Sans Bold"/>
-              </a:rPr>
-              <a:t>.</a:t>
-            </a:r>
-          </a:p>
-        </p:txBody>
-      </p:sp>
-      <p:sp>
-        <p:nvSpPr>
-          <p:cNvPr name="TextBox 12" id="12"/>
-          <p:cNvSpPr txBox="true"/>
+          </a:p>
+        </p:txBody>
+      </p:sp>
+      <p:sp>
+        <p:nvSpPr>
+          <p:cNvPr id="12" name="TextBox 12"/>
+          <p:cNvSpPr txBox="1"/>
           <p:nvPr/>
         </p:nvSpPr>
         <p:spPr>
-          <a:xfrm rot="0">
+          <a:xfrm>
             <a:off x="1937915" y="5310623"/>
             <a:ext cx="2970137" cy="3111627"/>
           </a:xfrm>
@@ -11505,7 +12397,7 @@
           </a:prstGeom>
         </p:spPr>
         <p:txBody>
-          <a:bodyPr anchor="t" rtlCol="false" tIns="0" lIns="0" bIns="0" rIns="0">
+          <a:bodyPr lIns="0" tIns="0" rIns="0" bIns="0" rtlCol="0" anchor="t">
             <a:spAutoFit/>
           </a:bodyPr>
           <a:lstStyle/>
@@ -11516,7 +12408,7 @@
               </a:lnSpc>
             </a:pPr>
             <a:r>
-              <a:rPr lang="en-US" sz="1999" spc="195" b="true">
+              <a:rPr lang="en-US" sz="1999" b="1" spc="195">
                 <a:solidFill>
                   <a:srgbClr val="344F51"/>
                 </a:solidFill>
@@ -11534,6 +12426,15 @@
                 <a:spcPts val="2208"/>
               </a:lnSpc>
             </a:pPr>
+            <a:endParaRPr lang="en-US" sz="1999" b="1" spc="195">
+              <a:solidFill>
+                <a:srgbClr val="344F51"/>
+              </a:solidFill>
+              <a:latin typeface="Poppins Bold"/>
+              <a:ea typeface="Poppins Bold"/>
+              <a:cs typeface="Poppins Bold"/>
+              <a:sym typeface="Poppins Bold"/>
+            </a:endParaRPr>
           </a:p>
           <a:p>
             <a:pPr algn="l">
@@ -11541,6 +12442,15 @@
                 <a:spcPts val="2208"/>
               </a:lnSpc>
             </a:pPr>
+            <a:endParaRPr lang="en-US" sz="1999" b="1" spc="195">
+              <a:solidFill>
+                <a:srgbClr val="344F51"/>
+              </a:solidFill>
+              <a:latin typeface="Poppins Bold"/>
+              <a:ea typeface="Poppins Bold"/>
+              <a:cs typeface="Poppins Bold"/>
+              <a:sym typeface="Poppins Bold"/>
+            </a:endParaRPr>
           </a:p>
           <a:p>
             <a:pPr algn="l">
@@ -11548,6 +12458,15 @@
                 <a:spcPts val="2208"/>
               </a:lnSpc>
             </a:pPr>
+            <a:endParaRPr lang="en-US" sz="1999" b="1" spc="195">
+              <a:solidFill>
+                <a:srgbClr val="344F51"/>
+              </a:solidFill>
+              <a:latin typeface="Poppins Bold"/>
+              <a:ea typeface="Poppins Bold"/>
+              <a:cs typeface="Poppins Bold"/>
+              <a:sym typeface="Poppins Bold"/>
+            </a:endParaRPr>
           </a:p>
           <a:p>
             <a:pPr algn="l">
@@ -11555,9 +12474,18 @@
                 <a:spcPts val="2208"/>
               </a:lnSpc>
             </a:pPr>
-          </a:p>
-          <a:p>
-            <a:pPr algn="l" marL="0" indent="0" lvl="0">
+            <a:endParaRPr lang="en-US" sz="1999" b="1" spc="195">
+              <a:solidFill>
+                <a:srgbClr val="344F51"/>
+              </a:solidFill>
+              <a:latin typeface="Poppins Bold"/>
+              <a:ea typeface="Poppins Bold"/>
+              <a:cs typeface="Poppins Bold"/>
+              <a:sym typeface="Poppins Bold"/>
+            </a:endParaRPr>
+          </a:p>
+          <a:p>
+            <a:pPr marL="0" lvl="0" indent="0" algn="l">
               <a:lnSpc>
                 <a:spcPts val="2208"/>
               </a:lnSpc>
@@ -11565,17 +12493,26 @@
                 <a:spcPct val="0"/>
               </a:spcBef>
             </a:pPr>
-          </a:p>
-        </p:txBody>
-      </p:sp>
-      <p:sp>
-        <p:nvSpPr>
-          <p:cNvPr name="TextBox 13" id="13"/>
-          <p:cNvSpPr txBox="true"/>
+            <a:endParaRPr lang="en-US" sz="1999" b="1" spc="195">
+              <a:solidFill>
+                <a:srgbClr val="344F51"/>
+              </a:solidFill>
+              <a:latin typeface="Poppins Bold"/>
+              <a:ea typeface="Poppins Bold"/>
+              <a:cs typeface="Poppins Bold"/>
+              <a:sym typeface="Poppins Bold"/>
+            </a:endParaRPr>
+          </a:p>
+        </p:txBody>
+      </p:sp>
+      <p:sp>
+        <p:nvSpPr>
+          <p:cNvPr id="13" name="TextBox 13"/>
+          <p:cNvSpPr txBox="1"/>
           <p:nvPr/>
         </p:nvSpPr>
         <p:spPr>
-          <a:xfrm rot="0">
+          <a:xfrm>
             <a:off x="5446905" y="5310623"/>
             <a:ext cx="3440283" cy="3454198"/>
           </a:xfrm>
@@ -11584,7 +12521,7 @@
           </a:prstGeom>
         </p:spPr>
         <p:txBody>
-          <a:bodyPr anchor="t" rtlCol="false" tIns="0" lIns="0" bIns="0" rIns="0">
+          <a:bodyPr lIns="0" tIns="0" rIns="0" bIns="0" rtlCol="0" anchor="t">
             <a:spAutoFit/>
           </a:bodyPr>
           <a:lstStyle/>
@@ -11595,7 +12532,7 @@
               </a:lnSpc>
             </a:pPr>
             <a:r>
-              <a:rPr lang="en-US" sz="2000" spc="196" b="true">
+              <a:rPr lang="en-US" sz="2000" b="1" spc="196">
                 <a:solidFill>
                   <a:srgbClr val="344F51"/>
                 </a:solidFill>
@@ -11613,6 +12550,15 @@
                 <a:spcPts val="2247"/>
               </a:lnSpc>
             </a:pPr>
+            <a:endParaRPr lang="en-US" sz="2000" b="1" spc="196">
+              <a:solidFill>
+                <a:srgbClr val="344F51"/>
+              </a:solidFill>
+              <a:latin typeface="Poppins Bold"/>
+              <a:ea typeface="Poppins Bold"/>
+              <a:cs typeface="Poppins Bold"/>
+              <a:sym typeface="Poppins Bold"/>
+            </a:endParaRPr>
           </a:p>
           <a:p>
             <a:pPr algn="l">
@@ -11620,6 +12566,15 @@
                 <a:spcPts val="2247"/>
               </a:lnSpc>
             </a:pPr>
+            <a:endParaRPr lang="en-US" sz="2000" b="1" spc="196">
+              <a:solidFill>
+                <a:srgbClr val="344F51"/>
+              </a:solidFill>
+              <a:latin typeface="Poppins Bold"/>
+              <a:ea typeface="Poppins Bold"/>
+              <a:cs typeface="Poppins Bold"/>
+              <a:sym typeface="Poppins Bold"/>
+            </a:endParaRPr>
           </a:p>
           <a:p>
             <a:pPr algn="l">
@@ -11627,6 +12582,15 @@
                 <a:spcPts val="2247"/>
               </a:lnSpc>
             </a:pPr>
+            <a:endParaRPr lang="en-US" sz="2000" b="1" spc="196">
+              <a:solidFill>
+                <a:srgbClr val="344F51"/>
+              </a:solidFill>
+              <a:latin typeface="Poppins Bold"/>
+              <a:ea typeface="Poppins Bold"/>
+              <a:cs typeface="Poppins Bold"/>
+              <a:sym typeface="Poppins Bold"/>
+            </a:endParaRPr>
           </a:p>
           <a:p>
             <a:pPr algn="l">
@@ -11634,9 +12598,18 @@
                 <a:spcPts val="2247"/>
               </a:lnSpc>
             </a:pPr>
-          </a:p>
-          <a:p>
-            <a:pPr algn="l" marL="0" indent="0" lvl="0">
+            <a:endParaRPr lang="en-US" sz="2000" b="1" spc="196">
+              <a:solidFill>
+                <a:srgbClr val="344F51"/>
+              </a:solidFill>
+              <a:latin typeface="Poppins Bold"/>
+              <a:ea typeface="Poppins Bold"/>
+              <a:cs typeface="Poppins Bold"/>
+              <a:sym typeface="Poppins Bold"/>
+            </a:endParaRPr>
+          </a:p>
+          <a:p>
+            <a:pPr marL="0" lvl="0" indent="0" algn="l">
               <a:lnSpc>
                 <a:spcPts val="2247"/>
               </a:lnSpc>
@@ -11644,17 +12617,26 @@
                 <a:spcPct val="0"/>
               </a:spcBef>
             </a:pPr>
-          </a:p>
-        </p:txBody>
-      </p:sp>
-      <p:sp>
-        <p:nvSpPr>
-          <p:cNvPr name="TextBox 14" id="14"/>
-          <p:cNvSpPr txBox="true"/>
+            <a:endParaRPr lang="en-US" sz="2000" b="1" spc="196">
+              <a:solidFill>
+                <a:srgbClr val="344F51"/>
+              </a:solidFill>
+              <a:latin typeface="Poppins Bold"/>
+              <a:ea typeface="Poppins Bold"/>
+              <a:cs typeface="Poppins Bold"/>
+              <a:sym typeface="Poppins Bold"/>
+            </a:endParaRPr>
+          </a:p>
+        </p:txBody>
+      </p:sp>
+      <p:sp>
+        <p:nvSpPr>
+          <p:cNvPr id="14" name="TextBox 14"/>
+          <p:cNvSpPr txBox="1"/>
           <p:nvPr/>
         </p:nvSpPr>
         <p:spPr>
-          <a:xfrm rot="0">
+          <a:xfrm>
             <a:off x="9430113" y="5310623"/>
             <a:ext cx="3336395" cy="3178302"/>
           </a:xfrm>
@@ -11663,7 +12645,7 @@
           </a:prstGeom>
         </p:spPr>
         <p:txBody>
-          <a:bodyPr anchor="t" rtlCol="false" tIns="0" lIns="0" bIns="0" rIns="0">
+          <a:bodyPr lIns="0" tIns="0" rIns="0" bIns="0" rtlCol="0" anchor="t">
             <a:spAutoFit/>
           </a:bodyPr>
           <a:lstStyle/>
@@ -11674,7 +12656,7 @@
               </a:lnSpc>
             </a:pPr>
             <a:r>
-              <a:rPr lang="en-US" sz="2000" spc="196" b="true">
+              <a:rPr lang="en-US" sz="2000" b="1" spc="196">
                 <a:solidFill>
                   <a:srgbClr val="344F51"/>
                 </a:solidFill>
@@ -11692,6 +12674,15 @@
                 <a:spcPts val="2207"/>
               </a:lnSpc>
             </a:pPr>
+            <a:endParaRPr lang="en-US" sz="2000" b="1" spc="196">
+              <a:solidFill>
+                <a:srgbClr val="344F51"/>
+              </a:solidFill>
+              <a:latin typeface="Poppins Bold"/>
+              <a:ea typeface="Poppins Bold"/>
+              <a:cs typeface="Poppins Bold"/>
+              <a:sym typeface="Poppins Bold"/>
+            </a:endParaRPr>
           </a:p>
           <a:p>
             <a:pPr algn="l">
@@ -11699,6 +12690,15 @@
                 <a:spcPts val="2207"/>
               </a:lnSpc>
             </a:pPr>
+            <a:endParaRPr lang="en-US" sz="2000" b="1" spc="196">
+              <a:solidFill>
+                <a:srgbClr val="344F51"/>
+              </a:solidFill>
+              <a:latin typeface="Poppins Bold"/>
+              <a:ea typeface="Poppins Bold"/>
+              <a:cs typeface="Poppins Bold"/>
+              <a:sym typeface="Poppins Bold"/>
+            </a:endParaRPr>
           </a:p>
           <a:p>
             <a:pPr algn="l">
@@ -11706,9 +12706,18 @@
                 <a:spcPts val="2207"/>
               </a:lnSpc>
             </a:pPr>
-          </a:p>
-          <a:p>
-            <a:pPr algn="l" marL="0" indent="0" lvl="0">
+            <a:endParaRPr lang="en-US" sz="2000" b="1" spc="196">
+              <a:solidFill>
+                <a:srgbClr val="344F51"/>
+              </a:solidFill>
+              <a:latin typeface="Poppins Bold"/>
+              <a:ea typeface="Poppins Bold"/>
+              <a:cs typeface="Poppins Bold"/>
+              <a:sym typeface="Poppins Bold"/>
+            </a:endParaRPr>
+          </a:p>
+          <a:p>
+            <a:pPr marL="0" lvl="0" indent="0" algn="l">
               <a:lnSpc>
                 <a:spcPts val="2207"/>
               </a:lnSpc>
@@ -11716,6 +12725,15 @@
                 <a:spcPct val="0"/>
               </a:spcBef>
             </a:pPr>
+            <a:endParaRPr lang="en-US" sz="2000" b="1" spc="196">
+              <a:solidFill>
+                <a:srgbClr val="344F51"/>
+              </a:solidFill>
+              <a:latin typeface="Poppins Bold"/>
+              <a:ea typeface="Poppins Bold"/>
+              <a:cs typeface="Poppins Bold"/>
+              <a:sym typeface="Poppins Bold"/>
+            </a:endParaRPr>
           </a:p>
         </p:txBody>
       </p:sp>
